--- a/Technology_Consultants_Who_to_Send_My_Way.pptx
+++ b/Technology_Consultants_Who_to_Send_My_Way.pptx
@@ -3111,17 +3111,19 @@
         </p:nvSpPr>
         <p:spPr>
           <a:xfrm>
-            <a:off x="731520" y="2011680"/>
-            <a:ext cx="109728" cy="2926080"/>
+            <a:off x="0" y="0"/>
+            <a:ext cx="12191695" cy="594360"/>
           </a:xfrm>
           <a:prstGeom prst="rect">
             <a:avLst/>
           </a:prstGeom>
           <a:solidFill>
-            <a:srgbClr val="D99B26"/>
+            <a:srgbClr val="121216"/>
           </a:solidFill>
-          <a:ln>
-            <a:noFill/>
+          <a:ln w="12700">
+            <a:solidFill>
+              <a:srgbClr val="26262C"/>
+            </a:solidFill>
           </a:ln>
         </p:spPr>
         <p:style>
@@ -3148,14 +3150,165 @@
       </p:sp>
       <p:sp>
         <p:nvSpPr>
-          <p:cNvPr id="3" name="TextBox 2"/>
+          <p:cNvPr id="3" name="Rounded Rectangle 2"/>
+          <p:cNvSpPr/>
+          <p:nvPr/>
+        </p:nvSpPr>
+        <p:spPr>
+          <a:xfrm>
+            <a:off x="731520" y="137160"/>
+            <a:ext cx="320040" cy="320040"/>
+          </a:xfrm>
+          <a:prstGeom prst="roundRect">
+            <a:avLst/>
+          </a:prstGeom>
+          <a:solidFill>
+            <a:srgbClr val="2B59D9"/>
+          </a:solidFill>
+          <a:ln>
+            <a:noFill/>
+          </a:ln>
+        </p:spPr>
+        <p:style>
+          <a:lnRef idx="1">
+            <a:schemeClr val="accent1"/>
+          </a:lnRef>
+          <a:fillRef idx="3">
+            <a:schemeClr val="accent1"/>
+          </a:fillRef>
+          <a:effectRef idx="2">
+            <a:schemeClr val="accent1"/>
+          </a:effectRef>
+          <a:fontRef idx="minor">
+            <a:schemeClr val="lt1"/>
+          </a:fontRef>
+        </p:style>
+        <p:txBody>
+          <a:bodyPr rtlCol="0" anchor="ctr"/>
+          <a:lstStyle/>
+          <a:p>
+            <a:pPr algn="ctr"/>
+          </a:p>
+        </p:txBody>
+      </p:sp>
+      <p:sp>
+        <p:nvSpPr>
+          <p:cNvPr id="4" name="TextBox 3"/>
           <p:cNvSpPr txBox="1"/>
           <p:nvPr/>
         </p:nvSpPr>
         <p:spPr>
           <a:xfrm>
-            <a:off x="1097280" y="1920240"/>
-            <a:ext cx="10058400" cy="3200400"/>
+            <a:off x="731520" y="128016"/>
+            <a:ext cx="320040" cy="320040"/>
+          </a:xfrm>
+          <a:prstGeom prst="rect">
+            <a:avLst/>
+          </a:prstGeom>
+          <a:noFill/>
+        </p:spPr>
+        <p:txBody>
+          <a:bodyPr wrap="none" lIns="0" tIns="0" rIns="0" bIns="0">
+            <a:spAutoFit/>
+          </a:bodyPr>
+          <a:lstStyle/>
+          <a:p>
+            <a:pPr>
+              <a:defRPr sz="1400" b="1">
+                <a:solidFill>
+                  <a:srgbClr val="FFFFFF"/>
+                </a:solidFill>
+                <a:latin typeface="Courier New"/>
+              </a:defRPr>
+            </a:pPr>
+            <a:r>
+              <a:t>›_</a:t>
+            </a:r>
+          </a:p>
+        </p:txBody>
+      </p:sp>
+      <p:sp>
+        <p:nvSpPr>
+          <p:cNvPr id="5" name="TextBox 4"/>
+          <p:cNvSpPr txBox="1"/>
+          <p:nvPr/>
+        </p:nvSpPr>
+        <p:spPr>
+          <a:xfrm>
+            <a:off x="1143000" y="146304"/>
+            <a:ext cx="4114800" cy="320040"/>
+          </a:xfrm>
+          <a:prstGeom prst="rect">
+            <a:avLst/>
+          </a:prstGeom>
+          <a:noFill/>
+        </p:spPr>
+        <p:txBody>
+          <a:bodyPr wrap="none" lIns="0" tIns="0" rIns="0" bIns="0">
+            <a:spAutoFit/>
+          </a:bodyPr>
+          <a:lstStyle/>
+          <a:p>
+            <a:pPr>
+              <a:defRPr sz="1300" b="1">
+                <a:solidFill>
+                  <a:srgbClr val="FFFFFF"/>
+                </a:solidFill>
+                <a:latin typeface="Helvetica"/>
+              </a:defRPr>
+            </a:pPr>
+            <a:r>
+              <a:t>TECHNOLOGY CONSULTANTS</a:t>
+            </a:r>
+          </a:p>
+        </p:txBody>
+      </p:sp>
+      <p:sp>
+        <p:nvSpPr>
+          <p:cNvPr id="6" name="TextBox 5"/>
+          <p:cNvSpPr txBox="1"/>
+          <p:nvPr/>
+        </p:nvSpPr>
+        <p:spPr>
+          <a:xfrm>
+            <a:off x="6858000" y="164592"/>
+            <a:ext cx="4572000" cy="320040"/>
+          </a:xfrm>
+          <a:prstGeom prst="rect">
+            <a:avLst/>
+          </a:prstGeom>
+          <a:noFill/>
+        </p:spPr>
+        <p:txBody>
+          <a:bodyPr wrap="none" lIns="0" tIns="0" rIns="0" bIns="0">
+            <a:spAutoFit/>
+          </a:bodyPr>
+          <a:lstStyle/>
+          <a:p>
+            <a:pPr algn="r">
+              <a:defRPr sz="1100">
+                <a:solidFill>
+                  <a:srgbClr val="D99B26"/>
+                </a:solidFill>
+                <a:latin typeface="Courier New"/>
+              </a:defRPr>
+            </a:pPr>
+            <a:r>
+              <a:t>REFERRAL GUIDE</a:t>
+            </a:r>
+          </a:p>
+        </p:txBody>
+      </p:sp>
+      <p:sp>
+        <p:nvSpPr>
+          <p:cNvPr id="7" name="TextBox 6"/>
+          <p:cNvSpPr txBox="1"/>
+          <p:nvPr/>
+        </p:nvSpPr>
+        <p:spPr>
+          <a:xfrm>
+            <a:off x="731520" y="1371600"/>
+            <a:ext cx="5943600" cy="4389120"/>
           </a:xfrm>
           <a:prstGeom prst="rect">
             <a:avLst/>
@@ -3169,28 +3322,30 @@
           <a:lstStyle/>
           <a:p>
             <a:pPr>
-              <a:defRPr sz="1400" b="1">
+              <a:spcAft>
+                <a:spcPts val="1200"/>
+              </a:spcAft>
+              <a:defRPr sz="1100" b="1">
                 <a:solidFill>
                   <a:srgbClr val="D99B26"/>
                 </a:solidFill>
-              </a:defRPr>
-            </a:pPr>
-            <a:r>
-              <a:t>TECHNOLOGY CONSULTANTS</a:t>
-            </a:r>
-          </a:p>
-          <a:p>
-            <a:pPr>
-              <a:spcBef>
-                <a:spcPts val="1000"/>
-              </a:spcBef>
+                <a:latin typeface="Courier New"/>
+              </a:defRPr>
+            </a:pPr>
+            <a:r>
+              <a:t>› SYSTEM ARCHITECTURE &amp; INTEGRATION</a:t>
+            </a:r>
+          </a:p>
+          <a:p>
+            <a:pPr>
               <a:spcAft>
-                <a:spcPts val="1500"/>
+                <a:spcPts val="1400"/>
               </a:spcAft>
-              <a:defRPr sz="4400" b="1">
+              <a:defRPr sz="4200" b="1">
                 <a:solidFill>
                   <a:srgbClr val="FFFFFF"/>
                 </a:solidFill>
+                <a:latin typeface="Helvetica"/>
               </a:defRPr>
             </a:pPr>
             <a:r>
@@ -3199,10 +3354,14 @@
           </a:p>
           <a:p>
             <a:pPr>
-              <a:defRPr sz="2000">
-                <a:solidFill>
-                  <a:srgbClr val="B4B4BE"/>
-                </a:solidFill>
+              <a:spcAft>
+                <a:spcPts val="2800"/>
+              </a:spcAft>
+              <a:defRPr sz="1800">
+                <a:solidFill>
+                  <a:srgbClr val="B4B9C3"/>
+                </a:solidFill>
+                <a:latin typeface="Helvetica"/>
               </a:defRPr>
             </a:pPr>
             <a:r>
@@ -3211,17 +3370,531 @@
           </a:p>
           <a:p>
             <a:pPr>
-              <a:spcBef>
-                <a:spcPts val="3000"/>
-              </a:spcBef>
+              <a:spcAft>
+                <a:spcPts val="400"/>
+              </a:spcAft>
+              <a:defRPr sz="1000" b="1">
+                <a:solidFill>
+                  <a:srgbClr val="2B59D9"/>
+                </a:solidFill>
+                <a:latin typeface="Courier New"/>
+              </a:defRPr>
+            </a:pPr>
+            <a:r>
+              <a:t>PRACTICE LEAD:</a:t>
+            </a:r>
+          </a:p>
+          <a:p>
+            <a:pPr>
+              <a:defRPr sz="1800" b="1">
+                <a:solidFill>
+                  <a:srgbClr val="FFFFFF"/>
+                </a:solidFill>
+                <a:latin typeface="Helvetica"/>
+              </a:defRPr>
+            </a:pPr>
+            <a:r>
+              <a:t>Roberto Guido</a:t>
+            </a:r>
+          </a:p>
+          <a:p>
+            <a:pPr>
               <a:defRPr sz="1300">
                 <a:solidFill>
-                  <a:srgbClr val="FFFFFF"/>
-                </a:solidFill>
-              </a:defRPr>
-            </a:pPr>
-            <a:r>
-              <a:t>Roberto Guido  |  Founder &amp; Principal Engineer  |  UC San Diego EE · NYU Stern MBA</a:t>
+                  <a:srgbClr val="D99B26"/>
+                </a:solidFill>
+                <a:latin typeface="Helvetica"/>
+              </a:defRPr>
+            </a:pPr>
+            <a:r>
+              <a:t>BS Electrical Engineering (UC San Diego) · MBA (NYU Stern)</a:t>
+            </a:r>
+          </a:p>
+        </p:txBody>
+      </p:sp>
+      <p:sp>
+        <p:nvSpPr>
+          <p:cNvPr id="8" name="Rounded Rectangle 7"/>
+          <p:cNvSpPr/>
+          <p:nvPr/>
+        </p:nvSpPr>
+        <p:spPr>
+          <a:xfrm>
+            <a:off x="6858000" y="1463040"/>
+            <a:ext cx="4572000" cy="4114800"/>
+          </a:xfrm>
+          <a:prstGeom prst="roundRect">
+            <a:avLst/>
+          </a:prstGeom>
+          <a:solidFill>
+            <a:srgbClr val="121216"/>
+          </a:solidFill>
+          <a:ln w="12700">
+            <a:solidFill>
+              <a:srgbClr val="26262C"/>
+            </a:solidFill>
+          </a:ln>
+        </p:spPr>
+        <p:style>
+          <a:lnRef idx="1">
+            <a:schemeClr val="accent1"/>
+          </a:lnRef>
+          <a:fillRef idx="3">
+            <a:schemeClr val="accent1"/>
+          </a:fillRef>
+          <a:effectRef idx="2">
+            <a:schemeClr val="accent1"/>
+          </a:effectRef>
+          <a:fontRef idx="minor">
+            <a:schemeClr val="lt1"/>
+          </a:fontRef>
+        </p:style>
+        <p:txBody>
+          <a:bodyPr rtlCol="0" anchor="ctr"/>
+          <a:lstStyle/>
+          <a:p>
+            <a:pPr algn="ctr"/>
+          </a:p>
+        </p:txBody>
+      </p:sp>
+      <p:sp>
+        <p:nvSpPr>
+          <p:cNvPr id="9" name="Rectangle 8"/>
+          <p:cNvSpPr/>
+          <p:nvPr/>
+        </p:nvSpPr>
+        <p:spPr>
+          <a:xfrm>
+            <a:off x="6858000" y="1463040"/>
+            <a:ext cx="4572000" cy="365760"/>
+          </a:xfrm>
+          <a:prstGeom prst="rect">
+            <a:avLst/>
+          </a:prstGeom>
+          <a:solidFill>
+            <a:srgbClr val="1A1A20"/>
+          </a:solidFill>
+          <a:ln>
+            <a:noFill/>
+          </a:ln>
+        </p:spPr>
+        <p:style>
+          <a:lnRef idx="1">
+            <a:schemeClr val="accent1"/>
+          </a:lnRef>
+          <a:fillRef idx="3">
+            <a:schemeClr val="accent1"/>
+          </a:fillRef>
+          <a:effectRef idx="2">
+            <a:schemeClr val="accent1"/>
+          </a:effectRef>
+          <a:fontRef idx="minor">
+            <a:schemeClr val="lt1"/>
+          </a:fontRef>
+        </p:style>
+        <p:txBody>
+          <a:bodyPr rtlCol="0" anchor="ctr"/>
+          <a:lstStyle/>
+          <a:p>
+            <a:pPr algn="ctr"/>
+          </a:p>
+        </p:txBody>
+      </p:sp>
+      <p:sp>
+        <p:nvSpPr>
+          <p:cNvPr id="10" name="Oval 9"/>
+          <p:cNvSpPr/>
+          <p:nvPr/>
+        </p:nvSpPr>
+        <p:spPr>
+          <a:xfrm>
+            <a:off x="6995160" y="1572768"/>
+            <a:ext cx="128016" cy="128016"/>
+          </a:xfrm>
+          <a:prstGeom prst="ellipse">
+            <a:avLst/>
+          </a:prstGeom>
+          <a:solidFill>
+            <a:srgbClr val="EF4444"/>
+          </a:solidFill>
+          <a:ln>
+            <a:noFill/>
+          </a:ln>
+        </p:spPr>
+        <p:style>
+          <a:lnRef idx="1">
+            <a:schemeClr val="accent1"/>
+          </a:lnRef>
+          <a:fillRef idx="3">
+            <a:schemeClr val="accent1"/>
+          </a:fillRef>
+          <a:effectRef idx="2">
+            <a:schemeClr val="accent1"/>
+          </a:effectRef>
+          <a:fontRef idx="minor">
+            <a:schemeClr val="lt1"/>
+          </a:fontRef>
+        </p:style>
+        <p:txBody>
+          <a:bodyPr rtlCol="0" anchor="ctr"/>
+          <a:lstStyle/>
+          <a:p>
+            <a:pPr algn="ctr"/>
+          </a:p>
+        </p:txBody>
+      </p:sp>
+      <p:sp>
+        <p:nvSpPr>
+          <p:cNvPr id="11" name="Oval 10"/>
+          <p:cNvSpPr/>
+          <p:nvPr/>
+        </p:nvSpPr>
+        <p:spPr>
+          <a:xfrm>
+            <a:off x="7178040" y="1572768"/>
+            <a:ext cx="128016" cy="128016"/>
+          </a:xfrm>
+          <a:prstGeom prst="ellipse">
+            <a:avLst/>
+          </a:prstGeom>
+          <a:solidFill>
+            <a:srgbClr val="F59E0B"/>
+          </a:solidFill>
+          <a:ln>
+            <a:noFill/>
+          </a:ln>
+        </p:spPr>
+        <p:style>
+          <a:lnRef idx="1">
+            <a:schemeClr val="accent1"/>
+          </a:lnRef>
+          <a:fillRef idx="3">
+            <a:schemeClr val="accent1"/>
+          </a:fillRef>
+          <a:effectRef idx="2">
+            <a:schemeClr val="accent1"/>
+          </a:effectRef>
+          <a:fontRef idx="minor">
+            <a:schemeClr val="lt1"/>
+          </a:fontRef>
+        </p:style>
+        <p:txBody>
+          <a:bodyPr rtlCol="0" anchor="ctr"/>
+          <a:lstStyle/>
+          <a:p>
+            <a:pPr algn="ctr"/>
+          </a:p>
+        </p:txBody>
+      </p:sp>
+      <p:sp>
+        <p:nvSpPr>
+          <p:cNvPr id="12" name="Oval 11"/>
+          <p:cNvSpPr/>
+          <p:nvPr/>
+        </p:nvSpPr>
+        <p:spPr>
+          <a:xfrm>
+            <a:off x="7360920" y="1572768"/>
+            <a:ext cx="128016" cy="128016"/>
+          </a:xfrm>
+          <a:prstGeom prst="ellipse">
+            <a:avLst/>
+          </a:prstGeom>
+          <a:solidFill>
+            <a:srgbClr val="10B981"/>
+          </a:solidFill>
+          <a:ln>
+            <a:noFill/>
+          </a:ln>
+        </p:spPr>
+        <p:style>
+          <a:lnRef idx="1">
+            <a:schemeClr val="accent1"/>
+          </a:lnRef>
+          <a:fillRef idx="3">
+            <a:schemeClr val="accent1"/>
+          </a:fillRef>
+          <a:effectRef idx="2">
+            <a:schemeClr val="accent1"/>
+          </a:effectRef>
+          <a:fontRef idx="minor">
+            <a:schemeClr val="lt1"/>
+          </a:fontRef>
+        </p:style>
+        <p:txBody>
+          <a:bodyPr rtlCol="0" anchor="ctr"/>
+          <a:lstStyle/>
+          <a:p>
+            <a:pPr algn="ctr"/>
+          </a:p>
+        </p:txBody>
+      </p:sp>
+      <p:sp>
+        <p:nvSpPr>
+          <p:cNvPr id="13" name="TextBox 12"/>
+          <p:cNvSpPr txBox="1"/>
+          <p:nvPr/>
+        </p:nvSpPr>
+        <p:spPr>
+          <a:xfrm>
+            <a:off x="7589520" y="1536192"/>
+            <a:ext cx="3657600" cy="274320"/>
+          </a:xfrm>
+          <a:prstGeom prst="rect">
+            <a:avLst/>
+          </a:prstGeom>
+          <a:noFill/>
+        </p:spPr>
+        <p:txBody>
+          <a:bodyPr wrap="none" lIns="0" tIns="0" rIns="0" bIns="0">
+            <a:spAutoFit/>
+          </a:bodyPr>
+          <a:lstStyle/>
+          <a:p>
+            <a:pPr>
+              <a:defRPr sz="1000">
+                <a:solidFill>
+                  <a:srgbClr val="9CA3AF"/>
+                </a:solidFill>
+                <a:latin typeface="Courier New"/>
+              </a:defRPr>
+            </a:pPr>
+            <a:r>
+              <a:t>bash — system_status.log</a:t>
+            </a:r>
+          </a:p>
+        </p:txBody>
+      </p:sp>
+      <p:sp>
+        <p:nvSpPr>
+          <p:cNvPr id="14" name="TextBox 13"/>
+          <p:cNvSpPr txBox="1"/>
+          <p:nvPr/>
+        </p:nvSpPr>
+        <p:spPr>
+          <a:xfrm>
+            <a:off x="7132320" y="1965960"/>
+            <a:ext cx="4023360" cy="3474720"/>
+          </a:xfrm>
+          <a:prstGeom prst="rect">
+            <a:avLst/>
+          </a:prstGeom>
+          <a:noFill/>
+        </p:spPr>
+        <p:txBody>
+          <a:bodyPr wrap="square">
+            <a:spAutoFit/>
+          </a:bodyPr>
+          <a:lstStyle/>
+          <a:p>
+            <a:pPr>
+              <a:spcAft>
+                <a:spcPts val="600"/>
+              </a:spcAft>
+              <a:defRPr sz="1100">
+                <a:solidFill>
+                  <a:srgbClr val="E5E7EB"/>
+                </a:solidFill>
+                <a:latin typeface="Courier New"/>
+              </a:defRPr>
+            </a:pPr>
+            <a:r>
+              <a:t>$ agy init --practice technology-consultants</a:t>
+            </a:r>
+          </a:p>
+          <a:p>
+            <a:pPr>
+              <a:spcAft>
+                <a:spcPts val="600"/>
+              </a:spcAft>
+              <a:defRPr sz="1100">
+                <a:solidFill>
+                  <a:srgbClr val="D99B26"/>
+                </a:solidFill>
+                <a:latin typeface="Courier New"/>
+              </a:defRPr>
+            </a:pPr>
+            <a:r>
+              <a:t>[INFO] Initializing practice context...</a:t>
+            </a:r>
+          </a:p>
+          <a:p>
+            <a:pPr>
+              <a:spcAft>
+                <a:spcPts val="600"/>
+              </a:spcAft>
+              <a:defRPr sz="1100">
+                <a:solidFill>
+                  <a:srgbClr val="D99B26"/>
+                </a:solidFill>
+                <a:latin typeface="Courier New"/>
+              </a:defRPr>
+            </a:pPr>
+            <a:r>
+              <a:t>[INFO] Founder: Roberto Guido (UC San Diego / NYU Stern)</a:t>
+            </a:r>
+          </a:p>
+          <a:p>
+            <a:pPr>
+              <a:spcAft>
+                <a:spcPts val="600"/>
+              </a:spcAft>
+              <a:defRPr sz="1100">
+                <a:solidFill>
+                  <a:srgbClr val="D99B26"/>
+                </a:solidFill>
+                <a:latin typeface="Courier New"/>
+              </a:defRPr>
+            </a:pPr>
+            <a:r>
+              <a:t>[INFO] Core Focus: React UI + Workday Finance + Applied AI</a:t>
+            </a:r>
+          </a:p>
+          <a:p>
+            <a:pPr>
+              <a:spcAft>
+                <a:spcPts val="600"/>
+              </a:spcAft>
+              <a:defRPr sz="1100">
+                <a:solidFill>
+                  <a:srgbClr val="35B9CC"/>
+                </a:solidFill>
+                <a:latin typeface="Courier New"/>
+              </a:defRPr>
+            </a:pPr>
+            <a:r>
+              <a:t>[RUN] Deployment check: HITL Safety Gates ... OK</a:t>
+            </a:r>
+          </a:p>
+          <a:p>
+            <a:pPr>
+              <a:spcAft>
+                <a:spcPts val="600"/>
+              </a:spcAft>
+              <a:defRPr sz="1100">
+                <a:solidFill>
+                  <a:srgbClr val="35B9CC"/>
+                </a:solidFill>
+                <a:latin typeface="Courier New"/>
+              </a:defRPr>
+            </a:pPr>
+            <a:r>
+              <a:t>[SUCCESS] Practice active. Ready for partner referrals.</a:t>
+            </a:r>
+          </a:p>
+        </p:txBody>
+      </p:sp>
+      <p:sp>
+        <p:nvSpPr>
+          <p:cNvPr id="15" name="Rectangle 14"/>
+          <p:cNvSpPr/>
+          <p:nvPr/>
+        </p:nvSpPr>
+        <p:spPr>
+          <a:xfrm>
+            <a:off x="731520" y="6400800"/>
+            <a:ext cx="10728655" cy="12700"/>
+          </a:xfrm>
+          <a:prstGeom prst="rect">
+            <a:avLst/>
+          </a:prstGeom>
+          <a:solidFill>
+            <a:srgbClr val="C9C3B2"/>
+          </a:solidFill>
+          <a:ln>
+            <a:noFill/>
+          </a:ln>
+        </p:spPr>
+        <p:style>
+          <a:lnRef idx="1">
+            <a:schemeClr val="accent1"/>
+          </a:lnRef>
+          <a:fillRef idx="3">
+            <a:schemeClr val="accent1"/>
+          </a:fillRef>
+          <a:effectRef idx="2">
+            <a:schemeClr val="accent1"/>
+          </a:effectRef>
+          <a:fontRef idx="minor">
+            <a:schemeClr val="lt1"/>
+          </a:fontRef>
+        </p:style>
+        <p:txBody>
+          <a:bodyPr rtlCol="0" anchor="ctr"/>
+          <a:lstStyle/>
+          <a:p>
+            <a:pPr algn="ctr"/>
+          </a:p>
+        </p:txBody>
+      </p:sp>
+      <p:sp>
+        <p:nvSpPr>
+          <p:cNvPr id="16" name="TextBox 15"/>
+          <p:cNvSpPr txBox="1"/>
+          <p:nvPr/>
+        </p:nvSpPr>
+        <p:spPr>
+          <a:xfrm>
+            <a:off x="731520" y="6446520"/>
+            <a:ext cx="7315200" cy="320040"/>
+          </a:xfrm>
+          <a:prstGeom prst="rect">
+            <a:avLst/>
+          </a:prstGeom>
+          <a:noFill/>
+        </p:spPr>
+        <p:txBody>
+          <a:bodyPr wrap="none" lIns="0" tIns="0" rIns="0" bIns="0">
+            <a:spAutoFit/>
+          </a:bodyPr>
+          <a:lstStyle/>
+          <a:p>
+            <a:pPr>
+              <a:defRPr sz="1000">
+                <a:solidFill>
+                  <a:srgbClr val="5F5C52"/>
+                </a:solidFill>
+                <a:latin typeface="Courier New"/>
+              </a:defRPr>
+            </a:pPr>
+            <a:r>
+              <a:t>technologyconsultants.ventures  ·  San Diego · Tijuana</a:t>
+            </a:r>
+          </a:p>
+        </p:txBody>
+      </p:sp>
+      <p:sp>
+        <p:nvSpPr>
+          <p:cNvPr id="17" name="TextBox 16"/>
+          <p:cNvSpPr txBox="1"/>
+          <p:nvPr/>
+        </p:nvSpPr>
+        <p:spPr>
+          <a:xfrm>
+            <a:off x="9631375" y="6446520"/>
+            <a:ext cx="1828800" cy="320040"/>
+          </a:xfrm>
+          <a:prstGeom prst="rect">
+            <a:avLst/>
+          </a:prstGeom>
+          <a:noFill/>
+        </p:spPr>
+        <p:txBody>
+          <a:bodyPr wrap="none" lIns="0" tIns="0" rIns="0" bIns="0">
+            <a:spAutoFit/>
+          </a:bodyPr>
+          <a:lstStyle/>
+          <a:p>
+            <a:pPr algn="r">
+              <a:defRPr sz="1000">
+                <a:solidFill>
+                  <a:srgbClr val="5F5C52"/>
+                </a:solidFill>
+                <a:latin typeface="Courier New"/>
+              </a:defRPr>
+            </a:pPr>
+            <a:r>
+              <a:t>01 / 08</a:t>
             </a:r>
           </a:p>
         </p:txBody>
@@ -3254,14 +3927,102 @@
       <p:grpSpPr/>
       <p:sp>
         <p:nvSpPr>
-          <p:cNvPr id="2" name="TextBox 1"/>
+          <p:cNvPr id="2" name="Rectangle 1"/>
+          <p:cNvSpPr/>
+          <p:nvPr/>
+        </p:nvSpPr>
+        <p:spPr>
+          <a:xfrm>
+            <a:off x="0" y="0"/>
+            <a:ext cx="12191695" cy="594360"/>
+          </a:xfrm>
+          <a:prstGeom prst="rect">
+            <a:avLst/>
+          </a:prstGeom>
+          <a:solidFill>
+            <a:srgbClr val="121216"/>
+          </a:solidFill>
+          <a:ln w="12700">
+            <a:solidFill>
+              <a:srgbClr val="26262C"/>
+            </a:solidFill>
+          </a:ln>
+        </p:spPr>
+        <p:style>
+          <a:lnRef idx="1">
+            <a:schemeClr val="accent1"/>
+          </a:lnRef>
+          <a:fillRef idx="3">
+            <a:schemeClr val="accent1"/>
+          </a:fillRef>
+          <a:effectRef idx="2">
+            <a:schemeClr val="accent1"/>
+          </a:effectRef>
+          <a:fontRef idx="minor">
+            <a:schemeClr val="lt1"/>
+          </a:fontRef>
+        </p:style>
+        <p:txBody>
+          <a:bodyPr rtlCol="0" anchor="ctr"/>
+          <a:lstStyle/>
+          <a:p>
+            <a:pPr algn="ctr"/>
+          </a:p>
+        </p:txBody>
+      </p:sp>
+      <p:sp>
+        <p:nvSpPr>
+          <p:cNvPr id="3" name="Rounded Rectangle 2"/>
+          <p:cNvSpPr/>
+          <p:nvPr/>
+        </p:nvSpPr>
+        <p:spPr>
+          <a:xfrm>
+            <a:off x="731520" y="137160"/>
+            <a:ext cx="320040" cy="320040"/>
+          </a:xfrm>
+          <a:prstGeom prst="roundRect">
+            <a:avLst/>
+          </a:prstGeom>
+          <a:solidFill>
+            <a:srgbClr val="2B59D9"/>
+          </a:solidFill>
+          <a:ln>
+            <a:noFill/>
+          </a:ln>
+        </p:spPr>
+        <p:style>
+          <a:lnRef idx="1">
+            <a:schemeClr val="accent1"/>
+          </a:lnRef>
+          <a:fillRef idx="3">
+            <a:schemeClr val="accent1"/>
+          </a:fillRef>
+          <a:effectRef idx="2">
+            <a:schemeClr val="accent1"/>
+          </a:effectRef>
+          <a:fontRef idx="minor">
+            <a:schemeClr val="lt1"/>
+          </a:fontRef>
+        </p:style>
+        <p:txBody>
+          <a:bodyPr rtlCol="0" anchor="ctr"/>
+          <a:lstStyle/>
+          <a:p>
+            <a:pPr algn="ctr"/>
+          </a:p>
+        </p:txBody>
+      </p:sp>
+      <p:sp>
+        <p:nvSpPr>
+          <p:cNvPr id="4" name="TextBox 3"/>
           <p:cNvSpPr txBox="1"/>
           <p:nvPr/>
         </p:nvSpPr>
         <p:spPr>
           <a:xfrm>
-            <a:off x="731520" y="457200"/>
-            <a:ext cx="10728655" cy="365760"/>
+            <a:off x="731520" y="128016"/>
+            <a:ext cx="320040" cy="320040"/>
           </a:xfrm>
           <a:prstGeom prst="rect">
             <a:avLst/>
@@ -3269,34 +4030,35 @@
           <a:noFill/>
         </p:spPr>
         <p:txBody>
-          <a:bodyPr wrap="square" lIns="0" tIns="0" rIns="0" bIns="0">
+          <a:bodyPr wrap="none" lIns="0" tIns="0" rIns="0" bIns="0">
             <a:spAutoFit/>
           </a:bodyPr>
           <a:lstStyle/>
           <a:p>
             <a:pPr>
-              <a:defRPr sz="1100" b="1">
-                <a:solidFill>
-                  <a:srgbClr val="2B59D9"/>
-                </a:solidFill>
-              </a:defRPr>
-            </a:pPr>
-            <a:r>
-              <a:t>CORE PRACTICE OVERVIEW</a:t>
-            </a:r>
-          </a:p>
-        </p:txBody>
-      </p:sp>
-      <p:sp>
-        <p:nvSpPr>
-          <p:cNvPr id="3" name="TextBox 2"/>
+              <a:defRPr sz="1400" b="1">
+                <a:solidFill>
+                  <a:srgbClr val="FFFFFF"/>
+                </a:solidFill>
+                <a:latin typeface="Courier New"/>
+              </a:defRPr>
+            </a:pPr>
+            <a:r>
+              <a:t>›_</a:t>
+            </a:r>
+          </a:p>
+        </p:txBody>
+      </p:sp>
+      <p:sp>
+        <p:nvSpPr>
+          <p:cNvPr id="5" name="TextBox 4"/>
           <p:cNvSpPr txBox="1"/>
           <p:nvPr/>
         </p:nvSpPr>
         <p:spPr>
           <a:xfrm>
-            <a:off x="731520" y="777240"/>
-            <a:ext cx="10728655" cy="731520"/>
+            <a:off x="1143000" y="146304"/>
+            <a:ext cx="4114800" cy="320040"/>
           </a:xfrm>
           <a:prstGeom prst="rect">
             <a:avLst/>
@@ -3304,34 +4066,188 @@
           <a:noFill/>
         </p:spPr>
         <p:txBody>
-          <a:bodyPr wrap="square" lIns="0" tIns="0" rIns="0" bIns="0">
+          <a:bodyPr wrap="none" lIns="0" tIns="0" rIns="0" bIns="0">
             <a:spAutoFit/>
           </a:bodyPr>
           <a:lstStyle/>
           <a:p>
             <a:pPr>
-              <a:defRPr sz="2600" b="1">
+              <a:defRPr sz="1300" b="1">
+                <a:solidFill>
+                  <a:srgbClr val="FFFFFF"/>
+                </a:solidFill>
+                <a:latin typeface="Helvetica"/>
+              </a:defRPr>
+            </a:pPr>
+            <a:r>
+              <a:t>TECHNOLOGY CONSULTANTS</a:t>
+            </a:r>
+          </a:p>
+        </p:txBody>
+      </p:sp>
+      <p:sp>
+        <p:nvSpPr>
+          <p:cNvPr id="6" name="TextBox 5"/>
+          <p:cNvSpPr txBox="1"/>
+          <p:nvPr/>
+        </p:nvSpPr>
+        <p:spPr>
+          <a:xfrm>
+            <a:off x="6858000" y="164592"/>
+            <a:ext cx="4572000" cy="320040"/>
+          </a:xfrm>
+          <a:prstGeom prst="rect">
+            <a:avLst/>
+          </a:prstGeom>
+          <a:noFill/>
+        </p:spPr>
+        <p:txBody>
+          <a:bodyPr wrap="none" lIns="0" tIns="0" rIns="0" bIns="0">
+            <a:spAutoFit/>
+          </a:bodyPr>
+          <a:lstStyle/>
+          <a:p>
+            <a:pPr algn="r">
+              <a:defRPr sz="1100">
+                <a:solidFill>
+                  <a:srgbClr val="D99B26"/>
+                </a:solidFill>
+                <a:latin typeface="Courier New"/>
+              </a:defRPr>
+            </a:pPr>
+            <a:r>
+              <a:t>01 / OVERVIEW</a:t>
+            </a:r>
+          </a:p>
+        </p:txBody>
+      </p:sp>
+      <p:sp>
+        <p:nvSpPr>
+          <p:cNvPr id="7" name="Rounded Rectangle 6"/>
+          <p:cNvSpPr/>
+          <p:nvPr/>
+        </p:nvSpPr>
+        <p:spPr>
+          <a:xfrm>
+            <a:off x="731520" y="822960"/>
+            <a:ext cx="2770632" cy="292608"/>
+          </a:xfrm>
+          <a:prstGeom prst="roundRect">
+            <a:avLst/>
+          </a:prstGeom>
+          <a:solidFill>
+            <a:srgbClr val="EFE9D8"/>
+          </a:solidFill>
+          <a:ln w="12700">
+            <a:solidFill>
+              <a:srgbClr val="2B59D9"/>
+            </a:solidFill>
+          </a:ln>
+        </p:spPr>
+        <p:style>
+          <a:lnRef idx="1">
+            <a:schemeClr val="accent1"/>
+          </a:lnRef>
+          <a:fillRef idx="3">
+            <a:schemeClr val="accent1"/>
+          </a:fillRef>
+          <a:effectRef idx="2">
+            <a:schemeClr val="accent1"/>
+          </a:effectRef>
+          <a:fontRef idx="minor">
+            <a:schemeClr val="lt1"/>
+          </a:fontRef>
+        </p:style>
+        <p:txBody>
+          <a:bodyPr rtlCol="0" anchor="ctr"/>
+          <a:lstStyle/>
+          <a:p>
+            <a:pPr algn="ctr"/>
+          </a:p>
+        </p:txBody>
+      </p:sp>
+      <p:sp>
+        <p:nvSpPr>
+          <p:cNvPr id="8" name="TextBox 7"/>
+          <p:cNvSpPr txBox="1"/>
+          <p:nvPr/>
+        </p:nvSpPr>
+        <p:spPr>
+          <a:xfrm>
+            <a:off x="731520" y="859536"/>
+            <a:ext cx="2770632" cy="256032"/>
+          </a:xfrm>
+          <a:prstGeom prst="rect">
+            <a:avLst/>
+          </a:prstGeom>
+          <a:noFill/>
+        </p:spPr>
+        <p:txBody>
+          <a:bodyPr wrap="none" lIns="0" tIns="0" rIns="0" bIns="0">
+            <a:spAutoFit/>
+          </a:bodyPr>
+          <a:lstStyle/>
+          <a:p>
+            <a:pPr algn="ctr">
+              <a:defRPr sz="1000" b="1">
+                <a:solidFill>
+                  <a:srgbClr val="2B59D9"/>
+                </a:solidFill>
+                <a:latin typeface="Courier New"/>
+              </a:defRPr>
+            </a:pPr>
+            <a:r>
+              <a:t>CAPABILITIES &amp; SERVICES</a:t>
+            </a:r>
+          </a:p>
+        </p:txBody>
+      </p:sp>
+      <p:sp>
+        <p:nvSpPr>
+          <p:cNvPr id="9" name="TextBox 8"/>
+          <p:cNvSpPr txBox="1"/>
+          <p:nvPr/>
+        </p:nvSpPr>
+        <p:spPr>
+          <a:xfrm>
+            <a:off x="731520" y="1188720"/>
+            <a:ext cx="10728655" cy="548640"/>
+          </a:xfrm>
+          <a:prstGeom prst="rect">
+            <a:avLst/>
+          </a:prstGeom>
+          <a:noFill/>
+        </p:spPr>
+        <p:txBody>
+          <a:bodyPr wrap="none">
+            <a:spAutoFit/>
+          </a:bodyPr>
+          <a:lstStyle/>
+          <a:p>
+            <a:pPr>
+              <a:defRPr sz="2400" b="1">
                 <a:solidFill>
                   <a:srgbClr val="16161A"/>
                 </a:solidFill>
-              </a:defRPr>
-            </a:pPr>
-            <a:r>
-              <a:t>Bridging the Gap Between Engineering &amp; Business Outcomes</a:t>
-            </a:r>
-          </a:p>
-        </p:txBody>
-      </p:sp>
-      <p:sp>
-        <p:nvSpPr>
-          <p:cNvPr id="4" name="Rounded Rectangle 3"/>
+                <a:latin typeface="Helvetica"/>
+              </a:defRPr>
+            </a:pPr>
+            <a:r>
+              <a:t>Bridging Engineering Discipline with Business Outcomes</a:t>
+            </a:r>
+          </a:p>
+        </p:txBody>
+      </p:sp>
+      <p:sp>
+        <p:nvSpPr>
+          <p:cNvPr id="10" name="Rounded Rectangle 9"/>
           <p:cNvSpPr/>
           <p:nvPr/>
         </p:nvSpPr>
         <p:spPr>
           <a:xfrm>
-            <a:off x="731520" y="1828800"/>
-            <a:ext cx="3328416" cy="4114800"/>
+            <a:off x="731520" y="1920240"/>
+            <a:ext cx="3328416" cy="3931920"/>
           </a:xfrm>
           <a:prstGeom prst="roundRect">
             <a:avLst/>
@@ -3369,57 +4285,14 @@
       </p:sp>
       <p:sp>
         <p:nvSpPr>
-          <p:cNvPr id="5" name="Rectangle 4"/>
-          <p:cNvSpPr/>
-          <p:nvPr/>
-        </p:nvSpPr>
-        <p:spPr>
-          <a:xfrm>
-            <a:off x="731520" y="1828800"/>
-            <a:ext cx="3328416" cy="109728"/>
-          </a:xfrm>
-          <a:prstGeom prst="rect">
-            <a:avLst/>
-          </a:prstGeom>
-          <a:solidFill>
-            <a:srgbClr val="2B59D9"/>
-          </a:solidFill>
-          <a:ln>
-            <a:noFill/>
-          </a:ln>
-        </p:spPr>
-        <p:style>
-          <a:lnRef idx="1">
-            <a:schemeClr val="accent1"/>
-          </a:lnRef>
-          <a:fillRef idx="3">
-            <a:schemeClr val="accent1"/>
-          </a:fillRef>
-          <a:effectRef idx="2">
-            <a:schemeClr val="accent1"/>
-          </a:effectRef>
-          <a:fontRef idx="minor">
-            <a:schemeClr val="lt1"/>
-          </a:fontRef>
-        </p:style>
-        <p:txBody>
-          <a:bodyPr rtlCol="0" anchor="ctr"/>
-          <a:lstStyle/>
-          <a:p>
-            <a:pPr algn="ctr"/>
-          </a:p>
-        </p:txBody>
-      </p:sp>
-      <p:sp>
-        <p:nvSpPr>
-          <p:cNvPr id="6" name="TextBox 5"/>
+          <p:cNvPr id="11" name="TextBox 10"/>
           <p:cNvSpPr txBox="1"/>
           <p:nvPr/>
         </p:nvSpPr>
         <p:spPr>
           <a:xfrm>
             <a:off x="1005840" y="2194560"/>
-            <a:ext cx="2779776" cy="3566160"/>
+            <a:ext cx="2779776" cy="3474720"/>
           </a:xfrm>
           <a:prstGeom prst="rect">
             <a:avLst/>
@@ -3434,16 +4307,17 @@
           <a:p>
             <a:pPr>
               <a:spcAft>
-                <a:spcPts val="1000"/>
+                <a:spcPts val="1200"/>
               </a:spcAft>
-              <a:defRPr sz="2800" b="1">
-                <a:solidFill>
-                  <a:srgbClr val="2B59D9"/>
-                </a:solidFill>
-              </a:defRPr>
-            </a:pPr>
-            <a:r>
-              <a:t>01</a:t>
+              <a:defRPr sz="1200" b="1">
+                <a:solidFill>
+                  <a:srgbClr val="D99B26"/>
+                </a:solidFill>
+                <a:latin typeface="Courier New"/>
+              </a:defRPr>
+            </a:pPr>
+            <a:r>
+              <a:t>[ 01_UI ]</a:t>
             </a:r>
           </a:p>
           <a:p>
@@ -3451,10 +4325,11 @@
               <a:spcAft>
                 <a:spcPts val="1400"/>
               </a:spcAft>
-              <a:defRPr sz="2000" b="1">
+              <a:defRPr sz="1900" b="1">
                 <a:solidFill>
                   <a:srgbClr val="16161A"/>
                 </a:solidFill>
+                <a:latin typeface="Helvetica"/>
               </a:defRPr>
             </a:pPr>
             <a:r>
@@ -3467,24 +4342,25 @@
                 <a:solidFill>
                   <a:srgbClr val="454337"/>
                 </a:solidFill>
-              </a:defRPr>
-            </a:pPr>
-            <a:r>
-              <a:t>High-performance React web applications and intuitive software user experiences designed for rapid workflow execution.</a:t>
-            </a:r>
-          </a:p>
-        </p:txBody>
-      </p:sp>
-      <p:sp>
-        <p:nvSpPr>
-          <p:cNvPr id="7" name="Rounded Rectangle 6"/>
+                <a:latin typeface="Helvetica"/>
+              </a:defRPr>
+            </a:pPr>
+            <a:r>
+              <a:t>High-performance React web applications and intuitive user experiences designed for rapid workflow execution.</a:t>
+            </a:r>
+          </a:p>
+        </p:txBody>
+      </p:sp>
+      <p:sp>
+        <p:nvSpPr>
+          <p:cNvPr id="12" name="Rounded Rectangle 11"/>
           <p:cNvSpPr/>
           <p:nvPr/>
         </p:nvSpPr>
         <p:spPr>
           <a:xfrm>
-            <a:off x="4297680" y="1828800"/>
-            <a:ext cx="3328416" cy="4114800"/>
+            <a:off x="4297680" y="1920240"/>
+            <a:ext cx="3328416" cy="3931920"/>
           </a:xfrm>
           <a:prstGeom prst="roundRect">
             <a:avLst/>
@@ -3522,57 +4398,14 @@
       </p:sp>
       <p:sp>
         <p:nvSpPr>
-          <p:cNvPr id="8" name="Rectangle 7"/>
-          <p:cNvSpPr/>
-          <p:nvPr/>
-        </p:nvSpPr>
-        <p:spPr>
-          <a:xfrm>
-            <a:off x="4297680" y="1828800"/>
-            <a:ext cx="3328416" cy="109728"/>
-          </a:xfrm>
-          <a:prstGeom prst="rect">
-            <a:avLst/>
-          </a:prstGeom>
-          <a:solidFill>
-            <a:srgbClr val="2B59D9"/>
-          </a:solidFill>
-          <a:ln>
-            <a:noFill/>
-          </a:ln>
-        </p:spPr>
-        <p:style>
-          <a:lnRef idx="1">
-            <a:schemeClr val="accent1"/>
-          </a:lnRef>
-          <a:fillRef idx="3">
-            <a:schemeClr val="accent1"/>
-          </a:fillRef>
-          <a:effectRef idx="2">
-            <a:schemeClr val="accent1"/>
-          </a:effectRef>
-          <a:fontRef idx="minor">
-            <a:schemeClr val="lt1"/>
-          </a:fontRef>
-        </p:style>
-        <p:txBody>
-          <a:bodyPr rtlCol="0" anchor="ctr"/>
-          <a:lstStyle/>
-          <a:p>
-            <a:pPr algn="ctr"/>
-          </a:p>
-        </p:txBody>
-      </p:sp>
-      <p:sp>
-        <p:nvSpPr>
-          <p:cNvPr id="9" name="TextBox 8"/>
+          <p:cNvPr id="13" name="TextBox 12"/>
           <p:cNvSpPr txBox="1"/>
           <p:nvPr/>
         </p:nvSpPr>
         <p:spPr>
           <a:xfrm>
             <a:off x="4572000" y="2194560"/>
-            <a:ext cx="2779776" cy="3566160"/>
+            <a:ext cx="2779776" cy="3474720"/>
           </a:xfrm>
           <a:prstGeom prst="rect">
             <a:avLst/>
@@ -3587,16 +4420,17 @@
           <a:p>
             <a:pPr>
               <a:spcAft>
-                <a:spcPts val="1000"/>
+                <a:spcPts val="1200"/>
               </a:spcAft>
-              <a:defRPr sz="2800" b="1">
-                <a:solidFill>
-                  <a:srgbClr val="2B59D9"/>
-                </a:solidFill>
-              </a:defRPr>
-            </a:pPr>
-            <a:r>
-              <a:t>02</a:t>
+              <a:defRPr sz="1200" b="1">
+                <a:solidFill>
+                  <a:srgbClr val="D99B26"/>
+                </a:solidFill>
+                <a:latin typeface="Courier New"/>
+              </a:defRPr>
+            </a:pPr>
+            <a:r>
+              <a:t>[ 02_ERP ]</a:t>
             </a:r>
           </a:p>
           <a:p>
@@ -3604,10 +4438,11 @@
               <a:spcAft>
                 <a:spcPts val="1400"/>
               </a:spcAft>
-              <a:defRPr sz="2000" b="1">
+              <a:defRPr sz="1900" b="1">
                 <a:solidFill>
                   <a:srgbClr val="16161A"/>
                 </a:solidFill>
+                <a:latin typeface="Helvetica"/>
               </a:defRPr>
             </a:pPr>
             <a:r>
@@ -3620,6 +4455,7 @@
                 <a:solidFill>
                   <a:srgbClr val="454337"/>
                 </a:solidFill>
+                <a:latin typeface="Helvetica"/>
               </a:defRPr>
             </a:pPr>
             <a:r>
@@ -3630,14 +4466,14 @@
       </p:sp>
       <p:sp>
         <p:nvSpPr>
-          <p:cNvPr id="10" name="Rounded Rectangle 9"/>
+          <p:cNvPr id="14" name="Rounded Rectangle 13"/>
           <p:cNvSpPr/>
           <p:nvPr/>
         </p:nvSpPr>
         <p:spPr>
           <a:xfrm>
-            <a:off x="7863840" y="1828800"/>
-            <a:ext cx="3328416" cy="4114800"/>
+            <a:off x="7863840" y="1920240"/>
+            <a:ext cx="3328416" cy="3931920"/>
           </a:xfrm>
           <a:prstGeom prst="roundRect">
             <a:avLst/>
@@ -3675,20 +4511,88 @@
       </p:sp>
       <p:sp>
         <p:nvSpPr>
-          <p:cNvPr id="11" name="Rectangle 10"/>
+          <p:cNvPr id="15" name="TextBox 14"/>
+          <p:cNvSpPr txBox="1"/>
+          <p:nvPr/>
+        </p:nvSpPr>
+        <p:spPr>
+          <a:xfrm>
+            <a:off x="8138160" y="2194560"/>
+            <a:ext cx="2779776" cy="3474720"/>
+          </a:xfrm>
+          <a:prstGeom prst="rect">
+            <a:avLst/>
+          </a:prstGeom>
+          <a:noFill/>
+        </p:spPr>
+        <p:txBody>
+          <a:bodyPr wrap="square">
+            <a:spAutoFit/>
+          </a:bodyPr>
+          <a:lstStyle/>
+          <a:p>
+            <a:pPr>
+              <a:spcAft>
+                <a:spcPts val="1200"/>
+              </a:spcAft>
+              <a:defRPr sz="1200" b="1">
+                <a:solidFill>
+                  <a:srgbClr val="D99B26"/>
+                </a:solidFill>
+                <a:latin typeface="Courier New"/>
+              </a:defRPr>
+            </a:pPr>
+            <a:r>
+              <a:t>[ 03_MCP ]</a:t>
+            </a:r>
+          </a:p>
+          <a:p>
+            <a:pPr>
+              <a:spcAft>
+                <a:spcPts val="1400"/>
+              </a:spcAft>
+              <a:defRPr sz="1900" b="1">
+                <a:solidFill>
+                  <a:srgbClr val="16161A"/>
+                </a:solidFill>
+                <a:latin typeface="Helvetica"/>
+              </a:defRPr>
+            </a:pPr>
+            <a:r>
+              <a:t>Applied AI &amp; Automation</a:t>
+            </a:r>
+          </a:p>
+          <a:p>
+            <a:pPr>
+              <a:defRPr sz="1400">
+                <a:solidFill>
+                  <a:srgbClr val="454337"/>
+                </a:solidFill>
+                <a:latin typeface="Helvetica"/>
+              </a:defRPr>
+            </a:pPr>
+            <a:r>
+              <a:t>Custom Model Context Protocol (MCP) servers, LLM orchestration, and human-in-the-loop (HITL) AI agents.</a:t>
+            </a:r>
+          </a:p>
+        </p:txBody>
+      </p:sp>
+      <p:sp>
+        <p:nvSpPr>
+          <p:cNvPr id="16" name="Rectangle 15"/>
           <p:cNvSpPr/>
           <p:nvPr/>
         </p:nvSpPr>
         <p:spPr>
           <a:xfrm>
-            <a:off x="7863840" y="1828800"/>
-            <a:ext cx="3328416" cy="109728"/>
+            <a:off x="731520" y="6400800"/>
+            <a:ext cx="10728655" cy="12700"/>
           </a:xfrm>
           <a:prstGeom prst="rect">
             <a:avLst/>
           </a:prstGeom>
           <a:solidFill>
-            <a:srgbClr val="2B59D9"/>
+            <a:srgbClr val="C9C3B2"/>
           </a:solidFill>
           <a:ln>
             <a:noFill/>
@@ -3718,14 +4622,14 @@
       </p:sp>
       <p:sp>
         <p:nvSpPr>
-          <p:cNvPr id="12" name="TextBox 11"/>
+          <p:cNvPr id="17" name="TextBox 16"/>
           <p:cNvSpPr txBox="1"/>
           <p:nvPr/>
         </p:nvSpPr>
         <p:spPr>
           <a:xfrm>
-            <a:off x="8138160" y="2194560"/>
-            <a:ext cx="2779776" cy="3566160"/>
+            <a:off x="731520" y="6446520"/>
+            <a:ext cx="7315200" cy="320040"/>
           </a:xfrm>
           <a:prstGeom prst="rect">
             <a:avLst/>
@@ -3733,50 +4637,57 @@
           <a:noFill/>
         </p:spPr>
         <p:txBody>
-          <a:bodyPr wrap="square">
+          <a:bodyPr wrap="none" lIns="0" tIns="0" rIns="0" bIns="0">
             <a:spAutoFit/>
           </a:bodyPr>
           <a:lstStyle/>
           <a:p>
             <a:pPr>
-              <a:spcAft>
-                <a:spcPts val="1000"/>
-              </a:spcAft>
-              <a:defRPr sz="2800" b="1">
-                <a:solidFill>
-                  <a:srgbClr val="2B59D9"/>
-                </a:solidFill>
-              </a:defRPr>
-            </a:pPr>
-            <a:r>
-              <a:t>03</a:t>
-            </a:r>
-          </a:p>
-          <a:p>
-            <a:pPr>
-              <a:spcAft>
-                <a:spcPts val="1400"/>
-              </a:spcAft>
-              <a:defRPr sz="2000" b="1">
-                <a:solidFill>
-                  <a:srgbClr val="16161A"/>
-                </a:solidFill>
-              </a:defRPr>
-            </a:pPr>
-            <a:r>
-              <a:t>Applied AI &amp; Automation</a:t>
-            </a:r>
-          </a:p>
-          <a:p>
-            <a:pPr>
-              <a:defRPr sz="1400">
-                <a:solidFill>
-                  <a:srgbClr val="454337"/>
-                </a:solidFill>
-              </a:defRPr>
-            </a:pPr>
-            <a:r>
-              <a:t>Custom MCP servers, LLM workflows, and human-in-the-loop AI agents tailored for real operational security.</a:t>
+              <a:defRPr sz="1000">
+                <a:solidFill>
+                  <a:srgbClr val="5F5C52"/>
+                </a:solidFill>
+                <a:latin typeface="Courier New"/>
+              </a:defRPr>
+            </a:pPr>
+            <a:r>
+              <a:t>technologyconsultants.ventures  ·  San Diego · Tijuana</a:t>
+            </a:r>
+          </a:p>
+        </p:txBody>
+      </p:sp>
+      <p:sp>
+        <p:nvSpPr>
+          <p:cNvPr id="18" name="TextBox 17"/>
+          <p:cNvSpPr txBox="1"/>
+          <p:nvPr/>
+        </p:nvSpPr>
+        <p:spPr>
+          <a:xfrm>
+            <a:off x="9631375" y="6446520"/>
+            <a:ext cx="1828800" cy="320040"/>
+          </a:xfrm>
+          <a:prstGeom prst="rect">
+            <a:avLst/>
+          </a:prstGeom>
+          <a:noFill/>
+        </p:spPr>
+        <p:txBody>
+          <a:bodyPr wrap="none" lIns="0" tIns="0" rIns="0" bIns="0">
+            <a:spAutoFit/>
+          </a:bodyPr>
+          <a:lstStyle/>
+          <a:p>
+            <a:pPr algn="r">
+              <a:defRPr sz="1000">
+                <a:solidFill>
+                  <a:srgbClr val="5F5C52"/>
+                </a:solidFill>
+                <a:latin typeface="Courier New"/>
+              </a:defRPr>
+            </a:pPr>
+            <a:r>
+              <a:t>02 / 08</a:t>
             </a:r>
           </a:p>
         </p:txBody>
@@ -3809,14 +4720,102 @@
       <p:grpSpPr/>
       <p:sp>
         <p:nvSpPr>
-          <p:cNvPr id="2" name="TextBox 1"/>
+          <p:cNvPr id="2" name="Rectangle 1"/>
+          <p:cNvSpPr/>
+          <p:nvPr/>
+        </p:nvSpPr>
+        <p:spPr>
+          <a:xfrm>
+            <a:off x="0" y="0"/>
+            <a:ext cx="12191695" cy="594360"/>
+          </a:xfrm>
+          <a:prstGeom prst="rect">
+            <a:avLst/>
+          </a:prstGeom>
+          <a:solidFill>
+            <a:srgbClr val="121216"/>
+          </a:solidFill>
+          <a:ln w="12700">
+            <a:solidFill>
+              <a:srgbClr val="26262C"/>
+            </a:solidFill>
+          </a:ln>
+        </p:spPr>
+        <p:style>
+          <a:lnRef idx="1">
+            <a:schemeClr val="accent1"/>
+          </a:lnRef>
+          <a:fillRef idx="3">
+            <a:schemeClr val="accent1"/>
+          </a:fillRef>
+          <a:effectRef idx="2">
+            <a:schemeClr val="accent1"/>
+          </a:effectRef>
+          <a:fontRef idx="minor">
+            <a:schemeClr val="lt1"/>
+          </a:fontRef>
+        </p:style>
+        <p:txBody>
+          <a:bodyPr rtlCol="0" anchor="ctr"/>
+          <a:lstStyle/>
+          <a:p>
+            <a:pPr algn="ctr"/>
+          </a:p>
+        </p:txBody>
+      </p:sp>
+      <p:sp>
+        <p:nvSpPr>
+          <p:cNvPr id="3" name="Rounded Rectangle 2"/>
+          <p:cNvSpPr/>
+          <p:nvPr/>
+        </p:nvSpPr>
+        <p:spPr>
+          <a:xfrm>
+            <a:off x="731520" y="137160"/>
+            <a:ext cx="320040" cy="320040"/>
+          </a:xfrm>
+          <a:prstGeom prst="roundRect">
+            <a:avLst/>
+          </a:prstGeom>
+          <a:solidFill>
+            <a:srgbClr val="2B59D9"/>
+          </a:solidFill>
+          <a:ln>
+            <a:noFill/>
+          </a:ln>
+        </p:spPr>
+        <p:style>
+          <a:lnRef idx="1">
+            <a:schemeClr val="accent1"/>
+          </a:lnRef>
+          <a:fillRef idx="3">
+            <a:schemeClr val="accent1"/>
+          </a:fillRef>
+          <a:effectRef idx="2">
+            <a:schemeClr val="accent1"/>
+          </a:effectRef>
+          <a:fontRef idx="minor">
+            <a:schemeClr val="lt1"/>
+          </a:fontRef>
+        </p:style>
+        <p:txBody>
+          <a:bodyPr rtlCol="0" anchor="ctr"/>
+          <a:lstStyle/>
+          <a:p>
+            <a:pPr algn="ctr"/>
+          </a:p>
+        </p:txBody>
+      </p:sp>
+      <p:sp>
+        <p:nvSpPr>
+          <p:cNvPr id="4" name="TextBox 3"/>
           <p:cNvSpPr txBox="1"/>
           <p:nvPr/>
         </p:nvSpPr>
         <p:spPr>
           <a:xfrm>
-            <a:off x="731520" y="457200"/>
-            <a:ext cx="10728655" cy="365760"/>
+            <a:off x="731520" y="128016"/>
+            <a:ext cx="320040" cy="320040"/>
           </a:xfrm>
           <a:prstGeom prst="rect">
             <a:avLst/>
@@ -3824,34 +4823,35 @@
           <a:noFill/>
         </p:spPr>
         <p:txBody>
-          <a:bodyPr wrap="square" lIns="0" tIns="0" rIns="0" bIns="0">
+          <a:bodyPr wrap="none" lIns="0" tIns="0" rIns="0" bIns="0">
             <a:spAutoFit/>
           </a:bodyPr>
           <a:lstStyle/>
           <a:p>
             <a:pPr>
-              <a:defRPr sz="1100" b="1">
-                <a:solidFill>
-                  <a:srgbClr val="2B59D9"/>
-                </a:solidFill>
-              </a:defRPr>
-            </a:pPr>
-            <a:r>
-              <a:t>TARGET AUDIENCE</a:t>
-            </a:r>
-          </a:p>
-        </p:txBody>
-      </p:sp>
-      <p:sp>
-        <p:nvSpPr>
-          <p:cNvPr id="3" name="TextBox 2"/>
+              <a:defRPr sz="1400" b="1">
+                <a:solidFill>
+                  <a:srgbClr val="FFFFFF"/>
+                </a:solidFill>
+                <a:latin typeface="Courier New"/>
+              </a:defRPr>
+            </a:pPr>
+            <a:r>
+              <a:t>›_</a:t>
+            </a:r>
+          </a:p>
+        </p:txBody>
+      </p:sp>
+      <p:sp>
+        <p:nvSpPr>
+          <p:cNvPr id="5" name="TextBox 4"/>
           <p:cNvSpPr txBox="1"/>
           <p:nvPr/>
         </p:nvSpPr>
         <p:spPr>
           <a:xfrm>
-            <a:off x="731520" y="777240"/>
-            <a:ext cx="10728655" cy="731520"/>
+            <a:off x="1143000" y="146304"/>
+            <a:ext cx="4114800" cy="320040"/>
           </a:xfrm>
           <a:prstGeom prst="rect">
             <a:avLst/>
@@ -3859,16 +4859,170 @@
           <a:noFill/>
         </p:spPr>
         <p:txBody>
-          <a:bodyPr wrap="square" lIns="0" tIns="0" rIns="0" bIns="0">
+          <a:bodyPr wrap="none" lIns="0" tIns="0" rIns="0" bIns="0">
             <a:spAutoFit/>
           </a:bodyPr>
           <a:lstStyle/>
           <a:p>
             <a:pPr>
-              <a:defRPr sz="2600" b="1">
+              <a:defRPr sz="1300" b="1">
+                <a:solidFill>
+                  <a:srgbClr val="FFFFFF"/>
+                </a:solidFill>
+                <a:latin typeface="Helvetica"/>
+              </a:defRPr>
+            </a:pPr>
+            <a:r>
+              <a:t>TECHNOLOGY CONSULTANTS</a:t>
+            </a:r>
+          </a:p>
+        </p:txBody>
+      </p:sp>
+      <p:sp>
+        <p:nvSpPr>
+          <p:cNvPr id="6" name="TextBox 5"/>
+          <p:cNvSpPr txBox="1"/>
+          <p:nvPr/>
+        </p:nvSpPr>
+        <p:spPr>
+          <a:xfrm>
+            <a:off x="6858000" y="164592"/>
+            <a:ext cx="4572000" cy="320040"/>
+          </a:xfrm>
+          <a:prstGeom prst="rect">
+            <a:avLst/>
+          </a:prstGeom>
+          <a:noFill/>
+        </p:spPr>
+        <p:txBody>
+          <a:bodyPr wrap="none" lIns="0" tIns="0" rIns="0" bIns="0">
+            <a:spAutoFit/>
+          </a:bodyPr>
+          <a:lstStyle/>
+          <a:p>
+            <a:pPr algn="r">
+              <a:defRPr sz="1100">
+                <a:solidFill>
+                  <a:srgbClr val="D99B26"/>
+                </a:solidFill>
+                <a:latin typeface="Courier New"/>
+              </a:defRPr>
+            </a:pPr>
+            <a:r>
+              <a:t>02 / TARGET PROFILE</a:t>
+            </a:r>
+          </a:p>
+        </p:txBody>
+      </p:sp>
+      <p:sp>
+        <p:nvSpPr>
+          <p:cNvPr id="7" name="Rounded Rectangle 6"/>
+          <p:cNvSpPr/>
+          <p:nvPr/>
+        </p:nvSpPr>
+        <p:spPr>
+          <a:xfrm>
+            <a:off x="731520" y="822960"/>
+            <a:ext cx="3072384" cy="292608"/>
+          </a:xfrm>
+          <a:prstGeom prst="roundRect">
+            <a:avLst/>
+          </a:prstGeom>
+          <a:solidFill>
+            <a:srgbClr val="EFE9D8"/>
+          </a:solidFill>
+          <a:ln w="12700">
+            <a:solidFill>
+              <a:srgbClr val="D99B26"/>
+            </a:solidFill>
+          </a:ln>
+        </p:spPr>
+        <p:style>
+          <a:lnRef idx="1">
+            <a:schemeClr val="accent1"/>
+          </a:lnRef>
+          <a:fillRef idx="3">
+            <a:schemeClr val="accent1"/>
+          </a:fillRef>
+          <a:effectRef idx="2">
+            <a:schemeClr val="accent1"/>
+          </a:effectRef>
+          <a:fontRef idx="minor">
+            <a:schemeClr val="lt1"/>
+          </a:fontRef>
+        </p:style>
+        <p:txBody>
+          <a:bodyPr rtlCol="0" anchor="ctr"/>
+          <a:lstStyle/>
+          <a:p>
+            <a:pPr algn="ctr"/>
+          </a:p>
+        </p:txBody>
+      </p:sp>
+      <p:sp>
+        <p:nvSpPr>
+          <p:cNvPr id="8" name="TextBox 7"/>
+          <p:cNvSpPr txBox="1"/>
+          <p:nvPr/>
+        </p:nvSpPr>
+        <p:spPr>
+          <a:xfrm>
+            <a:off x="731520" y="859536"/>
+            <a:ext cx="3072384" cy="256032"/>
+          </a:xfrm>
+          <a:prstGeom prst="rect">
+            <a:avLst/>
+          </a:prstGeom>
+          <a:noFill/>
+        </p:spPr>
+        <p:txBody>
+          <a:bodyPr wrap="none" lIns="0" tIns="0" rIns="0" bIns="0">
+            <a:spAutoFit/>
+          </a:bodyPr>
+          <a:lstStyle/>
+          <a:p>
+            <a:pPr algn="ctr">
+              <a:defRPr sz="1000" b="1">
+                <a:solidFill>
+                  <a:srgbClr val="D99B26"/>
+                </a:solidFill>
+                <a:latin typeface="Courier New"/>
+              </a:defRPr>
+            </a:pPr>
+            <a:r>
+              <a:t>IDEAL CLIENT PROFILE (ICP)</a:t>
+            </a:r>
+          </a:p>
+        </p:txBody>
+      </p:sp>
+      <p:sp>
+        <p:nvSpPr>
+          <p:cNvPr id="9" name="TextBox 8"/>
+          <p:cNvSpPr txBox="1"/>
+          <p:nvPr/>
+        </p:nvSpPr>
+        <p:spPr>
+          <a:xfrm>
+            <a:off x="731520" y="1188720"/>
+            <a:ext cx="10728655" cy="548640"/>
+          </a:xfrm>
+          <a:prstGeom prst="rect">
+            <a:avLst/>
+          </a:prstGeom>
+          <a:noFill/>
+        </p:spPr>
+        <p:txBody>
+          <a:bodyPr wrap="none">
+            <a:spAutoFit/>
+          </a:bodyPr>
+          <a:lstStyle/>
+          <a:p>
+            <a:pPr>
+              <a:defRPr sz="2400" b="1">
                 <a:solidFill>
                   <a:srgbClr val="16161A"/>
                 </a:solidFill>
+                <a:latin typeface="Helvetica"/>
               </a:defRPr>
             </a:pPr>
             <a:r>
@@ -3879,14 +5033,14 @@
       </p:sp>
       <p:sp>
         <p:nvSpPr>
-          <p:cNvPr id="4" name="Rounded Rectangle 3"/>
+          <p:cNvPr id="10" name="Rounded Rectangle 9"/>
           <p:cNvSpPr/>
           <p:nvPr/>
         </p:nvSpPr>
         <p:spPr>
           <a:xfrm>
-            <a:off x="731520" y="1828800"/>
-            <a:ext cx="5166360" cy="4114800"/>
+            <a:off x="731520" y="1920240"/>
+            <a:ext cx="5166360" cy="3931920"/>
           </a:xfrm>
           <a:prstGeom prst="roundRect">
             <a:avLst/>
@@ -3924,14 +5078,14 @@
       </p:sp>
       <p:sp>
         <p:nvSpPr>
-          <p:cNvPr id="5" name="TextBox 4"/>
+          <p:cNvPr id="11" name="TextBox 10"/>
           <p:cNvSpPr txBox="1"/>
           <p:nvPr/>
         </p:nvSpPr>
         <p:spPr>
           <a:xfrm>
-            <a:off x="1005840" y="2103120"/>
-            <a:ext cx="4617720" cy="3566160"/>
+            <a:off x="1005840" y="2194560"/>
+            <a:ext cx="4617720" cy="3474720"/>
           </a:xfrm>
           <a:prstGeom prst="rect">
             <a:avLst/>
@@ -3946,60 +5100,65 @@
           <a:p>
             <a:pPr>
               <a:spcAft>
-                <a:spcPts val="1400"/>
+                <a:spcPts val="1200"/>
               </a:spcAft>
-              <a:defRPr sz="2000" b="1">
+              <a:defRPr sz="1100" b="1">
                 <a:solidFill>
                   <a:srgbClr val="2B59D9"/>
                 </a:solidFill>
-              </a:defRPr>
-            </a:pPr>
-            <a:r>
-              <a:t>Target Companies</a:t>
+                <a:latin typeface="Courier New"/>
+              </a:defRPr>
+            </a:pPr>
+            <a:r>
+              <a:t>TARGET ORGANIZATIONS</a:t>
             </a:r>
           </a:p>
           <a:p>
             <a:pPr>
               <a:spcAft>
-                <a:spcPts val="1000"/>
+                <a:spcPts val="800"/>
               </a:spcAft>
-              <a:defRPr b="1" sz="1300">
+              <a:defRPr b="1" sz="1200">
                 <a:solidFill>
                   <a:srgbClr val="16161A"/>
                 </a:solidFill>
-              </a:defRPr>
-            </a:pPr>
-            <a:r>
-              <a:t>•  Mid-Market Enterprises: </a:t>
+                <a:latin typeface="Courier New"/>
+              </a:defRPr>
+            </a:pPr>
+            <a:r>
+              <a:t>› Mid-Market Enterprises: </a:t>
             </a:r>
             <a:r>
               <a:rPr b="0">
                 <a:solidFill>
                   <a:srgbClr val="454337"/>
                 </a:solidFill>
+                <a:latin typeface="Helvetica"/>
               </a:rPr>
-              <a:t>Companies with established operations needing custom tool integration.</a:t>
+              <a:t>Established operations needing custom tool integration.</a:t>
             </a:r>
           </a:p>
           <a:p>
             <a:pPr>
               <a:spcAft>
-                <a:spcPts val="1000"/>
+                <a:spcPts val="800"/>
               </a:spcAft>
-              <a:defRPr b="1" sz="1300">
+              <a:defRPr b="1" sz="1200">
                 <a:solidFill>
                   <a:srgbClr val="16161A"/>
                 </a:solidFill>
-              </a:defRPr>
-            </a:pPr>
-            <a:r>
-              <a:t>•  Fast-Growing SMBs: </a:t>
+                <a:latin typeface="Courier New"/>
+              </a:defRPr>
+            </a:pPr>
+            <a:r>
+              <a:t>› Fast-Growing SMBs: </a:t>
             </a:r>
             <a:r>
               <a:rPr b="0">
                 <a:solidFill>
                   <a:srgbClr val="454337"/>
                 </a:solidFill>
+                <a:latin typeface="Helvetica"/>
               </a:rPr>
               <a:t>Scaling teams outgrowing spreadsheets or disconnected SaaS apps.</a:t>
             </a:r>
@@ -4007,45 +5166,49 @@
           <a:p>
             <a:pPr>
               <a:spcAft>
-                <a:spcPts val="1000"/>
+                <a:spcPts val="800"/>
               </a:spcAft>
-              <a:defRPr b="1" sz="1300">
+              <a:defRPr b="1" sz="1200">
                 <a:solidFill>
                   <a:srgbClr val="16161A"/>
                 </a:solidFill>
-              </a:defRPr>
-            </a:pPr>
-            <a:r>
-              <a:t>•  Venture-Backed Startups: </a:t>
+                <a:latin typeface="Courier New"/>
+              </a:defRPr>
+            </a:pPr>
+            <a:r>
+              <a:t>› Venture-Backed Startups: </a:t>
             </a:r>
             <a:r>
               <a:rPr b="0">
                 <a:solidFill>
                   <a:srgbClr val="454337"/>
                 </a:solidFill>
+                <a:latin typeface="Helvetica"/>
               </a:rPr>
-              <a:t>Teams needing high-velocity technical execution and architecture.</a:t>
+              <a:t>Teams needing high-velocity technical execution &amp; architecture.</a:t>
             </a:r>
           </a:p>
           <a:p>
             <a:pPr>
               <a:spcAft>
-                <a:spcPts val="1000"/>
+                <a:spcPts val="800"/>
               </a:spcAft>
-              <a:defRPr b="1" sz="1300">
+              <a:defRPr b="1" sz="1200">
                 <a:solidFill>
                   <a:srgbClr val="16161A"/>
                 </a:solidFill>
-              </a:defRPr>
-            </a:pPr>
-            <a:r>
-              <a:t>•  PE / VC Portcos: </a:t>
+                <a:latin typeface="Courier New"/>
+              </a:defRPr>
+            </a:pPr>
+            <a:r>
+              <a:t>› PE / VC Portcos: </a:t>
             </a:r>
             <a:r>
               <a:rPr b="0">
                 <a:solidFill>
                   <a:srgbClr val="454337"/>
                 </a:solidFill>
+                <a:latin typeface="Helvetica"/>
               </a:rPr>
               <a:t>Portfolio companies streamlining back-office operational efficiency.</a:t>
             </a:r>
@@ -4054,14 +5217,14 @@
       </p:sp>
       <p:sp>
         <p:nvSpPr>
-          <p:cNvPr id="6" name="Rounded Rectangle 5"/>
+          <p:cNvPr id="12" name="Rounded Rectangle 11"/>
           <p:cNvSpPr/>
           <p:nvPr/>
         </p:nvSpPr>
         <p:spPr>
           <a:xfrm>
-            <a:off x="6263640" y="1828800"/>
-            <a:ext cx="5166360" cy="4114800"/>
+            <a:off x="6263640" y="1920240"/>
+            <a:ext cx="5166360" cy="3931920"/>
           </a:xfrm>
           <a:prstGeom prst="roundRect">
             <a:avLst/>
@@ -4099,14 +5262,14 @@
       </p:sp>
       <p:sp>
         <p:nvSpPr>
-          <p:cNvPr id="7" name="TextBox 6"/>
+          <p:cNvPr id="13" name="TextBox 12"/>
           <p:cNvSpPr txBox="1"/>
           <p:nvPr/>
         </p:nvSpPr>
         <p:spPr>
           <a:xfrm>
-            <a:off x="6537960" y="2103120"/>
-            <a:ext cx="4617720" cy="3566160"/>
+            <a:off x="6537960" y="2194560"/>
+            <a:ext cx="4617720" cy="3474720"/>
           </a:xfrm>
           <a:prstGeom prst="rect">
             <a:avLst/>
@@ -4121,60 +5284,65 @@
           <a:p>
             <a:pPr>
               <a:spcAft>
-                <a:spcPts val="1400"/>
+                <a:spcPts val="1200"/>
               </a:spcAft>
-              <a:defRPr sz="2000" b="1">
+              <a:defRPr sz="1100" b="1">
                 <a:solidFill>
                   <a:srgbClr val="D99B26"/>
                 </a:solidFill>
-              </a:defRPr>
-            </a:pPr>
-            <a:r>
-              <a:t>Key Decision Makers</a:t>
+                <a:latin typeface="Courier New"/>
+              </a:defRPr>
+            </a:pPr>
+            <a:r>
+              <a:t>KEY DECISION MAKERS</a:t>
             </a:r>
           </a:p>
           <a:p>
             <a:pPr>
               <a:spcAft>
-                <a:spcPts val="1000"/>
+                <a:spcPts val="800"/>
               </a:spcAft>
-              <a:defRPr b="1" sz="1300">
+              <a:defRPr b="1" sz="1200">
                 <a:solidFill>
                   <a:srgbClr val="16161A"/>
                 </a:solidFill>
-              </a:defRPr>
-            </a:pPr>
-            <a:r>
-              <a:t>•  CTOs &amp; VPs of Engineering: </a:t>
+                <a:latin typeface="Courier New"/>
+              </a:defRPr>
+            </a:pPr>
+            <a:r>
+              <a:t>› CTOs &amp; VPs of Engineering: </a:t>
             </a:r>
             <a:r>
               <a:rPr b="0">
                 <a:solidFill>
                   <a:srgbClr val="454337"/>
                 </a:solidFill>
+                <a:latin typeface="Helvetica"/>
               </a:rPr>
-              <a:t>Looking to offload specialized integration &amp; AI agent frontends.</a:t>
+              <a:t>Offloading specialized integration &amp; AI agent frontends.</a:t>
             </a:r>
           </a:p>
           <a:p>
             <a:pPr>
               <a:spcAft>
-                <a:spcPts val="1000"/>
+                <a:spcPts val="800"/>
               </a:spcAft>
-              <a:defRPr b="1" sz="1300">
+              <a:defRPr b="1" sz="1200">
                 <a:solidFill>
                   <a:srgbClr val="16161A"/>
                 </a:solidFill>
-              </a:defRPr>
-            </a:pPr>
-            <a:r>
-              <a:t>•  CFOs &amp; Finance Directors: </a:t>
+                <a:latin typeface="Courier New"/>
+              </a:defRPr>
+            </a:pPr>
+            <a:r>
+              <a:t>› CFOs &amp; Finance Directors: </a:t>
             </a:r>
             <a:r>
               <a:rPr b="0">
                 <a:solidFill>
                   <a:srgbClr val="454337"/>
                 </a:solidFill>
+                <a:latin typeface="Helvetica"/>
               </a:rPr>
               <a:t>Struggling with Workday/ERP data bottlenecks and reporting.</a:t>
             </a:r>
@@ -4182,22 +5350,24 @@
           <a:p>
             <a:pPr>
               <a:spcAft>
-                <a:spcPts val="1000"/>
+                <a:spcPts val="800"/>
               </a:spcAft>
-              <a:defRPr b="1" sz="1300">
+              <a:defRPr b="1" sz="1200">
                 <a:solidFill>
                   <a:srgbClr val="16161A"/>
                 </a:solidFill>
-              </a:defRPr>
-            </a:pPr>
-            <a:r>
-              <a:t>•  VPs of Operations: </a:t>
+                <a:latin typeface="Courier New"/>
+              </a:defRPr>
+            </a:pPr>
+            <a:r>
+              <a:t>› VPs of Operations: </a:t>
             </a:r>
             <a:r>
               <a:rPr b="0">
                 <a:solidFill>
                   <a:srgbClr val="454337"/>
                 </a:solidFill>
+                <a:latin typeface="Helvetica"/>
               </a:rPr>
               <a:t>Seeking to eliminate manual document &amp; workflow overhead.</a:t>
             </a:r>
@@ -4205,24 +5375,141 @@
           <a:p>
             <a:pPr>
               <a:spcAft>
-                <a:spcPts val="1000"/>
+                <a:spcPts val="800"/>
               </a:spcAft>
-              <a:defRPr b="1" sz="1300">
+              <a:defRPr b="1" sz="1200">
                 <a:solidFill>
                   <a:srgbClr val="16161A"/>
                 </a:solidFill>
-              </a:defRPr>
-            </a:pPr>
-            <a:r>
-              <a:t>•  Founders &amp; Product Leaders: </a:t>
+                <a:latin typeface="Courier New"/>
+              </a:defRPr>
+            </a:pPr>
+            <a:r>
+              <a:t>› Founders &amp; Product Leaders: </a:t>
             </a:r>
             <a:r>
               <a:rPr b="0">
                 <a:solidFill>
                   <a:srgbClr val="454337"/>
                 </a:solidFill>
+                <a:latin typeface="Helvetica"/>
               </a:rPr>
               <a:t>Building mission-critical web software under tight deadlines.</a:t>
+            </a:r>
+          </a:p>
+        </p:txBody>
+      </p:sp>
+      <p:sp>
+        <p:nvSpPr>
+          <p:cNvPr id="14" name="Rectangle 13"/>
+          <p:cNvSpPr/>
+          <p:nvPr/>
+        </p:nvSpPr>
+        <p:spPr>
+          <a:xfrm>
+            <a:off x="731520" y="6400800"/>
+            <a:ext cx="10728655" cy="12700"/>
+          </a:xfrm>
+          <a:prstGeom prst="rect">
+            <a:avLst/>
+          </a:prstGeom>
+          <a:solidFill>
+            <a:srgbClr val="C9C3B2"/>
+          </a:solidFill>
+          <a:ln>
+            <a:noFill/>
+          </a:ln>
+        </p:spPr>
+        <p:style>
+          <a:lnRef idx="1">
+            <a:schemeClr val="accent1"/>
+          </a:lnRef>
+          <a:fillRef idx="3">
+            <a:schemeClr val="accent1"/>
+          </a:fillRef>
+          <a:effectRef idx="2">
+            <a:schemeClr val="accent1"/>
+          </a:effectRef>
+          <a:fontRef idx="minor">
+            <a:schemeClr val="lt1"/>
+          </a:fontRef>
+        </p:style>
+        <p:txBody>
+          <a:bodyPr rtlCol="0" anchor="ctr"/>
+          <a:lstStyle/>
+          <a:p>
+            <a:pPr algn="ctr"/>
+          </a:p>
+        </p:txBody>
+      </p:sp>
+      <p:sp>
+        <p:nvSpPr>
+          <p:cNvPr id="15" name="TextBox 14"/>
+          <p:cNvSpPr txBox="1"/>
+          <p:nvPr/>
+        </p:nvSpPr>
+        <p:spPr>
+          <a:xfrm>
+            <a:off x="731520" y="6446520"/>
+            <a:ext cx="7315200" cy="320040"/>
+          </a:xfrm>
+          <a:prstGeom prst="rect">
+            <a:avLst/>
+          </a:prstGeom>
+          <a:noFill/>
+        </p:spPr>
+        <p:txBody>
+          <a:bodyPr wrap="none" lIns="0" tIns="0" rIns="0" bIns="0">
+            <a:spAutoFit/>
+          </a:bodyPr>
+          <a:lstStyle/>
+          <a:p>
+            <a:pPr>
+              <a:defRPr sz="1000">
+                <a:solidFill>
+                  <a:srgbClr val="5F5C52"/>
+                </a:solidFill>
+                <a:latin typeface="Courier New"/>
+              </a:defRPr>
+            </a:pPr>
+            <a:r>
+              <a:t>technologyconsultants.ventures  ·  San Diego · Tijuana</a:t>
+            </a:r>
+          </a:p>
+        </p:txBody>
+      </p:sp>
+      <p:sp>
+        <p:nvSpPr>
+          <p:cNvPr id="16" name="TextBox 15"/>
+          <p:cNvSpPr txBox="1"/>
+          <p:nvPr/>
+        </p:nvSpPr>
+        <p:spPr>
+          <a:xfrm>
+            <a:off x="9631375" y="6446520"/>
+            <a:ext cx="1828800" cy="320040"/>
+          </a:xfrm>
+          <a:prstGeom prst="rect">
+            <a:avLst/>
+          </a:prstGeom>
+          <a:noFill/>
+        </p:spPr>
+        <p:txBody>
+          <a:bodyPr wrap="none" lIns="0" tIns="0" rIns="0" bIns="0">
+            <a:spAutoFit/>
+          </a:bodyPr>
+          <a:lstStyle/>
+          <a:p>
+            <a:pPr algn="r">
+              <a:defRPr sz="1000">
+                <a:solidFill>
+                  <a:srgbClr val="5F5C52"/>
+                </a:solidFill>
+                <a:latin typeface="Courier New"/>
+              </a:defRPr>
+            </a:pPr>
+            <a:r>
+              <a:t>03 / 08</a:t>
             </a:r>
           </a:p>
         </p:txBody>
@@ -4255,14 +5542,102 @@
       <p:grpSpPr/>
       <p:sp>
         <p:nvSpPr>
-          <p:cNvPr id="2" name="TextBox 1"/>
+          <p:cNvPr id="2" name="Rectangle 1"/>
+          <p:cNvSpPr/>
+          <p:nvPr/>
+        </p:nvSpPr>
+        <p:spPr>
+          <a:xfrm>
+            <a:off x="0" y="0"/>
+            <a:ext cx="12191695" cy="594360"/>
+          </a:xfrm>
+          <a:prstGeom prst="rect">
+            <a:avLst/>
+          </a:prstGeom>
+          <a:solidFill>
+            <a:srgbClr val="121216"/>
+          </a:solidFill>
+          <a:ln w="12700">
+            <a:solidFill>
+              <a:srgbClr val="26262C"/>
+            </a:solidFill>
+          </a:ln>
+        </p:spPr>
+        <p:style>
+          <a:lnRef idx="1">
+            <a:schemeClr val="accent1"/>
+          </a:lnRef>
+          <a:fillRef idx="3">
+            <a:schemeClr val="accent1"/>
+          </a:fillRef>
+          <a:effectRef idx="2">
+            <a:schemeClr val="accent1"/>
+          </a:effectRef>
+          <a:fontRef idx="minor">
+            <a:schemeClr val="lt1"/>
+          </a:fontRef>
+        </p:style>
+        <p:txBody>
+          <a:bodyPr rtlCol="0" anchor="ctr"/>
+          <a:lstStyle/>
+          <a:p>
+            <a:pPr algn="ctr"/>
+          </a:p>
+        </p:txBody>
+      </p:sp>
+      <p:sp>
+        <p:nvSpPr>
+          <p:cNvPr id="3" name="Rounded Rectangle 2"/>
+          <p:cNvSpPr/>
+          <p:nvPr/>
+        </p:nvSpPr>
+        <p:spPr>
+          <a:xfrm>
+            <a:off x="731520" y="137160"/>
+            <a:ext cx="320040" cy="320040"/>
+          </a:xfrm>
+          <a:prstGeom prst="roundRect">
+            <a:avLst/>
+          </a:prstGeom>
+          <a:solidFill>
+            <a:srgbClr val="2B59D9"/>
+          </a:solidFill>
+          <a:ln>
+            <a:noFill/>
+          </a:ln>
+        </p:spPr>
+        <p:style>
+          <a:lnRef idx="1">
+            <a:schemeClr val="accent1"/>
+          </a:lnRef>
+          <a:fillRef idx="3">
+            <a:schemeClr val="accent1"/>
+          </a:fillRef>
+          <a:effectRef idx="2">
+            <a:schemeClr val="accent1"/>
+          </a:effectRef>
+          <a:fontRef idx="minor">
+            <a:schemeClr val="lt1"/>
+          </a:fontRef>
+        </p:style>
+        <p:txBody>
+          <a:bodyPr rtlCol="0" anchor="ctr"/>
+          <a:lstStyle/>
+          <a:p>
+            <a:pPr algn="ctr"/>
+          </a:p>
+        </p:txBody>
+      </p:sp>
+      <p:sp>
+        <p:nvSpPr>
+          <p:cNvPr id="4" name="TextBox 3"/>
           <p:cNvSpPr txBox="1"/>
           <p:nvPr/>
         </p:nvSpPr>
         <p:spPr>
           <a:xfrm>
-            <a:off x="731520" y="457200"/>
-            <a:ext cx="10728655" cy="365760"/>
+            <a:off x="731520" y="128016"/>
+            <a:ext cx="320040" cy="320040"/>
           </a:xfrm>
           <a:prstGeom prst="rect">
             <a:avLst/>
@@ -4270,34 +5645,35 @@
           <a:noFill/>
         </p:spPr>
         <p:txBody>
-          <a:bodyPr wrap="square" lIns="0" tIns="0" rIns="0" bIns="0">
+          <a:bodyPr wrap="none" lIns="0" tIns="0" rIns="0" bIns="0">
             <a:spAutoFit/>
           </a:bodyPr>
           <a:lstStyle/>
           <a:p>
             <a:pPr>
-              <a:defRPr sz="1100" b="1">
-                <a:solidFill>
-                  <a:srgbClr val="2B59D9"/>
-                </a:solidFill>
-              </a:defRPr>
-            </a:pPr>
-            <a:r>
-              <a:t>OPPORTUNITY RECOGNITION</a:t>
-            </a:r>
-          </a:p>
-        </p:txBody>
-      </p:sp>
-      <p:sp>
-        <p:nvSpPr>
-          <p:cNvPr id="3" name="TextBox 2"/>
+              <a:defRPr sz="1400" b="1">
+                <a:solidFill>
+                  <a:srgbClr val="FFFFFF"/>
+                </a:solidFill>
+                <a:latin typeface="Courier New"/>
+              </a:defRPr>
+            </a:pPr>
+            <a:r>
+              <a:t>›_</a:t>
+            </a:r>
+          </a:p>
+        </p:txBody>
+      </p:sp>
+      <p:sp>
+        <p:nvSpPr>
+          <p:cNvPr id="5" name="TextBox 4"/>
           <p:cNvSpPr txBox="1"/>
           <p:nvPr/>
         </p:nvSpPr>
         <p:spPr>
           <a:xfrm>
-            <a:off x="731520" y="777240"/>
-            <a:ext cx="10728655" cy="731520"/>
+            <a:off x="1143000" y="146304"/>
+            <a:ext cx="4114800" cy="320040"/>
           </a:xfrm>
           <a:prstGeom prst="rect">
             <a:avLst/>
@@ -4305,34 +5681,188 @@
           <a:noFill/>
         </p:spPr>
         <p:txBody>
-          <a:bodyPr wrap="square" lIns="0" tIns="0" rIns="0" bIns="0">
+          <a:bodyPr wrap="none" lIns="0" tIns="0" rIns="0" bIns="0">
             <a:spAutoFit/>
           </a:bodyPr>
           <a:lstStyle/>
           <a:p>
             <a:pPr>
-              <a:defRPr sz="2600" b="1">
+              <a:defRPr sz="1300" b="1">
+                <a:solidFill>
+                  <a:srgbClr val="FFFFFF"/>
+                </a:solidFill>
+                <a:latin typeface="Helvetica"/>
+              </a:defRPr>
+            </a:pPr>
+            <a:r>
+              <a:t>TECHNOLOGY CONSULTANTS</a:t>
+            </a:r>
+          </a:p>
+        </p:txBody>
+      </p:sp>
+      <p:sp>
+        <p:nvSpPr>
+          <p:cNvPr id="6" name="TextBox 5"/>
+          <p:cNvSpPr txBox="1"/>
+          <p:nvPr/>
+        </p:nvSpPr>
+        <p:spPr>
+          <a:xfrm>
+            <a:off x="6858000" y="164592"/>
+            <a:ext cx="4572000" cy="320040"/>
+          </a:xfrm>
+          <a:prstGeom prst="rect">
+            <a:avLst/>
+          </a:prstGeom>
+          <a:noFill/>
+        </p:spPr>
+        <p:txBody>
+          <a:bodyPr wrap="none" lIns="0" tIns="0" rIns="0" bIns="0">
+            <a:spAutoFit/>
+          </a:bodyPr>
+          <a:lstStyle/>
+          <a:p>
+            <a:pPr algn="r">
+              <a:defRPr sz="1100">
+                <a:solidFill>
+                  <a:srgbClr val="D99B26"/>
+                </a:solidFill>
+                <a:latin typeface="Courier New"/>
+              </a:defRPr>
+            </a:pPr>
+            <a:r>
+              <a:t>03 / REFERRAL SIGNALS</a:t>
+            </a:r>
+          </a:p>
+        </p:txBody>
+      </p:sp>
+      <p:sp>
+        <p:nvSpPr>
+          <p:cNvPr id="7" name="Rounded Rectangle 6"/>
+          <p:cNvSpPr/>
+          <p:nvPr/>
+        </p:nvSpPr>
+        <p:spPr>
+          <a:xfrm>
+            <a:off x="731520" y="822960"/>
+            <a:ext cx="1965960" cy="292608"/>
+          </a:xfrm>
+          <a:prstGeom prst="roundRect">
+            <a:avLst/>
+          </a:prstGeom>
+          <a:solidFill>
+            <a:srgbClr val="EFE9D8"/>
+          </a:solidFill>
+          <a:ln w="12700">
+            <a:solidFill>
+              <a:srgbClr val="2B59D9"/>
+            </a:solidFill>
+          </a:ln>
+        </p:spPr>
+        <p:style>
+          <a:lnRef idx="1">
+            <a:schemeClr val="accent1"/>
+          </a:lnRef>
+          <a:fillRef idx="3">
+            <a:schemeClr val="accent1"/>
+          </a:fillRef>
+          <a:effectRef idx="2">
+            <a:schemeClr val="accent1"/>
+          </a:effectRef>
+          <a:fontRef idx="minor">
+            <a:schemeClr val="lt1"/>
+          </a:fontRef>
+        </p:style>
+        <p:txBody>
+          <a:bodyPr rtlCol="0" anchor="ctr"/>
+          <a:lstStyle/>
+          <a:p>
+            <a:pPr algn="ctr"/>
+          </a:p>
+        </p:txBody>
+      </p:sp>
+      <p:sp>
+        <p:nvSpPr>
+          <p:cNvPr id="8" name="TextBox 7"/>
+          <p:cNvSpPr txBox="1"/>
+          <p:nvPr/>
+        </p:nvSpPr>
+        <p:spPr>
+          <a:xfrm>
+            <a:off x="731520" y="859536"/>
+            <a:ext cx="1965960" cy="256032"/>
+          </a:xfrm>
+          <a:prstGeom prst="rect">
+            <a:avLst/>
+          </a:prstGeom>
+          <a:noFill/>
+        </p:spPr>
+        <p:txBody>
+          <a:bodyPr wrap="none" lIns="0" tIns="0" rIns="0" bIns="0">
+            <a:spAutoFit/>
+          </a:bodyPr>
+          <a:lstStyle/>
+          <a:p>
+            <a:pPr algn="ctr">
+              <a:defRPr sz="1000" b="1">
+                <a:solidFill>
+                  <a:srgbClr val="2B59D9"/>
+                </a:solidFill>
+                <a:latin typeface="Courier New"/>
+              </a:defRPr>
+            </a:pPr>
+            <a:r>
+              <a:t>TRIGGER SIGNALS</a:t>
+            </a:r>
+          </a:p>
+        </p:txBody>
+      </p:sp>
+      <p:sp>
+        <p:nvSpPr>
+          <p:cNvPr id="9" name="TextBox 8"/>
+          <p:cNvSpPr txBox="1"/>
+          <p:nvPr/>
+        </p:nvSpPr>
+        <p:spPr>
+          <a:xfrm>
+            <a:off x="731520" y="1188720"/>
+            <a:ext cx="10728655" cy="548640"/>
+          </a:xfrm>
+          <a:prstGeom prst="rect">
+            <a:avLst/>
+          </a:prstGeom>
+          <a:noFill/>
+        </p:spPr>
+        <p:txBody>
+          <a:bodyPr wrap="none">
+            <a:spAutoFit/>
+          </a:bodyPr>
+          <a:lstStyle/>
+          <a:p>
+            <a:pPr>
+              <a:defRPr sz="2400" b="1">
                 <a:solidFill>
                   <a:srgbClr val="16161A"/>
                 </a:solidFill>
-              </a:defRPr>
-            </a:pPr>
-            <a:r>
-              <a:t>Trigger Signals: What They Say Before Needing Us</a:t>
-            </a:r>
-          </a:p>
-        </p:txBody>
-      </p:sp>
-      <p:sp>
-        <p:nvSpPr>
-          <p:cNvPr id="4" name="Rounded Rectangle 3"/>
+                <a:latin typeface="Helvetica"/>
+              </a:defRPr>
+            </a:pPr>
+            <a:r>
+              <a:t>What Prospects Say Right Before They Need Us</a:t>
+            </a:r>
+          </a:p>
+        </p:txBody>
+      </p:sp>
+      <p:sp>
+        <p:nvSpPr>
+          <p:cNvPr id="10" name="Rounded Rectangle 9"/>
           <p:cNvSpPr/>
           <p:nvPr/>
         </p:nvSpPr>
         <p:spPr>
           <a:xfrm>
-            <a:off x="731520" y="1737360"/>
-            <a:ext cx="10728655" cy="1325880"/>
+            <a:off x="731520" y="1874519"/>
+            <a:ext cx="10728655" cy="1234440"/>
           </a:xfrm>
           <a:prstGeom prst="roundRect">
             <a:avLst/>
@@ -4370,14 +5900,14 @@
       </p:sp>
       <p:sp>
         <p:nvSpPr>
-          <p:cNvPr id="5" name="TextBox 4"/>
+          <p:cNvPr id="11" name="TextBox 10"/>
           <p:cNvSpPr txBox="1"/>
           <p:nvPr/>
         </p:nvSpPr>
         <p:spPr>
           <a:xfrm>
-            <a:off x="1005840" y="1874520"/>
-            <a:ext cx="10180015" cy="1051560"/>
+            <a:off x="1005840" y="1984247"/>
+            <a:ext cx="10180015" cy="1005840"/>
           </a:xfrm>
           <a:prstGeom prst="rect">
             <a:avLst/>
@@ -4394,14 +5924,15 @@
               <a:spcAft>
                 <a:spcPts val="400"/>
               </a:spcAft>
-              <a:defRPr sz="1600" b="1">
+              <a:defRPr sz="1100" b="1">
                 <a:solidFill>
                   <a:srgbClr val="2B59D9"/>
                 </a:solidFill>
-              </a:defRPr>
-            </a:pPr>
-            <a:r>
-              <a:t>1. Disconnected Backends &amp; ERPs</a:t>
+                <a:latin typeface="Courier New"/>
+              </a:defRPr>
+            </a:pPr>
+            <a:r>
+              <a:t>SIGNAL 01 // DISCONNECTED BACKENDS &amp; ERPS</a:t>
             </a:r>
           </a:p>
           <a:p>
@@ -4410,6 +5941,7 @@
                 <a:solidFill>
                   <a:srgbClr val="16161A"/>
                 </a:solidFill>
+                <a:latin typeface="Helvetica"/>
               </a:defRPr>
             </a:pPr>
             <a:r>
@@ -4420,14 +5952,14 @@
       </p:sp>
       <p:sp>
         <p:nvSpPr>
-          <p:cNvPr id="6" name="Rounded Rectangle 5"/>
+          <p:cNvPr id="12" name="Rounded Rectangle 11"/>
           <p:cNvSpPr/>
           <p:nvPr/>
         </p:nvSpPr>
         <p:spPr>
           <a:xfrm>
             <a:off x="731520" y="3291839"/>
-            <a:ext cx="10728655" cy="1325880"/>
+            <a:ext cx="10728655" cy="1234440"/>
           </a:xfrm>
           <a:prstGeom prst="roundRect">
             <a:avLst/>
@@ -4465,14 +5997,14 @@
       </p:sp>
       <p:sp>
         <p:nvSpPr>
-          <p:cNvPr id="7" name="TextBox 6"/>
+          <p:cNvPr id="13" name="TextBox 12"/>
           <p:cNvSpPr txBox="1"/>
           <p:nvPr/>
         </p:nvSpPr>
         <p:spPr>
           <a:xfrm>
-            <a:off x="1005840" y="3428999"/>
-            <a:ext cx="10180015" cy="1051560"/>
+            <a:off x="1005840" y="3401567"/>
+            <a:ext cx="10180015" cy="1005840"/>
           </a:xfrm>
           <a:prstGeom prst="rect">
             <a:avLst/>
@@ -4489,14 +6021,15 @@
               <a:spcAft>
                 <a:spcPts val="400"/>
               </a:spcAft>
-              <a:defRPr sz="1600" b="1">
+              <a:defRPr sz="1100" b="1">
                 <a:solidFill>
                   <a:srgbClr val="2B59D9"/>
                 </a:solidFill>
-              </a:defRPr>
-            </a:pPr>
-            <a:r>
-              <a:t>2. AI Ambitions vs. Enterprise Security</a:t>
+                <a:latin typeface="Courier New"/>
+              </a:defRPr>
+            </a:pPr>
+            <a:r>
+              <a:t>SIGNAL 02 // AI AMBITIONS VS. ENTERPRISE SECURITY</a:t>
             </a:r>
           </a:p>
           <a:p>
@@ -4505,24 +6038,25 @@
                 <a:solidFill>
                   <a:srgbClr val="16161A"/>
                 </a:solidFill>
-              </a:defRPr>
-            </a:pPr>
-            <a:r>
-              <a:t>“We want to leverage AI agents and LLMs, but we need strict data security, enterprise controls, and human-in-the-loop oversight.”</a:t>
-            </a:r>
-          </a:p>
-        </p:txBody>
-      </p:sp>
-      <p:sp>
-        <p:nvSpPr>
-          <p:cNvPr id="8" name="Rounded Rectangle 7"/>
+                <a:latin typeface="Helvetica"/>
+              </a:defRPr>
+            </a:pPr>
+            <a:r>
+              <a:t>“We want to leverage AI agents and LLMs, but we need strict data security, enterprise controls, and human-in-the-loop (HITL) oversight.”</a:t>
+            </a:r>
+          </a:p>
+        </p:txBody>
+      </p:sp>
+      <p:sp>
+        <p:nvSpPr>
+          <p:cNvPr id="14" name="Rounded Rectangle 13"/>
           <p:cNvSpPr/>
           <p:nvPr/>
         </p:nvSpPr>
         <p:spPr>
           <a:xfrm>
-            <a:off x="731520" y="4846320"/>
-            <a:ext cx="10728655" cy="1325880"/>
+            <a:off x="731520" y="4709160"/>
+            <a:ext cx="10728655" cy="1234440"/>
           </a:xfrm>
           <a:prstGeom prst="roundRect">
             <a:avLst/>
@@ -4560,14 +6094,14 @@
       </p:sp>
       <p:sp>
         <p:nvSpPr>
-          <p:cNvPr id="9" name="TextBox 8"/>
+          <p:cNvPr id="15" name="TextBox 14"/>
           <p:cNvSpPr txBox="1"/>
           <p:nvPr/>
         </p:nvSpPr>
         <p:spPr>
           <a:xfrm>
-            <a:off x="1005840" y="4983480"/>
-            <a:ext cx="10180015" cy="1051560"/>
+            <a:off x="1005840" y="4818888"/>
+            <a:ext cx="10180015" cy="1005840"/>
           </a:xfrm>
           <a:prstGeom prst="rect">
             <a:avLst/>
@@ -4584,14 +6118,15 @@
               <a:spcAft>
                 <a:spcPts val="400"/>
               </a:spcAft>
-              <a:defRPr sz="1600" b="1">
+              <a:defRPr sz="1100" b="1">
                 <a:solidFill>
                   <a:srgbClr val="2B59D9"/>
                 </a:solidFill>
-              </a:defRPr>
-            </a:pPr>
-            <a:r>
-              <a:t>3. Manual Process Bottlenecks</a:t>
+                <a:latin typeface="Courier New"/>
+              </a:defRPr>
+            </a:pPr>
+            <a:r>
+              <a:t>SIGNAL 03 // MANUAL PROCESS BOTTLENECKS</a:t>
             </a:r>
           </a:p>
           <a:p>
@@ -4600,10 +6135,126 @@
                 <a:solidFill>
                   <a:srgbClr val="16161A"/>
                 </a:solidFill>
+                <a:latin typeface="Helvetica"/>
               </a:defRPr>
             </a:pPr>
             <a:r>
               <a:t>“Our operations team is bogged down manually processing invoices, reconciling financial records, or running repetitive cross-platform workflows.”</a:t>
+            </a:r>
+          </a:p>
+        </p:txBody>
+      </p:sp>
+      <p:sp>
+        <p:nvSpPr>
+          <p:cNvPr id="16" name="Rectangle 15"/>
+          <p:cNvSpPr/>
+          <p:nvPr/>
+        </p:nvSpPr>
+        <p:spPr>
+          <a:xfrm>
+            <a:off x="731520" y="6400800"/>
+            <a:ext cx="10728655" cy="12700"/>
+          </a:xfrm>
+          <a:prstGeom prst="rect">
+            <a:avLst/>
+          </a:prstGeom>
+          <a:solidFill>
+            <a:srgbClr val="C9C3B2"/>
+          </a:solidFill>
+          <a:ln>
+            <a:noFill/>
+          </a:ln>
+        </p:spPr>
+        <p:style>
+          <a:lnRef idx="1">
+            <a:schemeClr val="accent1"/>
+          </a:lnRef>
+          <a:fillRef idx="3">
+            <a:schemeClr val="accent1"/>
+          </a:fillRef>
+          <a:effectRef idx="2">
+            <a:schemeClr val="accent1"/>
+          </a:effectRef>
+          <a:fontRef idx="minor">
+            <a:schemeClr val="lt1"/>
+          </a:fontRef>
+        </p:style>
+        <p:txBody>
+          <a:bodyPr rtlCol="0" anchor="ctr"/>
+          <a:lstStyle/>
+          <a:p>
+            <a:pPr algn="ctr"/>
+          </a:p>
+        </p:txBody>
+      </p:sp>
+      <p:sp>
+        <p:nvSpPr>
+          <p:cNvPr id="17" name="TextBox 16"/>
+          <p:cNvSpPr txBox="1"/>
+          <p:nvPr/>
+        </p:nvSpPr>
+        <p:spPr>
+          <a:xfrm>
+            <a:off x="731520" y="6446520"/>
+            <a:ext cx="7315200" cy="320040"/>
+          </a:xfrm>
+          <a:prstGeom prst="rect">
+            <a:avLst/>
+          </a:prstGeom>
+          <a:noFill/>
+        </p:spPr>
+        <p:txBody>
+          <a:bodyPr wrap="none" lIns="0" tIns="0" rIns="0" bIns="0">
+            <a:spAutoFit/>
+          </a:bodyPr>
+          <a:lstStyle/>
+          <a:p>
+            <a:pPr>
+              <a:defRPr sz="1000">
+                <a:solidFill>
+                  <a:srgbClr val="5F5C52"/>
+                </a:solidFill>
+                <a:latin typeface="Courier New"/>
+              </a:defRPr>
+            </a:pPr>
+            <a:r>
+              <a:t>technologyconsultants.ventures  ·  San Diego · Tijuana</a:t>
+            </a:r>
+          </a:p>
+        </p:txBody>
+      </p:sp>
+      <p:sp>
+        <p:nvSpPr>
+          <p:cNvPr id="18" name="TextBox 17"/>
+          <p:cNvSpPr txBox="1"/>
+          <p:nvPr/>
+        </p:nvSpPr>
+        <p:spPr>
+          <a:xfrm>
+            <a:off x="9631375" y="6446520"/>
+            <a:ext cx="1828800" cy="320040"/>
+          </a:xfrm>
+          <a:prstGeom prst="rect">
+            <a:avLst/>
+          </a:prstGeom>
+          <a:noFill/>
+        </p:spPr>
+        <p:txBody>
+          <a:bodyPr wrap="none" lIns="0" tIns="0" rIns="0" bIns="0">
+            <a:spAutoFit/>
+          </a:bodyPr>
+          <a:lstStyle/>
+          <a:p>
+            <a:pPr algn="r">
+              <a:defRPr sz="1000">
+                <a:solidFill>
+                  <a:srgbClr val="5F5C52"/>
+                </a:solidFill>
+                <a:latin typeface="Courier New"/>
+              </a:defRPr>
+            </a:pPr>
+            <a:r>
+              <a:t>04 / 08</a:t>
             </a:r>
           </a:p>
         </p:txBody>
@@ -4636,14 +6287,102 @@
       <p:grpSpPr/>
       <p:sp>
         <p:nvSpPr>
-          <p:cNvPr id="2" name="TextBox 1"/>
+          <p:cNvPr id="2" name="Rectangle 1"/>
+          <p:cNvSpPr/>
+          <p:nvPr/>
+        </p:nvSpPr>
+        <p:spPr>
+          <a:xfrm>
+            <a:off x="0" y="0"/>
+            <a:ext cx="12191695" cy="594360"/>
+          </a:xfrm>
+          <a:prstGeom prst="rect">
+            <a:avLst/>
+          </a:prstGeom>
+          <a:solidFill>
+            <a:srgbClr val="121216"/>
+          </a:solidFill>
+          <a:ln w="12700">
+            <a:solidFill>
+              <a:srgbClr val="26262C"/>
+            </a:solidFill>
+          </a:ln>
+        </p:spPr>
+        <p:style>
+          <a:lnRef idx="1">
+            <a:schemeClr val="accent1"/>
+          </a:lnRef>
+          <a:fillRef idx="3">
+            <a:schemeClr val="accent1"/>
+          </a:fillRef>
+          <a:effectRef idx="2">
+            <a:schemeClr val="accent1"/>
+          </a:effectRef>
+          <a:fontRef idx="minor">
+            <a:schemeClr val="lt1"/>
+          </a:fontRef>
+        </p:style>
+        <p:txBody>
+          <a:bodyPr rtlCol="0" anchor="ctr"/>
+          <a:lstStyle/>
+          <a:p>
+            <a:pPr algn="ctr"/>
+          </a:p>
+        </p:txBody>
+      </p:sp>
+      <p:sp>
+        <p:nvSpPr>
+          <p:cNvPr id="3" name="Rounded Rectangle 2"/>
+          <p:cNvSpPr/>
+          <p:nvPr/>
+        </p:nvSpPr>
+        <p:spPr>
+          <a:xfrm>
+            <a:off x="731520" y="137160"/>
+            <a:ext cx="320040" cy="320040"/>
+          </a:xfrm>
+          <a:prstGeom prst="roundRect">
+            <a:avLst/>
+          </a:prstGeom>
+          <a:solidFill>
+            <a:srgbClr val="2B59D9"/>
+          </a:solidFill>
+          <a:ln>
+            <a:noFill/>
+          </a:ln>
+        </p:spPr>
+        <p:style>
+          <a:lnRef idx="1">
+            <a:schemeClr val="accent1"/>
+          </a:lnRef>
+          <a:fillRef idx="3">
+            <a:schemeClr val="accent1"/>
+          </a:fillRef>
+          <a:effectRef idx="2">
+            <a:schemeClr val="accent1"/>
+          </a:effectRef>
+          <a:fontRef idx="minor">
+            <a:schemeClr val="lt1"/>
+          </a:fontRef>
+        </p:style>
+        <p:txBody>
+          <a:bodyPr rtlCol="0" anchor="ctr"/>
+          <a:lstStyle/>
+          <a:p>
+            <a:pPr algn="ctr"/>
+          </a:p>
+        </p:txBody>
+      </p:sp>
+      <p:sp>
+        <p:nvSpPr>
+          <p:cNvPr id="4" name="TextBox 3"/>
           <p:cNvSpPr txBox="1"/>
           <p:nvPr/>
         </p:nvSpPr>
         <p:spPr>
           <a:xfrm>
-            <a:off x="731520" y="457200"/>
-            <a:ext cx="10728655" cy="365760"/>
+            <a:off x="731520" y="128016"/>
+            <a:ext cx="320040" cy="320040"/>
           </a:xfrm>
           <a:prstGeom prst="rect">
             <a:avLst/>
@@ -4651,34 +6390,35 @@
           <a:noFill/>
         </p:spPr>
         <p:txBody>
-          <a:bodyPr wrap="square" lIns="0" tIns="0" rIns="0" bIns="0">
+          <a:bodyPr wrap="none" lIns="0" tIns="0" rIns="0" bIns="0">
             <a:spAutoFit/>
           </a:bodyPr>
           <a:lstStyle/>
           <a:p>
             <a:pPr>
-              <a:defRPr sz="1100" b="1">
-                <a:solidFill>
-                  <a:srgbClr val="2B59D9"/>
-                </a:solidFill>
-              </a:defRPr>
-            </a:pPr>
-            <a:r>
-              <a:t>PROVEN ARCHITECTURE</a:t>
-            </a:r>
-          </a:p>
-        </p:txBody>
-      </p:sp>
-      <p:sp>
-        <p:nvSpPr>
-          <p:cNvPr id="3" name="TextBox 2"/>
+              <a:defRPr sz="1400" b="1">
+                <a:solidFill>
+                  <a:srgbClr val="FFFFFF"/>
+                </a:solidFill>
+                <a:latin typeface="Courier New"/>
+              </a:defRPr>
+            </a:pPr>
+            <a:r>
+              <a:t>›_</a:t>
+            </a:r>
+          </a:p>
+        </p:txBody>
+      </p:sp>
+      <p:sp>
+        <p:nvSpPr>
+          <p:cNvPr id="5" name="TextBox 4"/>
           <p:cNvSpPr txBox="1"/>
           <p:nvPr/>
         </p:nvSpPr>
         <p:spPr>
           <a:xfrm>
-            <a:off x="731520" y="777240"/>
-            <a:ext cx="10728655" cy="731520"/>
+            <a:off x="1143000" y="146304"/>
+            <a:ext cx="4114800" cy="320040"/>
           </a:xfrm>
           <a:prstGeom prst="rect">
             <a:avLst/>
@@ -4686,34 +6426,188 @@
           <a:noFill/>
         </p:spPr>
         <p:txBody>
-          <a:bodyPr wrap="square" lIns="0" tIns="0" rIns="0" bIns="0">
+          <a:bodyPr wrap="none" lIns="0" tIns="0" rIns="0" bIns="0">
             <a:spAutoFit/>
           </a:bodyPr>
           <a:lstStyle/>
           <a:p>
             <a:pPr>
-              <a:defRPr sz="2600" b="1">
+              <a:defRPr sz="1300" b="1">
+                <a:solidFill>
+                  <a:srgbClr val="FFFFFF"/>
+                </a:solidFill>
+                <a:latin typeface="Helvetica"/>
+              </a:defRPr>
+            </a:pPr>
+            <a:r>
+              <a:t>TECHNOLOGY CONSULTANTS</a:t>
+            </a:r>
+          </a:p>
+        </p:txBody>
+      </p:sp>
+      <p:sp>
+        <p:nvSpPr>
+          <p:cNvPr id="6" name="TextBox 5"/>
+          <p:cNvSpPr txBox="1"/>
+          <p:nvPr/>
+        </p:nvSpPr>
+        <p:spPr>
+          <a:xfrm>
+            <a:off x="6858000" y="164592"/>
+            <a:ext cx="4572000" cy="320040"/>
+          </a:xfrm>
+          <a:prstGeom prst="rect">
+            <a:avLst/>
+          </a:prstGeom>
+          <a:noFill/>
+        </p:spPr>
+        <p:txBody>
+          <a:bodyPr wrap="none" lIns="0" tIns="0" rIns="0" bIns="0">
+            <a:spAutoFit/>
+          </a:bodyPr>
+          <a:lstStyle/>
+          <a:p>
+            <a:pPr algn="r">
+              <a:defRPr sz="1100">
+                <a:solidFill>
+                  <a:srgbClr val="D99B26"/>
+                </a:solidFill>
+                <a:latin typeface="Courier New"/>
+              </a:defRPr>
+            </a:pPr>
+            <a:r>
+              <a:t>04 / TRACK RECORD</a:t>
+            </a:r>
+          </a:p>
+        </p:txBody>
+      </p:sp>
+      <p:sp>
+        <p:nvSpPr>
+          <p:cNvPr id="7" name="Rounded Rectangle 6"/>
+          <p:cNvSpPr/>
+          <p:nvPr/>
+        </p:nvSpPr>
+        <p:spPr>
+          <a:xfrm>
+            <a:off x="731520" y="822960"/>
+            <a:ext cx="2368296" cy="292608"/>
+          </a:xfrm>
+          <a:prstGeom prst="roundRect">
+            <a:avLst/>
+          </a:prstGeom>
+          <a:solidFill>
+            <a:srgbClr val="EFE9D8"/>
+          </a:solidFill>
+          <a:ln w="12700">
+            <a:solidFill>
+              <a:srgbClr val="D99B26"/>
+            </a:solidFill>
+          </a:ln>
+        </p:spPr>
+        <p:style>
+          <a:lnRef idx="1">
+            <a:schemeClr val="accent1"/>
+          </a:lnRef>
+          <a:fillRef idx="3">
+            <a:schemeClr val="accent1"/>
+          </a:fillRef>
+          <a:effectRef idx="2">
+            <a:schemeClr val="accent1"/>
+          </a:effectRef>
+          <a:fontRef idx="minor">
+            <a:schemeClr val="lt1"/>
+          </a:fontRef>
+        </p:style>
+        <p:txBody>
+          <a:bodyPr rtlCol="0" anchor="ctr"/>
+          <a:lstStyle/>
+          <a:p>
+            <a:pPr algn="ctr"/>
+          </a:p>
+        </p:txBody>
+      </p:sp>
+      <p:sp>
+        <p:nvSpPr>
+          <p:cNvPr id="8" name="TextBox 7"/>
+          <p:cNvSpPr txBox="1"/>
+          <p:nvPr/>
+        </p:nvSpPr>
+        <p:spPr>
+          <a:xfrm>
+            <a:off x="731520" y="859536"/>
+            <a:ext cx="2368296" cy="256032"/>
+          </a:xfrm>
+          <a:prstGeom prst="rect">
+            <a:avLst/>
+          </a:prstGeom>
+          <a:noFill/>
+        </p:spPr>
+        <p:txBody>
+          <a:bodyPr wrap="none" lIns="0" tIns="0" rIns="0" bIns="0">
+            <a:spAutoFit/>
+          </a:bodyPr>
+          <a:lstStyle/>
+          <a:p>
+            <a:pPr algn="ctr">
+              <a:defRPr sz="1000" b="1">
+                <a:solidFill>
+                  <a:srgbClr val="D99B26"/>
+                </a:solidFill>
+                <a:latin typeface="Courier New"/>
+              </a:defRPr>
+            </a:pPr>
+            <a:r>
+              <a:t>PROVEN ARCHITECTURE</a:t>
+            </a:r>
+          </a:p>
+        </p:txBody>
+      </p:sp>
+      <p:sp>
+        <p:nvSpPr>
+          <p:cNvPr id="9" name="TextBox 8"/>
+          <p:cNvSpPr txBox="1"/>
+          <p:nvPr/>
+        </p:nvSpPr>
+        <p:spPr>
+          <a:xfrm>
+            <a:off x="731520" y="1188720"/>
+            <a:ext cx="10728655" cy="548640"/>
+          </a:xfrm>
+          <a:prstGeom prst="rect">
+            <a:avLst/>
+          </a:prstGeom>
+          <a:noFill/>
+        </p:spPr>
+        <p:txBody>
+          <a:bodyPr wrap="none">
+            <a:spAutoFit/>
+          </a:bodyPr>
+          <a:lstStyle/>
+          <a:p>
+            <a:pPr>
+              <a:defRPr sz="2400" b="1">
                 <a:solidFill>
                   <a:srgbClr val="16161A"/>
                 </a:solidFill>
-              </a:defRPr>
-            </a:pPr>
-            <a:r>
-              <a:t>Track Record &amp; Real Operational Credentials</a:t>
-            </a:r>
-          </a:p>
-        </p:txBody>
-      </p:sp>
-      <p:sp>
-        <p:nvSpPr>
-          <p:cNvPr id="4" name="Rounded Rectangle 3"/>
+                <a:latin typeface="Helvetica"/>
+              </a:defRPr>
+            </a:pPr>
+            <a:r>
+              <a:t>Tested Against Real Operational Systems</a:t>
+            </a:r>
+          </a:p>
+        </p:txBody>
+      </p:sp>
+      <p:sp>
+        <p:nvSpPr>
+          <p:cNvPr id="10" name="Rounded Rectangle 9"/>
           <p:cNvSpPr/>
           <p:nvPr/>
         </p:nvSpPr>
         <p:spPr>
           <a:xfrm>
-            <a:off x="731520" y="1828800"/>
-            <a:ext cx="3328416" cy="4114800"/>
+            <a:off x="731520" y="1920240"/>
+            <a:ext cx="3328416" cy="3931920"/>
           </a:xfrm>
           <a:prstGeom prst="roundRect">
             <a:avLst/>
@@ -4751,14 +6645,14 @@
       </p:sp>
       <p:sp>
         <p:nvSpPr>
-          <p:cNvPr id="5" name="TextBox 4"/>
+          <p:cNvPr id="11" name="TextBox 10"/>
           <p:cNvSpPr txBox="1"/>
           <p:nvPr/>
         </p:nvSpPr>
         <p:spPr>
           <a:xfrm>
-            <a:off x="1005840" y="2103120"/>
-            <a:ext cx="2779776" cy="3566160"/>
+            <a:off x="1005840" y="2194560"/>
+            <a:ext cx="2779776" cy="3383280"/>
           </a:xfrm>
           <a:prstGeom prst="rect">
             <a:avLst/>
@@ -4773,16 +6667,17 @@
           <a:p>
             <a:pPr>
               <a:spcAft>
-                <a:spcPts val="800"/>
+                <a:spcPts val="1000"/>
               </a:spcAft>
               <a:defRPr sz="1000" b="1">
                 <a:solidFill>
                   <a:srgbClr val="D99B26"/>
                 </a:solidFill>
-              </a:defRPr>
-            </a:pPr>
-            <a:r>
-              <a:t>ENTERPRISE SYSTEMS INTEGRATION</a:t>
+                <a:latin typeface="Courier New"/>
+              </a:defRPr>
+            </a:pPr>
+            <a:r>
+              <a:t>[ ENTERPRISE INTEGRATION ]</a:t>
             </a:r>
           </a:p>
           <a:p>
@@ -4794,6 +6689,7 @@
                 <a:solidFill>
                   <a:srgbClr val="16161A"/>
                 </a:solidFill>
+                <a:latin typeface="Helvetica"/>
               </a:defRPr>
             </a:pPr>
             <a:r>
@@ -4806,24 +6702,25 @@
                 <a:solidFill>
                   <a:srgbClr val="454337"/>
                 </a:solidFill>
-              </a:defRPr>
-            </a:pPr>
-            <a:r>
-              <a:t>Engineered Model Context Protocol (MCP) integrations connecting Workday Finance &amp; Adaptive Planning directly to custom AI agent workflows.</a:t>
-            </a:r>
-          </a:p>
-        </p:txBody>
-      </p:sp>
-      <p:sp>
-        <p:nvSpPr>
-          <p:cNvPr id="6" name="Rounded Rectangle 5"/>
+                <a:latin typeface="Helvetica"/>
+              </a:defRPr>
+            </a:pPr>
+            <a:r>
+              <a:t>Engineered Model Context Protocol (MCP) servers connecting Workday Finance &amp; Adaptive Planning directly to custom AI agent workflows.</a:t>
+            </a:r>
+          </a:p>
+        </p:txBody>
+      </p:sp>
+      <p:sp>
+        <p:nvSpPr>
+          <p:cNvPr id="12" name="Rounded Rectangle 11"/>
           <p:cNvSpPr/>
           <p:nvPr/>
         </p:nvSpPr>
         <p:spPr>
           <a:xfrm>
-            <a:off x="4297680" y="1828800"/>
-            <a:ext cx="3328416" cy="4114800"/>
+            <a:off x="4297680" y="1920240"/>
+            <a:ext cx="3328416" cy="3931920"/>
           </a:xfrm>
           <a:prstGeom prst="roundRect">
             <a:avLst/>
@@ -4861,14 +6758,14 @@
       </p:sp>
       <p:sp>
         <p:nvSpPr>
-          <p:cNvPr id="7" name="TextBox 6"/>
+          <p:cNvPr id="13" name="TextBox 12"/>
           <p:cNvSpPr txBox="1"/>
           <p:nvPr/>
         </p:nvSpPr>
         <p:spPr>
           <a:xfrm>
-            <a:off x="4572000" y="2103120"/>
-            <a:ext cx="2779776" cy="3566160"/>
+            <a:off x="4572000" y="2194560"/>
+            <a:ext cx="2779776" cy="3383280"/>
           </a:xfrm>
           <a:prstGeom prst="rect">
             <a:avLst/>
@@ -4883,16 +6780,17 @@
           <a:p>
             <a:pPr>
               <a:spcAft>
-                <a:spcPts val="800"/>
+                <a:spcPts val="1000"/>
               </a:spcAft>
               <a:defRPr sz="1000" b="1">
                 <a:solidFill>
                   <a:srgbClr val="D99B26"/>
                 </a:solidFill>
-              </a:defRPr>
-            </a:pPr>
-            <a:r>
-              <a:t>HARDWARE &amp; SOFTWARE VOICE AI</a:t>
+                <a:latin typeface="Courier New"/>
+              </a:defRPr>
+            </a:pPr>
+            <a:r>
+              <a:t>[ VOICE AI HARDWARE &amp; SOFTWARE ]</a:t>
             </a:r>
           </a:p>
           <a:p>
@@ -4904,6 +6802,7 @@
                 <a:solidFill>
                   <a:srgbClr val="16161A"/>
                 </a:solidFill>
+                <a:latin typeface="Helvetica"/>
               </a:defRPr>
             </a:pPr>
             <a:r>
@@ -4916,24 +6815,25 @@
                 <a:solidFill>
                   <a:srgbClr val="454337"/>
                 </a:solidFill>
-              </a:defRPr>
-            </a:pPr>
-            <a:r>
-              <a:t>Designed hardware and software voice AI ordering systems for drive-thrus &amp; kiosks. Backed by Morgan Stanley Inclusive Ventures Lab.</a:t>
-            </a:r>
-          </a:p>
-        </p:txBody>
-      </p:sp>
-      <p:sp>
-        <p:nvSpPr>
-          <p:cNvPr id="8" name="Rounded Rectangle 7"/>
+                <a:latin typeface="Helvetica"/>
+              </a:defRPr>
+            </a:pPr>
+            <a:r>
+              <a:t>Designed hardware &amp; software voice AI ordering systems for drive-thrus &amp; kiosks. Backed by Morgan Stanley Inclusive Ventures Lab.</a:t>
+            </a:r>
+          </a:p>
+        </p:txBody>
+      </p:sp>
+      <p:sp>
+        <p:nvSpPr>
+          <p:cNvPr id="14" name="Rounded Rectangle 13"/>
           <p:cNvSpPr/>
           <p:nvPr/>
         </p:nvSpPr>
         <p:spPr>
           <a:xfrm>
-            <a:off x="7863840" y="1828800"/>
-            <a:ext cx="3328416" cy="4114800"/>
+            <a:off x="7863840" y="1920240"/>
+            <a:ext cx="3328416" cy="3931920"/>
           </a:xfrm>
           <a:prstGeom prst="roundRect">
             <a:avLst/>
@@ -4971,14 +6871,14 @@
       </p:sp>
       <p:sp>
         <p:nvSpPr>
-          <p:cNvPr id="9" name="TextBox 8"/>
+          <p:cNvPr id="15" name="TextBox 14"/>
           <p:cNvSpPr txBox="1"/>
           <p:nvPr/>
         </p:nvSpPr>
         <p:spPr>
           <a:xfrm>
-            <a:off x="8138160" y="2103120"/>
-            <a:ext cx="2779776" cy="3566160"/>
+            <a:off x="8138160" y="2194560"/>
+            <a:ext cx="2779776" cy="3383280"/>
           </a:xfrm>
           <a:prstGeom prst="rect">
             <a:avLst/>
@@ -4993,16 +6893,17 @@
           <a:p>
             <a:pPr>
               <a:spcAft>
-                <a:spcPts val="800"/>
+                <a:spcPts val="1000"/>
               </a:spcAft>
               <a:defRPr sz="1000" b="1">
                 <a:solidFill>
                   <a:srgbClr val="D99B26"/>
                 </a:solidFill>
-              </a:defRPr>
-            </a:pPr>
-            <a:r>
-              <a:t>APPT HELPER · OPEN CITA · BORDER BILLS</a:t>
+                <a:latin typeface="Courier New"/>
+              </a:defRPr>
+            </a:pPr>
+            <a:r>
+              <a:t>[ Appt Helper · Open Cita · Border Bills ]</a:t>
             </a:r>
           </a:p>
           <a:p>
@@ -5014,10 +6915,11 @@
                 <a:solidFill>
                   <a:srgbClr val="16161A"/>
                 </a:solidFill>
-              </a:defRPr>
-            </a:pPr>
-            <a:r>
-              <a:t>In-House Product Suite</a:t>
+                <a:latin typeface="Helvetica"/>
+              </a:defRPr>
+            </a:pPr>
+            <a:r>
+              <a:t>In-House Products</a:t>
             </a:r>
           </a:p>
           <a:p>
@@ -5026,10 +6928,126 @@
                 <a:solidFill>
                   <a:srgbClr val="454337"/>
                 </a:solidFill>
-              </a:defRPr>
-            </a:pPr>
-            <a:r>
-              <a:t>Built and launched our own proprietary software applications to prove technical architecture, scalability, and operating models before selling to clients.</a:t>
+                <a:latin typeface="Helvetica"/>
+              </a:defRPr>
+            </a:pPr>
+            <a:r>
+              <a:t>Built and launched our own proprietary software applications to prove technical architecture before selling to clients.</a:t>
+            </a:r>
+          </a:p>
+        </p:txBody>
+      </p:sp>
+      <p:sp>
+        <p:nvSpPr>
+          <p:cNvPr id="16" name="Rectangle 15"/>
+          <p:cNvSpPr/>
+          <p:nvPr/>
+        </p:nvSpPr>
+        <p:spPr>
+          <a:xfrm>
+            <a:off x="731520" y="6400800"/>
+            <a:ext cx="10728655" cy="12700"/>
+          </a:xfrm>
+          <a:prstGeom prst="rect">
+            <a:avLst/>
+          </a:prstGeom>
+          <a:solidFill>
+            <a:srgbClr val="C9C3B2"/>
+          </a:solidFill>
+          <a:ln>
+            <a:noFill/>
+          </a:ln>
+        </p:spPr>
+        <p:style>
+          <a:lnRef idx="1">
+            <a:schemeClr val="accent1"/>
+          </a:lnRef>
+          <a:fillRef idx="3">
+            <a:schemeClr val="accent1"/>
+          </a:fillRef>
+          <a:effectRef idx="2">
+            <a:schemeClr val="accent1"/>
+          </a:effectRef>
+          <a:fontRef idx="minor">
+            <a:schemeClr val="lt1"/>
+          </a:fontRef>
+        </p:style>
+        <p:txBody>
+          <a:bodyPr rtlCol="0" anchor="ctr"/>
+          <a:lstStyle/>
+          <a:p>
+            <a:pPr algn="ctr"/>
+          </a:p>
+        </p:txBody>
+      </p:sp>
+      <p:sp>
+        <p:nvSpPr>
+          <p:cNvPr id="17" name="TextBox 16"/>
+          <p:cNvSpPr txBox="1"/>
+          <p:nvPr/>
+        </p:nvSpPr>
+        <p:spPr>
+          <a:xfrm>
+            <a:off x="731520" y="6446520"/>
+            <a:ext cx="7315200" cy="320040"/>
+          </a:xfrm>
+          <a:prstGeom prst="rect">
+            <a:avLst/>
+          </a:prstGeom>
+          <a:noFill/>
+        </p:spPr>
+        <p:txBody>
+          <a:bodyPr wrap="none" lIns="0" tIns="0" rIns="0" bIns="0">
+            <a:spAutoFit/>
+          </a:bodyPr>
+          <a:lstStyle/>
+          <a:p>
+            <a:pPr>
+              <a:defRPr sz="1000">
+                <a:solidFill>
+                  <a:srgbClr val="5F5C52"/>
+                </a:solidFill>
+                <a:latin typeface="Courier New"/>
+              </a:defRPr>
+            </a:pPr>
+            <a:r>
+              <a:t>technologyconsultants.ventures  ·  San Diego · Tijuana</a:t>
+            </a:r>
+          </a:p>
+        </p:txBody>
+      </p:sp>
+      <p:sp>
+        <p:nvSpPr>
+          <p:cNvPr id="18" name="TextBox 17"/>
+          <p:cNvSpPr txBox="1"/>
+          <p:nvPr/>
+        </p:nvSpPr>
+        <p:spPr>
+          <a:xfrm>
+            <a:off x="9631375" y="6446520"/>
+            <a:ext cx="1828800" cy="320040"/>
+          </a:xfrm>
+          <a:prstGeom prst="rect">
+            <a:avLst/>
+          </a:prstGeom>
+          <a:noFill/>
+        </p:spPr>
+        <p:txBody>
+          <a:bodyPr wrap="none" lIns="0" tIns="0" rIns="0" bIns="0">
+            <a:spAutoFit/>
+          </a:bodyPr>
+          <a:lstStyle/>
+          <a:p>
+            <a:pPr algn="r">
+              <a:defRPr sz="1000">
+                <a:solidFill>
+                  <a:srgbClr val="5F5C52"/>
+                </a:solidFill>
+                <a:latin typeface="Courier New"/>
+              </a:defRPr>
+            </a:pPr>
+            <a:r>
+              <a:t>05 / 08</a:t>
             </a:r>
           </a:p>
         </p:txBody>
@@ -5062,14 +7080,102 @@
       <p:grpSpPr/>
       <p:sp>
         <p:nvSpPr>
-          <p:cNvPr id="2" name="TextBox 1"/>
+          <p:cNvPr id="2" name="Rectangle 1"/>
+          <p:cNvSpPr/>
+          <p:nvPr/>
+        </p:nvSpPr>
+        <p:spPr>
+          <a:xfrm>
+            <a:off x="0" y="0"/>
+            <a:ext cx="12191695" cy="594360"/>
+          </a:xfrm>
+          <a:prstGeom prst="rect">
+            <a:avLst/>
+          </a:prstGeom>
+          <a:solidFill>
+            <a:srgbClr val="121216"/>
+          </a:solidFill>
+          <a:ln w="12700">
+            <a:solidFill>
+              <a:srgbClr val="26262C"/>
+            </a:solidFill>
+          </a:ln>
+        </p:spPr>
+        <p:style>
+          <a:lnRef idx="1">
+            <a:schemeClr val="accent1"/>
+          </a:lnRef>
+          <a:fillRef idx="3">
+            <a:schemeClr val="accent1"/>
+          </a:fillRef>
+          <a:effectRef idx="2">
+            <a:schemeClr val="accent1"/>
+          </a:effectRef>
+          <a:fontRef idx="minor">
+            <a:schemeClr val="lt1"/>
+          </a:fontRef>
+        </p:style>
+        <p:txBody>
+          <a:bodyPr rtlCol="0" anchor="ctr"/>
+          <a:lstStyle/>
+          <a:p>
+            <a:pPr algn="ctr"/>
+          </a:p>
+        </p:txBody>
+      </p:sp>
+      <p:sp>
+        <p:nvSpPr>
+          <p:cNvPr id="3" name="Rounded Rectangle 2"/>
+          <p:cNvSpPr/>
+          <p:nvPr/>
+        </p:nvSpPr>
+        <p:spPr>
+          <a:xfrm>
+            <a:off x="731520" y="137160"/>
+            <a:ext cx="320040" cy="320040"/>
+          </a:xfrm>
+          <a:prstGeom prst="roundRect">
+            <a:avLst/>
+          </a:prstGeom>
+          <a:solidFill>
+            <a:srgbClr val="2B59D9"/>
+          </a:solidFill>
+          <a:ln>
+            <a:noFill/>
+          </a:ln>
+        </p:spPr>
+        <p:style>
+          <a:lnRef idx="1">
+            <a:schemeClr val="accent1"/>
+          </a:lnRef>
+          <a:fillRef idx="3">
+            <a:schemeClr val="accent1"/>
+          </a:fillRef>
+          <a:effectRef idx="2">
+            <a:schemeClr val="accent1"/>
+          </a:effectRef>
+          <a:fontRef idx="minor">
+            <a:schemeClr val="lt1"/>
+          </a:fontRef>
+        </p:style>
+        <p:txBody>
+          <a:bodyPr rtlCol="0" anchor="ctr"/>
+          <a:lstStyle/>
+          <a:p>
+            <a:pPr algn="ctr"/>
+          </a:p>
+        </p:txBody>
+      </p:sp>
+      <p:sp>
+        <p:nvSpPr>
+          <p:cNvPr id="4" name="TextBox 3"/>
           <p:cNvSpPr txBox="1"/>
           <p:nvPr/>
         </p:nvSpPr>
         <p:spPr>
           <a:xfrm>
-            <a:off x="731520" y="457200"/>
-            <a:ext cx="10728655" cy="365760"/>
+            <a:off x="731520" y="128016"/>
+            <a:ext cx="320040" cy="320040"/>
           </a:xfrm>
           <a:prstGeom prst="rect">
             <a:avLst/>
@@ -5077,34 +7183,35 @@
           <a:noFill/>
         </p:spPr>
         <p:txBody>
-          <a:bodyPr wrap="square" lIns="0" tIns="0" rIns="0" bIns="0">
+          <a:bodyPr wrap="none" lIns="0" tIns="0" rIns="0" bIns="0">
             <a:spAutoFit/>
           </a:bodyPr>
           <a:lstStyle/>
           <a:p>
             <a:pPr>
-              <a:defRPr sz="1100" b="1">
-                <a:solidFill>
-                  <a:srgbClr val="2B59D9"/>
-                </a:solidFill>
-              </a:defRPr>
-            </a:pPr>
-            <a:r>
-              <a:t>FILTERING OUT BAD FITS</a:t>
-            </a:r>
-          </a:p>
-        </p:txBody>
-      </p:sp>
-      <p:sp>
-        <p:nvSpPr>
-          <p:cNvPr id="3" name="TextBox 2"/>
+              <a:defRPr sz="1400" b="1">
+                <a:solidFill>
+                  <a:srgbClr val="FFFFFF"/>
+                </a:solidFill>
+                <a:latin typeface="Courier New"/>
+              </a:defRPr>
+            </a:pPr>
+            <a:r>
+              <a:t>›_</a:t>
+            </a:r>
+          </a:p>
+        </p:txBody>
+      </p:sp>
+      <p:sp>
+        <p:nvSpPr>
+          <p:cNvPr id="5" name="TextBox 4"/>
           <p:cNvSpPr txBox="1"/>
           <p:nvPr/>
         </p:nvSpPr>
         <p:spPr>
           <a:xfrm>
-            <a:off x="731520" y="777240"/>
-            <a:ext cx="10728655" cy="731520"/>
+            <a:off x="1143000" y="146304"/>
+            <a:ext cx="4114800" cy="320040"/>
           </a:xfrm>
           <a:prstGeom prst="rect">
             <a:avLst/>
@@ -5112,16 +7219,170 @@
           <a:noFill/>
         </p:spPr>
         <p:txBody>
-          <a:bodyPr wrap="square" lIns="0" tIns="0" rIns="0" bIns="0">
+          <a:bodyPr wrap="none" lIns="0" tIns="0" rIns="0" bIns="0">
             <a:spAutoFit/>
           </a:bodyPr>
           <a:lstStyle/>
           <a:p>
             <a:pPr>
-              <a:defRPr sz="2600" b="1">
+              <a:defRPr sz="1300" b="1">
+                <a:solidFill>
+                  <a:srgbClr val="FFFFFF"/>
+                </a:solidFill>
+                <a:latin typeface="Helvetica"/>
+              </a:defRPr>
+            </a:pPr>
+            <a:r>
+              <a:t>TECHNOLOGY CONSULTANTS</a:t>
+            </a:r>
+          </a:p>
+        </p:txBody>
+      </p:sp>
+      <p:sp>
+        <p:nvSpPr>
+          <p:cNvPr id="6" name="TextBox 5"/>
+          <p:cNvSpPr txBox="1"/>
+          <p:nvPr/>
+        </p:nvSpPr>
+        <p:spPr>
+          <a:xfrm>
+            <a:off x="6858000" y="164592"/>
+            <a:ext cx="4572000" cy="320040"/>
+          </a:xfrm>
+          <a:prstGeom prst="rect">
+            <a:avLst/>
+          </a:prstGeom>
+          <a:noFill/>
+        </p:spPr>
+        <p:txBody>
+          <a:bodyPr wrap="none" lIns="0" tIns="0" rIns="0" bIns="0">
+            <a:spAutoFit/>
+          </a:bodyPr>
+          <a:lstStyle/>
+          <a:p>
+            <a:pPr algn="r">
+              <a:defRPr sz="1100">
+                <a:solidFill>
+                  <a:srgbClr val="D99B26"/>
+                </a:solidFill>
+                <a:latin typeface="Courier New"/>
+              </a:defRPr>
+            </a:pPr>
+            <a:r>
+              <a:t>05 / DISQUALIFIERS</a:t>
+            </a:r>
+          </a:p>
+        </p:txBody>
+      </p:sp>
+      <p:sp>
+        <p:nvSpPr>
+          <p:cNvPr id="7" name="Rounded Rectangle 6"/>
+          <p:cNvSpPr/>
+          <p:nvPr/>
+        </p:nvSpPr>
+        <p:spPr>
+          <a:xfrm>
+            <a:off x="731520" y="822960"/>
+            <a:ext cx="2267712" cy="292608"/>
+          </a:xfrm>
+          <a:prstGeom prst="roundRect">
+            <a:avLst/>
+          </a:prstGeom>
+          <a:solidFill>
+            <a:srgbClr val="FEF2F2"/>
+          </a:solidFill>
+          <a:ln w="12700">
+            <a:solidFill>
+              <a:srgbClr val="DC2626"/>
+            </a:solidFill>
+          </a:ln>
+        </p:spPr>
+        <p:style>
+          <a:lnRef idx="1">
+            <a:schemeClr val="accent1"/>
+          </a:lnRef>
+          <a:fillRef idx="3">
+            <a:schemeClr val="accent1"/>
+          </a:fillRef>
+          <a:effectRef idx="2">
+            <a:schemeClr val="accent1"/>
+          </a:effectRef>
+          <a:fontRef idx="minor">
+            <a:schemeClr val="lt1"/>
+          </a:fontRef>
+        </p:style>
+        <p:txBody>
+          <a:bodyPr rtlCol="0" anchor="ctr"/>
+          <a:lstStyle/>
+          <a:p>
+            <a:pPr algn="ctr"/>
+          </a:p>
+        </p:txBody>
+      </p:sp>
+      <p:sp>
+        <p:nvSpPr>
+          <p:cNvPr id="8" name="TextBox 7"/>
+          <p:cNvSpPr txBox="1"/>
+          <p:nvPr/>
+        </p:nvSpPr>
+        <p:spPr>
+          <a:xfrm>
+            <a:off x="731520" y="859536"/>
+            <a:ext cx="2267712" cy="256032"/>
+          </a:xfrm>
+          <a:prstGeom prst="rect">
+            <a:avLst/>
+          </a:prstGeom>
+          <a:noFill/>
+        </p:spPr>
+        <p:txBody>
+          <a:bodyPr wrap="none" lIns="0" tIns="0" rIns="0" bIns="0">
+            <a:spAutoFit/>
+          </a:bodyPr>
+          <a:lstStyle/>
+          <a:p>
+            <a:pPr algn="ctr">
+              <a:defRPr sz="1000" b="1">
+                <a:solidFill>
+                  <a:srgbClr val="DC2626"/>
+                </a:solidFill>
+                <a:latin typeface="Courier New"/>
+              </a:defRPr>
+            </a:pPr>
+            <a:r>
+              <a:t>FILTERING BAD FITS</a:t>
+            </a:r>
+          </a:p>
+        </p:txBody>
+      </p:sp>
+      <p:sp>
+        <p:nvSpPr>
+          <p:cNvPr id="9" name="TextBox 8"/>
+          <p:cNvSpPr txBox="1"/>
+          <p:nvPr/>
+        </p:nvSpPr>
+        <p:spPr>
+          <a:xfrm>
+            <a:off x="731520" y="1188720"/>
+            <a:ext cx="10728655" cy="548640"/>
+          </a:xfrm>
+          <a:prstGeom prst="rect">
+            <a:avLst/>
+          </a:prstGeom>
+          <a:noFill/>
+        </p:spPr>
+        <p:txBody>
+          <a:bodyPr wrap="none">
+            <a:spAutoFit/>
+          </a:bodyPr>
+          <a:lstStyle/>
+          <a:p>
+            <a:pPr>
+              <a:defRPr sz="2400" b="1">
                 <a:solidFill>
                   <a:srgbClr val="16161A"/>
                 </a:solidFill>
+                <a:latin typeface="Helvetica"/>
               </a:defRPr>
             </a:pPr>
             <a:r>
@@ -5132,14 +7393,14 @@
       </p:sp>
       <p:sp>
         <p:nvSpPr>
-          <p:cNvPr id="4" name="Rounded Rectangle 3"/>
+          <p:cNvPr id="10" name="Rounded Rectangle 9"/>
           <p:cNvSpPr/>
           <p:nvPr/>
         </p:nvSpPr>
         <p:spPr>
           <a:xfrm>
-            <a:off x="731520" y="1828800"/>
-            <a:ext cx="5166360" cy="4114800"/>
+            <a:off x="731520" y="1920240"/>
+            <a:ext cx="5166360" cy="3931920"/>
           </a:xfrm>
           <a:prstGeom prst="roundRect">
             <a:avLst/>
@@ -5177,14 +7438,14 @@
       </p:sp>
       <p:sp>
         <p:nvSpPr>
-          <p:cNvPr id="5" name="TextBox 4"/>
+          <p:cNvPr id="11" name="TextBox 10"/>
           <p:cNvSpPr txBox="1"/>
           <p:nvPr/>
         </p:nvSpPr>
         <p:spPr>
           <a:xfrm>
-            <a:off x="1005840" y="2103120"/>
-            <a:ext cx="4617720" cy="3566160"/>
+            <a:off x="1005840" y="2194560"/>
+            <a:ext cx="4617720" cy="3474720"/>
           </a:xfrm>
           <a:prstGeom prst="rect">
             <a:avLst/>
@@ -5201,14 +7462,15 @@
               <a:spcAft>
                 <a:spcPts val="1400"/>
               </a:spcAft>
-              <a:defRPr sz="1800" b="1">
+              <a:defRPr sz="1200" b="1">
                 <a:solidFill>
                   <a:srgbClr val="DC2626"/>
                 </a:solidFill>
-              </a:defRPr>
-            </a:pPr>
-            <a:r>
-              <a:t>❌  Low-Cost Template Projects</a:t>
+                <a:latin typeface="Courier New"/>
+              </a:defRPr>
+            </a:pPr>
+            <a:r>
+              <a:t>❌ LOW-COST TEMPLATE PROJECTS</a:t>
             </a:r>
           </a:p>
           <a:p>
@@ -5220,10 +7482,11 @@
                 <a:solidFill>
                   <a:srgbClr val="454337"/>
                 </a:solidFill>
-              </a:defRPr>
-            </a:pPr>
-            <a:r>
-              <a:t>•  Looking for offshore body-shopping or commoditized hourly rates.</a:t>
+                <a:latin typeface="Helvetica"/>
+              </a:defRPr>
+            </a:pPr>
+            <a:r>
+              <a:t>✕  Looking for offshore body-shopping or commoditized hourly rates.</a:t>
             </a:r>
           </a:p>
           <a:p>
@@ -5235,10 +7498,11 @@
                 <a:solidFill>
                   <a:srgbClr val="454337"/>
                 </a:solidFill>
-              </a:defRPr>
-            </a:pPr>
-            <a:r>
-              <a:t>•  Basic WordPress brochure sites or generic template setups.</a:t>
+                <a:latin typeface="Helvetica"/>
+              </a:defRPr>
+            </a:pPr>
+            <a:r>
+              <a:t>✕  Basic WordPress brochure sites or generic no-code template setups.</a:t>
             </a:r>
           </a:p>
           <a:p>
@@ -5250,10 +7514,11 @@
                 <a:solidFill>
                   <a:srgbClr val="454337"/>
                 </a:solidFill>
-              </a:defRPr>
-            </a:pPr>
-            <a:r>
-              <a:t>•  No engineering budget or unwilling to invest in custom architecture.</a:t>
+                <a:latin typeface="Helvetica"/>
+              </a:defRPr>
+            </a:pPr>
+            <a:r>
+              <a:t>✕  No engineering budget or unwilling to invest in custom architecture.</a:t>
             </a:r>
           </a:p>
           <a:p>
@@ -5265,24 +7530,25 @@
                 <a:solidFill>
                   <a:srgbClr val="454337"/>
                 </a:solidFill>
-              </a:defRPr>
-            </a:pPr>
-            <a:r>
-              <a:t>•  Unclear business goals without measurable outcome targets.</a:t>
-            </a:r>
-          </a:p>
-        </p:txBody>
-      </p:sp>
-      <p:sp>
-        <p:nvSpPr>
-          <p:cNvPr id="6" name="Rounded Rectangle 5"/>
+                <a:latin typeface="Helvetica"/>
+              </a:defRPr>
+            </a:pPr>
+            <a:r>
+              <a:t>✕  Unclear business goals without measurable outcome targets.</a:t>
+            </a:r>
+          </a:p>
+        </p:txBody>
+      </p:sp>
+      <p:sp>
+        <p:nvSpPr>
+          <p:cNvPr id="12" name="Rounded Rectangle 11"/>
           <p:cNvSpPr/>
           <p:nvPr/>
         </p:nvSpPr>
         <p:spPr>
           <a:xfrm>
-            <a:off x="6263640" y="1828800"/>
-            <a:ext cx="5166360" cy="4114800"/>
+            <a:off x="6263640" y="1920240"/>
+            <a:ext cx="5166360" cy="3931920"/>
           </a:xfrm>
           <a:prstGeom prst="roundRect">
             <a:avLst/>
@@ -5320,14 +7586,14 @@
       </p:sp>
       <p:sp>
         <p:nvSpPr>
-          <p:cNvPr id="7" name="TextBox 6"/>
+          <p:cNvPr id="13" name="TextBox 12"/>
           <p:cNvSpPr txBox="1"/>
           <p:nvPr/>
         </p:nvSpPr>
         <p:spPr>
           <a:xfrm>
-            <a:off x="6537960" y="2103120"/>
-            <a:ext cx="4617720" cy="3566160"/>
+            <a:off x="6537960" y="2194560"/>
+            <a:ext cx="4617720" cy="3474720"/>
           </a:xfrm>
           <a:prstGeom prst="rect">
             <a:avLst/>
@@ -5344,14 +7610,15 @@
               <a:spcAft>
                 <a:spcPts val="1400"/>
               </a:spcAft>
-              <a:defRPr sz="1800" b="1">
+              <a:defRPr sz="1200" b="1">
                 <a:solidFill>
                   <a:srgbClr val="DC2626"/>
                 </a:solidFill>
-              </a:defRPr>
-            </a:pPr>
-            <a:r>
-              <a:t>❌  Un-Vetted “AI Hype” Projects</a:t>
+                <a:latin typeface="Courier New"/>
+              </a:defRPr>
+            </a:pPr>
+            <a:r>
+              <a:t>❌ UN-VETTED "AI HYPE" PROJECTS</a:t>
             </a:r>
           </a:p>
           <a:p>
@@ -5363,10 +7630,11 @@
                 <a:solidFill>
                   <a:srgbClr val="454337"/>
                 </a:solidFill>
-              </a:defRPr>
-            </a:pPr>
-            <a:r>
-              <a:t>•  Seeking flashy AI wrappers without backend integration or API access.</a:t>
+                <a:latin typeface="Helvetica"/>
+              </a:defRPr>
+            </a:pPr>
+            <a:r>
+              <a:t>✕  Seeking flashy AI wrappers without backend integration or API access.</a:t>
             </a:r>
           </a:p>
           <a:p>
@@ -5378,10 +7646,11 @@
                 <a:solidFill>
                   <a:srgbClr val="454337"/>
                 </a:solidFill>
-              </a:defRPr>
-            </a:pPr>
-            <a:r>
-              <a:t>•  Unwilling to maintain data hygiene, security controls, or human-in-the-loop checks.</a:t>
+                <a:latin typeface="Helvetica"/>
+              </a:defRPr>
+            </a:pPr>
+            <a:r>
+              <a:t>✕  Unwilling to maintain data hygiene, security controls, or HITL oversight.</a:t>
             </a:r>
           </a:p>
           <a:p>
@@ -5393,10 +7662,11 @@
                 <a:solidFill>
                   <a:srgbClr val="454337"/>
                 </a:solidFill>
-              </a:defRPr>
-            </a:pPr>
-            <a:r>
-              <a:t>•  Expectations of automated AI magic without structured workflow design.</a:t>
+                <a:latin typeface="Helvetica"/>
+              </a:defRPr>
+            </a:pPr>
+            <a:r>
+              <a:t>✕  Expectations of automated AI magic without structured workflow design.</a:t>
             </a:r>
           </a:p>
           <a:p>
@@ -5408,10 +7678,126 @@
                 <a:solidFill>
                   <a:srgbClr val="454337"/>
                 </a:solidFill>
-              </a:defRPr>
-            </a:pPr>
-            <a:r>
-              <a:t>•  No internal subject matter expert to validate AI outputs.</a:t>
+                <a:latin typeface="Helvetica"/>
+              </a:defRPr>
+            </a:pPr>
+            <a:r>
+              <a:t>✕  No internal subject matter expert to validate AI outputs.</a:t>
+            </a:r>
+          </a:p>
+        </p:txBody>
+      </p:sp>
+      <p:sp>
+        <p:nvSpPr>
+          <p:cNvPr id="14" name="Rectangle 13"/>
+          <p:cNvSpPr/>
+          <p:nvPr/>
+        </p:nvSpPr>
+        <p:spPr>
+          <a:xfrm>
+            <a:off x="731520" y="6400800"/>
+            <a:ext cx="10728655" cy="12700"/>
+          </a:xfrm>
+          <a:prstGeom prst="rect">
+            <a:avLst/>
+          </a:prstGeom>
+          <a:solidFill>
+            <a:srgbClr val="C9C3B2"/>
+          </a:solidFill>
+          <a:ln>
+            <a:noFill/>
+          </a:ln>
+        </p:spPr>
+        <p:style>
+          <a:lnRef idx="1">
+            <a:schemeClr val="accent1"/>
+          </a:lnRef>
+          <a:fillRef idx="3">
+            <a:schemeClr val="accent1"/>
+          </a:fillRef>
+          <a:effectRef idx="2">
+            <a:schemeClr val="accent1"/>
+          </a:effectRef>
+          <a:fontRef idx="minor">
+            <a:schemeClr val="lt1"/>
+          </a:fontRef>
+        </p:style>
+        <p:txBody>
+          <a:bodyPr rtlCol="0" anchor="ctr"/>
+          <a:lstStyle/>
+          <a:p>
+            <a:pPr algn="ctr"/>
+          </a:p>
+        </p:txBody>
+      </p:sp>
+      <p:sp>
+        <p:nvSpPr>
+          <p:cNvPr id="15" name="TextBox 14"/>
+          <p:cNvSpPr txBox="1"/>
+          <p:nvPr/>
+        </p:nvSpPr>
+        <p:spPr>
+          <a:xfrm>
+            <a:off x="731520" y="6446520"/>
+            <a:ext cx="7315200" cy="320040"/>
+          </a:xfrm>
+          <a:prstGeom prst="rect">
+            <a:avLst/>
+          </a:prstGeom>
+          <a:noFill/>
+        </p:spPr>
+        <p:txBody>
+          <a:bodyPr wrap="none" lIns="0" tIns="0" rIns="0" bIns="0">
+            <a:spAutoFit/>
+          </a:bodyPr>
+          <a:lstStyle/>
+          <a:p>
+            <a:pPr>
+              <a:defRPr sz="1000">
+                <a:solidFill>
+                  <a:srgbClr val="5F5C52"/>
+                </a:solidFill>
+                <a:latin typeface="Courier New"/>
+              </a:defRPr>
+            </a:pPr>
+            <a:r>
+              <a:t>technologyconsultants.ventures  ·  San Diego · Tijuana</a:t>
+            </a:r>
+          </a:p>
+        </p:txBody>
+      </p:sp>
+      <p:sp>
+        <p:nvSpPr>
+          <p:cNvPr id="16" name="TextBox 15"/>
+          <p:cNvSpPr txBox="1"/>
+          <p:nvPr/>
+        </p:nvSpPr>
+        <p:spPr>
+          <a:xfrm>
+            <a:off x="9631375" y="6446520"/>
+            <a:ext cx="1828800" cy="320040"/>
+          </a:xfrm>
+          <a:prstGeom prst="rect">
+            <a:avLst/>
+          </a:prstGeom>
+          <a:noFill/>
+        </p:spPr>
+        <p:txBody>
+          <a:bodyPr wrap="none" lIns="0" tIns="0" rIns="0" bIns="0">
+            <a:spAutoFit/>
+          </a:bodyPr>
+          <a:lstStyle/>
+          <a:p>
+            <a:pPr algn="r">
+              <a:defRPr sz="1000">
+                <a:solidFill>
+                  <a:srgbClr val="5F5C52"/>
+                </a:solidFill>
+                <a:latin typeface="Courier New"/>
+              </a:defRPr>
+            </a:pPr>
+            <a:r>
+              <a:t>06 / 08</a:t>
             </a:r>
           </a:p>
         </p:txBody>
@@ -5444,14 +7830,102 @@
       <p:grpSpPr/>
       <p:sp>
         <p:nvSpPr>
-          <p:cNvPr id="2" name="TextBox 1"/>
+          <p:cNvPr id="2" name="Rectangle 1"/>
+          <p:cNvSpPr/>
+          <p:nvPr/>
+        </p:nvSpPr>
+        <p:spPr>
+          <a:xfrm>
+            <a:off x="0" y="0"/>
+            <a:ext cx="12191695" cy="594360"/>
+          </a:xfrm>
+          <a:prstGeom prst="rect">
+            <a:avLst/>
+          </a:prstGeom>
+          <a:solidFill>
+            <a:srgbClr val="121216"/>
+          </a:solidFill>
+          <a:ln w="12700">
+            <a:solidFill>
+              <a:srgbClr val="26262C"/>
+            </a:solidFill>
+          </a:ln>
+        </p:spPr>
+        <p:style>
+          <a:lnRef idx="1">
+            <a:schemeClr val="accent1"/>
+          </a:lnRef>
+          <a:fillRef idx="3">
+            <a:schemeClr val="accent1"/>
+          </a:fillRef>
+          <a:effectRef idx="2">
+            <a:schemeClr val="accent1"/>
+          </a:effectRef>
+          <a:fontRef idx="minor">
+            <a:schemeClr val="lt1"/>
+          </a:fontRef>
+        </p:style>
+        <p:txBody>
+          <a:bodyPr rtlCol="0" anchor="ctr"/>
+          <a:lstStyle/>
+          <a:p>
+            <a:pPr algn="ctr"/>
+          </a:p>
+        </p:txBody>
+      </p:sp>
+      <p:sp>
+        <p:nvSpPr>
+          <p:cNvPr id="3" name="Rounded Rectangle 2"/>
+          <p:cNvSpPr/>
+          <p:nvPr/>
+        </p:nvSpPr>
+        <p:spPr>
+          <a:xfrm>
+            <a:off x="731520" y="137160"/>
+            <a:ext cx="320040" cy="320040"/>
+          </a:xfrm>
+          <a:prstGeom prst="roundRect">
+            <a:avLst/>
+          </a:prstGeom>
+          <a:solidFill>
+            <a:srgbClr val="2B59D9"/>
+          </a:solidFill>
+          <a:ln>
+            <a:noFill/>
+          </a:ln>
+        </p:spPr>
+        <p:style>
+          <a:lnRef idx="1">
+            <a:schemeClr val="accent1"/>
+          </a:lnRef>
+          <a:fillRef idx="3">
+            <a:schemeClr val="accent1"/>
+          </a:fillRef>
+          <a:effectRef idx="2">
+            <a:schemeClr val="accent1"/>
+          </a:effectRef>
+          <a:fontRef idx="minor">
+            <a:schemeClr val="lt1"/>
+          </a:fontRef>
+        </p:style>
+        <p:txBody>
+          <a:bodyPr rtlCol="0" anchor="ctr"/>
+          <a:lstStyle/>
+          <a:p>
+            <a:pPr algn="ctr"/>
+          </a:p>
+        </p:txBody>
+      </p:sp>
+      <p:sp>
+        <p:nvSpPr>
+          <p:cNvPr id="4" name="TextBox 3"/>
           <p:cNvSpPr txBox="1"/>
           <p:nvPr/>
         </p:nvSpPr>
         <p:spPr>
           <a:xfrm>
-            <a:off x="731520" y="457200"/>
-            <a:ext cx="10728655" cy="365760"/>
+            <a:off x="731520" y="128016"/>
+            <a:ext cx="320040" cy="320040"/>
           </a:xfrm>
           <a:prstGeom prst="rect">
             <a:avLst/>
@@ -5459,34 +7933,35 @@
           <a:noFill/>
         </p:spPr>
         <p:txBody>
-          <a:bodyPr wrap="square" lIns="0" tIns="0" rIns="0" bIns="0">
+          <a:bodyPr wrap="none" lIns="0" tIns="0" rIns="0" bIns="0">
             <a:spAutoFit/>
           </a:bodyPr>
           <a:lstStyle/>
           <a:p>
             <a:pPr>
-              <a:defRPr sz="1100" b="1">
-                <a:solidFill>
-                  <a:srgbClr val="2B59D9"/>
-                </a:solidFill>
-              </a:defRPr>
-            </a:pPr>
-            <a:r>
-              <a:t>ENGAGEMENT STRUCTURE</a:t>
-            </a:r>
-          </a:p>
-        </p:txBody>
-      </p:sp>
-      <p:sp>
-        <p:nvSpPr>
-          <p:cNvPr id="3" name="TextBox 2"/>
+              <a:defRPr sz="1400" b="1">
+                <a:solidFill>
+                  <a:srgbClr val="FFFFFF"/>
+                </a:solidFill>
+                <a:latin typeface="Courier New"/>
+              </a:defRPr>
+            </a:pPr>
+            <a:r>
+              <a:t>›_</a:t>
+            </a:r>
+          </a:p>
+        </p:txBody>
+      </p:sp>
+      <p:sp>
+        <p:nvSpPr>
+          <p:cNvPr id="5" name="TextBox 4"/>
           <p:cNvSpPr txBox="1"/>
           <p:nvPr/>
         </p:nvSpPr>
         <p:spPr>
           <a:xfrm>
-            <a:off x="731520" y="777240"/>
-            <a:ext cx="10728655" cy="731520"/>
+            <a:off x="1143000" y="146304"/>
+            <a:ext cx="4114800" cy="320040"/>
           </a:xfrm>
           <a:prstGeom prst="rect">
             <a:avLst/>
@@ -5494,16 +7969,170 @@
           <a:noFill/>
         </p:spPr>
         <p:txBody>
-          <a:bodyPr wrap="square" lIns="0" tIns="0" rIns="0" bIns="0">
+          <a:bodyPr wrap="none" lIns="0" tIns="0" rIns="0" bIns="0">
             <a:spAutoFit/>
           </a:bodyPr>
           <a:lstStyle/>
           <a:p>
             <a:pPr>
-              <a:defRPr sz="2600" b="1">
+              <a:defRPr sz="1300" b="1">
+                <a:solidFill>
+                  <a:srgbClr val="FFFFFF"/>
+                </a:solidFill>
+                <a:latin typeface="Helvetica"/>
+              </a:defRPr>
+            </a:pPr>
+            <a:r>
+              <a:t>TECHNOLOGY CONSULTANTS</a:t>
+            </a:r>
+          </a:p>
+        </p:txBody>
+      </p:sp>
+      <p:sp>
+        <p:nvSpPr>
+          <p:cNvPr id="6" name="TextBox 5"/>
+          <p:cNvSpPr txBox="1"/>
+          <p:nvPr/>
+        </p:nvSpPr>
+        <p:spPr>
+          <a:xfrm>
+            <a:off x="6858000" y="164592"/>
+            <a:ext cx="4572000" cy="320040"/>
+          </a:xfrm>
+          <a:prstGeom prst="rect">
+            <a:avLst/>
+          </a:prstGeom>
+          <a:noFill/>
+        </p:spPr>
+        <p:txBody>
+          <a:bodyPr wrap="none" lIns="0" tIns="0" rIns="0" bIns="0">
+            <a:spAutoFit/>
+          </a:bodyPr>
+          <a:lstStyle/>
+          <a:p>
+            <a:pPr algn="r">
+              <a:defRPr sz="1100">
+                <a:solidFill>
+                  <a:srgbClr val="D99B26"/>
+                </a:solidFill>
+                <a:latin typeface="Courier New"/>
+              </a:defRPr>
+            </a:pPr>
+            <a:r>
+              <a:t>06 / ENGAGEMENT MODELS</a:t>
+            </a:r>
+          </a:p>
+        </p:txBody>
+      </p:sp>
+      <p:sp>
+        <p:nvSpPr>
+          <p:cNvPr id="7" name="Rounded Rectangle 6"/>
+          <p:cNvSpPr/>
+          <p:nvPr/>
+        </p:nvSpPr>
+        <p:spPr>
+          <a:xfrm>
+            <a:off x="731520" y="822960"/>
+            <a:ext cx="2167128" cy="292608"/>
+          </a:xfrm>
+          <a:prstGeom prst="roundRect">
+            <a:avLst/>
+          </a:prstGeom>
+          <a:solidFill>
+            <a:srgbClr val="EFE9D8"/>
+          </a:solidFill>
+          <a:ln w="12700">
+            <a:solidFill>
+              <a:srgbClr val="2B59D9"/>
+            </a:solidFill>
+          </a:ln>
+        </p:spPr>
+        <p:style>
+          <a:lnRef idx="1">
+            <a:schemeClr val="accent1"/>
+          </a:lnRef>
+          <a:fillRef idx="3">
+            <a:schemeClr val="accent1"/>
+          </a:fillRef>
+          <a:effectRef idx="2">
+            <a:schemeClr val="accent1"/>
+          </a:effectRef>
+          <a:fontRef idx="minor">
+            <a:schemeClr val="lt1"/>
+          </a:fontRef>
+        </p:style>
+        <p:txBody>
+          <a:bodyPr rtlCol="0" anchor="ctr"/>
+          <a:lstStyle/>
+          <a:p>
+            <a:pPr algn="ctr"/>
+          </a:p>
+        </p:txBody>
+      </p:sp>
+      <p:sp>
+        <p:nvSpPr>
+          <p:cNvPr id="8" name="TextBox 7"/>
+          <p:cNvSpPr txBox="1"/>
+          <p:nvPr/>
+        </p:nvSpPr>
+        <p:spPr>
+          <a:xfrm>
+            <a:off x="731520" y="859536"/>
+            <a:ext cx="2167128" cy="256032"/>
+          </a:xfrm>
+          <a:prstGeom prst="rect">
+            <a:avLst/>
+          </a:prstGeom>
+          <a:noFill/>
+        </p:spPr>
+        <p:txBody>
+          <a:bodyPr wrap="none" lIns="0" tIns="0" rIns="0" bIns="0">
+            <a:spAutoFit/>
+          </a:bodyPr>
+          <a:lstStyle/>
+          <a:p>
+            <a:pPr algn="ctr">
+              <a:defRPr sz="1000" b="1">
+                <a:solidFill>
+                  <a:srgbClr val="2B59D9"/>
+                </a:solidFill>
+                <a:latin typeface="Courier New"/>
+              </a:defRPr>
+            </a:pPr>
+            <a:r>
+              <a:t>ENGAGEMENT MODELS</a:t>
+            </a:r>
+          </a:p>
+        </p:txBody>
+      </p:sp>
+      <p:sp>
+        <p:nvSpPr>
+          <p:cNvPr id="9" name="TextBox 8"/>
+          <p:cNvSpPr txBox="1"/>
+          <p:nvPr/>
+        </p:nvSpPr>
+        <p:spPr>
+          <a:xfrm>
+            <a:off x="731520" y="1188720"/>
+            <a:ext cx="10728655" cy="548640"/>
+          </a:xfrm>
+          <a:prstGeom prst="rect">
+            <a:avLst/>
+          </a:prstGeom>
+          <a:noFill/>
+        </p:spPr>
+        <p:txBody>
+          <a:bodyPr wrap="none">
+            <a:spAutoFit/>
+          </a:bodyPr>
+          <a:lstStyle/>
+          <a:p>
+            <a:pPr>
+              <a:defRPr sz="2400" b="1">
                 <a:solidFill>
                   <a:srgbClr val="16161A"/>
                 </a:solidFill>
+                <a:latin typeface="Helvetica"/>
               </a:defRPr>
             </a:pPr>
             <a:r>
@@ -5514,14 +8143,14 @@
       </p:sp>
       <p:sp>
         <p:nvSpPr>
-          <p:cNvPr id="4" name="Rounded Rectangle 3"/>
+          <p:cNvPr id="10" name="Rounded Rectangle 9"/>
           <p:cNvSpPr/>
           <p:nvPr/>
         </p:nvSpPr>
         <p:spPr>
           <a:xfrm>
-            <a:off x="731520" y="1828800"/>
-            <a:ext cx="3328416" cy="4114800"/>
+            <a:off x="731520" y="1920240"/>
+            <a:ext cx="3328416" cy="3931920"/>
           </a:xfrm>
           <a:prstGeom prst="roundRect">
             <a:avLst/>
@@ -5559,14 +8188,14 @@
       </p:sp>
       <p:sp>
         <p:nvSpPr>
-          <p:cNvPr id="5" name="TextBox 4"/>
+          <p:cNvPr id="11" name="TextBox 10"/>
           <p:cNvSpPr txBox="1"/>
           <p:nvPr/>
         </p:nvSpPr>
         <p:spPr>
           <a:xfrm>
-            <a:off x="1005840" y="2103120"/>
-            <a:ext cx="2779776" cy="3566160"/>
+            <a:off x="1005840" y="2194560"/>
+            <a:ext cx="2779776" cy="3383280"/>
           </a:xfrm>
           <a:prstGeom prst="rect">
             <a:avLst/>
@@ -5581,16 +8210,17 @@
           <a:p>
             <a:pPr>
               <a:spcAft>
-                <a:spcPts val="800"/>
+                <a:spcPts val="1000"/>
               </a:spcAft>
-              <a:defRPr sz="1100" b="1">
+              <a:defRPr sz="1000" b="1">
                 <a:solidFill>
                   <a:srgbClr val="2B59D9"/>
                 </a:solidFill>
-              </a:defRPr>
-            </a:pPr>
-            <a:r>
-              <a:t>2 - 4 WEEKS</a:t>
+                <a:latin typeface="Courier New"/>
+              </a:defRPr>
+            </a:pPr>
+            <a:r>
+              <a:t>[ 2 - 4 WEEKS ]</a:t>
             </a:r>
           </a:p>
           <a:p>
@@ -5598,14 +8228,15 @@
               <a:spcAft>
                 <a:spcPts val="1200"/>
               </a:spcAft>
-              <a:defRPr sz="1700" b="1">
+              <a:defRPr sz="1800" b="1">
                 <a:solidFill>
                   <a:srgbClr val="16161A"/>
                 </a:solidFill>
-              </a:defRPr>
-            </a:pPr>
-            <a:r>
-              <a:t>1. Rapid Proof-of-Concept (POC)</a:t>
+                <a:latin typeface="Helvetica"/>
+              </a:defRPr>
+            </a:pPr>
+            <a:r>
+              <a:t>1. Proof-of-Concept Sprint</a:t>
             </a:r>
           </a:p>
           <a:p>
@@ -5614,24 +8245,25 @@
                 <a:solidFill>
                   <a:srgbClr val="454337"/>
                 </a:solidFill>
-              </a:defRPr>
-            </a:pPr>
-            <a:r>
-              <a:t>Low-risk initial engagement to build a working prototype, validate API integrations (e.g. Workday/MCP), and prove feasibility before full rollout.</a:t>
-            </a:r>
-          </a:p>
-        </p:txBody>
-      </p:sp>
-      <p:sp>
-        <p:nvSpPr>
-          <p:cNvPr id="6" name="Rounded Rectangle 5"/>
+                <a:latin typeface="Helvetica"/>
+              </a:defRPr>
+            </a:pPr>
+            <a:r>
+              <a:t>Low-risk initial engagement to build a working prototype, validate API integrations (e.g. Workday/MCP), and prove feasibility.</a:t>
+            </a:r>
+          </a:p>
+        </p:txBody>
+      </p:sp>
+      <p:sp>
+        <p:nvSpPr>
+          <p:cNvPr id="12" name="Rounded Rectangle 11"/>
           <p:cNvSpPr/>
           <p:nvPr/>
         </p:nvSpPr>
         <p:spPr>
           <a:xfrm>
-            <a:off x="4297680" y="1828800"/>
-            <a:ext cx="3328416" cy="4114800"/>
+            <a:off x="4297680" y="1920240"/>
+            <a:ext cx="3328416" cy="3931920"/>
           </a:xfrm>
           <a:prstGeom prst="roundRect">
             <a:avLst/>
@@ -5669,14 +8301,14 @@
       </p:sp>
       <p:sp>
         <p:nvSpPr>
-          <p:cNvPr id="7" name="TextBox 6"/>
+          <p:cNvPr id="13" name="TextBox 12"/>
           <p:cNvSpPr txBox="1"/>
           <p:nvPr/>
         </p:nvSpPr>
         <p:spPr>
           <a:xfrm>
-            <a:off x="4572000" y="2103120"/>
-            <a:ext cx="2779776" cy="3566160"/>
+            <a:off x="4572000" y="2194560"/>
+            <a:ext cx="2779776" cy="3383280"/>
           </a:xfrm>
           <a:prstGeom prst="rect">
             <a:avLst/>
@@ -5691,16 +8323,17 @@
           <a:p>
             <a:pPr>
               <a:spcAft>
-                <a:spcPts val="800"/>
+                <a:spcPts val="1000"/>
               </a:spcAft>
-              <a:defRPr sz="1100" b="1">
+              <a:defRPr sz="1000" b="1">
                 <a:solidFill>
                   <a:srgbClr val="2B59D9"/>
                 </a:solidFill>
-              </a:defRPr>
-            </a:pPr>
-            <a:r>
-              <a:t>PROJECT-BASED / MILESTONE</a:t>
+                <a:latin typeface="Courier New"/>
+              </a:defRPr>
+            </a:pPr>
+            <a:r>
+              <a:t>[ PROJECT-BASED ]</a:t>
             </a:r>
           </a:p>
           <a:p>
@@ -5708,14 +8341,15 @@
               <a:spcAft>
                 <a:spcPts val="1200"/>
               </a:spcAft>
-              <a:defRPr sz="1700" b="1">
+              <a:defRPr sz="1800" b="1">
                 <a:solidFill>
                   <a:srgbClr val="16161A"/>
                 </a:solidFill>
-              </a:defRPr>
-            </a:pPr>
-            <a:r>
-              <a:t>2. Full Build &amp; Implementation</a:t>
+                <a:latin typeface="Helvetica"/>
+              </a:defRPr>
+            </a:pPr>
+            <a:r>
+              <a:t>2. Full Implementation</a:t>
             </a:r>
           </a:p>
           <a:p>
@@ -5724,6 +8358,7 @@
                 <a:solidFill>
                   <a:srgbClr val="454337"/>
                 </a:solidFill>
+                <a:latin typeface="Helvetica"/>
               </a:defRPr>
             </a:pPr>
             <a:r>
@@ -5734,14 +8369,14 @@
       </p:sp>
       <p:sp>
         <p:nvSpPr>
-          <p:cNvPr id="8" name="Rounded Rectangle 7"/>
+          <p:cNvPr id="14" name="Rounded Rectangle 13"/>
           <p:cNvSpPr/>
           <p:nvPr/>
         </p:nvSpPr>
         <p:spPr>
           <a:xfrm>
-            <a:off x="7863840" y="1828800"/>
-            <a:ext cx="3328416" cy="4114800"/>
+            <a:off x="7863840" y="1920240"/>
+            <a:ext cx="3328416" cy="3931920"/>
           </a:xfrm>
           <a:prstGeom prst="roundRect">
             <a:avLst/>
@@ -5779,14 +8414,14 @@
       </p:sp>
       <p:sp>
         <p:nvSpPr>
-          <p:cNvPr id="9" name="TextBox 8"/>
+          <p:cNvPr id="15" name="TextBox 14"/>
           <p:cNvSpPr txBox="1"/>
           <p:nvPr/>
         </p:nvSpPr>
         <p:spPr>
           <a:xfrm>
-            <a:off x="8138160" y="2103120"/>
-            <a:ext cx="2779776" cy="3566160"/>
+            <a:off x="8138160" y="2194560"/>
+            <a:ext cx="2779776" cy="3383280"/>
           </a:xfrm>
           <a:prstGeom prst="rect">
             <a:avLst/>
@@ -5801,16 +8436,17 @@
           <a:p>
             <a:pPr>
               <a:spcAft>
-                <a:spcPts val="800"/>
+                <a:spcPts val="1000"/>
               </a:spcAft>
-              <a:defRPr sz="1100" b="1">
+              <a:defRPr sz="1000" b="1">
                 <a:solidFill>
                   <a:srgbClr val="2B59D9"/>
                 </a:solidFill>
-              </a:defRPr>
-            </a:pPr>
-            <a:r>
-              <a:t>MONTHLY RETAINER</a:t>
+                <a:latin typeface="Courier New"/>
+              </a:defRPr>
+            </a:pPr>
+            <a:r>
+              <a:t>[ MONTHLY RETAINER ]</a:t>
             </a:r>
           </a:p>
           <a:p>
@@ -5818,14 +8454,15 @@
               <a:spcAft>
                 <a:spcPts val="1200"/>
               </a:spcAft>
-              <a:defRPr sz="1700" b="1">
+              <a:defRPr sz="1800" b="1">
                 <a:solidFill>
                   <a:srgbClr val="16161A"/>
                 </a:solidFill>
-              </a:defRPr>
-            </a:pPr>
-            <a:r>
-              <a:t>3. Strategic Advisory &amp; Architecture</a:t>
+                <a:latin typeface="Helvetica"/>
+              </a:defRPr>
+            </a:pPr>
+            <a:r>
+              <a:t>3. Strategic Advisory</a:t>
             </a:r>
           </a:p>
           <a:p>
@@ -5834,10 +8471,126 @@
                 <a:solidFill>
                   <a:srgbClr val="454337"/>
                 </a:solidFill>
+                <a:latin typeface="Helvetica"/>
               </a:defRPr>
             </a:pPr>
             <a:r>
               <a:t>Ongoing technical leadership, architecture reviews, AI readiness roadmap, and engineering team guidance.</a:t>
+            </a:r>
+          </a:p>
+        </p:txBody>
+      </p:sp>
+      <p:sp>
+        <p:nvSpPr>
+          <p:cNvPr id="16" name="Rectangle 15"/>
+          <p:cNvSpPr/>
+          <p:nvPr/>
+        </p:nvSpPr>
+        <p:spPr>
+          <a:xfrm>
+            <a:off x="731520" y="6400800"/>
+            <a:ext cx="10728655" cy="12700"/>
+          </a:xfrm>
+          <a:prstGeom prst="rect">
+            <a:avLst/>
+          </a:prstGeom>
+          <a:solidFill>
+            <a:srgbClr val="C9C3B2"/>
+          </a:solidFill>
+          <a:ln>
+            <a:noFill/>
+          </a:ln>
+        </p:spPr>
+        <p:style>
+          <a:lnRef idx="1">
+            <a:schemeClr val="accent1"/>
+          </a:lnRef>
+          <a:fillRef idx="3">
+            <a:schemeClr val="accent1"/>
+          </a:fillRef>
+          <a:effectRef idx="2">
+            <a:schemeClr val="accent1"/>
+          </a:effectRef>
+          <a:fontRef idx="minor">
+            <a:schemeClr val="lt1"/>
+          </a:fontRef>
+        </p:style>
+        <p:txBody>
+          <a:bodyPr rtlCol="0" anchor="ctr"/>
+          <a:lstStyle/>
+          <a:p>
+            <a:pPr algn="ctr"/>
+          </a:p>
+        </p:txBody>
+      </p:sp>
+      <p:sp>
+        <p:nvSpPr>
+          <p:cNvPr id="17" name="TextBox 16"/>
+          <p:cNvSpPr txBox="1"/>
+          <p:nvPr/>
+        </p:nvSpPr>
+        <p:spPr>
+          <a:xfrm>
+            <a:off x="731520" y="6446520"/>
+            <a:ext cx="7315200" cy="320040"/>
+          </a:xfrm>
+          <a:prstGeom prst="rect">
+            <a:avLst/>
+          </a:prstGeom>
+          <a:noFill/>
+        </p:spPr>
+        <p:txBody>
+          <a:bodyPr wrap="none" lIns="0" tIns="0" rIns="0" bIns="0">
+            <a:spAutoFit/>
+          </a:bodyPr>
+          <a:lstStyle/>
+          <a:p>
+            <a:pPr>
+              <a:defRPr sz="1000">
+                <a:solidFill>
+                  <a:srgbClr val="5F5C52"/>
+                </a:solidFill>
+                <a:latin typeface="Courier New"/>
+              </a:defRPr>
+            </a:pPr>
+            <a:r>
+              <a:t>technologyconsultants.ventures  ·  San Diego · Tijuana</a:t>
+            </a:r>
+          </a:p>
+        </p:txBody>
+      </p:sp>
+      <p:sp>
+        <p:nvSpPr>
+          <p:cNvPr id="18" name="TextBox 17"/>
+          <p:cNvSpPr txBox="1"/>
+          <p:nvPr/>
+        </p:nvSpPr>
+        <p:spPr>
+          <a:xfrm>
+            <a:off x="9631375" y="6446520"/>
+            <a:ext cx="1828800" cy="320040"/>
+          </a:xfrm>
+          <a:prstGeom prst="rect">
+            <a:avLst/>
+          </a:prstGeom>
+          <a:noFill/>
+        </p:spPr>
+        <p:txBody>
+          <a:bodyPr wrap="none" lIns="0" tIns="0" rIns="0" bIns="0">
+            <a:spAutoFit/>
+          </a:bodyPr>
+          <a:lstStyle/>
+          <a:p>
+            <a:pPr algn="r">
+              <a:defRPr sz="1000">
+                <a:solidFill>
+                  <a:srgbClr val="5F5C52"/>
+                </a:solidFill>
+                <a:latin typeface="Courier New"/>
+              </a:defRPr>
+            </a:pPr>
+            <a:r>
+              <a:t>07 / 08</a:t>
             </a:r>
           </a:p>
         </p:txBody>
@@ -5870,94 +8623,24 @@
       <p:grpSpPr/>
       <p:sp>
         <p:nvSpPr>
-          <p:cNvPr id="2" name="TextBox 1"/>
-          <p:cNvSpPr txBox="1"/>
-          <p:nvPr/>
-        </p:nvSpPr>
-        <p:spPr>
-          <a:xfrm>
-            <a:off x="731520" y="457200"/>
-            <a:ext cx="10728655" cy="365760"/>
-          </a:xfrm>
-          <a:prstGeom prst="rect">
-            <a:avLst/>
-          </a:prstGeom>
-          <a:noFill/>
-        </p:spPr>
-        <p:txBody>
-          <a:bodyPr wrap="square" lIns="0" tIns="0" rIns="0" bIns="0">
-            <a:spAutoFit/>
-          </a:bodyPr>
-          <a:lstStyle/>
-          <a:p>
-            <a:pPr>
-              <a:defRPr sz="1100" b="1">
-                <a:solidFill>
-                  <a:srgbClr val="D99B26"/>
-                </a:solidFill>
-              </a:defRPr>
-            </a:pPr>
-            <a:r>
-              <a:t>NEXT STEPS</a:t>
-            </a:r>
-          </a:p>
-        </p:txBody>
-      </p:sp>
-      <p:sp>
-        <p:nvSpPr>
-          <p:cNvPr id="3" name="TextBox 2"/>
-          <p:cNvSpPr txBox="1"/>
-          <p:nvPr/>
-        </p:nvSpPr>
-        <p:spPr>
-          <a:xfrm>
-            <a:off x="731520" y="777240"/>
-            <a:ext cx="10728655" cy="731520"/>
-          </a:xfrm>
-          <a:prstGeom prst="rect">
-            <a:avLst/>
-          </a:prstGeom>
-          <a:noFill/>
-        </p:spPr>
-        <p:txBody>
-          <a:bodyPr wrap="square" lIns="0" tIns="0" rIns="0" bIns="0">
-            <a:spAutoFit/>
-          </a:bodyPr>
-          <a:lstStyle/>
-          <a:p>
-            <a:pPr>
-              <a:defRPr sz="2600" b="1">
-                <a:solidFill>
-                  <a:srgbClr val="FFFFFF"/>
-                </a:solidFill>
-              </a:defRPr>
-            </a:pPr>
-            <a:r>
-              <a:t>How to Make the Introduction</a:t>
-            </a:r>
-          </a:p>
-        </p:txBody>
-      </p:sp>
-      <p:sp>
-        <p:nvSpPr>
-          <p:cNvPr id="4" name="Rounded Rectangle 3"/>
+          <p:cNvPr id="2" name="Rectangle 1"/>
           <p:cNvSpPr/>
           <p:nvPr/>
         </p:nvSpPr>
         <p:spPr>
           <a:xfrm>
-            <a:off x="731520" y="1737360"/>
-            <a:ext cx="10728655" cy="2926080"/>
-          </a:xfrm>
-          <a:prstGeom prst="roundRect">
+            <a:off x="0" y="0"/>
+            <a:ext cx="12191695" cy="594360"/>
+          </a:xfrm>
+          <a:prstGeom prst="rect">
             <a:avLst/>
           </a:prstGeom>
           <a:solidFill>
-            <a:srgbClr val="1A1D27"/>
+            <a:srgbClr val="121216"/>
           </a:solidFill>
-          <a:ln>
+          <a:ln w="12700">
             <a:solidFill>
-              <a:srgbClr val="374151"/>
+              <a:srgbClr val="26262C"/>
             </a:solidFill>
           </a:ln>
         </p:spPr>
@@ -5985,14 +8668,454 @@
       </p:sp>
       <p:sp>
         <p:nvSpPr>
+          <p:cNvPr id="3" name="Rounded Rectangle 2"/>
+          <p:cNvSpPr/>
+          <p:nvPr/>
+        </p:nvSpPr>
+        <p:spPr>
+          <a:xfrm>
+            <a:off x="731520" y="137160"/>
+            <a:ext cx="320040" cy="320040"/>
+          </a:xfrm>
+          <a:prstGeom prst="roundRect">
+            <a:avLst/>
+          </a:prstGeom>
+          <a:solidFill>
+            <a:srgbClr val="2B59D9"/>
+          </a:solidFill>
+          <a:ln>
+            <a:noFill/>
+          </a:ln>
+        </p:spPr>
+        <p:style>
+          <a:lnRef idx="1">
+            <a:schemeClr val="accent1"/>
+          </a:lnRef>
+          <a:fillRef idx="3">
+            <a:schemeClr val="accent1"/>
+          </a:fillRef>
+          <a:effectRef idx="2">
+            <a:schemeClr val="accent1"/>
+          </a:effectRef>
+          <a:fontRef idx="minor">
+            <a:schemeClr val="lt1"/>
+          </a:fontRef>
+        </p:style>
+        <p:txBody>
+          <a:bodyPr rtlCol="0" anchor="ctr"/>
+          <a:lstStyle/>
+          <a:p>
+            <a:pPr algn="ctr"/>
+          </a:p>
+        </p:txBody>
+      </p:sp>
+      <p:sp>
+        <p:nvSpPr>
+          <p:cNvPr id="4" name="TextBox 3"/>
+          <p:cNvSpPr txBox="1"/>
+          <p:nvPr/>
+        </p:nvSpPr>
+        <p:spPr>
+          <a:xfrm>
+            <a:off x="731520" y="128016"/>
+            <a:ext cx="320040" cy="320040"/>
+          </a:xfrm>
+          <a:prstGeom prst="rect">
+            <a:avLst/>
+          </a:prstGeom>
+          <a:noFill/>
+        </p:spPr>
+        <p:txBody>
+          <a:bodyPr wrap="none" lIns="0" tIns="0" rIns="0" bIns="0">
+            <a:spAutoFit/>
+          </a:bodyPr>
+          <a:lstStyle/>
+          <a:p>
+            <a:pPr>
+              <a:defRPr sz="1400" b="1">
+                <a:solidFill>
+                  <a:srgbClr val="FFFFFF"/>
+                </a:solidFill>
+                <a:latin typeface="Courier New"/>
+              </a:defRPr>
+            </a:pPr>
+            <a:r>
+              <a:t>›_</a:t>
+            </a:r>
+          </a:p>
+        </p:txBody>
+      </p:sp>
+      <p:sp>
+        <p:nvSpPr>
           <p:cNvPr id="5" name="TextBox 4"/>
           <p:cNvSpPr txBox="1"/>
           <p:nvPr/>
         </p:nvSpPr>
         <p:spPr>
           <a:xfrm>
-            <a:off x="1005840" y="1920240"/>
-            <a:ext cx="10180015" cy="2560320"/>
+            <a:off x="1143000" y="146304"/>
+            <a:ext cx="4114800" cy="320040"/>
+          </a:xfrm>
+          <a:prstGeom prst="rect">
+            <a:avLst/>
+          </a:prstGeom>
+          <a:noFill/>
+        </p:spPr>
+        <p:txBody>
+          <a:bodyPr wrap="none" lIns="0" tIns="0" rIns="0" bIns="0">
+            <a:spAutoFit/>
+          </a:bodyPr>
+          <a:lstStyle/>
+          <a:p>
+            <a:pPr>
+              <a:defRPr sz="1300" b="1">
+                <a:solidFill>
+                  <a:srgbClr val="FFFFFF"/>
+                </a:solidFill>
+                <a:latin typeface="Helvetica"/>
+              </a:defRPr>
+            </a:pPr>
+            <a:r>
+              <a:t>TECHNOLOGY CONSULTANTS</a:t>
+            </a:r>
+          </a:p>
+        </p:txBody>
+      </p:sp>
+      <p:sp>
+        <p:nvSpPr>
+          <p:cNvPr id="6" name="TextBox 5"/>
+          <p:cNvSpPr txBox="1"/>
+          <p:nvPr/>
+        </p:nvSpPr>
+        <p:spPr>
+          <a:xfrm>
+            <a:off x="6858000" y="164592"/>
+            <a:ext cx="4572000" cy="320040"/>
+          </a:xfrm>
+          <a:prstGeom prst="rect">
+            <a:avLst/>
+          </a:prstGeom>
+          <a:noFill/>
+        </p:spPr>
+        <p:txBody>
+          <a:bodyPr wrap="none" lIns="0" tIns="0" rIns="0" bIns="0">
+            <a:spAutoFit/>
+          </a:bodyPr>
+          <a:lstStyle/>
+          <a:p>
+            <a:pPr algn="r">
+              <a:defRPr sz="1100">
+                <a:solidFill>
+                  <a:srgbClr val="D99B26"/>
+                </a:solidFill>
+                <a:latin typeface="Courier New"/>
+              </a:defRPr>
+            </a:pPr>
+            <a:r>
+              <a:t>07 / MAKE INTRODUCTION</a:t>
+            </a:r>
+          </a:p>
+        </p:txBody>
+      </p:sp>
+      <p:sp>
+        <p:nvSpPr>
+          <p:cNvPr id="7" name="TextBox 6"/>
+          <p:cNvSpPr txBox="1"/>
+          <p:nvPr/>
+        </p:nvSpPr>
+        <p:spPr>
+          <a:xfrm>
+            <a:off x="731520" y="1005840"/>
+            <a:ext cx="10728655" cy="548640"/>
+          </a:xfrm>
+          <a:prstGeom prst="rect">
+            <a:avLst/>
+          </a:prstGeom>
+          <a:noFill/>
+        </p:spPr>
+        <p:txBody>
+          <a:bodyPr wrap="none">
+            <a:spAutoFit/>
+          </a:bodyPr>
+          <a:lstStyle/>
+          <a:p>
+            <a:pPr>
+              <a:defRPr sz="2800" b="1">
+                <a:solidFill>
+                  <a:srgbClr val="FFFFFF"/>
+                </a:solidFill>
+                <a:latin typeface="Helvetica"/>
+              </a:defRPr>
+            </a:pPr>
+            <a:r>
+              <a:t>How to Make the Introduction</a:t>
+            </a:r>
+          </a:p>
+        </p:txBody>
+      </p:sp>
+      <p:sp>
+        <p:nvSpPr>
+          <p:cNvPr id="8" name="Rounded Rectangle 7"/>
+          <p:cNvSpPr/>
+          <p:nvPr/>
+        </p:nvSpPr>
+        <p:spPr>
+          <a:xfrm>
+            <a:off x="731520" y="1645920"/>
+            <a:ext cx="10728655" cy="3291840"/>
+          </a:xfrm>
+          <a:prstGeom prst="roundRect">
+            <a:avLst/>
+          </a:prstGeom>
+          <a:solidFill>
+            <a:srgbClr val="121216"/>
+          </a:solidFill>
+          <a:ln w="12700">
+            <a:solidFill>
+              <a:srgbClr val="26262C"/>
+            </a:solidFill>
+          </a:ln>
+        </p:spPr>
+        <p:style>
+          <a:lnRef idx="1">
+            <a:schemeClr val="accent1"/>
+          </a:lnRef>
+          <a:fillRef idx="3">
+            <a:schemeClr val="accent1"/>
+          </a:fillRef>
+          <a:effectRef idx="2">
+            <a:schemeClr val="accent1"/>
+          </a:effectRef>
+          <a:fontRef idx="minor">
+            <a:schemeClr val="lt1"/>
+          </a:fontRef>
+        </p:style>
+        <p:txBody>
+          <a:bodyPr rtlCol="0" anchor="ctr"/>
+          <a:lstStyle/>
+          <a:p>
+            <a:pPr algn="ctr"/>
+          </a:p>
+        </p:txBody>
+      </p:sp>
+      <p:sp>
+        <p:nvSpPr>
+          <p:cNvPr id="9" name="Rectangle 8"/>
+          <p:cNvSpPr/>
+          <p:nvPr/>
+        </p:nvSpPr>
+        <p:spPr>
+          <a:xfrm>
+            <a:off x="731520" y="1645920"/>
+            <a:ext cx="10728655" cy="365760"/>
+          </a:xfrm>
+          <a:prstGeom prst="rect">
+            <a:avLst/>
+          </a:prstGeom>
+          <a:solidFill>
+            <a:srgbClr val="1A1A20"/>
+          </a:solidFill>
+          <a:ln>
+            <a:noFill/>
+          </a:ln>
+        </p:spPr>
+        <p:style>
+          <a:lnRef idx="1">
+            <a:schemeClr val="accent1"/>
+          </a:lnRef>
+          <a:fillRef idx="3">
+            <a:schemeClr val="accent1"/>
+          </a:fillRef>
+          <a:effectRef idx="2">
+            <a:schemeClr val="accent1"/>
+          </a:effectRef>
+          <a:fontRef idx="minor">
+            <a:schemeClr val="lt1"/>
+          </a:fontRef>
+        </p:style>
+        <p:txBody>
+          <a:bodyPr rtlCol="0" anchor="ctr"/>
+          <a:lstStyle/>
+          <a:p>
+            <a:pPr algn="ctr"/>
+          </a:p>
+        </p:txBody>
+      </p:sp>
+      <p:sp>
+        <p:nvSpPr>
+          <p:cNvPr id="10" name="Oval 9"/>
+          <p:cNvSpPr/>
+          <p:nvPr/>
+        </p:nvSpPr>
+        <p:spPr>
+          <a:xfrm>
+            <a:off x="868680" y="1755648"/>
+            <a:ext cx="128016" cy="128016"/>
+          </a:xfrm>
+          <a:prstGeom prst="ellipse">
+            <a:avLst/>
+          </a:prstGeom>
+          <a:solidFill>
+            <a:srgbClr val="EF4444"/>
+          </a:solidFill>
+          <a:ln>
+            <a:noFill/>
+          </a:ln>
+        </p:spPr>
+        <p:style>
+          <a:lnRef idx="1">
+            <a:schemeClr val="accent1"/>
+          </a:lnRef>
+          <a:fillRef idx="3">
+            <a:schemeClr val="accent1"/>
+          </a:fillRef>
+          <a:effectRef idx="2">
+            <a:schemeClr val="accent1"/>
+          </a:effectRef>
+          <a:fontRef idx="minor">
+            <a:schemeClr val="lt1"/>
+          </a:fontRef>
+        </p:style>
+        <p:txBody>
+          <a:bodyPr rtlCol="0" anchor="ctr"/>
+          <a:lstStyle/>
+          <a:p>
+            <a:pPr algn="ctr"/>
+          </a:p>
+        </p:txBody>
+      </p:sp>
+      <p:sp>
+        <p:nvSpPr>
+          <p:cNvPr id="11" name="Oval 10"/>
+          <p:cNvSpPr/>
+          <p:nvPr/>
+        </p:nvSpPr>
+        <p:spPr>
+          <a:xfrm>
+            <a:off x="1051560" y="1755648"/>
+            <a:ext cx="128016" cy="128016"/>
+          </a:xfrm>
+          <a:prstGeom prst="ellipse">
+            <a:avLst/>
+          </a:prstGeom>
+          <a:solidFill>
+            <a:srgbClr val="F59E0B"/>
+          </a:solidFill>
+          <a:ln>
+            <a:noFill/>
+          </a:ln>
+        </p:spPr>
+        <p:style>
+          <a:lnRef idx="1">
+            <a:schemeClr val="accent1"/>
+          </a:lnRef>
+          <a:fillRef idx="3">
+            <a:schemeClr val="accent1"/>
+          </a:fillRef>
+          <a:effectRef idx="2">
+            <a:schemeClr val="accent1"/>
+          </a:effectRef>
+          <a:fontRef idx="minor">
+            <a:schemeClr val="lt1"/>
+          </a:fontRef>
+        </p:style>
+        <p:txBody>
+          <a:bodyPr rtlCol="0" anchor="ctr"/>
+          <a:lstStyle/>
+          <a:p>
+            <a:pPr algn="ctr"/>
+          </a:p>
+        </p:txBody>
+      </p:sp>
+      <p:sp>
+        <p:nvSpPr>
+          <p:cNvPr id="12" name="Oval 11"/>
+          <p:cNvSpPr/>
+          <p:nvPr/>
+        </p:nvSpPr>
+        <p:spPr>
+          <a:xfrm>
+            <a:off x="1234440" y="1755648"/>
+            <a:ext cx="128016" cy="128016"/>
+          </a:xfrm>
+          <a:prstGeom prst="ellipse">
+            <a:avLst/>
+          </a:prstGeom>
+          <a:solidFill>
+            <a:srgbClr val="10B981"/>
+          </a:solidFill>
+          <a:ln>
+            <a:noFill/>
+          </a:ln>
+        </p:spPr>
+        <p:style>
+          <a:lnRef idx="1">
+            <a:schemeClr val="accent1"/>
+          </a:lnRef>
+          <a:fillRef idx="3">
+            <a:schemeClr val="accent1"/>
+          </a:fillRef>
+          <a:effectRef idx="2">
+            <a:schemeClr val="accent1"/>
+          </a:effectRef>
+          <a:fontRef idx="minor">
+            <a:schemeClr val="lt1"/>
+          </a:fontRef>
+        </p:style>
+        <p:txBody>
+          <a:bodyPr rtlCol="0" anchor="ctr"/>
+          <a:lstStyle/>
+          <a:p>
+            <a:pPr algn="ctr"/>
+          </a:p>
+        </p:txBody>
+      </p:sp>
+      <p:sp>
+        <p:nvSpPr>
+          <p:cNvPr id="13" name="TextBox 12"/>
+          <p:cNvSpPr txBox="1"/>
+          <p:nvPr/>
+        </p:nvSpPr>
+        <p:spPr>
+          <a:xfrm>
+            <a:off x="1463040" y="1719072"/>
+            <a:ext cx="9814255" cy="274320"/>
+          </a:xfrm>
+          <a:prstGeom prst="rect">
+            <a:avLst/>
+          </a:prstGeom>
+          <a:noFill/>
+        </p:spPr>
+        <p:txBody>
+          <a:bodyPr wrap="none" lIns="0" tIns="0" rIns="0" bIns="0">
+            <a:spAutoFit/>
+          </a:bodyPr>
+          <a:lstStyle/>
+          <a:p>
+            <a:pPr>
+              <a:defRPr sz="1000">
+                <a:solidFill>
+                  <a:srgbClr val="9CA3AF"/>
+                </a:solidFill>
+                <a:latin typeface="Courier New"/>
+              </a:defRPr>
+            </a:pPr>
+            <a:r>
+              <a:t>bash — email_intro_template.txt</a:t>
+            </a:r>
+          </a:p>
+        </p:txBody>
+      </p:sp>
+      <p:sp>
+        <p:nvSpPr>
+          <p:cNvPr id="14" name="TextBox 13"/>
+          <p:cNvSpPr txBox="1"/>
+          <p:nvPr/>
+        </p:nvSpPr>
+        <p:spPr>
+          <a:xfrm>
+            <a:off x="1005840" y="2148840"/>
+            <a:ext cx="10180015" cy="2651760"/>
           </a:xfrm>
           <a:prstGeom prst="rect">
             <a:avLst/>
@@ -6007,12 +9130,13 @@
           <a:p>
             <a:pPr>
               <a:spcAft>
-                <a:spcPts val="1000"/>
+                <a:spcPts val="600"/>
               </a:spcAft>
-              <a:defRPr sz="1100" b="1">
-                <a:solidFill>
-                  <a:srgbClr val="D99B26"/>
-                </a:solidFill>
+              <a:defRPr sz="1100">
+                <a:solidFill>
+                  <a:srgbClr val="E5E7EB"/>
+                </a:solidFill>
+                <a:latin typeface="Courier New"/>
               </a:defRPr>
             </a:pPr>
             <a:r>
@@ -6022,12 +9146,26 @@
           <a:p>
             <a:pPr>
               <a:spcAft>
-                <a:spcPts val="800"/>
+                <a:spcPts val="600"/>
               </a:spcAft>
-              <a:defRPr sz="1400" i="1">
-                <a:solidFill>
-                  <a:srgbClr val="FFFFFF"/>
-                </a:solidFill>
+              <a:defRPr sz="1100">
+                <a:solidFill>
+                  <a:srgbClr val="E5E7EB"/>
+                </a:solidFill>
+                <a:latin typeface="Courier New"/>
+              </a:defRPr>
+            </a:pPr>
+          </a:p>
+          <a:p>
+            <a:pPr>
+              <a:spcAft>
+                <a:spcPts val="600"/>
+              </a:spcAft>
+              <a:defRPr sz="1100">
+                <a:solidFill>
+                  <a:srgbClr val="E5E7EB"/>
+                </a:solidFill>
+                <a:latin typeface="Courier New"/>
               </a:defRPr>
             </a:pPr>
             <a:r>
@@ -6036,10 +9174,27 @@
           </a:p>
           <a:p>
             <a:pPr>
-              <a:defRPr sz="1400" i="1">
-                <a:solidFill>
-                  <a:srgbClr val="FFFFFF"/>
-                </a:solidFill>
+              <a:spcAft>
+                <a:spcPts val="600"/>
+              </a:spcAft>
+              <a:defRPr sz="1100">
+                <a:solidFill>
+                  <a:srgbClr val="E5E7EB"/>
+                </a:solidFill>
+                <a:latin typeface="Courier New"/>
+              </a:defRPr>
+            </a:pPr>
+          </a:p>
+          <a:p>
+            <a:pPr>
+              <a:spcAft>
+                <a:spcPts val="600"/>
+              </a:spcAft>
+              <a:defRPr sz="1100">
+                <a:solidFill>
+                  <a:srgbClr val="E5E7EB"/>
+                </a:solidFill>
+                <a:latin typeface="Courier New"/>
               </a:defRPr>
             </a:pPr>
             <a:r>
@@ -6050,14 +9205,14 @@
       </p:sp>
       <p:sp>
         <p:nvSpPr>
-          <p:cNvPr id="6" name="TextBox 5"/>
+          <p:cNvPr id="15" name="TextBox 14"/>
           <p:cNvSpPr txBox="1"/>
           <p:nvPr/>
         </p:nvSpPr>
         <p:spPr>
           <a:xfrm>
-            <a:off x="731520" y="4937760"/>
-            <a:ext cx="10728655" cy="1371600"/>
+            <a:off x="731520" y="5120640"/>
+            <a:ext cx="10728655" cy="1097280"/>
           </a:xfrm>
           <a:prstGeom prst="rect">
             <a:avLst/>
@@ -6075,6 +9230,7 @@
                 <a:solidFill>
                   <a:srgbClr val="FFFFFF"/>
                 </a:solidFill>
+                <a:latin typeface="Helvetica"/>
               </a:defRPr>
             </a:pPr>
             <a:r>
@@ -6086,14 +9242,130 @@
               <a:spcBef>
                 <a:spcPts val="400"/>
               </a:spcBef>
-              <a:defRPr sz="1400">
+              <a:defRPr sz="1300">
                 <a:solidFill>
                   <a:srgbClr val="D99B26"/>
                 </a:solidFill>
-              </a:defRPr>
-            </a:pPr>
-            <a:r>
-              <a:t>Website: technologyconsultants.ventures   ·   Based in San Diego &amp; Tijuana</a:t>
+                <a:latin typeface="Courier New"/>
+              </a:defRPr>
+            </a:pPr>
+            <a:r>
+              <a:t>Website: technologyconsultants.ventures   ·   San Diego &amp; Tijuana</a:t>
+            </a:r>
+          </a:p>
+        </p:txBody>
+      </p:sp>
+      <p:sp>
+        <p:nvSpPr>
+          <p:cNvPr id="16" name="Rectangle 15"/>
+          <p:cNvSpPr/>
+          <p:nvPr/>
+        </p:nvSpPr>
+        <p:spPr>
+          <a:xfrm>
+            <a:off x="731520" y="6400800"/>
+            <a:ext cx="10728655" cy="12700"/>
+          </a:xfrm>
+          <a:prstGeom prst="rect">
+            <a:avLst/>
+          </a:prstGeom>
+          <a:solidFill>
+            <a:srgbClr val="C9C3B2"/>
+          </a:solidFill>
+          <a:ln>
+            <a:noFill/>
+          </a:ln>
+        </p:spPr>
+        <p:style>
+          <a:lnRef idx="1">
+            <a:schemeClr val="accent1"/>
+          </a:lnRef>
+          <a:fillRef idx="3">
+            <a:schemeClr val="accent1"/>
+          </a:fillRef>
+          <a:effectRef idx="2">
+            <a:schemeClr val="accent1"/>
+          </a:effectRef>
+          <a:fontRef idx="minor">
+            <a:schemeClr val="lt1"/>
+          </a:fontRef>
+        </p:style>
+        <p:txBody>
+          <a:bodyPr rtlCol="0" anchor="ctr"/>
+          <a:lstStyle/>
+          <a:p>
+            <a:pPr algn="ctr"/>
+          </a:p>
+        </p:txBody>
+      </p:sp>
+      <p:sp>
+        <p:nvSpPr>
+          <p:cNvPr id="17" name="TextBox 16"/>
+          <p:cNvSpPr txBox="1"/>
+          <p:nvPr/>
+        </p:nvSpPr>
+        <p:spPr>
+          <a:xfrm>
+            <a:off x="731520" y="6446520"/>
+            <a:ext cx="7315200" cy="320040"/>
+          </a:xfrm>
+          <a:prstGeom prst="rect">
+            <a:avLst/>
+          </a:prstGeom>
+          <a:noFill/>
+        </p:spPr>
+        <p:txBody>
+          <a:bodyPr wrap="none" lIns="0" tIns="0" rIns="0" bIns="0">
+            <a:spAutoFit/>
+          </a:bodyPr>
+          <a:lstStyle/>
+          <a:p>
+            <a:pPr>
+              <a:defRPr sz="1000">
+                <a:solidFill>
+                  <a:srgbClr val="5F5C52"/>
+                </a:solidFill>
+                <a:latin typeface="Courier New"/>
+              </a:defRPr>
+            </a:pPr>
+            <a:r>
+              <a:t>technologyconsultants.ventures  ·  San Diego · Tijuana</a:t>
+            </a:r>
+          </a:p>
+        </p:txBody>
+      </p:sp>
+      <p:sp>
+        <p:nvSpPr>
+          <p:cNvPr id="18" name="TextBox 17"/>
+          <p:cNvSpPr txBox="1"/>
+          <p:nvPr/>
+        </p:nvSpPr>
+        <p:spPr>
+          <a:xfrm>
+            <a:off x="9631375" y="6446520"/>
+            <a:ext cx="1828800" cy="320040"/>
+          </a:xfrm>
+          <a:prstGeom prst="rect">
+            <a:avLst/>
+          </a:prstGeom>
+          <a:noFill/>
+        </p:spPr>
+        <p:txBody>
+          <a:bodyPr wrap="none" lIns="0" tIns="0" rIns="0" bIns="0">
+            <a:spAutoFit/>
+          </a:bodyPr>
+          <a:lstStyle/>
+          <a:p>
+            <a:pPr algn="r">
+              <a:defRPr sz="1000">
+                <a:solidFill>
+                  <a:srgbClr val="5F5C52"/>
+                </a:solidFill>
+                <a:latin typeface="Courier New"/>
+              </a:defRPr>
+            </a:pPr>
+            <a:r>
+              <a:t>08 / 08</a:t>
             </a:r>
           </a:p>
         </p:txBody>

--- a/Technology_Consultants_Who_to_Send_My_Way.pptx
+++ b/Technology_Consultants_Who_to_Send_My_Way.pptx
@@ -3091,7 +3091,7 @@
     <p:bg>
       <p:bgPr>
         <a:solidFill>
-          <a:srgbClr val="121216"/>
+          <a:srgbClr val="FAF9F5"/>
         </a:solidFill>
         <a:effectLst/>
       </p:bgPr>
@@ -3105,24 +3105,24 @@
       <p:grpSpPr/>
       <p:sp>
         <p:nvSpPr>
-          <p:cNvPr id="2" name="Rectangle 1"/>
+          <p:cNvPr id="2" name="Rounded Rectangle 1"/>
           <p:cNvSpPr/>
           <p:nvPr/>
         </p:nvSpPr>
         <p:spPr>
           <a:xfrm>
-            <a:off x="0" y="0"/>
-            <a:ext cx="12191695" cy="594360"/>
-          </a:xfrm>
-          <a:prstGeom prst="rect">
+            <a:off x="822960" y="640080"/>
+            <a:ext cx="5303520" cy="329184"/>
+          </a:xfrm>
+          <a:prstGeom prst="roundRect">
             <a:avLst/>
           </a:prstGeom>
           <a:solidFill>
-            <a:srgbClr val="121216"/>
+            <a:srgbClr val="FFFFFF"/>
           </a:solidFill>
           <a:ln w="12700">
             <a:solidFill>
-              <a:srgbClr val="26262C"/>
+              <a:srgbClr val="D6D0C2"/>
             </a:solidFill>
           </a:ln>
         </p:spPr>
@@ -3150,23 +3150,116 @@
       </p:sp>
       <p:sp>
         <p:nvSpPr>
-          <p:cNvPr id="3" name="Rounded Rectangle 2"/>
+          <p:cNvPr id="3" name="TextBox 2"/>
+          <p:cNvSpPr txBox="1"/>
+          <p:nvPr/>
+        </p:nvSpPr>
+        <p:spPr>
+          <a:xfrm>
+            <a:off x="914400" y="704088"/>
+            <a:ext cx="5120640" cy="274320"/>
+          </a:xfrm>
+          <a:prstGeom prst="rect">
+            <a:avLst/>
+          </a:prstGeom>
+          <a:noFill/>
+        </p:spPr>
+        <p:txBody>
+          <a:bodyPr wrap="none" lIns="0" tIns="0" rIns="0" bIns="0">
+            <a:spAutoFit/>
+          </a:bodyPr>
+          <a:lstStyle/>
+          <a:p>
+            <a:pPr>
+              <a:defRPr sz="1000" b="1">
+                <a:solidFill>
+                  <a:srgbClr val="2B59D9"/>
+                </a:solidFill>
+                <a:latin typeface="Courier New"/>
+              </a:defRPr>
+            </a:pPr>
+            <a:r>
+              <a:t>WEBSITES  ·  AUTOMATION  ·  AI AGENTS</a:t>
+            </a:r>
+          </a:p>
+        </p:txBody>
+      </p:sp>
+      <p:sp>
+        <p:nvSpPr>
+          <p:cNvPr id="4" name="TextBox 3"/>
+          <p:cNvSpPr txBox="1"/>
+          <p:nvPr/>
+        </p:nvSpPr>
+        <p:spPr>
+          <a:xfrm>
+            <a:off x="822960" y="1234440"/>
+            <a:ext cx="10515600" cy="2926080"/>
+          </a:xfrm>
+          <a:prstGeom prst="rect">
+            <a:avLst/>
+          </a:prstGeom>
+          <a:noFill/>
+        </p:spPr>
+        <p:txBody>
+          <a:bodyPr wrap="square">
+            <a:spAutoFit/>
+          </a:bodyPr>
+          <a:lstStyle/>
+          <a:p>
+            <a:pPr>
+              <a:spcAft>
+                <a:spcPts val="800"/>
+              </a:spcAft>
+              <a:defRPr sz="2000" b="1">
+                <a:solidFill>
+                  <a:srgbClr val="D99B26"/>
+                </a:solidFill>
+                <a:latin typeface="Helvetica"/>
+              </a:defRPr>
+            </a:pPr>
+            <a:r>
+              <a:t>Technology Consultants</a:t>
+            </a:r>
+          </a:p>
+          <a:p>
+            <a:pPr>
+              <a:spcAft>
+                <a:spcPts val="1400"/>
+              </a:spcAft>
+              <a:defRPr sz="4400" b="1">
+                <a:solidFill>
+                  <a:srgbClr val="16161A"/>
+                </a:solidFill>
+                <a:latin typeface="Helvetica"/>
+              </a:defRPr>
+            </a:pPr>
+            <a:r>
+              <a:t>Who to Send My Way</a:t>
+            </a:r>
+          </a:p>
+        </p:txBody>
+      </p:sp>
+      <p:sp>
+        <p:nvSpPr>
+          <p:cNvPr id="5" name="Rounded Rectangle 4"/>
           <p:cNvSpPr/>
           <p:nvPr/>
         </p:nvSpPr>
         <p:spPr>
           <a:xfrm>
-            <a:off x="731520" y="137160"/>
-            <a:ext cx="320040" cy="320040"/>
+            <a:off x="822960" y="2926080"/>
+            <a:ext cx="10545775" cy="1234440"/>
           </a:xfrm>
           <a:prstGeom prst="roundRect">
             <a:avLst/>
           </a:prstGeom>
           <a:solidFill>
-            <a:srgbClr val="2B59D9"/>
+            <a:srgbClr val="FFFFFF"/>
           </a:solidFill>
-          <a:ln>
-            <a:noFill/>
+          <a:ln w="12700">
+            <a:solidFill>
+              <a:srgbClr val="EBE7DF"/>
+            </a:solidFill>
           </a:ln>
         </p:spPr>
         <p:style>
@@ -3193,122 +3286,14 @@
       </p:sp>
       <p:sp>
         <p:nvSpPr>
-          <p:cNvPr id="4" name="TextBox 3"/>
-          <p:cNvSpPr txBox="1"/>
-          <p:nvPr/>
-        </p:nvSpPr>
-        <p:spPr>
-          <a:xfrm>
-            <a:off x="731520" y="128016"/>
-            <a:ext cx="320040" cy="320040"/>
-          </a:xfrm>
-          <a:prstGeom prst="rect">
-            <a:avLst/>
-          </a:prstGeom>
-          <a:noFill/>
-        </p:spPr>
-        <p:txBody>
-          <a:bodyPr wrap="none" lIns="0" tIns="0" rIns="0" bIns="0">
-            <a:spAutoFit/>
-          </a:bodyPr>
-          <a:lstStyle/>
-          <a:p>
-            <a:pPr>
-              <a:defRPr sz="1400" b="1">
-                <a:solidFill>
-                  <a:srgbClr val="FFFFFF"/>
-                </a:solidFill>
-                <a:latin typeface="Courier New"/>
-              </a:defRPr>
-            </a:pPr>
-            <a:r>
-              <a:t>›_</a:t>
-            </a:r>
-          </a:p>
-        </p:txBody>
-      </p:sp>
-      <p:sp>
-        <p:nvSpPr>
-          <p:cNvPr id="5" name="TextBox 4"/>
-          <p:cNvSpPr txBox="1"/>
-          <p:nvPr/>
-        </p:nvSpPr>
-        <p:spPr>
-          <a:xfrm>
-            <a:off x="1143000" y="146304"/>
-            <a:ext cx="4114800" cy="320040"/>
-          </a:xfrm>
-          <a:prstGeom prst="rect">
-            <a:avLst/>
-          </a:prstGeom>
-          <a:noFill/>
-        </p:spPr>
-        <p:txBody>
-          <a:bodyPr wrap="none" lIns="0" tIns="0" rIns="0" bIns="0">
-            <a:spAutoFit/>
-          </a:bodyPr>
-          <a:lstStyle/>
-          <a:p>
-            <a:pPr>
-              <a:defRPr sz="1300" b="1">
-                <a:solidFill>
-                  <a:srgbClr val="FFFFFF"/>
-                </a:solidFill>
-                <a:latin typeface="Helvetica"/>
-              </a:defRPr>
-            </a:pPr>
-            <a:r>
-              <a:t>TECHNOLOGY CONSULTANTS</a:t>
-            </a:r>
-          </a:p>
-        </p:txBody>
-      </p:sp>
-      <p:sp>
-        <p:nvSpPr>
           <p:cNvPr id="6" name="TextBox 5"/>
           <p:cNvSpPr txBox="1"/>
           <p:nvPr/>
         </p:nvSpPr>
         <p:spPr>
           <a:xfrm>
-            <a:off x="6858000" y="164592"/>
-            <a:ext cx="4572000" cy="320040"/>
-          </a:xfrm>
-          <a:prstGeom prst="rect">
-            <a:avLst/>
-          </a:prstGeom>
-          <a:noFill/>
-        </p:spPr>
-        <p:txBody>
-          <a:bodyPr wrap="none" lIns="0" tIns="0" rIns="0" bIns="0">
-            <a:spAutoFit/>
-          </a:bodyPr>
-          <a:lstStyle/>
-          <a:p>
-            <a:pPr algn="r">
-              <a:defRPr sz="1100">
-                <a:solidFill>
-                  <a:srgbClr val="D99B26"/>
-                </a:solidFill>
-                <a:latin typeface="Courier New"/>
-              </a:defRPr>
-            </a:pPr>
-            <a:r>
-              <a:t>REFERRAL GUIDE</a:t>
-            </a:r>
-          </a:p>
-        </p:txBody>
-      </p:sp>
-      <p:sp>
-        <p:nvSpPr>
-          <p:cNvPr id="7" name="TextBox 6"/>
-          <p:cNvSpPr txBox="1"/>
-          <p:nvPr/>
-        </p:nvSpPr>
-        <p:spPr>
-          <a:xfrm>
-            <a:off x="731520" y="1371600"/>
-            <a:ext cx="5943600" cy="4389120"/>
+            <a:off x="1097280" y="3063240"/>
+            <a:ext cx="9966960" cy="1005840"/>
           </a:xfrm>
           <a:prstGeom prst="rect">
             <a:avLst/>
@@ -3322,52 +3307,63 @@
           <a:lstStyle/>
           <a:p>
             <a:pPr>
-              <a:spcAft>
-                <a:spcPts val="1200"/>
-              </a:spcAft>
-              <a:defRPr sz="1100" b="1">
-                <a:solidFill>
-                  <a:srgbClr val="D99B26"/>
-                </a:solidFill>
-                <a:latin typeface="Courier New"/>
-              </a:defRPr>
-            </a:pPr>
-            <a:r>
-              <a:t>› SYSTEM ARCHITECTURE &amp; INTEGRATION</a:t>
-            </a:r>
-          </a:p>
-          <a:p>
-            <a:pPr>
-              <a:spcAft>
-                <a:spcPts val="1400"/>
-              </a:spcAft>
-              <a:defRPr sz="4200" b="1">
-                <a:solidFill>
-                  <a:srgbClr val="FFFFFF"/>
+              <a:defRPr sz="2100" b="1">
+                <a:solidFill>
+                  <a:srgbClr val="16161A"/>
                 </a:solidFill>
                 <a:latin typeface="Helvetica"/>
               </a:defRPr>
             </a:pPr>
             <a:r>
-              <a:t>Who to Send My Way</a:t>
-            </a:r>
-          </a:p>
-          <a:p>
-            <a:pPr>
-              <a:spcAft>
-                <a:spcPts val="2800"/>
-              </a:spcAft>
-              <a:defRPr sz="1800">
-                <a:solidFill>
-                  <a:srgbClr val="B4B9C3"/>
+              <a:t>“We build technology around your people — not </a:t>
+            </a:r>
+            <a:r>
+              <a:rPr i="1" b="1"/>
+              <a:t>instead</a:t>
+            </a:r>
+            <a:r>
+              <a:t> of them.”</a:t>
+            </a:r>
+          </a:p>
+          <a:p>
+            <a:pPr>
+              <a:spcBef>
+                <a:spcPts val="600"/>
+              </a:spcBef>
+              <a:defRPr sz="1400">
+                <a:solidFill>
+                  <a:srgbClr val="59564D"/>
                 </a:solidFill>
                 <a:latin typeface="Helvetica"/>
               </a:defRPr>
             </a:pPr>
             <a:r>
-              <a:t>Partner Referral Guide &amp; Ideal Client Profile</a:t>
-            </a:r>
-          </a:p>
+              <a:t>Real working software with a person in the loop wherever money, trust, or judgment is on the line.</a:t>
+            </a:r>
+          </a:p>
+        </p:txBody>
+      </p:sp>
+      <p:sp>
+        <p:nvSpPr>
+          <p:cNvPr id="7" name="TextBox 6"/>
+          <p:cNvSpPr txBox="1"/>
+          <p:nvPr/>
+        </p:nvSpPr>
+        <p:spPr>
+          <a:xfrm>
+            <a:off x="822960" y="4389120"/>
+            <a:ext cx="10515600" cy="1645920"/>
+          </a:xfrm>
+          <a:prstGeom prst="rect">
+            <a:avLst/>
+          </a:prstGeom>
+          <a:noFill/>
+        </p:spPr>
+        <p:txBody>
+          <a:bodyPr wrap="square">
+            <a:spAutoFit/>
+          </a:bodyPr>
+          <a:lstStyle/>
           <a:p>
             <a:pPr>
               <a:spcAft>
@@ -3381,14 +3377,14 @@
               </a:defRPr>
             </a:pPr>
             <a:r>
-              <a:t>PRACTICE LEAD:</a:t>
-            </a:r>
-          </a:p>
-          <a:p>
-            <a:pPr>
-              <a:defRPr sz="1800" b="1">
-                <a:solidFill>
-                  <a:srgbClr val="FFFFFF"/>
+              <a:t>PRACTICE LEAD</a:t>
+            </a:r>
+          </a:p>
+          <a:p>
+            <a:pPr>
+              <a:defRPr sz="2000" b="1">
+                <a:solidFill>
+                  <a:srgbClr val="16161A"/>
                 </a:solidFill>
                 <a:latin typeface="Helvetica"/>
               </a:defRPr>
@@ -3399,40 +3395,41 @@
           </a:p>
           <a:p>
             <a:pPr>
-              <a:defRPr sz="1300">
-                <a:solidFill>
-                  <a:srgbClr val="D99B26"/>
+              <a:spcBef>
+                <a:spcPts val="200"/>
+              </a:spcBef>
+              <a:defRPr sz="1400">
+                <a:solidFill>
+                  <a:srgbClr val="59564D"/>
                 </a:solidFill>
                 <a:latin typeface="Helvetica"/>
               </a:defRPr>
             </a:pPr>
             <a:r>
-              <a:t>BS Electrical Engineering (UC San Diego) · MBA (NYU Stern)</a:t>
-            </a:r>
-          </a:p>
-        </p:txBody>
-      </p:sp>
-      <p:sp>
-        <p:nvSpPr>
-          <p:cNvPr id="8" name="Rounded Rectangle 7"/>
+              <a:t>Founder &amp; Principal Engineer  ·  BS Electrical Engineering (UC San Diego) · MBA (NYU Stern)</a:t>
+            </a:r>
+          </a:p>
+        </p:txBody>
+      </p:sp>
+      <p:sp>
+        <p:nvSpPr>
+          <p:cNvPr id="8" name="Rectangle 7"/>
           <p:cNvSpPr/>
           <p:nvPr/>
         </p:nvSpPr>
         <p:spPr>
           <a:xfrm>
-            <a:off x="6858000" y="1463040"/>
-            <a:ext cx="4572000" cy="4114800"/>
-          </a:xfrm>
-          <a:prstGeom prst="roundRect">
+            <a:off x="822960" y="6309360"/>
+            <a:ext cx="10545775" cy="12700"/>
+          </a:xfrm>
+          <a:prstGeom prst="rect">
             <a:avLst/>
           </a:prstGeom>
           <a:solidFill>
-            <a:srgbClr val="121216"/>
+            <a:srgbClr val="EBE7DF"/>
           </a:solidFill>
-          <a:ln w="12700">
-            <a:solidFill>
-              <a:srgbClr val="26262C"/>
-            </a:solidFill>
+          <a:ln>
+            <a:noFill/>
           </a:ln>
         </p:spPr>
         <p:style>
@@ -3459,186 +3456,14 @@
       </p:sp>
       <p:sp>
         <p:nvSpPr>
-          <p:cNvPr id="9" name="Rectangle 8"/>
-          <p:cNvSpPr/>
-          <p:nvPr/>
-        </p:nvSpPr>
-        <p:spPr>
-          <a:xfrm>
-            <a:off x="6858000" y="1463040"/>
-            <a:ext cx="4572000" cy="365760"/>
-          </a:xfrm>
-          <a:prstGeom prst="rect">
-            <a:avLst/>
-          </a:prstGeom>
-          <a:solidFill>
-            <a:srgbClr val="1A1A20"/>
-          </a:solidFill>
-          <a:ln>
-            <a:noFill/>
-          </a:ln>
-        </p:spPr>
-        <p:style>
-          <a:lnRef idx="1">
-            <a:schemeClr val="accent1"/>
-          </a:lnRef>
-          <a:fillRef idx="3">
-            <a:schemeClr val="accent1"/>
-          </a:fillRef>
-          <a:effectRef idx="2">
-            <a:schemeClr val="accent1"/>
-          </a:effectRef>
-          <a:fontRef idx="minor">
-            <a:schemeClr val="lt1"/>
-          </a:fontRef>
-        </p:style>
-        <p:txBody>
-          <a:bodyPr rtlCol="0" anchor="ctr"/>
-          <a:lstStyle/>
-          <a:p>
-            <a:pPr algn="ctr"/>
-          </a:p>
-        </p:txBody>
-      </p:sp>
-      <p:sp>
-        <p:nvSpPr>
-          <p:cNvPr id="10" name="Oval 9"/>
-          <p:cNvSpPr/>
-          <p:nvPr/>
-        </p:nvSpPr>
-        <p:spPr>
-          <a:xfrm>
-            <a:off x="6995160" y="1572768"/>
-            <a:ext cx="128016" cy="128016"/>
-          </a:xfrm>
-          <a:prstGeom prst="ellipse">
-            <a:avLst/>
-          </a:prstGeom>
-          <a:solidFill>
-            <a:srgbClr val="EF4444"/>
-          </a:solidFill>
-          <a:ln>
-            <a:noFill/>
-          </a:ln>
-        </p:spPr>
-        <p:style>
-          <a:lnRef idx="1">
-            <a:schemeClr val="accent1"/>
-          </a:lnRef>
-          <a:fillRef idx="3">
-            <a:schemeClr val="accent1"/>
-          </a:fillRef>
-          <a:effectRef idx="2">
-            <a:schemeClr val="accent1"/>
-          </a:effectRef>
-          <a:fontRef idx="minor">
-            <a:schemeClr val="lt1"/>
-          </a:fontRef>
-        </p:style>
-        <p:txBody>
-          <a:bodyPr rtlCol="0" anchor="ctr"/>
-          <a:lstStyle/>
-          <a:p>
-            <a:pPr algn="ctr"/>
-          </a:p>
-        </p:txBody>
-      </p:sp>
-      <p:sp>
-        <p:nvSpPr>
-          <p:cNvPr id="11" name="Oval 10"/>
-          <p:cNvSpPr/>
-          <p:nvPr/>
-        </p:nvSpPr>
-        <p:spPr>
-          <a:xfrm>
-            <a:off x="7178040" y="1572768"/>
-            <a:ext cx="128016" cy="128016"/>
-          </a:xfrm>
-          <a:prstGeom prst="ellipse">
-            <a:avLst/>
-          </a:prstGeom>
-          <a:solidFill>
-            <a:srgbClr val="F59E0B"/>
-          </a:solidFill>
-          <a:ln>
-            <a:noFill/>
-          </a:ln>
-        </p:spPr>
-        <p:style>
-          <a:lnRef idx="1">
-            <a:schemeClr val="accent1"/>
-          </a:lnRef>
-          <a:fillRef idx="3">
-            <a:schemeClr val="accent1"/>
-          </a:fillRef>
-          <a:effectRef idx="2">
-            <a:schemeClr val="accent1"/>
-          </a:effectRef>
-          <a:fontRef idx="minor">
-            <a:schemeClr val="lt1"/>
-          </a:fontRef>
-        </p:style>
-        <p:txBody>
-          <a:bodyPr rtlCol="0" anchor="ctr"/>
-          <a:lstStyle/>
-          <a:p>
-            <a:pPr algn="ctr"/>
-          </a:p>
-        </p:txBody>
-      </p:sp>
-      <p:sp>
-        <p:nvSpPr>
-          <p:cNvPr id="12" name="Oval 11"/>
-          <p:cNvSpPr/>
-          <p:nvPr/>
-        </p:nvSpPr>
-        <p:spPr>
-          <a:xfrm>
-            <a:off x="7360920" y="1572768"/>
-            <a:ext cx="128016" cy="128016"/>
-          </a:xfrm>
-          <a:prstGeom prst="ellipse">
-            <a:avLst/>
-          </a:prstGeom>
-          <a:solidFill>
-            <a:srgbClr val="10B981"/>
-          </a:solidFill>
-          <a:ln>
-            <a:noFill/>
-          </a:ln>
-        </p:spPr>
-        <p:style>
-          <a:lnRef idx="1">
-            <a:schemeClr val="accent1"/>
-          </a:lnRef>
-          <a:fillRef idx="3">
-            <a:schemeClr val="accent1"/>
-          </a:fillRef>
-          <a:effectRef idx="2">
-            <a:schemeClr val="accent1"/>
-          </a:effectRef>
-          <a:fontRef idx="minor">
-            <a:schemeClr val="lt1"/>
-          </a:fontRef>
-        </p:style>
-        <p:txBody>
-          <a:bodyPr rtlCol="0" anchor="ctr"/>
-          <a:lstStyle/>
-          <a:p>
-            <a:pPr algn="ctr"/>
-          </a:p>
-        </p:txBody>
-      </p:sp>
-      <p:sp>
-        <p:nvSpPr>
-          <p:cNvPr id="13" name="TextBox 12"/>
+          <p:cNvPr id="9" name="TextBox 8"/>
           <p:cNvSpPr txBox="1"/>
           <p:nvPr/>
         </p:nvSpPr>
         <p:spPr>
           <a:xfrm>
-            <a:off x="7589520" y="1536192"/>
-            <a:ext cx="3657600" cy="274320"/>
+            <a:off x="822960" y="6382512"/>
+            <a:ext cx="7315200" cy="320040"/>
           </a:xfrm>
           <a:prstGeom prst="rect">
             <a:avLst/>
@@ -3654,189 +3479,27 @@
             <a:pPr>
               <a:defRPr sz="1000">
                 <a:solidFill>
-                  <a:srgbClr val="9CA3AF"/>
+                  <a:srgbClr val="7C786C"/>
                 </a:solidFill>
                 <a:latin typeface="Courier New"/>
               </a:defRPr>
             </a:pPr>
             <a:r>
-              <a:t>bash — system_status.log</a:t>
-            </a:r>
-          </a:p>
-        </p:txBody>
-      </p:sp>
-      <p:sp>
-        <p:nvSpPr>
-          <p:cNvPr id="14" name="TextBox 13"/>
+              <a:t>technologyconsultants.ventures  ·  San Diego · Tijuana</a:t>
+            </a:r>
+          </a:p>
+        </p:txBody>
+      </p:sp>
+      <p:sp>
+        <p:nvSpPr>
+          <p:cNvPr id="10" name="TextBox 9"/>
           <p:cNvSpPr txBox="1"/>
           <p:nvPr/>
         </p:nvSpPr>
         <p:spPr>
           <a:xfrm>
-            <a:off x="7132320" y="1965960"/>
-            <a:ext cx="4023360" cy="3474720"/>
-          </a:xfrm>
-          <a:prstGeom prst="rect">
-            <a:avLst/>
-          </a:prstGeom>
-          <a:noFill/>
-        </p:spPr>
-        <p:txBody>
-          <a:bodyPr wrap="square">
-            <a:spAutoFit/>
-          </a:bodyPr>
-          <a:lstStyle/>
-          <a:p>
-            <a:pPr>
-              <a:spcAft>
-                <a:spcPts val="600"/>
-              </a:spcAft>
-              <a:defRPr sz="1100">
-                <a:solidFill>
-                  <a:srgbClr val="E5E7EB"/>
-                </a:solidFill>
-                <a:latin typeface="Courier New"/>
-              </a:defRPr>
-            </a:pPr>
-            <a:r>
-              <a:t>$ agy init --practice technology-consultants</a:t>
-            </a:r>
-          </a:p>
-          <a:p>
-            <a:pPr>
-              <a:spcAft>
-                <a:spcPts val="600"/>
-              </a:spcAft>
-              <a:defRPr sz="1100">
-                <a:solidFill>
-                  <a:srgbClr val="D99B26"/>
-                </a:solidFill>
-                <a:latin typeface="Courier New"/>
-              </a:defRPr>
-            </a:pPr>
-            <a:r>
-              <a:t>[INFO] Initializing practice context...</a:t>
-            </a:r>
-          </a:p>
-          <a:p>
-            <a:pPr>
-              <a:spcAft>
-                <a:spcPts val="600"/>
-              </a:spcAft>
-              <a:defRPr sz="1100">
-                <a:solidFill>
-                  <a:srgbClr val="D99B26"/>
-                </a:solidFill>
-                <a:latin typeface="Courier New"/>
-              </a:defRPr>
-            </a:pPr>
-            <a:r>
-              <a:t>[INFO] Founder: Roberto Guido (UC San Diego / NYU Stern)</a:t>
-            </a:r>
-          </a:p>
-          <a:p>
-            <a:pPr>
-              <a:spcAft>
-                <a:spcPts val="600"/>
-              </a:spcAft>
-              <a:defRPr sz="1100">
-                <a:solidFill>
-                  <a:srgbClr val="D99B26"/>
-                </a:solidFill>
-                <a:latin typeface="Courier New"/>
-              </a:defRPr>
-            </a:pPr>
-            <a:r>
-              <a:t>[INFO] Core Focus: React UI + Workday Finance + Applied AI</a:t>
-            </a:r>
-          </a:p>
-          <a:p>
-            <a:pPr>
-              <a:spcAft>
-                <a:spcPts val="600"/>
-              </a:spcAft>
-              <a:defRPr sz="1100">
-                <a:solidFill>
-                  <a:srgbClr val="35B9CC"/>
-                </a:solidFill>
-                <a:latin typeface="Courier New"/>
-              </a:defRPr>
-            </a:pPr>
-            <a:r>
-              <a:t>[RUN] Deployment check: HITL Safety Gates ... OK</a:t>
-            </a:r>
-          </a:p>
-          <a:p>
-            <a:pPr>
-              <a:spcAft>
-                <a:spcPts val="600"/>
-              </a:spcAft>
-              <a:defRPr sz="1100">
-                <a:solidFill>
-                  <a:srgbClr val="35B9CC"/>
-                </a:solidFill>
-                <a:latin typeface="Courier New"/>
-              </a:defRPr>
-            </a:pPr>
-            <a:r>
-              <a:t>[SUCCESS] Practice active. Ready for partner referrals.</a:t>
-            </a:r>
-          </a:p>
-        </p:txBody>
-      </p:sp>
-      <p:sp>
-        <p:nvSpPr>
-          <p:cNvPr id="15" name="Rectangle 14"/>
-          <p:cNvSpPr/>
-          <p:nvPr/>
-        </p:nvSpPr>
-        <p:spPr>
-          <a:xfrm>
-            <a:off x="731520" y="6400800"/>
-            <a:ext cx="10728655" cy="12700"/>
-          </a:xfrm>
-          <a:prstGeom prst="rect">
-            <a:avLst/>
-          </a:prstGeom>
-          <a:solidFill>
-            <a:srgbClr val="C9C3B2"/>
-          </a:solidFill>
-          <a:ln>
-            <a:noFill/>
-          </a:ln>
-        </p:spPr>
-        <p:style>
-          <a:lnRef idx="1">
-            <a:schemeClr val="accent1"/>
-          </a:lnRef>
-          <a:fillRef idx="3">
-            <a:schemeClr val="accent1"/>
-          </a:fillRef>
-          <a:effectRef idx="2">
-            <a:schemeClr val="accent1"/>
-          </a:effectRef>
-          <a:fontRef idx="minor">
-            <a:schemeClr val="lt1"/>
-          </a:fontRef>
-        </p:style>
-        <p:txBody>
-          <a:bodyPr rtlCol="0" anchor="ctr"/>
-          <a:lstStyle/>
-          <a:p>
-            <a:pPr algn="ctr"/>
-          </a:p>
-        </p:txBody>
-      </p:sp>
-      <p:sp>
-        <p:nvSpPr>
-          <p:cNvPr id="16" name="TextBox 15"/>
-          <p:cNvSpPr txBox="1"/>
-          <p:nvPr/>
-        </p:nvSpPr>
-        <p:spPr>
-          <a:xfrm>
-            <a:off x="731520" y="6446520"/>
-            <a:ext cx="7315200" cy="320040"/>
+            <a:off x="9539935" y="6382512"/>
+            <a:ext cx="1828800" cy="320040"/>
           </a:xfrm>
           <a:prstGeom prst="rect">
             <a:avLst/>
@@ -3849,46 +3512,10 @@
           </a:bodyPr>
           <a:lstStyle/>
           <a:p>
-            <a:pPr>
-              <a:defRPr sz="1000">
-                <a:solidFill>
-                  <a:srgbClr val="5F5C52"/>
-                </a:solidFill>
-                <a:latin typeface="Courier New"/>
-              </a:defRPr>
-            </a:pPr>
-            <a:r>
-              <a:t>technologyconsultants.ventures  ·  San Diego · Tijuana</a:t>
-            </a:r>
-          </a:p>
-        </p:txBody>
-      </p:sp>
-      <p:sp>
-        <p:nvSpPr>
-          <p:cNvPr id="17" name="TextBox 16"/>
-          <p:cNvSpPr txBox="1"/>
-          <p:nvPr/>
-        </p:nvSpPr>
-        <p:spPr>
-          <a:xfrm>
-            <a:off x="9631375" y="6446520"/>
-            <a:ext cx="1828800" cy="320040"/>
-          </a:xfrm>
-          <a:prstGeom prst="rect">
-            <a:avLst/>
-          </a:prstGeom>
-          <a:noFill/>
-        </p:spPr>
-        <p:txBody>
-          <a:bodyPr wrap="none" lIns="0" tIns="0" rIns="0" bIns="0">
-            <a:spAutoFit/>
-          </a:bodyPr>
-          <a:lstStyle/>
-          <a:p>
             <a:pPr algn="r">
               <a:defRPr sz="1000">
                 <a:solidFill>
-                  <a:srgbClr val="5F5C52"/>
+                  <a:srgbClr val="7C786C"/>
                 </a:solidFill>
                 <a:latin typeface="Courier New"/>
               </a:defRPr>
@@ -3913,7 +3540,7 @@
     <p:bg>
       <p:bgPr>
         <a:solidFill>
-          <a:srgbClr val="F4F1EA"/>
+          <a:srgbClr val="FAF9F5"/>
         </a:solidFill>
         <a:effectLst/>
       </p:bgPr>
@@ -3927,24 +3554,96 @@
       <p:grpSpPr/>
       <p:sp>
         <p:nvSpPr>
-          <p:cNvPr id="2" name="Rectangle 1"/>
+          <p:cNvPr id="2" name="TextBox 1"/>
+          <p:cNvSpPr txBox="1"/>
+          <p:nvPr/>
+        </p:nvSpPr>
+        <p:spPr>
+          <a:xfrm>
+            <a:off x="822960" y="548640"/>
+            <a:ext cx="10515600" cy="320040"/>
+          </a:xfrm>
+          <a:prstGeom prst="rect">
+            <a:avLst/>
+          </a:prstGeom>
+          <a:noFill/>
+        </p:spPr>
+        <p:txBody>
+          <a:bodyPr wrap="none" lIns="0" tIns="0" rIns="0" bIns="0">
+            <a:spAutoFit/>
+          </a:bodyPr>
+          <a:lstStyle/>
+          <a:p>
+            <a:pPr>
+              <a:defRPr sz="1100" b="1">
+                <a:solidFill>
+                  <a:srgbClr val="D99B26"/>
+                </a:solidFill>
+                <a:latin typeface="Courier New"/>
+              </a:defRPr>
+            </a:pPr>
+            <a:r>
+              <a:t>CORE PRACTICE OVERVIEW</a:t>
+            </a:r>
+          </a:p>
+        </p:txBody>
+      </p:sp>
+      <p:sp>
+        <p:nvSpPr>
+          <p:cNvPr id="3" name="TextBox 2"/>
+          <p:cNvSpPr txBox="1"/>
+          <p:nvPr/>
+        </p:nvSpPr>
+        <p:spPr>
+          <a:xfrm>
+            <a:off x="822960" y="868680"/>
+            <a:ext cx="10515600" cy="685800"/>
+          </a:xfrm>
+          <a:prstGeom prst="rect">
+            <a:avLst/>
+          </a:prstGeom>
+          <a:noFill/>
+        </p:spPr>
+        <p:txBody>
+          <a:bodyPr wrap="square" lIns="0" tIns="0" rIns="0" bIns="0">
+            <a:spAutoFit/>
+          </a:bodyPr>
+          <a:lstStyle/>
+          <a:p>
+            <a:pPr>
+              <a:defRPr sz="2600" b="1">
+                <a:solidFill>
+                  <a:srgbClr val="16161A"/>
+                </a:solidFill>
+                <a:latin typeface="Helvetica"/>
+              </a:defRPr>
+            </a:pPr>
+            <a:r>
+              <a:t>Bridging Engineering Discipline with Business Outcomes</a:t>
+            </a:r>
+          </a:p>
+        </p:txBody>
+      </p:sp>
+      <p:sp>
+        <p:nvSpPr>
+          <p:cNvPr id="4" name="Rounded Rectangle 3"/>
           <p:cNvSpPr/>
           <p:nvPr/>
         </p:nvSpPr>
         <p:spPr>
           <a:xfrm>
-            <a:off x="0" y="0"/>
-            <a:ext cx="12191695" cy="594360"/>
-          </a:xfrm>
-          <a:prstGeom prst="rect">
+            <a:off x="822960" y="1874519"/>
+            <a:ext cx="3328416" cy="4023360"/>
+          </a:xfrm>
+          <a:prstGeom prst="roundRect">
             <a:avLst/>
           </a:prstGeom>
           <a:solidFill>
-            <a:srgbClr val="121216"/>
+            <a:srgbClr val="FFFFFF"/>
           </a:solidFill>
           <a:ln w="12700">
             <a:solidFill>
-              <a:srgbClr val="26262C"/>
+              <a:srgbClr val="EBE7DF"/>
             </a:solidFill>
           </a:ln>
         </p:spPr>
@@ -3972,23 +3671,93 @@
       </p:sp>
       <p:sp>
         <p:nvSpPr>
-          <p:cNvPr id="3" name="Rounded Rectangle 2"/>
+          <p:cNvPr id="5" name="TextBox 4"/>
+          <p:cNvSpPr txBox="1"/>
+          <p:nvPr/>
+        </p:nvSpPr>
+        <p:spPr>
+          <a:xfrm>
+            <a:off x="1143000" y="2240279"/>
+            <a:ext cx="2688336" cy="3474720"/>
+          </a:xfrm>
+          <a:prstGeom prst="rect">
+            <a:avLst/>
+          </a:prstGeom>
+          <a:noFill/>
+        </p:spPr>
+        <p:txBody>
+          <a:bodyPr wrap="square">
+            <a:spAutoFit/>
+          </a:bodyPr>
+          <a:lstStyle/>
+          <a:p>
+            <a:pPr>
+              <a:spcAft>
+                <a:spcPts val="1200"/>
+              </a:spcAft>
+              <a:defRPr sz="2400" b="1">
+                <a:solidFill>
+                  <a:srgbClr val="2B59D9"/>
+                </a:solidFill>
+                <a:latin typeface="Courier New"/>
+              </a:defRPr>
+            </a:pPr>
+            <a:r>
+              <a:t>01</a:t>
+            </a:r>
+          </a:p>
+          <a:p>
+            <a:pPr>
+              <a:spcAft>
+                <a:spcPts val="1400"/>
+              </a:spcAft>
+              <a:defRPr sz="2000" b="1">
+                <a:solidFill>
+                  <a:srgbClr val="16161A"/>
+                </a:solidFill>
+                <a:latin typeface="Helvetica"/>
+              </a:defRPr>
+            </a:pPr>
+            <a:r>
+              <a:t>Custom Interfaces</a:t>
+            </a:r>
+          </a:p>
+          <a:p>
+            <a:pPr>
+              <a:defRPr sz="1400">
+                <a:solidFill>
+                  <a:srgbClr val="59564D"/>
+                </a:solidFill>
+                <a:latin typeface="Helvetica"/>
+              </a:defRPr>
+            </a:pPr>
+            <a:r>
+              <a:t>Custom interfaces built for human speed and intuitive execution. High-performance React web applications tailored to daily workflow needs.</a:t>
+            </a:r>
+          </a:p>
+        </p:txBody>
+      </p:sp>
+      <p:sp>
+        <p:nvSpPr>
+          <p:cNvPr id="6" name="Rounded Rectangle 5"/>
           <p:cNvSpPr/>
           <p:nvPr/>
         </p:nvSpPr>
         <p:spPr>
           <a:xfrm>
-            <a:off x="731520" y="137160"/>
-            <a:ext cx="320040" cy="320040"/>
+            <a:off x="4425696" y="1874519"/>
+            <a:ext cx="3328416" cy="4023360"/>
           </a:xfrm>
           <a:prstGeom prst="roundRect">
             <a:avLst/>
           </a:prstGeom>
           <a:solidFill>
-            <a:srgbClr val="2B59D9"/>
+            <a:srgbClr val="FFFFFF"/>
           </a:solidFill>
-          <a:ln>
-            <a:noFill/>
+          <a:ln w="12700">
+            <a:solidFill>
+              <a:srgbClr val="EBE7DF"/>
+            </a:solidFill>
           </a:ln>
         </p:spPr>
         <p:style>
@@ -4015,14 +3784,14 @@
       </p:sp>
       <p:sp>
         <p:nvSpPr>
-          <p:cNvPr id="4" name="TextBox 3"/>
+          <p:cNvPr id="7" name="TextBox 6"/>
           <p:cNvSpPr txBox="1"/>
           <p:nvPr/>
         </p:nvSpPr>
         <p:spPr>
           <a:xfrm>
-            <a:off x="731520" y="128016"/>
-            <a:ext cx="320040" cy="320040"/>
+            <a:off x="4745736" y="2240279"/>
+            <a:ext cx="2688336" cy="3474720"/>
           </a:xfrm>
           <a:prstGeom prst="rect">
             <a:avLst/>
@@ -4030,117 +3799,77 @@
           <a:noFill/>
         </p:spPr>
         <p:txBody>
-          <a:bodyPr wrap="none" lIns="0" tIns="0" rIns="0" bIns="0">
+          <a:bodyPr wrap="square">
             <a:spAutoFit/>
           </a:bodyPr>
           <a:lstStyle/>
           <a:p>
             <a:pPr>
-              <a:defRPr sz="1400" b="1">
-                <a:solidFill>
-                  <a:srgbClr val="FFFFFF"/>
+              <a:spcAft>
+                <a:spcPts val="1200"/>
+              </a:spcAft>
+              <a:defRPr sz="2400" b="1">
+                <a:solidFill>
+                  <a:srgbClr val="2B59D9"/>
                 </a:solidFill>
                 <a:latin typeface="Courier New"/>
               </a:defRPr>
             </a:pPr>
             <a:r>
-              <a:t>›_</a:t>
-            </a:r>
-          </a:p>
-        </p:txBody>
-      </p:sp>
-      <p:sp>
-        <p:nvSpPr>
-          <p:cNvPr id="5" name="TextBox 4"/>
-          <p:cNvSpPr txBox="1"/>
-          <p:nvPr/>
-        </p:nvSpPr>
-        <p:spPr>
-          <a:xfrm>
-            <a:off x="1143000" y="146304"/>
-            <a:ext cx="4114800" cy="320040"/>
-          </a:xfrm>
-          <a:prstGeom prst="rect">
-            <a:avLst/>
-          </a:prstGeom>
-          <a:noFill/>
-        </p:spPr>
-        <p:txBody>
-          <a:bodyPr wrap="none" lIns="0" tIns="0" rIns="0" bIns="0">
-            <a:spAutoFit/>
-          </a:bodyPr>
-          <a:lstStyle/>
-          <a:p>
-            <a:pPr>
-              <a:defRPr sz="1300" b="1">
-                <a:solidFill>
-                  <a:srgbClr val="FFFFFF"/>
+              <a:t>02</a:t>
+            </a:r>
+          </a:p>
+          <a:p>
+            <a:pPr>
+              <a:spcAft>
+                <a:spcPts val="1400"/>
+              </a:spcAft>
+              <a:defRPr sz="2000" b="1">
+                <a:solidFill>
+                  <a:srgbClr val="16161A"/>
                 </a:solidFill>
                 <a:latin typeface="Helvetica"/>
               </a:defRPr>
             </a:pPr>
             <a:r>
-              <a:t>TECHNOLOGY CONSULTANTS</a:t>
-            </a:r>
-          </a:p>
-        </p:txBody>
-      </p:sp>
-      <p:sp>
-        <p:nvSpPr>
-          <p:cNvPr id="6" name="TextBox 5"/>
-          <p:cNvSpPr txBox="1"/>
-          <p:nvPr/>
-        </p:nvSpPr>
-        <p:spPr>
-          <a:xfrm>
-            <a:off x="6858000" y="164592"/>
-            <a:ext cx="4572000" cy="320040"/>
-          </a:xfrm>
-          <a:prstGeom prst="rect">
-            <a:avLst/>
-          </a:prstGeom>
-          <a:noFill/>
-        </p:spPr>
-        <p:txBody>
-          <a:bodyPr wrap="none" lIns="0" tIns="0" rIns="0" bIns="0">
-            <a:spAutoFit/>
-          </a:bodyPr>
-          <a:lstStyle/>
-          <a:p>
-            <a:pPr algn="r">
-              <a:defRPr sz="1100">
-                <a:solidFill>
-                  <a:srgbClr val="D99B26"/>
-                </a:solidFill>
-                <a:latin typeface="Courier New"/>
-              </a:defRPr>
-            </a:pPr>
-            <a:r>
-              <a:t>01 / OVERVIEW</a:t>
-            </a:r>
-          </a:p>
-        </p:txBody>
-      </p:sp>
-      <p:sp>
-        <p:nvSpPr>
-          <p:cNvPr id="7" name="Rounded Rectangle 6"/>
+              <a:t>Systems Integration</a:t>
+            </a:r>
+          </a:p>
+          <a:p>
+            <a:pPr>
+              <a:defRPr sz="1400">
+                <a:solidFill>
+                  <a:srgbClr val="59564D"/>
+                </a:solidFill>
+                <a:latin typeface="Helvetica"/>
+              </a:defRPr>
+            </a:pPr>
+            <a:r>
+              <a:t>Deep financial backend integrations (Workday Finance &amp; Adaptive Planning), PostgreSQL databases, and enterprise REST APIs.</a:t>
+            </a:r>
+          </a:p>
+        </p:txBody>
+      </p:sp>
+      <p:sp>
+        <p:nvSpPr>
+          <p:cNvPr id="8" name="Rounded Rectangle 7"/>
           <p:cNvSpPr/>
           <p:nvPr/>
         </p:nvSpPr>
         <p:spPr>
           <a:xfrm>
-            <a:off x="731520" y="822960"/>
-            <a:ext cx="2770632" cy="292608"/>
+            <a:off x="8028431" y="1874519"/>
+            <a:ext cx="3328416" cy="4023360"/>
           </a:xfrm>
           <a:prstGeom prst="roundRect">
             <a:avLst/>
           </a:prstGeom>
           <a:solidFill>
-            <a:srgbClr val="EFE9D8"/>
+            <a:srgbClr val="FFFFFF"/>
           </a:solidFill>
           <a:ln w="12700">
             <a:solidFill>
-              <a:srgbClr val="2B59D9"/>
+              <a:srgbClr val="EBE7DF"/>
             </a:solidFill>
           </a:ln>
         </p:spPr>
@@ -4168,14 +3897,14 @@
       </p:sp>
       <p:sp>
         <p:nvSpPr>
-          <p:cNvPr id="8" name="TextBox 7"/>
+          <p:cNvPr id="9" name="TextBox 8"/>
           <p:cNvSpPr txBox="1"/>
           <p:nvPr/>
         </p:nvSpPr>
         <p:spPr>
           <a:xfrm>
-            <a:off x="731520" y="859536"/>
-            <a:ext cx="2770632" cy="256032"/>
+            <a:off x="8348471" y="2240279"/>
+            <a:ext cx="2688336" cy="3474720"/>
           </a:xfrm>
           <a:prstGeom prst="rect">
             <a:avLst/>
@@ -4183,13 +3912,16 @@
           <a:noFill/>
         </p:spPr>
         <p:txBody>
-          <a:bodyPr wrap="none" lIns="0" tIns="0" rIns="0" bIns="0">
+          <a:bodyPr wrap="square">
             <a:spAutoFit/>
           </a:bodyPr>
           <a:lstStyle/>
           <a:p>
-            <a:pPr algn="ctr">
-              <a:defRPr sz="1000" b="1">
+            <a:pPr>
+              <a:spcAft>
+                <a:spcPts val="1200"/>
+              </a:spcAft>
+              <a:defRPr sz="2400" b="1">
                 <a:solidFill>
                   <a:srgbClr val="2B59D9"/>
                 </a:solidFill>
@@ -4197,68 +3929,59 @@
               </a:defRPr>
             </a:pPr>
             <a:r>
-              <a:t>CAPABILITIES &amp; SERVICES</a:t>
-            </a:r>
-          </a:p>
-        </p:txBody>
-      </p:sp>
-      <p:sp>
-        <p:nvSpPr>
-          <p:cNvPr id="9" name="TextBox 8"/>
-          <p:cNvSpPr txBox="1"/>
-          <p:nvPr/>
-        </p:nvSpPr>
-        <p:spPr>
-          <a:xfrm>
-            <a:off x="731520" y="1188720"/>
-            <a:ext cx="10728655" cy="548640"/>
+              <a:t>03</a:t>
+            </a:r>
+          </a:p>
+          <a:p>
+            <a:pPr>
+              <a:spcAft>
+                <a:spcPts val="1400"/>
+              </a:spcAft>
+              <a:defRPr sz="2000" b="1">
+                <a:solidFill>
+                  <a:srgbClr val="16161A"/>
+                </a:solidFill>
+                <a:latin typeface="Helvetica"/>
+              </a:defRPr>
+            </a:pPr>
+            <a:r>
+              <a:t>Applied AI &amp; Automation</a:t>
+            </a:r>
+          </a:p>
+          <a:p>
+            <a:pPr>
+              <a:defRPr sz="1400">
+                <a:solidFill>
+                  <a:srgbClr val="59564D"/>
+                </a:solidFill>
+                <a:latin typeface="Helvetica"/>
+              </a:defRPr>
+            </a:pPr>
+            <a:r>
+              <a:t>Custom Model Context Protocol (MCP) servers, LLM orchestration, and human-in-the-loop (HITL) AI agents for real operational trust.</a:t>
+            </a:r>
+          </a:p>
+        </p:txBody>
+      </p:sp>
+      <p:sp>
+        <p:nvSpPr>
+          <p:cNvPr id="10" name="Rectangle 9"/>
+          <p:cNvSpPr/>
+          <p:nvPr/>
+        </p:nvSpPr>
+        <p:spPr>
+          <a:xfrm>
+            <a:off x="822960" y="6309360"/>
+            <a:ext cx="10545775" cy="12700"/>
           </a:xfrm>
           <a:prstGeom prst="rect">
             <a:avLst/>
           </a:prstGeom>
-          <a:noFill/>
-        </p:spPr>
-        <p:txBody>
-          <a:bodyPr wrap="none">
-            <a:spAutoFit/>
-          </a:bodyPr>
-          <a:lstStyle/>
-          <a:p>
-            <a:pPr>
-              <a:defRPr sz="2400" b="1">
-                <a:solidFill>
-                  <a:srgbClr val="16161A"/>
-                </a:solidFill>
-                <a:latin typeface="Helvetica"/>
-              </a:defRPr>
-            </a:pPr>
-            <a:r>
-              <a:t>Bridging Engineering Discipline with Business Outcomes</a:t>
-            </a:r>
-          </a:p>
-        </p:txBody>
-      </p:sp>
-      <p:sp>
-        <p:nvSpPr>
-          <p:cNvPr id="10" name="Rounded Rectangle 9"/>
-          <p:cNvSpPr/>
-          <p:nvPr/>
-        </p:nvSpPr>
-        <p:spPr>
-          <a:xfrm>
-            <a:off x="731520" y="1920240"/>
-            <a:ext cx="3328416" cy="3931920"/>
-          </a:xfrm>
-          <a:prstGeom prst="roundRect">
-            <a:avLst/>
-          </a:prstGeom>
           <a:solidFill>
-            <a:srgbClr val="FFFFFF"/>
+            <a:srgbClr val="EBE7DF"/>
           </a:solidFill>
-          <a:ln w="12700">
-            <a:solidFill>
-              <a:srgbClr val="C9C3B2"/>
-            </a:solidFill>
+          <a:ln>
+            <a:noFill/>
           </a:ln>
         </p:spPr>
         <p:style>
@@ -4291,344 +4014,7 @@
         </p:nvSpPr>
         <p:spPr>
           <a:xfrm>
-            <a:off x="1005840" y="2194560"/>
-            <a:ext cx="2779776" cy="3474720"/>
-          </a:xfrm>
-          <a:prstGeom prst="rect">
-            <a:avLst/>
-          </a:prstGeom>
-          <a:noFill/>
-        </p:spPr>
-        <p:txBody>
-          <a:bodyPr wrap="square">
-            <a:spAutoFit/>
-          </a:bodyPr>
-          <a:lstStyle/>
-          <a:p>
-            <a:pPr>
-              <a:spcAft>
-                <a:spcPts val="1200"/>
-              </a:spcAft>
-              <a:defRPr sz="1200" b="1">
-                <a:solidFill>
-                  <a:srgbClr val="D99B26"/>
-                </a:solidFill>
-                <a:latin typeface="Courier New"/>
-              </a:defRPr>
-            </a:pPr>
-            <a:r>
-              <a:t>[ 01_UI ]</a:t>
-            </a:r>
-          </a:p>
-          <a:p>
-            <a:pPr>
-              <a:spcAft>
-                <a:spcPts val="1400"/>
-              </a:spcAft>
-              <a:defRPr sz="1900" b="1">
-                <a:solidFill>
-                  <a:srgbClr val="16161A"/>
-                </a:solidFill>
-                <a:latin typeface="Helvetica"/>
-              </a:defRPr>
-            </a:pPr>
-            <a:r>
-              <a:t>Custom Interfaces</a:t>
-            </a:r>
-          </a:p>
-          <a:p>
-            <a:pPr>
-              <a:defRPr sz="1400">
-                <a:solidFill>
-                  <a:srgbClr val="454337"/>
-                </a:solidFill>
-                <a:latin typeface="Helvetica"/>
-              </a:defRPr>
-            </a:pPr>
-            <a:r>
-              <a:t>High-performance React web applications and intuitive user experiences designed for rapid workflow execution.</a:t>
-            </a:r>
-          </a:p>
-        </p:txBody>
-      </p:sp>
-      <p:sp>
-        <p:nvSpPr>
-          <p:cNvPr id="12" name="Rounded Rectangle 11"/>
-          <p:cNvSpPr/>
-          <p:nvPr/>
-        </p:nvSpPr>
-        <p:spPr>
-          <a:xfrm>
-            <a:off x="4297680" y="1920240"/>
-            <a:ext cx="3328416" cy="3931920"/>
-          </a:xfrm>
-          <a:prstGeom prst="roundRect">
-            <a:avLst/>
-          </a:prstGeom>
-          <a:solidFill>
-            <a:srgbClr val="FFFFFF"/>
-          </a:solidFill>
-          <a:ln w="12700">
-            <a:solidFill>
-              <a:srgbClr val="C9C3B2"/>
-            </a:solidFill>
-          </a:ln>
-        </p:spPr>
-        <p:style>
-          <a:lnRef idx="1">
-            <a:schemeClr val="accent1"/>
-          </a:lnRef>
-          <a:fillRef idx="3">
-            <a:schemeClr val="accent1"/>
-          </a:fillRef>
-          <a:effectRef idx="2">
-            <a:schemeClr val="accent1"/>
-          </a:effectRef>
-          <a:fontRef idx="minor">
-            <a:schemeClr val="lt1"/>
-          </a:fontRef>
-        </p:style>
-        <p:txBody>
-          <a:bodyPr rtlCol="0" anchor="ctr"/>
-          <a:lstStyle/>
-          <a:p>
-            <a:pPr algn="ctr"/>
-          </a:p>
-        </p:txBody>
-      </p:sp>
-      <p:sp>
-        <p:nvSpPr>
-          <p:cNvPr id="13" name="TextBox 12"/>
-          <p:cNvSpPr txBox="1"/>
-          <p:nvPr/>
-        </p:nvSpPr>
-        <p:spPr>
-          <a:xfrm>
-            <a:off x="4572000" y="2194560"/>
-            <a:ext cx="2779776" cy="3474720"/>
-          </a:xfrm>
-          <a:prstGeom prst="rect">
-            <a:avLst/>
-          </a:prstGeom>
-          <a:noFill/>
-        </p:spPr>
-        <p:txBody>
-          <a:bodyPr wrap="square">
-            <a:spAutoFit/>
-          </a:bodyPr>
-          <a:lstStyle/>
-          <a:p>
-            <a:pPr>
-              <a:spcAft>
-                <a:spcPts val="1200"/>
-              </a:spcAft>
-              <a:defRPr sz="1200" b="1">
-                <a:solidFill>
-                  <a:srgbClr val="D99B26"/>
-                </a:solidFill>
-                <a:latin typeface="Courier New"/>
-              </a:defRPr>
-            </a:pPr>
-            <a:r>
-              <a:t>[ 02_ERP ]</a:t>
-            </a:r>
-          </a:p>
-          <a:p>
-            <a:pPr>
-              <a:spcAft>
-                <a:spcPts val="1400"/>
-              </a:spcAft>
-              <a:defRPr sz="1900" b="1">
-                <a:solidFill>
-                  <a:srgbClr val="16161A"/>
-                </a:solidFill>
-                <a:latin typeface="Helvetica"/>
-              </a:defRPr>
-            </a:pPr>
-            <a:r>
-              <a:t>Systems Integration</a:t>
-            </a:r>
-          </a:p>
-          <a:p>
-            <a:pPr>
-              <a:defRPr sz="1400">
-                <a:solidFill>
-                  <a:srgbClr val="454337"/>
-                </a:solidFill>
-                <a:latin typeface="Helvetica"/>
-              </a:defRPr>
-            </a:pPr>
-            <a:r>
-              <a:t>Deep financial backend integrations (Workday Finance &amp; Adaptive Planning), PostgreSQL databases, and enterprise APIs.</a:t>
-            </a:r>
-          </a:p>
-        </p:txBody>
-      </p:sp>
-      <p:sp>
-        <p:nvSpPr>
-          <p:cNvPr id="14" name="Rounded Rectangle 13"/>
-          <p:cNvSpPr/>
-          <p:nvPr/>
-        </p:nvSpPr>
-        <p:spPr>
-          <a:xfrm>
-            <a:off x="7863840" y="1920240"/>
-            <a:ext cx="3328416" cy="3931920"/>
-          </a:xfrm>
-          <a:prstGeom prst="roundRect">
-            <a:avLst/>
-          </a:prstGeom>
-          <a:solidFill>
-            <a:srgbClr val="FFFFFF"/>
-          </a:solidFill>
-          <a:ln w="12700">
-            <a:solidFill>
-              <a:srgbClr val="C9C3B2"/>
-            </a:solidFill>
-          </a:ln>
-        </p:spPr>
-        <p:style>
-          <a:lnRef idx="1">
-            <a:schemeClr val="accent1"/>
-          </a:lnRef>
-          <a:fillRef idx="3">
-            <a:schemeClr val="accent1"/>
-          </a:fillRef>
-          <a:effectRef idx="2">
-            <a:schemeClr val="accent1"/>
-          </a:effectRef>
-          <a:fontRef idx="minor">
-            <a:schemeClr val="lt1"/>
-          </a:fontRef>
-        </p:style>
-        <p:txBody>
-          <a:bodyPr rtlCol="0" anchor="ctr"/>
-          <a:lstStyle/>
-          <a:p>
-            <a:pPr algn="ctr"/>
-          </a:p>
-        </p:txBody>
-      </p:sp>
-      <p:sp>
-        <p:nvSpPr>
-          <p:cNvPr id="15" name="TextBox 14"/>
-          <p:cNvSpPr txBox="1"/>
-          <p:nvPr/>
-        </p:nvSpPr>
-        <p:spPr>
-          <a:xfrm>
-            <a:off x="8138160" y="2194560"/>
-            <a:ext cx="2779776" cy="3474720"/>
-          </a:xfrm>
-          <a:prstGeom prst="rect">
-            <a:avLst/>
-          </a:prstGeom>
-          <a:noFill/>
-        </p:spPr>
-        <p:txBody>
-          <a:bodyPr wrap="square">
-            <a:spAutoFit/>
-          </a:bodyPr>
-          <a:lstStyle/>
-          <a:p>
-            <a:pPr>
-              <a:spcAft>
-                <a:spcPts val="1200"/>
-              </a:spcAft>
-              <a:defRPr sz="1200" b="1">
-                <a:solidFill>
-                  <a:srgbClr val="D99B26"/>
-                </a:solidFill>
-                <a:latin typeface="Courier New"/>
-              </a:defRPr>
-            </a:pPr>
-            <a:r>
-              <a:t>[ 03_MCP ]</a:t>
-            </a:r>
-          </a:p>
-          <a:p>
-            <a:pPr>
-              <a:spcAft>
-                <a:spcPts val="1400"/>
-              </a:spcAft>
-              <a:defRPr sz="1900" b="1">
-                <a:solidFill>
-                  <a:srgbClr val="16161A"/>
-                </a:solidFill>
-                <a:latin typeface="Helvetica"/>
-              </a:defRPr>
-            </a:pPr>
-            <a:r>
-              <a:t>Applied AI &amp; Automation</a:t>
-            </a:r>
-          </a:p>
-          <a:p>
-            <a:pPr>
-              <a:defRPr sz="1400">
-                <a:solidFill>
-                  <a:srgbClr val="454337"/>
-                </a:solidFill>
-                <a:latin typeface="Helvetica"/>
-              </a:defRPr>
-            </a:pPr>
-            <a:r>
-              <a:t>Custom Model Context Protocol (MCP) servers, LLM orchestration, and human-in-the-loop (HITL) AI agents.</a:t>
-            </a:r>
-          </a:p>
-        </p:txBody>
-      </p:sp>
-      <p:sp>
-        <p:nvSpPr>
-          <p:cNvPr id="16" name="Rectangle 15"/>
-          <p:cNvSpPr/>
-          <p:nvPr/>
-        </p:nvSpPr>
-        <p:spPr>
-          <a:xfrm>
-            <a:off x="731520" y="6400800"/>
-            <a:ext cx="10728655" cy="12700"/>
-          </a:xfrm>
-          <a:prstGeom prst="rect">
-            <a:avLst/>
-          </a:prstGeom>
-          <a:solidFill>
-            <a:srgbClr val="C9C3B2"/>
-          </a:solidFill>
-          <a:ln>
-            <a:noFill/>
-          </a:ln>
-        </p:spPr>
-        <p:style>
-          <a:lnRef idx="1">
-            <a:schemeClr val="accent1"/>
-          </a:lnRef>
-          <a:fillRef idx="3">
-            <a:schemeClr val="accent1"/>
-          </a:fillRef>
-          <a:effectRef idx="2">
-            <a:schemeClr val="accent1"/>
-          </a:effectRef>
-          <a:fontRef idx="minor">
-            <a:schemeClr val="lt1"/>
-          </a:fontRef>
-        </p:style>
-        <p:txBody>
-          <a:bodyPr rtlCol="0" anchor="ctr"/>
-          <a:lstStyle/>
-          <a:p>
-            <a:pPr algn="ctr"/>
-          </a:p>
-        </p:txBody>
-      </p:sp>
-      <p:sp>
-        <p:nvSpPr>
-          <p:cNvPr id="17" name="TextBox 16"/>
-          <p:cNvSpPr txBox="1"/>
-          <p:nvPr/>
-        </p:nvSpPr>
-        <p:spPr>
-          <a:xfrm>
-            <a:off x="731520" y="6446520"/>
+            <a:off x="822960" y="6382512"/>
             <a:ext cx="7315200" cy="320040"/>
           </a:xfrm>
           <a:prstGeom prst="rect">
@@ -4645,7 +4031,7 @@
             <a:pPr>
               <a:defRPr sz="1000">
                 <a:solidFill>
-                  <a:srgbClr val="5F5C52"/>
+                  <a:srgbClr val="7C786C"/>
                 </a:solidFill>
                 <a:latin typeface="Courier New"/>
               </a:defRPr>
@@ -4658,13 +4044,13 @@
       </p:sp>
       <p:sp>
         <p:nvSpPr>
-          <p:cNvPr id="18" name="TextBox 17"/>
+          <p:cNvPr id="12" name="TextBox 11"/>
           <p:cNvSpPr txBox="1"/>
           <p:nvPr/>
         </p:nvSpPr>
         <p:spPr>
           <a:xfrm>
-            <a:off x="9631375" y="6446520"/>
+            <a:off x="9539935" y="6382512"/>
             <a:ext cx="1828800" cy="320040"/>
           </a:xfrm>
           <a:prstGeom prst="rect">
@@ -4681,7 +4067,7 @@
             <a:pPr algn="r">
               <a:defRPr sz="1000">
                 <a:solidFill>
-                  <a:srgbClr val="5F5C52"/>
+                  <a:srgbClr val="7C786C"/>
                 </a:solidFill>
                 <a:latin typeface="Courier New"/>
               </a:defRPr>
@@ -4706,7 +4092,7 @@
     <p:bg>
       <p:bgPr>
         <a:solidFill>
-          <a:srgbClr val="F4F1EA"/>
+          <a:srgbClr val="FAF9F5"/>
         </a:solidFill>
         <a:effectLst/>
       </p:bgPr>
@@ -4720,24 +4106,96 @@
       <p:grpSpPr/>
       <p:sp>
         <p:nvSpPr>
-          <p:cNvPr id="2" name="Rectangle 1"/>
+          <p:cNvPr id="2" name="TextBox 1"/>
+          <p:cNvSpPr txBox="1"/>
+          <p:nvPr/>
+        </p:nvSpPr>
+        <p:spPr>
+          <a:xfrm>
+            <a:off x="822960" y="548640"/>
+            <a:ext cx="10515600" cy="320040"/>
+          </a:xfrm>
+          <a:prstGeom prst="rect">
+            <a:avLst/>
+          </a:prstGeom>
+          <a:noFill/>
+        </p:spPr>
+        <p:txBody>
+          <a:bodyPr wrap="none" lIns="0" tIns="0" rIns="0" bIns="0">
+            <a:spAutoFit/>
+          </a:bodyPr>
+          <a:lstStyle/>
+          <a:p>
+            <a:pPr>
+              <a:defRPr sz="1100" b="1">
+                <a:solidFill>
+                  <a:srgbClr val="D99B26"/>
+                </a:solidFill>
+                <a:latin typeface="Courier New"/>
+              </a:defRPr>
+            </a:pPr>
+            <a:r>
+              <a:t>TARGET AUDIENCE &amp; ICP</a:t>
+            </a:r>
+          </a:p>
+        </p:txBody>
+      </p:sp>
+      <p:sp>
+        <p:nvSpPr>
+          <p:cNvPr id="3" name="TextBox 2"/>
+          <p:cNvSpPr txBox="1"/>
+          <p:nvPr/>
+        </p:nvSpPr>
+        <p:spPr>
+          <a:xfrm>
+            <a:off x="822960" y="868680"/>
+            <a:ext cx="10515600" cy="685800"/>
+          </a:xfrm>
+          <a:prstGeom prst="rect">
+            <a:avLst/>
+          </a:prstGeom>
+          <a:noFill/>
+        </p:spPr>
+        <p:txBody>
+          <a:bodyPr wrap="square" lIns="0" tIns="0" rIns="0" bIns="0">
+            <a:spAutoFit/>
+          </a:bodyPr>
+          <a:lstStyle/>
+          <a:p>
+            <a:pPr>
+              <a:defRPr sz="2600" b="1">
+                <a:solidFill>
+                  <a:srgbClr val="16161A"/>
+                </a:solidFill>
+                <a:latin typeface="Helvetica"/>
+              </a:defRPr>
+            </a:pPr>
+            <a:r>
+              <a:t>Who Benefits Most From Our Practice?</a:t>
+            </a:r>
+          </a:p>
+        </p:txBody>
+      </p:sp>
+      <p:sp>
+        <p:nvSpPr>
+          <p:cNvPr id="4" name="Rounded Rectangle 3"/>
           <p:cNvSpPr/>
           <p:nvPr/>
         </p:nvSpPr>
         <p:spPr>
           <a:xfrm>
-            <a:off x="0" y="0"/>
-            <a:ext cx="12191695" cy="594360"/>
-          </a:xfrm>
-          <a:prstGeom prst="rect">
+            <a:off x="822960" y="1874519"/>
+            <a:ext cx="5120640" cy="4023360"/>
+          </a:xfrm>
+          <a:prstGeom prst="roundRect">
             <a:avLst/>
           </a:prstGeom>
           <a:solidFill>
-            <a:srgbClr val="121216"/>
+            <a:srgbClr val="FFFFFF"/>
           </a:solidFill>
           <a:ln w="12700">
             <a:solidFill>
-              <a:srgbClr val="26262C"/>
+              <a:srgbClr val="EBE7DF"/>
             </a:solidFill>
           </a:ln>
         </p:spPr>
@@ -4765,23 +4223,160 @@
       </p:sp>
       <p:sp>
         <p:nvSpPr>
-          <p:cNvPr id="3" name="Rounded Rectangle 2"/>
+          <p:cNvPr id="5" name="TextBox 4"/>
+          <p:cNvSpPr txBox="1"/>
+          <p:nvPr/>
+        </p:nvSpPr>
+        <p:spPr>
+          <a:xfrm>
+            <a:off x="1097280" y="2194559"/>
+            <a:ext cx="4572000" cy="3474720"/>
+          </a:xfrm>
+          <a:prstGeom prst="rect">
+            <a:avLst/>
+          </a:prstGeom>
+          <a:noFill/>
+        </p:spPr>
+        <p:txBody>
+          <a:bodyPr wrap="square">
+            <a:spAutoFit/>
+          </a:bodyPr>
+          <a:lstStyle/>
+          <a:p>
+            <a:pPr>
+              <a:spcAft>
+                <a:spcPts val="1400"/>
+              </a:spcAft>
+              <a:defRPr sz="1100" b="1">
+                <a:solidFill>
+                  <a:srgbClr val="2B59D9"/>
+                </a:solidFill>
+                <a:latin typeface="Courier New"/>
+              </a:defRPr>
+            </a:pPr>
+            <a:r>
+              <a:t>TARGET ORGANIZATIONS</a:t>
+            </a:r>
+          </a:p>
+          <a:p>
+            <a:pPr>
+              <a:spcAft>
+                <a:spcPts val="1000"/>
+              </a:spcAft>
+              <a:defRPr b="1" sz="1300">
+                <a:solidFill>
+                  <a:srgbClr val="16161A"/>
+                </a:solidFill>
+                <a:latin typeface="Helvetica"/>
+              </a:defRPr>
+            </a:pPr>
+            <a:r>
+              <a:t>• Mid-Market Enterprises: </a:t>
+            </a:r>
+            <a:r>
+              <a:rPr b="0">
+                <a:solidFill>
+                  <a:srgbClr val="59564D"/>
+                </a:solidFill>
+              </a:rPr>
+              <a:t>Established operations needing custom tool integration.</a:t>
+            </a:r>
+          </a:p>
+          <a:p>
+            <a:pPr>
+              <a:spcAft>
+                <a:spcPts val="1000"/>
+              </a:spcAft>
+              <a:defRPr b="1" sz="1300">
+                <a:solidFill>
+                  <a:srgbClr val="16161A"/>
+                </a:solidFill>
+                <a:latin typeface="Helvetica"/>
+              </a:defRPr>
+            </a:pPr>
+            <a:r>
+              <a:t>• Fast-Growing SMBs: </a:t>
+            </a:r>
+            <a:r>
+              <a:rPr b="0">
+                <a:solidFill>
+                  <a:srgbClr val="59564D"/>
+                </a:solidFill>
+              </a:rPr>
+              <a:t>Scaling teams outgrowing spreadsheets or disconnected SaaS apps.</a:t>
+            </a:r>
+          </a:p>
+          <a:p>
+            <a:pPr>
+              <a:spcAft>
+                <a:spcPts val="1000"/>
+              </a:spcAft>
+              <a:defRPr b="1" sz="1300">
+                <a:solidFill>
+                  <a:srgbClr val="16161A"/>
+                </a:solidFill>
+                <a:latin typeface="Helvetica"/>
+              </a:defRPr>
+            </a:pPr>
+            <a:r>
+              <a:t>• Venture-Backed Startups: </a:t>
+            </a:r>
+            <a:r>
+              <a:rPr b="0">
+                <a:solidFill>
+                  <a:srgbClr val="59564D"/>
+                </a:solidFill>
+              </a:rPr>
+              <a:t>Teams needing high-velocity technical execution &amp; architecture.</a:t>
+            </a:r>
+          </a:p>
+          <a:p>
+            <a:pPr>
+              <a:spcAft>
+                <a:spcPts val="1000"/>
+              </a:spcAft>
+              <a:defRPr b="1" sz="1300">
+                <a:solidFill>
+                  <a:srgbClr val="16161A"/>
+                </a:solidFill>
+                <a:latin typeface="Helvetica"/>
+              </a:defRPr>
+            </a:pPr>
+            <a:r>
+              <a:t>• PE / VC Portcos: </a:t>
+            </a:r>
+            <a:r>
+              <a:rPr b="0">
+                <a:solidFill>
+                  <a:srgbClr val="59564D"/>
+                </a:solidFill>
+              </a:rPr>
+              <a:t>Portfolio companies streamlining back-office operational efficiency.</a:t>
+            </a:r>
+          </a:p>
+        </p:txBody>
+      </p:sp>
+      <p:sp>
+        <p:nvSpPr>
+          <p:cNvPr id="6" name="Rounded Rectangle 5"/>
           <p:cNvSpPr/>
           <p:nvPr/>
         </p:nvSpPr>
         <p:spPr>
           <a:xfrm>
-            <a:off x="731520" y="137160"/>
-            <a:ext cx="320040" cy="320040"/>
+            <a:off x="6248095" y="1874519"/>
+            <a:ext cx="5120640" cy="4023360"/>
           </a:xfrm>
           <a:prstGeom prst="roundRect">
             <a:avLst/>
           </a:prstGeom>
           <a:solidFill>
-            <a:srgbClr val="2B59D9"/>
+            <a:srgbClr val="FFFFFF"/>
           </a:solidFill>
-          <a:ln>
-            <a:noFill/>
+          <a:ln w="12700">
+            <a:solidFill>
+              <a:srgbClr val="EBE7DF"/>
+            </a:solidFill>
           </a:ln>
         </p:spPr>
         <p:style>
@@ -4808,14 +4403,14 @@
       </p:sp>
       <p:sp>
         <p:nvSpPr>
-          <p:cNvPr id="4" name="TextBox 3"/>
+          <p:cNvPr id="7" name="TextBox 6"/>
           <p:cNvSpPr txBox="1"/>
           <p:nvPr/>
         </p:nvSpPr>
         <p:spPr>
           <a:xfrm>
-            <a:off x="731520" y="128016"/>
-            <a:ext cx="320040" cy="320040"/>
+            <a:off x="6522415" y="2194559"/>
+            <a:ext cx="4572000" cy="3474720"/>
           </a:xfrm>
           <a:prstGeom prst="rect">
             <a:avLst/>
@@ -4823,118 +4418,143 @@
           <a:noFill/>
         </p:spPr>
         <p:txBody>
-          <a:bodyPr wrap="none" lIns="0" tIns="0" rIns="0" bIns="0">
+          <a:bodyPr wrap="square">
             <a:spAutoFit/>
           </a:bodyPr>
           <a:lstStyle/>
           <a:p>
             <a:pPr>
-              <a:defRPr sz="1400" b="1">
-                <a:solidFill>
-                  <a:srgbClr val="FFFFFF"/>
+              <a:spcAft>
+                <a:spcPts val="1400"/>
+              </a:spcAft>
+              <a:defRPr sz="1100" b="1">
+                <a:solidFill>
+                  <a:srgbClr val="D99B26"/>
                 </a:solidFill>
                 <a:latin typeface="Courier New"/>
               </a:defRPr>
             </a:pPr>
             <a:r>
-              <a:t>›_</a:t>
-            </a:r>
-          </a:p>
-        </p:txBody>
-      </p:sp>
-      <p:sp>
-        <p:nvSpPr>
-          <p:cNvPr id="5" name="TextBox 4"/>
-          <p:cNvSpPr txBox="1"/>
-          <p:nvPr/>
-        </p:nvSpPr>
-        <p:spPr>
-          <a:xfrm>
-            <a:off x="1143000" y="146304"/>
-            <a:ext cx="4114800" cy="320040"/>
+              <a:t>KEY DECISION MAKERS</a:t>
+            </a:r>
+          </a:p>
+          <a:p>
+            <a:pPr>
+              <a:spcAft>
+                <a:spcPts val="1000"/>
+              </a:spcAft>
+              <a:defRPr b="1" sz="1300">
+                <a:solidFill>
+                  <a:srgbClr val="16161A"/>
+                </a:solidFill>
+                <a:latin typeface="Helvetica"/>
+              </a:defRPr>
+            </a:pPr>
+            <a:r>
+              <a:t>• CTOs &amp; VPs of Engineering: </a:t>
+            </a:r>
+            <a:r>
+              <a:rPr b="0">
+                <a:solidFill>
+                  <a:srgbClr val="59564D"/>
+                </a:solidFill>
+              </a:rPr>
+              <a:t>Offloading specialized integration &amp; AI agent frontends.</a:t>
+            </a:r>
+          </a:p>
+          <a:p>
+            <a:pPr>
+              <a:spcAft>
+                <a:spcPts val="1000"/>
+              </a:spcAft>
+              <a:defRPr b="1" sz="1300">
+                <a:solidFill>
+                  <a:srgbClr val="16161A"/>
+                </a:solidFill>
+                <a:latin typeface="Helvetica"/>
+              </a:defRPr>
+            </a:pPr>
+            <a:r>
+              <a:t>• CFOs &amp; Finance Directors: </a:t>
+            </a:r>
+            <a:r>
+              <a:rPr b="0">
+                <a:solidFill>
+                  <a:srgbClr val="59564D"/>
+                </a:solidFill>
+              </a:rPr>
+              <a:t>Struggling with Workday/ERP data bottlenecks and reporting.</a:t>
+            </a:r>
+          </a:p>
+          <a:p>
+            <a:pPr>
+              <a:spcAft>
+                <a:spcPts val="1000"/>
+              </a:spcAft>
+              <a:defRPr b="1" sz="1300">
+                <a:solidFill>
+                  <a:srgbClr val="16161A"/>
+                </a:solidFill>
+                <a:latin typeface="Helvetica"/>
+              </a:defRPr>
+            </a:pPr>
+            <a:r>
+              <a:t>• VPs of Operations: </a:t>
+            </a:r>
+            <a:r>
+              <a:rPr b="0">
+                <a:solidFill>
+                  <a:srgbClr val="59564D"/>
+                </a:solidFill>
+              </a:rPr>
+              <a:t>Seeking to eliminate manual document &amp; workflow overhead.</a:t>
+            </a:r>
+          </a:p>
+          <a:p>
+            <a:pPr>
+              <a:spcAft>
+                <a:spcPts val="1000"/>
+              </a:spcAft>
+              <a:defRPr b="1" sz="1300">
+                <a:solidFill>
+                  <a:srgbClr val="16161A"/>
+                </a:solidFill>
+                <a:latin typeface="Helvetica"/>
+              </a:defRPr>
+            </a:pPr>
+            <a:r>
+              <a:t>• Founders &amp; Product Leaders: </a:t>
+            </a:r>
+            <a:r>
+              <a:rPr b="0">
+                <a:solidFill>
+                  <a:srgbClr val="59564D"/>
+                </a:solidFill>
+              </a:rPr>
+              <a:t>Building mission-critical web software under tight deadlines.</a:t>
+            </a:r>
+          </a:p>
+        </p:txBody>
+      </p:sp>
+      <p:sp>
+        <p:nvSpPr>
+          <p:cNvPr id="8" name="Rectangle 7"/>
+          <p:cNvSpPr/>
+          <p:nvPr/>
+        </p:nvSpPr>
+        <p:spPr>
+          <a:xfrm>
+            <a:off x="822960" y="6309360"/>
+            <a:ext cx="10545775" cy="12700"/>
           </a:xfrm>
           <a:prstGeom prst="rect">
             <a:avLst/>
           </a:prstGeom>
-          <a:noFill/>
-        </p:spPr>
-        <p:txBody>
-          <a:bodyPr wrap="none" lIns="0" tIns="0" rIns="0" bIns="0">
-            <a:spAutoFit/>
-          </a:bodyPr>
-          <a:lstStyle/>
-          <a:p>
-            <a:pPr>
-              <a:defRPr sz="1300" b="1">
-                <a:solidFill>
-                  <a:srgbClr val="FFFFFF"/>
-                </a:solidFill>
-                <a:latin typeface="Helvetica"/>
-              </a:defRPr>
-            </a:pPr>
-            <a:r>
-              <a:t>TECHNOLOGY CONSULTANTS</a:t>
-            </a:r>
-          </a:p>
-        </p:txBody>
-      </p:sp>
-      <p:sp>
-        <p:nvSpPr>
-          <p:cNvPr id="6" name="TextBox 5"/>
-          <p:cNvSpPr txBox="1"/>
-          <p:nvPr/>
-        </p:nvSpPr>
-        <p:spPr>
-          <a:xfrm>
-            <a:off x="6858000" y="164592"/>
-            <a:ext cx="4572000" cy="320040"/>
-          </a:xfrm>
-          <a:prstGeom prst="rect">
-            <a:avLst/>
-          </a:prstGeom>
-          <a:noFill/>
-        </p:spPr>
-        <p:txBody>
-          <a:bodyPr wrap="none" lIns="0" tIns="0" rIns="0" bIns="0">
-            <a:spAutoFit/>
-          </a:bodyPr>
-          <a:lstStyle/>
-          <a:p>
-            <a:pPr algn="r">
-              <a:defRPr sz="1100">
-                <a:solidFill>
-                  <a:srgbClr val="D99B26"/>
-                </a:solidFill>
-                <a:latin typeface="Courier New"/>
-              </a:defRPr>
-            </a:pPr>
-            <a:r>
-              <a:t>02 / TARGET PROFILE</a:t>
-            </a:r>
-          </a:p>
-        </p:txBody>
-      </p:sp>
-      <p:sp>
-        <p:nvSpPr>
-          <p:cNvPr id="7" name="Rounded Rectangle 6"/>
-          <p:cNvSpPr/>
-          <p:nvPr/>
-        </p:nvSpPr>
-        <p:spPr>
-          <a:xfrm>
-            <a:off x="731520" y="822960"/>
-            <a:ext cx="3072384" cy="292608"/>
-          </a:xfrm>
-          <a:prstGeom prst="roundRect">
-            <a:avLst/>
-          </a:prstGeom>
           <a:solidFill>
-            <a:srgbClr val="EFE9D8"/>
+            <a:srgbClr val="EBE7DF"/>
           </a:solidFill>
-          <a:ln w="12700">
-            <a:solidFill>
-              <a:srgbClr val="D99B26"/>
-            </a:solidFill>
+          <a:ln>
+            <a:noFill/>
           </a:ln>
         </p:spPr>
         <p:style>
@@ -4961,14 +4581,14 @@
       </p:sp>
       <p:sp>
         <p:nvSpPr>
-          <p:cNvPr id="8" name="TextBox 7"/>
+          <p:cNvPr id="9" name="TextBox 8"/>
           <p:cNvSpPr txBox="1"/>
           <p:nvPr/>
         </p:nvSpPr>
         <p:spPr>
           <a:xfrm>
-            <a:off x="731520" y="859536"/>
-            <a:ext cx="3072384" cy="256032"/>
+            <a:off x="822960" y="6382512"/>
+            <a:ext cx="7315200" cy="320040"/>
           </a:xfrm>
           <a:prstGeom prst="rect">
             <a:avLst/>
@@ -4981,477 +4601,30 @@
           </a:bodyPr>
           <a:lstStyle/>
           <a:p>
-            <a:pPr algn="ctr">
-              <a:defRPr sz="1000" b="1">
-                <a:solidFill>
-                  <a:srgbClr val="D99B26"/>
+            <a:pPr>
+              <a:defRPr sz="1000">
+                <a:solidFill>
+                  <a:srgbClr val="7C786C"/>
                 </a:solidFill>
                 <a:latin typeface="Courier New"/>
               </a:defRPr>
             </a:pPr>
             <a:r>
-              <a:t>IDEAL CLIENT PROFILE (ICP)</a:t>
-            </a:r>
-          </a:p>
-        </p:txBody>
-      </p:sp>
-      <p:sp>
-        <p:nvSpPr>
-          <p:cNvPr id="9" name="TextBox 8"/>
+              <a:t>technologyconsultants.ventures  ·  San Diego · Tijuana</a:t>
+            </a:r>
+          </a:p>
+        </p:txBody>
+      </p:sp>
+      <p:sp>
+        <p:nvSpPr>
+          <p:cNvPr id="10" name="TextBox 9"/>
           <p:cNvSpPr txBox="1"/>
           <p:nvPr/>
         </p:nvSpPr>
         <p:spPr>
           <a:xfrm>
-            <a:off x="731520" y="1188720"/>
-            <a:ext cx="10728655" cy="548640"/>
-          </a:xfrm>
-          <a:prstGeom prst="rect">
-            <a:avLst/>
-          </a:prstGeom>
-          <a:noFill/>
-        </p:spPr>
-        <p:txBody>
-          <a:bodyPr wrap="none">
-            <a:spAutoFit/>
-          </a:bodyPr>
-          <a:lstStyle/>
-          <a:p>
-            <a:pPr>
-              <a:defRPr sz="2400" b="1">
-                <a:solidFill>
-                  <a:srgbClr val="16161A"/>
-                </a:solidFill>
-                <a:latin typeface="Helvetica"/>
-              </a:defRPr>
-            </a:pPr>
-            <a:r>
-              <a:t>Who Benefits Most From Our Practice?</a:t>
-            </a:r>
-          </a:p>
-        </p:txBody>
-      </p:sp>
-      <p:sp>
-        <p:nvSpPr>
-          <p:cNvPr id="10" name="Rounded Rectangle 9"/>
-          <p:cNvSpPr/>
-          <p:nvPr/>
-        </p:nvSpPr>
-        <p:spPr>
-          <a:xfrm>
-            <a:off x="731520" y="1920240"/>
-            <a:ext cx="5166360" cy="3931920"/>
-          </a:xfrm>
-          <a:prstGeom prst="roundRect">
-            <a:avLst/>
-          </a:prstGeom>
-          <a:solidFill>
-            <a:srgbClr val="FFFFFF"/>
-          </a:solidFill>
-          <a:ln>
-            <a:solidFill>
-              <a:srgbClr val="C9C3B2"/>
-            </a:solidFill>
-          </a:ln>
-        </p:spPr>
-        <p:style>
-          <a:lnRef idx="1">
-            <a:schemeClr val="accent1"/>
-          </a:lnRef>
-          <a:fillRef idx="3">
-            <a:schemeClr val="accent1"/>
-          </a:fillRef>
-          <a:effectRef idx="2">
-            <a:schemeClr val="accent1"/>
-          </a:effectRef>
-          <a:fontRef idx="minor">
-            <a:schemeClr val="lt1"/>
-          </a:fontRef>
-        </p:style>
-        <p:txBody>
-          <a:bodyPr rtlCol="0" anchor="ctr"/>
-          <a:lstStyle/>
-          <a:p>
-            <a:pPr algn="ctr"/>
-          </a:p>
-        </p:txBody>
-      </p:sp>
-      <p:sp>
-        <p:nvSpPr>
-          <p:cNvPr id="11" name="TextBox 10"/>
-          <p:cNvSpPr txBox="1"/>
-          <p:nvPr/>
-        </p:nvSpPr>
-        <p:spPr>
-          <a:xfrm>
-            <a:off x="1005840" y="2194560"/>
-            <a:ext cx="4617720" cy="3474720"/>
-          </a:xfrm>
-          <a:prstGeom prst="rect">
-            <a:avLst/>
-          </a:prstGeom>
-          <a:noFill/>
-        </p:spPr>
-        <p:txBody>
-          <a:bodyPr wrap="square">
-            <a:spAutoFit/>
-          </a:bodyPr>
-          <a:lstStyle/>
-          <a:p>
-            <a:pPr>
-              <a:spcAft>
-                <a:spcPts val="1200"/>
-              </a:spcAft>
-              <a:defRPr sz="1100" b="1">
-                <a:solidFill>
-                  <a:srgbClr val="2B59D9"/>
-                </a:solidFill>
-                <a:latin typeface="Courier New"/>
-              </a:defRPr>
-            </a:pPr>
-            <a:r>
-              <a:t>TARGET ORGANIZATIONS</a:t>
-            </a:r>
-          </a:p>
-          <a:p>
-            <a:pPr>
-              <a:spcAft>
-                <a:spcPts val="800"/>
-              </a:spcAft>
-              <a:defRPr b="1" sz="1200">
-                <a:solidFill>
-                  <a:srgbClr val="16161A"/>
-                </a:solidFill>
-                <a:latin typeface="Courier New"/>
-              </a:defRPr>
-            </a:pPr>
-            <a:r>
-              <a:t>› Mid-Market Enterprises: </a:t>
-            </a:r>
-            <a:r>
-              <a:rPr b="0">
-                <a:solidFill>
-                  <a:srgbClr val="454337"/>
-                </a:solidFill>
-                <a:latin typeface="Helvetica"/>
-              </a:rPr>
-              <a:t>Established operations needing custom tool integration.</a:t>
-            </a:r>
-          </a:p>
-          <a:p>
-            <a:pPr>
-              <a:spcAft>
-                <a:spcPts val="800"/>
-              </a:spcAft>
-              <a:defRPr b="1" sz="1200">
-                <a:solidFill>
-                  <a:srgbClr val="16161A"/>
-                </a:solidFill>
-                <a:latin typeface="Courier New"/>
-              </a:defRPr>
-            </a:pPr>
-            <a:r>
-              <a:t>› Fast-Growing SMBs: </a:t>
-            </a:r>
-            <a:r>
-              <a:rPr b="0">
-                <a:solidFill>
-                  <a:srgbClr val="454337"/>
-                </a:solidFill>
-                <a:latin typeface="Helvetica"/>
-              </a:rPr>
-              <a:t>Scaling teams outgrowing spreadsheets or disconnected SaaS apps.</a:t>
-            </a:r>
-          </a:p>
-          <a:p>
-            <a:pPr>
-              <a:spcAft>
-                <a:spcPts val="800"/>
-              </a:spcAft>
-              <a:defRPr b="1" sz="1200">
-                <a:solidFill>
-                  <a:srgbClr val="16161A"/>
-                </a:solidFill>
-                <a:latin typeface="Courier New"/>
-              </a:defRPr>
-            </a:pPr>
-            <a:r>
-              <a:t>› Venture-Backed Startups: </a:t>
-            </a:r>
-            <a:r>
-              <a:rPr b="0">
-                <a:solidFill>
-                  <a:srgbClr val="454337"/>
-                </a:solidFill>
-                <a:latin typeface="Helvetica"/>
-              </a:rPr>
-              <a:t>Teams needing high-velocity technical execution &amp; architecture.</a:t>
-            </a:r>
-          </a:p>
-          <a:p>
-            <a:pPr>
-              <a:spcAft>
-                <a:spcPts val="800"/>
-              </a:spcAft>
-              <a:defRPr b="1" sz="1200">
-                <a:solidFill>
-                  <a:srgbClr val="16161A"/>
-                </a:solidFill>
-                <a:latin typeface="Courier New"/>
-              </a:defRPr>
-            </a:pPr>
-            <a:r>
-              <a:t>› PE / VC Portcos: </a:t>
-            </a:r>
-            <a:r>
-              <a:rPr b="0">
-                <a:solidFill>
-                  <a:srgbClr val="454337"/>
-                </a:solidFill>
-                <a:latin typeface="Helvetica"/>
-              </a:rPr>
-              <a:t>Portfolio companies streamlining back-office operational efficiency.</a:t>
-            </a:r>
-          </a:p>
-        </p:txBody>
-      </p:sp>
-      <p:sp>
-        <p:nvSpPr>
-          <p:cNvPr id="12" name="Rounded Rectangle 11"/>
-          <p:cNvSpPr/>
-          <p:nvPr/>
-        </p:nvSpPr>
-        <p:spPr>
-          <a:xfrm>
-            <a:off x="6263640" y="1920240"/>
-            <a:ext cx="5166360" cy="3931920"/>
-          </a:xfrm>
-          <a:prstGeom prst="roundRect">
-            <a:avLst/>
-          </a:prstGeom>
-          <a:solidFill>
-            <a:srgbClr val="FFFFFF"/>
-          </a:solidFill>
-          <a:ln>
-            <a:solidFill>
-              <a:srgbClr val="C9C3B2"/>
-            </a:solidFill>
-          </a:ln>
-        </p:spPr>
-        <p:style>
-          <a:lnRef idx="1">
-            <a:schemeClr val="accent1"/>
-          </a:lnRef>
-          <a:fillRef idx="3">
-            <a:schemeClr val="accent1"/>
-          </a:fillRef>
-          <a:effectRef idx="2">
-            <a:schemeClr val="accent1"/>
-          </a:effectRef>
-          <a:fontRef idx="minor">
-            <a:schemeClr val="lt1"/>
-          </a:fontRef>
-        </p:style>
-        <p:txBody>
-          <a:bodyPr rtlCol="0" anchor="ctr"/>
-          <a:lstStyle/>
-          <a:p>
-            <a:pPr algn="ctr"/>
-          </a:p>
-        </p:txBody>
-      </p:sp>
-      <p:sp>
-        <p:nvSpPr>
-          <p:cNvPr id="13" name="TextBox 12"/>
-          <p:cNvSpPr txBox="1"/>
-          <p:nvPr/>
-        </p:nvSpPr>
-        <p:spPr>
-          <a:xfrm>
-            <a:off x="6537960" y="2194560"/>
-            <a:ext cx="4617720" cy="3474720"/>
-          </a:xfrm>
-          <a:prstGeom prst="rect">
-            <a:avLst/>
-          </a:prstGeom>
-          <a:noFill/>
-        </p:spPr>
-        <p:txBody>
-          <a:bodyPr wrap="square">
-            <a:spAutoFit/>
-          </a:bodyPr>
-          <a:lstStyle/>
-          <a:p>
-            <a:pPr>
-              <a:spcAft>
-                <a:spcPts val="1200"/>
-              </a:spcAft>
-              <a:defRPr sz="1100" b="1">
-                <a:solidFill>
-                  <a:srgbClr val="D99B26"/>
-                </a:solidFill>
-                <a:latin typeface="Courier New"/>
-              </a:defRPr>
-            </a:pPr>
-            <a:r>
-              <a:t>KEY DECISION MAKERS</a:t>
-            </a:r>
-          </a:p>
-          <a:p>
-            <a:pPr>
-              <a:spcAft>
-                <a:spcPts val="800"/>
-              </a:spcAft>
-              <a:defRPr b="1" sz="1200">
-                <a:solidFill>
-                  <a:srgbClr val="16161A"/>
-                </a:solidFill>
-                <a:latin typeface="Courier New"/>
-              </a:defRPr>
-            </a:pPr>
-            <a:r>
-              <a:t>› CTOs &amp; VPs of Engineering: </a:t>
-            </a:r>
-            <a:r>
-              <a:rPr b="0">
-                <a:solidFill>
-                  <a:srgbClr val="454337"/>
-                </a:solidFill>
-                <a:latin typeface="Helvetica"/>
-              </a:rPr>
-              <a:t>Offloading specialized integration &amp; AI agent frontends.</a:t>
-            </a:r>
-          </a:p>
-          <a:p>
-            <a:pPr>
-              <a:spcAft>
-                <a:spcPts val="800"/>
-              </a:spcAft>
-              <a:defRPr b="1" sz="1200">
-                <a:solidFill>
-                  <a:srgbClr val="16161A"/>
-                </a:solidFill>
-                <a:latin typeface="Courier New"/>
-              </a:defRPr>
-            </a:pPr>
-            <a:r>
-              <a:t>› CFOs &amp; Finance Directors: </a:t>
-            </a:r>
-            <a:r>
-              <a:rPr b="0">
-                <a:solidFill>
-                  <a:srgbClr val="454337"/>
-                </a:solidFill>
-                <a:latin typeface="Helvetica"/>
-              </a:rPr>
-              <a:t>Struggling with Workday/ERP data bottlenecks and reporting.</a:t>
-            </a:r>
-          </a:p>
-          <a:p>
-            <a:pPr>
-              <a:spcAft>
-                <a:spcPts val="800"/>
-              </a:spcAft>
-              <a:defRPr b="1" sz="1200">
-                <a:solidFill>
-                  <a:srgbClr val="16161A"/>
-                </a:solidFill>
-                <a:latin typeface="Courier New"/>
-              </a:defRPr>
-            </a:pPr>
-            <a:r>
-              <a:t>› VPs of Operations: </a:t>
-            </a:r>
-            <a:r>
-              <a:rPr b="0">
-                <a:solidFill>
-                  <a:srgbClr val="454337"/>
-                </a:solidFill>
-                <a:latin typeface="Helvetica"/>
-              </a:rPr>
-              <a:t>Seeking to eliminate manual document &amp; workflow overhead.</a:t>
-            </a:r>
-          </a:p>
-          <a:p>
-            <a:pPr>
-              <a:spcAft>
-                <a:spcPts val="800"/>
-              </a:spcAft>
-              <a:defRPr b="1" sz="1200">
-                <a:solidFill>
-                  <a:srgbClr val="16161A"/>
-                </a:solidFill>
-                <a:latin typeface="Courier New"/>
-              </a:defRPr>
-            </a:pPr>
-            <a:r>
-              <a:t>› Founders &amp; Product Leaders: </a:t>
-            </a:r>
-            <a:r>
-              <a:rPr b="0">
-                <a:solidFill>
-                  <a:srgbClr val="454337"/>
-                </a:solidFill>
-                <a:latin typeface="Helvetica"/>
-              </a:rPr>
-              <a:t>Building mission-critical web software under tight deadlines.</a:t>
-            </a:r>
-          </a:p>
-        </p:txBody>
-      </p:sp>
-      <p:sp>
-        <p:nvSpPr>
-          <p:cNvPr id="14" name="Rectangle 13"/>
-          <p:cNvSpPr/>
-          <p:nvPr/>
-        </p:nvSpPr>
-        <p:spPr>
-          <a:xfrm>
-            <a:off x="731520" y="6400800"/>
-            <a:ext cx="10728655" cy="12700"/>
-          </a:xfrm>
-          <a:prstGeom prst="rect">
-            <a:avLst/>
-          </a:prstGeom>
-          <a:solidFill>
-            <a:srgbClr val="C9C3B2"/>
-          </a:solidFill>
-          <a:ln>
-            <a:noFill/>
-          </a:ln>
-        </p:spPr>
-        <p:style>
-          <a:lnRef idx="1">
-            <a:schemeClr val="accent1"/>
-          </a:lnRef>
-          <a:fillRef idx="3">
-            <a:schemeClr val="accent1"/>
-          </a:fillRef>
-          <a:effectRef idx="2">
-            <a:schemeClr val="accent1"/>
-          </a:effectRef>
-          <a:fontRef idx="minor">
-            <a:schemeClr val="lt1"/>
-          </a:fontRef>
-        </p:style>
-        <p:txBody>
-          <a:bodyPr rtlCol="0" anchor="ctr"/>
-          <a:lstStyle/>
-          <a:p>
-            <a:pPr algn="ctr"/>
-          </a:p>
-        </p:txBody>
-      </p:sp>
-      <p:sp>
-        <p:nvSpPr>
-          <p:cNvPr id="15" name="TextBox 14"/>
-          <p:cNvSpPr txBox="1"/>
-          <p:nvPr/>
-        </p:nvSpPr>
-        <p:spPr>
-          <a:xfrm>
-            <a:off x="731520" y="6446520"/>
-            <a:ext cx="7315200" cy="320040"/>
+            <a:off x="9539935" y="6382512"/>
+            <a:ext cx="1828800" cy="320040"/>
           </a:xfrm>
           <a:prstGeom prst="rect">
             <a:avLst/>
@@ -5464,46 +4637,10 @@
           </a:bodyPr>
           <a:lstStyle/>
           <a:p>
-            <a:pPr>
-              <a:defRPr sz="1000">
-                <a:solidFill>
-                  <a:srgbClr val="5F5C52"/>
-                </a:solidFill>
-                <a:latin typeface="Courier New"/>
-              </a:defRPr>
-            </a:pPr>
-            <a:r>
-              <a:t>technologyconsultants.ventures  ·  San Diego · Tijuana</a:t>
-            </a:r>
-          </a:p>
-        </p:txBody>
-      </p:sp>
-      <p:sp>
-        <p:nvSpPr>
-          <p:cNvPr id="16" name="TextBox 15"/>
-          <p:cNvSpPr txBox="1"/>
-          <p:nvPr/>
-        </p:nvSpPr>
-        <p:spPr>
-          <a:xfrm>
-            <a:off x="9631375" y="6446520"/>
-            <a:ext cx="1828800" cy="320040"/>
-          </a:xfrm>
-          <a:prstGeom prst="rect">
-            <a:avLst/>
-          </a:prstGeom>
-          <a:noFill/>
-        </p:spPr>
-        <p:txBody>
-          <a:bodyPr wrap="none" lIns="0" tIns="0" rIns="0" bIns="0">
-            <a:spAutoFit/>
-          </a:bodyPr>
-          <a:lstStyle/>
-          <a:p>
             <a:pPr algn="r">
               <a:defRPr sz="1000">
                 <a:solidFill>
-                  <a:srgbClr val="5F5C52"/>
+                  <a:srgbClr val="7C786C"/>
                 </a:solidFill>
                 <a:latin typeface="Courier New"/>
               </a:defRPr>
@@ -5528,7 +4665,7 @@
     <p:bg>
       <p:bgPr>
         <a:solidFill>
-          <a:srgbClr val="F4F1EA"/>
+          <a:srgbClr val="FAF9F5"/>
         </a:solidFill>
         <a:effectLst/>
       </p:bgPr>
@@ -5542,24 +4679,96 @@
       <p:grpSpPr/>
       <p:sp>
         <p:nvSpPr>
-          <p:cNvPr id="2" name="Rectangle 1"/>
+          <p:cNvPr id="2" name="TextBox 1"/>
+          <p:cNvSpPr txBox="1"/>
+          <p:nvPr/>
+        </p:nvSpPr>
+        <p:spPr>
+          <a:xfrm>
+            <a:off x="822960" y="548640"/>
+            <a:ext cx="10515600" cy="320040"/>
+          </a:xfrm>
+          <a:prstGeom prst="rect">
+            <a:avLst/>
+          </a:prstGeom>
+          <a:noFill/>
+        </p:spPr>
+        <p:txBody>
+          <a:bodyPr wrap="none" lIns="0" tIns="0" rIns="0" bIns="0">
+            <a:spAutoFit/>
+          </a:bodyPr>
+          <a:lstStyle/>
+          <a:p>
+            <a:pPr>
+              <a:defRPr sz="1100" b="1">
+                <a:solidFill>
+                  <a:srgbClr val="D99B26"/>
+                </a:solidFill>
+                <a:latin typeface="Courier New"/>
+              </a:defRPr>
+            </a:pPr>
+            <a:r>
+              <a:t>REFERRAL SIGNALS</a:t>
+            </a:r>
+          </a:p>
+        </p:txBody>
+      </p:sp>
+      <p:sp>
+        <p:nvSpPr>
+          <p:cNvPr id="3" name="TextBox 2"/>
+          <p:cNvSpPr txBox="1"/>
+          <p:nvPr/>
+        </p:nvSpPr>
+        <p:spPr>
+          <a:xfrm>
+            <a:off x="822960" y="868680"/>
+            <a:ext cx="10515600" cy="685800"/>
+          </a:xfrm>
+          <a:prstGeom prst="rect">
+            <a:avLst/>
+          </a:prstGeom>
+          <a:noFill/>
+        </p:spPr>
+        <p:txBody>
+          <a:bodyPr wrap="square" lIns="0" tIns="0" rIns="0" bIns="0">
+            <a:spAutoFit/>
+          </a:bodyPr>
+          <a:lstStyle/>
+          <a:p>
+            <a:pPr>
+              <a:defRPr sz="2600" b="1">
+                <a:solidFill>
+                  <a:srgbClr val="16161A"/>
+                </a:solidFill>
+                <a:latin typeface="Helvetica"/>
+              </a:defRPr>
+            </a:pPr>
+            <a:r>
+              <a:t>What Prospects Say Right Before They Need Us</a:t>
+            </a:r>
+          </a:p>
+        </p:txBody>
+      </p:sp>
+      <p:sp>
+        <p:nvSpPr>
+          <p:cNvPr id="4" name="Rounded Rectangle 3"/>
           <p:cNvSpPr/>
           <p:nvPr/>
         </p:nvSpPr>
         <p:spPr>
           <a:xfrm>
-            <a:off x="0" y="0"/>
-            <a:ext cx="12191695" cy="594360"/>
-          </a:xfrm>
-          <a:prstGeom prst="rect">
+            <a:off x="822960" y="1874519"/>
+            <a:ext cx="10545775" cy="1261872"/>
+          </a:xfrm>
+          <a:prstGeom prst="roundRect">
             <a:avLst/>
           </a:prstGeom>
           <a:solidFill>
-            <a:srgbClr val="121216"/>
+            <a:srgbClr val="FFFFFF"/>
           </a:solidFill>
           <a:ln w="12700">
             <a:solidFill>
-              <a:srgbClr val="26262C"/>
+              <a:srgbClr val="EBE7DF"/>
             </a:solidFill>
           </a:ln>
         </p:spPr>
@@ -5587,23 +4796,77 @@
       </p:sp>
       <p:sp>
         <p:nvSpPr>
-          <p:cNvPr id="3" name="Rounded Rectangle 2"/>
+          <p:cNvPr id="5" name="TextBox 4"/>
+          <p:cNvSpPr txBox="1"/>
+          <p:nvPr/>
+        </p:nvSpPr>
+        <p:spPr>
+          <a:xfrm>
+            <a:off x="1097280" y="2011679"/>
+            <a:ext cx="9966960" cy="1005840"/>
+          </a:xfrm>
+          <a:prstGeom prst="rect">
+            <a:avLst/>
+          </a:prstGeom>
+          <a:noFill/>
+        </p:spPr>
+        <p:txBody>
+          <a:bodyPr wrap="square">
+            <a:spAutoFit/>
+          </a:bodyPr>
+          <a:lstStyle/>
+          <a:p>
+            <a:pPr>
+              <a:spcAft>
+                <a:spcPts val="400"/>
+              </a:spcAft>
+              <a:defRPr sz="1000" b="1">
+                <a:solidFill>
+                  <a:srgbClr val="2B59D9"/>
+                </a:solidFill>
+                <a:latin typeface="Courier New"/>
+              </a:defRPr>
+            </a:pPr>
+            <a:r>
+              <a:t>01 / DISCONNECTED BACKENDS &amp; ERPS</a:t>
+            </a:r>
+          </a:p>
+          <a:p>
+            <a:pPr>
+              <a:defRPr sz="1400" i="1">
+                <a:solidFill>
+                  <a:srgbClr val="16161A"/>
+                </a:solidFill>
+                <a:latin typeface="Helvetica"/>
+              </a:defRPr>
+            </a:pPr>
+            <a:r>
+              <a:t>“Our backend finance systems (Workday/ERP/PostgreSQL) don’t connect cleanly to our front-end interfaces or modern software tools.”</a:t>
+            </a:r>
+          </a:p>
+        </p:txBody>
+      </p:sp>
+      <p:sp>
+        <p:nvSpPr>
+          <p:cNvPr id="6" name="Rounded Rectangle 5"/>
           <p:cNvSpPr/>
           <p:nvPr/>
         </p:nvSpPr>
         <p:spPr>
           <a:xfrm>
-            <a:off x="731520" y="137160"/>
-            <a:ext cx="320040" cy="320040"/>
+            <a:off x="822960" y="3291839"/>
+            <a:ext cx="10545775" cy="1261872"/>
           </a:xfrm>
           <a:prstGeom prst="roundRect">
             <a:avLst/>
           </a:prstGeom>
           <a:solidFill>
-            <a:srgbClr val="2B59D9"/>
+            <a:srgbClr val="FFFFFF"/>
           </a:solidFill>
-          <a:ln>
-            <a:noFill/>
+          <a:ln w="12700">
+            <a:solidFill>
+              <a:srgbClr val="EBE7DF"/>
+            </a:solidFill>
           </a:ln>
         </p:spPr>
         <p:style>
@@ -5630,14 +4893,14 @@
       </p:sp>
       <p:sp>
         <p:nvSpPr>
-          <p:cNvPr id="4" name="TextBox 3"/>
+          <p:cNvPr id="7" name="TextBox 6"/>
           <p:cNvSpPr txBox="1"/>
           <p:nvPr/>
         </p:nvSpPr>
         <p:spPr>
           <a:xfrm>
-            <a:off x="731520" y="128016"/>
-            <a:ext cx="320040" cy="320040"/>
+            <a:off x="1097280" y="3428999"/>
+            <a:ext cx="9966960" cy="1005840"/>
           </a:xfrm>
           <a:prstGeom prst="rect">
             <a:avLst/>
@@ -5645,117 +4908,61 @@
           <a:noFill/>
         </p:spPr>
         <p:txBody>
-          <a:bodyPr wrap="none" lIns="0" tIns="0" rIns="0" bIns="0">
+          <a:bodyPr wrap="square">
             <a:spAutoFit/>
           </a:bodyPr>
           <a:lstStyle/>
           <a:p>
             <a:pPr>
-              <a:defRPr sz="1400" b="1">
-                <a:solidFill>
-                  <a:srgbClr val="FFFFFF"/>
+              <a:spcAft>
+                <a:spcPts val="400"/>
+              </a:spcAft>
+              <a:defRPr sz="1000" b="1">
+                <a:solidFill>
+                  <a:srgbClr val="2B59D9"/>
                 </a:solidFill>
                 <a:latin typeface="Courier New"/>
               </a:defRPr>
             </a:pPr>
             <a:r>
-              <a:t>›_</a:t>
-            </a:r>
-          </a:p>
-        </p:txBody>
-      </p:sp>
-      <p:sp>
-        <p:nvSpPr>
-          <p:cNvPr id="5" name="TextBox 4"/>
-          <p:cNvSpPr txBox="1"/>
-          <p:nvPr/>
-        </p:nvSpPr>
-        <p:spPr>
-          <a:xfrm>
-            <a:off x="1143000" y="146304"/>
-            <a:ext cx="4114800" cy="320040"/>
-          </a:xfrm>
-          <a:prstGeom prst="rect">
-            <a:avLst/>
-          </a:prstGeom>
-          <a:noFill/>
-        </p:spPr>
-        <p:txBody>
-          <a:bodyPr wrap="none" lIns="0" tIns="0" rIns="0" bIns="0">
-            <a:spAutoFit/>
-          </a:bodyPr>
-          <a:lstStyle/>
-          <a:p>
-            <a:pPr>
-              <a:defRPr sz="1300" b="1">
-                <a:solidFill>
-                  <a:srgbClr val="FFFFFF"/>
+              <a:t>02 / AI AMBITIONS VS. ENTERPRISE SECURITY</a:t>
+            </a:r>
+          </a:p>
+          <a:p>
+            <a:pPr>
+              <a:defRPr sz="1400" i="1">
+                <a:solidFill>
+                  <a:srgbClr val="16161A"/>
                 </a:solidFill>
                 <a:latin typeface="Helvetica"/>
               </a:defRPr>
             </a:pPr>
             <a:r>
-              <a:t>TECHNOLOGY CONSULTANTS</a:t>
-            </a:r>
-          </a:p>
-        </p:txBody>
-      </p:sp>
-      <p:sp>
-        <p:nvSpPr>
-          <p:cNvPr id="6" name="TextBox 5"/>
-          <p:cNvSpPr txBox="1"/>
-          <p:nvPr/>
-        </p:nvSpPr>
-        <p:spPr>
-          <a:xfrm>
-            <a:off x="6858000" y="164592"/>
-            <a:ext cx="4572000" cy="320040"/>
-          </a:xfrm>
-          <a:prstGeom prst="rect">
-            <a:avLst/>
-          </a:prstGeom>
-          <a:noFill/>
-        </p:spPr>
-        <p:txBody>
-          <a:bodyPr wrap="none" lIns="0" tIns="0" rIns="0" bIns="0">
-            <a:spAutoFit/>
-          </a:bodyPr>
-          <a:lstStyle/>
-          <a:p>
-            <a:pPr algn="r">
-              <a:defRPr sz="1100">
-                <a:solidFill>
-                  <a:srgbClr val="D99B26"/>
-                </a:solidFill>
-                <a:latin typeface="Courier New"/>
-              </a:defRPr>
-            </a:pPr>
-            <a:r>
-              <a:t>03 / REFERRAL SIGNALS</a:t>
-            </a:r>
-          </a:p>
-        </p:txBody>
-      </p:sp>
-      <p:sp>
-        <p:nvSpPr>
-          <p:cNvPr id="7" name="Rounded Rectangle 6"/>
+              <a:t>“We want to leverage AI agents, but we need strict data security, enterprise controls, and human-in-the-loop (HITL) oversight.”</a:t>
+            </a:r>
+          </a:p>
+        </p:txBody>
+      </p:sp>
+      <p:sp>
+        <p:nvSpPr>
+          <p:cNvPr id="8" name="Rounded Rectangle 7"/>
           <p:cNvSpPr/>
           <p:nvPr/>
         </p:nvSpPr>
         <p:spPr>
           <a:xfrm>
-            <a:off x="731520" y="822960"/>
-            <a:ext cx="1965960" cy="292608"/>
+            <a:off x="822960" y="4709160"/>
+            <a:ext cx="10545775" cy="1261872"/>
           </a:xfrm>
           <a:prstGeom prst="roundRect">
             <a:avLst/>
           </a:prstGeom>
           <a:solidFill>
-            <a:srgbClr val="EFE9D8"/>
+            <a:srgbClr val="FFFFFF"/>
           </a:solidFill>
           <a:ln w="12700">
             <a:solidFill>
-              <a:srgbClr val="2B59D9"/>
+              <a:srgbClr val="EBE7DF"/>
             </a:solidFill>
           </a:ln>
         </p:spPr>
@@ -5783,14 +4990,14 @@
       </p:sp>
       <p:sp>
         <p:nvSpPr>
-          <p:cNvPr id="8" name="TextBox 7"/>
+          <p:cNvPr id="9" name="TextBox 8"/>
           <p:cNvSpPr txBox="1"/>
           <p:nvPr/>
         </p:nvSpPr>
         <p:spPr>
           <a:xfrm>
-            <a:off x="731520" y="859536"/>
-            <a:ext cx="1965960" cy="256032"/>
+            <a:off x="1097280" y="4846320"/>
+            <a:ext cx="9966960" cy="1005840"/>
           </a:xfrm>
           <a:prstGeom prst="rect">
             <a:avLst/>
@@ -5798,12 +5005,15 @@
           <a:noFill/>
         </p:spPr>
         <p:txBody>
-          <a:bodyPr wrap="none" lIns="0" tIns="0" rIns="0" bIns="0">
+          <a:bodyPr wrap="square">
             <a:spAutoFit/>
           </a:bodyPr>
           <a:lstStyle/>
           <a:p>
-            <a:pPr algn="ctr">
+            <a:pPr>
+              <a:spcAft>
+                <a:spcPts val="400"/>
+              </a:spcAft>
               <a:defRPr sz="1000" b="1">
                 <a:solidFill>
                   <a:srgbClr val="2B59D9"/>
@@ -5812,68 +5022,43 @@
               </a:defRPr>
             </a:pPr>
             <a:r>
-              <a:t>TRIGGER SIGNALS</a:t>
-            </a:r>
-          </a:p>
-        </p:txBody>
-      </p:sp>
-      <p:sp>
-        <p:nvSpPr>
-          <p:cNvPr id="9" name="TextBox 8"/>
-          <p:cNvSpPr txBox="1"/>
-          <p:nvPr/>
-        </p:nvSpPr>
-        <p:spPr>
-          <a:xfrm>
-            <a:off x="731520" y="1188720"/>
-            <a:ext cx="10728655" cy="548640"/>
+              <a:t>03 / MANUAL PROCESS BOTTLENECKS</a:t>
+            </a:r>
+          </a:p>
+          <a:p>
+            <a:pPr>
+              <a:defRPr sz="1400" i="1">
+                <a:solidFill>
+                  <a:srgbClr val="16161A"/>
+                </a:solidFill>
+                <a:latin typeface="Helvetica"/>
+              </a:defRPr>
+            </a:pPr>
+            <a:r>
+              <a:t>“Our operations team is bogged down manually processing invoices, reconciling financial records, or running repetitive cross-platform workflows.”</a:t>
+            </a:r>
+          </a:p>
+        </p:txBody>
+      </p:sp>
+      <p:sp>
+        <p:nvSpPr>
+          <p:cNvPr id="10" name="Rectangle 9"/>
+          <p:cNvSpPr/>
+          <p:nvPr/>
+        </p:nvSpPr>
+        <p:spPr>
+          <a:xfrm>
+            <a:off x="822960" y="6309360"/>
+            <a:ext cx="10545775" cy="12700"/>
           </a:xfrm>
           <a:prstGeom prst="rect">
             <a:avLst/>
           </a:prstGeom>
-          <a:noFill/>
-        </p:spPr>
-        <p:txBody>
-          <a:bodyPr wrap="none">
-            <a:spAutoFit/>
-          </a:bodyPr>
-          <a:lstStyle/>
-          <a:p>
-            <a:pPr>
-              <a:defRPr sz="2400" b="1">
-                <a:solidFill>
-                  <a:srgbClr val="16161A"/>
-                </a:solidFill>
-                <a:latin typeface="Helvetica"/>
-              </a:defRPr>
-            </a:pPr>
-            <a:r>
-              <a:t>What Prospects Say Right Before They Need Us</a:t>
-            </a:r>
-          </a:p>
-        </p:txBody>
-      </p:sp>
-      <p:sp>
-        <p:nvSpPr>
-          <p:cNvPr id="10" name="Rounded Rectangle 9"/>
-          <p:cNvSpPr/>
-          <p:nvPr/>
-        </p:nvSpPr>
-        <p:spPr>
-          <a:xfrm>
-            <a:off x="731520" y="1874519"/>
-            <a:ext cx="10728655" cy="1234440"/>
-          </a:xfrm>
-          <a:prstGeom prst="roundRect">
-            <a:avLst/>
-          </a:prstGeom>
           <a:solidFill>
-            <a:srgbClr val="FFFFFF"/>
+            <a:srgbClr val="EBE7DF"/>
           </a:solidFill>
-          <a:ln w="12700">
-            <a:solidFill>
-              <a:srgbClr val="C9C3B2"/>
-            </a:solidFill>
+          <a:ln>
+            <a:noFill/>
           </a:ln>
         </p:spPr>
         <p:style>
@@ -5906,296 +5091,7 @@
         </p:nvSpPr>
         <p:spPr>
           <a:xfrm>
-            <a:off x="1005840" y="1984247"/>
-            <a:ext cx="10180015" cy="1005840"/>
-          </a:xfrm>
-          <a:prstGeom prst="rect">
-            <a:avLst/>
-          </a:prstGeom>
-          <a:noFill/>
-        </p:spPr>
-        <p:txBody>
-          <a:bodyPr wrap="square">
-            <a:spAutoFit/>
-          </a:bodyPr>
-          <a:lstStyle/>
-          <a:p>
-            <a:pPr>
-              <a:spcAft>
-                <a:spcPts val="400"/>
-              </a:spcAft>
-              <a:defRPr sz="1100" b="1">
-                <a:solidFill>
-                  <a:srgbClr val="2B59D9"/>
-                </a:solidFill>
-                <a:latin typeface="Courier New"/>
-              </a:defRPr>
-            </a:pPr>
-            <a:r>
-              <a:t>SIGNAL 01 // DISCONNECTED BACKENDS &amp; ERPS</a:t>
-            </a:r>
-          </a:p>
-          <a:p>
-            <a:pPr>
-              <a:defRPr sz="1300" i="1">
-                <a:solidFill>
-                  <a:srgbClr val="16161A"/>
-                </a:solidFill>
-                <a:latin typeface="Helvetica"/>
-              </a:defRPr>
-            </a:pPr>
-            <a:r>
-              <a:t>“Our backend finance systems (Workday/ERP/PostgreSQL) don’t connect cleanly to our front-end interfaces or modern software tools.”</a:t>
-            </a:r>
-          </a:p>
-        </p:txBody>
-      </p:sp>
-      <p:sp>
-        <p:nvSpPr>
-          <p:cNvPr id="12" name="Rounded Rectangle 11"/>
-          <p:cNvSpPr/>
-          <p:nvPr/>
-        </p:nvSpPr>
-        <p:spPr>
-          <a:xfrm>
-            <a:off x="731520" y="3291839"/>
-            <a:ext cx="10728655" cy="1234440"/>
-          </a:xfrm>
-          <a:prstGeom prst="roundRect">
-            <a:avLst/>
-          </a:prstGeom>
-          <a:solidFill>
-            <a:srgbClr val="FFFFFF"/>
-          </a:solidFill>
-          <a:ln w="12700">
-            <a:solidFill>
-              <a:srgbClr val="C9C3B2"/>
-            </a:solidFill>
-          </a:ln>
-        </p:spPr>
-        <p:style>
-          <a:lnRef idx="1">
-            <a:schemeClr val="accent1"/>
-          </a:lnRef>
-          <a:fillRef idx="3">
-            <a:schemeClr val="accent1"/>
-          </a:fillRef>
-          <a:effectRef idx="2">
-            <a:schemeClr val="accent1"/>
-          </a:effectRef>
-          <a:fontRef idx="minor">
-            <a:schemeClr val="lt1"/>
-          </a:fontRef>
-        </p:style>
-        <p:txBody>
-          <a:bodyPr rtlCol="0" anchor="ctr"/>
-          <a:lstStyle/>
-          <a:p>
-            <a:pPr algn="ctr"/>
-          </a:p>
-        </p:txBody>
-      </p:sp>
-      <p:sp>
-        <p:nvSpPr>
-          <p:cNvPr id="13" name="TextBox 12"/>
-          <p:cNvSpPr txBox="1"/>
-          <p:nvPr/>
-        </p:nvSpPr>
-        <p:spPr>
-          <a:xfrm>
-            <a:off x="1005840" y="3401567"/>
-            <a:ext cx="10180015" cy="1005840"/>
-          </a:xfrm>
-          <a:prstGeom prst="rect">
-            <a:avLst/>
-          </a:prstGeom>
-          <a:noFill/>
-        </p:spPr>
-        <p:txBody>
-          <a:bodyPr wrap="square">
-            <a:spAutoFit/>
-          </a:bodyPr>
-          <a:lstStyle/>
-          <a:p>
-            <a:pPr>
-              <a:spcAft>
-                <a:spcPts val="400"/>
-              </a:spcAft>
-              <a:defRPr sz="1100" b="1">
-                <a:solidFill>
-                  <a:srgbClr val="2B59D9"/>
-                </a:solidFill>
-                <a:latin typeface="Courier New"/>
-              </a:defRPr>
-            </a:pPr>
-            <a:r>
-              <a:t>SIGNAL 02 // AI AMBITIONS VS. ENTERPRISE SECURITY</a:t>
-            </a:r>
-          </a:p>
-          <a:p>
-            <a:pPr>
-              <a:defRPr sz="1300" i="1">
-                <a:solidFill>
-                  <a:srgbClr val="16161A"/>
-                </a:solidFill>
-                <a:latin typeface="Helvetica"/>
-              </a:defRPr>
-            </a:pPr>
-            <a:r>
-              <a:t>“We want to leverage AI agents and LLMs, but we need strict data security, enterprise controls, and human-in-the-loop (HITL) oversight.”</a:t>
-            </a:r>
-          </a:p>
-        </p:txBody>
-      </p:sp>
-      <p:sp>
-        <p:nvSpPr>
-          <p:cNvPr id="14" name="Rounded Rectangle 13"/>
-          <p:cNvSpPr/>
-          <p:nvPr/>
-        </p:nvSpPr>
-        <p:spPr>
-          <a:xfrm>
-            <a:off x="731520" y="4709160"/>
-            <a:ext cx="10728655" cy="1234440"/>
-          </a:xfrm>
-          <a:prstGeom prst="roundRect">
-            <a:avLst/>
-          </a:prstGeom>
-          <a:solidFill>
-            <a:srgbClr val="FFFFFF"/>
-          </a:solidFill>
-          <a:ln w="12700">
-            <a:solidFill>
-              <a:srgbClr val="C9C3B2"/>
-            </a:solidFill>
-          </a:ln>
-        </p:spPr>
-        <p:style>
-          <a:lnRef idx="1">
-            <a:schemeClr val="accent1"/>
-          </a:lnRef>
-          <a:fillRef idx="3">
-            <a:schemeClr val="accent1"/>
-          </a:fillRef>
-          <a:effectRef idx="2">
-            <a:schemeClr val="accent1"/>
-          </a:effectRef>
-          <a:fontRef idx="minor">
-            <a:schemeClr val="lt1"/>
-          </a:fontRef>
-        </p:style>
-        <p:txBody>
-          <a:bodyPr rtlCol="0" anchor="ctr"/>
-          <a:lstStyle/>
-          <a:p>
-            <a:pPr algn="ctr"/>
-          </a:p>
-        </p:txBody>
-      </p:sp>
-      <p:sp>
-        <p:nvSpPr>
-          <p:cNvPr id="15" name="TextBox 14"/>
-          <p:cNvSpPr txBox="1"/>
-          <p:nvPr/>
-        </p:nvSpPr>
-        <p:spPr>
-          <a:xfrm>
-            <a:off x="1005840" y="4818888"/>
-            <a:ext cx="10180015" cy="1005840"/>
-          </a:xfrm>
-          <a:prstGeom prst="rect">
-            <a:avLst/>
-          </a:prstGeom>
-          <a:noFill/>
-        </p:spPr>
-        <p:txBody>
-          <a:bodyPr wrap="square">
-            <a:spAutoFit/>
-          </a:bodyPr>
-          <a:lstStyle/>
-          <a:p>
-            <a:pPr>
-              <a:spcAft>
-                <a:spcPts val="400"/>
-              </a:spcAft>
-              <a:defRPr sz="1100" b="1">
-                <a:solidFill>
-                  <a:srgbClr val="2B59D9"/>
-                </a:solidFill>
-                <a:latin typeface="Courier New"/>
-              </a:defRPr>
-            </a:pPr>
-            <a:r>
-              <a:t>SIGNAL 03 // MANUAL PROCESS BOTTLENECKS</a:t>
-            </a:r>
-          </a:p>
-          <a:p>
-            <a:pPr>
-              <a:defRPr sz="1300" i="1">
-                <a:solidFill>
-                  <a:srgbClr val="16161A"/>
-                </a:solidFill>
-                <a:latin typeface="Helvetica"/>
-              </a:defRPr>
-            </a:pPr>
-            <a:r>
-              <a:t>“Our operations team is bogged down manually processing invoices, reconciling financial records, or running repetitive cross-platform workflows.”</a:t>
-            </a:r>
-          </a:p>
-        </p:txBody>
-      </p:sp>
-      <p:sp>
-        <p:nvSpPr>
-          <p:cNvPr id="16" name="Rectangle 15"/>
-          <p:cNvSpPr/>
-          <p:nvPr/>
-        </p:nvSpPr>
-        <p:spPr>
-          <a:xfrm>
-            <a:off x="731520" y="6400800"/>
-            <a:ext cx="10728655" cy="12700"/>
-          </a:xfrm>
-          <a:prstGeom prst="rect">
-            <a:avLst/>
-          </a:prstGeom>
-          <a:solidFill>
-            <a:srgbClr val="C9C3B2"/>
-          </a:solidFill>
-          <a:ln>
-            <a:noFill/>
-          </a:ln>
-        </p:spPr>
-        <p:style>
-          <a:lnRef idx="1">
-            <a:schemeClr val="accent1"/>
-          </a:lnRef>
-          <a:fillRef idx="3">
-            <a:schemeClr val="accent1"/>
-          </a:fillRef>
-          <a:effectRef idx="2">
-            <a:schemeClr val="accent1"/>
-          </a:effectRef>
-          <a:fontRef idx="minor">
-            <a:schemeClr val="lt1"/>
-          </a:fontRef>
-        </p:style>
-        <p:txBody>
-          <a:bodyPr rtlCol="0" anchor="ctr"/>
-          <a:lstStyle/>
-          <a:p>
-            <a:pPr algn="ctr"/>
-          </a:p>
-        </p:txBody>
-      </p:sp>
-      <p:sp>
-        <p:nvSpPr>
-          <p:cNvPr id="17" name="TextBox 16"/>
-          <p:cNvSpPr txBox="1"/>
-          <p:nvPr/>
-        </p:nvSpPr>
-        <p:spPr>
-          <a:xfrm>
-            <a:off x="731520" y="6446520"/>
+            <a:off x="822960" y="6382512"/>
             <a:ext cx="7315200" cy="320040"/>
           </a:xfrm>
           <a:prstGeom prst="rect">
@@ -6212,7 +5108,7 @@
             <a:pPr>
               <a:defRPr sz="1000">
                 <a:solidFill>
-                  <a:srgbClr val="5F5C52"/>
+                  <a:srgbClr val="7C786C"/>
                 </a:solidFill>
                 <a:latin typeface="Courier New"/>
               </a:defRPr>
@@ -6225,13 +5121,13 @@
       </p:sp>
       <p:sp>
         <p:nvSpPr>
-          <p:cNvPr id="18" name="TextBox 17"/>
+          <p:cNvPr id="12" name="TextBox 11"/>
           <p:cNvSpPr txBox="1"/>
           <p:nvPr/>
         </p:nvSpPr>
         <p:spPr>
           <a:xfrm>
-            <a:off x="9631375" y="6446520"/>
+            <a:off x="9539935" y="6382512"/>
             <a:ext cx="1828800" cy="320040"/>
           </a:xfrm>
           <a:prstGeom prst="rect">
@@ -6248,7 +5144,7 @@
             <a:pPr algn="r">
               <a:defRPr sz="1000">
                 <a:solidFill>
-                  <a:srgbClr val="5F5C52"/>
+                  <a:srgbClr val="7C786C"/>
                 </a:solidFill>
                 <a:latin typeface="Courier New"/>
               </a:defRPr>
@@ -6273,7 +5169,7 @@
     <p:bg>
       <p:bgPr>
         <a:solidFill>
-          <a:srgbClr val="F4F1EA"/>
+          <a:srgbClr val="FAF9F5"/>
         </a:solidFill>
         <a:effectLst/>
       </p:bgPr>
@@ -6287,24 +5183,96 @@
       <p:grpSpPr/>
       <p:sp>
         <p:nvSpPr>
-          <p:cNvPr id="2" name="Rectangle 1"/>
+          <p:cNvPr id="2" name="TextBox 1"/>
+          <p:cNvSpPr txBox="1"/>
+          <p:nvPr/>
+        </p:nvSpPr>
+        <p:spPr>
+          <a:xfrm>
+            <a:off x="822960" y="548640"/>
+            <a:ext cx="10515600" cy="320040"/>
+          </a:xfrm>
+          <a:prstGeom prst="rect">
+            <a:avLst/>
+          </a:prstGeom>
+          <a:noFill/>
+        </p:spPr>
+        <p:txBody>
+          <a:bodyPr wrap="none" lIns="0" tIns="0" rIns="0" bIns="0">
+            <a:spAutoFit/>
+          </a:bodyPr>
+          <a:lstStyle/>
+          <a:p>
+            <a:pPr>
+              <a:defRPr sz="1100" b="1">
+                <a:solidFill>
+                  <a:srgbClr val="D99B26"/>
+                </a:solidFill>
+                <a:latin typeface="Courier New"/>
+              </a:defRPr>
+            </a:pPr>
+            <a:r>
+              <a:t>PROVEN ARCHITECTURE</a:t>
+            </a:r>
+          </a:p>
+        </p:txBody>
+      </p:sp>
+      <p:sp>
+        <p:nvSpPr>
+          <p:cNvPr id="3" name="TextBox 2"/>
+          <p:cNvSpPr txBox="1"/>
+          <p:nvPr/>
+        </p:nvSpPr>
+        <p:spPr>
+          <a:xfrm>
+            <a:off x="822960" y="868680"/>
+            <a:ext cx="10515600" cy="685800"/>
+          </a:xfrm>
+          <a:prstGeom prst="rect">
+            <a:avLst/>
+          </a:prstGeom>
+          <a:noFill/>
+        </p:spPr>
+        <p:txBody>
+          <a:bodyPr wrap="square" lIns="0" tIns="0" rIns="0" bIns="0">
+            <a:spAutoFit/>
+          </a:bodyPr>
+          <a:lstStyle/>
+          <a:p>
+            <a:pPr>
+              <a:defRPr sz="2600" b="1">
+                <a:solidFill>
+                  <a:srgbClr val="16161A"/>
+                </a:solidFill>
+                <a:latin typeface="Helvetica"/>
+              </a:defRPr>
+            </a:pPr>
+            <a:r>
+              <a:t>Tested Against Real Operational Systems</a:t>
+            </a:r>
+          </a:p>
+        </p:txBody>
+      </p:sp>
+      <p:sp>
+        <p:nvSpPr>
+          <p:cNvPr id="4" name="Rounded Rectangle 3"/>
           <p:cNvSpPr/>
           <p:nvPr/>
         </p:nvSpPr>
         <p:spPr>
           <a:xfrm>
-            <a:off x="0" y="0"/>
-            <a:ext cx="12191695" cy="594360"/>
-          </a:xfrm>
-          <a:prstGeom prst="rect">
+            <a:off x="822960" y="1874519"/>
+            <a:ext cx="3328416" cy="3200400"/>
+          </a:xfrm>
+          <a:prstGeom prst="roundRect">
             <a:avLst/>
           </a:prstGeom>
           <a:solidFill>
-            <a:srgbClr val="121216"/>
+            <a:srgbClr val="FFFFFF"/>
           </a:solidFill>
           <a:ln w="12700">
             <a:solidFill>
-              <a:srgbClr val="26262C"/>
+              <a:srgbClr val="EBE7DF"/>
             </a:solidFill>
           </a:ln>
         </p:spPr>
@@ -6332,23 +5300,93 @@
       </p:sp>
       <p:sp>
         <p:nvSpPr>
-          <p:cNvPr id="3" name="Rounded Rectangle 2"/>
+          <p:cNvPr id="5" name="TextBox 4"/>
+          <p:cNvSpPr txBox="1"/>
+          <p:nvPr/>
+        </p:nvSpPr>
+        <p:spPr>
+          <a:xfrm>
+            <a:off x="1143000" y="2103120"/>
+            <a:ext cx="2688336" cy="2743200"/>
+          </a:xfrm>
+          <a:prstGeom prst="rect">
+            <a:avLst/>
+          </a:prstGeom>
+          <a:noFill/>
+        </p:spPr>
+        <p:txBody>
+          <a:bodyPr wrap="square">
+            <a:spAutoFit/>
+          </a:bodyPr>
+          <a:lstStyle/>
+          <a:p>
+            <a:pPr>
+              <a:spcAft>
+                <a:spcPts val="1000"/>
+              </a:spcAft>
+              <a:defRPr sz="1000" b="1">
+                <a:solidFill>
+                  <a:srgbClr val="D99B26"/>
+                </a:solidFill>
+                <a:latin typeface="Courier New"/>
+              </a:defRPr>
+            </a:pPr>
+            <a:r>
+              <a:t>ENTERPRISE INTEGRATION</a:t>
+            </a:r>
+          </a:p>
+          <a:p>
+            <a:pPr>
+              <a:spcAft>
+                <a:spcPts val="1200"/>
+              </a:spcAft>
+              <a:defRPr sz="1900" b="1">
+                <a:solidFill>
+                  <a:srgbClr val="16161A"/>
+                </a:solidFill>
+                <a:latin typeface="Helvetica"/>
+              </a:defRPr>
+            </a:pPr>
+            <a:r>
+              <a:t>Workday Finance MCP</a:t>
+            </a:r>
+          </a:p>
+          <a:p>
+            <a:pPr>
+              <a:defRPr sz="1300">
+                <a:solidFill>
+                  <a:srgbClr val="59564D"/>
+                </a:solidFill>
+                <a:latin typeface="Helvetica"/>
+              </a:defRPr>
+            </a:pPr>
+            <a:r>
+              <a:t>Engineered Model Context Protocol (MCP) servers connecting Workday Finance &amp; Adaptive Planning directly to custom AI agent workflows.</a:t>
+            </a:r>
+          </a:p>
+        </p:txBody>
+      </p:sp>
+      <p:sp>
+        <p:nvSpPr>
+          <p:cNvPr id="6" name="Rounded Rectangle 5"/>
           <p:cNvSpPr/>
           <p:nvPr/>
         </p:nvSpPr>
         <p:spPr>
           <a:xfrm>
-            <a:off x="731520" y="137160"/>
-            <a:ext cx="320040" cy="320040"/>
+            <a:off x="4425696" y="1874519"/>
+            <a:ext cx="3328416" cy="3200400"/>
           </a:xfrm>
           <a:prstGeom prst="roundRect">
             <a:avLst/>
           </a:prstGeom>
           <a:solidFill>
-            <a:srgbClr val="2B59D9"/>
+            <a:srgbClr val="FFFFFF"/>
           </a:solidFill>
-          <a:ln>
-            <a:noFill/>
+          <a:ln w="12700">
+            <a:solidFill>
+              <a:srgbClr val="EBE7DF"/>
+            </a:solidFill>
           </a:ln>
         </p:spPr>
         <p:style>
@@ -6375,14 +5413,14 @@
       </p:sp>
       <p:sp>
         <p:nvSpPr>
-          <p:cNvPr id="4" name="TextBox 3"/>
+          <p:cNvPr id="7" name="TextBox 6"/>
           <p:cNvSpPr txBox="1"/>
           <p:nvPr/>
         </p:nvSpPr>
         <p:spPr>
           <a:xfrm>
-            <a:off x="731520" y="128016"/>
-            <a:ext cx="320040" cy="320040"/>
+            <a:off x="4745736" y="2103120"/>
+            <a:ext cx="2688336" cy="2743200"/>
           </a:xfrm>
           <a:prstGeom prst="rect">
             <a:avLst/>
@@ -6390,117 +5428,77 @@
           <a:noFill/>
         </p:spPr>
         <p:txBody>
-          <a:bodyPr wrap="none" lIns="0" tIns="0" rIns="0" bIns="0">
+          <a:bodyPr wrap="square">
             <a:spAutoFit/>
           </a:bodyPr>
           <a:lstStyle/>
           <a:p>
             <a:pPr>
-              <a:defRPr sz="1400" b="1">
-                <a:solidFill>
-                  <a:srgbClr val="FFFFFF"/>
+              <a:spcAft>
+                <a:spcPts val="1000"/>
+              </a:spcAft>
+              <a:defRPr sz="1000" b="1">
+                <a:solidFill>
+                  <a:srgbClr val="D99B26"/>
                 </a:solidFill>
                 <a:latin typeface="Courier New"/>
               </a:defRPr>
             </a:pPr>
             <a:r>
-              <a:t>›_</a:t>
-            </a:r>
-          </a:p>
-        </p:txBody>
-      </p:sp>
-      <p:sp>
-        <p:nvSpPr>
-          <p:cNvPr id="5" name="TextBox 4"/>
-          <p:cNvSpPr txBox="1"/>
-          <p:nvPr/>
-        </p:nvSpPr>
-        <p:spPr>
-          <a:xfrm>
-            <a:off x="1143000" y="146304"/>
-            <a:ext cx="4114800" cy="320040"/>
-          </a:xfrm>
-          <a:prstGeom prst="rect">
-            <a:avLst/>
-          </a:prstGeom>
-          <a:noFill/>
-        </p:spPr>
-        <p:txBody>
-          <a:bodyPr wrap="none" lIns="0" tIns="0" rIns="0" bIns="0">
-            <a:spAutoFit/>
-          </a:bodyPr>
-          <a:lstStyle/>
-          <a:p>
-            <a:pPr>
-              <a:defRPr sz="1300" b="1">
-                <a:solidFill>
-                  <a:srgbClr val="FFFFFF"/>
+              <a:t>VOICE AI HARDWARE &amp; SOFTWARE</a:t>
+            </a:r>
+          </a:p>
+          <a:p>
+            <a:pPr>
+              <a:spcAft>
+                <a:spcPts val="1200"/>
+              </a:spcAft>
+              <a:defRPr sz="1900" b="1">
+                <a:solidFill>
+                  <a:srgbClr val="16161A"/>
                 </a:solidFill>
                 <a:latin typeface="Helvetica"/>
               </a:defRPr>
             </a:pPr>
             <a:r>
-              <a:t>TECHNOLOGY CONSULTANTS</a:t>
-            </a:r>
-          </a:p>
-        </p:txBody>
-      </p:sp>
-      <p:sp>
-        <p:nvSpPr>
-          <p:cNvPr id="6" name="TextBox 5"/>
-          <p:cNvSpPr txBox="1"/>
-          <p:nvPr/>
-        </p:nvSpPr>
-        <p:spPr>
-          <a:xfrm>
-            <a:off x="6858000" y="164592"/>
-            <a:ext cx="4572000" cy="320040"/>
-          </a:xfrm>
-          <a:prstGeom prst="rect">
-            <a:avLst/>
-          </a:prstGeom>
-          <a:noFill/>
-        </p:spPr>
-        <p:txBody>
-          <a:bodyPr wrap="none" lIns="0" tIns="0" rIns="0" bIns="0">
-            <a:spAutoFit/>
-          </a:bodyPr>
-          <a:lstStyle/>
-          <a:p>
-            <a:pPr algn="r">
-              <a:defRPr sz="1100">
-                <a:solidFill>
-                  <a:srgbClr val="D99B26"/>
-                </a:solidFill>
-                <a:latin typeface="Courier New"/>
-              </a:defRPr>
-            </a:pPr>
-            <a:r>
-              <a:t>04 / TRACK RECORD</a:t>
-            </a:r>
-          </a:p>
-        </p:txBody>
-      </p:sp>
-      <p:sp>
-        <p:nvSpPr>
-          <p:cNvPr id="7" name="Rounded Rectangle 6"/>
+              <a:t>Encounter AI</a:t>
+            </a:r>
+          </a:p>
+          <a:p>
+            <a:pPr>
+              <a:defRPr sz="1300">
+                <a:solidFill>
+                  <a:srgbClr val="59564D"/>
+                </a:solidFill>
+                <a:latin typeface="Helvetica"/>
+              </a:defRPr>
+            </a:pPr>
+            <a:r>
+              <a:t>Designed hardware &amp; software voice AI ordering systems for drive-thrus &amp; kiosks. Backed by Morgan Stanley Inclusive Ventures Lab.</a:t>
+            </a:r>
+          </a:p>
+        </p:txBody>
+      </p:sp>
+      <p:sp>
+        <p:nvSpPr>
+          <p:cNvPr id="8" name="Rounded Rectangle 7"/>
           <p:cNvSpPr/>
           <p:nvPr/>
         </p:nvSpPr>
         <p:spPr>
           <a:xfrm>
-            <a:off x="731520" y="822960"/>
-            <a:ext cx="2368296" cy="292608"/>
+            <a:off x="8028431" y="1874519"/>
+            <a:ext cx="3328416" cy="3200400"/>
           </a:xfrm>
           <a:prstGeom prst="roundRect">
             <a:avLst/>
           </a:prstGeom>
           <a:solidFill>
-            <a:srgbClr val="EFE9D8"/>
+            <a:srgbClr val="FFFFFF"/>
           </a:solidFill>
           <a:ln w="12700">
             <a:solidFill>
-              <a:srgbClr val="D99B26"/>
+              <a:srgbClr val="EBE7DF"/>
             </a:solidFill>
           </a:ln>
         </p:spPr>
@@ -6528,14 +5526,14 @@
       </p:sp>
       <p:sp>
         <p:nvSpPr>
-          <p:cNvPr id="8" name="TextBox 7"/>
+          <p:cNvPr id="9" name="TextBox 8"/>
           <p:cNvSpPr txBox="1"/>
           <p:nvPr/>
         </p:nvSpPr>
         <p:spPr>
           <a:xfrm>
-            <a:off x="731520" y="859536"/>
-            <a:ext cx="2368296" cy="256032"/>
+            <a:off x="8348471" y="2103120"/>
+            <a:ext cx="2688336" cy="2743200"/>
           </a:xfrm>
           <a:prstGeom prst="rect">
             <a:avLst/>
@@ -6543,12 +5541,15 @@
           <a:noFill/>
         </p:spPr>
         <p:txBody>
-          <a:bodyPr wrap="none" lIns="0" tIns="0" rIns="0" bIns="0">
+          <a:bodyPr wrap="square">
             <a:spAutoFit/>
           </a:bodyPr>
           <a:lstStyle/>
           <a:p>
-            <a:pPr algn="ctr">
+            <a:pPr>
+              <a:spcAft>
+                <a:spcPts val="1000"/>
+              </a:spcAft>
               <a:defRPr sz="1000" b="1">
                 <a:solidFill>
                   <a:srgbClr val="D99B26"/>
@@ -6557,35 +5558,15 @@
               </a:defRPr>
             </a:pPr>
             <a:r>
-              <a:t>PROVEN ARCHITECTURE</a:t>
-            </a:r>
-          </a:p>
-        </p:txBody>
-      </p:sp>
-      <p:sp>
-        <p:nvSpPr>
-          <p:cNvPr id="9" name="TextBox 8"/>
-          <p:cNvSpPr txBox="1"/>
-          <p:nvPr/>
-        </p:nvSpPr>
-        <p:spPr>
-          <a:xfrm>
-            <a:off x="731520" y="1188720"/>
-            <a:ext cx="10728655" cy="548640"/>
-          </a:xfrm>
-          <a:prstGeom prst="rect">
-            <a:avLst/>
-          </a:prstGeom>
-          <a:noFill/>
-        </p:spPr>
-        <p:txBody>
-          <a:bodyPr wrap="none">
-            <a:spAutoFit/>
-          </a:bodyPr>
-          <a:lstStyle/>
-          <a:p>
-            <a:pPr>
-              <a:defRPr sz="2400" b="1">
+              <a:t>Appt Helper · Open Cita · Border Bills</a:t>
+            </a:r>
+          </a:p>
+          <a:p>
+            <a:pPr>
+              <a:spcAft>
+                <a:spcPts val="1200"/>
+              </a:spcAft>
+              <a:defRPr sz="1900" b="1">
                 <a:solidFill>
                   <a:srgbClr val="16161A"/>
                 </a:solidFill>
@@ -6593,7 +5574,20 @@
               </a:defRPr>
             </a:pPr>
             <a:r>
-              <a:t>Tested Against Real Operational Systems</a:t>
+              <a:t>In-House Products</a:t>
+            </a:r>
+          </a:p>
+          <a:p>
+            <a:pPr>
+              <a:defRPr sz="1300">
+                <a:solidFill>
+                  <a:srgbClr val="59564D"/>
+                </a:solidFill>
+                <a:latin typeface="Helvetica"/>
+              </a:defRPr>
+            </a:pPr>
+            <a:r>
+              <a:t>Built and launched our own proprietary software applications to prove technical architecture before selling to clients.</a:t>
             </a:r>
           </a:p>
         </p:txBody>
@@ -6606,8 +5600,8 @@
         </p:nvSpPr>
         <p:spPr>
           <a:xfrm>
-            <a:off x="731520" y="1920240"/>
-            <a:ext cx="3328416" cy="3931920"/>
+            <a:off x="822960" y="5212080"/>
+            <a:ext cx="2468880" cy="960120"/>
           </a:xfrm>
           <a:prstGeom prst="roundRect">
             <a:avLst/>
@@ -6615,9 +5609,9 @@
           <a:solidFill>
             <a:srgbClr val="FFFFFF"/>
           </a:solidFill>
-          <a:ln>
+          <a:ln w="12700">
             <a:solidFill>
-              <a:srgbClr val="C9C3B2"/>
+              <a:srgbClr val="EBE7DF"/>
             </a:solidFill>
           </a:ln>
         </p:spPr>
@@ -6651,8 +5645,8 @@
         </p:nvSpPr>
         <p:spPr>
           <a:xfrm>
-            <a:off x="1005840" y="2194560"/>
-            <a:ext cx="2779776" cy="3383280"/>
+            <a:off x="960120" y="5257800"/>
+            <a:ext cx="2194560" cy="868680"/>
           </a:xfrm>
           <a:prstGeom prst="rect">
             <a:avLst/>
@@ -6666,26 +5660,7 @@
           <a:lstStyle/>
           <a:p>
             <a:pPr>
-              <a:spcAft>
-                <a:spcPts val="1000"/>
-              </a:spcAft>
-              <a:defRPr sz="1000" b="1">
-                <a:solidFill>
-                  <a:srgbClr val="D99B26"/>
-                </a:solidFill>
-                <a:latin typeface="Courier New"/>
-              </a:defRPr>
-            </a:pPr>
-            <a:r>
-              <a:t>[ ENTERPRISE INTEGRATION ]</a:t>
-            </a:r>
-          </a:p>
-          <a:p>
-            <a:pPr>
-              <a:spcAft>
-                <a:spcPts val="1200"/>
-              </a:spcAft>
-              <a:defRPr sz="1800" b="1">
+              <a:defRPr sz="1300" b="1" i="1">
                 <a:solidFill>
                   <a:srgbClr val="16161A"/>
                 </a:solidFill>
@@ -6693,20 +5668,23 @@
               </a:defRPr>
             </a:pPr>
             <a:r>
-              <a:t>Workday Finance MCP</a:t>
-            </a:r>
-          </a:p>
-          <a:p>
-            <a:pPr>
-              <a:defRPr sz="1300">
-                <a:solidFill>
-                  <a:srgbClr val="454337"/>
+              <a:t>In production.</a:t>
+            </a:r>
+          </a:p>
+          <a:p>
+            <a:pPr>
+              <a:spcBef>
+                <a:spcPts val="200"/>
+              </a:spcBef>
+              <a:defRPr sz="1000">
+                <a:solidFill>
+                  <a:srgbClr val="59564D"/>
                 </a:solidFill>
                 <a:latin typeface="Helvetica"/>
               </a:defRPr>
             </a:pPr>
             <a:r>
-              <a:t>Engineered Model Context Protocol (MCP) servers connecting Workday Finance &amp; Adaptive Planning directly to custom AI agent workflows.</a:t>
+              <a:t>Real users today on self-developed products.</a:t>
             </a:r>
           </a:p>
         </p:txBody>
@@ -6719,8 +5697,8 @@
         </p:nvSpPr>
         <p:spPr>
           <a:xfrm>
-            <a:off x="4297680" y="1920240"/>
-            <a:ext cx="3328416" cy="3931920"/>
+            <a:off x="3520440" y="5212080"/>
+            <a:ext cx="2468880" cy="960120"/>
           </a:xfrm>
           <a:prstGeom prst="roundRect">
             <a:avLst/>
@@ -6728,9 +5706,9 @@
           <a:solidFill>
             <a:srgbClr val="FFFFFF"/>
           </a:solidFill>
-          <a:ln>
+          <a:ln w="12700">
             <a:solidFill>
-              <a:srgbClr val="C9C3B2"/>
+              <a:srgbClr val="EBE7DF"/>
             </a:solidFill>
           </a:ln>
         </p:spPr>
@@ -6764,8 +5742,8 @@
         </p:nvSpPr>
         <p:spPr>
           <a:xfrm>
-            <a:off x="4572000" y="2194560"/>
-            <a:ext cx="2779776" cy="3383280"/>
+            <a:off x="3657600" y="5257800"/>
+            <a:ext cx="2194560" cy="868680"/>
           </a:xfrm>
           <a:prstGeom prst="rect">
             <a:avLst/>
@@ -6779,26 +5757,7 @@
           <a:lstStyle/>
           <a:p>
             <a:pPr>
-              <a:spcAft>
-                <a:spcPts val="1000"/>
-              </a:spcAft>
-              <a:defRPr sz="1000" b="1">
-                <a:solidFill>
-                  <a:srgbClr val="D99B26"/>
-                </a:solidFill>
-                <a:latin typeface="Courier New"/>
-              </a:defRPr>
-            </a:pPr>
-            <a:r>
-              <a:t>[ VOICE AI HARDWARE &amp; SOFTWARE ]</a:t>
-            </a:r>
-          </a:p>
-          <a:p>
-            <a:pPr>
-              <a:spcAft>
-                <a:spcPts val="1200"/>
-              </a:spcAft>
-              <a:defRPr sz="1800" b="1">
+              <a:defRPr sz="1300" b="1" i="1">
                 <a:solidFill>
                   <a:srgbClr val="16161A"/>
                 </a:solidFill>
@@ -6806,20 +5765,23 @@
               </a:defRPr>
             </a:pPr>
             <a:r>
-              <a:t>Encounter AI</a:t>
-            </a:r>
-          </a:p>
-          <a:p>
-            <a:pPr>
-              <a:defRPr sz="1300">
-                <a:solidFill>
-                  <a:srgbClr val="454337"/>
+              <a:t>Senior team.</a:t>
+            </a:r>
+          </a:p>
+          <a:p>
+            <a:pPr>
+              <a:spcBef>
+                <a:spcPts val="200"/>
+              </a:spcBef>
+              <a:defRPr sz="1000">
+                <a:solidFill>
+                  <a:srgbClr val="59564D"/>
                 </a:solidFill>
                 <a:latin typeface="Helvetica"/>
               </a:defRPr>
             </a:pPr>
             <a:r>
-              <a:t>Designed hardware &amp; software voice AI ordering systems for drive-thrus &amp; kiosks. Backed by Morgan Stanley Inclusive Ventures Lab.</a:t>
+              <a:t>The people who pitch your project ship it.</a:t>
             </a:r>
           </a:p>
         </p:txBody>
@@ -6832,8 +5794,8 @@
         </p:nvSpPr>
         <p:spPr>
           <a:xfrm>
-            <a:off x="7863840" y="1920240"/>
-            <a:ext cx="3328416" cy="3931920"/>
+            <a:off x="6217920" y="5212080"/>
+            <a:ext cx="2468880" cy="960120"/>
           </a:xfrm>
           <a:prstGeom prst="roundRect">
             <a:avLst/>
@@ -6841,9 +5803,9 @@
           <a:solidFill>
             <a:srgbClr val="FFFFFF"/>
           </a:solidFill>
-          <a:ln>
+          <a:ln w="12700">
             <a:solidFill>
-              <a:srgbClr val="C9C3B2"/>
+              <a:srgbClr val="EBE7DF"/>
             </a:solidFill>
           </a:ln>
         </p:spPr>
@@ -6877,8 +5839,8 @@
         </p:nvSpPr>
         <p:spPr>
           <a:xfrm>
-            <a:off x="8138160" y="2194560"/>
-            <a:ext cx="2779776" cy="3383280"/>
+            <a:off x="6355080" y="5257800"/>
+            <a:ext cx="2194560" cy="868680"/>
           </a:xfrm>
           <a:prstGeom prst="rect">
             <a:avLst/>
@@ -6892,26 +5854,7 @@
           <a:lstStyle/>
           <a:p>
             <a:pPr>
-              <a:spcAft>
-                <a:spcPts val="1000"/>
-              </a:spcAft>
-              <a:defRPr sz="1000" b="1">
-                <a:solidFill>
-                  <a:srgbClr val="D99B26"/>
-                </a:solidFill>
-                <a:latin typeface="Courier New"/>
-              </a:defRPr>
-            </a:pPr>
-            <a:r>
-              <a:t>[ Appt Helper · Open Cita · Border Bills ]</a:t>
-            </a:r>
-          </a:p>
-          <a:p>
-            <a:pPr>
-              <a:spcAft>
-                <a:spcPts val="1200"/>
-              </a:spcAft>
-              <a:defRPr sz="1800" b="1">
+              <a:defRPr sz="1300" b="1" i="1">
                 <a:solidFill>
                   <a:srgbClr val="16161A"/>
                 </a:solidFill>
@@ -6919,43 +5862,48 @@
               </a:defRPr>
             </a:pPr>
             <a:r>
-              <a:t>In-House Products</a:t>
-            </a:r>
-          </a:p>
-          <a:p>
-            <a:pPr>
-              <a:defRPr sz="1300">
-                <a:solidFill>
-                  <a:srgbClr val="454337"/>
+              <a:t>Code first.</a:t>
+            </a:r>
+          </a:p>
+          <a:p>
+            <a:pPr>
+              <a:spcBef>
+                <a:spcPts val="200"/>
+              </a:spcBef>
+              <a:defRPr sz="1000">
+                <a:solidFill>
+                  <a:srgbClr val="59564D"/>
                 </a:solidFill>
                 <a:latin typeface="Helvetica"/>
               </a:defRPr>
             </a:pPr>
             <a:r>
-              <a:t>Built and launched our own proprietary software applications to prove technical architecture before selling to clients.</a:t>
-            </a:r>
-          </a:p>
-        </p:txBody>
-      </p:sp>
-      <p:sp>
-        <p:nvSpPr>
-          <p:cNvPr id="16" name="Rectangle 15"/>
+              <a:t>No decks before working software.</a:t>
+            </a:r>
+          </a:p>
+        </p:txBody>
+      </p:sp>
+      <p:sp>
+        <p:nvSpPr>
+          <p:cNvPr id="16" name="Rounded Rectangle 15"/>
           <p:cNvSpPr/>
           <p:nvPr/>
         </p:nvSpPr>
         <p:spPr>
           <a:xfrm>
-            <a:off x="731520" y="6400800"/>
-            <a:ext cx="10728655" cy="12700"/>
-          </a:xfrm>
-          <a:prstGeom prst="rect">
+            <a:off x="8915400" y="5212080"/>
+            <a:ext cx="2468880" cy="960120"/>
+          </a:xfrm>
+          <a:prstGeom prst="roundRect">
             <a:avLst/>
           </a:prstGeom>
           <a:solidFill>
-            <a:srgbClr val="C9C3B2"/>
+            <a:srgbClr val="FFFFFF"/>
           </a:solidFill>
-          <a:ln>
-            <a:noFill/>
+          <a:ln w="12700">
+            <a:solidFill>
+              <a:srgbClr val="EBE7DF"/>
+            </a:solidFill>
           </a:ln>
         </p:spPr>
         <p:style>
@@ -6988,7 +5936,102 @@
         </p:nvSpPr>
         <p:spPr>
           <a:xfrm>
-            <a:off x="731520" y="6446520"/>
+            <a:off x="9052560" y="5257800"/>
+            <a:ext cx="2194560" cy="868680"/>
+          </a:xfrm>
+          <a:prstGeom prst="rect">
+            <a:avLst/>
+          </a:prstGeom>
+          <a:noFill/>
+        </p:spPr>
+        <p:txBody>
+          <a:bodyPr wrap="square">
+            <a:spAutoFit/>
+          </a:bodyPr>
+          <a:lstStyle/>
+          <a:p>
+            <a:pPr>
+              <a:defRPr sz="1300" b="1" i="1">
+                <a:solidFill>
+                  <a:srgbClr val="16161A"/>
+                </a:solidFill>
+                <a:latin typeface="Helvetica"/>
+              </a:defRPr>
+            </a:pPr>
+            <a:r>
+              <a:t>One team.</a:t>
+            </a:r>
+          </a:p>
+          <a:p>
+            <a:pPr>
+              <a:spcBef>
+                <a:spcPts val="200"/>
+              </a:spcBef>
+              <a:defRPr sz="1000">
+                <a:solidFill>
+                  <a:srgbClr val="59564D"/>
+                </a:solidFill>
+                <a:latin typeface="Helvetica"/>
+              </a:defRPr>
+            </a:pPr>
+            <a:r>
+              <a:t>Interfaces &amp; automations: same stack.</a:t>
+            </a:r>
+          </a:p>
+        </p:txBody>
+      </p:sp>
+      <p:sp>
+        <p:nvSpPr>
+          <p:cNvPr id="18" name="Rectangle 17"/>
+          <p:cNvSpPr/>
+          <p:nvPr/>
+        </p:nvSpPr>
+        <p:spPr>
+          <a:xfrm>
+            <a:off x="822960" y="6309360"/>
+            <a:ext cx="10545775" cy="12700"/>
+          </a:xfrm>
+          <a:prstGeom prst="rect">
+            <a:avLst/>
+          </a:prstGeom>
+          <a:solidFill>
+            <a:srgbClr val="EBE7DF"/>
+          </a:solidFill>
+          <a:ln>
+            <a:noFill/>
+          </a:ln>
+        </p:spPr>
+        <p:style>
+          <a:lnRef idx="1">
+            <a:schemeClr val="accent1"/>
+          </a:lnRef>
+          <a:fillRef idx="3">
+            <a:schemeClr val="accent1"/>
+          </a:fillRef>
+          <a:effectRef idx="2">
+            <a:schemeClr val="accent1"/>
+          </a:effectRef>
+          <a:fontRef idx="minor">
+            <a:schemeClr val="lt1"/>
+          </a:fontRef>
+        </p:style>
+        <p:txBody>
+          <a:bodyPr rtlCol="0" anchor="ctr"/>
+          <a:lstStyle/>
+          <a:p>
+            <a:pPr algn="ctr"/>
+          </a:p>
+        </p:txBody>
+      </p:sp>
+      <p:sp>
+        <p:nvSpPr>
+          <p:cNvPr id="19" name="TextBox 18"/>
+          <p:cNvSpPr txBox="1"/>
+          <p:nvPr/>
+        </p:nvSpPr>
+        <p:spPr>
+          <a:xfrm>
+            <a:off x="822960" y="6382512"/>
             <a:ext cx="7315200" cy="320040"/>
           </a:xfrm>
           <a:prstGeom prst="rect">
@@ -7005,7 +6048,7 @@
             <a:pPr>
               <a:defRPr sz="1000">
                 <a:solidFill>
-                  <a:srgbClr val="5F5C52"/>
+                  <a:srgbClr val="7C786C"/>
                 </a:solidFill>
                 <a:latin typeface="Courier New"/>
               </a:defRPr>
@@ -7018,13 +6061,13 @@
       </p:sp>
       <p:sp>
         <p:nvSpPr>
-          <p:cNvPr id="18" name="TextBox 17"/>
+          <p:cNvPr id="20" name="TextBox 19"/>
           <p:cNvSpPr txBox="1"/>
           <p:nvPr/>
         </p:nvSpPr>
         <p:spPr>
           <a:xfrm>
-            <a:off x="9631375" y="6446520"/>
+            <a:off x="9539935" y="6382512"/>
             <a:ext cx="1828800" cy="320040"/>
           </a:xfrm>
           <a:prstGeom prst="rect">
@@ -7041,7 +6084,7 @@
             <a:pPr algn="r">
               <a:defRPr sz="1000">
                 <a:solidFill>
-                  <a:srgbClr val="5F5C52"/>
+                  <a:srgbClr val="7C786C"/>
                 </a:solidFill>
                 <a:latin typeface="Courier New"/>
               </a:defRPr>
@@ -7066,7 +6109,7 @@
     <p:bg>
       <p:bgPr>
         <a:solidFill>
-          <a:srgbClr val="F4F1EA"/>
+          <a:srgbClr val="FAF9F5"/>
         </a:solidFill>
         <a:effectLst/>
       </p:bgPr>
@@ -7080,102 +6123,14 @@
       <p:grpSpPr/>
       <p:sp>
         <p:nvSpPr>
-          <p:cNvPr id="2" name="Rectangle 1"/>
-          <p:cNvSpPr/>
-          <p:nvPr/>
-        </p:nvSpPr>
-        <p:spPr>
-          <a:xfrm>
-            <a:off x="0" y="0"/>
-            <a:ext cx="12191695" cy="594360"/>
-          </a:xfrm>
-          <a:prstGeom prst="rect">
-            <a:avLst/>
-          </a:prstGeom>
-          <a:solidFill>
-            <a:srgbClr val="121216"/>
-          </a:solidFill>
-          <a:ln w="12700">
-            <a:solidFill>
-              <a:srgbClr val="26262C"/>
-            </a:solidFill>
-          </a:ln>
-        </p:spPr>
-        <p:style>
-          <a:lnRef idx="1">
-            <a:schemeClr val="accent1"/>
-          </a:lnRef>
-          <a:fillRef idx="3">
-            <a:schemeClr val="accent1"/>
-          </a:fillRef>
-          <a:effectRef idx="2">
-            <a:schemeClr val="accent1"/>
-          </a:effectRef>
-          <a:fontRef idx="minor">
-            <a:schemeClr val="lt1"/>
-          </a:fontRef>
-        </p:style>
-        <p:txBody>
-          <a:bodyPr rtlCol="0" anchor="ctr"/>
-          <a:lstStyle/>
-          <a:p>
-            <a:pPr algn="ctr"/>
-          </a:p>
-        </p:txBody>
-      </p:sp>
-      <p:sp>
-        <p:nvSpPr>
-          <p:cNvPr id="3" name="Rounded Rectangle 2"/>
-          <p:cNvSpPr/>
-          <p:nvPr/>
-        </p:nvSpPr>
-        <p:spPr>
-          <a:xfrm>
-            <a:off x="731520" y="137160"/>
-            <a:ext cx="320040" cy="320040"/>
-          </a:xfrm>
-          <a:prstGeom prst="roundRect">
-            <a:avLst/>
-          </a:prstGeom>
-          <a:solidFill>
-            <a:srgbClr val="2B59D9"/>
-          </a:solidFill>
-          <a:ln>
-            <a:noFill/>
-          </a:ln>
-        </p:spPr>
-        <p:style>
-          <a:lnRef idx="1">
-            <a:schemeClr val="accent1"/>
-          </a:lnRef>
-          <a:fillRef idx="3">
-            <a:schemeClr val="accent1"/>
-          </a:fillRef>
-          <a:effectRef idx="2">
-            <a:schemeClr val="accent1"/>
-          </a:effectRef>
-          <a:fontRef idx="minor">
-            <a:schemeClr val="lt1"/>
-          </a:fontRef>
-        </p:style>
-        <p:txBody>
-          <a:bodyPr rtlCol="0" anchor="ctr"/>
-          <a:lstStyle/>
-          <a:p>
-            <a:pPr algn="ctr"/>
-          </a:p>
-        </p:txBody>
-      </p:sp>
-      <p:sp>
-        <p:nvSpPr>
-          <p:cNvPr id="4" name="TextBox 3"/>
+          <p:cNvPr id="2" name="TextBox 1"/>
           <p:cNvSpPr txBox="1"/>
           <p:nvPr/>
         </p:nvSpPr>
         <p:spPr>
           <a:xfrm>
-            <a:off x="731520" y="128016"/>
-            <a:ext cx="320040" cy="320040"/>
+            <a:off x="822960" y="548640"/>
+            <a:ext cx="10515600" cy="320040"/>
           </a:xfrm>
           <a:prstGeom prst="rect">
             <a:avLst/>
@@ -7189,29 +6144,29 @@
           <a:lstStyle/>
           <a:p>
             <a:pPr>
-              <a:defRPr sz="1400" b="1">
-                <a:solidFill>
-                  <a:srgbClr val="FFFFFF"/>
+              <a:defRPr sz="1100" b="1">
+                <a:solidFill>
+                  <a:srgbClr val="D99B26"/>
                 </a:solidFill>
                 <a:latin typeface="Courier New"/>
               </a:defRPr>
             </a:pPr>
             <a:r>
-              <a:t>›_</a:t>
-            </a:r>
-          </a:p>
-        </p:txBody>
-      </p:sp>
-      <p:sp>
-        <p:nvSpPr>
-          <p:cNvPr id="5" name="TextBox 4"/>
+              <a:t>FILTERING BAD FITS</a:t>
+            </a:r>
+          </a:p>
+        </p:txBody>
+      </p:sp>
+      <p:sp>
+        <p:nvSpPr>
+          <p:cNvPr id="3" name="TextBox 2"/>
           <p:cNvSpPr txBox="1"/>
           <p:nvPr/>
         </p:nvSpPr>
         <p:spPr>
           <a:xfrm>
-            <a:off x="1143000" y="146304"/>
-            <a:ext cx="4114800" cy="320040"/>
+            <a:off x="822960" y="868680"/>
+            <a:ext cx="10515600" cy="685800"/>
           </a:xfrm>
           <a:prstGeom prst="rect">
             <a:avLst/>
@@ -7219,188 +6174,35 @@
           <a:noFill/>
         </p:spPr>
         <p:txBody>
-          <a:bodyPr wrap="none" lIns="0" tIns="0" rIns="0" bIns="0">
+          <a:bodyPr wrap="square" lIns="0" tIns="0" rIns="0" bIns="0">
             <a:spAutoFit/>
           </a:bodyPr>
           <a:lstStyle/>
           <a:p>
             <a:pPr>
-              <a:defRPr sz="1300" b="1">
-                <a:solidFill>
-                  <a:srgbClr val="FFFFFF"/>
+              <a:defRPr sz="2600" b="1">
+                <a:solidFill>
+                  <a:srgbClr val="16161A"/>
                 </a:solidFill>
                 <a:latin typeface="Helvetica"/>
               </a:defRPr>
             </a:pPr>
             <a:r>
-              <a:t>TECHNOLOGY CONSULTANTS</a:t>
-            </a:r>
-          </a:p>
-        </p:txBody>
-      </p:sp>
-      <p:sp>
-        <p:nvSpPr>
-          <p:cNvPr id="6" name="TextBox 5"/>
-          <p:cNvSpPr txBox="1"/>
-          <p:nvPr/>
-        </p:nvSpPr>
-        <p:spPr>
-          <a:xfrm>
-            <a:off x="6858000" y="164592"/>
-            <a:ext cx="4572000" cy="320040"/>
-          </a:xfrm>
-          <a:prstGeom prst="rect">
-            <a:avLst/>
-          </a:prstGeom>
-          <a:noFill/>
-        </p:spPr>
-        <p:txBody>
-          <a:bodyPr wrap="none" lIns="0" tIns="0" rIns="0" bIns="0">
-            <a:spAutoFit/>
-          </a:bodyPr>
-          <a:lstStyle/>
-          <a:p>
-            <a:pPr algn="r">
-              <a:defRPr sz="1100">
-                <a:solidFill>
-                  <a:srgbClr val="D99B26"/>
-                </a:solidFill>
-                <a:latin typeface="Courier New"/>
-              </a:defRPr>
-            </a:pPr>
-            <a:r>
-              <a:t>05 / DISQUALIFIERS</a:t>
-            </a:r>
-          </a:p>
-        </p:txBody>
-      </p:sp>
-      <p:sp>
-        <p:nvSpPr>
-          <p:cNvPr id="7" name="Rounded Rectangle 6"/>
+              <a:t>Who is NOT a Fit? (Protects Referral Quality)</a:t>
+            </a:r>
+          </a:p>
+        </p:txBody>
+      </p:sp>
+      <p:sp>
+        <p:nvSpPr>
+          <p:cNvPr id="4" name="Rounded Rectangle 3"/>
           <p:cNvSpPr/>
           <p:nvPr/>
         </p:nvSpPr>
         <p:spPr>
           <a:xfrm>
-            <a:off x="731520" y="822960"/>
-            <a:ext cx="2267712" cy="292608"/>
-          </a:xfrm>
-          <a:prstGeom prst="roundRect">
-            <a:avLst/>
-          </a:prstGeom>
-          <a:solidFill>
-            <a:srgbClr val="FEF2F2"/>
-          </a:solidFill>
-          <a:ln w="12700">
-            <a:solidFill>
-              <a:srgbClr val="DC2626"/>
-            </a:solidFill>
-          </a:ln>
-        </p:spPr>
-        <p:style>
-          <a:lnRef idx="1">
-            <a:schemeClr val="accent1"/>
-          </a:lnRef>
-          <a:fillRef idx="3">
-            <a:schemeClr val="accent1"/>
-          </a:fillRef>
-          <a:effectRef idx="2">
-            <a:schemeClr val="accent1"/>
-          </a:effectRef>
-          <a:fontRef idx="minor">
-            <a:schemeClr val="lt1"/>
-          </a:fontRef>
-        </p:style>
-        <p:txBody>
-          <a:bodyPr rtlCol="0" anchor="ctr"/>
-          <a:lstStyle/>
-          <a:p>
-            <a:pPr algn="ctr"/>
-          </a:p>
-        </p:txBody>
-      </p:sp>
-      <p:sp>
-        <p:nvSpPr>
-          <p:cNvPr id="8" name="TextBox 7"/>
-          <p:cNvSpPr txBox="1"/>
-          <p:nvPr/>
-        </p:nvSpPr>
-        <p:spPr>
-          <a:xfrm>
-            <a:off x="731520" y="859536"/>
-            <a:ext cx="2267712" cy="256032"/>
-          </a:xfrm>
-          <a:prstGeom prst="rect">
-            <a:avLst/>
-          </a:prstGeom>
-          <a:noFill/>
-        </p:spPr>
-        <p:txBody>
-          <a:bodyPr wrap="none" lIns="0" tIns="0" rIns="0" bIns="0">
-            <a:spAutoFit/>
-          </a:bodyPr>
-          <a:lstStyle/>
-          <a:p>
-            <a:pPr algn="ctr">
-              <a:defRPr sz="1000" b="1">
-                <a:solidFill>
-                  <a:srgbClr val="DC2626"/>
-                </a:solidFill>
-                <a:latin typeface="Courier New"/>
-              </a:defRPr>
-            </a:pPr>
-            <a:r>
-              <a:t>FILTERING BAD FITS</a:t>
-            </a:r>
-          </a:p>
-        </p:txBody>
-      </p:sp>
-      <p:sp>
-        <p:nvSpPr>
-          <p:cNvPr id="9" name="TextBox 8"/>
-          <p:cNvSpPr txBox="1"/>
-          <p:nvPr/>
-        </p:nvSpPr>
-        <p:spPr>
-          <a:xfrm>
-            <a:off x="731520" y="1188720"/>
-            <a:ext cx="10728655" cy="548640"/>
-          </a:xfrm>
-          <a:prstGeom prst="rect">
-            <a:avLst/>
-          </a:prstGeom>
-          <a:noFill/>
-        </p:spPr>
-        <p:txBody>
-          <a:bodyPr wrap="none">
-            <a:spAutoFit/>
-          </a:bodyPr>
-          <a:lstStyle/>
-          <a:p>
-            <a:pPr>
-              <a:defRPr sz="2400" b="1">
-                <a:solidFill>
-                  <a:srgbClr val="16161A"/>
-                </a:solidFill>
-                <a:latin typeface="Helvetica"/>
-              </a:defRPr>
-            </a:pPr>
-            <a:r>
-              <a:t>Who is NOT a Fit? (Protects Referral Quality)</a:t>
-            </a:r>
-          </a:p>
-        </p:txBody>
-      </p:sp>
-      <p:sp>
-        <p:nvSpPr>
-          <p:cNvPr id="10" name="Rounded Rectangle 9"/>
-          <p:cNvSpPr/>
-          <p:nvPr/>
-        </p:nvSpPr>
-        <p:spPr>
-          <a:xfrm>
-            <a:off x="731520" y="1920240"/>
-            <a:ext cx="5166360" cy="3931920"/>
+            <a:off x="822960" y="1874519"/>
+            <a:ext cx="5157216" cy="4023360"/>
           </a:xfrm>
           <a:prstGeom prst="roundRect">
             <a:avLst/>
@@ -7438,14 +6240,14 @@
       </p:sp>
       <p:sp>
         <p:nvSpPr>
-          <p:cNvPr id="11" name="TextBox 10"/>
+          <p:cNvPr id="5" name="TextBox 4"/>
           <p:cNvSpPr txBox="1"/>
           <p:nvPr/>
         </p:nvSpPr>
         <p:spPr>
           <a:xfrm>
-            <a:off x="1005840" y="2194560"/>
-            <a:ext cx="4617720" cy="3474720"/>
+            <a:off x="1097280" y="2194559"/>
+            <a:ext cx="4608576" cy="3474720"/>
           </a:xfrm>
           <a:prstGeom prst="rect">
             <a:avLst/>
@@ -7462,7 +6264,7 @@
               <a:spcAft>
                 <a:spcPts val="1400"/>
               </a:spcAft>
-              <a:defRPr sz="1200" b="1">
+              <a:defRPr sz="1100" b="1">
                 <a:solidFill>
                   <a:srgbClr val="DC2626"/>
                 </a:solidFill>
@@ -7470,7 +6272,7 @@
               </a:defRPr>
             </a:pPr>
             <a:r>
-              <a:t>❌ LOW-COST TEMPLATE PROJECTS</a:t>
+              <a:t>❌  LOW-COST TEMPLATE PROJECTS</a:t>
             </a:r>
           </a:p>
           <a:p>
@@ -7480,13 +6282,13 @@
               </a:spcAft>
               <a:defRPr sz="1300">
                 <a:solidFill>
-                  <a:srgbClr val="454337"/>
+                  <a:srgbClr val="59564D"/>
                 </a:solidFill>
                 <a:latin typeface="Helvetica"/>
               </a:defRPr>
             </a:pPr>
             <a:r>
-              <a:t>✕  Looking for offshore body-shopping or commoditized hourly rates.</a:t>
+              <a:t>✕ Looking for offshore body-shopping or commoditized hourly rates.</a:t>
             </a:r>
           </a:p>
           <a:p>
@@ -7496,13 +6298,13 @@
               </a:spcAft>
               <a:defRPr sz="1300">
                 <a:solidFill>
-                  <a:srgbClr val="454337"/>
+                  <a:srgbClr val="59564D"/>
                 </a:solidFill>
                 <a:latin typeface="Helvetica"/>
               </a:defRPr>
             </a:pPr>
             <a:r>
-              <a:t>✕  Basic WordPress brochure sites or generic no-code template setups.</a:t>
+              <a:t>✕ Basic WordPress brochure sites or generic no-code template setups.</a:t>
             </a:r>
           </a:p>
           <a:p>
@@ -7512,13 +6314,13 @@
               </a:spcAft>
               <a:defRPr sz="1300">
                 <a:solidFill>
-                  <a:srgbClr val="454337"/>
+                  <a:srgbClr val="59564D"/>
                 </a:solidFill>
                 <a:latin typeface="Helvetica"/>
               </a:defRPr>
             </a:pPr>
             <a:r>
-              <a:t>✕  No engineering budget or unwilling to invest in custom architecture.</a:t>
+              <a:t>✕ No engineering budget or unwilling to invest in custom architecture.</a:t>
             </a:r>
           </a:p>
           <a:p>
@@ -7528,27 +6330,27 @@
               </a:spcAft>
               <a:defRPr sz="1300">
                 <a:solidFill>
-                  <a:srgbClr val="454337"/>
+                  <a:srgbClr val="59564D"/>
                 </a:solidFill>
                 <a:latin typeface="Helvetica"/>
               </a:defRPr>
             </a:pPr>
             <a:r>
-              <a:t>✕  Unclear business goals without measurable outcome targets.</a:t>
-            </a:r>
-          </a:p>
-        </p:txBody>
-      </p:sp>
-      <p:sp>
-        <p:nvSpPr>
-          <p:cNvPr id="12" name="Rounded Rectangle 11"/>
+              <a:t>✕ Unclear business goals without measurable outcome targets.</a:t>
+            </a:r>
+          </a:p>
+        </p:txBody>
+      </p:sp>
+      <p:sp>
+        <p:nvSpPr>
+          <p:cNvPr id="6" name="Rounded Rectangle 5"/>
           <p:cNvSpPr/>
           <p:nvPr/>
         </p:nvSpPr>
         <p:spPr>
           <a:xfrm>
-            <a:off x="6263640" y="1920240"/>
-            <a:ext cx="5166360" cy="3931920"/>
+            <a:off x="6248095" y="1874519"/>
+            <a:ext cx="5157216" cy="4023360"/>
           </a:xfrm>
           <a:prstGeom prst="roundRect">
             <a:avLst/>
@@ -7586,14 +6388,14 @@
       </p:sp>
       <p:sp>
         <p:nvSpPr>
-          <p:cNvPr id="13" name="TextBox 12"/>
+          <p:cNvPr id="7" name="TextBox 6"/>
           <p:cNvSpPr txBox="1"/>
           <p:nvPr/>
         </p:nvSpPr>
         <p:spPr>
           <a:xfrm>
-            <a:off x="6537960" y="2194560"/>
-            <a:ext cx="4617720" cy="3474720"/>
+            <a:off x="6522415" y="2194559"/>
+            <a:ext cx="4608576" cy="3474720"/>
           </a:xfrm>
           <a:prstGeom prst="rect">
             <a:avLst/>
@@ -7610,7 +6412,7 @@
               <a:spcAft>
                 <a:spcPts val="1400"/>
               </a:spcAft>
-              <a:defRPr sz="1200" b="1">
+              <a:defRPr sz="1100" b="1">
                 <a:solidFill>
                   <a:srgbClr val="DC2626"/>
                 </a:solidFill>
@@ -7618,7 +6420,7 @@
               </a:defRPr>
             </a:pPr>
             <a:r>
-              <a:t>❌ UN-VETTED "AI HYPE" PROJECTS</a:t>
+              <a:t>❌  UN-VETTED "AI HYPE" PROJECTS</a:t>
             </a:r>
           </a:p>
           <a:p>
@@ -7628,13 +6430,13 @@
               </a:spcAft>
               <a:defRPr sz="1300">
                 <a:solidFill>
-                  <a:srgbClr val="454337"/>
+                  <a:srgbClr val="59564D"/>
                 </a:solidFill>
                 <a:latin typeface="Helvetica"/>
               </a:defRPr>
             </a:pPr>
             <a:r>
-              <a:t>✕  Seeking flashy AI wrappers without backend integration or API access.</a:t>
+              <a:t>✕ Seeking flashy AI wrappers without backend integration or API access.</a:t>
             </a:r>
           </a:p>
           <a:p>
@@ -7644,13 +6446,13 @@
               </a:spcAft>
               <a:defRPr sz="1300">
                 <a:solidFill>
-                  <a:srgbClr val="454337"/>
+                  <a:srgbClr val="59564D"/>
                 </a:solidFill>
                 <a:latin typeface="Helvetica"/>
               </a:defRPr>
             </a:pPr>
             <a:r>
-              <a:t>✕  Unwilling to maintain data hygiene, security controls, or HITL oversight.</a:t>
+              <a:t>✕ Unwilling to maintain data hygiene, security controls, or HITL oversight.</a:t>
             </a:r>
           </a:p>
           <a:p>
@@ -7660,13 +6462,13 @@
               </a:spcAft>
               <a:defRPr sz="1300">
                 <a:solidFill>
-                  <a:srgbClr val="454337"/>
+                  <a:srgbClr val="59564D"/>
                 </a:solidFill>
                 <a:latin typeface="Helvetica"/>
               </a:defRPr>
             </a:pPr>
             <a:r>
-              <a:t>✕  Expectations of automated AI magic without structured workflow design.</a:t>
+              <a:t>✕ Expectations of automated AI magic without structured workflow design.</a:t>
             </a:r>
           </a:p>
           <a:p>
@@ -7676,33 +6478,33 @@
               </a:spcAft>
               <a:defRPr sz="1300">
                 <a:solidFill>
-                  <a:srgbClr val="454337"/>
+                  <a:srgbClr val="59564D"/>
                 </a:solidFill>
                 <a:latin typeface="Helvetica"/>
               </a:defRPr>
             </a:pPr>
             <a:r>
-              <a:t>✕  No internal subject matter expert to validate AI outputs.</a:t>
-            </a:r>
-          </a:p>
-        </p:txBody>
-      </p:sp>
-      <p:sp>
-        <p:nvSpPr>
-          <p:cNvPr id="14" name="Rectangle 13"/>
+              <a:t>✕ No internal subject matter expert to validate AI outputs.</a:t>
+            </a:r>
+          </a:p>
+        </p:txBody>
+      </p:sp>
+      <p:sp>
+        <p:nvSpPr>
+          <p:cNvPr id="8" name="Rectangle 7"/>
           <p:cNvSpPr/>
           <p:nvPr/>
         </p:nvSpPr>
         <p:spPr>
           <a:xfrm>
-            <a:off x="731520" y="6400800"/>
-            <a:ext cx="10728655" cy="12700"/>
+            <a:off x="822960" y="6309360"/>
+            <a:ext cx="10545775" cy="12700"/>
           </a:xfrm>
           <a:prstGeom prst="rect">
             <a:avLst/>
           </a:prstGeom>
           <a:solidFill>
-            <a:srgbClr val="C9C3B2"/>
+            <a:srgbClr val="EBE7DF"/>
           </a:solidFill>
           <a:ln>
             <a:noFill/>
@@ -7732,13 +6534,13 @@
       </p:sp>
       <p:sp>
         <p:nvSpPr>
-          <p:cNvPr id="15" name="TextBox 14"/>
+          <p:cNvPr id="9" name="TextBox 8"/>
           <p:cNvSpPr txBox="1"/>
           <p:nvPr/>
         </p:nvSpPr>
         <p:spPr>
           <a:xfrm>
-            <a:off x="731520" y="6446520"/>
+            <a:off x="822960" y="6382512"/>
             <a:ext cx="7315200" cy="320040"/>
           </a:xfrm>
           <a:prstGeom prst="rect">
@@ -7755,7 +6557,7 @@
             <a:pPr>
               <a:defRPr sz="1000">
                 <a:solidFill>
-                  <a:srgbClr val="5F5C52"/>
+                  <a:srgbClr val="7C786C"/>
                 </a:solidFill>
                 <a:latin typeface="Courier New"/>
               </a:defRPr>
@@ -7768,13 +6570,13 @@
       </p:sp>
       <p:sp>
         <p:nvSpPr>
-          <p:cNvPr id="16" name="TextBox 15"/>
+          <p:cNvPr id="10" name="TextBox 9"/>
           <p:cNvSpPr txBox="1"/>
           <p:nvPr/>
         </p:nvSpPr>
         <p:spPr>
           <a:xfrm>
-            <a:off x="9631375" y="6446520"/>
+            <a:off x="9539935" y="6382512"/>
             <a:ext cx="1828800" cy="320040"/>
           </a:xfrm>
           <a:prstGeom prst="rect">
@@ -7791,7 +6593,7 @@
             <a:pPr algn="r">
               <a:defRPr sz="1000">
                 <a:solidFill>
-                  <a:srgbClr val="5F5C52"/>
+                  <a:srgbClr val="7C786C"/>
                 </a:solidFill>
                 <a:latin typeface="Courier New"/>
               </a:defRPr>
@@ -7816,7 +6618,7 @@
     <p:bg>
       <p:bgPr>
         <a:solidFill>
-          <a:srgbClr val="F4F1EA"/>
+          <a:srgbClr val="FAF9F5"/>
         </a:solidFill>
         <a:effectLst/>
       </p:bgPr>
@@ -7830,24 +6632,96 @@
       <p:grpSpPr/>
       <p:sp>
         <p:nvSpPr>
-          <p:cNvPr id="2" name="Rectangle 1"/>
+          <p:cNvPr id="2" name="TextBox 1"/>
+          <p:cNvSpPr txBox="1"/>
+          <p:nvPr/>
+        </p:nvSpPr>
+        <p:spPr>
+          <a:xfrm>
+            <a:off x="822960" y="548640"/>
+            <a:ext cx="10515600" cy="320040"/>
+          </a:xfrm>
+          <a:prstGeom prst="rect">
+            <a:avLst/>
+          </a:prstGeom>
+          <a:noFill/>
+        </p:spPr>
+        <p:txBody>
+          <a:bodyPr wrap="none" lIns="0" tIns="0" rIns="0" bIns="0">
+            <a:spAutoFit/>
+          </a:bodyPr>
+          <a:lstStyle/>
+          <a:p>
+            <a:pPr>
+              <a:defRPr sz="1100" b="1">
+                <a:solidFill>
+                  <a:srgbClr val="D99B26"/>
+                </a:solidFill>
+                <a:latin typeface="Courier New"/>
+              </a:defRPr>
+            </a:pPr>
+            <a:r>
+              <a:t>ENGAGEMENT MODELS</a:t>
+            </a:r>
+          </a:p>
+        </p:txBody>
+      </p:sp>
+      <p:sp>
+        <p:nvSpPr>
+          <p:cNvPr id="3" name="TextBox 2"/>
+          <p:cNvSpPr txBox="1"/>
+          <p:nvPr/>
+        </p:nvSpPr>
+        <p:spPr>
+          <a:xfrm>
+            <a:off x="822960" y="868680"/>
+            <a:ext cx="10515600" cy="685800"/>
+          </a:xfrm>
+          <a:prstGeom prst="rect">
+            <a:avLst/>
+          </a:prstGeom>
+          <a:noFill/>
+        </p:spPr>
+        <p:txBody>
+          <a:bodyPr wrap="square" lIns="0" tIns="0" rIns="0" bIns="0">
+            <a:spAutoFit/>
+          </a:bodyPr>
+          <a:lstStyle/>
+          <a:p>
+            <a:pPr>
+              <a:defRPr sz="2600" b="1">
+                <a:solidFill>
+                  <a:srgbClr val="16161A"/>
+                </a:solidFill>
+                <a:latin typeface="Helvetica"/>
+              </a:defRPr>
+            </a:pPr>
+            <a:r>
+              <a:t>Flexible Engagement Models for Clients</a:t>
+            </a:r>
+          </a:p>
+        </p:txBody>
+      </p:sp>
+      <p:sp>
+        <p:nvSpPr>
+          <p:cNvPr id="4" name="Rounded Rectangle 3"/>
           <p:cNvSpPr/>
           <p:nvPr/>
         </p:nvSpPr>
         <p:spPr>
           <a:xfrm>
-            <a:off x="0" y="0"/>
-            <a:ext cx="12191695" cy="594360"/>
-          </a:xfrm>
-          <a:prstGeom prst="rect">
+            <a:off x="822960" y="1874519"/>
+            <a:ext cx="3328416" cy="4023360"/>
+          </a:xfrm>
+          <a:prstGeom prst="roundRect">
             <a:avLst/>
           </a:prstGeom>
           <a:solidFill>
-            <a:srgbClr val="121216"/>
+            <a:srgbClr val="FFFFFF"/>
           </a:solidFill>
           <a:ln w="12700">
             <a:solidFill>
-              <a:srgbClr val="26262C"/>
+              <a:srgbClr val="EBE7DF"/>
             </a:solidFill>
           </a:ln>
         </p:spPr>
@@ -7875,23 +6749,93 @@
       </p:sp>
       <p:sp>
         <p:nvSpPr>
-          <p:cNvPr id="3" name="Rounded Rectangle 2"/>
+          <p:cNvPr id="5" name="TextBox 4"/>
+          <p:cNvSpPr txBox="1"/>
+          <p:nvPr/>
+        </p:nvSpPr>
+        <p:spPr>
+          <a:xfrm>
+            <a:off x="1143000" y="2194560"/>
+            <a:ext cx="2688336" cy="3474720"/>
+          </a:xfrm>
+          <a:prstGeom prst="rect">
+            <a:avLst/>
+          </a:prstGeom>
+          <a:noFill/>
+        </p:spPr>
+        <p:txBody>
+          <a:bodyPr wrap="square">
+            <a:spAutoFit/>
+          </a:bodyPr>
+          <a:lstStyle/>
+          <a:p>
+            <a:pPr>
+              <a:spcAft>
+                <a:spcPts val="1000"/>
+              </a:spcAft>
+              <a:defRPr sz="1000" b="1">
+                <a:solidFill>
+                  <a:srgbClr val="2B59D9"/>
+                </a:solidFill>
+                <a:latin typeface="Courier New"/>
+              </a:defRPr>
+            </a:pPr>
+            <a:r>
+              <a:t>[ 2 - 4 WEEKS ]</a:t>
+            </a:r>
+          </a:p>
+          <a:p>
+            <a:pPr>
+              <a:spcAft>
+                <a:spcPts val="1200"/>
+              </a:spcAft>
+              <a:defRPr sz="1800" b="1">
+                <a:solidFill>
+                  <a:srgbClr val="16161A"/>
+                </a:solidFill>
+                <a:latin typeface="Helvetica"/>
+              </a:defRPr>
+            </a:pPr>
+            <a:r>
+              <a:t>1. Proof-of-Concept Sprint</a:t>
+            </a:r>
+          </a:p>
+          <a:p>
+            <a:pPr>
+              <a:defRPr sz="1300">
+                <a:solidFill>
+                  <a:srgbClr val="59564D"/>
+                </a:solidFill>
+                <a:latin typeface="Helvetica"/>
+              </a:defRPr>
+            </a:pPr>
+            <a:r>
+              <a:t>Low-risk initial engagement to build a working prototype, validate API integrations (e.g. Workday/MCP), and prove feasibility.</a:t>
+            </a:r>
+          </a:p>
+        </p:txBody>
+      </p:sp>
+      <p:sp>
+        <p:nvSpPr>
+          <p:cNvPr id="6" name="Rounded Rectangle 5"/>
           <p:cNvSpPr/>
           <p:nvPr/>
         </p:nvSpPr>
         <p:spPr>
           <a:xfrm>
-            <a:off x="731520" y="137160"/>
-            <a:ext cx="320040" cy="320040"/>
+            <a:off x="4425696" y="1874519"/>
+            <a:ext cx="3328416" cy="4023360"/>
           </a:xfrm>
           <a:prstGeom prst="roundRect">
             <a:avLst/>
           </a:prstGeom>
           <a:solidFill>
-            <a:srgbClr val="2B59D9"/>
+            <a:srgbClr val="FFFFFF"/>
           </a:solidFill>
-          <a:ln>
-            <a:noFill/>
+          <a:ln w="12700">
+            <a:solidFill>
+              <a:srgbClr val="EBE7DF"/>
+            </a:solidFill>
           </a:ln>
         </p:spPr>
         <p:style>
@@ -7918,14 +6862,14 @@
       </p:sp>
       <p:sp>
         <p:nvSpPr>
-          <p:cNvPr id="4" name="TextBox 3"/>
+          <p:cNvPr id="7" name="TextBox 6"/>
           <p:cNvSpPr txBox="1"/>
           <p:nvPr/>
         </p:nvSpPr>
         <p:spPr>
           <a:xfrm>
-            <a:off x="731520" y="128016"/>
-            <a:ext cx="320040" cy="320040"/>
+            <a:off x="4745736" y="2194560"/>
+            <a:ext cx="2688336" cy="3474720"/>
           </a:xfrm>
           <a:prstGeom prst="rect">
             <a:avLst/>
@@ -7933,117 +6877,77 @@
           <a:noFill/>
         </p:spPr>
         <p:txBody>
-          <a:bodyPr wrap="none" lIns="0" tIns="0" rIns="0" bIns="0">
+          <a:bodyPr wrap="square">
             <a:spAutoFit/>
           </a:bodyPr>
           <a:lstStyle/>
           <a:p>
             <a:pPr>
-              <a:defRPr sz="1400" b="1">
-                <a:solidFill>
-                  <a:srgbClr val="FFFFFF"/>
+              <a:spcAft>
+                <a:spcPts val="1000"/>
+              </a:spcAft>
+              <a:defRPr sz="1000" b="1">
+                <a:solidFill>
+                  <a:srgbClr val="2B59D9"/>
                 </a:solidFill>
                 <a:latin typeface="Courier New"/>
               </a:defRPr>
             </a:pPr>
             <a:r>
-              <a:t>›_</a:t>
-            </a:r>
-          </a:p>
-        </p:txBody>
-      </p:sp>
-      <p:sp>
-        <p:nvSpPr>
-          <p:cNvPr id="5" name="TextBox 4"/>
-          <p:cNvSpPr txBox="1"/>
-          <p:nvPr/>
-        </p:nvSpPr>
-        <p:spPr>
-          <a:xfrm>
-            <a:off x="1143000" y="146304"/>
-            <a:ext cx="4114800" cy="320040"/>
-          </a:xfrm>
-          <a:prstGeom prst="rect">
-            <a:avLst/>
-          </a:prstGeom>
-          <a:noFill/>
-        </p:spPr>
-        <p:txBody>
-          <a:bodyPr wrap="none" lIns="0" tIns="0" rIns="0" bIns="0">
-            <a:spAutoFit/>
-          </a:bodyPr>
-          <a:lstStyle/>
-          <a:p>
-            <a:pPr>
-              <a:defRPr sz="1300" b="1">
-                <a:solidFill>
-                  <a:srgbClr val="FFFFFF"/>
+              <a:t>[ PROJECT-BASED ]</a:t>
+            </a:r>
+          </a:p>
+          <a:p>
+            <a:pPr>
+              <a:spcAft>
+                <a:spcPts val="1200"/>
+              </a:spcAft>
+              <a:defRPr sz="1800" b="1">
+                <a:solidFill>
+                  <a:srgbClr val="16161A"/>
                 </a:solidFill>
                 <a:latin typeface="Helvetica"/>
               </a:defRPr>
             </a:pPr>
             <a:r>
-              <a:t>TECHNOLOGY CONSULTANTS</a:t>
-            </a:r>
-          </a:p>
-        </p:txBody>
-      </p:sp>
-      <p:sp>
-        <p:nvSpPr>
-          <p:cNvPr id="6" name="TextBox 5"/>
-          <p:cNvSpPr txBox="1"/>
-          <p:nvPr/>
-        </p:nvSpPr>
-        <p:spPr>
-          <a:xfrm>
-            <a:off x="6858000" y="164592"/>
-            <a:ext cx="4572000" cy="320040"/>
-          </a:xfrm>
-          <a:prstGeom prst="rect">
-            <a:avLst/>
-          </a:prstGeom>
-          <a:noFill/>
-        </p:spPr>
-        <p:txBody>
-          <a:bodyPr wrap="none" lIns="0" tIns="0" rIns="0" bIns="0">
-            <a:spAutoFit/>
-          </a:bodyPr>
-          <a:lstStyle/>
-          <a:p>
-            <a:pPr algn="r">
-              <a:defRPr sz="1100">
-                <a:solidFill>
-                  <a:srgbClr val="D99B26"/>
-                </a:solidFill>
-                <a:latin typeface="Courier New"/>
-              </a:defRPr>
-            </a:pPr>
-            <a:r>
-              <a:t>06 / ENGAGEMENT MODELS</a:t>
-            </a:r>
-          </a:p>
-        </p:txBody>
-      </p:sp>
-      <p:sp>
-        <p:nvSpPr>
-          <p:cNvPr id="7" name="Rounded Rectangle 6"/>
+              <a:t>2. Full Implementation</a:t>
+            </a:r>
+          </a:p>
+          <a:p>
+            <a:pPr>
+              <a:defRPr sz="1300">
+                <a:solidFill>
+                  <a:srgbClr val="59564D"/>
+                </a:solidFill>
+                <a:latin typeface="Helvetica"/>
+              </a:defRPr>
+            </a:pPr>
+            <a:r>
+              <a:t>End-to-end custom React web software, backend integration pipeline, automated AI workflow, and production deployment.</a:t>
+            </a:r>
+          </a:p>
+        </p:txBody>
+      </p:sp>
+      <p:sp>
+        <p:nvSpPr>
+          <p:cNvPr id="8" name="Rounded Rectangle 7"/>
           <p:cNvSpPr/>
           <p:nvPr/>
         </p:nvSpPr>
         <p:spPr>
           <a:xfrm>
-            <a:off x="731520" y="822960"/>
-            <a:ext cx="2167128" cy="292608"/>
+            <a:off x="8028431" y="1874519"/>
+            <a:ext cx="3328416" cy="4023360"/>
           </a:xfrm>
           <a:prstGeom prst="roundRect">
             <a:avLst/>
           </a:prstGeom>
           <a:solidFill>
-            <a:srgbClr val="EFE9D8"/>
+            <a:srgbClr val="FFFFFF"/>
           </a:solidFill>
           <a:ln w="12700">
             <a:solidFill>
-              <a:srgbClr val="2B59D9"/>
+              <a:srgbClr val="EBE7DF"/>
             </a:solidFill>
           </a:ln>
         </p:spPr>
@@ -8071,14 +6975,14 @@
       </p:sp>
       <p:sp>
         <p:nvSpPr>
-          <p:cNvPr id="8" name="TextBox 7"/>
+          <p:cNvPr id="9" name="TextBox 8"/>
           <p:cNvSpPr txBox="1"/>
           <p:nvPr/>
         </p:nvSpPr>
         <p:spPr>
           <a:xfrm>
-            <a:off x="731520" y="859536"/>
-            <a:ext cx="2167128" cy="256032"/>
+            <a:off x="8348471" y="2194560"/>
+            <a:ext cx="2688336" cy="3474720"/>
           </a:xfrm>
           <a:prstGeom prst="rect">
             <a:avLst/>
@@ -8086,12 +6990,15 @@
           <a:noFill/>
         </p:spPr>
         <p:txBody>
-          <a:bodyPr wrap="none" lIns="0" tIns="0" rIns="0" bIns="0">
+          <a:bodyPr wrap="square">
             <a:spAutoFit/>
           </a:bodyPr>
           <a:lstStyle/>
           <a:p>
-            <a:pPr algn="ctr">
+            <a:pPr>
+              <a:spcAft>
+                <a:spcPts val="1000"/>
+              </a:spcAft>
               <a:defRPr sz="1000" b="1">
                 <a:solidFill>
                   <a:srgbClr val="2B59D9"/>
@@ -8100,68 +7007,59 @@
               </a:defRPr>
             </a:pPr>
             <a:r>
-              <a:t>ENGAGEMENT MODELS</a:t>
-            </a:r>
-          </a:p>
-        </p:txBody>
-      </p:sp>
-      <p:sp>
-        <p:nvSpPr>
-          <p:cNvPr id="9" name="TextBox 8"/>
-          <p:cNvSpPr txBox="1"/>
-          <p:nvPr/>
-        </p:nvSpPr>
-        <p:spPr>
-          <a:xfrm>
-            <a:off x="731520" y="1188720"/>
-            <a:ext cx="10728655" cy="548640"/>
+              <a:t>[ MONTHLY RETAINER ]</a:t>
+            </a:r>
+          </a:p>
+          <a:p>
+            <a:pPr>
+              <a:spcAft>
+                <a:spcPts val="1200"/>
+              </a:spcAft>
+              <a:defRPr sz="1800" b="1">
+                <a:solidFill>
+                  <a:srgbClr val="16161A"/>
+                </a:solidFill>
+                <a:latin typeface="Helvetica"/>
+              </a:defRPr>
+            </a:pPr>
+            <a:r>
+              <a:t>3. Strategic Advisory</a:t>
+            </a:r>
+          </a:p>
+          <a:p>
+            <a:pPr>
+              <a:defRPr sz="1300">
+                <a:solidFill>
+                  <a:srgbClr val="59564D"/>
+                </a:solidFill>
+                <a:latin typeface="Helvetica"/>
+              </a:defRPr>
+            </a:pPr>
+            <a:r>
+              <a:t>Ongoing technical leadership, architecture reviews, AI readiness roadmap, and engineering team guidance.</a:t>
+            </a:r>
+          </a:p>
+        </p:txBody>
+      </p:sp>
+      <p:sp>
+        <p:nvSpPr>
+          <p:cNvPr id="10" name="Rectangle 9"/>
+          <p:cNvSpPr/>
+          <p:nvPr/>
+        </p:nvSpPr>
+        <p:spPr>
+          <a:xfrm>
+            <a:off x="822960" y="6309360"/>
+            <a:ext cx="10545775" cy="12700"/>
           </a:xfrm>
           <a:prstGeom prst="rect">
             <a:avLst/>
           </a:prstGeom>
-          <a:noFill/>
-        </p:spPr>
-        <p:txBody>
-          <a:bodyPr wrap="none">
-            <a:spAutoFit/>
-          </a:bodyPr>
-          <a:lstStyle/>
-          <a:p>
-            <a:pPr>
-              <a:defRPr sz="2400" b="1">
-                <a:solidFill>
-                  <a:srgbClr val="16161A"/>
-                </a:solidFill>
-                <a:latin typeface="Helvetica"/>
-              </a:defRPr>
-            </a:pPr>
-            <a:r>
-              <a:t>Flexible Engagement Models for Clients</a:t>
-            </a:r>
-          </a:p>
-        </p:txBody>
-      </p:sp>
-      <p:sp>
-        <p:nvSpPr>
-          <p:cNvPr id="10" name="Rounded Rectangle 9"/>
-          <p:cNvSpPr/>
-          <p:nvPr/>
-        </p:nvSpPr>
-        <p:spPr>
-          <a:xfrm>
-            <a:off x="731520" y="1920240"/>
-            <a:ext cx="3328416" cy="3931920"/>
-          </a:xfrm>
-          <a:prstGeom prst="roundRect">
-            <a:avLst/>
-          </a:prstGeom>
           <a:solidFill>
-            <a:srgbClr val="FFFFFF"/>
+            <a:srgbClr val="EBE7DF"/>
           </a:solidFill>
           <a:ln>
-            <a:solidFill>
-              <a:srgbClr val="C9C3B2"/>
-            </a:solidFill>
+            <a:noFill/>
           </a:ln>
         </p:spPr>
         <p:style>
@@ -8194,344 +7092,7 @@
         </p:nvSpPr>
         <p:spPr>
           <a:xfrm>
-            <a:off x="1005840" y="2194560"/>
-            <a:ext cx="2779776" cy="3383280"/>
-          </a:xfrm>
-          <a:prstGeom prst="rect">
-            <a:avLst/>
-          </a:prstGeom>
-          <a:noFill/>
-        </p:spPr>
-        <p:txBody>
-          <a:bodyPr wrap="square">
-            <a:spAutoFit/>
-          </a:bodyPr>
-          <a:lstStyle/>
-          <a:p>
-            <a:pPr>
-              <a:spcAft>
-                <a:spcPts val="1000"/>
-              </a:spcAft>
-              <a:defRPr sz="1000" b="1">
-                <a:solidFill>
-                  <a:srgbClr val="2B59D9"/>
-                </a:solidFill>
-                <a:latin typeface="Courier New"/>
-              </a:defRPr>
-            </a:pPr>
-            <a:r>
-              <a:t>[ 2 - 4 WEEKS ]</a:t>
-            </a:r>
-          </a:p>
-          <a:p>
-            <a:pPr>
-              <a:spcAft>
-                <a:spcPts val="1200"/>
-              </a:spcAft>
-              <a:defRPr sz="1800" b="1">
-                <a:solidFill>
-                  <a:srgbClr val="16161A"/>
-                </a:solidFill>
-                <a:latin typeface="Helvetica"/>
-              </a:defRPr>
-            </a:pPr>
-            <a:r>
-              <a:t>1. Proof-of-Concept Sprint</a:t>
-            </a:r>
-          </a:p>
-          <a:p>
-            <a:pPr>
-              <a:defRPr sz="1300">
-                <a:solidFill>
-                  <a:srgbClr val="454337"/>
-                </a:solidFill>
-                <a:latin typeface="Helvetica"/>
-              </a:defRPr>
-            </a:pPr>
-            <a:r>
-              <a:t>Low-risk initial engagement to build a working prototype, validate API integrations (e.g. Workday/MCP), and prove feasibility.</a:t>
-            </a:r>
-          </a:p>
-        </p:txBody>
-      </p:sp>
-      <p:sp>
-        <p:nvSpPr>
-          <p:cNvPr id="12" name="Rounded Rectangle 11"/>
-          <p:cNvSpPr/>
-          <p:nvPr/>
-        </p:nvSpPr>
-        <p:spPr>
-          <a:xfrm>
-            <a:off x="4297680" y="1920240"/>
-            <a:ext cx="3328416" cy="3931920"/>
-          </a:xfrm>
-          <a:prstGeom prst="roundRect">
-            <a:avLst/>
-          </a:prstGeom>
-          <a:solidFill>
-            <a:srgbClr val="FFFFFF"/>
-          </a:solidFill>
-          <a:ln>
-            <a:solidFill>
-              <a:srgbClr val="C9C3B2"/>
-            </a:solidFill>
-          </a:ln>
-        </p:spPr>
-        <p:style>
-          <a:lnRef idx="1">
-            <a:schemeClr val="accent1"/>
-          </a:lnRef>
-          <a:fillRef idx="3">
-            <a:schemeClr val="accent1"/>
-          </a:fillRef>
-          <a:effectRef idx="2">
-            <a:schemeClr val="accent1"/>
-          </a:effectRef>
-          <a:fontRef idx="minor">
-            <a:schemeClr val="lt1"/>
-          </a:fontRef>
-        </p:style>
-        <p:txBody>
-          <a:bodyPr rtlCol="0" anchor="ctr"/>
-          <a:lstStyle/>
-          <a:p>
-            <a:pPr algn="ctr"/>
-          </a:p>
-        </p:txBody>
-      </p:sp>
-      <p:sp>
-        <p:nvSpPr>
-          <p:cNvPr id="13" name="TextBox 12"/>
-          <p:cNvSpPr txBox="1"/>
-          <p:nvPr/>
-        </p:nvSpPr>
-        <p:spPr>
-          <a:xfrm>
-            <a:off x="4572000" y="2194560"/>
-            <a:ext cx="2779776" cy="3383280"/>
-          </a:xfrm>
-          <a:prstGeom prst="rect">
-            <a:avLst/>
-          </a:prstGeom>
-          <a:noFill/>
-        </p:spPr>
-        <p:txBody>
-          <a:bodyPr wrap="square">
-            <a:spAutoFit/>
-          </a:bodyPr>
-          <a:lstStyle/>
-          <a:p>
-            <a:pPr>
-              <a:spcAft>
-                <a:spcPts val="1000"/>
-              </a:spcAft>
-              <a:defRPr sz="1000" b="1">
-                <a:solidFill>
-                  <a:srgbClr val="2B59D9"/>
-                </a:solidFill>
-                <a:latin typeface="Courier New"/>
-              </a:defRPr>
-            </a:pPr>
-            <a:r>
-              <a:t>[ PROJECT-BASED ]</a:t>
-            </a:r>
-          </a:p>
-          <a:p>
-            <a:pPr>
-              <a:spcAft>
-                <a:spcPts val="1200"/>
-              </a:spcAft>
-              <a:defRPr sz="1800" b="1">
-                <a:solidFill>
-                  <a:srgbClr val="16161A"/>
-                </a:solidFill>
-                <a:latin typeface="Helvetica"/>
-              </a:defRPr>
-            </a:pPr>
-            <a:r>
-              <a:t>2. Full Implementation</a:t>
-            </a:r>
-          </a:p>
-          <a:p>
-            <a:pPr>
-              <a:defRPr sz="1300">
-                <a:solidFill>
-                  <a:srgbClr val="454337"/>
-                </a:solidFill>
-                <a:latin typeface="Helvetica"/>
-              </a:defRPr>
-            </a:pPr>
-            <a:r>
-              <a:t>End-to-end custom React web software, backend integration pipeline, automated AI workflow, and production deployment.</a:t>
-            </a:r>
-          </a:p>
-        </p:txBody>
-      </p:sp>
-      <p:sp>
-        <p:nvSpPr>
-          <p:cNvPr id="14" name="Rounded Rectangle 13"/>
-          <p:cNvSpPr/>
-          <p:nvPr/>
-        </p:nvSpPr>
-        <p:spPr>
-          <a:xfrm>
-            <a:off x="7863840" y="1920240"/>
-            <a:ext cx="3328416" cy="3931920"/>
-          </a:xfrm>
-          <a:prstGeom prst="roundRect">
-            <a:avLst/>
-          </a:prstGeom>
-          <a:solidFill>
-            <a:srgbClr val="FFFFFF"/>
-          </a:solidFill>
-          <a:ln>
-            <a:solidFill>
-              <a:srgbClr val="C9C3B2"/>
-            </a:solidFill>
-          </a:ln>
-        </p:spPr>
-        <p:style>
-          <a:lnRef idx="1">
-            <a:schemeClr val="accent1"/>
-          </a:lnRef>
-          <a:fillRef idx="3">
-            <a:schemeClr val="accent1"/>
-          </a:fillRef>
-          <a:effectRef idx="2">
-            <a:schemeClr val="accent1"/>
-          </a:effectRef>
-          <a:fontRef idx="minor">
-            <a:schemeClr val="lt1"/>
-          </a:fontRef>
-        </p:style>
-        <p:txBody>
-          <a:bodyPr rtlCol="0" anchor="ctr"/>
-          <a:lstStyle/>
-          <a:p>
-            <a:pPr algn="ctr"/>
-          </a:p>
-        </p:txBody>
-      </p:sp>
-      <p:sp>
-        <p:nvSpPr>
-          <p:cNvPr id="15" name="TextBox 14"/>
-          <p:cNvSpPr txBox="1"/>
-          <p:nvPr/>
-        </p:nvSpPr>
-        <p:spPr>
-          <a:xfrm>
-            <a:off x="8138160" y="2194560"/>
-            <a:ext cx="2779776" cy="3383280"/>
-          </a:xfrm>
-          <a:prstGeom prst="rect">
-            <a:avLst/>
-          </a:prstGeom>
-          <a:noFill/>
-        </p:spPr>
-        <p:txBody>
-          <a:bodyPr wrap="square">
-            <a:spAutoFit/>
-          </a:bodyPr>
-          <a:lstStyle/>
-          <a:p>
-            <a:pPr>
-              <a:spcAft>
-                <a:spcPts val="1000"/>
-              </a:spcAft>
-              <a:defRPr sz="1000" b="1">
-                <a:solidFill>
-                  <a:srgbClr val="2B59D9"/>
-                </a:solidFill>
-                <a:latin typeface="Courier New"/>
-              </a:defRPr>
-            </a:pPr>
-            <a:r>
-              <a:t>[ MONTHLY RETAINER ]</a:t>
-            </a:r>
-          </a:p>
-          <a:p>
-            <a:pPr>
-              <a:spcAft>
-                <a:spcPts val="1200"/>
-              </a:spcAft>
-              <a:defRPr sz="1800" b="1">
-                <a:solidFill>
-                  <a:srgbClr val="16161A"/>
-                </a:solidFill>
-                <a:latin typeface="Helvetica"/>
-              </a:defRPr>
-            </a:pPr>
-            <a:r>
-              <a:t>3. Strategic Advisory</a:t>
-            </a:r>
-          </a:p>
-          <a:p>
-            <a:pPr>
-              <a:defRPr sz="1300">
-                <a:solidFill>
-                  <a:srgbClr val="454337"/>
-                </a:solidFill>
-                <a:latin typeface="Helvetica"/>
-              </a:defRPr>
-            </a:pPr>
-            <a:r>
-              <a:t>Ongoing technical leadership, architecture reviews, AI readiness roadmap, and engineering team guidance.</a:t>
-            </a:r>
-          </a:p>
-        </p:txBody>
-      </p:sp>
-      <p:sp>
-        <p:nvSpPr>
-          <p:cNvPr id="16" name="Rectangle 15"/>
-          <p:cNvSpPr/>
-          <p:nvPr/>
-        </p:nvSpPr>
-        <p:spPr>
-          <a:xfrm>
-            <a:off x="731520" y="6400800"/>
-            <a:ext cx="10728655" cy="12700"/>
-          </a:xfrm>
-          <a:prstGeom prst="rect">
-            <a:avLst/>
-          </a:prstGeom>
-          <a:solidFill>
-            <a:srgbClr val="C9C3B2"/>
-          </a:solidFill>
-          <a:ln>
-            <a:noFill/>
-          </a:ln>
-        </p:spPr>
-        <p:style>
-          <a:lnRef idx="1">
-            <a:schemeClr val="accent1"/>
-          </a:lnRef>
-          <a:fillRef idx="3">
-            <a:schemeClr val="accent1"/>
-          </a:fillRef>
-          <a:effectRef idx="2">
-            <a:schemeClr val="accent1"/>
-          </a:effectRef>
-          <a:fontRef idx="minor">
-            <a:schemeClr val="lt1"/>
-          </a:fontRef>
-        </p:style>
-        <p:txBody>
-          <a:bodyPr rtlCol="0" anchor="ctr"/>
-          <a:lstStyle/>
-          <a:p>
-            <a:pPr algn="ctr"/>
-          </a:p>
-        </p:txBody>
-      </p:sp>
-      <p:sp>
-        <p:nvSpPr>
-          <p:cNvPr id="17" name="TextBox 16"/>
-          <p:cNvSpPr txBox="1"/>
-          <p:nvPr/>
-        </p:nvSpPr>
-        <p:spPr>
-          <a:xfrm>
-            <a:off x="731520" y="6446520"/>
+            <a:off x="822960" y="6382512"/>
             <a:ext cx="7315200" cy="320040"/>
           </a:xfrm>
           <a:prstGeom prst="rect">
@@ -8548,7 +7109,7 @@
             <a:pPr>
               <a:defRPr sz="1000">
                 <a:solidFill>
-                  <a:srgbClr val="5F5C52"/>
+                  <a:srgbClr val="7C786C"/>
                 </a:solidFill>
                 <a:latin typeface="Courier New"/>
               </a:defRPr>
@@ -8561,13 +7122,13 @@
       </p:sp>
       <p:sp>
         <p:nvSpPr>
-          <p:cNvPr id="18" name="TextBox 17"/>
+          <p:cNvPr id="12" name="TextBox 11"/>
           <p:cNvSpPr txBox="1"/>
           <p:nvPr/>
         </p:nvSpPr>
         <p:spPr>
           <a:xfrm>
-            <a:off x="9631375" y="6446520"/>
+            <a:off x="9539935" y="6382512"/>
             <a:ext cx="1828800" cy="320040"/>
           </a:xfrm>
           <a:prstGeom prst="rect">
@@ -8584,7 +7145,7 @@
             <a:pPr algn="r">
               <a:defRPr sz="1000">
                 <a:solidFill>
-                  <a:srgbClr val="5F5C52"/>
+                  <a:srgbClr val="7C786C"/>
                 </a:solidFill>
                 <a:latin typeface="Courier New"/>
               </a:defRPr>
@@ -8609,7 +7170,7 @@
     <p:bg>
       <p:bgPr>
         <a:solidFill>
-          <a:srgbClr val="121216"/>
+          <a:srgbClr val="FAF9F5"/>
         </a:solidFill>
         <a:effectLst/>
       </p:bgPr>
@@ -8623,24 +7184,96 @@
       <p:grpSpPr/>
       <p:sp>
         <p:nvSpPr>
-          <p:cNvPr id="2" name="Rectangle 1"/>
+          <p:cNvPr id="2" name="TextBox 1"/>
+          <p:cNvSpPr txBox="1"/>
+          <p:nvPr/>
+        </p:nvSpPr>
+        <p:spPr>
+          <a:xfrm>
+            <a:off x="822960" y="548640"/>
+            <a:ext cx="10515600" cy="320040"/>
+          </a:xfrm>
+          <a:prstGeom prst="rect">
+            <a:avLst/>
+          </a:prstGeom>
+          <a:noFill/>
+        </p:spPr>
+        <p:txBody>
+          <a:bodyPr wrap="none" lIns="0" tIns="0" rIns="0" bIns="0">
+            <a:spAutoFit/>
+          </a:bodyPr>
+          <a:lstStyle/>
+          <a:p>
+            <a:pPr>
+              <a:defRPr sz="1100" b="1">
+                <a:solidFill>
+                  <a:srgbClr val="D99B26"/>
+                </a:solidFill>
+                <a:latin typeface="Courier New"/>
+              </a:defRPr>
+            </a:pPr>
+            <a:r>
+              <a:t>NEXT STEPS</a:t>
+            </a:r>
+          </a:p>
+        </p:txBody>
+      </p:sp>
+      <p:sp>
+        <p:nvSpPr>
+          <p:cNvPr id="3" name="TextBox 2"/>
+          <p:cNvSpPr txBox="1"/>
+          <p:nvPr/>
+        </p:nvSpPr>
+        <p:spPr>
+          <a:xfrm>
+            <a:off x="822960" y="868680"/>
+            <a:ext cx="10515600" cy="685800"/>
+          </a:xfrm>
+          <a:prstGeom prst="rect">
+            <a:avLst/>
+          </a:prstGeom>
+          <a:noFill/>
+        </p:spPr>
+        <p:txBody>
+          <a:bodyPr wrap="square" lIns="0" tIns="0" rIns="0" bIns="0">
+            <a:spAutoFit/>
+          </a:bodyPr>
+          <a:lstStyle/>
+          <a:p>
+            <a:pPr>
+              <a:defRPr sz="2600" b="1">
+                <a:solidFill>
+                  <a:srgbClr val="16161A"/>
+                </a:solidFill>
+                <a:latin typeface="Helvetica"/>
+              </a:defRPr>
+            </a:pPr>
+            <a:r>
+              <a:t>How to Make the Introduction</a:t>
+            </a:r>
+          </a:p>
+        </p:txBody>
+      </p:sp>
+      <p:sp>
+        <p:nvSpPr>
+          <p:cNvPr id="4" name="Rounded Rectangle 3"/>
           <p:cNvSpPr/>
           <p:nvPr/>
         </p:nvSpPr>
         <p:spPr>
           <a:xfrm>
-            <a:off x="0" y="0"/>
-            <a:ext cx="12191695" cy="594360"/>
-          </a:xfrm>
-          <a:prstGeom prst="rect">
+            <a:off x="822960" y="1874519"/>
+            <a:ext cx="10545775" cy="3017520"/>
+          </a:xfrm>
+          <a:prstGeom prst="roundRect">
             <a:avLst/>
           </a:prstGeom>
           <a:solidFill>
-            <a:srgbClr val="121216"/>
+            <a:srgbClr val="FFFFFF"/>
           </a:solidFill>
           <a:ln w="12700">
             <a:solidFill>
-              <a:srgbClr val="26262C"/>
+              <a:srgbClr val="EBE7DF"/>
             </a:solidFill>
           </a:ln>
         </p:spPr>
@@ -8668,20 +7301,140 @@
       </p:sp>
       <p:sp>
         <p:nvSpPr>
-          <p:cNvPr id="3" name="Rounded Rectangle 2"/>
+          <p:cNvPr id="5" name="TextBox 4"/>
+          <p:cNvSpPr txBox="1"/>
+          <p:nvPr/>
+        </p:nvSpPr>
+        <p:spPr>
+          <a:xfrm>
+            <a:off x="1097280" y="2057400"/>
+            <a:ext cx="9966960" cy="2651760"/>
+          </a:xfrm>
+          <a:prstGeom prst="rect">
+            <a:avLst/>
+          </a:prstGeom>
+          <a:noFill/>
+        </p:spPr>
+        <p:txBody>
+          <a:bodyPr wrap="square">
+            <a:spAutoFit/>
+          </a:bodyPr>
+          <a:lstStyle/>
+          <a:p>
+            <a:pPr>
+              <a:spcAft>
+                <a:spcPts val="1200"/>
+              </a:spcAft>
+              <a:defRPr sz="1100" b="1">
+                <a:solidFill>
+                  <a:srgbClr val="D99B26"/>
+                </a:solidFill>
+                <a:latin typeface="Courier New"/>
+              </a:defRPr>
+            </a:pPr>
+            <a:r>
+              <a:t>RECOMMENDED EMAIL INTRO TEMPLATE:</a:t>
+            </a:r>
+          </a:p>
+          <a:p>
+            <a:pPr>
+              <a:spcAft>
+                <a:spcPts val="800"/>
+              </a:spcAft>
+              <a:defRPr sz="1500" i="1">
+                <a:solidFill>
+                  <a:srgbClr val="16161A"/>
+                </a:solidFill>
+                <a:latin typeface="Helvetica"/>
+              </a:defRPr>
+            </a:pPr>
+            <a:r>
+              <a:t>“Hi [Name] — I’d like to introduce you to Roberto Guido, Founder &amp; Principal Engineer at Technology Consultants.</a:t>
+            </a:r>
+          </a:p>
+          <a:p>
+            <a:pPr>
+              <a:defRPr sz="1500" i="1">
+                <a:solidFill>
+                  <a:srgbClr val="16161A"/>
+                </a:solidFill>
+                <a:latin typeface="Helvetica"/>
+              </a:defRPr>
+            </a:pPr>
+            <a:r>
+              <a:t>They build software around your people — bridging custom web interfaces with complex backend systems (like Workday Finance) and secure, human-in-the-loop AI automations. Given what you mentioned about [pain point], I thought it’d be great for you two to connect.”</a:t>
+            </a:r>
+          </a:p>
+        </p:txBody>
+      </p:sp>
+      <p:sp>
+        <p:nvSpPr>
+          <p:cNvPr id="6" name="TextBox 5"/>
+          <p:cNvSpPr txBox="1"/>
+          <p:nvPr/>
+        </p:nvSpPr>
+        <p:spPr>
+          <a:xfrm>
+            <a:off x="822960" y="5029200"/>
+            <a:ext cx="10545775" cy="1097280"/>
+          </a:xfrm>
+          <a:prstGeom prst="rect">
+            <a:avLst/>
+          </a:prstGeom>
+          <a:noFill/>
+        </p:spPr>
+        <p:txBody>
+          <a:bodyPr wrap="square">
+            <a:spAutoFit/>
+          </a:bodyPr>
+          <a:lstStyle/>
+          <a:p>
+            <a:pPr>
+              <a:defRPr sz="1800" b="1">
+                <a:solidFill>
+                  <a:srgbClr val="16161A"/>
+                </a:solidFill>
+                <a:latin typeface="Helvetica"/>
+              </a:defRPr>
+            </a:pPr>
+            <a:r>
+              <a:t>Roberto Guido  |  Technology Consultants</a:t>
+            </a:r>
+          </a:p>
+          <a:p>
+            <a:pPr>
+              <a:spcBef>
+                <a:spcPts val="400"/>
+              </a:spcBef>
+              <a:defRPr sz="1300">
+                <a:solidFill>
+                  <a:srgbClr val="2B59D9"/>
+                </a:solidFill>
+                <a:latin typeface="Courier New"/>
+              </a:defRPr>
+            </a:pPr>
+            <a:r>
+              <a:t>Website: technologyconsultants.ventures   ·   San Diego &amp; Tijuana</a:t>
+            </a:r>
+          </a:p>
+        </p:txBody>
+      </p:sp>
+      <p:sp>
+        <p:nvSpPr>
+          <p:cNvPr id="7" name="Rectangle 6"/>
           <p:cNvSpPr/>
           <p:nvPr/>
         </p:nvSpPr>
         <p:spPr>
           <a:xfrm>
-            <a:off x="731520" y="137160"/>
-            <a:ext cx="320040" cy="320040"/>
-          </a:xfrm>
-          <a:prstGeom prst="roundRect">
+            <a:off x="822960" y="6309360"/>
+            <a:ext cx="10545775" cy="12700"/>
+          </a:xfrm>
+          <a:prstGeom prst="rect">
             <a:avLst/>
           </a:prstGeom>
           <a:solidFill>
-            <a:srgbClr val="2B59D9"/>
+            <a:srgbClr val="EBE7DF"/>
           </a:solidFill>
           <a:ln>
             <a:noFill/>
@@ -8711,14 +7464,14 @@
       </p:sp>
       <p:sp>
         <p:nvSpPr>
-          <p:cNvPr id="4" name="TextBox 3"/>
+          <p:cNvPr id="8" name="TextBox 7"/>
           <p:cNvSpPr txBox="1"/>
           <p:nvPr/>
         </p:nvSpPr>
         <p:spPr>
           <a:xfrm>
-            <a:off x="731520" y="128016"/>
-            <a:ext cx="320040" cy="320040"/>
+            <a:off x="822960" y="6382512"/>
+            <a:ext cx="7315200" cy="320040"/>
           </a:xfrm>
           <a:prstGeom prst="rect">
             <a:avLst/>
@@ -8732,29 +7485,29 @@
           <a:lstStyle/>
           <a:p>
             <a:pPr>
-              <a:defRPr sz="1400" b="1">
-                <a:solidFill>
-                  <a:srgbClr val="FFFFFF"/>
+              <a:defRPr sz="1000">
+                <a:solidFill>
+                  <a:srgbClr val="7C786C"/>
                 </a:solidFill>
                 <a:latin typeface="Courier New"/>
               </a:defRPr>
             </a:pPr>
             <a:r>
-              <a:t>›_</a:t>
-            </a:r>
-          </a:p>
-        </p:txBody>
-      </p:sp>
-      <p:sp>
-        <p:nvSpPr>
-          <p:cNvPr id="5" name="TextBox 4"/>
+              <a:t>technologyconsultants.ventures  ·  San Diego · Tijuana</a:t>
+            </a:r>
+          </a:p>
+        </p:txBody>
+      </p:sp>
+      <p:sp>
+        <p:nvSpPr>
+          <p:cNvPr id="9" name="TextBox 8"/>
           <p:cNvSpPr txBox="1"/>
           <p:nvPr/>
         </p:nvSpPr>
         <p:spPr>
           <a:xfrm>
-            <a:off x="1143000" y="146304"/>
-            <a:ext cx="4114800" cy="320040"/>
+            <a:off x="9539935" y="6382512"/>
+            <a:ext cx="1828800" cy="320040"/>
           </a:xfrm>
           <a:prstGeom prst="rect">
             <a:avLst/>
@@ -8767,599 +7520,10 @@
           </a:bodyPr>
           <a:lstStyle/>
           <a:p>
-            <a:pPr>
-              <a:defRPr sz="1300" b="1">
-                <a:solidFill>
-                  <a:srgbClr val="FFFFFF"/>
-                </a:solidFill>
-                <a:latin typeface="Helvetica"/>
-              </a:defRPr>
-            </a:pPr>
-            <a:r>
-              <a:t>TECHNOLOGY CONSULTANTS</a:t>
-            </a:r>
-          </a:p>
-        </p:txBody>
-      </p:sp>
-      <p:sp>
-        <p:nvSpPr>
-          <p:cNvPr id="6" name="TextBox 5"/>
-          <p:cNvSpPr txBox="1"/>
-          <p:nvPr/>
-        </p:nvSpPr>
-        <p:spPr>
-          <a:xfrm>
-            <a:off x="6858000" y="164592"/>
-            <a:ext cx="4572000" cy="320040"/>
-          </a:xfrm>
-          <a:prstGeom prst="rect">
-            <a:avLst/>
-          </a:prstGeom>
-          <a:noFill/>
-        </p:spPr>
-        <p:txBody>
-          <a:bodyPr wrap="none" lIns="0" tIns="0" rIns="0" bIns="0">
-            <a:spAutoFit/>
-          </a:bodyPr>
-          <a:lstStyle/>
-          <a:p>
-            <a:pPr algn="r">
-              <a:defRPr sz="1100">
-                <a:solidFill>
-                  <a:srgbClr val="D99B26"/>
-                </a:solidFill>
-                <a:latin typeface="Courier New"/>
-              </a:defRPr>
-            </a:pPr>
-            <a:r>
-              <a:t>07 / MAKE INTRODUCTION</a:t>
-            </a:r>
-          </a:p>
-        </p:txBody>
-      </p:sp>
-      <p:sp>
-        <p:nvSpPr>
-          <p:cNvPr id="7" name="TextBox 6"/>
-          <p:cNvSpPr txBox="1"/>
-          <p:nvPr/>
-        </p:nvSpPr>
-        <p:spPr>
-          <a:xfrm>
-            <a:off x="731520" y="1005840"/>
-            <a:ext cx="10728655" cy="548640"/>
-          </a:xfrm>
-          <a:prstGeom prst="rect">
-            <a:avLst/>
-          </a:prstGeom>
-          <a:noFill/>
-        </p:spPr>
-        <p:txBody>
-          <a:bodyPr wrap="none">
-            <a:spAutoFit/>
-          </a:bodyPr>
-          <a:lstStyle/>
-          <a:p>
-            <a:pPr>
-              <a:defRPr sz="2800" b="1">
-                <a:solidFill>
-                  <a:srgbClr val="FFFFFF"/>
-                </a:solidFill>
-                <a:latin typeface="Helvetica"/>
-              </a:defRPr>
-            </a:pPr>
-            <a:r>
-              <a:t>How to Make the Introduction</a:t>
-            </a:r>
-          </a:p>
-        </p:txBody>
-      </p:sp>
-      <p:sp>
-        <p:nvSpPr>
-          <p:cNvPr id="8" name="Rounded Rectangle 7"/>
-          <p:cNvSpPr/>
-          <p:nvPr/>
-        </p:nvSpPr>
-        <p:spPr>
-          <a:xfrm>
-            <a:off x="731520" y="1645920"/>
-            <a:ext cx="10728655" cy="3291840"/>
-          </a:xfrm>
-          <a:prstGeom prst="roundRect">
-            <a:avLst/>
-          </a:prstGeom>
-          <a:solidFill>
-            <a:srgbClr val="121216"/>
-          </a:solidFill>
-          <a:ln w="12700">
-            <a:solidFill>
-              <a:srgbClr val="26262C"/>
-            </a:solidFill>
-          </a:ln>
-        </p:spPr>
-        <p:style>
-          <a:lnRef idx="1">
-            <a:schemeClr val="accent1"/>
-          </a:lnRef>
-          <a:fillRef idx="3">
-            <a:schemeClr val="accent1"/>
-          </a:fillRef>
-          <a:effectRef idx="2">
-            <a:schemeClr val="accent1"/>
-          </a:effectRef>
-          <a:fontRef idx="minor">
-            <a:schemeClr val="lt1"/>
-          </a:fontRef>
-        </p:style>
-        <p:txBody>
-          <a:bodyPr rtlCol="0" anchor="ctr"/>
-          <a:lstStyle/>
-          <a:p>
-            <a:pPr algn="ctr"/>
-          </a:p>
-        </p:txBody>
-      </p:sp>
-      <p:sp>
-        <p:nvSpPr>
-          <p:cNvPr id="9" name="Rectangle 8"/>
-          <p:cNvSpPr/>
-          <p:nvPr/>
-        </p:nvSpPr>
-        <p:spPr>
-          <a:xfrm>
-            <a:off x="731520" y="1645920"/>
-            <a:ext cx="10728655" cy="365760"/>
-          </a:xfrm>
-          <a:prstGeom prst="rect">
-            <a:avLst/>
-          </a:prstGeom>
-          <a:solidFill>
-            <a:srgbClr val="1A1A20"/>
-          </a:solidFill>
-          <a:ln>
-            <a:noFill/>
-          </a:ln>
-        </p:spPr>
-        <p:style>
-          <a:lnRef idx="1">
-            <a:schemeClr val="accent1"/>
-          </a:lnRef>
-          <a:fillRef idx="3">
-            <a:schemeClr val="accent1"/>
-          </a:fillRef>
-          <a:effectRef idx="2">
-            <a:schemeClr val="accent1"/>
-          </a:effectRef>
-          <a:fontRef idx="minor">
-            <a:schemeClr val="lt1"/>
-          </a:fontRef>
-        </p:style>
-        <p:txBody>
-          <a:bodyPr rtlCol="0" anchor="ctr"/>
-          <a:lstStyle/>
-          <a:p>
-            <a:pPr algn="ctr"/>
-          </a:p>
-        </p:txBody>
-      </p:sp>
-      <p:sp>
-        <p:nvSpPr>
-          <p:cNvPr id="10" name="Oval 9"/>
-          <p:cNvSpPr/>
-          <p:nvPr/>
-        </p:nvSpPr>
-        <p:spPr>
-          <a:xfrm>
-            <a:off x="868680" y="1755648"/>
-            <a:ext cx="128016" cy="128016"/>
-          </a:xfrm>
-          <a:prstGeom prst="ellipse">
-            <a:avLst/>
-          </a:prstGeom>
-          <a:solidFill>
-            <a:srgbClr val="EF4444"/>
-          </a:solidFill>
-          <a:ln>
-            <a:noFill/>
-          </a:ln>
-        </p:spPr>
-        <p:style>
-          <a:lnRef idx="1">
-            <a:schemeClr val="accent1"/>
-          </a:lnRef>
-          <a:fillRef idx="3">
-            <a:schemeClr val="accent1"/>
-          </a:fillRef>
-          <a:effectRef idx="2">
-            <a:schemeClr val="accent1"/>
-          </a:effectRef>
-          <a:fontRef idx="minor">
-            <a:schemeClr val="lt1"/>
-          </a:fontRef>
-        </p:style>
-        <p:txBody>
-          <a:bodyPr rtlCol="0" anchor="ctr"/>
-          <a:lstStyle/>
-          <a:p>
-            <a:pPr algn="ctr"/>
-          </a:p>
-        </p:txBody>
-      </p:sp>
-      <p:sp>
-        <p:nvSpPr>
-          <p:cNvPr id="11" name="Oval 10"/>
-          <p:cNvSpPr/>
-          <p:nvPr/>
-        </p:nvSpPr>
-        <p:spPr>
-          <a:xfrm>
-            <a:off x="1051560" y="1755648"/>
-            <a:ext cx="128016" cy="128016"/>
-          </a:xfrm>
-          <a:prstGeom prst="ellipse">
-            <a:avLst/>
-          </a:prstGeom>
-          <a:solidFill>
-            <a:srgbClr val="F59E0B"/>
-          </a:solidFill>
-          <a:ln>
-            <a:noFill/>
-          </a:ln>
-        </p:spPr>
-        <p:style>
-          <a:lnRef idx="1">
-            <a:schemeClr val="accent1"/>
-          </a:lnRef>
-          <a:fillRef idx="3">
-            <a:schemeClr val="accent1"/>
-          </a:fillRef>
-          <a:effectRef idx="2">
-            <a:schemeClr val="accent1"/>
-          </a:effectRef>
-          <a:fontRef idx="minor">
-            <a:schemeClr val="lt1"/>
-          </a:fontRef>
-        </p:style>
-        <p:txBody>
-          <a:bodyPr rtlCol="0" anchor="ctr"/>
-          <a:lstStyle/>
-          <a:p>
-            <a:pPr algn="ctr"/>
-          </a:p>
-        </p:txBody>
-      </p:sp>
-      <p:sp>
-        <p:nvSpPr>
-          <p:cNvPr id="12" name="Oval 11"/>
-          <p:cNvSpPr/>
-          <p:nvPr/>
-        </p:nvSpPr>
-        <p:spPr>
-          <a:xfrm>
-            <a:off x="1234440" y="1755648"/>
-            <a:ext cx="128016" cy="128016"/>
-          </a:xfrm>
-          <a:prstGeom prst="ellipse">
-            <a:avLst/>
-          </a:prstGeom>
-          <a:solidFill>
-            <a:srgbClr val="10B981"/>
-          </a:solidFill>
-          <a:ln>
-            <a:noFill/>
-          </a:ln>
-        </p:spPr>
-        <p:style>
-          <a:lnRef idx="1">
-            <a:schemeClr val="accent1"/>
-          </a:lnRef>
-          <a:fillRef idx="3">
-            <a:schemeClr val="accent1"/>
-          </a:fillRef>
-          <a:effectRef idx="2">
-            <a:schemeClr val="accent1"/>
-          </a:effectRef>
-          <a:fontRef idx="minor">
-            <a:schemeClr val="lt1"/>
-          </a:fontRef>
-        </p:style>
-        <p:txBody>
-          <a:bodyPr rtlCol="0" anchor="ctr"/>
-          <a:lstStyle/>
-          <a:p>
-            <a:pPr algn="ctr"/>
-          </a:p>
-        </p:txBody>
-      </p:sp>
-      <p:sp>
-        <p:nvSpPr>
-          <p:cNvPr id="13" name="TextBox 12"/>
-          <p:cNvSpPr txBox="1"/>
-          <p:nvPr/>
-        </p:nvSpPr>
-        <p:spPr>
-          <a:xfrm>
-            <a:off x="1463040" y="1719072"/>
-            <a:ext cx="9814255" cy="274320"/>
-          </a:xfrm>
-          <a:prstGeom prst="rect">
-            <a:avLst/>
-          </a:prstGeom>
-          <a:noFill/>
-        </p:spPr>
-        <p:txBody>
-          <a:bodyPr wrap="none" lIns="0" tIns="0" rIns="0" bIns="0">
-            <a:spAutoFit/>
-          </a:bodyPr>
-          <a:lstStyle/>
-          <a:p>
-            <a:pPr>
-              <a:defRPr sz="1000">
-                <a:solidFill>
-                  <a:srgbClr val="9CA3AF"/>
-                </a:solidFill>
-                <a:latin typeface="Courier New"/>
-              </a:defRPr>
-            </a:pPr>
-            <a:r>
-              <a:t>bash — email_intro_template.txt</a:t>
-            </a:r>
-          </a:p>
-        </p:txBody>
-      </p:sp>
-      <p:sp>
-        <p:nvSpPr>
-          <p:cNvPr id="14" name="TextBox 13"/>
-          <p:cNvSpPr txBox="1"/>
-          <p:nvPr/>
-        </p:nvSpPr>
-        <p:spPr>
-          <a:xfrm>
-            <a:off x="1005840" y="2148840"/>
-            <a:ext cx="10180015" cy="2651760"/>
-          </a:xfrm>
-          <a:prstGeom prst="rect">
-            <a:avLst/>
-          </a:prstGeom>
-          <a:noFill/>
-        </p:spPr>
-        <p:txBody>
-          <a:bodyPr wrap="square">
-            <a:spAutoFit/>
-          </a:bodyPr>
-          <a:lstStyle/>
-          <a:p>
-            <a:pPr>
-              <a:spcAft>
-                <a:spcPts val="600"/>
-              </a:spcAft>
-              <a:defRPr sz="1100">
-                <a:solidFill>
-                  <a:srgbClr val="E5E7EB"/>
-                </a:solidFill>
-                <a:latin typeface="Courier New"/>
-              </a:defRPr>
-            </a:pPr>
-            <a:r>
-              <a:t>RECOMMENDED EMAIL INTRO TEMPLATE:</a:t>
-            </a:r>
-          </a:p>
-          <a:p>
-            <a:pPr>
-              <a:spcAft>
-                <a:spcPts val="600"/>
-              </a:spcAft>
-              <a:defRPr sz="1100">
-                <a:solidFill>
-                  <a:srgbClr val="E5E7EB"/>
-                </a:solidFill>
-                <a:latin typeface="Courier New"/>
-              </a:defRPr>
-            </a:pPr>
-          </a:p>
-          <a:p>
-            <a:pPr>
-              <a:spcAft>
-                <a:spcPts val="600"/>
-              </a:spcAft>
-              <a:defRPr sz="1100">
-                <a:solidFill>
-                  <a:srgbClr val="E5E7EB"/>
-                </a:solidFill>
-                <a:latin typeface="Courier New"/>
-              </a:defRPr>
-            </a:pPr>
-            <a:r>
-              <a:t>“Hi [Name] — I’d like to introduce you to Roberto Guido, Founder &amp; Principal Engineer at Technology Consultants.</a:t>
-            </a:r>
-          </a:p>
-          <a:p>
-            <a:pPr>
-              <a:spcAft>
-                <a:spcPts val="600"/>
-              </a:spcAft>
-              <a:defRPr sz="1100">
-                <a:solidFill>
-                  <a:srgbClr val="E5E7EB"/>
-                </a:solidFill>
-                <a:latin typeface="Courier New"/>
-              </a:defRPr>
-            </a:pPr>
-          </a:p>
-          <a:p>
-            <a:pPr>
-              <a:spcAft>
-                <a:spcPts val="600"/>
-              </a:spcAft>
-              <a:defRPr sz="1100">
-                <a:solidFill>
-                  <a:srgbClr val="E5E7EB"/>
-                </a:solidFill>
-                <a:latin typeface="Courier New"/>
-              </a:defRPr>
-            </a:pPr>
-            <a:r>
-              <a:t>They specialize in bridging custom web interfaces with complex backend systems (like Workday Finance) and building secure, human-in-the-loop AI automations. Given what you mentioned about [pain point], I thought it’d be great for you two to connect.”</a:t>
-            </a:r>
-          </a:p>
-        </p:txBody>
-      </p:sp>
-      <p:sp>
-        <p:nvSpPr>
-          <p:cNvPr id="15" name="TextBox 14"/>
-          <p:cNvSpPr txBox="1"/>
-          <p:nvPr/>
-        </p:nvSpPr>
-        <p:spPr>
-          <a:xfrm>
-            <a:off x="731520" y="5120640"/>
-            <a:ext cx="10728655" cy="1097280"/>
-          </a:xfrm>
-          <a:prstGeom prst="rect">
-            <a:avLst/>
-          </a:prstGeom>
-          <a:noFill/>
-        </p:spPr>
-        <p:txBody>
-          <a:bodyPr wrap="square">
-            <a:spAutoFit/>
-          </a:bodyPr>
-          <a:lstStyle/>
-          <a:p>
-            <a:pPr>
-              <a:defRPr sz="1800" b="1">
-                <a:solidFill>
-                  <a:srgbClr val="FFFFFF"/>
-                </a:solidFill>
-                <a:latin typeface="Helvetica"/>
-              </a:defRPr>
-            </a:pPr>
-            <a:r>
-              <a:t>Roberto Guido  |  Technology Consultants</a:t>
-            </a:r>
-          </a:p>
-          <a:p>
-            <a:pPr>
-              <a:spcBef>
-                <a:spcPts val="400"/>
-              </a:spcBef>
-              <a:defRPr sz="1300">
-                <a:solidFill>
-                  <a:srgbClr val="D99B26"/>
-                </a:solidFill>
-                <a:latin typeface="Courier New"/>
-              </a:defRPr>
-            </a:pPr>
-            <a:r>
-              <a:t>Website: technologyconsultants.ventures   ·   San Diego &amp; Tijuana</a:t>
-            </a:r>
-          </a:p>
-        </p:txBody>
-      </p:sp>
-      <p:sp>
-        <p:nvSpPr>
-          <p:cNvPr id="16" name="Rectangle 15"/>
-          <p:cNvSpPr/>
-          <p:nvPr/>
-        </p:nvSpPr>
-        <p:spPr>
-          <a:xfrm>
-            <a:off x="731520" y="6400800"/>
-            <a:ext cx="10728655" cy="12700"/>
-          </a:xfrm>
-          <a:prstGeom prst="rect">
-            <a:avLst/>
-          </a:prstGeom>
-          <a:solidFill>
-            <a:srgbClr val="C9C3B2"/>
-          </a:solidFill>
-          <a:ln>
-            <a:noFill/>
-          </a:ln>
-        </p:spPr>
-        <p:style>
-          <a:lnRef idx="1">
-            <a:schemeClr val="accent1"/>
-          </a:lnRef>
-          <a:fillRef idx="3">
-            <a:schemeClr val="accent1"/>
-          </a:fillRef>
-          <a:effectRef idx="2">
-            <a:schemeClr val="accent1"/>
-          </a:effectRef>
-          <a:fontRef idx="minor">
-            <a:schemeClr val="lt1"/>
-          </a:fontRef>
-        </p:style>
-        <p:txBody>
-          <a:bodyPr rtlCol="0" anchor="ctr"/>
-          <a:lstStyle/>
-          <a:p>
-            <a:pPr algn="ctr"/>
-          </a:p>
-        </p:txBody>
-      </p:sp>
-      <p:sp>
-        <p:nvSpPr>
-          <p:cNvPr id="17" name="TextBox 16"/>
-          <p:cNvSpPr txBox="1"/>
-          <p:nvPr/>
-        </p:nvSpPr>
-        <p:spPr>
-          <a:xfrm>
-            <a:off x="731520" y="6446520"/>
-            <a:ext cx="7315200" cy="320040"/>
-          </a:xfrm>
-          <a:prstGeom prst="rect">
-            <a:avLst/>
-          </a:prstGeom>
-          <a:noFill/>
-        </p:spPr>
-        <p:txBody>
-          <a:bodyPr wrap="none" lIns="0" tIns="0" rIns="0" bIns="0">
-            <a:spAutoFit/>
-          </a:bodyPr>
-          <a:lstStyle/>
-          <a:p>
-            <a:pPr>
-              <a:defRPr sz="1000">
-                <a:solidFill>
-                  <a:srgbClr val="5F5C52"/>
-                </a:solidFill>
-                <a:latin typeface="Courier New"/>
-              </a:defRPr>
-            </a:pPr>
-            <a:r>
-              <a:t>technologyconsultants.ventures  ·  San Diego · Tijuana</a:t>
-            </a:r>
-          </a:p>
-        </p:txBody>
-      </p:sp>
-      <p:sp>
-        <p:nvSpPr>
-          <p:cNvPr id="18" name="TextBox 17"/>
-          <p:cNvSpPr txBox="1"/>
-          <p:nvPr/>
-        </p:nvSpPr>
-        <p:spPr>
-          <a:xfrm>
-            <a:off x="9631375" y="6446520"/>
-            <a:ext cx="1828800" cy="320040"/>
-          </a:xfrm>
-          <a:prstGeom prst="rect">
-            <a:avLst/>
-          </a:prstGeom>
-          <a:noFill/>
-        </p:spPr>
-        <p:txBody>
-          <a:bodyPr wrap="none" lIns="0" tIns="0" rIns="0" bIns="0">
-            <a:spAutoFit/>
-          </a:bodyPr>
-          <a:lstStyle/>
-          <a:p>
             <a:pPr algn="r">
               <a:defRPr sz="1000">
                 <a:solidFill>
-                  <a:srgbClr val="5F5C52"/>
+                  <a:srgbClr val="7C786C"/>
                 </a:solidFill>
                 <a:latin typeface="Courier New"/>
               </a:defRPr>

--- a/Technology_Consultants_Who_to_Send_My_Way.pptx
+++ b/Technology_Consultants_Who_to_Send_My_Way.pptx
@@ -3091,7 +3091,7 @@
     <p:bg>
       <p:bgPr>
         <a:solidFill>
-          <a:srgbClr val="FAF9F5"/>
+          <a:srgbClr val="FBFAF5"/>
         </a:solidFill>
         <a:effectLst/>
       </p:bgPr>
@@ -3105,14 +3105,361 @@
       <p:grpSpPr/>
       <p:sp>
         <p:nvSpPr>
-          <p:cNvPr id="2" name="Rounded Rectangle 1"/>
+          <p:cNvPr id="2" name="Rectangle 1"/>
           <p:cNvSpPr/>
           <p:nvPr/>
         </p:nvSpPr>
         <p:spPr>
           <a:xfrm>
-            <a:off x="822960" y="640080"/>
-            <a:ext cx="5303520" cy="329184"/>
+            <a:off x="0" y="0"/>
+            <a:ext cx="12191695" cy="594360"/>
+          </a:xfrm>
+          <a:prstGeom prst="rect">
+            <a:avLst/>
+          </a:prstGeom>
+          <a:solidFill>
+            <a:srgbClr val="121216"/>
+          </a:solidFill>
+          <a:ln w="12700">
+            <a:solidFill>
+              <a:srgbClr val="26262C"/>
+            </a:solidFill>
+          </a:ln>
+        </p:spPr>
+        <p:style>
+          <a:lnRef idx="1">
+            <a:schemeClr val="accent1"/>
+          </a:lnRef>
+          <a:fillRef idx="3">
+            <a:schemeClr val="accent1"/>
+          </a:fillRef>
+          <a:effectRef idx="2">
+            <a:schemeClr val="accent1"/>
+          </a:effectRef>
+          <a:fontRef idx="minor">
+            <a:schemeClr val="lt1"/>
+          </a:fontRef>
+        </p:style>
+        <p:txBody>
+          <a:bodyPr rtlCol="0" anchor="ctr"/>
+          <a:lstStyle/>
+          <a:p>
+            <a:pPr algn="ctr"/>
+          </a:p>
+        </p:txBody>
+      </p:sp>
+      <p:sp>
+        <p:nvSpPr>
+          <p:cNvPr id="3" name="Rounded Rectangle 2"/>
+          <p:cNvSpPr/>
+          <p:nvPr/>
+        </p:nvSpPr>
+        <p:spPr>
+          <a:xfrm>
+            <a:off x="731520" y="146304"/>
+            <a:ext cx="310896" cy="310896"/>
+          </a:xfrm>
+          <a:prstGeom prst="roundRect">
+            <a:avLst/>
+          </a:prstGeom>
+          <a:solidFill>
+            <a:srgbClr val="2B59D9"/>
+          </a:solidFill>
+          <a:ln>
+            <a:noFill/>
+          </a:ln>
+        </p:spPr>
+        <p:style>
+          <a:lnRef idx="1">
+            <a:schemeClr val="accent1"/>
+          </a:lnRef>
+          <a:fillRef idx="3">
+            <a:schemeClr val="accent1"/>
+          </a:fillRef>
+          <a:effectRef idx="2">
+            <a:schemeClr val="accent1"/>
+          </a:effectRef>
+          <a:fontRef idx="minor">
+            <a:schemeClr val="lt1"/>
+          </a:fontRef>
+        </p:style>
+        <p:txBody>
+          <a:bodyPr rtlCol="0" anchor="ctr"/>
+          <a:lstStyle/>
+          <a:p>
+            <a:pPr algn="ctr"/>
+          </a:p>
+        </p:txBody>
+      </p:sp>
+      <p:sp>
+        <p:nvSpPr>
+          <p:cNvPr id="4" name="TextBox 3"/>
+          <p:cNvSpPr txBox="1"/>
+          <p:nvPr/>
+        </p:nvSpPr>
+        <p:spPr>
+          <a:xfrm>
+            <a:off x="731520" y="128016"/>
+            <a:ext cx="310896" cy="310896"/>
+          </a:xfrm>
+          <a:prstGeom prst="rect">
+            <a:avLst/>
+          </a:prstGeom>
+          <a:noFill/>
+        </p:spPr>
+        <p:txBody>
+          <a:bodyPr wrap="none" lIns="0" tIns="0" rIns="0" bIns="0">
+            <a:spAutoFit/>
+          </a:bodyPr>
+          <a:lstStyle/>
+          <a:p>
+            <a:pPr algn="ctr">
+              <a:defRPr sz="1600" b="1">
+                <a:solidFill>
+                  <a:srgbClr val="FFFFFF"/>
+                </a:solidFill>
+                <a:latin typeface="Helvetica Neue"/>
+              </a:defRPr>
+            </a:pPr>
+            <a:r>
+              <a:t>›</a:t>
+            </a:r>
+          </a:p>
+        </p:txBody>
+      </p:sp>
+      <p:sp>
+        <p:nvSpPr>
+          <p:cNvPr id="5" name="TextBox 4"/>
+          <p:cNvSpPr txBox="1"/>
+          <p:nvPr/>
+        </p:nvSpPr>
+        <p:spPr>
+          <a:xfrm>
+            <a:off x="1143000" y="164592"/>
+            <a:ext cx="3200400" cy="292608"/>
+          </a:xfrm>
+          <a:prstGeom prst="rect">
+            <a:avLst/>
+          </a:prstGeom>
+          <a:noFill/>
+        </p:spPr>
+        <p:txBody>
+          <a:bodyPr wrap="none" lIns="0" tIns="0" rIns="0" bIns="0">
+            <a:spAutoFit/>
+          </a:bodyPr>
+          <a:lstStyle/>
+          <a:p>
+            <a:pPr>
+              <a:defRPr sz="1300" b="1">
+                <a:solidFill>
+                  <a:srgbClr val="FFFFFF"/>
+                </a:solidFill>
+                <a:latin typeface="Helvetica Neue"/>
+              </a:defRPr>
+            </a:pPr>
+            <a:r>
+              <a:t>Technology Consultants</a:t>
+            </a:r>
+          </a:p>
+        </p:txBody>
+      </p:sp>
+      <p:sp>
+        <p:nvSpPr>
+          <p:cNvPr id="6" name="TextBox 5"/>
+          <p:cNvSpPr txBox="1"/>
+          <p:nvPr/>
+        </p:nvSpPr>
+        <p:spPr>
+          <a:xfrm>
+            <a:off x="5029200" y="182880"/>
+            <a:ext cx="4754880" cy="292608"/>
+          </a:xfrm>
+          <a:prstGeom prst="rect">
+            <a:avLst/>
+          </a:prstGeom>
+          <a:noFill/>
+        </p:spPr>
+        <p:txBody>
+          <a:bodyPr wrap="none" lIns="0" tIns="0" rIns="0" bIns="0">
+            <a:spAutoFit/>
+          </a:bodyPr>
+          <a:lstStyle/>
+          <a:p>
+            <a:pPr algn="r">
+              <a:defRPr sz="1000">
+                <a:solidFill>
+                  <a:srgbClr val="C8CDD7"/>
+                </a:solidFill>
+                <a:latin typeface="Helvetica Neue"/>
+              </a:defRPr>
+            </a:pPr>
+            <a:r>
+              <a:t>Services   ·   Work   ·   How we work   ·   About   ·   FAQ</a:t>
+            </a:r>
+          </a:p>
+        </p:txBody>
+      </p:sp>
+      <p:sp>
+        <p:nvSpPr>
+          <p:cNvPr id="7" name="Rounded Rectangle 6"/>
+          <p:cNvSpPr/>
+          <p:nvPr/>
+        </p:nvSpPr>
+        <p:spPr>
+          <a:xfrm>
+            <a:off x="10058400" y="128016"/>
+            <a:ext cx="1371600" cy="329184"/>
+          </a:xfrm>
+          <a:prstGeom prst="roundRect">
+            <a:avLst/>
+          </a:prstGeom>
+          <a:solidFill>
+            <a:srgbClr val="FFFFFF"/>
+          </a:solidFill>
+          <a:ln>
+            <a:noFill/>
+          </a:ln>
+        </p:spPr>
+        <p:style>
+          <a:lnRef idx="1">
+            <a:schemeClr val="accent1"/>
+          </a:lnRef>
+          <a:fillRef idx="3">
+            <a:schemeClr val="accent1"/>
+          </a:fillRef>
+          <a:effectRef idx="2">
+            <a:schemeClr val="accent1"/>
+          </a:effectRef>
+          <a:fontRef idx="minor">
+            <a:schemeClr val="lt1"/>
+          </a:fontRef>
+        </p:style>
+        <p:txBody>
+          <a:bodyPr rtlCol="0" anchor="ctr"/>
+          <a:lstStyle/>
+          <a:p>
+            <a:pPr algn="ctr"/>
+          </a:p>
+        </p:txBody>
+      </p:sp>
+      <p:sp>
+        <p:nvSpPr>
+          <p:cNvPr id="8" name="TextBox 7"/>
+          <p:cNvSpPr txBox="1"/>
+          <p:nvPr/>
+        </p:nvSpPr>
+        <p:spPr>
+          <a:xfrm>
+            <a:off x="10058400" y="164592"/>
+            <a:ext cx="1371600" cy="274320"/>
+          </a:xfrm>
+          <a:prstGeom prst="rect">
+            <a:avLst/>
+          </a:prstGeom>
+          <a:noFill/>
+        </p:spPr>
+        <p:txBody>
+          <a:bodyPr wrap="none" lIns="0" tIns="0" rIns="0" bIns="0">
+            <a:spAutoFit/>
+          </a:bodyPr>
+          <a:lstStyle/>
+          <a:p>
+            <a:pPr algn="ctr">
+              <a:defRPr sz="1000" b="1">
+                <a:solidFill>
+                  <a:srgbClr val="16161A"/>
+                </a:solidFill>
+                <a:latin typeface="Helvetica Neue"/>
+              </a:defRPr>
+            </a:pPr>
+            <a:r>
+              <a:t>Book a call</a:t>
+            </a:r>
+          </a:p>
+        </p:txBody>
+      </p:sp>
+      <p:sp>
+        <p:nvSpPr>
+          <p:cNvPr id="9" name="TextBox 8"/>
+          <p:cNvSpPr txBox="1"/>
+          <p:nvPr/>
+        </p:nvSpPr>
+        <p:spPr>
+          <a:xfrm>
+            <a:off x="731520" y="822960"/>
+            <a:ext cx="10728655" cy="274320"/>
+          </a:xfrm>
+          <a:prstGeom prst="rect">
+            <a:avLst/>
+          </a:prstGeom>
+          <a:noFill/>
+        </p:spPr>
+        <p:txBody>
+          <a:bodyPr wrap="none" lIns="0" tIns="0" rIns="0" bIns="0">
+            <a:spAutoFit/>
+          </a:bodyPr>
+          <a:lstStyle/>
+          <a:p>
+            <a:pPr>
+              <a:defRPr sz="1000" b="1">
+                <a:solidFill>
+                  <a:srgbClr val="2B59D9"/>
+                </a:solidFill>
+                <a:latin typeface="Helvetica Neue"/>
+              </a:defRPr>
+            </a:pPr>
+            <a:r>
+              <a:t>WEBSITES  ·  AUTOMATION  ·  AI AGENTS    |    ● Booking projects · Q3 2026</a:t>
+            </a:r>
+          </a:p>
+        </p:txBody>
+      </p:sp>
+      <p:sp>
+        <p:nvSpPr>
+          <p:cNvPr id="10" name="TextBox 9"/>
+          <p:cNvSpPr txBox="1"/>
+          <p:nvPr/>
+        </p:nvSpPr>
+        <p:spPr>
+          <a:xfrm>
+            <a:off x="731520" y="1143000"/>
+            <a:ext cx="10728655" cy="1371600"/>
+          </a:xfrm>
+          <a:prstGeom prst="rect">
+            <a:avLst/>
+          </a:prstGeom>
+          <a:noFill/>
+        </p:spPr>
+        <p:txBody>
+          <a:bodyPr wrap="square" lIns="0" tIns="0" rIns="0" bIns="0">
+            <a:spAutoFit/>
+          </a:bodyPr>
+          <a:lstStyle/>
+          <a:p>
+            <a:pPr>
+              <a:defRPr sz="3600" b="1">
+                <a:solidFill>
+                  <a:srgbClr val="16161A"/>
+                </a:solidFill>
+                <a:latin typeface="Helvetica Neue"/>
+              </a:defRPr>
+            </a:pPr>
+            <a:r>
+              <a:t>We build technology around your people — not instead of them.</a:t>
+            </a:r>
+          </a:p>
+        </p:txBody>
+      </p:sp>
+      <p:sp>
+        <p:nvSpPr>
+          <p:cNvPr id="11" name="Rounded Rectangle 10"/>
+          <p:cNvSpPr/>
+          <p:nvPr/>
+        </p:nvSpPr>
+        <p:spPr>
+          <a:xfrm>
+            <a:off x="731520" y="2606040"/>
+            <a:ext cx="10728655" cy="1463040"/>
           </a:xfrm>
           <a:prstGeom prst="roundRect">
             <a:avLst/>
@@ -3122,7 +3469,7 @@
           </a:solidFill>
           <a:ln w="12700">
             <a:solidFill>
-              <a:srgbClr val="D6D0C2"/>
+              <a:srgbClr val="E2DDD0"/>
             </a:solidFill>
           </a:ln>
         </p:spPr>
@@ -3150,50 +3497,14 @@
       </p:sp>
       <p:sp>
         <p:nvSpPr>
-          <p:cNvPr id="3" name="TextBox 2"/>
+          <p:cNvPr id="12" name="TextBox 11"/>
           <p:cNvSpPr txBox="1"/>
           <p:nvPr/>
         </p:nvSpPr>
         <p:spPr>
           <a:xfrm>
-            <a:off x="914400" y="704088"/>
-            <a:ext cx="5120640" cy="274320"/>
-          </a:xfrm>
-          <a:prstGeom prst="rect">
-            <a:avLst/>
-          </a:prstGeom>
-          <a:noFill/>
-        </p:spPr>
-        <p:txBody>
-          <a:bodyPr wrap="none" lIns="0" tIns="0" rIns="0" bIns="0">
-            <a:spAutoFit/>
-          </a:bodyPr>
-          <a:lstStyle/>
-          <a:p>
-            <a:pPr>
-              <a:defRPr sz="1000" b="1">
-                <a:solidFill>
-                  <a:srgbClr val="2B59D9"/>
-                </a:solidFill>
-                <a:latin typeface="Courier New"/>
-              </a:defRPr>
-            </a:pPr>
-            <a:r>
-              <a:t>WEBSITES  ·  AUTOMATION  ·  AI AGENTS</a:t>
-            </a:r>
-          </a:p>
-        </p:txBody>
-      </p:sp>
-      <p:sp>
-        <p:nvSpPr>
-          <p:cNvPr id="4" name="TextBox 3"/>
-          <p:cNvSpPr txBox="1"/>
-          <p:nvPr/>
-        </p:nvSpPr>
-        <p:spPr>
-          <a:xfrm>
-            <a:off x="822960" y="1234440"/>
-            <a:ext cx="10515600" cy="2926080"/>
+            <a:off x="1005840" y="2743200"/>
+            <a:ext cx="10180015" cy="1188720"/>
           </a:xfrm>
           <a:prstGeom prst="rect">
             <a:avLst/>
@@ -3208,58 +3519,53 @@
           <a:p>
             <a:pPr>
               <a:spcAft>
-                <a:spcPts val="800"/>
+                <a:spcPts val="600"/>
               </a:spcAft>
-              <a:defRPr sz="2000" b="1">
+              <a:defRPr sz="1100" b="1">
                 <a:solidFill>
                   <a:srgbClr val="D99B26"/>
                 </a:solidFill>
-                <a:latin typeface="Helvetica"/>
-              </a:defRPr>
-            </a:pPr>
-            <a:r>
-              <a:t>Technology Consultants</a:t>
-            </a:r>
-          </a:p>
-          <a:p>
-            <a:pPr>
-              <a:spcAft>
-                <a:spcPts val="1400"/>
-              </a:spcAft>
-              <a:defRPr sz="4400" b="1">
-                <a:solidFill>
-                  <a:srgbClr val="16161A"/>
-                </a:solidFill>
-                <a:latin typeface="Helvetica"/>
-              </a:defRPr>
-            </a:pPr>
-            <a:r>
-              <a:t>Who to Send My Way</a:t>
-            </a:r>
-          </a:p>
-        </p:txBody>
-      </p:sp>
-      <p:sp>
-        <p:nvSpPr>
-          <p:cNvPr id="5" name="Rounded Rectangle 4"/>
+                <a:latin typeface="Helvetica Neue"/>
+              </a:defRPr>
+            </a:pPr>
+            <a:r>
+              <a:t>WHO TO SEND MY WAY  —  PARTNER REFERRAL GUIDE</a:t>
+            </a:r>
+          </a:p>
+          <a:p>
+            <a:pPr>
+              <a:defRPr sz="1400">
+                <a:solidFill>
+                  <a:srgbClr val="454337"/>
+                </a:solidFill>
+                <a:latin typeface="Helvetica Neue"/>
+              </a:defRPr>
+            </a:pPr>
+            <a:r>
+              <a:t>We build software that takes repetitive work off your team’s plate — from automated web applications to AI agents with human-in-the-loop oversight wherever money, trust, or judgment is on the line.</a:t>
+            </a:r>
+          </a:p>
+        </p:txBody>
+      </p:sp>
+      <p:sp>
+        <p:nvSpPr>
+          <p:cNvPr id="13" name="Rounded Rectangle 12"/>
           <p:cNvSpPr/>
           <p:nvPr/>
         </p:nvSpPr>
         <p:spPr>
           <a:xfrm>
-            <a:off x="822960" y="2926080"/>
-            <a:ext cx="10545775" cy="1234440"/>
+            <a:off x="731520" y="4206240"/>
+            <a:ext cx="2560320" cy="438912"/>
           </a:xfrm>
           <a:prstGeom prst="roundRect">
             <a:avLst/>
           </a:prstGeom>
           <a:solidFill>
-            <a:srgbClr val="FFFFFF"/>
+            <a:srgbClr val="16161A"/>
           </a:solidFill>
-          <a:ln w="12700">
-            <a:solidFill>
-              <a:srgbClr val="EBE7DF"/>
-            </a:solidFill>
+          <a:ln>
+            <a:noFill/>
           </a:ln>
         </p:spPr>
         <p:style>
@@ -3286,14 +3592,14 @@
       </p:sp>
       <p:sp>
         <p:nvSpPr>
-          <p:cNvPr id="6" name="TextBox 5"/>
+          <p:cNvPr id="14" name="TextBox 13"/>
           <p:cNvSpPr txBox="1"/>
           <p:nvPr/>
         </p:nvSpPr>
         <p:spPr>
           <a:xfrm>
-            <a:off x="1097280" y="3063240"/>
-            <a:ext cx="9966960" cy="1005840"/>
+            <a:off x="731520" y="4297680"/>
+            <a:ext cx="2560320" cy="320040"/>
           </a:xfrm>
           <a:prstGeom prst="rect">
             <a:avLst/>
@@ -3301,58 +3607,35 @@
           <a:noFill/>
         </p:spPr>
         <p:txBody>
-          <a:bodyPr wrap="square">
+          <a:bodyPr wrap="none">
             <a:spAutoFit/>
           </a:bodyPr>
           <a:lstStyle/>
           <a:p>
-            <a:pPr>
-              <a:defRPr sz="2100" b="1">
-                <a:solidFill>
-                  <a:srgbClr val="16161A"/>
-                </a:solidFill>
-                <a:latin typeface="Helvetica"/>
-              </a:defRPr>
-            </a:pPr>
-            <a:r>
-              <a:t>“We build technology around your people — not </a:t>
-            </a:r>
-            <a:r>
-              <a:rPr i="1" b="1"/>
-              <a:t>instead</a:t>
-            </a:r>
-            <a:r>
-              <a:t> of them.”</a:t>
-            </a:r>
-          </a:p>
-          <a:p>
-            <a:pPr>
-              <a:spcBef>
-                <a:spcPts val="600"/>
-              </a:spcBef>
-              <a:defRPr sz="1400">
-                <a:solidFill>
-                  <a:srgbClr val="59564D"/>
-                </a:solidFill>
-                <a:latin typeface="Helvetica"/>
-              </a:defRPr>
-            </a:pPr>
-            <a:r>
-              <a:t>Real working software with a person in the loop wherever money, trust, or judgment is on the line.</a:t>
-            </a:r>
-          </a:p>
-        </p:txBody>
-      </p:sp>
-      <p:sp>
-        <p:nvSpPr>
-          <p:cNvPr id="7" name="TextBox 6"/>
+            <a:pPr algn="ctr">
+              <a:defRPr sz="1200" b="1">
+                <a:solidFill>
+                  <a:srgbClr val="FFFFFF"/>
+                </a:solidFill>
+                <a:latin typeface="Helvetica Neue"/>
+              </a:defRPr>
+            </a:pPr>
+            <a:r>
+              <a:t>Book a 30-min call →</a:t>
+            </a:r>
+          </a:p>
+        </p:txBody>
+      </p:sp>
+      <p:sp>
+        <p:nvSpPr>
+          <p:cNvPr id="15" name="TextBox 14"/>
           <p:cNvSpPr txBox="1"/>
           <p:nvPr/>
         </p:nvSpPr>
         <p:spPr>
           <a:xfrm>
-            <a:off x="822960" y="4389120"/>
-            <a:ext cx="10515600" cy="1645920"/>
+            <a:off x="3657600" y="4206240"/>
+            <a:ext cx="7772400" cy="457200"/>
           </a:xfrm>
           <a:prstGeom prst="rect">
             <a:avLst/>
@@ -3360,73 +3643,249 @@
           <a:noFill/>
         </p:spPr>
         <p:txBody>
-          <a:bodyPr wrap="square">
+          <a:bodyPr wrap="none">
             <a:spAutoFit/>
           </a:bodyPr>
           <a:lstStyle/>
           <a:p>
             <a:pPr>
+              <a:defRPr sz="1200" b="1">
+                <a:solidFill>
+                  <a:srgbClr val="16161A"/>
+                </a:solidFill>
+                <a:latin typeface="Helvetica Neue"/>
+              </a:defRPr>
+            </a:pPr>
+            <a:r>
+              <a:t>Roberto Guido  |  Founder &amp; Principal Engineer  (UC San Diego EE · NYU Stern MBA)</a:t>
+            </a:r>
+          </a:p>
+        </p:txBody>
+      </p:sp>
+      <p:sp>
+        <p:nvSpPr>
+          <p:cNvPr id="16" name="TextBox 15"/>
+          <p:cNvSpPr txBox="1"/>
+          <p:nvPr/>
+        </p:nvSpPr>
+        <p:spPr>
+          <a:xfrm>
+            <a:off x="731520" y="4892040"/>
+            <a:ext cx="2468880" cy="1097280"/>
+          </a:xfrm>
+          <a:prstGeom prst="rect">
+            <a:avLst/>
+          </a:prstGeom>
+          <a:noFill/>
+        </p:spPr>
+        <p:txBody>
+          <a:bodyPr wrap="square" lIns="0" tIns="0" rIns="0" bIns="0">
+            <a:spAutoFit/>
+          </a:bodyPr>
+          <a:lstStyle/>
+          <a:p>
+            <a:pPr>
               <a:spcAft>
-                <a:spcPts val="400"/>
+                <a:spcPts val="200"/>
               </a:spcAft>
-              <a:defRPr sz="1000" b="1">
-                <a:solidFill>
-                  <a:srgbClr val="2B59D9"/>
-                </a:solidFill>
-                <a:latin typeface="Courier New"/>
-              </a:defRPr>
-            </a:pPr>
-            <a:r>
-              <a:t>PRACTICE LEAD</a:t>
-            </a:r>
-          </a:p>
-          <a:p>
-            <a:pPr>
-              <a:defRPr sz="2000" b="1">
+              <a:defRPr sz="1400" b="1">
                 <a:solidFill>
                   <a:srgbClr val="16161A"/>
                 </a:solidFill>
-                <a:latin typeface="Helvetica"/>
-              </a:defRPr>
-            </a:pPr>
-            <a:r>
-              <a:t>Roberto Guido</a:t>
-            </a:r>
-          </a:p>
-          <a:p>
-            <a:pPr>
-              <a:spcBef>
+                <a:latin typeface="Helvetica Neue"/>
+              </a:defRPr>
+            </a:pPr>
+            <a:r>
+              <a:t>In production.</a:t>
+            </a:r>
+          </a:p>
+          <a:p>
+            <a:pPr>
+              <a:defRPr sz="1100">
+                <a:solidFill>
+                  <a:srgbClr val="454337"/>
+                </a:solidFill>
+                <a:latin typeface="Helvetica Neue"/>
+              </a:defRPr>
+            </a:pPr>
+            <a:r>
+              <a:t>Real users today on self-developed products.</a:t>
+            </a:r>
+          </a:p>
+        </p:txBody>
+      </p:sp>
+      <p:sp>
+        <p:nvSpPr>
+          <p:cNvPr id="17" name="TextBox 16"/>
+          <p:cNvSpPr txBox="1"/>
+          <p:nvPr/>
+        </p:nvSpPr>
+        <p:spPr>
+          <a:xfrm>
+            <a:off x="3429000" y="4892040"/>
+            <a:ext cx="2468880" cy="1097280"/>
+          </a:xfrm>
+          <a:prstGeom prst="rect">
+            <a:avLst/>
+          </a:prstGeom>
+          <a:noFill/>
+        </p:spPr>
+        <p:txBody>
+          <a:bodyPr wrap="square" lIns="0" tIns="0" rIns="0" bIns="0">
+            <a:spAutoFit/>
+          </a:bodyPr>
+          <a:lstStyle/>
+          <a:p>
+            <a:pPr>
+              <a:spcAft>
                 <a:spcPts val="200"/>
-              </a:spcBef>
-              <a:defRPr sz="1400">
-                <a:solidFill>
-                  <a:srgbClr val="59564D"/>
-                </a:solidFill>
-                <a:latin typeface="Helvetica"/>
-              </a:defRPr>
-            </a:pPr>
-            <a:r>
-              <a:t>Founder &amp; Principal Engineer  ·  BS Electrical Engineering (UC San Diego) · MBA (NYU Stern)</a:t>
-            </a:r>
-          </a:p>
-        </p:txBody>
-      </p:sp>
-      <p:sp>
-        <p:nvSpPr>
-          <p:cNvPr id="8" name="Rectangle 7"/>
+              </a:spcAft>
+              <a:defRPr sz="1400" b="1">
+                <a:solidFill>
+                  <a:srgbClr val="16161A"/>
+                </a:solidFill>
+                <a:latin typeface="Helvetica Neue"/>
+              </a:defRPr>
+            </a:pPr>
+            <a:r>
+              <a:t>Senior team.</a:t>
+            </a:r>
+          </a:p>
+          <a:p>
+            <a:pPr>
+              <a:defRPr sz="1100">
+                <a:solidFill>
+                  <a:srgbClr val="454337"/>
+                </a:solidFill>
+                <a:latin typeface="Helvetica Neue"/>
+              </a:defRPr>
+            </a:pPr>
+            <a:r>
+              <a:t>The people who pitch your project ship it.</a:t>
+            </a:r>
+          </a:p>
+        </p:txBody>
+      </p:sp>
+      <p:sp>
+        <p:nvSpPr>
+          <p:cNvPr id="18" name="TextBox 17"/>
+          <p:cNvSpPr txBox="1"/>
+          <p:nvPr/>
+        </p:nvSpPr>
+        <p:spPr>
+          <a:xfrm>
+            <a:off x="6126480" y="4892040"/>
+            <a:ext cx="2468880" cy="1097280"/>
+          </a:xfrm>
+          <a:prstGeom prst="rect">
+            <a:avLst/>
+          </a:prstGeom>
+          <a:noFill/>
+        </p:spPr>
+        <p:txBody>
+          <a:bodyPr wrap="square" lIns="0" tIns="0" rIns="0" bIns="0">
+            <a:spAutoFit/>
+          </a:bodyPr>
+          <a:lstStyle/>
+          <a:p>
+            <a:pPr>
+              <a:spcAft>
+                <a:spcPts val="200"/>
+              </a:spcAft>
+              <a:defRPr sz="1400" b="1">
+                <a:solidFill>
+                  <a:srgbClr val="16161A"/>
+                </a:solidFill>
+                <a:latin typeface="Helvetica Neue"/>
+              </a:defRPr>
+            </a:pPr>
+            <a:r>
+              <a:t>Code first.</a:t>
+            </a:r>
+          </a:p>
+          <a:p>
+            <a:pPr>
+              <a:defRPr sz="1100">
+                <a:solidFill>
+                  <a:srgbClr val="454337"/>
+                </a:solidFill>
+                <a:latin typeface="Helvetica Neue"/>
+              </a:defRPr>
+            </a:pPr>
+            <a:r>
+              <a:t>No decks before working software.</a:t>
+            </a:r>
+          </a:p>
+        </p:txBody>
+      </p:sp>
+      <p:sp>
+        <p:nvSpPr>
+          <p:cNvPr id="19" name="TextBox 18"/>
+          <p:cNvSpPr txBox="1"/>
+          <p:nvPr/>
+        </p:nvSpPr>
+        <p:spPr>
+          <a:xfrm>
+            <a:off x="8823960" y="4892040"/>
+            <a:ext cx="2468880" cy="1097280"/>
+          </a:xfrm>
+          <a:prstGeom prst="rect">
+            <a:avLst/>
+          </a:prstGeom>
+          <a:noFill/>
+        </p:spPr>
+        <p:txBody>
+          <a:bodyPr wrap="square" lIns="0" tIns="0" rIns="0" bIns="0">
+            <a:spAutoFit/>
+          </a:bodyPr>
+          <a:lstStyle/>
+          <a:p>
+            <a:pPr>
+              <a:spcAft>
+                <a:spcPts val="200"/>
+              </a:spcAft>
+              <a:defRPr sz="1400" b="1">
+                <a:solidFill>
+                  <a:srgbClr val="16161A"/>
+                </a:solidFill>
+                <a:latin typeface="Helvetica Neue"/>
+              </a:defRPr>
+            </a:pPr>
+            <a:r>
+              <a:t>One team.</a:t>
+            </a:r>
+          </a:p>
+          <a:p>
+            <a:pPr>
+              <a:defRPr sz="1100">
+                <a:solidFill>
+                  <a:srgbClr val="454337"/>
+                </a:solidFill>
+                <a:latin typeface="Helvetica Neue"/>
+              </a:defRPr>
+            </a:pPr>
+            <a:r>
+              <a:t>Interfaces &amp; automations: same stack.</a:t>
+            </a:r>
+          </a:p>
+        </p:txBody>
+      </p:sp>
+      <p:sp>
+        <p:nvSpPr>
+          <p:cNvPr id="20" name="Rectangle 19"/>
           <p:cNvSpPr/>
           <p:nvPr/>
         </p:nvSpPr>
         <p:spPr>
           <a:xfrm>
-            <a:off x="822960" y="6309360"/>
-            <a:ext cx="10545775" cy="12700"/>
+            <a:off x="731520" y="6327648"/>
+            <a:ext cx="10728655" cy="12700"/>
           </a:xfrm>
           <a:prstGeom prst="rect">
             <a:avLst/>
           </a:prstGeom>
           <a:solidFill>
-            <a:srgbClr val="EBE7DF"/>
+            <a:srgbClr val="E2DDD0"/>
           </a:solidFill>
           <a:ln>
             <a:noFill/>
@@ -3456,13 +3915,13 @@
       </p:sp>
       <p:sp>
         <p:nvSpPr>
-          <p:cNvPr id="9" name="TextBox 8"/>
+          <p:cNvPr id="21" name="TextBox 20"/>
           <p:cNvSpPr txBox="1"/>
           <p:nvPr/>
         </p:nvSpPr>
         <p:spPr>
           <a:xfrm>
-            <a:off x="822960" y="6382512"/>
+            <a:off x="731520" y="6400800"/>
             <a:ext cx="7315200" cy="320040"/>
           </a:xfrm>
           <a:prstGeom prst="rect">
@@ -3479,9 +3938,9 @@
             <a:pPr>
               <a:defRPr sz="1000">
                 <a:solidFill>
-                  <a:srgbClr val="7C786C"/>
-                </a:solidFill>
-                <a:latin typeface="Courier New"/>
+                  <a:srgbClr val="5F5C52"/>
+                </a:solidFill>
+                <a:latin typeface="Helvetica Neue"/>
               </a:defRPr>
             </a:pPr>
             <a:r>
@@ -3492,13 +3951,13 @@
       </p:sp>
       <p:sp>
         <p:nvSpPr>
-          <p:cNvPr id="10" name="TextBox 9"/>
+          <p:cNvPr id="22" name="TextBox 21"/>
           <p:cNvSpPr txBox="1"/>
           <p:nvPr/>
         </p:nvSpPr>
         <p:spPr>
           <a:xfrm>
-            <a:off x="9539935" y="6382512"/>
+            <a:off x="9631375" y="6400800"/>
             <a:ext cx="1828800" cy="320040"/>
           </a:xfrm>
           <a:prstGeom prst="rect">
@@ -3515,9 +3974,9 @@
             <a:pPr algn="r">
               <a:defRPr sz="1000">
                 <a:solidFill>
-                  <a:srgbClr val="7C786C"/>
-                </a:solidFill>
-                <a:latin typeface="Courier New"/>
+                  <a:srgbClr val="5F5C52"/>
+                </a:solidFill>
+                <a:latin typeface="Helvetica Neue"/>
               </a:defRPr>
             </a:pPr>
             <a:r>
@@ -3540,7 +3999,7 @@
     <p:bg>
       <p:bgPr>
         <a:solidFill>
-          <a:srgbClr val="FAF9F5"/>
+          <a:srgbClr val="FBFAF5"/>
         </a:solidFill>
         <a:effectLst/>
       </p:bgPr>
@@ -3554,14 +4013,102 @@
       <p:grpSpPr/>
       <p:sp>
         <p:nvSpPr>
-          <p:cNvPr id="2" name="TextBox 1"/>
+          <p:cNvPr id="2" name="Rectangle 1"/>
+          <p:cNvSpPr/>
+          <p:nvPr/>
+        </p:nvSpPr>
+        <p:spPr>
+          <a:xfrm>
+            <a:off x="0" y="0"/>
+            <a:ext cx="12191695" cy="594360"/>
+          </a:xfrm>
+          <a:prstGeom prst="rect">
+            <a:avLst/>
+          </a:prstGeom>
+          <a:solidFill>
+            <a:srgbClr val="121216"/>
+          </a:solidFill>
+          <a:ln w="12700">
+            <a:solidFill>
+              <a:srgbClr val="26262C"/>
+            </a:solidFill>
+          </a:ln>
+        </p:spPr>
+        <p:style>
+          <a:lnRef idx="1">
+            <a:schemeClr val="accent1"/>
+          </a:lnRef>
+          <a:fillRef idx="3">
+            <a:schemeClr val="accent1"/>
+          </a:fillRef>
+          <a:effectRef idx="2">
+            <a:schemeClr val="accent1"/>
+          </a:effectRef>
+          <a:fontRef idx="minor">
+            <a:schemeClr val="lt1"/>
+          </a:fontRef>
+        </p:style>
+        <p:txBody>
+          <a:bodyPr rtlCol="0" anchor="ctr"/>
+          <a:lstStyle/>
+          <a:p>
+            <a:pPr algn="ctr"/>
+          </a:p>
+        </p:txBody>
+      </p:sp>
+      <p:sp>
+        <p:nvSpPr>
+          <p:cNvPr id="3" name="Rounded Rectangle 2"/>
+          <p:cNvSpPr/>
+          <p:nvPr/>
+        </p:nvSpPr>
+        <p:spPr>
+          <a:xfrm>
+            <a:off x="731520" y="146304"/>
+            <a:ext cx="310896" cy="310896"/>
+          </a:xfrm>
+          <a:prstGeom prst="roundRect">
+            <a:avLst/>
+          </a:prstGeom>
+          <a:solidFill>
+            <a:srgbClr val="2B59D9"/>
+          </a:solidFill>
+          <a:ln>
+            <a:noFill/>
+          </a:ln>
+        </p:spPr>
+        <p:style>
+          <a:lnRef idx="1">
+            <a:schemeClr val="accent1"/>
+          </a:lnRef>
+          <a:fillRef idx="3">
+            <a:schemeClr val="accent1"/>
+          </a:fillRef>
+          <a:effectRef idx="2">
+            <a:schemeClr val="accent1"/>
+          </a:effectRef>
+          <a:fontRef idx="minor">
+            <a:schemeClr val="lt1"/>
+          </a:fontRef>
+        </p:style>
+        <p:txBody>
+          <a:bodyPr rtlCol="0" anchor="ctr"/>
+          <a:lstStyle/>
+          <a:p>
+            <a:pPr algn="ctr"/>
+          </a:p>
+        </p:txBody>
+      </p:sp>
+      <p:sp>
+        <p:nvSpPr>
+          <p:cNvPr id="4" name="TextBox 3"/>
           <p:cNvSpPr txBox="1"/>
           <p:nvPr/>
         </p:nvSpPr>
         <p:spPr>
           <a:xfrm>
-            <a:off x="822960" y="548640"/>
-            <a:ext cx="10515600" cy="320040"/>
+            <a:off x="731520" y="128016"/>
+            <a:ext cx="310896" cy="310896"/>
           </a:xfrm>
           <a:prstGeom prst="rect">
             <a:avLst/>
@@ -3574,30 +4121,217 @@
           </a:bodyPr>
           <a:lstStyle/>
           <a:p>
+            <a:pPr algn="ctr">
+              <a:defRPr sz="1600" b="1">
+                <a:solidFill>
+                  <a:srgbClr val="FFFFFF"/>
+                </a:solidFill>
+                <a:latin typeface="Helvetica Neue"/>
+              </a:defRPr>
+            </a:pPr>
+            <a:r>
+              <a:t>›</a:t>
+            </a:r>
+          </a:p>
+        </p:txBody>
+      </p:sp>
+      <p:sp>
+        <p:nvSpPr>
+          <p:cNvPr id="5" name="TextBox 4"/>
+          <p:cNvSpPr txBox="1"/>
+          <p:nvPr/>
+        </p:nvSpPr>
+        <p:spPr>
+          <a:xfrm>
+            <a:off x="1143000" y="164592"/>
+            <a:ext cx="3200400" cy="292608"/>
+          </a:xfrm>
+          <a:prstGeom prst="rect">
+            <a:avLst/>
+          </a:prstGeom>
+          <a:noFill/>
+        </p:spPr>
+        <p:txBody>
+          <a:bodyPr wrap="none" lIns="0" tIns="0" rIns="0" bIns="0">
+            <a:spAutoFit/>
+          </a:bodyPr>
+          <a:lstStyle/>
+          <a:p>
+            <a:pPr>
+              <a:defRPr sz="1300" b="1">
+                <a:solidFill>
+                  <a:srgbClr val="FFFFFF"/>
+                </a:solidFill>
+                <a:latin typeface="Helvetica Neue"/>
+              </a:defRPr>
+            </a:pPr>
+            <a:r>
+              <a:t>Technology Consultants</a:t>
+            </a:r>
+          </a:p>
+        </p:txBody>
+      </p:sp>
+      <p:sp>
+        <p:nvSpPr>
+          <p:cNvPr id="6" name="TextBox 5"/>
+          <p:cNvSpPr txBox="1"/>
+          <p:nvPr/>
+        </p:nvSpPr>
+        <p:spPr>
+          <a:xfrm>
+            <a:off x="5029200" y="182880"/>
+            <a:ext cx="4754880" cy="292608"/>
+          </a:xfrm>
+          <a:prstGeom prst="rect">
+            <a:avLst/>
+          </a:prstGeom>
+          <a:noFill/>
+        </p:spPr>
+        <p:txBody>
+          <a:bodyPr wrap="none" lIns="0" tIns="0" rIns="0" bIns="0">
+            <a:spAutoFit/>
+          </a:bodyPr>
+          <a:lstStyle/>
+          <a:p>
+            <a:pPr algn="r">
+              <a:defRPr sz="1000">
+                <a:solidFill>
+                  <a:srgbClr val="C8CDD7"/>
+                </a:solidFill>
+                <a:latin typeface="Helvetica Neue"/>
+              </a:defRPr>
+            </a:pPr>
+            <a:r>
+              <a:t>Services   ·   Work   ·   How we work   ·   About   ·   FAQ</a:t>
+            </a:r>
+          </a:p>
+        </p:txBody>
+      </p:sp>
+      <p:sp>
+        <p:nvSpPr>
+          <p:cNvPr id="7" name="Rounded Rectangle 6"/>
+          <p:cNvSpPr/>
+          <p:nvPr/>
+        </p:nvSpPr>
+        <p:spPr>
+          <a:xfrm>
+            <a:off x="10058400" y="128016"/>
+            <a:ext cx="1371600" cy="329184"/>
+          </a:xfrm>
+          <a:prstGeom prst="roundRect">
+            <a:avLst/>
+          </a:prstGeom>
+          <a:solidFill>
+            <a:srgbClr val="FFFFFF"/>
+          </a:solidFill>
+          <a:ln>
+            <a:noFill/>
+          </a:ln>
+        </p:spPr>
+        <p:style>
+          <a:lnRef idx="1">
+            <a:schemeClr val="accent1"/>
+          </a:lnRef>
+          <a:fillRef idx="3">
+            <a:schemeClr val="accent1"/>
+          </a:fillRef>
+          <a:effectRef idx="2">
+            <a:schemeClr val="accent1"/>
+          </a:effectRef>
+          <a:fontRef idx="minor">
+            <a:schemeClr val="lt1"/>
+          </a:fontRef>
+        </p:style>
+        <p:txBody>
+          <a:bodyPr rtlCol="0" anchor="ctr"/>
+          <a:lstStyle/>
+          <a:p>
+            <a:pPr algn="ctr"/>
+          </a:p>
+        </p:txBody>
+      </p:sp>
+      <p:sp>
+        <p:nvSpPr>
+          <p:cNvPr id="8" name="TextBox 7"/>
+          <p:cNvSpPr txBox="1"/>
+          <p:nvPr/>
+        </p:nvSpPr>
+        <p:spPr>
+          <a:xfrm>
+            <a:off x="10058400" y="164592"/>
+            <a:ext cx="1371600" cy="274320"/>
+          </a:xfrm>
+          <a:prstGeom prst="rect">
+            <a:avLst/>
+          </a:prstGeom>
+          <a:noFill/>
+        </p:spPr>
+        <p:txBody>
+          <a:bodyPr wrap="none" lIns="0" tIns="0" rIns="0" bIns="0">
+            <a:spAutoFit/>
+          </a:bodyPr>
+          <a:lstStyle/>
+          <a:p>
+            <a:pPr algn="ctr">
+              <a:defRPr sz="1000" b="1">
+                <a:solidFill>
+                  <a:srgbClr val="16161A"/>
+                </a:solidFill>
+                <a:latin typeface="Helvetica Neue"/>
+              </a:defRPr>
+            </a:pPr>
+            <a:r>
+              <a:t>Book a call</a:t>
+            </a:r>
+          </a:p>
+        </p:txBody>
+      </p:sp>
+      <p:sp>
+        <p:nvSpPr>
+          <p:cNvPr id="9" name="TextBox 8"/>
+          <p:cNvSpPr txBox="1"/>
+          <p:nvPr/>
+        </p:nvSpPr>
+        <p:spPr>
+          <a:xfrm>
+            <a:off x="731520" y="777240"/>
+            <a:ext cx="10728655" cy="274320"/>
+          </a:xfrm>
+          <a:prstGeom prst="rect">
+            <a:avLst/>
+          </a:prstGeom>
+          <a:noFill/>
+        </p:spPr>
+        <p:txBody>
+          <a:bodyPr wrap="none" lIns="0" tIns="0" rIns="0" bIns="0">
+            <a:spAutoFit/>
+          </a:bodyPr>
+          <a:lstStyle/>
+          <a:p>
             <a:pPr>
               <a:defRPr sz="1100" b="1">
                 <a:solidFill>
-                  <a:srgbClr val="D99B26"/>
-                </a:solidFill>
-                <a:latin typeface="Courier New"/>
-              </a:defRPr>
-            </a:pPr>
-            <a:r>
-              <a:t>CORE PRACTICE OVERVIEW</a:t>
-            </a:r>
-          </a:p>
-        </p:txBody>
-      </p:sp>
-      <p:sp>
-        <p:nvSpPr>
-          <p:cNvPr id="3" name="TextBox 2"/>
+                  <a:srgbClr val="2B59D9"/>
+                </a:solidFill>
+                <a:latin typeface="Helvetica Neue"/>
+              </a:defRPr>
+            </a:pPr>
+            <a:r>
+              <a:t>SERVICES &amp; CAPABILITIES</a:t>
+            </a:r>
+          </a:p>
+        </p:txBody>
+      </p:sp>
+      <p:sp>
+        <p:nvSpPr>
+          <p:cNvPr id="10" name="TextBox 9"/>
           <p:cNvSpPr txBox="1"/>
           <p:nvPr/>
         </p:nvSpPr>
         <p:spPr>
           <a:xfrm>
-            <a:off x="822960" y="868680"/>
-            <a:ext cx="10515600" cy="685800"/>
+            <a:off x="731520" y="1051560"/>
+            <a:ext cx="10728655" cy="640080"/>
           </a:xfrm>
           <a:prstGeom prst="rect">
             <a:avLst/>
@@ -3611,11 +4345,11 @@
           <a:lstStyle/>
           <a:p>
             <a:pPr>
-              <a:defRPr sz="2600" b="1">
+              <a:defRPr sz="2500" b="1">
                 <a:solidFill>
                   <a:srgbClr val="16161A"/>
                 </a:solidFill>
-                <a:latin typeface="Helvetica"/>
+                <a:latin typeface="Helvetica Neue"/>
               </a:defRPr>
             </a:pPr>
             <a:r>
@@ -3626,14 +4360,14 @@
       </p:sp>
       <p:sp>
         <p:nvSpPr>
-          <p:cNvPr id="4" name="Rounded Rectangle 3"/>
+          <p:cNvPr id="11" name="Rounded Rectangle 10"/>
           <p:cNvSpPr/>
           <p:nvPr/>
         </p:nvSpPr>
         <p:spPr>
           <a:xfrm>
-            <a:off x="822960" y="1874519"/>
-            <a:ext cx="3328416" cy="4023360"/>
+            <a:off x="731520" y="1874519"/>
+            <a:ext cx="3328416" cy="4114800"/>
           </a:xfrm>
           <a:prstGeom prst="roundRect">
             <a:avLst/>
@@ -3643,7 +4377,7 @@
           </a:solidFill>
           <a:ln w="12700">
             <a:solidFill>
-              <a:srgbClr val="EBE7DF"/>
+              <a:srgbClr val="E2DDD0"/>
             </a:solidFill>
           </a:ln>
         </p:spPr>
@@ -3671,14 +4405,14 @@
       </p:sp>
       <p:sp>
         <p:nvSpPr>
-          <p:cNvPr id="5" name="TextBox 4"/>
+          <p:cNvPr id="12" name="TextBox 11"/>
           <p:cNvSpPr txBox="1"/>
           <p:nvPr/>
         </p:nvSpPr>
         <p:spPr>
           <a:xfrm>
-            <a:off x="1143000" y="2240279"/>
-            <a:ext cx="2688336" cy="3474720"/>
+            <a:off x="1051560" y="2240279"/>
+            <a:ext cx="2688336" cy="3566160"/>
           </a:xfrm>
           <a:prstGeom prst="rect">
             <a:avLst/>
@@ -3695,11 +4429,11 @@
               <a:spcAft>
                 <a:spcPts val="1200"/>
               </a:spcAft>
-              <a:defRPr sz="2400" b="1">
+              <a:defRPr sz="2200" b="1">
                 <a:solidFill>
                   <a:srgbClr val="2B59D9"/>
                 </a:solidFill>
-                <a:latin typeface="Courier New"/>
+                <a:latin typeface="Helvetica Neue"/>
               </a:defRPr>
             </a:pPr>
             <a:r>
@@ -3711,11 +4445,11 @@
               <a:spcAft>
                 <a:spcPts val="1400"/>
               </a:spcAft>
-              <a:defRPr sz="2000" b="1">
+              <a:defRPr sz="1900" b="1">
                 <a:solidFill>
                   <a:srgbClr val="16161A"/>
                 </a:solidFill>
-                <a:latin typeface="Helvetica"/>
+                <a:latin typeface="Helvetica Neue"/>
               </a:defRPr>
             </a:pPr>
             <a:r>
@@ -3724,29 +4458,29 @@
           </a:p>
           <a:p>
             <a:pPr>
-              <a:defRPr sz="1400">
-                <a:solidFill>
-                  <a:srgbClr val="59564D"/>
-                </a:solidFill>
-                <a:latin typeface="Helvetica"/>
-              </a:defRPr>
-            </a:pPr>
-            <a:r>
-              <a:t>Custom interfaces built for human speed and intuitive execution. High-performance React web applications tailored to daily workflow needs.</a:t>
-            </a:r>
-          </a:p>
-        </p:txBody>
-      </p:sp>
-      <p:sp>
-        <p:nvSpPr>
-          <p:cNvPr id="6" name="Rounded Rectangle 5"/>
+              <a:defRPr sz="1300">
+                <a:solidFill>
+                  <a:srgbClr val="454337"/>
+                </a:solidFill>
+                <a:latin typeface="Helvetica Neue"/>
+              </a:defRPr>
+            </a:pPr>
+            <a:r>
+              <a:t>Custom web interfaces built for human speed and intuitive execution. High-performance React applications tailored to daily workflow needs.</a:t>
+            </a:r>
+          </a:p>
+        </p:txBody>
+      </p:sp>
+      <p:sp>
+        <p:nvSpPr>
+          <p:cNvPr id="13" name="Rounded Rectangle 12"/>
           <p:cNvSpPr/>
           <p:nvPr/>
         </p:nvSpPr>
         <p:spPr>
           <a:xfrm>
-            <a:off x="4425696" y="1874519"/>
-            <a:ext cx="3328416" cy="4023360"/>
+            <a:off x="4334256" y="1874519"/>
+            <a:ext cx="3328416" cy="4114800"/>
           </a:xfrm>
           <a:prstGeom prst="roundRect">
             <a:avLst/>
@@ -3756,7 +4490,7 @@
           </a:solidFill>
           <a:ln w="12700">
             <a:solidFill>
-              <a:srgbClr val="EBE7DF"/>
+              <a:srgbClr val="E2DDD0"/>
             </a:solidFill>
           </a:ln>
         </p:spPr>
@@ -3784,14 +4518,14 @@
       </p:sp>
       <p:sp>
         <p:nvSpPr>
-          <p:cNvPr id="7" name="TextBox 6"/>
+          <p:cNvPr id="14" name="TextBox 13"/>
           <p:cNvSpPr txBox="1"/>
           <p:nvPr/>
         </p:nvSpPr>
         <p:spPr>
           <a:xfrm>
-            <a:off x="4745736" y="2240279"/>
-            <a:ext cx="2688336" cy="3474720"/>
+            <a:off x="4654296" y="2240279"/>
+            <a:ext cx="2688336" cy="3566160"/>
           </a:xfrm>
           <a:prstGeom prst="rect">
             <a:avLst/>
@@ -3808,11 +4542,11 @@
               <a:spcAft>
                 <a:spcPts val="1200"/>
               </a:spcAft>
-              <a:defRPr sz="2400" b="1">
+              <a:defRPr sz="2200" b="1">
                 <a:solidFill>
                   <a:srgbClr val="2B59D9"/>
                 </a:solidFill>
-                <a:latin typeface="Courier New"/>
+                <a:latin typeface="Helvetica Neue"/>
               </a:defRPr>
             </a:pPr>
             <a:r>
@@ -3824,11 +4558,11 @@
               <a:spcAft>
                 <a:spcPts val="1400"/>
               </a:spcAft>
-              <a:defRPr sz="2000" b="1">
+              <a:defRPr sz="1900" b="1">
                 <a:solidFill>
                   <a:srgbClr val="16161A"/>
                 </a:solidFill>
-                <a:latin typeface="Helvetica"/>
+                <a:latin typeface="Helvetica Neue"/>
               </a:defRPr>
             </a:pPr>
             <a:r>
@@ -3837,11 +4571,11 @@
           </a:p>
           <a:p>
             <a:pPr>
-              <a:defRPr sz="1400">
-                <a:solidFill>
-                  <a:srgbClr val="59564D"/>
-                </a:solidFill>
-                <a:latin typeface="Helvetica"/>
+              <a:defRPr sz="1300">
+                <a:solidFill>
+                  <a:srgbClr val="454337"/>
+                </a:solidFill>
+                <a:latin typeface="Helvetica Neue"/>
               </a:defRPr>
             </a:pPr>
             <a:r>
@@ -3852,14 +4586,14 @@
       </p:sp>
       <p:sp>
         <p:nvSpPr>
-          <p:cNvPr id="8" name="Rounded Rectangle 7"/>
+          <p:cNvPr id="15" name="Rounded Rectangle 14"/>
           <p:cNvSpPr/>
           <p:nvPr/>
         </p:nvSpPr>
         <p:spPr>
           <a:xfrm>
-            <a:off x="8028431" y="1874519"/>
-            <a:ext cx="3328416" cy="4023360"/>
+            <a:off x="7936992" y="1874519"/>
+            <a:ext cx="3328416" cy="4114800"/>
           </a:xfrm>
           <a:prstGeom prst="roundRect">
             <a:avLst/>
@@ -3869,7 +4603,7 @@
           </a:solidFill>
           <a:ln w="12700">
             <a:solidFill>
-              <a:srgbClr val="EBE7DF"/>
+              <a:srgbClr val="E2DDD0"/>
             </a:solidFill>
           </a:ln>
         </p:spPr>
@@ -3897,14 +4631,14 @@
       </p:sp>
       <p:sp>
         <p:nvSpPr>
-          <p:cNvPr id="9" name="TextBox 8"/>
+          <p:cNvPr id="16" name="TextBox 15"/>
           <p:cNvSpPr txBox="1"/>
           <p:nvPr/>
         </p:nvSpPr>
         <p:spPr>
           <a:xfrm>
-            <a:off x="8348471" y="2240279"/>
-            <a:ext cx="2688336" cy="3474720"/>
+            <a:off x="8257032" y="2240279"/>
+            <a:ext cx="2688336" cy="3566160"/>
           </a:xfrm>
           <a:prstGeom prst="rect">
             <a:avLst/>
@@ -3921,11 +4655,11 @@
               <a:spcAft>
                 <a:spcPts val="1200"/>
               </a:spcAft>
-              <a:defRPr sz="2400" b="1">
+              <a:defRPr sz="2200" b="1">
                 <a:solidFill>
                   <a:srgbClr val="2B59D9"/>
                 </a:solidFill>
-                <a:latin typeface="Courier New"/>
+                <a:latin typeface="Helvetica Neue"/>
               </a:defRPr>
             </a:pPr>
             <a:r>
@@ -3937,11 +4671,11 @@
               <a:spcAft>
                 <a:spcPts val="1400"/>
               </a:spcAft>
-              <a:defRPr sz="2000" b="1">
+              <a:defRPr sz="1900" b="1">
                 <a:solidFill>
                   <a:srgbClr val="16161A"/>
                 </a:solidFill>
-                <a:latin typeface="Helvetica"/>
+                <a:latin typeface="Helvetica Neue"/>
               </a:defRPr>
             </a:pPr>
             <a:r>
@@ -3950,35 +4684,35 @@
           </a:p>
           <a:p>
             <a:pPr>
-              <a:defRPr sz="1400">
-                <a:solidFill>
-                  <a:srgbClr val="59564D"/>
-                </a:solidFill>
-                <a:latin typeface="Helvetica"/>
-              </a:defRPr>
-            </a:pPr>
-            <a:r>
-              <a:t>Custom Model Context Protocol (MCP) servers, LLM orchestration, and human-in-the-loop (HITL) AI agents for real operational trust.</a:t>
-            </a:r>
-          </a:p>
-        </p:txBody>
-      </p:sp>
-      <p:sp>
-        <p:nvSpPr>
-          <p:cNvPr id="10" name="Rectangle 9"/>
+              <a:defRPr sz="1300">
+                <a:solidFill>
+                  <a:srgbClr val="454337"/>
+                </a:solidFill>
+                <a:latin typeface="Helvetica Neue"/>
+              </a:defRPr>
+            </a:pPr>
+            <a:r>
+              <a:t>Custom Model Context Protocol (MCP) servers, LLM orchestration, and human-in-the-loop (HITL) AI agents for operational trust.</a:t>
+            </a:r>
+          </a:p>
+        </p:txBody>
+      </p:sp>
+      <p:sp>
+        <p:nvSpPr>
+          <p:cNvPr id="17" name="Rectangle 16"/>
           <p:cNvSpPr/>
           <p:nvPr/>
         </p:nvSpPr>
         <p:spPr>
           <a:xfrm>
-            <a:off x="822960" y="6309360"/>
-            <a:ext cx="10545775" cy="12700"/>
+            <a:off x="731520" y="6327648"/>
+            <a:ext cx="10728655" cy="12700"/>
           </a:xfrm>
           <a:prstGeom prst="rect">
             <a:avLst/>
           </a:prstGeom>
           <a:solidFill>
-            <a:srgbClr val="EBE7DF"/>
+            <a:srgbClr val="E2DDD0"/>
           </a:solidFill>
           <a:ln>
             <a:noFill/>
@@ -4008,13 +4742,13 @@
       </p:sp>
       <p:sp>
         <p:nvSpPr>
-          <p:cNvPr id="11" name="TextBox 10"/>
+          <p:cNvPr id="18" name="TextBox 17"/>
           <p:cNvSpPr txBox="1"/>
           <p:nvPr/>
         </p:nvSpPr>
         <p:spPr>
           <a:xfrm>
-            <a:off x="822960" y="6382512"/>
+            <a:off x="731520" y="6400800"/>
             <a:ext cx="7315200" cy="320040"/>
           </a:xfrm>
           <a:prstGeom prst="rect">
@@ -4031,9 +4765,9 @@
             <a:pPr>
               <a:defRPr sz="1000">
                 <a:solidFill>
-                  <a:srgbClr val="7C786C"/>
-                </a:solidFill>
-                <a:latin typeface="Courier New"/>
+                  <a:srgbClr val="5F5C52"/>
+                </a:solidFill>
+                <a:latin typeface="Helvetica Neue"/>
               </a:defRPr>
             </a:pPr>
             <a:r>
@@ -4044,13 +4778,13 @@
       </p:sp>
       <p:sp>
         <p:nvSpPr>
-          <p:cNvPr id="12" name="TextBox 11"/>
+          <p:cNvPr id="19" name="TextBox 18"/>
           <p:cNvSpPr txBox="1"/>
           <p:nvPr/>
         </p:nvSpPr>
         <p:spPr>
           <a:xfrm>
-            <a:off x="9539935" y="6382512"/>
+            <a:off x="9631375" y="6400800"/>
             <a:ext cx="1828800" cy="320040"/>
           </a:xfrm>
           <a:prstGeom prst="rect">
@@ -4067,9 +4801,9 @@
             <a:pPr algn="r">
               <a:defRPr sz="1000">
                 <a:solidFill>
-                  <a:srgbClr val="7C786C"/>
-                </a:solidFill>
-                <a:latin typeface="Courier New"/>
+                  <a:srgbClr val="5F5C52"/>
+                </a:solidFill>
+                <a:latin typeface="Helvetica Neue"/>
               </a:defRPr>
             </a:pPr>
             <a:r>
@@ -4092,7 +4826,7 @@
     <p:bg>
       <p:bgPr>
         <a:solidFill>
-          <a:srgbClr val="FAF9F5"/>
+          <a:srgbClr val="FBFAF5"/>
         </a:solidFill>
         <a:effectLst/>
       </p:bgPr>
@@ -4106,14 +4840,102 @@
       <p:grpSpPr/>
       <p:sp>
         <p:nvSpPr>
-          <p:cNvPr id="2" name="TextBox 1"/>
+          <p:cNvPr id="2" name="Rectangle 1"/>
+          <p:cNvSpPr/>
+          <p:nvPr/>
+        </p:nvSpPr>
+        <p:spPr>
+          <a:xfrm>
+            <a:off x="0" y="0"/>
+            <a:ext cx="12191695" cy="594360"/>
+          </a:xfrm>
+          <a:prstGeom prst="rect">
+            <a:avLst/>
+          </a:prstGeom>
+          <a:solidFill>
+            <a:srgbClr val="121216"/>
+          </a:solidFill>
+          <a:ln w="12700">
+            <a:solidFill>
+              <a:srgbClr val="26262C"/>
+            </a:solidFill>
+          </a:ln>
+        </p:spPr>
+        <p:style>
+          <a:lnRef idx="1">
+            <a:schemeClr val="accent1"/>
+          </a:lnRef>
+          <a:fillRef idx="3">
+            <a:schemeClr val="accent1"/>
+          </a:fillRef>
+          <a:effectRef idx="2">
+            <a:schemeClr val="accent1"/>
+          </a:effectRef>
+          <a:fontRef idx="minor">
+            <a:schemeClr val="lt1"/>
+          </a:fontRef>
+        </p:style>
+        <p:txBody>
+          <a:bodyPr rtlCol="0" anchor="ctr"/>
+          <a:lstStyle/>
+          <a:p>
+            <a:pPr algn="ctr"/>
+          </a:p>
+        </p:txBody>
+      </p:sp>
+      <p:sp>
+        <p:nvSpPr>
+          <p:cNvPr id="3" name="Rounded Rectangle 2"/>
+          <p:cNvSpPr/>
+          <p:nvPr/>
+        </p:nvSpPr>
+        <p:spPr>
+          <a:xfrm>
+            <a:off x="731520" y="146304"/>
+            <a:ext cx="310896" cy="310896"/>
+          </a:xfrm>
+          <a:prstGeom prst="roundRect">
+            <a:avLst/>
+          </a:prstGeom>
+          <a:solidFill>
+            <a:srgbClr val="2B59D9"/>
+          </a:solidFill>
+          <a:ln>
+            <a:noFill/>
+          </a:ln>
+        </p:spPr>
+        <p:style>
+          <a:lnRef idx="1">
+            <a:schemeClr val="accent1"/>
+          </a:lnRef>
+          <a:fillRef idx="3">
+            <a:schemeClr val="accent1"/>
+          </a:fillRef>
+          <a:effectRef idx="2">
+            <a:schemeClr val="accent1"/>
+          </a:effectRef>
+          <a:fontRef idx="minor">
+            <a:schemeClr val="lt1"/>
+          </a:fontRef>
+        </p:style>
+        <p:txBody>
+          <a:bodyPr rtlCol="0" anchor="ctr"/>
+          <a:lstStyle/>
+          <a:p>
+            <a:pPr algn="ctr"/>
+          </a:p>
+        </p:txBody>
+      </p:sp>
+      <p:sp>
+        <p:nvSpPr>
+          <p:cNvPr id="4" name="TextBox 3"/>
           <p:cNvSpPr txBox="1"/>
           <p:nvPr/>
         </p:nvSpPr>
         <p:spPr>
           <a:xfrm>
-            <a:off x="822960" y="548640"/>
-            <a:ext cx="10515600" cy="320040"/>
+            <a:off x="731520" y="128016"/>
+            <a:ext cx="310896" cy="310896"/>
           </a:xfrm>
           <a:prstGeom prst="rect">
             <a:avLst/>
@@ -4126,12 +4948,199 @@
           </a:bodyPr>
           <a:lstStyle/>
           <a:p>
+            <a:pPr algn="ctr">
+              <a:defRPr sz="1600" b="1">
+                <a:solidFill>
+                  <a:srgbClr val="FFFFFF"/>
+                </a:solidFill>
+                <a:latin typeface="Helvetica Neue"/>
+              </a:defRPr>
+            </a:pPr>
+            <a:r>
+              <a:t>›</a:t>
+            </a:r>
+          </a:p>
+        </p:txBody>
+      </p:sp>
+      <p:sp>
+        <p:nvSpPr>
+          <p:cNvPr id="5" name="TextBox 4"/>
+          <p:cNvSpPr txBox="1"/>
+          <p:nvPr/>
+        </p:nvSpPr>
+        <p:spPr>
+          <a:xfrm>
+            <a:off x="1143000" y="164592"/>
+            <a:ext cx="3200400" cy="292608"/>
+          </a:xfrm>
+          <a:prstGeom prst="rect">
+            <a:avLst/>
+          </a:prstGeom>
+          <a:noFill/>
+        </p:spPr>
+        <p:txBody>
+          <a:bodyPr wrap="none" lIns="0" tIns="0" rIns="0" bIns="0">
+            <a:spAutoFit/>
+          </a:bodyPr>
+          <a:lstStyle/>
+          <a:p>
+            <a:pPr>
+              <a:defRPr sz="1300" b="1">
+                <a:solidFill>
+                  <a:srgbClr val="FFFFFF"/>
+                </a:solidFill>
+                <a:latin typeface="Helvetica Neue"/>
+              </a:defRPr>
+            </a:pPr>
+            <a:r>
+              <a:t>Technology Consultants</a:t>
+            </a:r>
+          </a:p>
+        </p:txBody>
+      </p:sp>
+      <p:sp>
+        <p:nvSpPr>
+          <p:cNvPr id="6" name="TextBox 5"/>
+          <p:cNvSpPr txBox="1"/>
+          <p:nvPr/>
+        </p:nvSpPr>
+        <p:spPr>
+          <a:xfrm>
+            <a:off x="5029200" y="182880"/>
+            <a:ext cx="4754880" cy="292608"/>
+          </a:xfrm>
+          <a:prstGeom prst="rect">
+            <a:avLst/>
+          </a:prstGeom>
+          <a:noFill/>
+        </p:spPr>
+        <p:txBody>
+          <a:bodyPr wrap="none" lIns="0" tIns="0" rIns="0" bIns="0">
+            <a:spAutoFit/>
+          </a:bodyPr>
+          <a:lstStyle/>
+          <a:p>
+            <a:pPr algn="r">
+              <a:defRPr sz="1000">
+                <a:solidFill>
+                  <a:srgbClr val="C8CDD7"/>
+                </a:solidFill>
+                <a:latin typeface="Helvetica Neue"/>
+              </a:defRPr>
+            </a:pPr>
+            <a:r>
+              <a:t>Services   ·   Work   ·   How we work   ·   About   ·   FAQ</a:t>
+            </a:r>
+          </a:p>
+        </p:txBody>
+      </p:sp>
+      <p:sp>
+        <p:nvSpPr>
+          <p:cNvPr id="7" name="Rounded Rectangle 6"/>
+          <p:cNvSpPr/>
+          <p:nvPr/>
+        </p:nvSpPr>
+        <p:spPr>
+          <a:xfrm>
+            <a:off x="10058400" y="128016"/>
+            <a:ext cx="1371600" cy="329184"/>
+          </a:xfrm>
+          <a:prstGeom prst="roundRect">
+            <a:avLst/>
+          </a:prstGeom>
+          <a:solidFill>
+            <a:srgbClr val="FFFFFF"/>
+          </a:solidFill>
+          <a:ln>
+            <a:noFill/>
+          </a:ln>
+        </p:spPr>
+        <p:style>
+          <a:lnRef idx="1">
+            <a:schemeClr val="accent1"/>
+          </a:lnRef>
+          <a:fillRef idx="3">
+            <a:schemeClr val="accent1"/>
+          </a:fillRef>
+          <a:effectRef idx="2">
+            <a:schemeClr val="accent1"/>
+          </a:effectRef>
+          <a:fontRef idx="minor">
+            <a:schemeClr val="lt1"/>
+          </a:fontRef>
+        </p:style>
+        <p:txBody>
+          <a:bodyPr rtlCol="0" anchor="ctr"/>
+          <a:lstStyle/>
+          <a:p>
+            <a:pPr algn="ctr"/>
+          </a:p>
+        </p:txBody>
+      </p:sp>
+      <p:sp>
+        <p:nvSpPr>
+          <p:cNvPr id="8" name="TextBox 7"/>
+          <p:cNvSpPr txBox="1"/>
+          <p:nvPr/>
+        </p:nvSpPr>
+        <p:spPr>
+          <a:xfrm>
+            <a:off x="10058400" y="164592"/>
+            <a:ext cx="1371600" cy="274320"/>
+          </a:xfrm>
+          <a:prstGeom prst="rect">
+            <a:avLst/>
+          </a:prstGeom>
+          <a:noFill/>
+        </p:spPr>
+        <p:txBody>
+          <a:bodyPr wrap="none" lIns="0" tIns="0" rIns="0" bIns="0">
+            <a:spAutoFit/>
+          </a:bodyPr>
+          <a:lstStyle/>
+          <a:p>
+            <a:pPr algn="ctr">
+              <a:defRPr sz="1000" b="1">
+                <a:solidFill>
+                  <a:srgbClr val="16161A"/>
+                </a:solidFill>
+                <a:latin typeface="Helvetica Neue"/>
+              </a:defRPr>
+            </a:pPr>
+            <a:r>
+              <a:t>Book a call</a:t>
+            </a:r>
+          </a:p>
+        </p:txBody>
+      </p:sp>
+      <p:sp>
+        <p:nvSpPr>
+          <p:cNvPr id="9" name="TextBox 8"/>
+          <p:cNvSpPr txBox="1"/>
+          <p:nvPr/>
+        </p:nvSpPr>
+        <p:spPr>
+          <a:xfrm>
+            <a:off x="731520" y="777240"/>
+            <a:ext cx="10728655" cy="274320"/>
+          </a:xfrm>
+          <a:prstGeom prst="rect">
+            <a:avLst/>
+          </a:prstGeom>
+          <a:noFill/>
+        </p:spPr>
+        <p:txBody>
+          <a:bodyPr wrap="none" lIns="0" tIns="0" rIns="0" bIns="0">
+            <a:spAutoFit/>
+          </a:bodyPr>
+          <a:lstStyle/>
+          <a:p>
             <a:pPr>
               <a:defRPr sz="1100" b="1">
                 <a:solidFill>
-                  <a:srgbClr val="D99B26"/>
-                </a:solidFill>
-                <a:latin typeface="Courier New"/>
+                  <a:srgbClr val="2B59D9"/>
+                </a:solidFill>
+                <a:latin typeface="Helvetica Neue"/>
               </a:defRPr>
             </a:pPr>
             <a:r>
@@ -4142,14 +5151,14 @@
       </p:sp>
       <p:sp>
         <p:nvSpPr>
-          <p:cNvPr id="3" name="TextBox 2"/>
+          <p:cNvPr id="10" name="TextBox 9"/>
           <p:cNvSpPr txBox="1"/>
           <p:nvPr/>
         </p:nvSpPr>
         <p:spPr>
           <a:xfrm>
-            <a:off x="822960" y="868680"/>
-            <a:ext cx="10515600" cy="685800"/>
+            <a:off x="731520" y="1051560"/>
+            <a:ext cx="10728655" cy="640080"/>
           </a:xfrm>
           <a:prstGeom prst="rect">
             <a:avLst/>
@@ -4163,11 +5172,11 @@
           <a:lstStyle/>
           <a:p>
             <a:pPr>
-              <a:defRPr sz="2600" b="1">
+              <a:defRPr sz="2500" b="1">
                 <a:solidFill>
                   <a:srgbClr val="16161A"/>
                 </a:solidFill>
-                <a:latin typeface="Helvetica"/>
+                <a:latin typeface="Helvetica Neue"/>
               </a:defRPr>
             </a:pPr>
             <a:r>
@@ -4178,14 +5187,14 @@
       </p:sp>
       <p:sp>
         <p:nvSpPr>
-          <p:cNvPr id="4" name="Rounded Rectangle 3"/>
+          <p:cNvPr id="11" name="Rounded Rectangle 10"/>
           <p:cNvSpPr/>
           <p:nvPr/>
         </p:nvSpPr>
         <p:spPr>
           <a:xfrm>
-            <a:off x="822960" y="1874519"/>
-            <a:ext cx="5120640" cy="4023360"/>
+            <a:off x="731520" y="1874519"/>
+            <a:ext cx="5157216" cy="4114800"/>
           </a:xfrm>
           <a:prstGeom prst="roundRect">
             <a:avLst/>
@@ -4195,7 +5204,7 @@
           </a:solidFill>
           <a:ln w="12700">
             <a:solidFill>
-              <a:srgbClr val="EBE7DF"/>
+              <a:srgbClr val="E2DDD0"/>
             </a:solidFill>
           </a:ln>
         </p:spPr>
@@ -4223,14 +5232,14 @@
       </p:sp>
       <p:sp>
         <p:nvSpPr>
-          <p:cNvPr id="5" name="TextBox 4"/>
+          <p:cNvPr id="12" name="TextBox 11"/>
           <p:cNvSpPr txBox="1"/>
           <p:nvPr/>
         </p:nvSpPr>
         <p:spPr>
           <a:xfrm>
-            <a:off x="1097280" y="2194559"/>
-            <a:ext cx="4572000" cy="3474720"/>
+            <a:off x="1005840" y="2194559"/>
+            <a:ext cx="4608576" cy="3566160"/>
           </a:xfrm>
           <a:prstGeom prst="rect">
             <a:avLst/>
@@ -4251,7 +5260,7 @@
                 <a:solidFill>
                   <a:srgbClr val="2B59D9"/>
                 </a:solidFill>
-                <a:latin typeface="Courier New"/>
+                <a:latin typeface="Helvetica Neue"/>
               </a:defRPr>
             </a:pPr>
             <a:r>
@@ -4267,7 +5276,7 @@
                 <a:solidFill>
                   <a:srgbClr val="16161A"/>
                 </a:solidFill>
-                <a:latin typeface="Helvetica"/>
+                <a:latin typeface="Helvetica Neue"/>
               </a:defRPr>
             </a:pPr>
             <a:r>
@@ -4276,7 +5285,7 @@
             <a:r>
               <a:rPr b="0">
                 <a:solidFill>
-                  <a:srgbClr val="59564D"/>
+                  <a:srgbClr val="454337"/>
                 </a:solidFill>
               </a:rPr>
               <a:t>Established operations needing custom tool integration.</a:t>
@@ -4291,7 +5300,7 @@
                 <a:solidFill>
                   <a:srgbClr val="16161A"/>
                 </a:solidFill>
-                <a:latin typeface="Helvetica"/>
+                <a:latin typeface="Helvetica Neue"/>
               </a:defRPr>
             </a:pPr>
             <a:r>
@@ -4300,7 +5309,7 @@
             <a:r>
               <a:rPr b="0">
                 <a:solidFill>
-                  <a:srgbClr val="59564D"/>
+                  <a:srgbClr val="454337"/>
                 </a:solidFill>
               </a:rPr>
               <a:t>Scaling teams outgrowing spreadsheets or disconnected SaaS apps.</a:t>
@@ -4315,7 +5324,7 @@
                 <a:solidFill>
                   <a:srgbClr val="16161A"/>
                 </a:solidFill>
-                <a:latin typeface="Helvetica"/>
+                <a:latin typeface="Helvetica Neue"/>
               </a:defRPr>
             </a:pPr>
             <a:r>
@@ -4324,7 +5333,7 @@
             <a:r>
               <a:rPr b="0">
                 <a:solidFill>
-                  <a:srgbClr val="59564D"/>
+                  <a:srgbClr val="454337"/>
                 </a:solidFill>
               </a:rPr>
               <a:t>Teams needing high-velocity technical execution &amp; architecture.</a:t>
@@ -4339,7 +5348,7 @@
                 <a:solidFill>
                   <a:srgbClr val="16161A"/>
                 </a:solidFill>
-                <a:latin typeface="Helvetica"/>
+                <a:latin typeface="Helvetica Neue"/>
               </a:defRPr>
             </a:pPr>
             <a:r>
@@ -4348,7 +5357,7 @@
             <a:r>
               <a:rPr b="0">
                 <a:solidFill>
-                  <a:srgbClr val="59564D"/>
+                  <a:srgbClr val="454337"/>
                 </a:solidFill>
               </a:rPr>
               <a:t>Portfolio companies streamlining back-office operational efficiency.</a:t>
@@ -4358,14 +5367,14 @@
       </p:sp>
       <p:sp>
         <p:nvSpPr>
-          <p:cNvPr id="6" name="Rounded Rectangle 5"/>
+          <p:cNvPr id="13" name="Rounded Rectangle 12"/>
           <p:cNvSpPr/>
           <p:nvPr/>
         </p:nvSpPr>
         <p:spPr>
           <a:xfrm>
-            <a:off x="6248095" y="1874519"/>
-            <a:ext cx="5120640" cy="4023360"/>
+            <a:off x="6300216" y="1874519"/>
+            <a:ext cx="5157216" cy="4114800"/>
           </a:xfrm>
           <a:prstGeom prst="roundRect">
             <a:avLst/>
@@ -4375,7 +5384,7 @@
           </a:solidFill>
           <a:ln w="12700">
             <a:solidFill>
-              <a:srgbClr val="EBE7DF"/>
+              <a:srgbClr val="E2DDD0"/>
             </a:solidFill>
           </a:ln>
         </p:spPr>
@@ -4403,14 +5412,14 @@
       </p:sp>
       <p:sp>
         <p:nvSpPr>
-          <p:cNvPr id="7" name="TextBox 6"/>
+          <p:cNvPr id="14" name="TextBox 13"/>
           <p:cNvSpPr txBox="1"/>
           <p:nvPr/>
         </p:nvSpPr>
         <p:spPr>
           <a:xfrm>
-            <a:off x="6522415" y="2194559"/>
-            <a:ext cx="4572000" cy="3474720"/>
+            <a:off x="6574536" y="2194559"/>
+            <a:ext cx="4608576" cy="3566160"/>
           </a:xfrm>
           <a:prstGeom prst="rect">
             <a:avLst/>
@@ -4431,7 +5440,7 @@
                 <a:solidFill>
                   <a:srgbClr val="D99B26"/>
                 </a:solidFill>
-                <a:latin typeface="Courier New"/>
+                <a:latin typeface="Helvetica Neue"/>
               </a:defRPr>
             </a:pPr>
             <a:r>
@@ -4447,7 +5456,7 @@
                 <a:solidFill>
                   <a:srgbClr val="16161A"/>
                 </a:solidFill>
-                <a:latin typeface="Helvetica"/>
+                <a:latin typeface="Helvetica Neue"/>
               </a:defRPr>
             </a:pPr>
             <a:r>
@@ -4456,7 +5465,7 @@
             <a:r>
               <a:rPr b="0">
                 <a:solidFill>
-                  <a:srgbClr val="59564D"/>
+                  <a:srgbClr val="454337"/>
                 </a:solidFill>
               </a:rPr>
               <a:t>Offloading specialized integration &amp; AI agent frontends.</a:t>
@@ -4471,7 +5480,7 @@
                 <a:solidFill>
                   <a:srgbClr val="16161A"/>
                 </a:solidFill>
-                <a:latin typeface="Helvetica"/>
+                <a:latin typeface="Helvetica Neue"/>
               </a:defRPr>
             </a:pPr>
             <a:r>
@@ -4480,7 +5489,7 @@
             <a:r>
               <a:rPr b="0">
                 <a:solidFill>
-                  <a:srgbClr val="59564D"/>
+                  <a:srgbClr val="454337"/>
                 </a:solidFill>
               </a:rPr>
               <a:t>Struggling with Workday/ERP data bottlenecks and reporting.</a:t>
@@ -4495,7 +5504,7 @@
                 <a:solidFill>
                   <a:srgbClr val="16161A"/>
                 </a:solidFill>
-                <a:latin typeface="Helvetica"/>
+                <a:latin typeface="Helvetica Neue"/>
               </a:defRPr>
             </a:pPr>
             <a:r>
@@ -4504,7 +5513,7 @@
             <a:r>
               <a:rPr b="0">
                 <a:solidFill>
-                  <a:srgbClr val="59564D"/>
+                  <a:srgbClr val="454337"/>
                 </a:solidFill>
               </a:rPr>
               <a:t>Seeking to eliminate manual document &amp; workflow overhead.</a:t>
@@ -4519,7 +5528,7 @@
                 <a:solidFill>
                   <a:srgbClr val="16161A"/>
                 </a:solidFill>
-                <a:latin typeface="Helvetica"/>
+                <a:latin typeface="Helvetica Neue"/>
               </a:defRPr>
             </a:pPr>
             <a:r>
@@ -4528,7 +5537,7 @@
             <a:r>
               <a:rPr b="0">
                 <a:solidFill>
-                  <a:srgbClr val="59564D"/>
+                  <a:srgbClr val="454337"/>
                 </a:solidFill>
               </a:rPr>
               <a:t>Building mission-critical web software under tight deadlines.</a:t>
@@ -4538,20 +5547,20 @@
       </p:sp>
       <p:sp>
         <p:nvSpPr>
-          <p:cNvPr id="8" name="Rectangle 7"/>
+          <p:cNvPr id="15" name="Rectangle 14"/>
           <p:cNvSpPr/>
           <p:nvPr/>
         </p:nvSpPr>
         <p:spPr>
           <a:xfrm>
-            <a:off x="822960" y="6309360"/>
-            <a:ext cx="10545775" cy="12700"/>
+            <a:off x="731520" y="6327648"/>
+            <a:ext cx="10728655" cy="12700"/>
           </a:xfrm>
           <a:prstGeom prst="rect">
             <a:avLst/>
           </a:prstGeom>
           <a:solidFill>
-            <a:srgbClr val="EBE7DF"/>
+            <a:srgbClr val="E2DDD0"/>
           </a:solidFill>
           <a:ln>
             <a:noFill/>
@@ -4581,13 +5590,13 @@
       </p:sp>
       <p:sp>
         <p:nvSpPr>
-          <p:cNvPr id="9" name="TextBox 8"/>
+          <p:cNvPr id="16" name="TextBox 15"/>
           <p:cNvSpPr txBox="1"/>
           <p:nvPr/>
         </p:nvSpPr>
         <p:spPr>
           <a:xfrm>
-            <a:off x="822960" y="6382512"/>
+            <a:off x="731520" y="6400800"/>
             <a:ext cx="7315200" cy="320040"/>
           </a:xfrm>
           <a:prstGeom prst="rect">
@@ -4604,9 +5613,9 @@
             <a:pPr>
               <a:defRPr sz="1000">
                 <a:solidFill>
-                  <a:srgbClr val="7C786C"/>
-                </a:solidFill>
-                <a:latin typeface="Courier New"/>
+                  <a:srgbClr val="5F5C52"/>
+                </a:solidFill>
+                <a:latin typeface="Helvetica Neue"/>
               </a:defRPr>
             </a:pPr>
             <a:r>
@@ -4617,13 +5626,13 @@
       </p:sp>
       <p:sp>
         <p:nvSpPr>
-          <p:cNvPr id="10" name="TextBox 9"/>
+          <p:cNvPr id="17" name="TextBox 16"/>
           <p:cNvSpPr txBox="1"/>
           <p:nvPr/>
         </p:nvSpPr>
         <p:spPr>
           <a:xfrm>
-            <a:off x="9539935" y="6382512"/>
+            <a:off x="9631375" y="6400800"/>
             <a:ext cx="1828800" cy="320040"/>
           </a:xfrm>
           <a:prstGeom prst="rect">
@@ -4640,9 +5649,9 @@
             <a:pPr algn="r">
               <a:defRPr sz="1000">
                 <a:solidFill>
-                  <a:srgbClr val="7C786C"/>
-                </a:solidFill>
-                <a:latin typeface="Courier New"/>
+                  <a:srgbClr val="5F5C52"/>
+                </a:solidFill>
+                <a:latin typeface="Helvetica Neue"/>
               </a:defRPr>
             </a:pPr>
             <a:r>
@@ -4665,7 +5674,7 @@
     <p:bg>
       <p:bgPr>
         <a:solidFill>
-          <a:srgbClr val="FAF9F5"/>
+          <a:srgbClr val="FBFAF5"/>
         </a:solidFill>
         <a:effectLst/>
       </p:bgPr>
@@ -4679,14 +5688,102 @@
       <p:grpSpPr/>
       <p:sp>
         <p:nvSpPr>
-          <p:cNvPr id="2" name="TextBox 1"/>
+          <p:cNvPr id="2" name="Rectangle 1"/>
+          <p:cNvSpPr/>
+          <p:nvPr/>
+        </p:nvSpPr>
+        <p:spPr>
+          <a:xfrm>
+            <a:off x="0" y="0"/>
+            <a:ext cx="12191695" cy="594360"/>
+          </a:xfrm>
+          <a:prstGeom prst="rect">
+            <a:avLst/>
+          </a:prstGeom>
+          <a:solidFill>
+            <a:srgbClr val="121216"/>
+          </a:solidFill>
+          <a:ln w="12700">
+            <a:solidFill>
+              <a:srgbClr val="26262C"/>
+            </a:solidFill>
+          </a:ln>
+        </p:spPr>
+        <p:style>
+          <a:lnRef idx="1">
+            <a:schemeClr val="accent1"/>
+          </a:lnRef>
+          <a:fillRef idx="3">
+            <a:schemeClr val="accent1"/>
+          </a:fillRef>
+          <a:effectRef idx="2">
+            <a:schemeClr val="accent1"/>
+          </a:effectRef>
+          <a:fontRef idx="minor">
+            <a:schemeClr val="lt1"/>
+          </a:fontRef>
+        </p:style>
+        <p:txBody>
+          <a:bodyPr rtlCol="0" anchor="ctr"/>
+          <a:lstStyle/>
+          <a:p>
+            <a:pPr algn="ctr"/>
+          </a:p>
+        </p:txBody>
+      </p:sp>
+      <p:sp>
+        <p:nvSpPr>
+          <p:cNvPr id="3" name="Rounded Rectangle 2"/>
+          <p:cNvSpPr/>
+          <p:nvPr/>
+        </p:nvSpPr>
+        <p:spPr>
+          <a:xfrm>
+            <a:off x="731520" y="146304"/>
+            <a:ext cx="310896" cy="310896"/>
+          </a:xfrm>
+          <a:prstGeom prst="roundRect">
+            <a:avLst/>
+          </a:prstGeom>
+          <a:solidFill>
+            <a:srgbClr val="2B59D9"/>
+          </a:solidFill>
+          <a:ln>
+            <a:noFill/>
+          </a:ln>
+        </p:spPr>
+        <p:style>
+          <a:lnRef idx="1">
+            <a:schemeClr val="accent1"/>
+          </a:lnRef>
+          <a:fillRef idx="3">
+            <a:schemeClr val="accent1"/>
+          </a:fillRef>
+          <a:effectRef idx="2">
+            <a:schemeClr val="accent1"/>
+          </a:effectRef>
+          <a:fontRef idx="minor">
+            <a:schemeClr val="lt1"/>
+          </a:fontRef>
+        </p:style>
+        <p:txBody>
+          <a:bodyPr rtlCol="0" anchor="ctr"/>
+          <a:lstStyle/>
+          <a:p>
+            <a:pPr algn="ctr"/>
+          </a:p>
+        </p:txBody>
+      </p:sp>
+      <p:sp>
+        <p:nvSpPr>
+          <p:cNvPr id="4" name="TextBox 3"/>
           <p:cNvSpPr txBox="1"/>
           <p:nvPr/>
         </p:nvSpPr>
         <p:spPr>
           <a:xfrm>
-            <a:off x="822960" y="548640"/>
-            <a:ext cx="10515600" cy="320040"/>
+            <a:off x="731520" y="128016"/>
+            <a:ext cx="310896" cy="310896"/>
           </a:xfrm>
           <a:prstGeom prst="rect">
             <a:avLst/>
@@ -4699,12 +5796,199 @@
           </a:bodyPr>
           <a:lstStyle/>
           <a:p>
+            <a:pPr algn="ctr">
+              <a:defRPr sz="1600" b="1">
+                <a:solidFill>
+                  <a:srgbClr val="FFFFFF"/>
+                </a:solidFill>
+                <a:latin typeface="Helvetica Neue"/>
+              </a:defRPr>
+            </a:pPr>
+            <a:r>
+              <a:t>›</a:t>
+            </a:r>
+          </a:p>
+        </p:txBody>
+      </p:sp>
+      <p:sp>
+        <p:nvSpPr>
+          <p:cNvPr id="5" name="TextBox 4"/>
+          <p:cNvSpPr txBox="1"/>
+          <p:nvPr/>
+        </p:nvSpPr>
+        <p:spPr>
+          <a:xfrm>
+            <a:off x="1143000" y="164592"/>
+            <a:ext cx="3200400" cy="292608"/>
+          </a:xfrm>
+          <a:prstGeom prst="rect">
+            <a:avLst/>
+          </a:prstGeom>
+          <a:noFill/>
+        </p:spPr>
+        <p:txBody>
+          <a:bodyPr wrap="none" lIns="0" tIns="0" rIns="0" bIns="0">
+            <a:spAutoFit/>
+          </a:bodyPr>
+          <a:lstStyle/>
+          <a:p>
+            <a:pPr>
+              <a:defRPr sz="1300" b="1">
+                <a:solidFill>
+                  <a:srgbClr val="FFFFFF"/>
+                </a:solidFill>
+                <a:latin typeface="Helvetica Neue"/>
+              </a:defRPr>
+            </a:pPr>
+            <a:r>
+              <a:t>Technology Consultants</a:t>
+            </a:r>
+          </a:p>
+        </p:txBody>
+      </p:sp>
+      <p:sp>
+        <p:nvSpPr>
+          <p:cNvPr id="6" name="TextBox 5"/>
+          <p:cNvSpPr txBox="1"/>
+          <p:nvPr/>
+        </p:nvSpPr>
+        <p:spPr>
+          <a:xfrm>
+            <a:off x="5029200" y="182880"/>
+            <a:ext cx="4754880" cy="292608"/>
+          </a:xfrm>
+          <a:prstGeom prst="rect">
+            <a:avLst/>
+          </a:prstGeom>
+          <a:noFill/>
+        </p:spPr>
+        <p:txBody>
+          <a:bodyPr wrap="none" lIns="0" tIns="0" rIns="0" bIns="0">
+            <a:spAutoFit/>
+          </a:bodyPr>
+          <a:lstStyle/>
+          <a:p>
+            <a:pPr algn="r">
+              <a:defRPr sz="1000">
+                <a:solidFill>
+                  <a:srgbClr val="C8CDD7"/>
+                </a:solidFill>
+                <a:latin typeface="Helvetica Neue"/>
+              </a:defRPr>
+            </a:pPr>
+            <a:r>
+              <a:t>Services   ·   Work   ·   How we work   ·   About   ·   FAQ</a:t>
+            </a:r>
+          </a:p>
+        </p:txBody>
+      </p:sp>
+      <p:sp>
+        <p:nvSpPr>
+          <p:cNvPr id="7" name="Rounded Rectangle 6"/>
+          <p:cNvSpPr/>
+          <p:nvPr/>
+        </p:nvSpPr>
+        <p:spPr>
+          <a:xfrm>
+            <a:off x="10058400" y="128016"/>
+            <a:ext cx="1371600" cy="329184"/>
+          </a:xfrm>
+          <a:prstGeom prst="roundRect">
+            <a:avLst/>
+          </a:prstGeom>
+          <a:solidFill>
+            <a:srgbClr val="FFFFFF"/>
+          </a:solidFill>
+          <a:ln>
+            <a:noFill/>
+          </a:ln>
+        </p:spPr>
+        <p:style>
+          <a:lnRef idx="1">
+            <a:schemeClr val="accent1"/>
+          </a:lnRef>
+          <a:fillRef idx="3">
+            <a:schemeClr val="accent1"/>
+          </a:fillRef>
+          <a:effectRef idx="2">
+            <a:schemeClr val="accent1"/>
+          </a:effectRef>
+          <a:fontRef idx="minor">
+            <a:schemeClr val="lt1"/>
+          </a:fontRef>
+        </p:style>
+        <p:txBody>
+          <a:bodyPr rtlCol="0" anchor="ctr"/>
+          <a:lstStyle/>
+          <a:p>
+            <a:pPr algn="ctr"/>
+          </a:p>
+        </p:txBody>
+      </p:sp>
+      <p:sp>
+        <p:nvSpPr>
+          <p:cNvPr id="8" name="TextBox 7"/>
+          <p:cNvSpPr txBox="1"/>
+          <p:nvPr/>
+        </p:nvSpPr>
+        <p:spPr>
+          <a:xfrm>
+            <a:off x="10058400" y="164592"/>
+            <a:ext cx="1371600" cy="274320"/>
+          </a:xfrm>
+          <a:prstGeom prst="rect">
+            <a:avLst/>
+          </a:prstGeom>
+          <a:noFill/>
+        </p:spPr>
+        <p:txBody>
+          <a:bodyPr wrap="none" lIns="0" tIns="0" rIns="0" bIns="0">
+            <a:spAutoFit/>
+          </a:bodyPr>
+          <a:lstStyle/>
+          <a:p>
+            <a:pPr algn="ctr">
+              <a:defRPr sz="1000" b="1">
+                <a:solidFill>
+                  <a:srgbClr val="16161A"/>
+                </a:solidFill>
+                <a:latin typeface="Helvetica Neue"/>
+              </a:defRPr>
+            </a:pPr>
+            <a:r>
+              <a:t>Book a call</a:t>
+            </a:r>
+          </a:p>
+        </p:txBody>
+      </p:sp>
+      <p:sp>
+        <p:nvSpPr>
+          <p:cNvPr id="9" name="TextBox 8"/>
+          <p:cNvSpPr txBox="1"/>
+          <p:nvPr/>
+        </p:nvSpPr>
+        <p:spPr>
+          <a:xfrm>
+            <a:off x="731520" y="777240"/>
+            <a:ext cx="10728655" cy="274320"/>
+          </a:xfrm>
+          <a:prstGeom prst="rect">
+            <a:avLst/>
+          </a:prstGeom>
+          <a:noFill/>
+        </p:spPr>
+        <p:txBody>
+          <a:bodyPr wrap="none" lIns="0" tIns="0" rIns="0" bIns="0">
+            <a:spAutoFit/>
+          </a:bodyPr>
+          <a:lstStyle/>
+          <a:p>
             <a:pPr>
               <a:defRPr sz="1100" b="1">
                 <a:solidFill>
-                  <a:srgbClr val="D99B26"/>
-                </a:solidFill>
-                <a:latin typeface="Courier New"/>
+                  <a:srgbClr val="2B59D9"/>
+                </a:solidFill>
+                <a:latin typeface="Helvetica Neue"/>
               </a:defRPr>
             </a:pPr>
             <a:r>
@@ -4715,14 +5999,14 @@
       </p:sp>
       <p:sp>
         <p:nvSpPr>
-          <p:cNvPr id="3" name="TextBox 2"/>
+          <p:cNvPr id="10" name="TextBox 9"/>
           <p:cNvSpPr txBox="1"/>
           <p:nvPr/>
         </p:nvSpPr>
         <p:spPr>
           <a:xfrm>
-            <a:off x="822960" y="868680"/>
-            <a:ext cx="10515600" cy="685800"/>
+            <a:off x="731520" y="1051560"/>
+            <a:ext cx="10728655" cy="640080"/>
           </a:xfrm>
           <a:prstGeom prst="rect">
             <a:avLst/>
@@ -4736,11 +6020,11 @@
           <a:lstStyle/>
           <a:p>
             <a:pPr>
-              <a:defRPr sz="2600" b="1">
+              <a:defRPr sz="2500" b="1">
                 <a:solidFill>
                   <a:srgbClr val="16161A"/>
                 </a:solidFill>
-                <a:latin typeface="Helvetica"/>
+                <a:latin typeface="Helvetica Neue"/>
               </a:defRPr>
             </a:pPr>
             <a:r>
@@ -4751,14 +6035,14 @@
       </p:sp>
       <p:sp>
         <p:nvSpPr>
-          <p:cNvPr id="4" name="Rounded Rectangle 3"/>
+          <p:cNvPr id="11" name="Rounded Rectangle 10"/>
           <p:cNvSpPr/>
           <p:nvPr/>
         </p:nvSpPr>
         <p:spPr>
           <a:xfrm>
-            <a:off x="822960" y="1874519"/>
-            <a:ext cx="10545775" cy="1261872"/>
+            <a:off x="731520" y="1874519"/>
+            <a:ext cx="10728655" cy="1261872"/>
           </a:xfrm>
           <a:prstGeom prst="roundRect">
             <a:avLst/>
@@ -4768,7 +6052,7 @@
           </a:solidFill>
           <a:ln w="12700">
             <a:solidFill>
-              <a:srgbClr val="EBE7DF"/>
+              <a:srgbClr val="E2DDD0"/>
             </a:solidFill>
           </a:ln>
         </p:spPr>
@@ -4796,14 +6080,14 @@
       </p:sp>
       <p:sp>
         <p:nvSpPr>
-          <p:cNvPr id="5" name="TextBox 4"/>
+          <p:cNvPr id="12" name="TextBox 11"/>
           <p:cNvSpPr txBox="1"/>
           <p:nvPr/>
         </p:nvSpPr>
         <p:spPr>
           <a:xfrm>
-            <a:off x="1097280" y="2011679"/>
-            <a:ext cx="9966960" cy="1005840"/>
+            <a:off x="1005840" y="2011679"/>
+            <a:ext cx="10180015" cy="1005840"/>
           </a:xfrm>
           <a:prstGeom prst="rect">
             <a:avLst/>
@@ -4824,20 +6108,20 @@
                 <a:solidFill>
                   <a:srgbClr val="2B59D9"/>
                 </a:solidFill>
-                <a:latin typeface="Courier New"/>
-              </a:defRPr>
-            </a:pPr>
-            <a:r>
-              <a:t>01 / DISCONNECTED BACKENDS &amp; ERPS</a:t>
-            </a:r>
-          </a:p>
-          <a:p>
-            <a:pPr>
-              <a:defRPr sz="1400" i="1">
+                <a:latin typeface="Helvetica Neue"/>
+              </a:defRPr>
+            </a:pPr>
+            <a:r>
+              <a:t>SIGNAL 01  ·  DISCONNECTED BACKENDS &amp; ERPS</a:t>
+            </a:r>
+          </a:p>
+          <a:p>
+            <a:pPr>
+              <a:defRPr sz="1400">
                 <a:solidFill>
                   <a:srgbClr val="16161A"/>
                 </a:solidFill>
-                <a:latin typeface="Helvetica"/>
+                <a:latin typeface="Helvetica Neue"/>
               </a:defRPr>
             </a:pPr>
             <a:r>
@@ -4848,14 +6132,14 @@
       </p:sp>
       <p:sp>
         <p:nvSpPr>
-          <p:cNvPr id="6" name="Rounded Rectangle 5"/>
+          <p:cNvPr id="13" name="Rounded Rectangle 12"/>
           <p:cNvSpPr/>
           <p:nvPr/>
         </p:nvSpPr>
         <p:spPr>
           <a:xfrm>
-            <a:off x="822960" y="3291839"/>
-            <a:ext cx="10545775" cy="1261872"/>
+            <a:off x="731520" y="3291839"/>
+            <a:ext cx="10728655" cy="1261872"/>
           </a:xfrm>
           <a:prstGeom prst="roundRect">
             <a:avLst/>
@@ -4865,7 +6149,7 @@
           </a:solidFill>
           <a:ln w="12700">
             <a:solidFill>
-              <a:srgbClr val="EBE7DF"/>
+              <a:srgbClr val="E2DDD0"/>
             </a:solidFill>
           </a:ln>
         </p:spPr>
@@ -4893,14 +6177,14 @@
       </p:sp>
       <p:sp>
         <p:nvSpPr>
-          <p:cNvPr id="7" name="TextBox 6"/>
+          <p:cNvPr id="14" name="TextBox 13"/>
           <p:cNvSpPr txBox="1"/>
           <p:nvPr/>
         </p:nvSpPr>
         <p:spPr>
           <a:xfrm>
-            <a:off x="1097280" y="3428999"/>
-            <a:ext cx="9966960" cy="1005840"/>
+            <a:off x="1005840" y="3428999"/>
+            <a:ext cx="10180015" cy="1005840"/>
           </a:xfrm>
           <a:prstGeom prst="rect">
             <a:avLst/>
@@ -4921,20 +6205,20 @@
                 <a:solidFill>
                   <a:srgbClr val="2B59D9"/>
                 </a:solidFill>
-                <a:latin typeface="Courier New"/>
-              </a:defRPr>
-            </a:pPr>
-            <a:r>
-              <a:t>02 / AI AMBITIONS VS. ENTERPRISE SECURITY</a:t>
-            </a:r>
-          </a:p>
-          <a:p>
-            <a:pPr>
-              <a:defRPr sz="1400" i="1">
+                <a:latin typeface="Helvetica Neue"/>
+              </a:defRPr>
+            </a:pPr>
+            <a:r>
+              <a:t>SIGNAL 02  ·  AI AMBITIONS VS. ENTERPRISE SECURITY</a:t>
+            </a:r>
+          </a:p>
+          <a:p>
+            <a:pPr>
+              <a:defRPr sz="1400">
                 <a:solidFill>
                   <a:srgbClr val="16161A"/>
                 </a:solidFill>
-                <a:latin typeface="Helvetica"/>
+                <a:latin typeface="Helvetica Neue"/>
               </a:defRPr>
             </a:pPr>
             <a:r>
@@ -4945,14 +6229,14 @@
       </p:sp>
       <p:sp>
         <p:nvSpPr>
-          <p:cNvPr id="8" name="Rounded Rectangle 7"/>
+          <p:cNvPr id="15" name="Rounded Rectangle 14"/>
           <p:cNvSpPr/>
           <p:nvPr/>
         </p:nvSpPr>
         <p:spPr>
           <a:xfrm>
-            <a:off x="822960" y="4709160"/>
-            <a:ext cx="10545775" cy="1261872"/>
+            <a:off x="731520" y="4709160"/>
+            <a:ext cx="10728655" cy="1261872"/>
           </a:xfrm>
           <a:prstGeom prst="roundRect">
             <a:avLst/>
@@ -4962,7 +6246,7 @@
           </a:solidFill>
           <a:ln w="12700">
             <a:solidFill>
-              <a:srgbClr val="EBE7DF"/>
+              <a:srgbClr val="E2DDD0"/>
             </a:solidFill>
           </a:ln>
         </p:spPr>
@@ -4990,14 +6274,14 @@
       </p:sp>
       <p:sp>
         <p:nvSpPr>
-          <p:cNvPr id="9" name="TextBox 8"/>
+          <p:cNvPr id="16" name="TextBox 15"/>
           <p:cNvSpPr txBox="1"/>
           <p:nvPr/>
         </p:nvSpPr>
         <p:spPr>
           <a:xfrm>
-            <a:off x="1097280" y="4846320"/>
-            <a:ext cx="9966960" cy="1005840"/>
+            <a:off x="1005840" y="4846320"/>
+            <a:ext cx="10180015" cy="1005840"/>
           </a:xfrm>
           <a:prstGeom prst="rect">
             <a:avLst/>
@@ -5018,20 +6302,20 @@
                 <a:solidFill>
                   <a:srgbClr val="2B59D9"/>
                 </a:solidFill>
-                <a:latin typeface="Courier New"/>
-              </a:defRPr>
-            </a:pPr>
-            <a:r>
-              <a:t>03 / MANUAL PROCESS BOTTLENECKS</a:t>
-            </a:r>
-          </a:p>
-          <a:p>
-            <a:pPr>
-              <a:defRPr sz="1400" i="1">
+                <a:latin typeface="Helvetica Neue"/>
+              </a:defRPr>
+            </a:pPr>
+            <a:r>
+              <a:t>SIGNAL 03  ·  MANUAL PROCESS BOTTLENECKS</a:t>
+            </a:r>
+          </a:p>
+          <a:p>
+            <a:pPr>
+              <a:defRPr sz="1400">
                 <a:solidFill>
                   <a:srgbClr val="16161A"/>
                 </a:solidFill>
-                <a:latin typeface="Helvetica"/>
+                <a:latin typeface="Helvetica Neue"/>
               </a:defRPr>
             </a:pPr>
             <a:r>
@@ -5042,20 +6326,20 @@
       </p:sp>
       <p:sp>
         <p:nvSpPr>
-          <p:cNvPr id="10" name="Rectangle 9"/>
+          <p:cNvPr id="17" name="Rectangle 16"/>
           <p:cNvSpPr/>
           <p:nvPr/>
         </p:nvSpPr>
         <p:spPr>
           <a:xfrm>
-            <a:off x="822960" y="6309360"/>
-            <a:ext cx="10545775" cy="12700"/>
+            <a:off x="731520" y="6327648"/>
+            <a:ext cx="10728655" cy="12700"/>
           </a:xfrm>
           <a:prstGeom prst="rect">
             <a:avLst/>
           </a:prstGeom>
           <a:solidFill>
-            <a:srgbClr val="EBE7DF"/>
+            <a:srgbClr val="E2DDD0"/>
           </a:solidFill>
           <a:ln>
             <a:noFill/>
@@ -5085,13 +6369,13 @@
       </p:sp>
       <p:sp>
         <p:nvSpPr>
-          <p:cNvPr id="11" name="TextBox 10"/>
+          <p:cNvPr id="18" name="TextBox 17"/>
           <p:cNvSpPr txBox="1"/>
           <p:nvPr/>
         </p:nvSpPr>
         <p:spPr>
           <a:xfrm>
-            <a:off x="822960" y="6382512"/>
+            <a:off x="731520" y="6400800"/>
             <a:ext cx="7315200" cy="320040"/>
           </a:xfrm>
           <a:prstGeom prst="rect">
@@ -5108,9 +6392,9 @@
             <a:pPr>
               <a:defRPr sz="1000">
                 <a:solidFill>
-                  <a:srgbClr val="7C786C"/>
-                </a:solidFill>
-                <a:latin typeface="Courier New"/>
+                  <a:srgbClr val="5F5C52"/>
+                </a:solidFill>
+                <a:latin typeface="Helvetica Neue"/>
               </a:defRPr>
             </a:pPr>
             <a:r>
@@ -5121,13 +6405,13 @@
       </p:sp>
       <p:sp>
         <p:nvSpPr>
-          <p:cNvPr id="12" name="TextBox 11"/>
+          <p:cNvPr id="19" name="TextBox 18"/>
           <p:cNvSpPr txBox="1"/>
           <p:nvPr/>
         </p:nvSpPr>
         <p:spPr>
           <a:xfrm>
-            <a:off x="9539935" y="6382512"/>
+            <a:off x="9631375" y="6400800"/>
             <a:ext cx="1828800" cy="320040"/>
           </a:xfrm>
           <a:prstGeom prst="rect">
@@ -5144,9 +6428,9 @@
             <a:pPr algn="r">
               <a:defRPr sz="1000">
                 <a:solidFill>
-                  <a:srgbClr val="7C786C"/>
-                </a:solidFill>
-                <a:latin typeface="Courier New"/>
+                  <a:srgbClr val="5F5C52"/>
+                </a:solidFill>
+                <a:latin typeface="Helvetica Neue"/>
               </a:defRPr>
             </a:pPr>
             <a:r>
@@ -5169,7 +6453,7 @@
     <p:bg>
       <p:bgPr>
         <a:solidFill>
-          <a:srgbClr val="FAF9F5"/>
+          <a:srgbClr val="FBFAF5"/>
         </a:solidFill>
         <a:effectLst/>
       </p:bgPr>
@@ -5183,14 +6467,102 @@
       <p:grpSpPr/>
       <p:sp>
         <p:nvSpPr>
-          <p:cNvPr id="2" name="TextBox 1"/>
+          <p:cNvPr id="2" name="Rectangle 1"/>
+          <p:cNvSpPr/>
+          <p:nvPr/>
+        </p:nvSpPr>
+        <p:spPr>
+          <a:xfrm>
+            <a:off x="0" y="0"/>
+            <a:ext cx="12191695" cy="594360"/>
+          </a:xfrm>
+          <a:prstGeom prst="rect">
+            <a:avLst/>
+          </a:prstGeom>
+          <a:solidFill>
+            <a:srgbClr val="121216"/>
+          </a:solidFill>
+          <a:ln w="12700">
+            <a:solidFill>
+              <a:srgbClr val="26262C"/>
+            </a:solidFill>
+          </a:ln>
+        </p:spPr>
+        <p:style>
+          <a:lnRef idx="1">
+            <a:schemeClr val="accent1"/>
+          </a:lnRef>
+          <a:fillRef idx="3">
+            <a:schemeClr val="accent1"/>
+          </a:fillRef>
+          <a:effectRef idx="2">
+            <a:schemeClr val="accent1"/>
+          </a:effectRef>
+          <a:fontRef idx="minor">
+            <a:schemeClr val="lt1"/>
+          </a:fontRef>
+        </p:style>
+        <p:txBody>
+          <a:bodyPr rtlCol="0" anchor="ctr"/>
+          <a:lstStyle/>
+          <a:p>
+            <a:pPr algn="ctr"/>
+          </a:p>
+        </p:txBody>
+      </p:sp>
+      <p:sp>
+        <p:nvSpPr>
+          <p:cNvPr id="3" name="Rounded Rectangle 2"/>
+          <p:cNvSpPr/>
+          <p:nvPr/>
+        </p:nvSpPr>
+        <p:spPr>
+          <a:xfrm>
+            <a:off x="731520" y="146304"/>
+            <a:ext cx="310896" cy="310896"/>
+          </a:xfrm>
+          <a:prstGeom prst="roundRect">
+            <a:avLst/>
+          </a:prstGeom>
+          <a:solidFill>
+            <a:srgbClr val="2B59D9"/>
+          </a:solidFill>
+          <a:ln>
+            <a:noFill/>
+          </a:ln>
+        </p:spPr>
+        <p:style>
+          <a:lnRef idx="1">
+            <a:schemeClr val="accent1"/>
+          </a:lnRef>
+          <a:fillRef idx="3">
+            <a:schemeClr val="accent1"/>
+          </a:fillRef>
+          <a:effectRef idx="2">
+            <a:schemeClr val="accent1"/>
+          </a:effectRef>
+          <a:fontRef idx="minor">
+            <a:schemeClr val="lt1"/>
+          </a:fontRef>
+        </p:style>
+        <p:txBody>
+          <a:bodyPr rtlCol="0" anchor="ctr"/>
+          <a:lstStyle/>
+          <a:p>
+            <a:pPr algn="ctr"/>
+          </a:p>
+        </p:txBody>
+      </p:sp>
+      <p:sp>
+        <p:nvSpPr>
+          <p:cNvPr id="4" name="TextBox 3"/>
           <p:cNvSpPr txBox="1"/>
           <p:nvPr/>
         </p:nvSpPr>
         <p:spPr>
           <a:xfrm>
-            <a:off x="822960" y="548640"/>
-            <a:ext cx="10515600" cy="320040"/>
+            <a:off x="731520" y="128016"/>
+            <a:ext cx="310896" cy="310896"/>
           </a:xfrm>
           <a:prstGeom prst="rect">
             <a:avLst/>
@@ -5203,12 +6575,199 @@
           </a:bodyPr>
           <a:lstStyle/>
           <a:p>
+            <a:pPr algn="ctr">
+              <a:defRPr sz="1600" b="1">
+                <a:solidFill>
+                  <a:srgbClr val="FFFFFF"/>
+                </a:solidFill>
+                <a:latin typeface="Helvetica Neue"/>
+              </a:defRPr>
+            </a:pPr>
+            <a:r>
+              <a:t>›</a:t>
+            </a:r>
+          </a:p>
+        </p:txBody>
+      </p:sp>
+      <p:sp>
+        <p:nvSpPr>
+          <p:cNvPr id="5" name="TextBox 4"/>
+          <p:cNvSpPr txBox="1"/>
+          <p:nvPr/>
+        </p:nvSpPr>
+        <p:spPr>
+          <a:xfrm>
+            <a:off x="1143000" y="164592"/>
+            <a:ext cx="3200400" cy="292608"/>
+          </a:xfrm>
+          <a:prstGeom prst="rect">
+            <a:avLst/>
+          </a:prstGeom>
+          <a:noFill/>
+        </p:spPr>
+        <p:txBody>
+          <a:bodyPr wrap="none" lIns="0" tIns="0" rIns="0" bIns="0">
+            <a:spAutoFit/>
+          </a:bodyPr>
+          <a:lstStyle/>
+          <a:p>
+            <a:pPr>
+              <a:defRPr sz="1300" b="1">
+                <a:solidFill>
+                  <a:srgbClr val="FFFFFF"/>
+                </a:solidFill>
+                <a:latin typeface="Helvetica Neue"/>
+              </a:defRPr>
+            </a:pPr>
+            <a:r>
+              <a:t>Technology Consultants</a:t>
+            </a:r>
+          </a:p>
+        </p:txBody>
+      </p:sp>
+      <p:sp>
+        <p:nvSpPr>
+          <p:cNvPr id="6" name="TextBox 5"/>
+          <p:cNvSpPr txBox="1"/>
+          <p:nvPr/>
+        </p:nvSpPr>
+        <p:spPr>
+          <a:xfrm>
+            <a:off x="5029200" y="182880"/>
+            <a:ext cx="4754880" cy="292608"/>
+          </a:xfrm>
+          <a:prstGeom prst="rect">
+            <a:avLst/>
+          </a:prstGeom>
+          <a:noFill/>
+        </p:spPr>
+        <p:txBody>
+          <a:bodyPr wrap="none" lIns="0" tIns="0" rIns="0" bIns="0">
+            <a:spAutoFit/>
+          </a:bodyPr>
+          <a:lstStyle/>
+          <a:p>
+            <a:pPr algn="r">
+              <a:defRPr sz="1000">
+                <a:solidFill>
+                  <a:srgbClr val="C8CDD7"/>
+                </a:solidFill>
+                <a:latin typeface="Helvetica Neue"/>
+              </a:defRPr>
+            </a:pPr>
+            <a:r>
+              <a:t>Services   ·   Work   ·   How we work   ·   About   ·   FAQ</a:t>
+            </a:r>
+          </a:p>
+        </p:txBody>
+      </p:sp>
+      <p:sp>
+        <p:nvSpPr>
+          <p:cNvPr id="7" name="Rounded Rectangle 6"/>
+          <p:cNvSpPr/>
+          <p:nvPr/>
+        </p:nvSpPr>
+        <p:spPr>
+          <a:xfrm>
+            <a:off x="10058400" y="128016"/>
+            <a:ext cx="1371600" cy="329184"/>
+          </a:xfrm>
+          <a:prstGeom prst="roundRect">
+            <a:avLst/>
+          </a:prstGeom>
+          <a:solidFill>
+            <a:srgbClr val="FFFFFF"/>
+          </a:solidFill>
+          <a:ln>
+            <a:noFill/>
+          </a:ln>
+        </p:spPr>
+        <p:style>
+          <a:lnRef idx="1">
+            <a:schemeClr val="accent1"/>
+          </a:lnRef>
+          <a:fillRef idx="3">
+            <a:schemeClr val="accent1"/>
+          </a:fillRef>
+          <a:effectRef idx="2">
+            <a:schemeClr val="accent1"/>
+          </a:effectRef>
+          <a:fontRef idx="minor">
+            <a:schemeClr val="lt1"/>
+          </a:fontRef>
+        </p:style>
+        <p:txBody>
+          <a:bodyPr rtlCol="0" anchor="ctr"/>
+          <a:lstStyle/>
+          <a:p>
+            <a:pPr algn="ctr"/>
+          </a:p>
+        </p:txBody>
+      </p:sp>
+      <p:sp>
+        <p:nvSpPr>
+          <p:cNvPr id="8" name="TextBox 7"/>
+          <p:cNvSpPr txBox="1"/>
+          <p:nvPr/>
+        </p:nvSpPr>
+        <p:spPr>
+          <a:xfrm>
+            <a:off x="10058400" y="164592"/>
+            <a:ext cx="1371600" cy="274320"/>
+          </a:xfrm>
+          <a:prstGeom prst="rect">
+            <a:avLst/>
+          </a:prstGeom>
+          <a:noFill/>
+        </p:spPr>
+        <p:txBody>
+          <a:bodyPr wrap="none" lIns="0" tIns="0" rIns="0" bIns="0">
+            <a:spAutoFit/>
+          </a:bodyPr>
+          <a:lstStyle/>
+          <a:p>
+            <a:pPr algn="ctr">
+              <a:defRPr sz="1000" b="1">
+                <a:solidFill>
+                  <a:srgbClr val="16161A"/>
+                </a:solidFill>
+                <a:latin typeface="Helvetica Neue"/>
+              </a:defRPr>
+            </a:pPr>
+            <a:r>
+              <a:t>Book a call</a:t>
+            </a:r>
+          </a:p>
+        </p:txBody>
+      </p:sp>
+      <p:sp>
+        <p:nvSpPr>
+          <p:cNvPr id="9" name="TextBox 8"/>
+          <p:cNvSpPr txBox="1"/>
+          <p:nvPr/>
+        </p:nvSpPr>
+        <p:spPr>
+          <a:xfrm>
+            <a:off x="731520" y="777240"/>
+            <a:ext cx="10728655" cy="274320"/>
+          </a:xfrm>
+          <a:prstGeom prst="rect">
+            <a:avLst/>
+          </a:prstGeom>
+          <a:noFill/>
+        </p:spPr>
+        <p:txBody>
+          <a:bodyPr wrap="none" lIns="0" tIns="0" rIns="0" bIns="0">
+            <a:spAutoFit/>
+          </a:bodyPr>
+          <a:lstStyle/>
+          <a:p>
             <a:pPr>
               <a:defRPr sz="1100" b="1">
                 <a:solidFill>
-                  <a:srgbClr val="D99B26"/>
-                </a:solidFill>
-                <a:latin typeface="Courier New"/>
+                  <a:srgbClr val="2B59D9"/>
+                </a:solidFill>
+                <a:latin typeface="Helvetica Neue"/>
               </a:defRPr>
             </a:pPr>
             <a:r>
@@ -5219,14 +6778,14 @@
       </p:sp>
       <p:sp>
         <p:nvSpPr>
-          <p:cNvPr id="3" name="TextBox 2"/>
+          <p:cNvPr id="10" name="TextBox 9"/>
           <p:cNvSpPr txBox="1"/>
           <p:nvPr/>
         </p:nvSpPr>
         <p:spPr>
           <a:xfrm>
-            <a:off x="822960" y="868680"/>
-            <a:ext cx="10515600" cy="685800"/>
+            <a:off x="731520" y="1051560"/>
+            <a:ext cx="10728655" cy="640080"/>
           </a:xfrm>
           <a:prstGeom prst="rect">
             <a:avLst/>
@@ -5240,11 +6799,11 @@
           <a:lstStyle/>
           <a:p>
             <a:pPr>
-              <a:defRPr sz="2600" b="1">
+              <a:defRPr sz="2500" b="1">
                 <a:solidFill>
                   <a:srgbClr val="16161A"/>
                 </a:solidFill>
-                <a:latin typeface="Helvetica"/>
+                <a:latin typeface="Helvetica Neue"/>
               </a:defRPr>
             </a:pPr>
             <a:r>
@@ -5255,14 +6814,14 @@
       </p:sp>
       <p:sp>
         <p:nvSpPr>
-          <p:cNvPr id="4" name="Rounded Rectangle 3"/>
+          <p:cNvPr id="11" name="Rounded Rectangle 10"/>
           <p:cNvSpPr/>
           <p:nvPr/>
         </p:nvSpPr>
         <p:spPr>
           <a:xfrm>
-            <a:off x="822960" y="1874519"/>
-            <a:ext cx="3328416" cy="3200400"/>
+            <a:off x="731520" y="1874519"/>
+            <a:ext cx="3328416" cy="3154680"/>
           </a:xfrm>
           <a:prstGeom prst="roundRect">
             <a:avLst/>
@@ -5272,7 +6831,7 @@
           </a:solidFill>
           <a:ln w="12700">
             <a:solidFill>
-              <a:srgbClr val="EBE7DF"/>
+              <a:srgbClr val="E2DDD0"/>
             </a:solidFill>
           </a:ln>
         </p:spPr>
@@ -5300,13 +6859,13 @@
       </p:sp>
       <p:sp>
         <p:nvSpPr>
-          <p:cNvPr id="5" name="TextBox 4"/>
+          <p:cNvPr id="12" name="TextBox 11"/>
           <p:cNvSpPr txBox="1"/>
           <p:nvPr/>
         </p:nvSpPr>
         <p:spPr>
           <a:xfrm>
-            <a:off x="1143000" y="2103120"/>
+            <a:off x="1051560" y="2103120"/>
             <a:ext cx="2688336" cy="2743200"/>
           </a:xfrm>
           <a:prstGeom prst="rect">
@@ -5328,7 +6887,7 @@
                 <a:solidFill>
                   <a:srgbClr val="D99B26"/>
                 </a:solidFill>
-                <a:latin typeface="Courier New"/>
+                <a:latin typeface="Helvetica Neue"/>
               </a:defRPr>
             </a:pPr>
             <a:r>
@@ -5344,7 +6903,7 @@
                 <a:solidFill>
                   <a:srgbClr val="16161A"/>
                 </a:solidFill>
-                <a:latin typeface="Helvetica"/>
+                <a:latin typeface="Helvetica Neue"/>
               </a:defRPr>
             </a:pPr>
             <a:r>
@@ -5355,9 +6914,9 @@
             <a:pPr>
               <a:defRPr sz="1300">
                 <a:solidFill>
-                  <a:srgbClr val="59564D"/>
-                </a:solidFill>
-                <a:latin typeface="Helvetica"/>
+                  <a:srgbClr val="454337"/>
+                </a:solidFill>
+                <a:latin typeface="Helvetica Neue"/>
               </a:defRPr>
             </a:pPr>
             <a:r>
@@ -5368,14 +6927,14 @@
       </p:sp>
       <p:sp>
         <p:nvSpPr>
-          <p:cNvPr id="6" name="Rounded Rectangle 5"/>
+          <p:cNvPr id="13" name="Rounded Rectangle 12"/>
           <p:cNvSpPr/>
           <p:nvPr/>
         </p:nvSpPr>
         <p:spPr>
           <a:xfrm>
-            <a:off x="4425696" y="1874519"/>
-            <a:ext cx="3328416" cy="3200400"/>
+            <a:off x="4334256" y="1874519"/>
+            <a:ext cx="3328416" cy="3154680"/>
           </a:xfrm>
           <a:prstGeom prst="roundRect">
             <a:avLst/>
@@ -5385,7 +6944,7 @@
           </a:solidFill>
           <a:ln w="12700">
             <a:solidFill>
-              <a:srgbClr val="EBE7DF"/>
+              <a:srgbClr val="E2DDD0"/>
             </a:solidFill>
           </a:ln>
         </p:spPr>
@@ -5413,13 +6972,13 @@
       </p:sp>
       <p:sp>
         <p:nvSpPr>
-          <p:cNvPr id="7" name="TextBox 6"/>
+          <p:cNvPr id="14" name="TextBox 13"/>
           <p:cNvSpPr txBox="1"/>
           <p:nvPr/>
         </p:nvSpPr>
         <p:spPr>
           <a:xfrm>
-            <a:off x="4745736" y="2103120"/>
+            <a:off x="4654296" y="2103120"/>
             <a:ext cx="2688336" cy="2743200"/>
           </a:xfrm>
           <a:prstGeom prst="rect">
@@ -5441,7 +7000,7 @@
                 <a:solidFill>
                   <a:srgbClr val="D99B26"/>
                 </a:solidFill>
-                <a:latin typeface="Courier New"/>
+                <a:latin typeface="Helvetica Neue"/>
               </a:defRPr>
             </a:pPr>
             <a:r>
@@ -5457,7 +7016,7 @@
                 <a:solidFill>
                   <a:srgbClr val="16161A"/>
                 </a:solidFill>
-                <a:latin typeface="Helvetica"/>
+                <a:latin typeface="Helvetica Neue"/>
               </a:defRPr>
             </a:pPr>
             <a:r>
@@ -5468,9 +7027,9 @@
             <a:pPr>
               <a:defRPr sz="1300">
                 <a:solidFill>
-                  <a:srgbClr val="59564D"/>
-                </a:solidFill>
-                <a:latin typeface="Helvetica"/>
+                  <a:srgbClr val="454337"/>
+                </a:solidFill>
+                <a:latin typeface="Helvetica Neue"/>
               </a:defRPr>
             </a:pPr>
             <a:r>
@@ -5481,14 +7040,14 @@
       </p:sp>
       <p:sp>
         <p:nvSpPr>
-          <p:cNvPr id="8" name="Rounded Rectangle 7"/>
+          <p:cNvPr id="15" name="Rounded Rectangle 14"/>
           <p:cNvSpPr/>
           <p:nvPr/>
         </p:nvSpPr>
         <p:spPr>
           <a:xfrm>
-            <a:off x="8028431" y="1874519"/>
-            <a:ext cx="3328416" cy="3200400"/>
+            <a:off x="7936992" y="1874519"/>
+            <a:ext cx="3328416" cy="3154680"/>
           </a:xfrm>
           <a:prstGeom prst="roundRect">
             <a:avLst/>
@@ -5498,7 +7057,7 @@
           </a:solidFill>
           <a:ln w="12700">
             <a:solidFill>
-              <a:srgbClr val="EBE7DF"/>
+              <a:srgbClr val="E2DDD0"/>
             </a:solidFill>
           </a:ln>
         </p:spPr>
@@ -5526,13 +7085,13 @@
       </p:sp>
       <p:sp>
         <p:nvSpPr>
-          <p:cNvPr id="9" name="TextBox 8"/>
+          <p:cNvPr id="16" name="TextBox 15"/>
           <p:cNvSpPr txBox="1"/>
           <p:nvPr/>
         </p:nvSpPr>
         <p:spPr>
           <a:xfrm>
-            <a:off x="8348471" y="2103120"/>
+            <a:off x="8257032" y="2103120"/>
             <a:ext cx="2688336" cy="2743200"/>
           </a:xfrm>
           <a:prstGeom prst="rect">
@@ -5554,7 +7113,7 @@
                 <a:solidFill>
                   <a:srgbClr val="D99B26"/>
                 </a:solidFill>
-                <a:latin typeface="Courier New"/>
+                <a:latin typeface="Helvetica Neue"/>
               </a:defRPr>
             </a:pPr>
             <a:r>
@@ -5570,7 +7129,7 @@
                 <a:solidFill>
                   <a:srgbClr val="16161A"/>
                 </a:solidFill>
-                <a:latin typeface="Helvetica"/>
+                <a:latin typeface="Helvetica Neue"/>
               </a:defRPr>
             </a:pPr>
             <a:r>
@@ -5581,9 +7140,9 @@
             <a:pPr>
               <a:defRPr sz="1300">
                 <a:solidFill>
-                  <a:srgbClr val="59564D"/>
-                </a:solidFill>
-                <a:latin typeface="Helvetica"/>
+                  <a:srgbClr val="454337"/>
+                </a:solidFill>
+                <a:latin typeface="Helvetica Neue"/>
               </a:defRPr>
             </a:pPr>
             <a:r>
@@ -5594,14 +7153,14 @@
       </p:sp>
       <p:sp>
         <p:nvSpPr>
-          <p:cNvPr id="10" name="Rounded Rectangle 9"/>
+          <p:cNvPr id="17" name="Rounded Rectangle 16"/>
           <p:cNvSpPr/>
           <p:nvPr/>
         </p:nvSpPr>
         <p:spPr>
           <a:xfrm>
-            <a:off x="822960" y="5212080"/>
-            <a:ext cx="2468880" cy="960120"/>
+            <a:off x="731520" y="5166360"/>
+            <a:ext cx="2514600" cy="1005840"/>
           </a:xfrm>
           <a:prstGeom prst="roundRect">
             <a:avLst/>
@@ -5611,7 +7170,7 @@
           </a:solidFill>
           <a:ln w="12700">
             <a:solidFill>
-              <a:srgbClr val="EBE7DF"/>
+              <a:srgbClr val="E2DDD0"/>
             </a:solidFill>
           </a:ln>
         </p:spPr>
@@ -5639,14 +7198,14 @@
       </p:sp>
       <p:sp>
         <p:nvSpPr>
-          <p:cNvPr id="11" name="TextBox 10"/>
+          <p:cNvPr id="18" name="TextBox 17"/>
           <p:cNvSpPr txBox="1"/>
           <p:nvPr/>
         </p:nvSpPr>
         <p:spPr>
           <a:xfrm>
-            <a:off x="960120" y="5257800"/>
-            <a:ext cx="2194560" cy="868680"/>
+            <a:off x="914400" y="5230368"/>
+            <a:ext cx="2148840" cy="914400"/>
           </a:xfrm>
           <a:prstGeom prst="rect">
             <a:avLst/>
@@ -5660,11 +7219,11 @@
           <a:lstStyle/>
           <a:p>
             <a:pPr>
-              <a:defRPr sz="1300" b="1" i="1">
+              <a:defRPr sz="1300" b="1">
                 <a:solidFill>
                   <a:srgbClr val="16161A"/>
                 </a:solidFill>
-                <a:latin typeface="Helvetica"/>
+                <a:latin typeface="Helvetica Neue"/>
               </a:defRPr>
             </a:pPr>
             <a:r>
@@ -5678,9 +7237,9 @@
               </a:spcBef>
               <a:defRPr sz="1000">
                 <a:solidFill>
-                  <a:srgbClr val="59564D"/>
-                </a:solidFill>
-                <a:latin typeface="Helvetica"/>
+                  <a:srgbClr val="454337"/>
+                </a:solidFill>
+                <a:latin typeface="Helvetica Neue"/>
               </a:defRPr>
             </a:pPr>
             <a:r>
@@ -5691,14 +7250,14 @@
       </p:sp>
       <p:sp>
         <p:nvSpPr>
-          <p:cNvPr id="12" name="Rounded Rectangle 11"/>
+          <p:cNvPr id="19" name="Rounded Rectangle 18"/>
           <p:cNvSpPr/>
           <p:nvPr/>
         </p:nvSpPr>
         <p:spPr>
           <a:xfrm>
-            <a:off x="3520440" y="5212080"/>
-            <a:ext cx="2468880" cy="960120"/>
+            <a:off x="3429000" y="5166360"/>
+            <a:ext cx="2514600" cy="1005840"/>
           </a:xfrm>
           <a:prstGeom prst="roundRect">
             <a:avLst/>
@@ -5708,7 +7267,7 @@
           </a:solidFill>
           <a:ln w="12700">
             <a:solidFill>
-              <a:srgbClr val="EBE7DF"/>
+              <a:srgbClr val="E2DDD0"/>
             </a:solidFill>
           </a:ln>
         </p:spPr>
@@ -5736,14 +7295,14 @@
       </p:sp>
       <p:sp>
         <p:nvSpPr>
-          <p:cNvPr id="13" name="TextBox 12"/>
+          <p:cNvPr id="20" name="TextBox 19"/>
           <p:cNvSpPr txBox="1"/>
           <p:nvPr/>
         </p:nvSpPr>
         <p:spPr>
           <a:xfrm>
-            <a:off x="3657600" y="5257800"/>
-            <a:ext cx="2194560" cy="868680"/>
+            <a:off x="3611880" y="5230368"/>
+            <a:ext cx="2148840" cy="914400"/>
           </a:xfrm>
           <a:prstGeom prst="rect">
             <a:avLst/>
@@ -5757,11 +7316,11 @@
           <a:lstStyle/>
           <a:p>
             <a:pPr>
-              <a:defRPr sz="1300" b="1" i="1">
+              <a:defRPr sz="1300" b="1">
                 <a:solidFill>
                   <a:srgbClr val="16161A"/>
                 </a:solidFill>
-                <a:latin typeface="Helvetica"/>
+                <a:latin typeface="Helvetica Neue"/>
               </a:defRPr>
             </a:pPr>
             <a:r>
@@ -5775,9 +7334,9 @@
               </a:spcBef>
               <a:defRPr sz="1000">
                 <a:solidFill>
-                  <a:srgbClr val="59564D"/>
-                </a:solidFill>
-                <a:latin typeface="Helvetica"/>
+                  <a:srgbClr val="454337"/>
+                </a:solidFill>
+                <a:latin typeface="Helvetica Neue"/>
               </a:defRPr>
             </a:pPr>
             <a:r>
@@ -5788,14 +7347,14 @@
       </p:sp>
       <p:sp>
         <p:nvSpPr>
-          <p:cNvPr id="14" name="Rounded Rectangle 13"/>
+          <p:cNvPr id="21" name="Rounded Rectangle 20"/>
           <p:cNvSpPr/>
           <p:nvPr/>
         </p:nvSpPr>
         <p:spPr>
           <a:xfrm>
-            <a:off x="6217920" y="5212080"/>
-            <a:ext cx="2468880" cy="960120"/>
+            <a:off x="6126480" y="5166360"/>
+            <a:ext cx="2514600" cy="1005840"/>
           </a:xfrm>
           <a:prstGeom prst="roundRect">
             <a:avLst/>
@@ -5805,7 +7364,7 @@
           </a:solidFill>
           <a:ln w="12700">
             <a:solidFill>
-              <a:srgbClr val="EBE7DF"/>
+              <a:srgbClr val="E2DDD0"/>
             </a:solidFill>
           </a:ln>
         </p:spPr>
@@ -5833,14 +7392,14 @@
       </p:sp>
       <p:sp>
         <p:nvSpPr>
-          <p:cNvPr id="15" name="TextBox 14"/>
+          <p:cNvPr id="22" name="TextBox 21"/>
           <p:cNvSpPr txBox="1"/>
           <p:nvPr/>
         </p:nvSpPr>
         <p:spPr>
           <a:xfrm>
-            <a:off x="6355080" y="5257800"/>
-            <a:ext cx="2194560" cy="868680"/>
+            <a:off x="6309360" y="5230368"/>
+            <a:ext cx="2148840" cy="914400"/>
           </a:xfrm>
           <a:prstGeom prst="rect">
             <a:avLst/>
@@ -5854,11 +7413,11 @@
           <a:lstStyle/>
           <a:p>
             <a:pPr>
-              <a:defRPr sz="1300" b="1" i="1">
+              <a:defRPr sz="1300" b="1">
                 <a:solidFill>
                   <a:srgbClr val="16161A"/>
                 </a:solidFill>
-                <a:latin typeface="Helvetica"/>
+                <a:latin typeface="Helvetica Neue"/>
               </a:defRPr>
             </a:pPr>
             <a:r>
@@ -5872,9 +7431,9 @@
               </a:spcBef>
               <a:defRPr sz="1000">
                 <a:solidFill>
-                  <a:srgbClr val="59564D"/>
-                </a:solidFill>
-                <a:latin typeface="Helvetica"/>
+                  <a:srgbClr val="454337"/>
+                </a:solidFill>
+                <a:latin typeface="Helvetica Neue"/>
               </a:defRPr>
             </a:pPr>
             <a:r>
@@ -5885,14 +7444,14 @@
       </p:sp>
       <p:sp>
         <p:nvSpPr>
-          <p:cNvPr id="16" name="Rounded Rectangle 15"/>
+          <p:cNvPr id="23" name="Rounded Rectangle 22"/>
           <p:cNvSpPr/>
           <p:nvPr/>
         </p:nvSpPr>
         <p:spPr>
           <a:xfrm>
-            <a:off x="8915400" y="5212080"/>
-            <a:ext cx="2468880" cy="960120"/>
+            <a:off x="8823960" y="5166360"/>
+            <a:ext cx="2514600" cy="1005840"/>
           </a:xfrm>
           <a:prstGeom prst="roundRect">
             <a:avLst/>
@@ -5902,7 +7461,7 @@
           </a:solidFill>
           <a:ln w="12700">
             <a:solidFill>
-              <a:srgbClr val="EBE7DF"/>
+              <a:srgbClr val="E2DDD0"/>
             </a:solidFill>
           </a:ln>
         </p:spPr>
@@ -5930,14 +7489,14 @@
       </p:sp>
       <p:sp>
         <p:nvSpPr>
-          <p:cNvPr id="17" name="TextBox 16"/>
+          <p:cNvPr id="24" name="TextBox 23"/>
           <p:cNvSpPr txBox="1"/>
           <p:nvPr/>
         </p:nvSpPr>
         <p:spPr>
           <a:xfrm>
-            <a:off x="9052560" y="5257800"/>
-            <a:ext cx="2194560" cy="868680"/>
+            <a:off x="9006840" y="5230368"/>
+            <a:ext cx="2148840" cy="914400"/>
           </a:xfrm>
           <a:prstGeom prst="rect">
             <a:avLst/>
@@ -5951,11 +7510,11 @@
           <a:lstStyle/>
           <a:p>
             <a:pPr>
-              <a:defRPr sz="1300" b="1" i="1">
+              <a:defRPr sz="1300" b="1">
                 <a:solidFill>
                   <a:srgbClr val="16161A"/>
                 </a:solidFill>
-                <a:latin typeface="Helvetica"/>
+                <a:latin typeface="Helvetica Neue"/>
               </a:defRPr>
             </a:pPr>
             <a:r>
@@ -5969,9 +7528,9 @@
               </a:spcBef>
               <a:defRPr sz="1000">
                 <a:solidFill>
-                  <a:srgbClr val="59564D"/>
-                </a:solidFill>
-                <a:latin typeface="Helvetica"/>
+                  <a:srgbClr val="454337"/>
+                </a:solidFill>
+                <a:latin typeface="Helvetica Neue"/>
               </a:defRPr>
             </a:pPr>
             <a:r>
@@ -5982,20 +7541,20 @@
       </p:sp>
       <p:sp>
         <p:nvSpPr>
-          <p:cNvPr id="18" name="Rectangle 17"/>
+          <p:cNvPr id="25" name="Rectangle 24"/>
           <p:cNvSpPr/>
           <p:nvPr/>
         </p:nvSpPr>
         <p:spPr>
           <a:xfrm>
-            <a:off x="822960" y="6309360"/>
-            <a:ext cx="10545775" cy="12700"/>
+            <a:off x="731520" y="6327648"/>
+            <a:ext cx="10728655" cy="12700"/>
           </a:xfrm>
           <a:prstGeom prst="rect">
             <a:avLst/>
           </a:prstGeom>
           <a:solidFill>
-            <a:srgbClr val="EBE7DF"/>
+            <a:srgbClr val="E2DDD0"/>
           </a:solidFill>
           <a:ln>
             <a:noFill/>
@@ -6025,13 +7584,13 @@
       </p:sp>
       <p:sp>
         <p:nvSpPr>
-          <p:cNvPr id="19" name="TextBox 18"/>
+          <p:cNvPr id="26" name="TextBox 25"/>
           <p:cNvSpPr txBox="1"/>
           <p:nvPr/>
         </p:nvSpPr>
         <p:spPr>
           <a:xfrm>
-            <a:off x="822960" y="6382512"/>
+            <a:off x="731520" y="6400800"/>
             <a:ext cx="7315200" cy="320040"/>
           </a:xfrm>
           <a:prstGeom prst="rect">
@@ -6048,9 +7607,9 @@
             <a:pPr>
               <a:defRPr sz="1000">
                 <a:solidFill>
-                  <a:srgbClr val="7C786C"/>
-                </a:solidFill>
-                <a:latin typeface="Courier New"/>
+                  <a:srgbClr val="5F5C52"/>
+                </a:solidFill>
+                <a:latin typeface="Helvetica Neue"/>
               </a:defRPr>
             </a:pPr>
             <a:r>
@@ -6061,13 +7620,13 @@
       </p:sp>
       <p:sp>
         <p:nvSpPr>
-          <p:cNvPr id="20" name="TextBox 19"/>
+          <p:cNvPr id="27" name="TextBox 26"/>
           <p:cNvSpPr txBox="1"/>
           <p:nvPr/>
         </p:nvSpPr>
         <p:spPr>
           <a:xfrm>
-            <a:off x="9539935" y="6382512"/>
+            <a:off x="9631375" y="6400800"/>
             <a:ext cx="1828800" cy="320040"/>
           </a:xfrm>
           <a:prstGeom prst="rect">
@@ -6084,9 +7643,9 @@
             <a:pPr algn="r">
               <a:defRPr sz="1000">
                 <a:solidFill>
-                  <a:srgbClr val="7C786C"/>
-                </a:solidFill>
-                <a:latin typeface="Courier New"/>
+                  <a:srgbClr val="5F5C52"/>
+                </a:solidFill>
+                <a:latin typeface="Helvetica Neue"/>
               </a:defRPr>
             </a:pPr>
             <a:r>
@@ -6109,7 +7668,7 @@
     <p:bg>
       <p:bgPr>
         <a:solidFill>
-          <a:srgbClr val="FAF9F5"/>
+          <a:srgbClr val="FBFAF5"/>
         </a:solidFill>
         <a:effectLst/>
       </p:bgPr>
@@ -6123,14 +7682,102 @@
       <p:grpSpPr/>
       <p:sp>
         <p:nvSpPr>
-          <p:cNvPr id="2" name="TextBox 1"/>
+          <p:cNvPr id="2" name="Rectangle 1"/>
+          <p:cNvSpPr/>
+          <p:nvPr/>
+        </p:nvSpPr>
+        <p:spPr>
+          <a:xfrm>
+            <a:off x="0" y="0"/>
+            <a:ext cx="12191695" cy="594360"/>
+          </a:xfrm>
+          <a:prstGeom prst="rect">
+            <a:avLst/>
+          </a:prstGeom>
+          <a:solidFill>
+            <a:srgbClr val="121216"/>
+          </a:solidFill>
+          <a:ln w="12700">
+            <a:solidFill>
+              <a:srgbClr val="26262C"/>
+            </a:solidFill>
+          </a:ln>
+        </p:spPr>
+        <p:style>
+          <a:lnRef idx="1">
+            <a:schemeClr val="accent1"/>
+          </a:lnRef>
+          <a:fillRef idx="3">
+            <a:schemeClr val="accent1"/>
+          </a:fillRef>
+          <a:effectRef idx="2">
+            <a:schemeClr val="accent1"/>
+          </a:effectRef>
+          <a:fontRef idx="minor">
+            <a:schemeClr val="lt1"/>
+          </a:fontRef>
+        </p:style>
+        <p:txBody>
+          <a:bodyPr rtlCol="0" anchor="ctr"/>
+          <a:lstStyle/>
+          <a:p>
+            <a:pPr algn="ctr"/>
+          </a:p>
+        </p:txBody>
+      </p:sp>
+      <p:sp>
+        <p:nvSpPr>
+          <p:cNvPr id="3" name="Rounded Rectangle 2"/>
+          <p:cNvSpPr/>
+          <p:nvPr/>
+        </p:nvSpPr>
+        <p:spPr>
+          <a:xfrm>
+            <a:off x="731520" y="146304"/>
+            <a:ext cx="310896" cy="310896"/>
+          </a:xfrm>
+          <a:prstGeom prst="roundRect">
+            <a:avLst/>
+          </a:prstGeom>
+          <a:solidFill>
+            <a:srgbClr val="2B59D9"/>
+          </a:solidFill>
+          <a:ln>
+            <a:noFill/>
+          </a:ln>
+        </p:spPr>
+        <p:style>
+          <a:lnRef idx="1">
+            <a:schemeClr val="accent1"/>
+          </a:lnRef>
+          <a:fillRef idx="3">
+            <a:schemeClr val="accent1"/>
+          </a:fillRef>
+          <a:effectRef idx="2">
+            <a:schemeClr val="accent1"/>
+          </a:effectRef>
+          <a:fontRef idx="minor">
+            <a:schemeClr val="lt1"/>
+          </a:fontRef>
+        </p:style>
+        <p:txBody>
+          <a:bodyPr rtlCol="0" anchor="ctr"/>
+          <a:lstStyle/>
+          <a:p>
+            <a:pPr algn="ctr"/>
+          </a:p>
+        </p:txBody>
+      </p:sp>
+      <p:sp>
+        <p:nvSpPr>
+          <p:cNvPr id="4" name="TextBox 3"/>
           <p:cNvSpPr txBox="1"/>
           <p:nvPr/>
         </p:nvSpPr>
         <p:spPr>
           <a:xfrm>
-            <a:off x="822960" y="548640"/>
-            <a:ext cx="10515600" cy="320040"/>
+            <a:off x="731520" y="128016"/>
+            <a:ext cx="310896" cy="310896"/>
           </a:xfrm>
           <a:prstGeom prst="rect">
             <a:avLst/>
@@ -6143,12 +7790,199 @@
           </a:bodyPr>
           <a:lstStyle/>
           <a:p>
+            <a:pPr algn="ctr">
+              <a:defRPr sz="1600" b="1">
+                <a:solidFill>
+                  <a:srgbClr val="FFFFFF"/>
+                </a:solidFill>
+                <a:latin typeface="Helvetica Neue"/>
+              </a:defRPr>
+            </a:pPr>
+            <a:r>
+              <a:t>›</a:t>
+            </a:r>
+          </a:p>
+        </p:txBody>
+      </p:sp>
+      <p:sp>
+        <p:nvSpPr>
+          <p:cNvPr id="5" name="TextBox 4"/>
+          <p:cNvSpPr txBox="1"/>
+          <p:nvPr/>
+        </p:nvSpPr>
+        <p:spPr>
+          <a:xfrm>
+            <a:off x="1143000" y="164592"/>
+            <a:ext cx="3200400" cy="292608"/>
+          </a:xfrm>
+          <a:prstGeom prst="rect">
+            <a:avLst/>
+          </a:prstGeom>
+          <a:noFill/>
+        </p:spPr>
+        <p:txBody>
+          <a:bodyPr wrap="none" lIns="0" tIns="0" rIns="0" bIns="0">
+            <a:spAutoFit/>
+          </a:bodyPr>
+          <a:lstStyle/>
+          <a:p>
+            <a:pPr>
+              <a:defRPr sz="1300" b="1">
+                <a:solidFill>
+                  <a:srgbClr val="FFFFFF"/>
+                </a:solidFill>
+                <a:latin typeface="Helvetica Neue"/>
+              </a:defRPr>
+            </a:pPr>
+            <a:r>
+              <a:t>Technology Consultants</a:t>
+            </a:r>
+          </a:p>
+        </p:txBody>
+      </p:sp>
+      <p:sp>
+        <p:nvSpPr>
+          <p:cNvPr id="6" name="TextBox 5"/>
+          <p:cNvSpPr txBox="1"/>
+          <p:nvPr/>
+        </p:nvSpPr>
+        <p:spPr>
+          <a:xfrm>
+            <a:off x="5029200" y="182880"/>
+            <a:ext cx="4754880" cy="292608"/>
+          </a:xfrm>
+          <a:prstGeom prst="rect">
+            <a:avLst/>
+          </a:prstGeom>
+          <a:noFill/>
+        </p:spPr>
+        <p:txBody>
+          <a:bodyPr wrap="none" lIns="0" tIns="0" rIns="0" bIns="0">
+            <a:spAutoFit/>
+          </a:bodyPr>
+          <a:lstStyle/>
+          <a:p>
+            <a:pPr algn="r">
+              <a:defRPr sz="1000">
+                <a:solidFill>
+                  <a:srgbClr val="C8CDD7"/>
+                </a:solidFill>
+                <a:latin typeface="Helvetica Neue"/>
+              </a:defRPr>
+            </a:pPr>
+            <a:r>
+              <a:t>Services   ·   Work   ·   How we work   ·   About   ·   FAQ</a:t>
+            </a:r>
+          </a:p>
+        </p:txBody>
+      </p:sp>
+      <p:sp>
+        <p:nvSpPr>
+          <p:cNvPr id="7" name="Rounded Rectangle 6"/>
+          <p:cNvSpPr/>
+          <p:nvPr/>
+        </p:nvSpPr>
+        <p:spPr>
+          <a:xfrm>
+            <a:off x="10058400" y="128016"/>
+            <a:ext cx="1371600" cy="329184"/>
+          </a:xfrm>
+          <a:prstGeom prst="roundRect">
+            <a:avLst/>
+          </a:prstGeom>
+          <a:solidFill>
+            <a:srgbClr val="FFFFFF"/>
+          </a:solidFill>
+          <a:ln>
+            <a:noFill/>
+          </a:ln>
+        </p:spPr>
+        <p:style>
+          <a:lnRef idx="1">
+            <a:schemeClr val="accent1"/>
+          </a:lnRef>
+          <a:fillRef idx="3">
+            <a:schemeClr val="accent1"/>
+          </a:fillRef>
+          <a:effectRef idx="2">
+            <a:schemeClr val="accent1"/>
+          </a:effectRef>
+          <a:fontRef idx="minor">
+            <a:schemeClr val="lt1"/>
+          </a:fontRef>
+        </p:style>
+        <p:txBody>
+          <a:bodyPr rtlCol="0" anchor="ctr"/>
+          <a:lstStyle/>
+          <a:p>
+            <a:pPr algn="ctr"/>
+          </a:p>
+        </p:txBody>
+      </p:sp>
+      <p:sp>
+        <p:nvSpPr>
+          <p:cNvPr id="8" name="TextBox 7"/>
+          <p:cNvSpPr txBox="1"/>
+          <p:nvPr/>
+        </p:nvSpPr>
+        <p:spPr>
+          <a:xfrm>
+            <a:off x="10058400" y="164592"/>
+            <a:ext cx="1371600" cy="274320"/>
+          </a:xfrm>
+          <a:prstGeom prst="rect">
+            <a:avLst/>
+          </a:prstGeom>
+          <a:noFill/>
+        </p:spPr>
+        <p:txBody>
+          <a:bodyPr wrap="none" lIns="0" tIns="0" rIns="0" bIns="0">
+            <a:spAutoFit/>
+          </a:bodyPr>
+          <a:lstStyle/>
+          <a:p>
+            <a:pPr algn="ctr">
+              <a:defRPr sz="1000" b="1">
+                <a:solidFill>
+                  <a:srgbClr val="16161A"/>
+                </a:solidFill>
+                <a:latin typeface="Helvetica Neue"/>
+              </a:defRPr>
+            </a:pPr>
+            <a:r>
+              <a:t>Book a call</a:t>
+            </a:r>
+          </a:p>
+        </p:txBody>
+      </p:sp>
+      <p:sp>
+        <p:nvSpPr>
+          <p:cNvPr id="9" name="TextBox 8"/>
+          <p:cNvSpPr txBox="1"/>
+          <p:nvPr/>
+        </p:nvSpPr>
+        <p:spPr>
+          <a:xfrm>
+            <a:off x="731520" y="777240"/>
+            <a:ext cx="10728655" cy="274320"/>
+          </a:xfrm>
+          <a:prstGeom prst="rect">
+            <a:avLst/>
+          </a:prstGeom>
+          <a:noFill/>
+        </p:spPr>
+        <p:txBody>
+          <a:bodyPr wrap="none" lIns="0" tIns="0" rIns="0" bIns="0">
+            <a:spAutoFit/>
+          </a:bodyPr>
+          <a:lstStyle/>
+          <a:p>
             <a:pPr>
               <a:defRPr sz="1100" b="1">
                 <a:solidFill>
-                  <a:srgbClr val="D99B26"/>
-                </a:solidFill>
-                <a:latin typeface="Courier New"/>
+                  <a:srgbClr val="2B59D9"/>
+                </a:solidFill>
+                <a:latin typeface="Helvetica Neue"/>
               </a:defRPr>
             </a:pPr>
             <a:r>
@@ -6159,14 +7993,14 @@
       </p:sp>
       <p:sp>
         <p:nvSpPr>
-          <p:cNvPr id="3" name="TextBox 2"/>
+          <p:cNvPr id="10" name="TextBox 9"/>
           <p:cNvSpPr txBox="1"/>
           <p:nvPr/>
         </p:nvSpPr>
         <p:spPr>
           <a:xfrm>
-            <a:off x="822960" y="868680"/>
-            <a:ext cx="10515600" cy="685800"/>
+            <a:off x="731520" y="1051560"/>
+            <a:ext cx="10728655" cy="640080"/>
           </a:xfrm>
           <a:prstGeom prst="rect">
             <a:avLst/>
@@ -6180,11 +8014,11 @@
           <a:lstStyle/>
           <a:p>
             <a:pPr>
-              <a:defRPr sz="2600" b="1">
+              <a:defRPr sz="2500" b="1">
                 <a:solidFill>
                   <a:srgbClr val="16161A"/>
                 </a:solidFill>
-                <a:latin typeface="Helvetica"/>
+                <a:latin typeface="Helvetica Neue"/>
               </a:defRPr>
             </a:pPr>
             <a:r>
@@ -6195,14 +8029,14 @@
       </p:sp>
       <p:sp>
         <p:nvSpPr>
-          <p:cNvPr id="4" name="Rounded Rectangle 3"/>
+          <p:cNvPr id="11" name="Rounded Rectangle 10"/>
           <p:cNvSpPr/>
           <p:nvPr/>
         </p:nvSpPr>
         <p:spPr>
           <a:xfrm>
-            <a:off x="822960" y="1874519"/>
-            <a:ext cx="5157216" cy="4023360"/>
+            <a:off x="731520" y="1874519"/>
+            <a:ext cx="5157216" cy="4114800"/>
           </a:xfrm>
           <a:prstGeom prst="roundRect">
             <a:avLst/>
@@ -6240,14 +8074,14 @@
       </p:sp>
       <p:sp>
         <p:nvSpPr>
-          <p:cNvPr id="5" name="TextBox 4"/>
+          <p:cNvPr id="12" name="TextBox 11"/>
           <p:cNvSpPr txBox="1"/>
           <p:nvPr/>
         </p:nvSpPr>
         <p:spPr>
           <a:xfrm>
-            <a:off x="1097280" y="2194559"/>
-            <a:ext cx="4608576" cy="3474720"/>
+            <a:off x="1005840" y="2194559"/>
+            <a:ext cx="4608576" cy="3566160"/>
           </a:xfrm>
           <a:prstGeom prst="rect">
             <a:avLst/>
@@ -6268,7 +8102,7 @@
                 <a:solidFill>
                   <a:srgbClr val="DC2626"/>
                 </a:solidFill>
-                <a:latin typeface="Courier New"/>
+                <a:latin typeface="Helvetica Neue"/>
               </a:defRPr>
             </a:pPr>
             <a:r>
@@ -6282,9 +8116,9 @@
               </a:spcAft>
               <a:defRPr sz="1300">
                 <a:solidFill>
-                  <a:srgbClr val="59564D"/>
-                </a:solidFill>
-                <a:latin typeface="Helvetica"/>
+                  <a:srgbClr val="454337"/>
+                </a:solidFill>
+                <a:latin typeface="Helvetica Neue"/>
               </a:defRPr>
             </a:pPr>
             <a:r>
@@ -6298,9 +8132,9 @@
               </a:spcAft>
               <a:defRPr sz="1300">
                 <a:solidFill>
-                  <a:srgbClr val="59564D"/>
-                </a:solidFill>
-                <a:latin typeface="Helvetica"/>
+                  <a:srgbClr val="454337"/>
+                </a:solidFill>
+                <a:latin typeface="Helvetica Neue"/>
               </a:defRPr>
             </a:pPr>
             <a:r>
@@ -6314,9 +8148,9 @@
               </a:spcAft>
               <a:defRPr sz="1300">
                 <a:solidFill>
-                  <a:srgbClr val="59564D"/>
-                </a:solidFill>
-                <a:latin typeface="Helvetica"/>
+                  <a:srgbClr val="454337"/>
+                </a:solidFill>
+                <a:latin typeface="Helvetica Neue"/>
               </a:defRPr>
             </a:pPr>
             <a:r>
@@ -6330,9 +8164,9 @@
               </a:spcAft>
               <a:defRPr sz="1300">
                 <a:solidFill>
-                  <a:srgbClr val="59564D"/>
-                </a:solidFill>
-                <a:latin typeface="Helvetica"/>
+                  <a:srgbClr val="454337"/>
+                </a:solidFill>
+                <a:latin typeface="Helvetica Neue"/>
               </a:defRPr>
             </a:pPr>
             <a:r>
@@ -6343,14 +8177,14 @@
       </p:sp>
       <p:sp>
         <p:nvSpPr>
-          <p:cNvPr id="6" name="Rounded Rectangle 5"/>
+          <p:cNvPr id="13" name="Rounded Rectangle 12"/>
           <p:cNvSpPr/>
           <p:nvPr/>
         </p:nvSpPr>
         <p:spPr>
           <a:xfrm>
-            <a:off x="6248095" y="1874519"/>
-            <a:ext cx="5157216" cy="4023360"/>
+            <a:off x="6300216" y="1874519"/>
+            <a:ext cx="5157216" cy="4114800"/>
           </a:xfrm>
           <a:prstGeom prst="roundRect">
             <a:avLst/>
@@ -6388,14 +8222,14 @@
       </p:sp>
       <p:sp>
         <p:nvSpPr>
-          <p:cNvPr id="7" name="TextBox 6"/>
+          <p:cNvPr id="14" name="TextBox 13"/>
           <p:cNvSpPr txBox="1"/>
           <p:nvPr/>
         </p:nvSpPr>
         <p:spPr>
           <a:xfrm>
-            <a:off x="6522415" y="2194559"/>
-            <a:ext cx="4608576" cy="3474720"/>
+            <a:off x="6574536" y="2194559"/>
+            <a:ext cx="4608576" cy="3566160"/>
           </a:xfrm>
           <a:prstGeom prst="rect">
             <a:avLst/>
@@ -6416,7 +8250,7 @@
                 <a:solidFill>
                   <a:srgbClr val="DC2626"/>
                 </a:solidFill>
-                <a:latin typeface="Courier New"/>
+                <a:latin typeface="Helvetica Neue"/>
               </a:defRPr>
             </a:pPr>
             <a:r>
@@ -6430,9 +8264,9 @@
               </a:spcAft>
               <a:defRPr sz="1300">
                 <a:solidFill>
-                  <a:srgbClr val="59564D"/>
-                </a:solidFill>
-                <a:latin typeface="Helvetica"/>
+                  <a:srgbClr val="454337"/>
+                </a:solidFill>
+                <a:latin typeface="Helvetica Neue"/>
               </a:defRPr>
             </a:pPr>
             <a:r>
@@ -6446,9 +8280,9 @@
               </a:spcAft>
               <a:defRPr sz="1300">
                 <a:solidFill>
-                  <a:srgbClr val="59564D"/>
-                </a:solidFill>
-                <a:latin typeface="Helvetica"/>
+                  <a:srgbClr val="454337"/>
+                </a:solidFill>
+                <a:latin typeface="Helvetica Neue"/>
               </a:defRPr>
             </a:pPr>
             <a:r>
@@ -6462,9 +8296,9 @@
               </a:spcAft>
               <a:defRPr sz="1300">
                 <a:solidFill>
-                  <a:srgbClr val="59564D"/>
-                </a:solidFill>
-                <a:latin typeface="Helvetica"/>
+                  <a:srgbClr val="454337"/>
+                </a:solidFill>
+                <a:latin typeface="Helvetica Neue"/>
               </a:defRPr>
             </a:pPr>
             <a:r>
@@ -6478,9 +8312,9 @@
               </a:spcAft>
               <a:defRPr sz="1300">
                 <a:solidFill>
-                  <a:srgbClr val="59564D"/>
-                </a:solidFill>
-                <a:latin typeface="Helvetica"/>
+                  <a:srgbClr val="454337"/>
+                </a:solidFill>
+                <a:latin typeface="Helvetica Neue"/>
               </a:defRPr>
             </a:pPr>
             <a:r>
@@ -6491,20 +8325,20 @@
       </p:sp>
       <p:sp>
         <p:nvSpPr>
-          <p:cNvPr id="8" name="Rectangle 7"/>
+          <p:cNvPr id="15" name="Rectangle 14"/>
           <p:cNvSpPr/>
           <p:nvPr/>
         </p:nvSpPr>
         <p:spPr>
           <a:xfrm>
-            <a:off x="822960" y="6309360"/>
-            <a:ext cx="10545775" cy="12700"/>
+            <a:off x="731520" y="6327648"/>
+            <a:ext cx="10728655" cy="12700"/>
           </a:xfrm>
           <a:prstGeom prst="rect">
             <a:avLst/>
           </a:prstGeom>
           <a:solidFill>
-            <a:srgbClr val="EBE7DF"/>
+            <a:srgbClr val="E2DDD0"/>
           </a:solidFill>
           <a:ln>
             <a:noFill/>
@@ -6534,13 +8368,13 @@
       </p:sp>
       <p:sp>
         <p:nvSpPr>
-          <p:cNvPr id="9" name="TextBox 8"/>
+          <p:cNvPr id="16" name="TextBox 15"/>
           <p:cNvSpPr txBox="1"/>
           <p:nvPr/>
         </p:nvSpPr>
         <p:spPr>
           <a:xfrm>
-            <a:off x="822960" y="6382512"/>
+            <a:off x="731520" y="6400800"/>
             <a:ext cx="7315200" cy="320040"/>
           </a:xfrm>
           <a:prstGeom prst="rect">
@@ -6557,9 +8391,9 @@
             <a:pPr>
               <a:defRPr sz="1000">
                 <a:solidFill>
-                  <a:srgbClr val="7C786C"/>
-                </a:solidFill>
-                <a:latin typeface="Courier New"/>
+                  <a:srgbClr val="5F5C52"/>
+                </a:solidFill>
+                <a:latin typeface="Helvetica Neue"/>
               </a:defRPr>
             </a:pPr>
             <a:r>
@@ -6570,13 +8404,13 @@
       </p:sp>
       <p:sp>
         <p:nvSpPr>
-          <p:cNvPr id="10" name="TextBox 9"/>
+          <p:cNvPr id="17" name="TextBox 16"/>
           <p:cNvSpPr txBox="1"/>
           <p:nvPr/>
         </p:nvSpPr>
         <p:spPr>
           <a:xfrm>
-            <a:off x="9539935" y="6382512"/>
+            <a:off x="9631375" y="6400800"/>
             <a:ext cx="1828800" cy="320040"/>
           </a:xfrm>
           <a:prstGeom prst="rect">
@@ -6593,9 +8427,9 @@
             <a:pPr algn="r">
               <a:defRPr sz="1000">
                 <a:solidFill>
-                  <a:srgbClr val="7C786C"/>
-                </a:solidFill>
-                <a:latin typeface="Courier New"/>
+                  <a:srgbClr val="5F5C52"/>
+                </a:solidFill>
+                <a:latin typeface="Helvetica Neue"/>
               </a:defRPr>
             </a:pPr>
             <a:r>
@@ -6618,7 +8452,7 @@
     <p:bg>
       <p:bgPr>
         <a:solidFill>
-          <a:srgbClr val="FAF9F5"/>
+          <a:srgbClr val="FBFAF5"/>
         </a:solidFill>
         <a:effectLst/>
       </p:bgPr>
@@ -6632,14 +8466,102 @@
       <p:grpSpPr/>
       <p:sp>
         <p:nvSpPr>
-          <p:cNvPr id="2" name="TextBox 1"/>
+          <p:cNvPr id="2" name="Rectangle 1"/>
+          <p:cNvSpPr/>
+          <p:nvPr/>
+        </p:nvSpPr>
+        <p:spPr>
+          <a:xfrm>
+            <a:off x="0" y="0"/>
+            <a:ext cx="12191695" cy="594360"/>
+          </a:xfrm>
+          <a:prstGeom prst="rect">
+            <a:avLst/>
+          </a:prstGeom>
+          <a:solidFill>
+            <a:srgbClr val="121216"/>
+          </a:solidFill>
+          <a:ln w="12700">
+            <a:solidFill>
+              <a:srgbClr val="26262C"/>
+            </a:solidFill>
+          </a:ln>
+        </p:spPr>
+        <p:style>
+          <a:lnRef idx="1">
+            <a:schemeClr val="accent1"/>
+          </a:lnRef>
+          <a:fillRef idx="3">
+            <a:schemeClr val="accent1"/>
+          </a:fillRef>
+          <a:effectRef idx="2">
+            <a:schemeClr val="accent1"/>
+          </a:effectRef>
+          <a:fontRef idx="minor">
+            <a:schemeClr val="lt1"/>
+          </a:fontRef>
+        </p:style>
+        <p:txBody>
+          <a:bodyPr rtlCol="0" anchor="ctr"/>
+          <a:lstStyle/>
+          <a:p>
+            <a:pPr algn="ctr"/>
+          </a:p>
+        </p:txBody>
+      </p:sp>
+      <p:sp>
+        <p:nvSpPr>
+          <p:cNvPr id="3" name="Rounded Rectangle 2"/>
+          <p:cNvSpPr/>
+          <p:nvPr/>
+        </p:nvSpPr>
+        <p:spPr>
+          <a:xfrm>
+            <a:off x="731520" y="146304"/>
+            <a:ext cx="310896" cy="310896"/>
+          </a:xfrm>
+          <a:prstGeom prst="roundRect">
+            <a:avLst/>
+          </a:prstGeom>
+          <a:solidFill>
+            <a:srgbClr val="2B59D9"/>
+          </a:solidFill>
+          <a:ln>
+            <a:noFill/>
+          </a:ln>
+        </p:spPr>
+        <p:style>
+          <a:lnRef idx="1">
+            <a:schemeClr val="accent1"/>
+          </a:lnRef>
+          <a:fillRef idx="3">
+            <a:schemeClr val="accent1"/>
+          </a:fillRef>
+          <a:effectRef idx="2">
+            <a:schemeClr val="accent1"/>
+          </a:effectRef>
+          <a:fontRef idx="minor">
+            <a:schemeClr val="lt1"/>
+          </a:fontRef>
+        </p:style>
+        <p:txBody>
+          <a:bodyPr rtlCol="0" anchor="ctr"/>
+          <a:lstStyle/>
+          <a:p>
+            <a:pPr algn="ctr"/>
+          </a:p>
+        </p:txBody>
+      </p:sp>
+      <p:sp>
+        <p:nvSpPr>
+          <p:cNvPr id="4" name="TextBox 3"/>
           <p:cNvSpPr txBox="1"/>
           <p:nvPr/>
         </p:nvSpPr>
         <p:spPr>
           <a:xfrm>
-            <a:off x="822960" y="548640"/>
-            <a:ext cx="10515600" cy="320040"/>
+            <a:off x="731520" y="128016"/>
+            <a:ext cx="310896" cy="310896"/>
           </a:xfrm>
           <a:prstGeom prst="rect">
             <a:avLst/>
@@ -6652,12 +8574,199 @@
           </a:bodyPr>
           <a:lstStyle/>
           <a:p>
+            <a:pPr algn="ctr">
+              <a:defRPr sz="1600" b="1">
+                <a:solidFill>
+                  <a:srgbClr val="FFFFFF"/>
+                </a:solidFill>
+                <a:latin typeface="Helvetica Neue"/>
+              </a:defRPr>
+            </a:pPr>
+            <a:r>
+              <a:t>›</a:t>
+            </a:r>
+          </a:p>
+        </p:txBody>
+      </p:sp>
+      <p:sp>
+        <p:nvSpPr>
+          <p:cNvPr id="5" name="TextBox 4"/>
+          <p:cNvSpPr txBox="1"/>
+          <p:nvPr/>
+        </p:nvSpPr>
+        <p:spPr>
+          <a:xfrm>
+            <a:off x="1143000" y="164592"/>
+            <a:ext cx="3200400" cy="292608"/>
+          </a:xfrm>
+          <a:prstGeom prst="rect">
+            <a:avLst/>
+          </a:prstGeom>
+          <a:noFill/>
+        </p:spPr>
+        <p:txBody>
+          <a:bodyPr wrap="none" lIns="0" tIns="0" rIns="0" bIns="0">
+            <a:spAutoFit/>
+          </a:bodyPr>
+          <a:lstStyle/>
+          <a:p>
+            <a:pPr>
+              <a:defRPr sz="1300" b="1">
+                <a:solidFill>
+                  <a:srgbClr val="FFFFFF"/>
+                </a:solidFill>
+                <a:latin typeface="Helvetica Neue"/>
+              </a:defRPr>
+            </a:pPr>
+            <a:r>
+              <a:t>Technology Consultants</a:t>
+            </a:r>
+          </a:p>
+        </p:txBody>
+      </p:sp>
+      <p:sp>
+        <p:nvSpPr>
+          <p:cNvPr id="6" name="TextBox 5"/>
+          <p:cNvSpPr txBox="1"/>
+          <p:nvPr/>
+        </p:nvSpPr>
+        <p:spPr>
+          <a:xfrm>
+            <a:off x="5029200" y="182880"/>
+            <a:ext cx="4754880" cy="292608"/>
+          </a:xfrm>
+          <a:prstGeom prst="rect">
+            <a:avLst/>
+          </a:prstGeom>
+          <a:noFill/>
+        </p:spPr>
+        <p:txBody>
+          <a:bodyPr wrap="none" lIns="0" tIns="0" rIns="0" bIns="0">
+            <a:spAutoFit/>
+          </a:bodyPr>
+          <a:lstStyle/>
+          <a:p>
+            <a:pPr algn="r">
+              <a:defRPr sz="1000">
+                <a:solidFill>
+                  <a:srgbClr val="C8CDD7"/>
+                </a:solidFill>
+                <a:latin typeface="Helvetica Neue"/>
+              </a:defRPr>
+            </a:pPr>
+            <a:r>
+              <a:t>Services   ·   Work   ·   How we work   ·   About   ·   FAQ</a:t>
+            </a:r>
+          </a:p>
+        </p:txBody>
+      </p:sp>
+      <p:sp>
+        <p:nvSpPr>
+          <p:cNvPr id="7" name="Rounded Rectangle 6"/>
+          <p:cNvSpPr/>
+          <p:nvPr/>
+        </p:nvSpPr>
+        <p:spPr>
+          <a:xfrm>
+            <a:off x="10058400" y="128016"/>
+            <a:ext cx="1371600" cy="329184"/>
+          </a:xfrm>
+          <a:prstGeom prst="roundRect">
+            <a:avLst/>
+          </a:prstGeom>
+          <a:solidFill>
+            <a:srgbClr val="FFFFFF"/>
+          </a:solidFill>
+          <a:ln>
+            <a:noFill/>
+          </a:ln>
+        </p:spPr>
+        <p:style>
+          <a:lnRef idx="1">
+            <a:schemeClr val="accent1"/>
+          </a:lnRef>
+          <a:fillRef idx="3">
+            <a:schemeClr val="accent1"/>
+          </a:fillRef>
+          <a:effectRef idx="2">
+            <a:schemeClr val="accent1"/>
+          </a:effectRef>
+          <a:fontRef idx="minor">
+            <a:schemeClr val="lt1"/>
+          </a:fontRef>
+        </p:style>
+        <p:txBody>
+          <a:bodyPr rtlCol="0" anchor="ctr"/>
+          <a:lstStyle/>
+          <a:p>
+            <a:pPr algn="ctr"/>
+          </a:p>
+        </p:txBody>
+      </p:sp>
+      <p:sp>
+        <p:nvSpPr>
+          <p:cNvPr id="8" name="TextBox 7"/>
+          <p:cNvSpPr txBox="1"/>
+          <p:nvPr/>
+        </p:nvSpPr>
+        <p:spPr>
+          <a:xfrm>
+            <a:off x="10058400" y="164592"/>
+            <a:ext cx="1371600" cy="274320"/>
+          </a:xfrm>
+          <a:prstGeom prst="rect">
+            <a:avLst/>
+          </a:prstGeom>
+          <a:noFill/>
+        </p:spPr>
+        <p:txBody>
+          <a:bodyPr wrap="none" lIns="0" tIns="0" rIns="0" bIns="0">
+            <a:spAutoFit/>
+          </a:bodyPr>
+          <a:lstStyle/>
+          <a:p>
+            <a:pPr algn="ctr">
+              <a:defRPr sz="1000" b="1">
+                <a:solidFill>
+                  <a:srgbClr val="16161A"/>
+                </a:solidFill>
+                <a:latin typeface="Helvetica Neue"/>
+              </a:defRPr>
+            </a:pPr>
+            <a:r>
+              <a:t>Book a call</a:t>
+            </a:r>
+          </a:p>
+        </p:txBody>
+      </p:sp>
+      <p:sp>
+        <p:nvSpPr>
+          <p:cNvPr id="9" name="TextBox 8"/>
+          <p:cNvSpPr txBox="1"/>
+          <p:nvPr/>
+        </p:nvSpPr>
+        <p:spPr>
+          <a:xfrm>
+            <a:off x="731520" y="777240"/>
+            <a:ext cx="10728655" cy="274320"/>
+          </a:xfrm>
+          <a:prstGeom prst="rect">
+            <a:avLst/>
+          </a:prstGeom>
+          <a:noFill/>
+        </p:spPr>
+        <p:txBody>
+          <a:bodyPr wrap="none" lIns="0" tIns="0" rIns="0" bIns="0">
+            <a:spAutoFit/>
+          </a:bodyPr>
+          <a:lstStyle/>
+          <a:p>
             <a:pPr>
               <a:defRPr sz="1100" b="1">
                 <a:solidFill>
-                  <a:srgbClr val="D99B26"/>
-                </a:solidFill>
-                <a:latin typeface="Courier New"/>
+                  <a:srgbClr val="2B59D9"/>
+                </a:solidFill>
+                <a:latin typeface="Helvetica Neue"/>
               </a:defRPr>
             </a:pPr>
             <a:r>
@@ -6668,14 +8777,14 @@
       </p:sp>
       <p:sp>
         <p:nvSpPr>
-          <p:cNvPr id="3" name="TextBox 2"/>
+          <p:cNvPr id="10" name="TextBox 9"/>
           <p:cNvSpPr txBox="1"/>
           <p:nvPr/>
         </p:nvSpPr>
         <p:spPr>
           <a:xfrm>
-            <a:off x="822960" y="868680"/>
-            <a:ext cx="10515600" cy="685800"/>
+            <a:off x="731520" y="1051560"/>
+            <a:ext cx="10728655" cy="640080"/>
           </a:xfrm>
           <a:prstGeom prst="rect">
             <a:avLst/>
@@ -6689,11 +8798,11 @@
           <a:lstStyle/>
           <a:p>
             <a:pPr>
-              <a:defRPr sz="2600" b="1">
+              <a:defRPr sz="2500" b="1">
                 <a:solidFill>
                   <a:srgbClr val="16161A"/>
                 </a:solidFill>
-                <a:latin typeface="Helvetica"/>
+                <a:latin typeface="Helvetica Neue"/>
               </a:defRPr>
             </a:pPr>
             <a:r>
@@ -6704,14 +8813,14 @@
       </p:sp>
       <p:sp>
         <p:nvSpPr>
-          <p:cNvPr id="4" name="Rounded Rectangle 3"/>
+          <p:cNvPr id="11" name="Rounded Rectangle 10"/>
           <p:cNvSpPr/>
           <p:nvPr/>
         </p:nvSpPr>
         <p:spPr>
           <a:xfrm>
-            <a:off x="822960" y="1874519"/>
-            <a:ext cx="3328416" cy="4023360"/>
+            <a:off x="731520" y="1874519"/>
+            <a:ext cx="3328416" cy="4114800"/>
           </a:xfrm>
           <a:prstGeom prst="roundRect">
             <a:avLst/>
@@ -6721,7 +8830,7 @@
           </a:solidFill>
           <a:ln w="12700">
             <a:solidFill>
-              <a:srgbClr val="EBE7DF"/>
+              <a:srgbClr val="E2DDD0"/>
             </a:solidFill>
           </a:ln>
         </p:spPr>
@@ -6749,13 +8858,13 @@
       </p:sp>
       <p:sp>
         <p:nvSpPr>
-          <p:cNvPr id="5" name="TextBox 4"/>
+          <p:cNvPr id="12" name="TextBox 11"/>
           <p:cNvSpPr txBox="1"/>
           <p:nvPr/>
         </p:nvSpPr>
         <p:spPr>
           <a:xfrm>
-            <a:off x="1143000" y="2194560"/>
+            <a:off x="1051560" y="2194560"/>
             <a:ext cx="2688336" cy="3474720"/>
           </a:xfrm>
           <a:prstGeom prst="rect">
@@ -6777,11 +8886,11 @@
                 <a:solidFill>
                   <a:srgbClr val="2B59D9"/>
                 </a:solidFill>
-                <a:latin typeface="Courier New"/>
-              </a:defRPr>
-            </a:pPr>
-            <a:r>
-              <a:t>[ 2 - 4 WEEKS ]</a:t>
+                <a:latin typeface="Helvetica Neue"/>
+              </a:defRPr>
+            </a:pPr>
+            <a:r>
+              <a:t>2 - 4 WEEKS</a:t>
             </a:r>
           </a:p>
           <a:p>
@@ -6793,7 +8902,7 @@
                 <a:solidFill>
                   <a:srgbClr val="16161A"/>
                 </a:solidFill>
-                <a:latin typeface="Helvetica"/>
+                <a:latin typeface="Helvetica Neue"/>
               </a:defRPr>
             </a:pPr>
             <a:r>
@@ -6804,9 +8913,9 @@
             <a:pPr>
               <a:defRPr sz="1300">
                 <a:solidFill>
-                  <a:srgbClr val="59564D"/>
-                </a:solidFill>
-                <a:latin typeface="Helvetica"/>
+                  <a:srgbClr val="454337"/>
+                </a:solidFill>
+                <a:latin typeface="Helvetica Neue"/>
               </a:defRPr>
             </a:pPr>
             <a:r>
@@ -6817,14 +8926,14 @@
       </p:sp>
       <p:sp>
         <p:nvSpPr>
-          <p:cNvPr id="6" name="Rounded Rectangle 5"/>
+          <p:cNvPr id="13" name="Rounded Rectangle 12"/>
           <p:cNvSpPr/>
           <p:nvPr/>
         </p:nvSpPr>
         <p:spPr>
           <a:xfrm>
-            <a:off x="4425696" y="1874519"/>
-            <a:ext cx="3328416" cy="4023360"/>
+            <a:off x="4334256" y="1874519"/>
+            <a:ext cx="3328416" cy="4114800"/>
           </a:xfrm>
           <a:prstGeom prst="roundRect">
             <a:avLst/>
@@ -6834,7 +8943,7 @@
           </a:solidFill>
           <a:ln w="12700">
             <a:solidFill>
-              <a:srgbClr val="EBE7DF"/>
+              <a:srgbClr val="E2DDD0"/>
             </a:solidFill>
           </a:ln>
         </p:spPr>
@@ -6862,13 +8971,13 @@
       </p:sp>
       <p:sp>
         <p:nvSpPr>
-          <p:cNvPr id="7" name="TextBox 6"/>
+          <p:cNvPr id="14" name="TextBox 13"/>
           <p:cNvSpPr txBox="1"/>
           <p:nvPr/>
         </p:nvSpPr>
         <p:spPr>
           <a:xfrm>
-            <a:off x="4745736" y="2194560"/>
+            <a:off x="4654296" y="2194560"/>
             <a:ext cx="2688336" cy="3474720"/>
           </a:xfrm>
           <a:prstGeom prst="rect">
@@ -6890,11 +8999,11 @@
                 <a:solidFill>
                   <a:srgbClr val="2B59D9"/>
                 </a:solidFill>
-                <a:latin typeface="Courier New"/>
-              </a:defRPr>
-            </a:pPr>
-            <a:r>
-              <a:t>[ PROJECT-BASED ]</a:t>
+                <a:latin typeface="Helvetica Neue"/>
+              </a:defRPr>
+            </a:pPr>
+            <a:r>
+              <a:t>PROJECT-BASED</a:t>
             </a:r>
           </a:p>
           <a:p>
@@ -6906,7 +9015,7 @@
                 <a:solidFill>
                   <a:srgbClr val="16161A"/>
                 </a:solidFill>
-                <a:latin typeface="Helvetica"/>
+                <a:latin typeface="Helvetica Neue"/>
               </a:defRPr>
             </a:pPr>
             <a:r>
@@ -6917,9 +9026,9 @@
             <a:pPr>
               <a:defRPr sz="1300">
                 <a:solidFill>
-                  <a:srgbClr val="59564D"/>
-                </a:solidFill>
-                <a:latin typeface="Helvetica"/>
+                  <a:srgbClr val="454337"/>
+                </a:solidFill>
+                <a:latin typeface="Helvetica Neue"/>
               </a:defRPr>
             </a:pPr>
             <a:r>
@@ -6930,14 +9039,14 @@
       </p:sp>
       <p:sp>
         <p:nvSpPr>
-          <p:cNvPr id="8" name="Rounded Rectangle 7"/>
+          <p:cNvPr id="15" name="Rounded Rectangle 14"/>
           <p:cNvSpPr/>
           <p:nvPr/>
         </p:nvSpPr>
         <p:spPr>
           <a:xfrm>
-            <a:off x="8028431" y="1874519"/>
-            <a:ext cx="3328416" cy="4023360"/>
+            <a:off x="7936992" y="1874519"/>
+            <a:ext cx="3328416" cy="4114800"/>
           </a:xfrm>
           <a:prstGeom prst="roundRect">
             <a:avLst/>
@@ -6947,7 +9056,7 @@
           </a:solidFill>
           <a:ln w="12700">
             <a:solidFill>
-              <a:srgbClr val="EBE7DF"/>
+              <a:srgbClr val="E2DDD0"/>
             </a:solidFill>
           </a:ln>
         </p:spPr>
@@ -6975,13 +9084,13 @@
       </p:sp>
       <p:sp>
         <p:nvSpPr>
-          <p:cNvPr id="9" name="TextBox 8"/>
+          <p:cNvPr id="16" name="TextBox 15"/>
           <p:cNvSpPr txBox="1"/>
           <p:nvPr/>
         </p:nvSpPr>
         <p:spPr>
           <a:xfrm>
-            <a:off x="8348471" y="2194560"/>
+            <a:off x="8257032" y="2194560"/>
             <a:ext cx="2688336" cy="3474720"/>
           </a:xfrm>
           <a:prstGeom prst="rect">
@@ -7003,11 +9112,11 @@
                 <a:solidFill>
                   <a:srgbClr val="2B59D9"/>
                 </a:solidFill>
-                <a:latin typeface="Courier New"/>
-              </a:defRPr>
-            </a:pPr>
-            <a:r>
-              <a:t>[ MONTHLY RETAINER ]</a:t>
+                <a:latin typeface="Helvetica Neue"/>
+              </a:defRPr>
+            </a:pPr>
+            <a:r>
+              <a:t>MONTHLY RETAINER</a:t>
             </a:r>
           </a:p>
           <a:p>
@@ -7019,7 +9128,7 @@
                 <a:solidFill>
                   <a:srgbClr val="16161A"/>
                 </a:solidFill>
-                <a:latin typeface="Helvetica"/>
+                <a:latin typeface="Helvetica Neue"/>
               </a:defRPr>
             </a:pPr>
             <a:r>
@@ -7030,9 +9139,9 @@
             <a:pPr>
               <a:defRPr sz="1300">
                 <a:solidFill>
-                  <a:srgbClr val="59564D"/>
-                </a:solidFill>
-                <a:latin typeface="Helvetica"/>
+                  <a:srgbClr val="454337"/>
+                </a:solidFill>
+                <a:latin typeface="Helvetica Neue"/>
               </a:defRPr>
             </a:pPr>
             <a:r>
@@ -7043,20 +9152,20 @@
       </p:sp>
       <p:sp>
         <p:nvSpPr>
-          <p:cNvPr id="10" name="Rectangle 9"/>
+          <p:cNvPr id="17" name="Rectangle 16"/>
           <p:cNvSpPr/>
           <p:nvPr/>
         </p:nvSpPr>
         <p:spPr>
           <a:xfrm>
-            <a:off x="822960" y="6309360"/>
-            <a:ext cx="10545775" cy="12700"/>
+            <a:off x="731520" y="6327648"/>
+            <a:ext cx="10728655" cy="12700"/>
           </a:xfrm>
           <a:prstGeom prst="rect">
             <a:avLst/>
           </a:prstGeom>
           <a:solidFill>
-            <a:srgbClr val="EBE7DF"/>
+            <a:srgbClr val="E2DDD0"/>
           </a:solidFill>
           <a:ln>
             <a:noFill/>
@@ -7086,13 +9195,13 @@
       </p:sp>
       <p:sp>
         <p:nvSpPr>
-          <p:cNvPr id="11" name="TextBox 10"/>
+          <p:cNvPr id="18" name="TextBox 17"/>
           <p:cNvSpPr txBox="1"/>
           <p:nvPr/>
         </p:nvSpPr>
         <p:spPr>
           <a:xfrm>
-            <a:off x="822960" y="6382512"/>
+            <a:off x="731520" y="6400800"/>
             <a:ext cx="7315200" cy="320040"/>
           </a:xfrm>
           <a:prstGeom prst="rect">
@@ -7109,9 +9218,9 @@
             <a:pPr>
               <a:defRPr sz="1000">
                 <a:solidFill>
-                  <a:srgbClr val="7C786C"/>
-                </a:solidFill>
-                <a:latin typeface="Courier New"/>
+                  <a:srgbClr val="5F5C52"/>
+                </a:solidFill>
+                <a:latin typeface="Helvetica Neue"/>
               </a:defRPr>
             </a:pPr>
             <a:r>
@@ -7122,13 +9231,13 @@
       </p:sp>
       <p:sp>
         <p:nvSpPr>
-          <p:cNvPr id="12" name="TextBox 11"/>
+          <p:cNvPr id="19" name="TextBox 18"/>
           <p:cNvSpPr txBox="1"/>
           <p:nvPr/>
         </p:nvSpPr>
         <p:spPr>
           <a:xfrm>
-            <a:off x="9539935" y="6382512"/>
+            <a:off x="9631375" y="6400800"/>
             <a:ext cx="1828800" cy="320040"/>
           </a:xfrm>
           <a:prstGeom prst="rect">
@@ -7145,9 +9254,9 @@
             <a:pPr algn="r">
               <a:defRPr sz="1000">
                 <a:solidFill>
-                  <a:srgbClr val="7C786C"/>
-                </a:solidFill>
-                <a:latin typeface="Courier New"/>
+                  <a:srgbClr val="5F5C52"/>
+                </a:solidFill>
+                <a:latin typeface="Helvetica Neue"/>
               </a:defRPr>
             </a:pPr>
             <a:r>
@@ -7170,7 +9279,7 @@
     <p:bg>
       <p:bgPr>
         <a:solidFill>
-          <a:srgbClr val="FAF9F5"/>
+          <a:srgbClr val="FBFAF5"/>
         </a:solidFill>
         <a:effectLst/>
       </p:bgPr>
@@ -7184,14 +9293,102 @@
       <p:grpSpPr/>
       <p:sp>
         <p:nvSpPr>
-          <p:cNvPr id="2" name="TextBox 1"/>
+          <p:cNvPr id="2" name="Rectangle 1"/>
+          <p:cNvSpPr/>
+          <p:nvPr/>
+        </p:nvSpPr>
+        <p:spPr>
+          <a:xfrm>
+            <a:off x="0" y="0"/>
+            <a:ext cx="12191695" cy="594360"/>
+          </a:xfrm>
+          <a:prstGeom prst="rect">
+            <a:avLst/>
+          </a:prstGeom>
+          <a:solidFill>
+            <a:srgbClr val="121216"/>
+          </a:solidFill>
+          <a:ln w="12700">
+            <a:solidFill>
+              <a:srgbClr val="26262C"/>
+            </a:solidFill>
+          </a:ln>
+        </p:spPr>
+        <p:style>
+          <a:lnRef idx="1">
+            <a:schemeClr val="accent1"/>
+          </a:lnRef>
+          <a:fillRef idx="3">
+            <a:schemeClr val="accent1"/>
+          </a:fillRef>
+          <a:effectRef idx="2">
+            <a:schemeClr val="accent1"/>
+          </a:effectRef>
+          <a:fontRef idx="minor">
+            <a:schemeClr val="lt1"/>
+          </a:fontRef>
+        </p:style>
+        <p:txBody>
+          <a:bodyPr rtlCol="0" anchor="ctr"/>
+          <a:lstStyle/>
+          <a:p>
+            <a:pPr algn="ctr"/>
+          </a:p>
+        </p:txBody>
+      </p:sp>
+      <p:sp>
+        <p:nvSpPr>
+          <p:cNvPr id="3" name="Rounded Rectangle 2"/>
+          <p:cNvSpPr/>
+          <p:nvPr/>
+        </p:nvSpPr>
+        <p:spPr>
+          <a:xfrm>
+            <a:off x="731520" y="146304"/>
+            <a:ext cx="310896" cy="310896"/>
+          </a:xfrm>
+          <a:prstGeom prst="roundRect">
+            <a:avLst/>
+          </a:prstGeom>
+          <a:solidFill>
+            <a:srgbClr val="2B59D9"/>
+          </a:solidFill>
+          <a:ln>
+            <a:noFill/>
+          </a:ln>
+        </p:spPr>
+        <p:style>
+          <a:lnRef idx="1">
+            <a:schemeClr val="accent1"/>
+          </a:lnRef>
+          <a:fillRef idx="3">
+            <a:schemeClr val="accent1"/>
+          </a:fillRef>
+          <a:effectRef idx="2">
+            <a:schemeClr val="accent1"/>
+          </a:effectRef>
+          <a:fontRef idx="minor">
+            <a:schemeClr val="lt1"/>
+          </a:fontRef>
+        </p:style>
+        <p:txBody>
+          <a:bodyPr rtlCol="0" anchor="ctr"/>
+          <a:lstStyle/>
+          <a:p>
+            <a:pPr algn="ctr"/>
+          </a:p>
+        </p:txBody>
+      </p:sp>
+      <p:sp>
+        <p:nvSpPr>
+          <p:cNvPr id="4" name="TextBox 3"/>
           <p:cNvSpPr txBox="1"/>
           <p:nvPr/>
         </p:nvSpPr>
         <p:spPr>
           <a:xfrm>
-            <a:off x="822960" y="548640"/>
-            <a:ext cx="10515600" cy="320040"/>
+            <a:off x="731520" y="128016"/>
+            <a:ext cx="310896" cy="310896"/>
           </a:xfrm>
           <a:prstGeom prst="rect">
             <a:avLst/>
@@ -7204,12 +9401,199 @@
           </a:bodyPr>
           <a:lstStyle/>
           <a:p>
+            <a:pPr algn="ctr">
+              <a:defRPr sz="1600" b="1">
+                <a:solidFill>
+                  <a:srgbClr val="FFFFFF"/>
+                </a:solidFill>
+                <a:latin typeface="Helvetica Neue"/>
+              </a:defRPr>
+            </a:pPr>
+            <a:r>
+              <a:t>›</a:t>
+            </a:r>
+          </a:p>
+        </p:txBody>
+      </p:sp>
+      <p:sp>
+        <p:nvSpPr>
+          <p:cNvPr id="5" name="TextBox 4"/>
+          <p:cNvSpPr txBox="1"/>
+          <p:nvPr/>
+        </p:nvSpPr>
+        <p:spPr>
+          <a:xfrm>
+            <a:off x="1143000" y="164592"/>
+            <a:ext cx="3200400" cy="292608"/>
+          </a:xfrm>
+          <a:prstGeom prst="rect">
+            <a:avLst/>
+          </a:prstGeom>
+          <a:noFill/>
+        </p:spPr>
+        <p:txBody>
+          <a:bodyPr wrap="none" lIns="0" tIns="0" rIns="0" bIns="0">
+            <a:spAutoFit/>
+          </a:bodyPr>
+          <a:lstStyle/>
+          <a:p>
+            <a:pPr>
+              <a:defRPr sz="1300" b="1">
+                <a:solidFill>
+                  <a:srgbClr val="FFFFFF"/>
+                </a:solidFill>
+                <a:latin typeface="Helvetica Neue"/>
+              </a:defRPr>
+            </a:pPr>
+            <a:r>
+              <a:t>Technology Consultants</a:t>
+            </a:r>
+          </a:p>
+        </p:txBody>
+      </p:sp>
+      <p:sp>
+        <p:nvSpPr>
+          <p:cNvPr id="6" name="TextBox 5"/>
+          <p:cNvSpPr txBox="1"/>
+          <p:nvPr/>
+        </p:nvSpPr>
+        <p:spPr>
+          <a:xfrm>
+            <a:off x="5029200" y="182880"/>
+            <a:ext cx="4754880" cy="292608"/>
+          </a:xfrm>
+          <a:prstGeom prst="rect">
+            <a:avLst/>
+          </a:prstGeom>
+          <a:noFill/>
+        </p:spPr>
+        <p:txBody>
+          <a:bodyPr wrap="none" lIns="0" tIns="0" rIns="0" bIns="0">
+            <a:spAutoFit/>
+          </a:bodyPr>
+          <a:lstStyle/>
+          <a:p>
+            <a:pPr algn="r">
+              <a:defRPr sz="1000">
+                <a:solidFill>
+                  <a:srgbClr val="C8CDD7"/>
+                </a:solidFill>
+                <a:latin typeface="Helvetica Neue"/>
+              </a:defRPr>
+            </a:pPr>
+            <a:r>
+              <a:t>Services   ·   Work   ·   How we work   ·   About   ·   FAQ</a:t>
+            </a:r>
+          </a:p>
+        </p:txBody>
+      </p:sp>
+      <p:sp>
+        <p:nvSpPr>
+          <p:cNvPr id="7" name="Rounded Rectangle 6"/>
+          <p:cNvSpPr/>
+          <p:nvPr/>
+        </p:nvSpPr>
+        <p:spPr>
+          <a:xfrm>
+            <a:off x="10058400" y="128016"/>
+            <a:ext cx="1371600" cy="329184"/>
+          </a:xfrm>
+          <a:prstGeom prst="roundRect">
+            <a:avLst/>
+          </a:prstGeom>
+          <a:solidFill>
+            <a:srgbClr val="FFFFFF"/>
+          </a:solidFill>
+          <a:ln>
+            <a:noFill/>
+          </a:ln>
+        </p:spPr>
+        <p:style>
+          <a:lnRef idx="1">
+            <a:schemeClr val="accent1"/>
+          </a:lnRef>
+          <a:fillRef idx="3">
+            <a:schemeClr val="accent1"/>
+          </a:fillRef>
+          <a:effectRef idx="2">
+            <a:schemeClr val="accent1"/>
+          </a:effectRef>
+          <a:fontRef idx="minor">
+            <a:schemeClr val="lt1"/>
+          </a:fontRef>
+        </p:style>
+        <p:txBody>
+          <a:bodyPr rtlCol="0" anchor="ctr"/>
+          <a:lstStyle/>
+          <a:p>
+            <a:pPr algn="ctr"/>
+          </a:p>
+        </p:txBody>
+      </p:sp>
+      <p:sp>
+        <p:nvSpPr>
+          <p:cNvPr id="8" name="TextBox 7"/>
+          <p:cNvSpPr txBox="1"/>
+          <p:nvPr/>
+        </p:nvSpPr>
+        <p:spPr>
+          <a:xfrm>
+            <a:off x="10058400" y="164592"/>
+            <a:ext cx="1371600" cy="274320"/>
+          </a:xfrm>
+          <a:prstGeom prst="rect">
+            <a:avLst/>
+          </a:prstGeom>
+          <a:noFill/>
+        </p:spPr>
+        <p:txBody>
+          <a:bodyPr wrap="none" lIns="0" tIns="0" rIns="0" bIns="0">
+            <a:spAutoFit/>
+          </a:bodyPr>
+          <a:lstStyle/>
+          <a:p>
+            <a:pPr algn="ctr">
+              <a:defRPr sz="1000" b="1">
+                <a:solidFill>
+                  <a:srgbClr val="16161A"/>
+                </a:solidFill>
+                <a:latin typeface="Helvetica Neue"/>
+              </a:defRPr>
+            </a:pPr>
+            <a:r>
+              <a:t>Book a call</a:t>
+            </a:r>
+          </a:p>
+        </p:txBody>
+      </p:sp>
+      <p:sp>
+        <p:nvSpPr>
+          <p:cNvPr id="9" name="TextBox 8"/>
+          <p:cNvSpPr txBox="1"/>
+          <p:nvPr/>
+        </p:nvSpPr>
+        <p:spPr>
+          <a:xfrm>
+            <a:off x="731520" y="777240"/>
+            <a:ext cx="10728655" cy="274320"/>
+          </a:xfrm>
+          <a:prstGeom prst="rect">
+            <a:avLst/>
+          </a:prstGeom>
+          <a:noFill/>
+        </p:spPr>
+        <p:txBody>
+          <a:bodyPr wrap="none" lIns="0" tIns="0" rIns="0" bIns="0">
+            <a:spAutoFit/>
+          </a:bodyPr>
+          <a:lstStyle/>
+          <a:p>
             <a:pPr>
               <a:defRPr sz="1100" b="1">
                 <a:solidFill>
-                  <a:srgbClr val="D99B26"/>
-                </a:solidFill>
-                <a:latin typeface="Courier New"/>
+                  <a:srgbClr val="2B59D9"/>
+                </a:solidFill>
+                <a:latin typeface="Helvetica Neue"/>
               </a:defRPr>
             </a:pPr>
             <a:r>
@@ -7220,14 +9604,14 @@
       </p:sp>
       <p:sp>
         <p:nvSpPr>
-          <p:cNvPr id="3" name="TextBox 2"/>
+          <p:cNvPr id="10" name="TextBox 9"/>
           <p:cNvSpPr txBox="1"/>
           <p:nvPr/>
         </p:nvSpPr>
         <p:spPr>
           <a:xfrm>
-            <a:off x="822960" y="868680"/>
-            <a:ext cx="10515600" cy="685800"/>
+            <a:off x="731520" y="1051560"/>
+            <a:ext cx="10728655" cy="640080"/>
           </a:xfrm>
           <a:prstGeom prst="rect">
             <a:avLst/>
@@ -7241,11 +9625,11 @@
           <a:lstStyle/>
           <a:p>
             <a:pPr>
-              <a:defRPr sz="2600" b="1">
+              <a:defRPr sz="2500" b="1">
                 <a:solidFill>
                   <a:srgbClr val="16161A"/>
                 </a:solidFill>
-                <a:latin typeface="Helvetica"/>
+                <a:latin typeface="Helvetica Neue"/>
               </a:defRPr>
             </a:pPr>
             <a:r>
@@ -7256,14 +9640,14 @@
       </p:sp>
       <p:sp>
         <p:nvSpPr>
-          <p:cNvPr id="4" name="Rounded Rectangle 3"/>
+          <p:cNvPr id="11" name="Rounded Rectangle 10"/>
           <p:cNvSpPr/>
           <p:nvPr/>
         </p:nvSpPr>
         <p:spPr>
           <a:xfrm>
-            <a:off x="822960" y="1874519"/>
-            <a:ext cx="10545775" cy="3017520"/>
+            <a:off x="731520" y="1874519"/>
+            <a:ext cx="10728655" cy="3017520"/>
           </a:xfrm>
           <a:prstGeom prst="roundRect">
             <a:avLst/>
@@ -7273,7 +9657,7 @@
           </a:solidFill>
           <a:ln w="12700">
             <a:solidFill>
-              <a:srgbClr val="EBE7DF"/>
+              <a:srgbClr val="E2DDD0"/>
             </a:solidFill>
           </a:ln>
         </p:spPr>
@@ -7301,14 +9685,14 @@
       </p:sp>
       <p:sp>
         <p:nvSpPr>
-          <p:cNvPr id="5" name="TextBox 4"/>
+          <p:cNvPr id="12" name="TextBox 11"/>
           <p:cNvSpPr txBox="1"/>
           <p:nvPr/>
         </p:nvSpPr>
         <p:spPr>
           <a:xfrm>
-            <a:off x="1097280" y="2057400"/>
-            <a:ext cx="9966960" cy="2651760"/>
+            <a:off x="1005840" y="2057400"/>
+            <a:ext cx="10180015" cy="2651760"/>
           </a:xfrm>
           <a:prstGeom prst="rect">
             <a:avLst/>
@@ -7329,7 +9713,7 @@
                 <a:solidFill>
                   <a:srgbClr val="D99B26"/>
                 </a:solidFill>
-                <a:latin typeface="Courier New"/>
+                <a:latin typeface="Helvetica Neue"/>
               </a:defRPr>
             </a:pPr>
             <a:r>
@@ -7341,11 +9725,11 @@
               <a:spcAft>
                 <a:spcPts val="800"/>
               </a:spcAft>
-              <a:defRPr sz="1500" i="1">
+              <a:defRPr sz="1500">
                 <a:solidFill>
                   <a:srgbClr val="16161A"/>
                 </a:solidFill>
-                <a:latin typeface="Helvetica"/>
+                <a:latin typeface="Helvetica Neue"/>
               </a:defRPr>
             </a:pPr>
             <a:r>
@@ -7354,11 +9738,11 @@
           </a:p>
           <a:p>
             <a:pPr>
-              <a:defRPr sz="1500" i="1">
+              <a:defRPr sz="1500">
                 <a:solidFill>
                   <a:srgbClr val="16161A"/>
                 </a:solidFill>
-                <a:latin typeface="Helvetica"/>
+                <a:latin typeface="Helvetica Neue"/>
               </a:defRPr>
             </a:pPr>
             <a:r>
@@ -7369,14 +9753,14 @@
       </p:sp>
       <p:sp>
         <p:nvSpPr>
-          <p:cNvPr id="6" name="TextBox 5"/>
+          <p:cNvPr id="13" name="TextBox 12"/>
           <p:cNvSpPr txBox="1"/>
           <p:nvPr/>
         </p:nvSpPr>
         <p:spPr>
           <a:xfrm>
-            <a:off x="822960" y="5029200"/>
-            <a:ext cx="10545775" cy="1097280"/>
+            <a:off x="731520" y="5029200"/>
+            <a:ext cx="10728655" cy="1097280"/>
           </a:xfrm>
           <a:prstGeom prst="rect">
             <a:avLst/>
@@ -7394,7 +9778,7 @@
                 <a:solidFill>
                   <a:srgbClr val="16161A"/>
                 </a:solidFill>
-                <a:latin typeface="Helvetica"/>
+                <a:latin typeface="Helvetica Neue"/>
               </a:defRPr>
             </a:pPr>
             <a:r>
@@ -7410,7 +9794,7 @@
                 <a:solidFill>
                   <a:srgbClr val="2B59D9"/>
                 </a:solidFill>
-                <a:latin typeface="Courier New"/>
+                <a:latin typeface="Helvetica Neue"/>
               </a:defRPr>
             </a:pPr>
             <a:r>
@@ -7421,20 +9805,20 @@
       </p:sp>
       <p:sp>
         <p:nvSpPr>
-          <p:cNvPr id="7" name="Rectangle 6"/>
+          <p:cNvPr id="14" name="Rectangle 13"/>
           <p:cNvSpPr/>
           <p:nvPr/>
         </p:nvSpPr>
         <p:spPr>
           <a:xfrm>
-            <a:off x="822960" y="6309360"/>
-            <a:ext cx="10545775" cy="12700"/>
+            <a:off x="731520" y="6327648"/>
+            <a:ext cx="10728655" cy="12700"/>
           </a:xfrm>
           <a:prstGeom prst="rect">
             <a:avLst/>
           </a:prstGeom>
           <a:solidFill>
-            <a:srgbClr val="EBE7DF"/>
+            <a:srgbClr val="E2DDD0"/>
           </a:solidFill>
           <a:ln>
             <a:noFill/>
@@ -7464,13 +9848,13 @@
       </p:sp>
       <p:sp>
         <p:nvSpPr>
-          <p:cNvPr id="8" name="TextBox 7"/>
+          <p:cNvPr id="15" name="TextBox 14"/>
           <p:cNvSpPr txBox="1"/>
           <p:nvPr/>
         </p:nvSpPr>
         <p:spPr>
           <a:xfrm>
-            <a:off x="822960" y="6382512"/>
+            <a:off x="731520" y="6400800"/>
             <a:ext cx="7315200" cy="320040"/>
           </a:xfrm>
           <a:prstGeom prst="rect">
@@ -7487,9 +9871,9 @@
             <a:pPr>
               <a:defRPr sz="1000">
                 <a:solidFill>
-                  <a:srgbClr val="7C786C"/>
-                </a:solidFill>
-                <a:latin typeface="Courier New"/>
+                  <a:srgbClr val="5F5C52"/>
+                </a:solidFill>
+                <a:latin typeface="Helvetica Neue"/>
               </a:defRPr>
             </a:pPr>
             <a:r>
@@ -7500,13 +9884,13 @@
       </p:sp>
       <p:sp>
         <p:nvSpPr>
-          <p:cNvPr id="9" name="TextBox 8"/>
+          <p:cNvPr id="16" name="TextBox 15"/>
           <p:cNvSpPr txBox="1"/>
           <p:nvPr/>
         </p:nvSpPr>
         <p:spPr>
           <a:xfrm>
-            <a:off x="9539935" y="6382512"/>
+            <a:off x="9631375" y="6400800"/>
             <a:ext cx="1828800" cy="320040"/>
           </a:xfrm>
           <a:prstGeom prst="rect">
@@ -7523,9 +9907,9 @@
             <a:pPr algn="r">
               <a:defRPr sz="1000">
                 <a:solidFill>
-                  <a:srgbClr val="7C786C"/>
-                </a:solidFill>
-                <a:latin typeface="Courier New"/>
+                  <a:srgbClr val="5F5C52"/>
+                </a:solidFill>
+                <a:latin typeface="Helvetica Neue"/>
               </a:defRPr>
             </a:pPr>
             <a:r>

--- a/Technology_Consultants_Who_to_Send_My_Way.pptx
+++ b/Technology_Consultants_Who_to_Send_My_Way.pptx
@@ -3157,7 +3157,7 @@
         <p:spPr>
           <a:xfrm>
             <a:off x="731520" y="146304"/>
-            <a:ext cx="310896" cy="310896"/>
+            <a:ext cx="301752" cy="301752"/>
           </a:xfrm>
           <a:prstGeom prst="roundRect">
             <a:avLst/>
@@ -3200,7 +3200,7 @@
         <p:spPr>
           <a:xfrm>
             <a:off x="731520" y="128016"/>
-            <a:ext cx="310896" cy="310896"/>
+            <a:ext cx="301752" cy="301752"/>
           </a:xfrm>
           <a:prstGeom prst="rect">
             <a:avLst/>
@@ -3208,7 +3208,7 @@
           <a:noFill/>
         </p:spPr>
         <p:txBody>
-          <a:bodyPr wrap="none" lIns="0" tIns="0" rIns="0" bIns="0">
+          <a:bodyPr wrap="square" lIns="0" rIns="0" tIns="0" bIns="0">
             <a:spAutoFit/>
           </a:bodyPr>
           <a:lstStyle/>
@@ -3244,7 +3244,7 @@
           <a:noFill/>
         </p:spPr>
         <p:txBody>
-          <a:bodyPr wrap="none" lIns="0" tIns="0" rIns="0" bIns="0">
+          <a:bodyPr wrap="square" lIns="0" rIns="0" tIns="0" bIns="0">
             <a:spAutoFit/>
           </a:bodyPr>
           <a:lstStyle/>
@@ -3271,8 +3271,8 @@
         </p:nvSpPr>
         <p:spPr>
           <a:xfrm>
-            <a:off x="5029200" y="182880"/>
-            <a:ext cx="4754880" cy="292608"/>
+            <a:off x="4572000" y="182880"/>
+            <a:ext cx="5212080" cy="292608"/>
           </a:xfrm>
           <a:prstGeom prst="rect">
             <a:avLst/>
@@ -3280,7 +3280,7 @@
           <a:noFill/>
         </p:spPr>
         <p:txBody>
-          <a:bodyPr wrap="none" lIns="0" tIns="0" rIns="0" bIns="0">
+          <a:bodyPr wrap="square" lIns="0" rIns="0" tIns="0" bIns="0">
             <a:spAutoFit/>
           </a:bodyPr>
           <a:lstStyle/>
@@ -3288,7 +3288,7 @@
             <a:pPr algn="r">
               <a:defRPr sz="1000">
                 <a:solidFill>
-                  <a:srgbClr val="C8CDD7"/>
+                  <a:srgbClr val="BEC3CD"/>
                 </a:solidFill>
                 <a:latin typeface="Helvetica Neue"/>
               </a:defRPr>
@@ -3307,8 +3307,8 @@
         </p:nvSpPr>
         <p:spPr>
           <a:xfrm>
-            <a:off x="10058400" y="128016"/>
-            <a:ext cx="1371600" cy="329184"/>
+            <a:off x="9966960" y="128016"/>
+            <a:ext cx="1463040" cy="329184"/>
           </a:xfrm>
           <a:prstGeom prst="roundRect">
             <a:avLst/>
@@ -3350,8 +3350,8 @@
         </p:nvSpPr>
         <p:spPr>
           <a:xfrm>
-            <a:off x="10058400" y="164592"/>
-            <a:ext cx="1371600" cy="274320"/>
+            <a:off x="9966960" y="164592"/>
+            <a:ext cx="1463040" cy="274320"/>
           </a:xfrm>
           <a:prstGeom prst="rect">
             <a:avLst/>
@@ -3359,7 +3359,7 @@
           <a:noFill/>
         </p:spPr>
         <p:txBody>
-          <a:bodyPr wrap="none" lIns="0" tIns="0" rIns="0" bIns="0">
+          <a:bodyPr wrap="square" lIns="0" rIns="0" tIns="0" bIns="0">
             <a:spAutoFit/>
           </a:bodyPr>
           <a:lstStyle/>
@@ -3386,8 +3386,8 @@
         </p:nvSpPr>
         <p:spPr>
           <a:xfrm>
-            <a:off x="731520" y="822960"/>
-            <a:ext cx="10728655" cy="274320"/>
+            <a:off x="731520" y="868680"/>
+            <a:ext cx="6217920" cy="3931920"/>
           </a:xfrm>
           <a:prstGeom prst="rect">
             <a:avLst/>
@@ -3395,13 +3395,16 @@
           <a:noFill/>
         </p:spPr>
         <p:txBody>
-          <a:bodyPr wrap="none" lIns="0" tIns="0" rIns="0" bIns="0">
+          <a:bodyPr wrap="square" lIns="0" rIns="0" tIns="0" bIns="0">
             <a:spAutoFit/>
           </a:bodyPr>
           <a:lstStyle/>
           <a:p>
             <a:pPr>
-              <a:defRPr sz="1000" b="1">
+              <a:spcAft>
+                <a:spcPts val="1200"/>
+              </a:spcAft>
+              <a:defRPr sz="950" b="1">
                 <a:solidFill>
                   <a:srgbClr val="2B59D9"/>
                 </a:solidFill>
@@ -3412,18 +3415,93 @@
               <a:t>WEBSITES  ·  AUTOMATION  ·  AI AGENTS    |    ● Booking projects · Q3 2026</a:t>
             </a:r>
           </a:p>
-        </p:txBody>
-      </p:sp>
-      <p:sp>
-        <p:nvSpPr>
-          <p:cNvPr id="10" name="TextBox 9"/>
+          <a:p>
+            <a:pPr>
+              <a:spcAft>
+                <a:spcPts val="1400"/>
+              </a:spcAft>
+              <a:defRPr sz="3200" b="1">
+                <a:solidFill>
+                  <a:srgbClr val="16161A"/>
+                </a:solidFill>
+                <a:latin typeface="Helvetica Neue"/>
+              </a:defRPr>
+            </a:pPr>
+            <a:r>
+              <a:t>We build technology around your people — not instead of them.</a:t>
+            </a:r>
+          </a:p>
+          <a:p>
+            <a:pPr>
+              <a:spcAft>
+                <a:spcPts val="2000"/>
+              </a:spcAft>
+              <a:defRPr sz="1350">
+                <a:solidFill>
+                  <a:srgbClr val="454337"/>
+                </a:solidFill>
+                <a:latin typeface="Helvetica Neue"/>
+              </a:defRPr>
+            </a:pPr>
+            <a:r>
+              <a:t>We build software that takes work off your team’s plate — from automated web applications to AI agents that answer phones, read paperwork, and run repetitive jobs with a person in the loop wherever money, trust, or judgment is on the line.</a:t>
+            </a:r>
+          </a:p>
+        </p:txBody>
+      </p:sp>
+      <p:sp>
+        <p:nvSpPr>
+          <p:cNvPr id="10" name="Rounded Rectangle 9"/>
+          <p:cNvSpPr/>
+          <p:nvPr/>
+        </p:nvSpPr>
+        <p:spPr>
+          <a:xfrm>
+            <a:off x="731520" y="4160520"/>
+            <a:ext cx="2377440" cy="438912"/>
+          </a:xfrm>
+          <a:prstGeom prst="roundRect">
+            <a:avLst/>
+          </a:prstGeom>
+          <a:solidFill>
+            <a:srgbClr val="16161A"/>
+          </a:solidFill>
+          <a:ln>
+            <a:noFill/>
+          </a:ln>
+        </p:spPr>
+        <p:style>
+          <a:lnRef idx="1">
+            <a:schemeClr val="accent1"/>
+          </a:lnRef>
+          <a:fillRef idx="3">
+            <a:schemeClr val="accent1"/>
+          </a:fillRef>
+          <a:effectRef idx="2">
+            <a:schemeClr val="accent1"/>
+          </a:effectRef>
+          <a:fontRef idx="minor">
+            <a:schemeClr val="lt1"/>
+          </a:fontRef>
+        </p:style>
+        <p:txBody>
+          <a:bodyPr rtlCol="0" anchor="ctr"/>
+          <a:lstStyle/>
+          <a:p>
+            <a:pPr algn="ctr"/>
+          </a:p>
+        </p:txBody>
+      </p:sp>
+      <p:sp>
+        <p:nvSpPr>
+          <p:cNvPr id="11" name="TextBox 10"/>
           <p:cNvSpPr txBox="1"/>
           <p:nvPr/>
         </p:nvSpPr>
         <p:spPr>
           <a:xfrm>
-            <a:off x="731520" y="1143000"/>
-            <a:ext cx="10728655" cy="1371600"/>
+            <a:off x="731520" y="4251960"/>
+            <a:ext cx="2377440" cy="320040"/>
           </a:xfrm>
           <a:prstGeom prst="rect">
             <a:avLst/>
@@ -3431,13 +3509,94 @@
           <a:noFill/>
         </p:spPr>
         <p:txBody>
-          <a:bodyPr wrap="square" lIns="0" tIns="0" rIns="0" bIns="0">
+          <a:bodyPr wrap="square" lIns="0" rIns="0" tIns="0" bIns="0">
             <a:spAutoFit/>
           </a:bodyPr>
           <a:lstStyle/>
           <a:p>
-            <a:pPr>
-              <a:defRPr sz="3600" b="1">
+            <a:pPr algn="ctr">
+              <a:defRPr sz="1150" b="1">
+                <a:solidFill>
+                  <a:srgbClr val="FFFFFF"/>
+                </a:solidFill>
+                <a:latin typeface="Helvetica Neue"/>
+              </a:defRPr>
+            </a:pPr>
+            <a:r>
+              <a:t>Book a 30-min call →</a:t>
+            </a:r>
+          </a:p>
+        </p:txBody>
+      </p:sp>
+      <p:sp>
+        <p:nvSpPr>
+          <p:cNvPr id="12" name="Rounded Rectangle 11"/>
+          <p:cNvSpPr/>
+          <p:nvPr/>
+        </p:nvSpPr>
+        <p:spPr>
+          <a:xfrm>
+            <a:off x="3246120" y="4160520"/>
+            <a:ext cx="2286000" cy="438912"/>
+          </a:xfrm>
+          <a:prstGeom prst="roundRect">
+            <a:avLst/>
+          </a:prstGeom>
+          <a:solidFill>
+            <a:srgbClr val="FBFAF5"/>
+          </a:solidFill>
+          <a:ln w="12700">
+            <a:solidFill>
+              <a:srgbClr val="E2DDD0"/>
+            </a:solidFill>
+          </a:ln>
+        </p:spPr>
+        <p:style>
+          <a:lnRef idx="1">
+            <a:schemeClr val="accent1"/>
+          </a:lnRef>
+          <a:fillRef idx="3">
+            <a:schemeClr val="accent1"/>
+          </a:fillRef>
+          <a:effectRef idx="2">
+            <a:schemeClr val="accent1"/>
+          </a:effectRef>
+          <a:fontRef idx="minor">
+            <a:schemeClr val="lt1"/>
+          </a:fontRef>
+        </p:style>
+        <p:txBody>
+          <a:bodyPr rtlCol="0" anchor="ctr"/>
+          <a:lstStyle/>
+          <a:p>
+            <a:pPr algn="ctr"/>
+          </a:p>
+        </p:txBody>
+      </p:sp>
+      <p:sp>
+        <p:nvSpPr>
+          <p:cNvPr id="13" name="TextBox 12"/>
+          <p:cNvSpPr txBox="1"/>
+          <p:nvPr/>
+        </p:nvSpPr>
+        <p:spPr>
+          <a:xfrm>
+            <a:off x="3246120" y="4251960"/>
+            <a:ext cx="2286000" cy="320040"/>
+          </a:xfrm>
+          <a:prstGeom prst="rect">
+            <a:avLst/>
+          </a:prstGeom>
+          <a:noFill/>
+        </p:spPr>
+        <p:txBody>
+          <a:bodyPr wrap="square" lIns="0" rIns="0" tIns="0" bIns="0">
+            <a:spAutoFit/>
+          </a:bodyPr>
+          <a:lstStyle/>
+          <a:p>
+            <a:pPr algn="ctr">
+              <a:defRPr sz="1150" b="1">
                 <a:solidFill>
                   <a:srgbClr val="16161A"/>
                 </a:solidFill>
@@ -3445,21 +3604,21 @@
               </a:defRPr>
             </a:pPr>
             <a:r>
-              <a:t>We build technology around your people — not instead of them.</a:t>
-            </a:r>
-          </a:p>
-        </p:txBody>
-      </p:sp>
-      <p:sp>
-        <p:nvSpPr>
-          <p:cNvPr id="11" name="Rounded Rectangle 10"/>
+              <a:t>Referral Guide</a:t>
+            </a:r>
+          </a:p>
+        </p:txBody>
+      </p:sp>
+      <p:sp>
+        <p:nvSpPr>
+          <p:cNvPr id="14" name="Rounded Rectangle 13"/>
           <p:cNvSpPr/>
           <p:nvPr/>
         </p:nvSpPr>
         <p:spPr>
           <a:xfrm>
-            <a:off x="731520" y="2606040"/>
-            <a:ext cx="10728655" cy="1463040"/>
+            <a:off x="7315200" y="868680"/>
+            <a:ext cx="4144975" cy="1920240"/>
           </a:xfrm>
           <a:prstGeom prst="roundRect">
             <a:avLst/>
@@ -3497,14 +3656,14 @@
       </p:sp>
       <p:sp>
         <p:nvSpPr>
-          <p:cNvPr id="12" name="TextBox 11"/>
+          <p:cNvPr id="15" name="TextBox 14"/>
           <p:cNvSpPr txBox="1"/>
           <p:nvPr/>
         </p:nvSpPr>
         <p:spPr>
           <a:xfrm>
-            <a:off x="1005840" y="2743200"/>
-            <a:ext cx="10180015" cy="1188720"/>
+            <a:off x="7589520" y="1051560"/>
+            <a:ext cx="3596335" cy="1554480"/>
           </a:xfrm>
           <a:prstGeom prst="rect">
             <a:avLst/>
@@ -3512,15 +3671,44 @@
           <a:noFill/>
         </p:spPr>
         <p:txBody>
-          <a:bodyPr wrap="square">
+          <a:bodyPr wrap="square" lIns="0" rIns="0" tIns="0" bIns="0">
             <a:spAutoFit/>
           </a:bodyPr>
           <a:lstStyle/>
           <a:p>
             <a:pPr>
               <a:spcAft>
-                <a:spcPts val="600"/>
+                <a:spcPts val="800"/>
               </a:spcAft>
+              <a:defRPr sz="1000" b="1">
+                <a:solidFill>
+                  <a:srgbClr val="2B59D9"/>
+                </a:solidFill>
+                <a:latin typeface="Helvetica Neue"/>
+              </a:defRPr>
+            </a:pPr>
+            <a:r>
+              <a:t>● INVOICE REVIEW</a:t>
+            </a:r>
+          </a:p>
+          <a:p>
+            <a:pPr>
+              <a:spcAft>
+                <a:spcPts val="1000"/>
+              </a:spcAft>
+              <a:defRPr sz="1500" b="1">
+                <a:solidFill>
+                  <a:srgbClr val="16161A"/>
+                </a:solidFill>
+                <a:latin typeface="Helvetica Neue"/>
+              </a:defRPr>
+            </a:pPr>
+            <a:r>
+              <a:t>245 cleared automatically</a:t>
+            </a:r>
+          </a:p>
+          <a:p>
+            <a:pPr>
               <a:defRPr sz="1100" b="1">
                 <a:solidFill>
                   <a:srgbClr val="D99B26"/>
@@ -3529,43 +3717,68 @@
               </a:defRPr>
             </a:pPr>
             <a:r>
-              <a:t>WHO TO SEND MY WAY  —  PARTNER REFERRAL GUIDE</a:t>
-            </a:r>
-          </a:p>
-          <a:p>
-            <a:pPr>
-              <a:defRPr sz="1400">
-                <a:solidFill>
-                  <a:srgbClr val="454337"/>
-                </a:solidFill>
-                <a:latin typeface="Helvetica Neue"/>
-              </a:defRPr>
-            </a:pPr>
-            <a:r>
-              <a:t>We build software that takes repetitive work off your team’s plate — from automated web applications to AI agents with human-in-the-loop oversight wherever money, trust, or judgment is on the line.</a:t>
-            </a:r>
-          </a:p>
-        </p:txBody>
-      </p:sp>
-      <p:sp>
-        <p:nvSpPr>
-          <p:cNvPr id="13" name="Rounded Rectangle 12"/>
+              <a:t>2 NEED YOU</a:t>
+            </a:r>
+          </a:p>
+        </p:txBody>
+      </p:sp>
+      <p:sp>
+        <p:nvSpPr>
+          <p:cNvPr id="16" name="TextBox 15"/>
+          <p:cNvSpPr txBox="1"/>
+          <p:nvPr/>
+        </p:nvSpPr>
+        <p:spPr>
+          <a:xfrm>
+            <a:off x="7315200" y="2834640"/>
+            <a:ext cx="4144975" cy="548640"/>
+          </a:xfrm>
+          <a:prstGeom prst="rect">
+            <a:avLst/>
+          </a:prstGeom>
+          <a:noFill/>
+        </p:spPr>
+        <p:txBody>
+          <a:bodyPr wrap="square" lIns="0" rIns="0" tIns="0" bIns="0">
+            <a:spAutoFit/>
+          </a:bodyPr>
+          <a:lstStyle/>
+          <a:p>
+            <a:pPr>
+              <a:defRPr sz="1050">
+                <a:solidFill>
+                  <a:srgbClr val="736E62"/>
+                </a:solidFill>
+                <a:latin typeface="Helvetica Neue"/>
+              </a:defRPr>
+            </a:pPr>
+            <a:r>
+              <a:t>The agent clears the routine work. Calls and tasks that need judgment stay with a person.</a:t>
+            </a:r>
+          </a:p>
+        </p:txBody>
+      </p:sp>
+      <p:sp>
+        <p:nvSpPr>
+          <p:cNvPr id="17" name="Rounded Rectangle 16"/>
           <p:cNvSpPr/>
           <p:nvPr/>
         </p:nvSpPr>
         <p:spPr>
           <a:xfrm>
-            <a:off x="731520" y="4206240"/>
-            <a:ext cx="2560320" cy="438912"/>
+            <a:off x="7315200" y="3520440"/>
+            <a:ext cx="4144975" cy="1078992"/>
           </a:xfrm>
           <a:prstGeom prst="roundRect">
             <a:avLst/>
           </a:prstGeom>
           <a:solidFill>
-            <a:srgbClr val="16161A"/>
+            <a:srgbClr val="FFFFFF"/>
           </a:solidFill>
-          <a:ln>
-            <a:noFill/>
+          <a:ln w="12700">
+            <a:solidFill>
+              <a:srgbClr val="E2DDD0"/>
+            </a:solidFill>
           </a:ln>
         </p:spPr>
         <p:style>
@@ -3592,14 +3805,14 @@
       </p:sp>
       <p:sp>
         <p:nvSpPr>
-          <p:cNvPr id="14" name="TextBox 13"/>
+          <p:cNvPr id="18" name="TextBox 17"/>
           <p:cNvSpPr txBox="1"/>
           <p:nvPr/>
         </p:nvSpPr>
         <p:spPr>
           <a:xfrm>
-            <a:off x="731520" y="4297680"/>
-            <a:ext cx="2560320" cy="320040"/>
+            <a:off x="7543800" y="3657600"/>
+            <a:ext cx="3687775" cy="822960"/>
           </a:xfrm>
           <a:prstGeom prst="rect">
             <a:avLst/>
@@ -3607,35 +3820,109 @@
           <a:noFill/>
         </p:spPr>
         <p:txBody>
-          <a:bodyPr wrap="none">
+          <a:bodyPr wrap="square" lIns="0" rIns="0" tIns="0" bIns="0">
             <a:spAutoFit/>
           </a:bodyPr>
           <a:lstStyle/>
           <a:p>
-            <a:pPr algn="ctr">
-              <a:defRPr sz="1200" b="1">
-                <a:solidFill>
-                  <a:srgbClr val="FFFFFF"/>
-                </a:solidFill>
-                <a:latin typeface="Helvetica Neue"/>
-              </a:defRPr>
-            </a:pPr>
-            <a:r>
-              <a:t>Book a 30-min call →</a:t>
-            </a:r>
-          </a:p>
-        </p:txBody>
-      </p:sp>
-      <p:sp>
-        <p:nvSpPr>
-          <p:cNvPr id="15" name="TextBox 14"/>
+            <a:pPr>
+              <a:defRPr sz="1400" b="1">
+                <a:solidFill>
+                  <a:srgbClr val="16161A"/>
+                </a:solidFill>
+                <a:latin typeface="Helvetica Neue"/>
+              </a:defRPr>
+            </a:pPr>
+            <a:r>
+              <a:t>Roberto Guido</a:t>
+            </a:r>
+          </a:p>
+          <a:p>
+            <a:pPr>
+              <a:defRPr sz="1100">
+                <a:solidFill>
+                  <a:srgbClr val="2B59D9"/>
+                </a:solidFill>
+                <a:latin typeface="Helvetica Neue"/>
+              </a:defRPr>
+            </a:pPr>
+            <a:r>
+              <a:t>Founder &amp; Principal Engineer</a:t>
+            </a:r>
+          </a:p>
+          <a:p>
+            <a:pPr>
+              <a:spcBef>
+                <a:spcPts val="200"/>
+              </a:spcBef>
+              <a:defRPr sz="1000">
+                <a:solidFill>
+                  <a:srgbClr val="736E62"/>
+                </a:solidFill>
+                <a:latin typeface="Helvetica Neue"/>
+              </a:defRPr>
+            </a:pPr>
+            <a:r>
+              <a:t>BS Electrical Engineering (UC San Diego) · MBA (NYU Stern)</a:t>
+            </a:r>
+          </a:p>
+        </p:txBody>
+      </p:sp>
+      <p:sp>
+        <p:nvSpPr>
+          <p:cNvPr id="19" name="Rounded Rectangle 18"/>
+          <p:cNvSpPr/>
+          <p:nvPr/>
+        </p:nvSpPr>
+        <p:spPr>
+          <a:xfrm>
+            <a:off x="731520" y="4892040"/>
+            <a:ext cx="2514600" cy="1188720"/>
+          </a:xfrm>
+          <a:prstGeom prst="roundRect">
+            <a:avLst/>
+          </a:prstGeom>
+          <a:solidFill>
+            <a:srgbClr val="FFFFFF"/>
+          </a:solidFill>
+          <a:ln w="12700">
+            <a:solidFill>
+              <a:srgbClr val="E2DDD0"/>
+            </a:solidFill>
+          </a:ln>
+        </p:spPr>
+        <p:style>
+          <a:lnRef idx="1">
+            <a:schemeClr val="accent1"/>
+          </a:lnRef>
+          <a:fillRef idx="3">
+            <a:schemeClr val="accent1"/>
+          </a:fillRef>
+          <a:effectRef idx="2">
+            <a:schemeClr val="accent1"/>
+          </a:effectRef>
+          <a:fontRef idx="minor">
+            <a:schemeClr val="lt1"/>
+          </a:fontRef>
+        </p:style>
+        <p:txBody>
+          <a:bodyPr rtlCol="0" anchor="ctr"/>
+          <a:lstStyle/>
+          <a:p>
+            <a:pPr algn="ctr"/>
+          </a:p>
+        </p:txBody>
+      </p:sp>
+      <p:sp>
+        <p:nvSpPr>
+          <p:cNvPr id="20" name="TextBox 19"/>
           <p:cNvSpPr txBox="1"/>
           <p:nvPr/>
         </p:nvSpPr>
         <p:spPr>
           <a:xfrm>
-            <a:off x="3657600" y="4206240"/>
-            <a:ext cx="7772400" cy="457200"/>
+            <a:off x="914400" y="5010912"/>
+            <a:ext cx="2148840" cy="960120"/>
           </a:xfrm>
           <a:prstGeom prst="rect">
             <a:avLst/>
@@ -3643,13 +3930,16 @@
           <a:noFill/>
         </p:spPr>
         <p:txBody>
-          <a:bodyPr wrap="none">
+          <a:bodyPr wrap="square" lIns="0" rIns="0" tIns="0" bIns="0">
             <a:spAutoFit/>
           </a:bodyPr>
           <a:lstStyle/>
           <a:p>
             <a:pPr>
-              <a:defRPr sz="1200" b="1">
+              <a:spcAft>
+                <a:spcPts val="400"/>
+              </a:spcAft>
+              <a:defRPr sz="1300" b="1">
                 <a:solidFill>
                   <a:srgbClr val="16161A"/>
                 </a:solidFill>
@@ -3657,21 +3947,79 @@
               </a:defRPr>
             </a:pPr>
             <a:r>
-              <a:t>Roberto Guido  |  Founder &amp; Principal Engineer  (UC San Diego EE · NYU Stern MBA)</a:t>
-            </a:r>
-          </a:p>
-        </p:txBody>
-      </p:sp>
-      <p:sp>
-        <p:nvSpPr>
-          <p:cNvPr id="16" name="TextBox 15"/>
+              <a:t>In production.</a:t>
+            </a:r>
+          </a:p>
+          <a:p>
+            <a:pPr>
+              <a:defRPr sz="1050">
+                <a:solidFill>
+                  <a:srgbClr val="454337"/>
+                </a:solidFill>
+                <a:latin typeface="Helvetica Neue"/>
+              </a:defRPr>
+            </a:pPr>
+            <a:r>
+              <a:t>Real users today on our self-developed products.</a:t>
+            </a:r>
+          </a:p>
+        </p:txBody>
+      </p:sp>
+      <p:sp>
+        <p:nvSpPr>
+          <p:cNvPr id="21" name="Rounded Rectangle 20"/>
+          <p:cNvSpPr/>
+          <p:nvPr/>
+        </p:nvSpPr>
+        <p:spPr>
+          <a:xfrm>
+            <a:off x="3429000" y="4892040"/>
+            <a:ext cx="2514600" cy="1188720"/>
+          </a:xfrm>
+          <a:prstGeom prst="roundRect">
+            <a:avLst/>
+          </a:prstGeom>
+          <a:solidFill>
+            <a:srgbClr val="FFFFFF"/>
+          </a:solidFill>
+          <a:ln w="12700">
+            <a:solidFill>
+              <a:srgbClr val="E2DDD0"/>
+            </a:solidFill>
+          </a:ln>
+        </p:spPr>
+        <p:style>
+          <a:lnRef idx="1">
+            <a:schemeClr val="accent1"/>
+          </a:lnRef>
+          <a:fillRef idx="3">
+            <a:schemeClr val="accent1"/>
+          </a:fillRef>
+          <a:effectRef idx="2">
+            <a:schemeClr val="accent1"/>
+          </a:effectRef>
+          <a:fontRef idx="minor">
+            <a:schemeClr val="lt1"/>
+          </a:fontRef>
+        </p:style>
+        <p:txBody>
+          <a:bodyPr rtlCol="0" anchor="ctr"/>
+          <a:lstStyle/>
+          <a:p>
+            <a:pPr algn="ctr"/>
+          </a:p>
+        </p:txBody>
+      </p:sp>
+      <p:sp>
+        <p:nvSpPr>
+          <p:cNvPr id="22" name="TextBox 21"/>
           <p:cNvSpPr txBox="1"/>
           <p:nvPr/>
         </p:nvSpPr>
         <p:spPr>
           <a:xfrm>
-            <a:off x="731520" y="4892040"/>
-            <a:ext cx="2468880" cy="1097280"/>
+            <a:off x="3611880" y="5010912"/>
+            <a:ext cx="2148840" cy="960120"/>
           </a:xfrm>
           <a:prstGeom prst="rect">
             <a:avLst/>
@@ -3679,16 +4027,16 @@
           <a:noFill/>
         </p:spPr>
         <p:txBody>
-          <a:bodyPr wrap="square" lIns="0" tIns="0" rIns="0" bIns="0">
+          <a:bodyPr wrap="square" lIns="0" rIns="0" tIns="0" bIns="0">
             <a:spAutoFit/>
           </a:bodyPr>
           <a:lstStyle/>
           <a:p>
             <a:pPr>
               <a:spcAft>
-                <a:spcPts val="200"/>
+                <a:spcPts val="400"/>
               </a:spcAft>
-              <a:defRPr sz="1400" b="1">
+              <a:defRPr sz="1300" b="1">
                 <a:solidFill>
                   <a:srgbClr val="16161A"/>
                 </a:solidFill>
@@ -3696,12 +4044,12 @@
               </a:defRPr>
             </a:pPr>
             <a:r>
-              <a:t>In production.</a:t>
-            </a:r>
-          </a:p>
-          <a:p>
-            <a:pPr>
-              <a:defRPr sz="1100">
+              <a:t>Senior team.</a:t>
+            </a:r>
+          </a:p>
+          <a:p>
+            <a:pPr>
+              <a:defRPr sz="1050">
                 <a:solidFill>
                   <a:srgbClr val="454337"/>
                 </a:solidFill>
@@ -3709,21 +4057,66 @@
               </a:defRPr>
             </a:pPr>
             <a:r>
-              <a:t>Real users today on self-developed products.</a:t>
-            </a:r>
-          </a:p>
-        </p:txBody>
-      </p:sp>
-      <p:sp>
-        <p:nvSpPr>
-          <p:cNvPr id="17" name="TextBox 16"/>
+              <a:t>The people who pitch your project ship it.</a:t>
+            </a:r>
+          </a:p>
+        </p:txBody>
+      </p:sp>
+      <p:sp>
+        <p:nvSpPr>
+          <p:cNvPr id="23" name="Rounded Rectangle 22"/>
+          <p:cNvSpPr/>
+          <p:nvPr/>
+        </p:nvSpPr>
+        <p:spPr>
+          <a:xfrm>
+            <a:off x="6126480" y="4892040"/>
+            <a:ext cx="2514600" cy="1188720"/>
+          </a:xfrm>
+          <a:prstGeom prst="roundRect">
+            <a:avLst/>
+          </a:prstGeom>
+          <a:solidFill>
+            <a:srgbClr val="FFFFFF"/>
+          </a:solidFill>
+          <a:ln w="12700">
+            <a:solidFill>
+              <a:srgbClr val="E2DDD0"/>
+            </a:solidFill>
+          </a:ln>
+        </p:spPr>
+        <p:style>
+          <a:lnRef idx="1">
+            <a:schemeClr val="accent1"/>
+          </a:lnRef>
+          <a:fillRef idx="3">
+            <a:schemeClr val="accent1"/>
+          </a:fillRef>
+          <a:effectRef idx="2">
+            <a:schemeClr val="accent1"/>
+          </a:effectRef>
+          <a:fontRef idx="minor">
+            <a:schemeClr val="lt1"/>
+          </a:fontRef>
+        </p:style>
+        <p:txBody>
+          <a:bodyPr rtlCol="0" anchor="ctr"/>
+          <a:lstStyle/>
+          <a:p>
+            <a:pPr algn="ctr"/>
+          </a:p>
+        </p:txBody>
+      </p:sp>
+      <p:sp>
+        <p:nvSpPr>
+          <p:cNvPr id="24" name="TextBox 23"/>
           <p:cNvSpPr txBox="1"/>
           <p:nvPr/>
         </p:nvSpPr>
         <p:spPr>
           <a:xfrm>
-            <a:off x="3429000" y="4892040"/>
-            <a:ext cx="2468880" cy="1097280"/>
+            <a:off x="6309360" y="5010912"/>
+            <a:ext cx="2148840" cy="960120"/>
           </a:xfrm>
           <a:prstGeom prst="rect">
             <a:avLst/>
@@ -3731,16 +4124,16 @@
           <a:noFill/>
         </p:spPr>
         <p:txBody>
-          <a:bodyPr wrap="square" lIns="0" tIns="0" rIns="0" bIns="0">
+          <a:bodyPr wrap="square" lIns="0" rIns="0" tIns="0" bIns="0">
             <a:spAutoFit/>
           </a:bodyPr>
           <a:lstStyle/>
           <a:p>
             <a:pPr>
               <a:spcAft>
-                <a:spcPts val="200"/>
+                <a:spcPts val="400"/>
               </a:spcAft>
-              <a:defRPr sz="1400" b="1">
+              <a:defRPr sz="1300" b="1">
                 <a:solidFill>
                   <a:srgbClr val="16161A"/>
                 </a:solidFill>
@@ -3748,12 +4141,12 @@
               </a:defRPr>
             </a:pPr>
             <a:r>
-              <a:t>Senior team.</a:t>
-            </a:r>
-          </a:p>
-          <a:p>
-            <a:pPr>
-              <a:defRPr sz="1100">
+              <a:t>Code first.</a:t>
+            </a:r>
+          </a:p>
+          <a:p>
+            <a:pPr>
+              <a:defRPr sz="1050">
                 <a:solidFill>
                   <a:srgbClr val="454337"/>
                 </a:solidFill>
@@ -3761,21 +4154,66 @@
               </a:defRPr>
             </a:pPr>
             <a:r>
-              <a:t>The people who pitch your project ship it.</a:t>
-            </a:r>
-          </a:p>
-        </p:txBody>
-      </p:sp>
-      <p:sp>
-        <p:nvSpPr>
-          <p:cNvPr id="18" name="TextBox 17"/>
+              <a:t>No decks before working software.</a:t>
+            </a:r>
+          </a:p>
+        </p:txBody>
+      </p:sp>
+      <p:sp>
+        <p:nvSpPr>
+          <p:cNvPr id="25" name="Rounded Rectangle 24"/>
+          <p:cNvSpPr/>
+          <p:nvPr/>
+        </p:nvSpPr>
+        <p:spPr>
+          <a:xfrm>
+            <a:off x="8823960" y="4892040"/>
+            <a:ext cx="2514600" cy="1188720"/>
+          </a:xfrm>
+          <a:prstGeom prst="roundRect">
+            <a:avLst/>
+          </a:prstGeom>
+          <a:solidFill>
+            <a:srgbClr val="FFFFFF"/>
+          </a:solidFill>
+          <a:ln w="12700">
+            <a:solidFill>
+              <a:srgbClr val="E2DDD0"/>
+            </a:solidFill>
+          </a:ln>
+        </p:spPr>
+        <p:style>
+          <a:lnRef idx="1">
+            <a:schemeClr val="accent1"/>
+          </a:lnRef>
+          <a:fillRef idx="3">
+            <a:schemeClr val="accent1"/>
+          </a:fillRef>
+          <a:effectRef idx="2">
+            <a:schemeClr val="accent1"/>
+          </a:effectRef>
+          <a:fontRef idx="minor">
+            <a:schemeClr val="lt1"/>
+          </a:fontRef>
+        </p:style>
+        <p:txBody>
+          <a:bodyPr rtlCol="0" anchor="ctr"/>
+          <a:lstStyle/>
+          <a:p>
+            <a:pPr algn="ctr"/>
+          </a:p>
+        </p:txBody>
+      </p:sp>
+      <p:sp>
+        <p:nvSpPr>
+          <p:cNvPr id="26" name="TextBox 25"/>
           <p:cNvSpPr txBox="1"/>
           <p:nvPr/>
         </p:nvSpPr>
         <p:spPr>
           <a:xfrm>
-            <a:off x="6126480" y="4892040"/>
-            <a:ext cx="2468880" cy="1097280"/>
+            <a:off x="9006840" y="5010912"/>
+            <a:ext cx="2148840" cy="960120"/>
           </a:xfrm>
           <a:prstGeom prst="rect">
             <a:avLst/>
@@ -3783,16 +4221,16 @@
           <a:noFill/>
         </p:spPr>
         <p:txBody>
-          <a:bodyPr wrap="square" lIns="0" tIns="0" rIns="0" bIns="0">
+          <a:bodyPr wrap="square" lIns="0" rIns="0" tIns="0" bIns="0">
             <a:spAutoFit/>
           </a:bodyPr>
           <a:lstStyle/>
           <a:p>
             <a:pPr>
               <a:spcAft>
-                <a:spcPts val="200"/>
+                <a:spcPts val="400"/>
               </a:spcAft>
-              <a:defRPr sz="1400" b="1">
+              <a:defRPr sz="1300" b="1">
                 <a:solidFill>
                   <a:srgbClr val="16161A"/>
                 </a:solidFill>
@@ -3800,12 +4238,12 @@
               </a:defRPr>
             </a:pPr>
             <a:r>
-              <a:t>Code first.</a:t>
-            </a:r>
-          </a:p>
-          <a:p>
-            <a:pPr>
-              <a:defRPr sz="1100">
+              <a:t>One team.</a:t>
+            </a:r>
+          </a:p>
+          <a:p>
+            <a:pPr>
+              <a:defRPr sz="1050">
                 <a:solidFill>
                   <a:srgbClr val="454337"/>
                 </a:solidFill>
@@ -3813,66 +4251,14 @@
               </a:defRPr>
             </a:pPr>
             <a:r>
-              <a:t>No decks before working software.</a:t>
-            </a:r>
-          </a:p>
-        </p:txBody>
-      </p:sp>
-      <p:sp>
-        <p:nvSpPr>
-          <p:cNvPr id="19" name="TextBox 18"/>
-          <p:cNvSpPr txBox="1"/>
-          <p:nvPr/>
-        </p:nvSpPr>
-        <p:spPr>
-          <a:xfrm>
-            <a:off x="8823960" y="4892040"/>
-            <a:ext cx="2468880" cy="1097280"/>
-          </a:xfrm>
-          <a:prstGeom prst="rect">
-            <a:avLst/>
-          </a:prstGeom>
-          <a:noFill/>
-        </p:spPr>
-        <p:txBody>
-          <a:bodyPr wrap="square" lIns="0" tIns="0" rIns="0" bIns="0">
-            <a:spAutoFit/>
-          </a:bodyPr>
-          <a:lstStyle/>
-          <a:p>
-            <a:pPr>
-              <a:spcAft>
-                <a:spcPts val="200"/>
-              </a:spcAft>
-              <a:defRPr sz="1400" b="1">
-                <a:solidFill>
-                  <a:srgbClr val="16161A"/>
-                </a:solidFill>
-                <a:latin typeface="Helvetica Neue"/>
-              </a:defRPr>
-            </a:pPr>
-            <a:r>
-              <a:t>One team.</a:t>
-            </a:r>
-          </a:p>
-          <a:p>
-            <a:pPr>
-              <a:defRPr sz="1100">
-                <a:solidFill>
-                  <a:srgbClr val="454337"/>
-                </a:solidFill>
-                <a:latin typeface="Helvetica Neue"/>
-              </a:defRPr>
-            </a:pPr>
-            <a:r>
-              <a:t>Interfaces &amp; automations: same stack.</a:t>
-            </a:r>
-          </a:p>
-        </p:txBody>
-      </p:sp>
-      <p:sp>
-        <p:nvSpPr>
-          <p:cNvPr id="20" name="Rectangle 19"/>
+              <a:t>Interfaces &amp; automations: same engineers.</a:t>
+            </a:r>
+          </a:p>
+        </p:txBody>
+      </p:sp>
+      <p:sp>
+        <p:nvSpPr>
+          <p:cNvPr id="27" name="Rectangle 26"/>
           <p:cNvSpPr/>
           <p:nvPr/>
         </p:nvSpPr>
@@ -3915,7 +4301,7 @@
       </p:sp>
       <p:sp>
         <p:nvSpPr>
-          <p:cNvPr id="21" name="TextBox 20"/>
+          <p:cNvPr id="28" name="TextBox 27"/>
           <p:cNvSpPr txBox="1"/>
           <p:nvPr/>
         </p:nvSpPr>
@@ -3930,7 +4316,7 @@
           <a:noFill/>
         </p:spPr>
         <p:txBody>
-          <a:bodyPr wrap="none" lIns="0" tIns="0" rIns="0" bIns="0">
+          <a:bodyPr wrap="square" lIns="0" rIns="0" tIns="0" bIns="0">
             <a:spAutoFit/>
           </a:bodyPr>
           <a:lstStyle/>
@@ -3938,7 +4324,7 @@
             <a:pPr>
               <a:defRPr sz="1000">
                 <a:solidFill>
-                  <a:srgbClr val="5F5C52"/>
+                  <a:srgbClr val="736E62"/>
                 </a:solidFill>
                 <a:latin typeface="Helvetica Neue"/>
               </a:defRPr>
@@ -3951,7 +4337,7 @@
       </p:sp>
       <p:sp>
         <p:nvSpPr>
-          <p:cNvPr id="22" name="TextBox 21"/>
+          <p:cNvPr id="29" name="TextBox 28"/>
           <p:cNvSpPr txBox="1"/>
           <p:nvPr/>
         </p:nvSpPr>
@@ -3966,7 +4352,7 @@
           <a:noFill/>
         </p:spPr>
         <p:txBody>
-          <a:bodyPr wrap="none" lIns="0" tIns="0" rIns="0" bIns="0">
+          <a:bodyPr wrap="square" lIns="0" rIns="0" tIns="0" bIns="0">
             <a:spAutoFit/>
           </a:bodyPr>
           <a:lstStyle/>
@@ -3974,7 +4360,7 @@
             <a:pPr algn="r">
               <a:defRPr sz="1000">
                 <a:solidFill>
-                  <a:srgbClr val="5F5C52"/>
+                  <a:srgbClr val="736E62"/>
                 </a:solidFill>
                 <a:latin typeface="Helvetica Neue"/>
               </a:defRPr>
@@ -4065,7 +4451,7 @@
         <p:spPr>
           <a:xfrm>
             <a:off x="731520" y="146304"/>
-            <a:ext cx="310896" cy="310896"/>
+            <a:ext cx="301752" cy="301752"/>
           </a:xfrm>
           <a:prstGeom prst="roundRect">
             <a:avLst/>
@@ -4108,7 +4494,7 @@
         <p:spPr>
           <a:xfrm>
             <a:off x="731520" y="128016"/>
-            <a:ext cx="310896" cy="310896"/>
+            <a:ext cx="301752" cy="301752"/>
           </a:xfrm>
           <a:prstGeom prst="rect">
             <a:avLst/>
@@ -4116,7 +4502,7 @@
           <a:noFill/>
         </p:spPr>
         <p:txBody>
-          <a:bodyPr wrap="none" lIns="0" tIns="0" rIns="0" bIns="0">
+          <a:bodyPr wrap="square" lIns="0" rIns="0" tIns="0" bIns="0">
             <a:spAutoFit/>
           </a:bodyPr>
           <a:lstStyle/>
@@ -4152,7 +4538,7 @@
           <a:noFill/>
         </p:spPr>
         <p:txBody>
-          <a:bodyPr wrap="none" lIns="0" tIns="0" rIns="0" bIns="0">
+          <a:bodyPr wrap="square" lIns="0" rIns="0" tIns="0" bIns="0">
             <a:spAutoFit/>
           </a:bodyPr>
           <a:lstStyle/>
@@ -4179,8 +4565,8 @@
         </p:nvSpPr>
         <p:spPr>
           <a:xfrm>
-            <a:off x="5029200" y="182880"/>
-            <a:ext cx="4754880" cy="292608"/>
+            <a:off x="4572000" y="182880"/>
+            <a:ext cx="5212080" cy="292608"/>
           </a:xfrm>
           <a:prstGeom prst="rect">
             <a:avLst/>
@@ -4188,7 +4574,7 @@
           <a:noFill/>
         </p:spPr>
         <p:txBody>
-          <a:bodyPr wrap="none" lIns="0" tIns="0" rIns="0" bIns="0">
+          <a:bodyPr wrap="square" lIns="0" rIns="0" tIns="0" bIns="0">
             <a:spAutoFit/>
           </a:bodyPr>
           <a:lstStyle/>
@@ -4196,7 +4582,7 @@
             <a:pPr algn="r">
               <a:defRPr sz="1000">
                 <a:solidFill>
-                  <a:srgbClr val="C8CDD7"/>
+                  <a:srgbClr val="BEC3CD"/>
                 </a:solidFill>
                 <a:latin typeface="Helvetica Neue"/>
               </a:defRPr>
@@ -4215,8 +4601,8 @@
         </p:nvSpPr>
         <p:spPr>
           <a:xfrm>
-            <a:off x="10058400" y="128016"/>
-            <a:ext cx="1371600" cy="329184"/>
+            <a:off x="9966960" y="128016"/>
+            <a:ext cx="1463040" cy="329184"/>
           </a:xfrm>
           <a:prstGeom prst="roundRect">
             <a:avLst/>
@@ -4258,8 +4644,8 @@
         </p:nvSpPr>
         <p:spPr>
           <a:xfrm>
-            <a:off x="10058400" y="164592"/>
-            <a:ext cx="1371600" cy="274320"/>
+            <a:off x="9966960" y="164592"/>
+            <a:ext cx="1463040" cy="274320"/>
           </a:xfrm>
           <a:prstGeom prst="rect">
             <a:avLst/>
@@ -4267,7 +4653,7 @@
           <a:noFill/>
         </p:spPr>
         <p:txBody>
-          <a:bodyPr wrap="none" lIns="0" tIns="0" rIns="0" bIns="0">
+          <a:bodyPr wrap="square" lIns="0" rIns="0" tIns="0" bIns="0">
             <a:spAutoFit/>
           </a:bodyPr>
           <a:lstStyle/>
@@ -4295,7 +4681,7 @@
         <p:spPr>
           <a:xfrm>
             <a:off x="731520" y="777240"/>
-            <a:ext cx="10728655" cy="274320"/>
+            <a:ext cx="10728655" cy="228600"/>
           </a:xfrm>
           <a:prstGeom prst="rect">
             <a:avLst/>
@@ -4303,13 +4689,13 @@
           <a:noFill/>
         </p:spPr>
         <p:txBody>
-          <a:bodyPr wrap="none" lIns="0" tIns="0" rIns="0" bIns="0">
+          <a:bodyPr wrap="square" lIns="0" rIns="0" tIns="0" bIns="0">
             <a:spAutoFit/>
           </a:bodyPr>
           <a:lstStyle/>
           <a:p>
             <a:pPr>
-              <a:defRPr sz="1100" b="1">
+              <a:defRPr sz="1000" b="1">
                 <a:solidFill>
                   <a:srgbClr val="2B59D9"/>
                 </a:solidFill>
@@ -4330,7 +4716,7 @@
         </p:nvSpPr>
         <p:spPr>
           <a:xfrm>
-            <a:off x="731520" y="1051560"/>
+            <a:off x="731520" y="1024128"/>
             <a:ext cx="10728655" cy="640080"/>
           </a:xfrm>
           <a:prstGeom prst="rect">
@@ -4339,7 +4725,7 @@
           <a:noFill/>
         </p:spPr>
         <p:txBody>
-          <a:bodyPr wrap="square" lIns="0" tIns="0" rIns="0" bIns="0">
+          <a:bodyPr wrap="square" lIns="0" rIns="0" tIns="0" bIns="0">
             <a:spAutoFit/>
           </a:bodyPr>
           <a:lstStyle/>
@@ -4411,7 +4797,7 @@
         </p:nvSpPr>
         <p:spPr>
           <a:xfrm>
-            <a:off x="1051560" y="2240279"/>
+            <a:off x="1051560" y="2194559"/>
             <a:ext cx="2688336" cy="3566160"/>
           </a:xfrm>
           <a:prstGeom prst="rect">
@@ -4420,14 +4806,14 @@
           <a:noFill/>
         </p:spPr>
         <p:txBody>
-          <a:bodyPr wrap="square">
+          <a:bodyPr wrap="square" lIns="0" rIns="0" tIns="0" bIns="0">
             <a:spAutoFit/>
           </a:bodyPr>
           <a:lstStyle/>
           <a:p>
             <a:pPr>
               <a:spcAft>
-                <a:spcPts val="1200"/>
+                <a:spcPts val="1000"/>
               </a:spcAft>
               <a:defRPr sz="2200" b="1">
                 <a:solidFill>
@@ -4438,6 +4824,22 @@
             </a:pPr>
             <a:r>
               <a:t>01</a:t>
+            </a:r>
+          </a:p>
+          <a:p>
+            <a:pPr>
+              <a:spcAft>
+                <a:spcPts val="1000"/>
+              </a:spcAft>
+              <a:defRPr sz="1800" b="1">
+                <a:solidFill>
+                  <a:srgbClr val="16161A"/>
+                </a:solidFill>
+                <a:latin typeface="Helvetica Neue"/>
+              </a:defRPr>
+            </a:pPr>
+            <a:r>
+              <a:t>Custom Interfaces</a:t>
             </a:r>
           </a:p>
           <a:p>
@@ -4445,7 +4847,23 @@
               <a:spcAft>
                 <a:spcPts val="1400"/>
               </a:spcAft>
-              <a:defRPr sz="1900" b="1">
+              <a:defRPr sz="1200">
+                <a:solidFill>
+                  <a:srgbClr val="454337"/>
+                </a:solidFill>
+                <a:latin typeface="Helvetica Neue"/>
+              </a:defRPr>
+            </a:pPr>
+            <a:r>
+              <a:t>High-performance React web applications built for human speed and intuitive execution.</a:t>
+            </a:r>
+          </a:p>
+          <a:p>
+            <a:pPr>
+              <a:spcAft>
+                <a:spcPts val="600"/>
+              </a:spcAft>
+              <a:defRPr sz="1100">
                 <a:solidFill>
                   <a:srgbClr val="16161A"/>
                 </a:solidFill>
@@ -4453,20 +4871,39 @@
               </a:defRPr>
             </a:pPr>
             <a:r>
-              <a:t>Custom Interfaces</a:t>
-            </a:r>
-          </a:p>
-          <a:p>
-            <a:pPr>
-              <a:defRPr sz="1300">
-                <a:solidFill>
-                  <a:srgbClr val="454337"/>
-                </a:solidFill>
-                <a:latin typeface="Helvetica Neue"/>
-              </a:defRPr>
-            </a:pPr>
-            <a:r>
-              <a:t>Custom web interfaces built for human speed and intuitive execution. High-performance React applications tailored to daily workflow needs.</a:t>
+              <a:t>•  Custom React &amp; TypeScript web apps</a:t>
+            </a:r>
+          </a:p>
+          <a:p>
+            <a:pPr>
+              <a:spcAft>
+                <a:spcPts val="600"/>
+              </a:spcAft>
+              <a:defRPr sz="1100">
+                <a:solidFill>
+                  <a:srgbClr val="16161A"/>
+                </a:solidFill>
+                <a:latin typeface="Helvetica Neue"/>
+              </a:defRPr>
+            </a:pPr>
+            <a:r>
+              <a:t>•  Responsive, accessible UX design</a:t>
+            </a:r>
+          </a:p>
+          <a:p>
+            <a:pPr>
+              <a:spcAft>
+                <a:spcPts val="600"/>
+              </a:spcAft>
+              <a:defRPr sz="1100">
+                <a:solidFill>
+                  <a:srgbClr val="16161A"/>
+                </a:solidFill>
+                <a:latin typeface="Helvetica Neue"/>
+              </a:defRPr>
+            </a:pPr>
+            <a:r>
+              <a:t>•  Direct payment &amp; order workflows</a:t>
             </a:r>
           </a:p>
         </p:txBody>
@@ -4524,7 +4961,7 @@
         </p:nvSpPr>
         <p:spPr>
           <a:xfrm>
-            <a:off x="4654296" y="2240279"/>
+            <a:off x="4654296" y="2194559"/>
             <a:ext cx="2688336" cy="3566160"/>
           </a:xfrm>
           <a:prstGeom prst="rect">
@@ -4533,14 +4970,14 @@
           <a:noFill/>
         </p:spPr>
         <p:txBody>
-          <a:bodyPr wrap="square">
+          <a:bodyPr wrap="square" lIns="0" rIns="0" tIns="0" bIns="0">
             <a:spAutoFit/>
           </a:bodyPr>
           <a:lstStyle/>
           <a:p>
             <a:pPr>
               <a:spcAft>
-                <a:spcPts val="1200"/>
+                <a:spcPts val="1000"/>
               </a:spcAft>
               <a:defRPr sz="2200" b="1">
                 <a:solidFill>
@@ -4551,6 +4988,22 @@
             </a:pPr>
             <a:r>
               <a:t>02</a:t>
+            </a:r>
+          </a:p>
+          <a:p>
+            <a:pPr>
+              <a:spcAft>
+                <a:spcPts val="1000"/>
+              </a:spcAft>
+              <a:defRPr sz="1800" b="1">
+                <a:solidFill>
+                  <a:srgbClr val="16161A"/>
+                </a:solidFill>
+                <a:latin typeface="Helvetica Neue"/>
+              </a:defRPr>
+            </a:pPr>
+            <a:r>
+              <a:t>Systems Integration</a:t>
             </a:r>
           </a:p>
           <a:p>
@@ -4558,7 +5011,23 @@
               <a:spcAft>
                 <a:spcPts val="1400"/>
               </a:spcAft>
-              <a:defRPr sz="1900" b="1">
+              <a:defRPr sz="1200">
+                <a:solidFill>
+                  <a:srgbClr val="454337"/>
+                </a:solidFill>
+                <a:latin typeface="Helvetica Neue"/>
+              </a:defRPr>
+            </a:pPr>
+            <a:r>
+              <a:t>Deep financial backend integrations, database architecture, and enterprise APIs.</a:t>
+            </a:r>
+          </a:p>
+          <a:p>
+            <a:pPr>
+              <a:spcAft>
+                <a:spcPts val="600"/>
+              </a:spcAft>
+              <a:defRPr sz="1100">
                 <a:solidFill>
                   <a:srgbClr val="16161A"/>
                 </a:solidFill>
@@ -4566,20 +5035,39 @@
               </a:defRPr>
             </a:pPr>
             <a:r>
-              <a:t>Systems Integration</a:t>
-            </a:r>
-          </a:p>
-          <a:p>
-            <a:pPr>
-              <a:defRPr sz="1300">
-                <a:solidFill>
-                  <a:srgbClr val="454337"/>
-                </a:solidFill>
-                <a:latin typeface="Helvetica Neue"/>
-              </a:defRPr>
-            </a:pPr>
-            <a:r>
-              <a:t>Deep financial backend integrations (Workday Finance &amp; Adaptive Planning), PostgreSQL databases, and enterprise REST APIs.</a:t>
+              <a:t>•  Workday Finance &amp; Adaptive Planning</a:t>
+            </a:r>
+          </a:p>
+          <a:p>
+            <a:pPr>
+              <a:spcAft>
+                <a:spcPts val="600"/>
+              </a:spcAft>
+              <a:defRPr sz="1100">
+                <a:solidFill>
+                  <a:srgbClr val="16161A"/>
+                </a:solidFill>
+                <a:latin typeface="Helvetica Neue"/>
+              </a:defRPr>
+            </a:pPr>
+            <a:r>
+              <a:t>•  PostgreSQL database architecture</a:t>
+            </a:r>
+          </a:p>
+          <a:p>
+            <a:pPr>
+              <a:spcAft>
+                <a:spcPts val="600"/>
+              </a:spcAft>
+              <a:defRPr sz="1100">
+                <a:solidFill>
+                  <a:srgbClr val="16161A"/>
+                </a:solidFill>
+                <a:latin typeface="Helvetica Neue"/>
+              </a:defRPr>
+            </a:pPr>
+            <a:r>
+              <a:t>•  REST &amp; GraphQL API pipelines</a:t>
             </a:r>
           </a:p>
         </p:txBody>
@@ -4637,7 +5125,7 @@
         </p:nvSpPr>
         <p:spPr>
           <a:xfrm>
-            <a:off x="8257032" y="2240279"/>
+            <a:off x="8257032" y="2194559"/>
             <a:ext cx="2688336" cy="3566160"/>
           </a:xfrm>
           <a:prstGeom prst="rect">
@@ -4646,14 +5134,14 @@
           <a:noFill/>
         </p:spPr>
         <p:txBody>
-          <a:bodyPr wrap="square">
+          <a:bodyPr wrap="square" lIns="0" rIns="0" tIns="0" bIns="0">
             <a:spAutoFit/>
           </a:bodyPr>
           <a:lstStyle/>
           <a:p>
             <a:pPr>
               <a:spcAft>
-                <a:spcPts val="1200"/>
+                <a:spcPts val="1000"/>
               </a:spcAft>
               <a:defRPr sz="2200" b="1">
                 <a:solidFill>
@@ -4664,6 +5152,22 @@
             </a:pPr>
             <a:r>
               <a:t>03</a:t>
+            </a:r>
+          </a:p>
+          <a:p>
+            <a:pPr>
+              <a:spcAft>
+                <a:spcPts val="1000"/>
+              </a:spcAft>
+              <a:defRPr sz="1800" b="1">
+                <a:solidFill>
+                  <a:srgbClr val="16161A"/>
+                </a:solidFill>
+                <a:latin typeface="Helvetica Neue"/>
+              </a:defRPr>
+            </a:pPr>
+            <a:r>
+              <a:t>Applied AI &amp; Automation</a:t>
             </a:r>
           </a:p>
           <a:p>
@@ -4671,7 +5175,23 @@
               <a:spcAft>
                 <a:spcPts val="1400"/>
               </a:spcAft>
-              <a:defRPr sz="1900" b="1">
+              <a:defRPr sz="1200">
+                <a:solidFill>
+                  <a:srgbClr val="454337"/>
+                </a:solidFill>
+                <a:latin typeface="Helvetica Neue"/>
+              </a:defRPr>
+            </a:pPr>
+            <a:r>
+              <a:t>Custom Model Context Protocol (MCP) servers and human-in-the-loop AI agents.</a:t>
+            </a:r>
+          </a:p>
+          <a:p>
+            <a:pPr>
+              <a:spcAft>
+                <a:spcPts val="600"/>
+              </a:spcAft>
+              <a:defRPr sz="1100">
                 <a:solidFill>
                   <a:srgbClr val="16161A"/>
                 </a:solidFill>
@@ -4679,20 +5199,39 @@
               </a:defRPr>
             </a:pPr>
             <a:r>
-              <a:t>Applied AI &amp; Automation</a:t>
-            </a:r>
-          </a:p>
-          <a:p>
-            <a:pPr>
-              <a:defRPr sz="1300">
-                <a:solidFill>
-                  <a:srgbClr val="454337"/>
-                </a:solidFill>
-                <a:latin typeface="Helvetica Neue"/>
-              </a:defRPr>
-            </a:pPr>
-            <a:r>
-              <a:t>Custom Model Context Protocol (MCP) servers, LLM orchestration, and human-in-the-loop (HITL) AI agents for operational trust.</a:t>
+              <a:t>•  Custom MCP server deployment</a:t>
+            </a:r>
+          </a:p>
+          <a:p>
+            <a:pPr>
+              <a:spcAft>
+                <a:spcPts val="600"/>
+              </a:spcAft>
+              <a:defRPr sz="1100">
+                <a:solidFill>
+                  <a:srgbClr val="16161A"/>
+                </a:solidFill>
+                <a:latin typeface="Helvetica Neue"/>
+              </a:defRPr>
+            </a:pPr>
+            <a:r>
+              <a:t>•  LLM orchestration &amp; document extraction</a:t>
+            </a:r>
+          </a:p>
+          <a:p>
+            <a:pPr>
+              <a:spcAft>
+                <a:spcPts val="600"/>
+              </a:spcAft>
+              <a:defRPr sz="1100">
+                <a:solidFill>
+                  <a:srgbClr val="16161A"/>
+                </a:solidFill>
+                <a:latin typeface="Helvetica Neue"/>
+              </a:defRPr>
+            </a:pPr>
+            <a:r>
+              <a:t>•  Human-in-the-loop (HITL) safety gates</a:t>
             </a:r>
           </a:p>
         </p:txBody>
@@ -4757,7 +5296,7 @@
           <a:noFill/>
         </p:spPr>
         <p:txBody>
-          <a:bodyPr wrap="none" lIns="0" tIns="0" rIns="0" bIns="0">
+          <a:bodyPr wrap="square" lIns="0" rIns="0" tIns="0" bIns="0">
             <a:spAutoFit/>
           </a:bodyPr>
           <a:lstStyle/>
@@ -4765,7 +5304,7 @@
             <a:pPr>
               <a:defRPr sz="1000">
                 <a:solidFill>
-                  <a:srgbClr val="5F5C52"/>
+                  <a:srgbClr val="736E62"/>
                 </a:solidFill>
                 <a:latin typeface="Helvetica Neue"/>
               </a:defRPr>
@@ -4793,7 +5332,7 @@
           <a:noFill/>
         </p:spPr>
         <p:txBody>
-          <a:bodyPr wrap="none" lIns="0" tIns="0" rIns="0" bIns="0">
+          <a:bodyPr wrap="square" lIns="0" rIns="0" tIns="0" bIns="0">
             <a:spAutoFit/>
           </a:bodyPr>
           <a:lstStyle/>
@@ -4801,7 +5340,7 @@
             <a:pPr algn="r">
               <a:defRPr sz="1000">
                 <a:solidFill>
-                  <a:srgbClr val="5F5C52"/>
+                  <a:srgbClr val="736E62"/>
                 </a:solidFill>
                 <a:latin typeface="Helvetica Neue"/>
               </a:defRPr>
@@ -4892,7 +5431,7 @@
         <p:spPr>
           <a:xfrm>
             <a:off x="731520" y="146304"/>
-            <a:ext cx="310896" cy="310896"/>
+            <a:ext cx="301752" cy="301752"/>
           </a:xfrm>
           <a:prstGeom prst="roundRect">
             <a:avLst/>
@@ -4935,7 +5474,7 @@
         <p:spPr>
           <a:xfrm>
             <a:off x="731520" y="128016"/>
-            <a:ext cx="310896" cy="310896"/>
+            <a:ext cx="301752" cy="301752"/>
           </a:xfrm>
           <a:prstGeom prst="rect">
             <a:avLst/>
@@ -4943,7 +5482,7 @@
           <a:noFill/>
         </p:spPr>
         <p:txBody>
-          <a:bodyPr wrap="none" lIns="0" tIns="0" rIns="0" bIns="0">
+          <a:bodyPr wrap="square" lIns="0" rIns="0" tIns="0" bIns="0">
             <a:spAutoFit/>
           </a:bodyPr>
           <a:lstStyle/>
@@ -4979,7 +5518,7 @@
           <a:noFill/>
         </p:spPr>
         <p:txBody>
-          <a:bodyPr wrap="none" lIns="0" tIns="0" rIns="0" bIns="0">
+          <a:bodyPr wrap="square" lIns="0" rIns="0" tIns="0" bIns="0">
             <a:spAutoFit/>
           </a:bodyPr>
           <a:lstStyle/>
@@ -5006,8 +5545,8 @@
         </p:nvSpPr>
         <p:spPr>
           <a:xfrm>
-            <a:off x="5029200" y="182880"/>
-            <a:ext cx="4754880" cy="292608"/>
+            <a:off x="4572000" y="182880"/>
+            <a:ext cx="5212080" cy="292608"/>
           </a:xfrm>
           <a:prstGeom prst="rect">
             <a:avLst/>
@@ -5015,7 +5554,7 @@
           <a:noFill/>
         </p:spPr>
         <p:txBody>
-          <a:bodyPr wrap="none" lIns="0" tIns="0" rIns="0" bIns="0">
+          <a:bodyPr wrap="square" lIns="0" rIns="0" tIns="0" bIns="0">
             <a:spAutoFit/>
           </a:bodyPr>
           <a:lstStyle/>
@@ -5023,7 +5562,7 @@
             <a:pPr algn="r">
               <a:defRPr sz="1000">
                 <a:solidFill>
-                  <a:srgbClr val="C8CDD7"/>
+                  <a:srgbClr val="BEC3CD"/>
                 </a:solidFill>
                 <a:latin typeface="Helvetica Neue"/>
               </a:defRPr>
@@ -5042,8 +5581,8 @@
         </p:nvSpPr>
         <p:spPr>
           <a:xfrm>
-            <a:off x="10058400" y="128016"/>
-            <a:ext cx="1371600" cy="329184"/>
+            <a:off x="9966960" y="128016"/>
+            <a:ext cx="1463040" cy="329184"/>
           </a:xfrm>
           <a:prstGeom prst="roundRect">
             <a:avLst/>
@@ -5085,8 +5624,8 @@
         </p:nvSpPr>
         <p:spPr>
           <a:xfrm>
-            <a:off x="10058400" y="164592"/>
-            <a:ext cx="1371600" cy="274320"/>
+            <a:off x="9966960" y="164592"/>
+            <a:ext cx="1463040" cy="274320"/>
           </a:xfrm>
           <a:prstGeom prst="rect">
             <a:avLst/>
@@ -5094,7 +5633,7 @@
           <a:noFill/>
         </p:spPr>
         <p:txBody>
-          <a:bodyPr wrap="none" lIns="0" tIns="0" rIns="0" bIns="0">
+          <a:bodyPr wrap="square" lIns="0" rIns="0" tIns="0" bIns="0">
             <a:spAutoFit/>
           </a:bodyPr>
           <a:lstStyle/>
@@ -5122,7 +5661,7 @@
         <p:spPr>
           <a:xfrm>
             <a:off x="731520" y="777240"/>
-            <a:ext cx="10728655" cy="274320"/>
+            <a:ext cx="10728655" cy="228600"/>
           </a:xfrm>
           <a:prstGeom prst="rect">
             <a:avLst/>
@@ -5130,13 +5669,13 @@
           <a:noFill/>
         </p:spPr>
         <p:txBody>
-          <a:bodyPr wrap="none" lIns="0" tIns="0" rIns="0" bIns="0">
+          <a:bodyPr wrap="square" lIns="0" rIns="0" tIns="0" bIns="0">
             <a:spAutoFit/>
           </a:bodyPr>
           <a:lstStyle/>
           <a:p>
             <a:pPr>
-              <a:defRPr sz="1100" b="1">
+              <a:defRPr sz="1000" b="1">
                 <a:solidFill>
                   <a:srgbClr val="2B59D9"/>
                 </a:solidFill>
@@ -5157,7 +5696,7 @@
         </p:nvSpPr>
         <p:spPr>
           <a:xfrm>
-            <a:off x="731520" y="1051560"/>
+            <a:off x="731520" y="1024128"/>
             <a:ext cx="10728655" cy="640080"/>
           </a:xfrm>
           <a:prstGeom prst="rect">
@@ -5166,7 +5705,7 @@
           <a:noFill/>
         </p:spPr>
         <p:txBody>
-          <a:bodyPr wrap="square" lIns="0" tIns="0" rIns="0" bIns="0">
+          <a:bodyPr wrap="square" lIns="0" rIns="0" tIns="0" bIns="0">
             <a:spAutoFit/>
           </a:bodyPr>
           <a:lstStyle/>
@@ -5238,8 +5777,8 @@
         </p:nvSpPr>
         <p:spPr>
           <a:xfrm>
-            <a:off x="1005840" y="2194559"/>
-            <a:ext cx="4608576" cy="3566160"/>
+            <a:off x="1051560" y="2194559"/>
+            <a:ext cx="4517136" cy="3566160"/>
           </a:xfrm>
           <a:prstGeom prst="rect">
             <a:avLst/>
@@ -5247,7 +5786,7 @@
           <a:noFill/>
         </p:spPr>
         <p:txBody>
-          <a:bodyPr wrap="square">
+          <a:bodyPr wrap="square" lIns="0" rIns="0" tIns="0" bIns="0">
             <a:spAutoFit/>
           </a:bodyPr>
           <a:lstStyle/>
@@ -5272,7 +5811,7 @@
               <a:spcAft>
                 <a:spcPts val="1000"/>
               </a:spcAft>
-              <a:defRPr b="1" sz="1300">
+              <a:defRPr b="1" sz="1250">
                 <a:solidFill>
                   <a:srgbClr val="16161A"/>
                 </a:solidFill>
@@ -5280,7 +5819,7 @@
               </a:defRPr>
             </a:pPr>
             <a:r>
-              <a:t>• Mid-Market Enterprises: </a:t>
+              <a:t>•  Mid-Market Enterprises: </a:t>
             </a:r>
             <a:r>
               <a:rPr b="0">
@@ -5296,7 +5835,7 @@
               <a:spcAft>
                 <a:spcPts val="1000"/>
               </a:spcAft>
-              <a:defRPr b="1" sz="1300">
+              <a:defRPr b="1" sz="1250">
                 <a:solidFill>
                   <a:srgbClr val="16161A"/>
                 </a:solidFill>
@@ -5304,7 +5843,7 @@
               </a:defRPr>
             </a:pPr>
             <a:r>
-              <a:t>• Fast-Growing SMBs: </a:t>
+              <a:t>•  Fast-Growing SMBs: </a:t>
             </a:r>
             <a:r>
               <a:rPr b="0">
@@ -5320,7 +5859,7 @@
               <a:spcAft>
                 <a:spcPts val="1000"/>
               </a:spcAft>
-              <a:defRPr b="1" sz="1300">
+              <a:defRPr b="1" sz="1250">
                 <a:solidFill>
                   <a:srgbClr val="16161A"/>
                 </a:solidFill>
@@ -5328,7 +5867,7 @@
               </a:defRPr>
             </a:pPr>
             <a:r>
-              <a:t>• Venture-Backed Startups: </a:t>
+              <a:t>•  Venture-Backed Startups: </a:t>
             </a:r>
             <a:r>
               <a:rPr b="0">
@@ -5344,7 +5883,7 @@
               <a:spcAft>
                 <a:spcPts val="1000"/>
               </a:spcAft>
-              <a:defRPr b="1" sz="1300">
+              <a:defRPr b="1" sz="1250">
                 <a:solidFill>
                   <a:srgbClr val="16161A"/>
                 </a:solidFill>
@@ -5352,7 +5891,7 @@
               </a:defRPr>
             </a:pPr>
             <a:r>
-              <a:t>• PE / VC Portcos: </a:t>
+              <a:t>•  PE / VC Portcos: </a:t>
             </a:r>
             <a:r>
               <a:rPr b="0">
@@ -5418,8 +5957,8 @@
         </p:nvSpPr>
         <p:spPr>
           <a:xfrm>
-            <a:off x="6574536" y="2194559"/>
-            <a:ext cx="4608576" cy="3566160"/>
+            <a:off x="6620256" y="2194559"/>
+            <a:ext cx="4517136" cy="3566160"/>
           </a:xfrm>
           <a:prstGeom prst="rect">
             <a:avLst/>
@@ -5427,7 +5966,7 @@
           <a:noFill/>
         </p:spPr>
         <p:txBody>
-          <a:bodyPr wrap="square">
+          <a:bodyPr wrap="square" lIns="0" rIns="0" tIns="0" bIns="0">
             <a:spAutoFit/>
           </a:bodyPr>
           <a:lstStyle/>
@@ -5452,7 +5991,7 @@
               <a:spcAft>
                 <a:spcPts val="1000"/>
               </a:spcAft>
-              <a:defRPr b="1" sz="1300">
+              <a:defRPr b="1" sz="1250">
                 <a:solidFill>
                   <a:srgbClr val="16161A"/>
                 </a:solidFill>
@@ -5460,7 +5999,7 @@
               </a:defRPr>
             </a:pPr>
             <a:r>
-              <a:t>• CTOs &amp; VPs of Engineering: </a:t>
+              <a:t>•  CTOs &amp; VPs of Engineering: </a:t>
             </a:r>
             <a:r>
               <a:rPr b="0">
@@ -5476,7 +6015,7 @@
               <a:spcAft>
                 <a:spcPts val="1000"/>
               </a:spcAft>
-              <a:defRPr b="1" sz="1300">
+              <a:defRPr b="1" sz="1250">
                 <a:solidFill>
                   <a:srgbClr val="16161A"/>
                 </a:solidFill>
@@ -5484,7 +6023,7 @@
               </a:defRPr>
             </a:pPr>
             <a:r>
-              <a:t>• CFOs &amp; Finance Directors: </a:t>
+              <a:t>•  CFOs &amp; Finance Directors: </a:t>
             </a:r>
             <a:r>
               <a:rPr b="0">
@@ -5500,7 +6039,7 @@
               <a:spcAft>
                 <a:spcPts val="1000"/>
               </a:spcAft>
-              <a:defRPr b="1" sz="1300">
+              <a:defRPr b="1" sz="1250">
                 <a:solidFill>
                   <a:srgbClr val="16161A"/>
                 </a:solidFill>
@@ -5508,7 +6047,7 @@
               </a:defRPr>
             </a:pPr>
             <a:r>
-              <a:t>• VPs of Operations: </a:t>
+              <a:t>•  VPs of Operations: </a:t>
             </a:r>
             <a:r>
               <a:rPr b="0">
@@ -5524,7 +6063,7 @@
               <a:spcAft>
                 <a:spcPts val="1000"/>
               </a:spcAft>
-              <a:defRPr b="1" sz="1300">
+              <a:defRPr b="1" sz="1250">
                 <a:solidFill>
                   <a:srgbClr val="16161A"/>
                 </a:solidFill>
@@ -5532,7 +6071,7 @@
               </a:defRPr>
             </a:pPr>
             <a:r>
-              <a:t>• Founders &amp; Product Leaders: </a:t>
+              <a:t>•  Founders &amp; Product Leaders: </a:t>
             </a:r>
             <a:r>
               <a:rPr b="0">
@@ -5605,7 +6144,7 @@
           <a:noFill/>
         </p:spPr>
         <p:txBody>
-          <a:bodyPr wrap="none" lIns="0" tIns="0" rIns="0" bIns="0">
+          <a:bodyPr wrap="square" lIns="0" rIns="0" tIns="0" bIns="0">
             <a:spAutoFit/>
           </a:bodyPr>
           <a:lstStyle/>
@@ -5613,7 +6152,7 @@
             <a:pPr>
               <a:defRPr sz="1000">
                 <a:solidFill>
-                  <a:srgbClr val="5F5C52"/>
+                  <a:srgbClr val="736E62"/>
                 </a:solidFill>
                 <a:latin typeface="Helvetica Neue"/>
               </a:defRPr>
@@ -5641,7 +6180,7 @@
           <a:noFill/>
         </p:spPr>
         <p:txBody>
-          <a:bodyPr wrap="none" lIns="0" tIns="0" rIns="0" bIns="0">
+          <a:bodyPr wrap="square" lIns="0" rIns="0" tIns="0" bIns="0">
             <a:spAutoFit/>
           </a:bodyPr>
           <a:lstStyle/>
@@ -5649,7 +6188,7 @@
             <a:pPr algn="r">
               <a:defRPr sz="1000">
                 <a:solidFill>
-                  <a:srgbClr val="5F5C52"/>
+                  <a:srgbClr val="736E62"/>
                 </a:solidFill>
                 <a:latin typeface="Helvetica Neue"/>
               </a:defRPr>
@@ -5740,7 +6279,7 @@
         <p:spPr>
           <a:xfrm>
             <a:off x="731520" y="146304"/>
-            <a:ext cx="310896" cy="310896"/>
+            <a:ext cx="301752" cy="301752"/>
           </a:xfrm>
           <a:prstGeom prst="roundRect">
             <a:avLst/>
@@ -5783,7 +6322,7 @@
         <p:spPr>
           <a:xfrm>
             <a:off x="731520" y="128016"/>
-            <a:ext cx="310896" cy="310896"/>
+            <a:ext cx="301752" cy="301752"/>
           </a:xfrm>
           <a:prstGeom prst="rect">
             <a:avLst/>
@@ -5791,7 +6330,7 @@
           <a:noFill/>
         </p:spPr>
         <p:txBody>
-          <a:bodyPr wrap="none" lIns="0" tIns="0" rIns="0" bIns="0">
+          <a:bodyPr wrap="square" lIns="0" rIns="0" tIns="0" bIns="0">
             <a:spAutoFit/>
           </a:bodyPr>
           <a:lstStyle/>
@@ -5827,7 +6366,7 @@
           <a:noFill/>
         </p:spPr>
         <p:txBody>
-          <a:bodyPr wrap="none" lIns="0" tIns="0" rIns="0" bIns="0">
+          <a:bodyPr wrap="square" lIns="0" rIns="0" tIns="0" bIns="0">
             <a:spAutoFit/>
           </a:bodyPr>
           <a:lstStyle/>
@@ -5854,8 +6393,8 @@
         </p:nvSpPr>
         <p:spPr>
           <a:xfrm>
-            <a:off x="5029200" y="182880"/>
-            <a:ext cx="4754880" cy="292608"/>
+            <a:off x="4572000" y="182880"/>
+            <a:ext cx="5212080" cy="292608"/>
           </a:xfrm>
           <a:prstGeom prst="rect">
             <a:avLst/>
@@ -5863,7 +6402,7 @@
           <a:noFill/>
         </p:spPr>
         <p:txBody>
-          <a:bodyPr wrap="none" lIns="0" tIns="0" rIns="0" bIns="0">
+          <a:bodyPr wrap="square" lIns="0" rIns="0" tIns="0" bIns="0">
             <a:spAutoFit/>
           </a:bodyPr>
           <a:lstStyle/>
@@ -5871,7 +6410,7 @@
             <a:pPr algn="r">
               <a:defRPr sz="1000">
                 <a:solidFill>
-                  <a:srgbClr val="C8CDD7"/>
+                  <a:srgbClr val="BEC3CD"/>
                 </a:solidFill>
                 <a:latin typeface="Helvetica Neue"/>
               </a:defRPr>
@@ -5890,8 +6429,8 @@
         </p:nvSpPr>
         <p:spPr>
           <a:xfrm>
-            <a:off x="10058400" y="128016"/>
-            <a:ext cx="1371600" cy="329184"/>
+            <a:off x="9966960" y="128016"/>
+            <a:ext cx="1463040" cy="329184"/>
           </a:xfrm>
           <a:prstGeom prst="roundRect">
             <a:avLst/>
@@ -5933,8 +6472,8 @@
         </p:nvSpPr>
         <p:spPr>
           <a:xfrm>
-            <a:off x="10058400" y="164592"/>
-            <a:ext cx="1371600" cy="274320"/>
+            <a:off x="9966960" y="164592"/>
+            <a:ext cx="1463040" cy="274320"/>
           </a:xfrm>
           <a:prstGeom prst="rect">
             <a:avLst/>
@@ -5942,7 +6481,7 @@
           <a:noFill/>
         </p:spPr>
         <p:txBody>
-          <a:bodyPr wrap="none" lIns="0" tIns="0" rIns="0" bIns="0">
+          <a:bodyPr wrap="square" lIns="0" rIns="0" tIns="0" bIns="0">
             <a:spAutoFit/>
           </a:bodyPr>
           <a:lstStyle/>
@@ -5970,7 +6509,7 @@
         <p:spPr>
           <a:xfrm>
             <a:off x="731520" y="777240"/>
-            <a:ext cx="10728655" cy="274320"/>
+            <a:ext cx="10728655" cy="228600"/>
           </a:xfrm>
           <a:prstGeom prst="rect">
             <a:avLst/>
@@ -5978,13 +6517,13 @@
           <a:noFill/>
         </p:spPr>
         <p:txBody>
-          <a:bodyPr wrap="none" lIns="0" tIns="0" rIns="0" bIns="0">
+          <a:bodyPr wrap="square" lIns="0" rIns="0" tIns="0" bIns="0">
             <a:spAutoFit/>
           </a:bodyPr>
           <a:lstStyle/>
           <a:p>
             <a:pPr>
-              <a:defRPr sz="1100" b="1">
+              <a:defRPr sz="1000" b="1">
                 <a:solidFill>
                   <a:srgbClr val="2B59D9"/>
                 </a:solidFill>
@@ -6005,7 +6544,7 @@
         </p:nvSpPr>
         <p:spPr>
           <a:xfrm>
-            <a:off x="731520" y="1051560"/>
+            <a:off x="731520" y="1024128"/>
             <a:ext cx="10728655" cy="640080"/>
           </a:xfrm>
           <a:prstGeom prst="rect">
@@ -6014,7 +6553,7 @@
           <a:noFill/>
         </p:spPr>
         <p:txBody>
-          <a:bodyPr wrap="square" lIns="0" tIns="0" rIns="0" bIns="0">
+          <a:bodyPr wrap="square" lIns="0" rIns="0" tIns="0" bIns="0">
             <a:spAutoFit/>
           </a:bodyPr>
           <a:lstStyle/>
@@ -6086,8 +6625,8 @@
         </p:nvSpPr>
         <p:spPr>
           <a:xfrm>
-            <a:off x="1005840" y="2011679"/>
-            <a:ext cx="10180015" cy="1005840"/>
+            <a:off x="1051560" y="2039111"/>
+            <a:ext cx="10058400" cy="914400"/>
           </a:xfrm>
           <a:prstGeom prst="rect">
             <a:avLst/>
@@ -6095,7 +6634,7 @@
           <a:noFill/>
         </p:spPr>
         <p:txBody>
-          <a:bodyPr wrap="square">
+          <a:bodyPr wrap="square" lIns="0" rIns="0" tIns="0" bIns="0">
             <a:spAutoFit/>
           </a:bodyPr>
           <a:lstStyle/>
@@ -6117,7 +6656,7 @@
           </a:p>
           <a:p>
             <a:pPr>
-              <a:defRPr sz="1400">
+              <a:defRPr sz="1350">
                 <a:solidFill>
                   <a:srgbClr val="16161A"/>
                 </a:solidFill>
@@ -6183,8 +6722,8 @@
         </p:nvSpPr>
         <p:spPr>
           <a:xfrm>
-            <a:off x="1005840" y="3428999"/>
-            <a:ext cx="10180015" cy="1005840"/>
+            <a:off x="1051560" y="3456431"/>
+            <a:ext cx="10058400" cy="914400"/>
           </a:xfrm>
           <a:prstGeom prst="rect">
             <a:avLst/>
@@ -6192,7 +6731,7 @@
           <a:noFill/>
         </p:spPr>
         <p:txBody>
-          <a:bodyPr wrap="square">
+          <a:bodyPr wrap="square" lIns="0" rIns="0" tIns="0" bIns="0">
             <a:spAutoFit/>
           </a:bodyPr>
           <a:lstStyle/>
@@ -6214,7 +6753,7 @@
           </a:p>
           <a:p>
             <a:pPr>
-              <a:defRPr sz="1400">
+              <a:defRPr sz="1350">
                 <a:solidFill>
                   <a:srgbClr val="16161A"/>
                 </a:solidFill>
@@ -6280,8 +6819,8 @@
         </p:nvSpPr>
         <p:spPr>
           <a:xfrm>
-            <a:off x="1005840" y="4846320"/>
-            <a:ext cx="10180015" cy="1005840"/>
+            <a:off x="1051560" y="4873752"/>
+            <a:ext cx="10058400" cy="914400"/>
           </a:xfrm>
           <a:prstGeom prst="rect">
             <a:avLst/>
@@ -6289,7 +6828,7 @@
           <a:noFill/>
         </p:spPr>
         <p:txBody>
-          <a:bodyPr wrap="square">
+          <a:bodyPr wrap="square" lIns="0" rIns="0" tIns="0" bIns="0">
             <a:spAutoFit/>
           </a:bodyPr>
           <a:lstStyle/>
@@ -6311,7 +6850,7 @@
           </a:p>
           <a:p>
             <a:pPr>
-              <a:defRPr sz="1400">
+              <a:defRPr sz="1350">
                 <a:solidFill>
                   <a:srgbClr val="16161A"/>
                 </a:solidFill>
@@ -6384,7 +6923,7 @@
           <a:noFill/>
         </p:spPr>
         <p:txBody>
-          <a:bodyPr wrap="none" lIns="0" tIns="0" rIns="0" bIns="0">
+          <a:bodyPr wrap="square" lIns="0" rIns="0" tIns="0" bIns="0">
             <a:spAutoFit/>
           </a:bodyPr>
           <a:lstStyle/>
@@ -6392,7 +6931,7 @@
             <a:pPr>
               <a:defRPr sz="1000">
                 <a:solidFill>
-                  <a:srgbClr val="5F5C52"/>
+                  <a:srgbClr val="736E62"/>
                 </a:solidFill>
                 <a:latin typeface="Helvetica Neue"/>
               </a:defRPr>
@@ -6420,7 +6959,7 @@
           <a:noFill/>
         </p:spPr>
         <p:txBody>
-          <a:bodyPr wrap="none" lIns="0" tIns="0" rIns="0" bIns="0">
+          <a:bodyPr wrap="square" lIns="0" rIns="0" tIns="0" bIns="0">
             <a:spAutoFit/>
           </a:bodyPr>
           <a:lstStyle/>
@@ -6428,7 +6967,7 @@
             <a:pPr algn="r">
               <a:defRPr sz="1000">
                 <a:solidFill>
-                  <a:srgbClr val="5F5C52"/>
+                  <a:srgbClr val="736E62"/>
                 </a:solidFill>
                 <a:latin typeface="Helvetica Neue"/>
               </a:defRPr>
@@ -6519,7 +7058,7 @@
         <p:spPr>
           <a:xfrm>
             <a:off x="731520" y="146304"/>
-            <a:ext cx="310896" cy="310896"/>
+            <a:ext cx="301752" cy="301752"/>
           </a:xfrm>
           <a:prstGeom prst="roundRect">
             <a:avLst/>
@@ -6562,7 +7101,7 @@
         <p:spPr>
           <a:xfrm>
             <a:off x="731520" y="128016"/>
-            <a:ext cx="310896" cy="310896"/>
+            <a:ext cx="301752" cy="301752"/>
           </a:xfrm>
           <a:prstGeom prst="rect">
             <a:avLst/>
@@ -6570,7 +7109,7 @@
           <a:noFill/>
         </p:spPr>
         <p:txBody>
-          <a:bodyPr wrap="none" lIns="0" tIns="0" rIns="0" bIns="0">
+          <a:bodyPr wrap="square" lIns="0" rIns="0" tIns="0" bIns="0">
             <a:spAutoFit/>
           </a:bodyPr>
           <a:lstStyle/>
@@ -6606,7 +7145,7 @@
           <a:noFill/>
         </p:spPr>
         <p:txBody>
-          <a:bodyPr wrap="none" lIns="0" tIns="0" rIns="0" bIns="0">
+          <a:bodyPr wrap="square" lIns="0" rIns="0" tIns="0" bIns="0">
             <a:spAutoFit/>
           </a:bodyPr>
           <a:lstStyle/>
@@ -6633,8 +7172,8 @@
         </p:nvSpPr>
         <p:spPr>
           <a:xfrm>
-            <a:off x="5029200" y="182880"/>
-            <a:ext cx="4754880" cy="292608"/>
+            <a:off x="4572000" y="182880"/>
+            <a:ext cx="5212080" cy="292608"/>
           </a:xfrm>
           <a:prstGeom prst="rect">
             <a:avLst/>
@@ -6642,7 +7181,7 @@
           <a:noFill/>
         </p:spPr>
         <p:txBody>
-          <a:bodyPr wrap="none" lIns="0" tIns="0" rIns="0" bIns="0">
+          <a:bodyPr wrap="square" lIns="0" rIns="0" tIns="0" bIns="0">
             <a:spAutoFit/>
           </a:bodyPr>
           <a:lstStyle/>
@@ -6650,7 +7189,7 @@
             <a:pPr algn="r">
               <a:defRPr sz="1000">
                 <a:solidFill>
-                  <a:srgbClr val="C8CDD7"/>
+                  <a:srgbClr val="BEC3CD"/>
                 </a:solidFill>
                 <a:latin typeface="Helvetica Neue"/>
               </a:defRPr>
@@ -6669,8 +7208,8 @@
         </p:nvSpPr>
         <p:spPr>
           <a:xfrm>
-            <a:off x="10058400" y="128016"/>
-            <a:ext cx="1371600" cy="329184"/>
+            <a:off x="9966960" y="128016"/>
+            <a:ext cx="1463040" cy="329184"/>
           </a:xfrm>
           <a:prstGeom prst="roundRect">
             <a:avLst/>
@@ -6712,8 +7251,8 @@
         </p:nvSpPr>
         <p:spPr>
           <a:xfrm>
-            <a:off x="10058400" y="164592"/>
-            <a:ext cx="1371600" cy="274320"/>
+            <a:off x="9966960" y="164592"/>
+            <a:ext cx="1463040" cy="274320"/>
           </a:xfrm>
           <a:prstGeom prst="rect">
             <a:avLst/>
@@ -6721,7 +7260,7 @@
           <a:noFill/>
         </p:spPr>
         <p:txBody>
-          <a:bodyPr wrap="none" lIns="0" tIns="0" rIns="0" bIns="0">
+          <a:bodyPr wrap="square" lIns="0" rIns="0" tIns="0" bIns="0">
             <a:spAutoFit/>
           </a:bodyPr>
           <a:lstStyle/>
@@ -6749,7 +7288,7 @@
         <p:spPr>
           <a:xfrm>
             <a:off x="731520" y="777240"/>
-            <a:ext cx="10728655" cy="274320"/>
+            <a:ext cx="10728655" cy="228600"/>
           </a:xfrm>
           <a:prstGeom prst="rect">
             <a:avLst/>
@@ -6757,13 +7296,13 @@
           <a:noFill/>
         </p:spPr>
         <p:txBody>
-          <a:bodyPr wrap="none" lIns="0" tIns="0" rIns="0" bIns="0">
+          <a:bodyPr wrap="square" lIns="0" rIns="0" tIns="0" bIns="0">
             <a:spAutoFit/>
           </a:bodyPr>
           <a:lstStyle/>
           <a:p>
             <a:pPr>
-              <a:defRPr sz="1100" b="1">
+              <a:defRPr sz="1000" b="1">
                 <a:solidFill>
                   <a:srgbClr val="2B59D9"/>
                 </a:solidFill>
@@ -6784,7 +7323,7 @@
         </p:nvSpPr>
         <p:spPr>
           <a:xfrm>
-            <a:off x="731520" y="1051560"/>
+            <a:off x="731520" y="1024128"/>
             <a:ext cx="10728655" cy="640080"/>
           </a:xfrm>
           <a:prstGeom prst="rect">
@@ -6793,7 +7332,7 @@
           <a:noFill/>
         </p:spPr>
         <p:txBody>
-          <a:bodyPr wrap="square" lIns="0" tIns="0" rIns="0" bIns="0">
+          <a:bodyPr wrap="square" lIns="0" rIns="0" tIns="0" bIns="0">
             <a:spAutoFit/>
           </a:bodyPr>
           <a:lstStyle/>
@@ -6874,7 +7413,7 @@
           <a:noFill/>
         </p:spPr>
         <p:txBody>
-          <a:bodyPr wrap="square">
+          <a:bodyPr wrap="square" lIns="0" rIns="0" tIns="0" bIns="0">
             <a:spAutoFit/>
           </a:bodyPr>
           <a:lstStyle/>
@@ -6899,7 +7438,7 @@
               <a:spcAft>
                 <a:spcPts val="1200"/>
               </a:spcAft>
-              <a:defRPr sz="1900" b="1">
+              <a:defRPr sz="1800" b="1">
                 <a:solidFill>
                   <a:srgbClr val="16161A"/>
                 </a:solidFill>
@@ -6912,7 +7451,7 @@
           </a:p>
           <a:p>
             <a:pPr>
-              <a:defRPr sz="1300">
+              <a:defRPr sz="1250">
                 <a:solidFill>
                   <a:srgbClr val="454337"/>
                 </a:solidFill>
@@ -6987,7 +7526,7 @@
           <a:noFill/>
         </p:spPr>
         <p:txBody>
-          <a:bodyPr wrap="square">
+          <a:bodyPr wrap="square" lIns="0" rIns="0" tIns="0" bIns="0">
             <a:spAutoFit/>
           </a:bodyPr>
           <a:lstStyle/>
@@ -7012,7 +7551,7 @@
               <a:spcAft>
                 <a:spcPts val="1200"/>
               </a:spcAft>
-              <a:defRPr sz="1900" b="1">
+              <a:defRPr sz="1800" b="1">
                 <a:solidFill>
                   <a:srgbClr val="16161A"/>
                 </a:solidFill>
@@ -7025,7 +7564,7 @@
           </a:p>
           <a:p>
             <a:pPr>
-              <a:defRPr sz="1300">
+              <a:defRPr sz="1250">
                 <a:solidFill>
                   <a:srgbClr val="454337"/>
                 </a:solidFill>
@@ -7100,7 +7639,7 @@
           <a:noFill/>
         </p:spPr>
         <p:txBody>
-          <a:bodyPr wrap="square">
+          <a:bodyPr wrap="square" lIns="0" rIns="0" tIns="0" bIns="0">
             <a:spAutoFit/>
           </a:bodyPr>
           <a:lstStyle/>
@@ -7125,7 +7664,7 @@
               <a:spcAft>
                 <a:spcPts val="1200"/>
               </a:spcAft>
-              <a:defRPr sz="1900" b="1">
+              <a:defRPr sz="1800" b="1">
                 <a:solidFill>
                   <a:srgbClr val="16161A"/>
                 </a:solidFill>
@@ -7138,7 +7677,7 @@
           </a:p>
           <a:p>
             <a:pPr>
-              <a:defRPr sz="1300">
+              <a:defRPr sz="1250">
                 <a:solidFill>
                   <a:srgbClr val="454337"/>
                 </a:solidFill>
@@ -7204,8 +7743,8 @@
         </p:nvSpPr>
         <p:spPr>
           <a:xfrm>
-            <a:off x="914400" y="5230368"/>
-            <a:ext cx="2148840" cy="914400"/>
+            <a:off x="914400" y="5257800"/>
+            <a:ext cx="2148840" cy="868680"/>
           </a:xfrm>
           <a:prstGeom prst="rect">
             <a:avLst/>
@@ -7213,7 +7752,7 @@
           <a:noFill/>
         </p:spPr>
         <p:txBody>
-          <a:bodyPr wrap="square">
+          <a:bodyPr wrap="square" lIns="0" rIns="0" tIns="0" bIns="0">
             <a:spAutoFit/>
           </a:bodyPr>
           <a:lstStyle/>
@@ -7301,8 +7840,8 @@
         </p:nvSpPr>
         <p:spPr>
           <a:xfrm>
-            <a:off x="3611880" y="5230368"/>
-            <a:ext cx="2148840" cy="914400"/>
+            <a:off x="3611880" y="5257800"/>
+            <a:ext cx="2148840" cy="868680"/>
           </a:xfrm>
           <a:prstGeom prst="rect">
             <a:avLst/>
@@ -7310,7 +7849,7 @@
           <a:noFill/>
         </p:spPr>
         <p:txBody>
-          <a:bodyPr wrap="square">
+          <a:bodyPr wrap="square" lIns="0" rIns="0" tIns="0" bIns="0">
             <a:spAutoFit/>
           </a:bodyPr>
           <a:lstStyle/>
@@ -7398,8 +7937,8 @@
         </p:nvSpPr>
         <p:spPr>
           <a:xfrm>
-            <a:off x="6309360" y="5230368"/>
-            <a:ext cx="2148840" cy="914400"/>
+            <a:off x="6309360" y="5257800"/>
+            <a:ext cx="2148840" cy="868680"/>
           </a:xfrm>
           <a:prstGeom prst="rect">
             <a:avLst/>
@@ -7407,7 +7946,7 @@
           <a:noFill/>
         </p:spPr>
         <p:txBody>
-          <a:bodyPr wrap="square">
+          <a:bodyPr wrap="square" lIns="0" rIns="0" tIns="0" bIns="0">
             <a:spAutoFit/>
           </a:bodyPr>
           <a:lstStyle/>
@@ -7495,8 +8034,8 @@
         </p:nvSpPr>
         <p:spPr>
           <a:xfrm>
-            <a:off x="9006840" y="5230368"/>
-            <a:ext cx="2148840" cy="914400"/>
+            <a:off x="9006840" y="5257800"/>
+            <a:ext cx="2148840" cy="868680"/>
           </a:xfrm>
           <a:prstGeom prst="rect">
             <a:avLst/>
@@ -7504,7 +8043,7 @@
           <a:noFill/>
         </p:spPr>
         <p:txBody>
-          <a:bodyPr wrap="square">
+          <a:bodyPr wrap="square" lIns="0" rIns="0" tIns="0" bIns="0">
             <a:spAutoFit/>
           </a:bodyPr>
           <a:lstStyle/>
@@ -7599,7 +8138,7 @@
           <a:noFill/>
         </p:spPr>
         <p:txBody>
-          <a:bodyPr wrap="none" lIns="0" tIns="0" rIns="0" bIns="0">
+          <a:bodyPr wrap="square" lIns="0" rIns="0" tIns="0" bIns="0">
             <a:spAutoFit/>
           </a:bodyPr>
           <a:lstStyle/>
@@ -7607,7 +8146,7 @@
             <a:pPr>
               <a:defRPr sz="1000">
                 <a:solidFill>
-                  <a:srgbClr val="5F5C52"/>
+                  <a:srgbClr val="736E62"/>
                 </a:solidFill>
                 <a:latin typeface="Helvetica Neue"/>
               </a:defRPr>
@@ -7635,7 +8174,7 @@
           <a:noFill/>
         </p:spPr>
         <p:txBody>
-          <a:bodyPr wrap="none" lIns="0" tIns="0" rIns="0" bIns="0">
+          <a:bodyPr wrap="square" lIns="0" rIns="0" tIns="0" bIns="0">
             <a:spAutoFit/>
           </a:bodyPr>
           <a:lstStyle/>
@@ -7643,7 +8182,7 @@
             <a:pPr algn="r">
               <a:defRPr sz="1000">
                 <a:solidFill>
-                  <a:srgbClr val="5F5C52"/>
+                  <a:srgbClr val="736E62"/>
                 </a:solidFill>
                 <a:latin typeface="Helvetica Neue"/>
               </a:defRPr>
@@ -7734,7 +8273,7 @@
         <p:spPr>
           <a:xfrm>
             <a:off x="731520" y="146304"/>
-            <a:ext cx="310896" cy="310896"/>
+            <a:ext cx="301752" cy="301752"/>
           </a:xfrm>
           <a:prstGeom prst="roundRect">
             <a:avLst/>
@@ -7777,7 +8316,7 @@
         <p:spPr>
           <a:xfrm>
             <a:off x="731520" y="128016"/>
-            <a:ext cx="310896" cy="310896"/>
+            <a:ext cx="301752" cy="301752"/>
           </a:xfrm>
           <a:prstGeom prst="rect">
             <a:avLst/>
@@ -7785,7 +8324,7 @@
           <a:noFill/>
         </p:spPr>
         <p:txBody>
-          <a:bodyPr wrap="none" lIns="0" tIns="0" rIns="0" bIns="0">
+          <a:bodyPr wrap="square" lIns="0" rIns="0" tIns="0" bIns="0">
             <a:spAutoFit/>
           </a:bodyPr>
           <a:lstStyle/>
@@ -7821,7 +8360,7 @@
           <a:noFill/>
         </p:spPr>
         <p:txBody>
-          <a:bodyPr wrap="none" lIns="0" tIns="0" rIns="0" bIns="0">
+          <a:bodyPr wrap="square" lIns="0" rIns="0" tIns="0" bIns="0">
             <a:spAutoFit/>
           </a:bodyPr>
           <a:lstStyle/>
@@ -7848,8 +8387,8 @@
         </p:nvSpPr>
         <p:spPr>
           <a:xfrm>
-            <a:off x="5029200" y="182880"/>
-            <a:ext cx="4754880" cy="292608"/>
+            <a:off x="4572000" y="182880"/>
+            <a:ext cx="5212080" cy="292608"/>
           </a:xfrm>
           <a:prstGeom prst="rect">
             <a:avLst/>
@@ -7857,7 +8396,7 @@
           <a:noFill/>
         </p:spPr>
         <p:txBody>
-          <a:bodyPr wrap="none" lIns="0" tIns="0" rIns="0" bIns="0">
+          <a:bodyPr wrap="square" lIns="0" rIns="0" tIns="0" bIns="0">
             <a:spAutoFit/>
           </a:bodyPr>
           <a:lstStyle/>
@@ -7865,7 +8404,7 @@
             <a:pPr algn="r">
               <a:defRPr sz="1000">
                 <a:solidFill>
-                  <a:srgbClr val="C8CDD7"/>
+                  <a:srgbClr val="BEC3CD"/>
                 </a:solidFill>
                 <a:latin typeface="Helvetica Neue"/>
               </a:defRPr>
@@ -7884,8 +8423,8 @@
         </p:nvSpPr>
         <p:spPr>
           <a:xfrm>
-            <a:off x="10058400" y="128016"/>
-            <a:ext cx="1371600" cy="329184"/>
+            <a:off x="9966960" y="128016"/>
+            <a:ext cx="1463040" cy="329184"/>
           </a:xfrm>
           <a:prstGeom prst="roundRect">
             <a:avLst/>
@@ -7927,8 +8466,8 @@
         </p:nvSpPr>
         <p:spPr>
           <a:xfrm>
-            <a:off x="10058400" y="164592"/>
-            <a:ext cx="1371600" cy="274320"/>
+            <a:off x="9966960" y="164592"/>
+            <a:ext cx="1463040" cy="274320"/>
           </a:xfrm>
           <a:prstGeom prst="rect">
             <a:avLst/>
@@ -7936,7 +8475,7 @@
           <a:noFill/>
         </p:spPr>
         <p:txBody>
-          <a:bodyPr wrap="none" lIns="0" tIns="0" rIns="0" bIns="0">
+          <a:bodyPr wrap="square" lIns="0" rIns="0" tIns="0" bIns="0">
             <a:spAutoFit/>
           </a:bodyPr>
           <a:lstStyle/>
@@ -7964,7 +8503,7 @@
         <p:spPr>
           <a:xfrm>
             <a:off x="731520" y="777240"/>
-            <a:ext cx="10728655" cy="274320"/>
+            <a:ext cx="10728655" cy="228600"/>
           </a:xfrm>
           <a:prstGeom prst="rect">
             <a:avLst/>
@@ -7972,13 +8511,13 @@
           <a:noFill/>
         </p:spPr>
         <p:txBody>
-          <a:bodyPr wrap="none" lIns="0" tIns="0" rIns="0" bIns="0">
+          <a:bodyPr wrap="square" lIns="0" rIns="0" tIns="0" bIns="0">
             <a:spAutoFit/>
           </a:bodyPr>
           <a:lstStyle/>
           <a:p>
             <a:pPr>
-              <a:defRPr sz="1100" b="1">
+              <a:defRPr sz="1000" b="1">
                 <a:solidFill>
                   <a:srgbClr val="2B59D9"/>
                 </a:solidFill>
@@ -7999,7 +8538,7 @@
         </p:nvSpPr>
         <p:spPr>
           <a:xfrm>
-            <a:off x="731520" y="1051560"/>
+            <a:off x="731520" y="1024128"/>
             <a:ext cx="10728655" cy="640080"/>
           </a:xfrm>
           <a:prstGeom prst="rect">
@@ -8008,7 +8547,7 @@
           <a:noFill/>
         </p:spPr>
         <p:txBody>
-          <a:bodyPr wrap="square" lIns="0" tIns="0" rIns="0" bIns="0">
+          <a:bodyPr wrap="square" lIns="0" rIns="0" tIns="0" bIns="0">
             <a:spAutoFit/>
           </a:bodyPr>
           <a:lstStyle/>
@@ -8080,8 +8619,8 @@
         </p:nvSpPr>
         <p:spPr>
           <a:xfrm>
-            <a:off x="1005840" y="2194559"/>
-            <a:ext cx="4608576" cy="3566160"/>
+            <a:off x="1051560" y="2194559"/>
+            <a:ext cx="4517136" cy="3566160"/>
           </a:xfrm>
           <a:prstGeom prst="rect">
             <a:avLst/>
@@ -8089,7 +8628,7 @@
           <a:noFill/>
         </p:spPr>
         <p:txBody>
-          <a:bodyPr wrap="square">
+          <a:bodyPr wrap="square" lIns="0" rIns="0" tIns="0" bIns="0">
             <a:spAutoFit/>
           </a:bodyPr>
           <a:lstStyle/>
@@ -8114,7 +8653,7 @@
               <a:spcAft>
                 <a:spcPts val="800"/>
               </a:spcAft>
-              <a:defRPr sz="1300">
+              <a:defRPr sz="1250">
                 <a:solidFill>
                   <a:srgbClr val="454337"/>
                 </a:solidFill>
@@ -8122,7 +8661,7 @@
               </a:defRPr>
             </a:pPr>
             <a:r>
-              <a:t>✕ Looking for offshore body-shopping or commoditized hourly rates.</a:t>
+              <a:t>✕  Looking for offshore body-shopping or commoditized hourly rates.</a:t>
             </a:r>
           </a:p>
           <a:p>
@@ -8130,7 +8669,7 @@
               <a:spcAft>
                 <a:spcPts val="800"/>
               </a:spcAft>
-              <a:defRPr sz="1300">
+              <a:defRPr sz="1250">
                 <a:solidFill>
                   <a:srgbClr val="454337"/>
                 </a:solidFill>
@@ -8138,7 +8677,7 @@
               </a:defRPr>
             </a:pPr>
             <a:r>
-              <a:t>✕ Basic WordPress brochure sites or generic no-code template setups.</a:t>
+              <a:t>✕  Basic WordPress brochure sites or generic no-code template setups.</a:t>
             </a:r>
           </a:p>
           <a:p>
@@ -8146,7 +8685,7 @@
               <a:spcAft>
                 <a:spcPts val="800"/>
               </a:spcAft>
-              <a:defRPr sz="1300">
+              <a:defRPr sz="1250">
                 <a:solidFill>
                   <a:srgbClr val="454337"/>
                 </a:solidFill>
@@ -8154,7 +8693,7 @@
               </a:defRPr>
             </a:pPr>
             <a:r>
-              <a:t>✕ No engineering budget or unwilling to invest in custom architecture.</a:t>
+              <a:t>✕  No engineering budget or unwilling to invest in custom architecture.</a:t>
             </a:r>
           </a:p>
           <a:p>
@@ -8162,7 +8701,7 @@
               <a:spcAft>
                 <a:spcPts val="800"/>
               </a:spcAft>
-              <a:defRPr sz="1300">
+              <a:defRPr sz="1250">
                 <a:solidFill>
                   <a:srgbClr val="454337"/>
                 </a:solidFill>
@@ -8170,7 +8709,7 @@
               </a:defRPr>
             </a:pPr>
             <a:r>
-              <a:t>✕ Unclear business goals without measurable outcome targets.</a:t>
+              <a:t>✕  Unclear business goals without measurable outcome targets.</a:t>
             </a:r>
           </a:p>
         </p:txBody>
@@ -8228,8 +8767,8 @@
         </p:nvSpPr>
         <p:spPr>
           <a:xfrm>
-            <a:off x="6574536" y="2194559"/>
-            <a:ext cx="4608576" cy="3566160"/>
+            <a:off x="6620256" y="2194559"/>
+            <a:ext cx="4517136" cy="3566160"/>
           </a:xfrm>
           <a:prstGeom prst="rect">
             <a:avLst/>
@@ -8237,7 +8776,7 @@
           <a:noFill/>
         </p:spPr>
         <p:txBody>
-          <a:bodyPr wrap="square">
+          <a:bodyPr wrap="square" lIns="0" rIns="0" tIns="0" bIns="0">
             <a:spAutoFit/>
           </a:bodyPr>
           <a:lstStyle/>
@@ -8262,7 +8801,7 @@
               <a:spcAft>
                 <a:spcPts val="800"/>
               </a:spcAft>
-              <a:defRPr sz="1300">
+              <a:defRPr sz="1250">
                 <a:solidFill>
                   <a:srgbClr val="454337"/>
                 </a:solidFill>
@@ -8270,7 +8809,7 @@
               </a:defRPr>
             </a:pPr>
             <a:r>
-              <a:t>✕ Seeking flashy AI wrappers without backend integration or API access.</a:t>
+              <a:t>✕  Seeking flashy AI wrappers without backend integration or API access.</a:t>
             </a:r>
           </a:p>
           <a:p>
@@ -8278,7 +8817,7 @@
               <a:spcAft>
                 <a:spcPts val="800"/>
               </a:spcAft>
-              <a:defRPr sz="1300">
+              <a:defRPr sz="1250">
                 <a:solidFill>
                   <a:srgbClr val="454337"/>
                 </a:solidFill>
@@ -8286,7 +8825,7 @@
               </a:defRPr>
             </a:pPr>
             <a:r>
-              <a:t>✕ Unwilling to maintain data hygiene, security controls, or HITL oversight.</a:t>
+              <a:t>✕  Unwilling to maintain data hygiene, security controls, or HITL oversight.</a:t>
             </a:r>
           </a:p>
           <a:p>
@@ -8294,7 +8833,7 @@
               <a:spcAft>
                 <a:spcPts val="800"/>
               </a:spcAft>
-              <a:defRPr sz="1300">
+              <a:defRPr sz="1250">
                 <a:solidFill>
                   <a:srgbClr val="454337"/>
                 </a:solidFill>
@@ -8302,7 +8841,7 @@
               </a:defRPr>
             </a:pPr>
             <a:r>
-              <a:t>✕ Expectations of automated AI magic without structured workflow design.</a:t>
+              <a:t>✕  Expectations of automated AI magic without structured workflow design.</a:t>
             </a:r>
           </a:p>
           <a:p>
@@ -8310,7 +8849,7 @@
               <a:spcAft>
                 <a:spcPts val="800"/>
               </a:spcAft>
-              <a:defRPr sz="1300">
+              <a:defRPr sz="1250">
                 <a:solidFill>
                   <a:srgbClr val="454337"/>
                 </a:solidFill>
@@ -8318,7 +8857,7 @@
               </a:defRPr>
             </a:pPr>
             <a:r>
-              <a:t>✕ No internal subject matter expert to validate AI outputs.</a:t>
+              <a:t>✕  No internal subject matter expert to validate AI outputs.</a:t>
             </a:r>
           </a:p>
         </p:txBody>
@@ -8383,7 +8922,7 @@
           <a:noFill/>
         </p:spPr>
         <p:txBody>
-          <a:bodyPr wrap="none" lIns="0" tIns="0" rIns="0" bIns="0">
+          <a:bodyPr wrap="square" lIns="0" rIns="0" tIns="0" bIns="0">
             <a:spAutoFit/>
           </a:bodyPr>
           <a:lstStyle/>
@@ -8391,7 +8930,7 @@
             <a:pPr>
               <a:defRPr sz="1000">
                 <a:solidFill>
-                  <a:srgbClr val="5F5C52"/>
+                  <a:srgbClr val="736E62"/>
                 </a:solidFill>
                 <a:latin typeface="Helvetica Neue"/>
               </a:defRPr>
@@ -8419,7 +8958,7 @@
           <a:noFill/>
         </p:spPr>
         <p:txBody>
-          <a:bodyPr wrap="none" lIns="0" tIns="0" rIns="0" bIns="0">
+          <a:bodyPr wrap="square" lIns="0" rIns="0" tIns="0" bIns="0">
             <a:spAutoFit/>
           </a:bodyPr>
           <a:lstStyle/>
@@ -8427,7 +8966,7 @@
             <a:pPr algn="r">
               <a:defRPr sz="1000">
                 <a:solidFill>
-                  <a:srgbClr val="5F5C52"/>
+                  <a:srgbClr val="736E62"/>
                 </a:solidFill>
                 <a:latin typeface="Helvetica Neue"/>
               </a:defRPr>
@@ -8518,7 +9057,7 @@
         <p:spPr>
           <a:xfrm>
             <a:off x="731520" y="146304"/>
-            <a:ext cx="310896" cy="310896"/>
+            <a:ext cx="301752" cy="301752"/>
           </a:xfrm>
           <a:prstGeom prst="roundRect">
             <a:avLst/>
@@ -8561,7 +9100,7 @@
         <p:spPr>
           <a:xfrm>
             <a:off x="731520" y="128016"/>
-            <a:ext cx="310896" cy="310896"/>
+            <a:ext cx="301752" cy="301752"/>
           </a:xfrm>
           <a:prstGeom prst="rect">
             <a:avLst/>
@@ -8569,7 +9108,7 @@
           <a:noFill/>
         </p:spPr>
         <p:txBody>
-          <a:bodyPr wrap="none" lIns="0" tIns="0" rIns="0" bIns="0">
+          <a:bodyPr wrap="square" lIns="0" rIns="0" tIns="0" bIns="0">
             <a:spAutoFit/>
           </a:bodyPr>
           <a:lstStyle/>
@@ -8605,7 +9144,7 @@
           <a:noFill/>
         </p:spPr>
         <p:txBody>
-          <a:bodyPr wrap="none" lIns="0" tIns="0" rIns="0" bIns="0">
+          <a:bodyPr wrap="square" lIns="0" rIns="0" tIns="0" bIns="0">
             <a:spAutoFit/>
           </a:bodyPr>
           <a:lstStyle/>
@@ -8632,8 +9171,8 @@
         </p:nvSpPr>
         <p:spPr>
           <a:xfrm>
-            <a:off x="5029200" y="182880"/>
-            <a:ext cx="4754880" cy="292608"/>
+            <a:off x="4572000" y="182880"/>
+            <a:ext cx="5212080" cy="292608"/>
           </a:xfrm>
           <a:prstGeom prst="rect">
             <a:avLst/>
@@ -8641,7 +9180,7 @@
           <a:noFill/>
         </p:spPr>
         <p:txBody>
-          <a:bodyPr wrap="none" lIns="0" tIns="0" rIns="0" bIns="0">
+          <a:bodyPr wrap="square" lIns="0" rIns="0" tIns="0" bIns="0">
             <a:spAutoFit/>
           </a:bodyPr>
           <a:lstStyle/>
@@ -8649,7 +9188,7 @@
             <a:pPr algn="r">
               <a:defRPr sz="1000">
                 <a:solidFill>
-                  <a:srgbClr val="C8CDD7"/>
+                  <a:srgbClr val="BEC3CD"/>
                 </a:solidFill>
                 <a:latin typeface="Helvetica Neue"/>
               </a:defRPr>
@@ -8668,8 +9207,8 @@
         </p:nvSpPr>
         <p:spPr>
           <a:xfrm>
-            <a:off x="10058400" y="128016"/>
-            <a:ext cx="1371600" cy="329184"/>
+            <a:off x="9966960" y="128016"/>
+            <a:ext cx="1463040" cy="329184"/>
           </a:xfrm>
           <a:prstGeom prst="roundRect">
             <a:avLst/>
@@ -8711,8 +9250,8 @@
         </p:nvSpPr>
         <p:spPr>
           <a:xfrm>
-            <a:off x="10058400" y="164592"/>
-            <a:ext cx="1371600" cy="274320"/>
+            <a:off x="9966960" y="164592"/>
+            <a:ext cx="1463040" cy="274320"/>
           </a:xfrm>
           <a:prstGeom prst="rect">
             <a:avLst/>
@@ -8720,7 +9259,7 @@
           <a:noFill/>
         </p:spPr>
         <p:txBody>
-          <a:bodyPr wrap="none" lIns="0" tIns="0" rIns="0" bIns="0">
+          <a:bodyPr wrap="square" lIns="0" rIns="0" tIns="0" bIns="0">
             <a:spAutoFit/>
           </a:bodyPr>
           <a:lstStyle/>
@@ -8748,7 +9287,7 @@
         <p:spPr>
           <a:xfrm>
             <a:off x="731520" y="777240"/>
-            <a:ext cx="10728655" cy="274320"/>
+            <a:ext cx="10728655" cy="228600"/>
           </a:xfrm>
           <a:prstGeom prst="rect">
             <a:avLst/>
@@ -8756,13 +9295,13 @@
           <a:noFill/>
         </p:spPr>
         <p:txBody>
-          <a:bodyPr wrap="none" lIns="0" tIns="0" rIns="0" bIns="0">
+          <a:bodyPr wrap="square" lIns="0" rIns="0" tIns="0" bIns="0">
             <a:spAutoFit/>
           </a:bodyPr>
           <a:lstStyle/>
           <a:p>
             <a:pPr>
-              <a:defRPr sz="1100" b="1">
+              <a:defRPr sz="1000" b="1">
                 <a:solidFill>
                   <a:srgbClr val="2B59D9"/>
                 </a:solidFill>
@@ -8783,7 +9322,7 @@
         </p:nvSpPr>
         <p:spPr>
           <a:xfrm>
-            <a:off x="731520" y="1051560"/>
+            <a:off x="731520" y="1024128"/>
             <a:ext cx="10728655" cy="640080"/>
           </a:xfrm>
           <a:prstGeom prst="rect">
@@ -8792,7 +9331,7 @@
           <a:noFill/>
         </p:spPr>
         <p:txBody>
-          <a:bodyPr wrap="square" lIns="0" tIns="0" rIns="0" bIns="0">
+          <a:bodyPr wrap="square" lIns="0" rIns="0" tIns="0" bIns="0">
             <a:spAutoFit/>
           </a:bodyPr>
           <a:lstStyle/>
@@ -8873,7 +9412,7 @@
           <a:noFill/>
         </p:spPr>
         <p:txBody>
-          <a:bodyPr wrap="square">
+          <a:bodyPr wrap="square" lIns="0" rIns="0" tIns="0" bIns="0">
             <a:spAutoFit/>
           </a:bodyPr>
           <a:lstStyle/>
@@ -8986,7 +9525,7 @@
           <a:noFill/>
         </p:spPr>
         <p:txBody>
-          <a:bodyPr wrap="square">
+          <a:bodyPr wrap="square" lIns="0" rIns="0" tIns="0" bIns="0">
             <a:spAutoFit/>
           </a:bodyPr>
           <a:lstStyle/>
@@ -9099,7 +9638,7 @@
           <a:noFill/>
         </p:spPr>
         <p:txBody>
-          <a:bodyPr wrap="square">
+          <a:bodyPr wrap="square" lIns="0" rIns="0" tIns="0" bIns="0">
             <a:spAutoFit/>
           </a:bodyPr>
           <a:lstStyle/>
@@ -9210,7 +9749,7 @@
           <a:noFill/>
         </p:spPr>
         <p:txBody>
-          <a:bodyPr wrap="none" lIns="0" tIns="0" rIns="0" bIns="0">
+          <a:bodyPr wrap="square" lIns="0" rIns="0" tIns="0" bIns="0">
             <a:spAutoFit/>
           </a:bodyPr>
           <a:lstStyle/>
@@ -9218,7 +9757,7 @@
             <a:pPr>
               <a:defRPr sz="1000">
                 <a:solidFill>
-                  <a:srgbClr val="5F5C52"/>
+                  <a:srgbClr val="736E62"/>
                 </a:solidFill>
                 <a:latin typeface="Helvetica Neue"/>
               </a:defRPr>
@@ -9246,7 +9785,7 @@
           <a:noFill/>
         </p:spPr>
         <p:txBody>
-          <a:bodyPr wrap="none" lIns="0" tIns="0" rIns="0" bIns="0">
+          <a:bodyPr wrap="square" lIns="0" rIns="0" tIns="0" bIns="0">
             <a:spAutoFit/>
           </a:bodyPr>
           <a:lstStyle/>
@@ -9254,7 +9793,7 @@
             <a:pPr algn="r">
               <a:defRPr sz="1000">
                 <a:solidFill>
-                  <a:srgbClr val="5F5C52"/>
+                  <a:srgbClr val="736E62"/>
                 </a:solidFill>
                 <a:latin typeface="Helvetica Neue"/>
               </a:defRPr>
@@ -9345,7 +9884,7 @@
         <p:spPr>
           <a:xfrm>
             <a:off x="731520" y="146304"/>
-            <a:ext cx="310896" cy="310896"/>
+            <a:ext cx="301752" cy="301752"/>
           </a:xfrm>
           <a:prstGeom prst="roundRect">
             <a:avLst/>
@@ -9388,7 +9927,7 @@
         <p:spPr>
           <a:xfrm>
             <a:off x="731520" y="128016"/>
-            <a:ext cx="310896" cy="310896"/>
+            <a:ext cx="301752" cy="301752"/>
           </a:xfrm>
           <a:prstGeom prst="rect">
             <a:avLst/>
@@ -9396,7 +9935,7 @@
           <a:noFill/>
         </p:spPr>
         <p:txBody>
-          <a:bodyPr wrap="none" lIns="0" tIns="0" rIns="0" bIns="0">
+          <a:bodyPr wrap="square" lIns="0" rIns="0" tIns="0" bIns="0">
             <a:spAutoFit/>
           </a:bodyPr>
           <a:lstStyle/>
@@ -9432,7 +9971,7 @@
           <a:noFill/>
         </p:spPr>
         <p:txBody>
-          <a:bodyPr wrap="none" lIns="0" tIns="0" rIns="0" bIns="0">
+          <a:bodyPr wrap="square" lIns="0" rIns="0" tIns="0" bIns="0">
             <a:spAutoFit/>
           </a:bodyPr>
           <a:lstStyle/>
@@ -9459,8 +9998,8 @@
         </p:nvSpPr>
         <p:spPr>
           <a:xfrm>
-            <a:off x="5029200" y="182880"/>
-            <a:ext cx="4754880" cy="292608"/>
+            <a:off x="4572000" y="182880"/>
+            <a:ext cx="5212080" cy="292608"/>
           </a:xfrm>
           <a:prstGeom prst="rect">
             <a:avLst/>
@@ -9468,7 +10007,7 @@
           <a:noFill/>
         </p:spPr>
         <p:txBody>
-          <a:bodyPr wrap="none" lIns="0" tIns="0" rIns="0" bIns="0">
+          <a:bodyPr wrap="square" lIns="0" rIns="0" tIns="0" bIns="0">
             <a:spAutoFit/>
           </a:bodyPr>
           <a:lstStyle/>
@@ -9476,7 +10015,7 @@
             <a:pPr algn="r">
               <a:defRPr sz="1000">
                 <a:solidFill>
-                  <a:srgbClr val="C8CDD7"/>
+                  <a:srgbClr val="BEC3CD"/>
                 </a:solidFill>
                 <a:latin typeface="Helvetica Neue"/>
               </a:defRPr>
@@ -9495,8 +10034,8 @@
         </p:nvSpPr>
         <p:spPr>
           <a:xfrm>
-            <a:off x="10058400" y="128016"/>
-            <a:ext cx="1371600" cy="329184"/>
+            <a:off x="9966960" y="128016"/>
+            <a:ext cx="1463040" cy="329184"/>
           </a:xfrm>
           <a:prstGeom prst="roundRect">
             <a:avLst/>
@@ -9538,8 +10077,8 @@
         </p:nvSpPr>
         <p:spPr>
           <a:xfrm>
-            <a:off x="10058400" y="164592"/>
-            <a:ext cx="1371600" cy="274320"/>
+            <a:off x="9966960" y="164592"/>
+            <a:ext cx="1463040" cy="274320"/>
           </a:xfrm>
           <a:prstGeom prst="rect">
             <a:avLst/>
@@ -9547,7 +10086,7 @@
           <a:noFill/>
         </p:spPr>
         <p:txBody>
-          <a:bodyPr wrap="none" lIns="0" tIns="0" rIns="0" bIns="0">
+          <a:bodyPr wrap="square" lIns="0" rIns="0" tIns="0" bIns="0">
             <a:spAutoFit/>
           </a:bodyPr>
           <a:lstStyle/>
@@ -9575,7 +10114,7 @@
         <p:spPr>
           <a:xfrm>
             <a:off x="731520" y="777240"/>
-            <a:ext cx="10728655" cy="274320"/>
+            <a:ext cx="10728655" cy="228600"/>
           </a:xfrm>
           <a:prstGeom prst="rect">
             <a:avLst/>
@@ -9583,13 +10122,13 @@
           <a:noFill/>
         </p:spPr>
         <p:txBody>
-          <a:bodyPr wrap="none" lIns="0" tIns="0" rIns="0" bIns="0">
+          <a:bodyPr wrap="square" lIns="0" rIns="0" tIns="0" bIns="0">
             <a:spAutoFit/>
           </a:bodyPr>
           <a:lstStyle/>
           <a:p>
             <a:pPr>
-              <a:defRPr sz="1100" b="1">
+              <a:defRPr sz="1000" b="1">
                 <a:solidFill>
                   <a:srgbClr val="2B59D9"/>
                 </a:solidFill>
@@ -9610,7 +10149,7 @@
         </p:nvSpPr>
         <p:spPr>
           <a:xfrm>
-            <a:off x="731520" y="1051560"/>
+            <a:off x="731520" y="1024128"/>
             <a:ext cx="10728655" cy="640080"/>
           </a:xfrm>
           <a:prstGeom prst="rect">
@@ -9619,7 +10158,7 @@
           <a:noFill/>
         </p:spPr>
         <p:txBody>
-          <a:bodyPr wrap="square" lIns="0" tIns="0" rIns="0" bIns="0">
+          <a:bodyPr wrap="square" lIns="0" rIns="0" tIns="0" bIns="0">
             <a:spAutoFit/>
           </a:bodyPr>
           <a:lstStyle/>
@@ -9691,8 +10230,8 @@
         </p:nvSpPr>
         <p:spPr>
           <a:xfrm>
-            <a:off x="1005840" y="2057400"/>
-            <a:ext cx="10180015" cy="2651760"/>
+            <a:off x="1051560" y="2103120"/>
+            <a:ext cx="10058400" cy="2560320"/>
           </a:xfrm>
           <a:prstGeom prst="rect">
             <a:avLst/>
@@ -9700,7 +10239,7 @@
           <a:noFill/>
         </p:spPr>
         <p:txBody>
-          <a:bodyPr wrap="square">
+          <a:bodyPr wrap="square" lIns="0" rIns="0" tIns="0" bIns="0">
             <a:spAutoFit/>
           </a:bodyPr>
           <a:lstStyle/>
@@ -9725,7 +10264,7 @@
               <a:spcAft>
                 <a:spcPts val="800"/>
               </a:spcAft>
-              <a:defRPr sz="1500">
+              <a:defRPr sz="1450">
                 <a:solidFill>
                   <a:srgbClr val="16161A"/>
                 </a:solidFill>
@@ -9738,7 +10277,7 @@
           </a:p>
           <a:p>
             <a:pPr>
-              <a:defRPr sz="1500">
+              <a:defRPr sz="1450">
                 <a:solidFill>
                   <a:srgbClr val="16161A"/>
                 </a:solidFill>
@@ -9768,7 +10307,7 @@
           <a:noFill/>
         </p:spPr>
         <p:txBody>
-          <a:bodyPr wrap="square">
+          <a:bodyPr wrap="square" lIns="0" rIns="0" tIns="0" bIns="0">
             <a:spAutoFit/>
           </a:bodyPr>
           <a:lstStyle/>
@@ -9863,7 +10402,7 @@
           <a:noFill/>
         </p:spPr>
         <p:txBody>
-          <a:bodyPr wrap="none" lIns="0" tIns="0" rIns="0" bIns="0">
+          <a:bodyPr wrap="square" lIns="0" rIns="0" tIns="0" bIns="0">
             <a:spAutoFit/>
           </a:bodyPr>
           <a:lstStyle/>
@@ -9871,7 +10410,7 @@
             <a:pPr>
               <a:defRPr sz="1000">
                 <a:solidFill>
-                  <a:srgbClr val="5F5C52"/>
+                  <a:srgbClr val="736E62"/>
                 </a:solidFill>
                 <a:latin typeface="Helvetica Neue"/>
               </a:defRPr>
@@ -9899,7 +10438,7 @@
           <a:noFill/>
         </p:spPr>
         <p:txBody>
-          <a:bodyPr wrap="none" lIns="0" tIns="0" rIns="0" bIns="0">
+          <a:bodyPr wrap="square" lIns="0" rIns="0" tIns="0" bIns="0">
             <a:spAutoFit/>
           </a:bodyPr>
           <a:lstStyle/>
@@ -9907,7 +10446,7 @@
             <a:pPr algn="r">
               <a:defRPr sz="1000">
                 <a:solidFill>
-                  <a:srgbClr val="5F5C52"/>
+                  <a:srgbClr val="736E62"/>
                 </a:solidFill>
                 <a:latin typeface="Helvetica Neue"/>
               </a:defRPr>

--- a/Technology_Consultants_Who_to_Send_My_Way.pptx
+++ b/Technology_Consultants_Who_to_Send_My_Way.pptx
@@ -3105,102 +3105,14 @@
       <p:grpSpPr/>
       <p:sp>
         <p:nvSpPr>
-          <p:cNvPr id="2" name="Rectangle 1"/>
-          <p:cNvSpPr/>
-          <p:nvPr/>
-        </p:nvSpPr>
-        <p:spPr>
-          <a:xfrm>
-            <a:off x="0" y="0"/>
-            <a:ext cx="12191695" cy="594360"/>
-          </a:xfrm>
-          <a:prstGeom prst="rect">
-            <a:avLst/>
-          </a:prstGeom>
-          <a:solidFill>
-            <a:srgbClr val="121216"/>
-          </a:solidFill>
-          <a:ln w="12700">
-            <a:solidFill>
-              <a:srgbClr val="26262C"/>
-            </a:solidFill>
-          </a:ln>
-        </p:spPr>
-        <p:style>
-          <a:lnRef idx="1">
-            <a:schemeClr val="accent1"/>
-          </a:lnRef>
-          <a:fillRef idx="3">
-            <a:schemeClr val="accent1"/>
-          </a:fillRef>
-          <a:effectRef idx="2">
-            <a:schemeClr val="accent1"/>
-          </a:effectRef>
-          <a:fontRef idx="minor">
-            <a:schemeClr val="lt1"/>
-          </a:fontRef>
-        </p:style>
-        <p:txBody>
-          <a:bodyPr rtlCol="0" anchor="ctr"/>
-          <a:lstStyle/>
-          <a:p>
-            <a:pPr algn="ctr"/>
-          </a:p>
-        </p:txBody>
-      </p:sp>
-      <p:sp>
-        <p:nvSpPr>
-          <p:cNvPr id="3" name="Rounded Rectangle 2"/>
-          <p:cNvSpPr/>
-          <p:nvPr/>
-        </p:nvSpPr>
-        <p:spPr>
-          <a:xfrm>
-            <a:off x="731520" y="146304"/>
-            <a:ext cx="301752" cy="301752"/>
-          </a:xfrm>
-          <a:prstGeom prst="roundRect">
-            <a:avLst/>
-          </a:prstGeom>
-          <a:solidFill>
-            <a:srgbClr val="2B59D9"/>
-          </a:solidFill>
-          <a:ln>
-            <a:noFill/>
-          </a:ln>
-        </p:spPr>
-        <p:style>
-          <a:lnRef idx="1">
-            <a:schemeClr val="accent1"/>
-          </a:lnRef>
-          <a:fillRef idx="3">
-            <a:schemeClr val="accent1"/>
-          </a:fillRef>
-          <a:effectRef idx="2">
-            <a:schemeClr val="accent1"/>
-          </a:effectRef>
-          <a:fontRef idx="minor">
-            <a:schemeClr val="lt1"/>
-          </a:fontRef>
-        </p:style>
-        <p:txBody>
-          <a:bodyPr rtlCol="0" anchor="ctr"/>
-          <a:lstStyle/>
-          <a:p>
-            <a:pPr algn="ctr"/>
-          </a:p>
-        </p:txBody>
-      </p:sp>
-      <p:sp>
-        <p:nvSpPr>
-          <p:cNvPr id="4" name="TextBox 3"/>
+          <p:cNvPr id="2" name="TextBox 1"/>
           <p:cNvSpPr txBox="1"/>
           <p:nvPr/>
         </p:nvSpPr>
         <p:spPr>
           <a:xfrm>
-            <a:off x="731520" y="128016"/>
-            <a:ext cx="301752" cy="301752"/>
+            <a:off x="731520" y="640080"/>
+            <a:ext cx="10728655" cy="274320"/>
           </a:xfrm>
           <a:prstGeom prst="rect">
             <a:avLst/>
@@ -3213,30 +3125,30 @@
           </a:bodyPr>
           <a:lstStyle/>
           <a:p>
-            <a:pPr algn="ctr">
-              <a:defRPr sz="1600" b="1">
-                <a:solidFill>
-                  <a:srgbClr val="FFFFFF"/>
-                </a:solidFill>
-                <a:latin typeface="Helvetica Neue"/>
-              </a:defRPr>
-            </a:pPr>
-            <a:r>
-              <a:t>›</a:t>
-            </a:r>
-          </a:p>
-        </p:txBody>
-      </p:sp>
-      <p:sp>
-        <p:nvSpPr>
-          <p:cNvPr id="5" name="TextBox 4"/>
+            <a:pPr>
+              <a:defRPr sz="1100" b="1">
+                <a:solidFill>
+                  <a:srgbClr val="2B59D9"/>
+                </a:solidFill>
+                <a:latin typeface="Helvetica Neue"/>
+              </a:defRPr>
+            </a:pPr>
+            <a:r>
+              <a:t>TECHNOLOGY CONSULTANTS  ·  PARTNER REFERRAL GUIDE</a:t>
+            </a:r>
+          </a:p>
+        </p:txBody>
+      </p:sp>
+      <p:sp>
+        <p:nvSpPr>
+          <p:cNvPr id="3" name="TextBox 2"/>
           <p:cNvSpPr txBox="1"/>
           <p:nvPr/>
         </p:nvSpPr>
         <p:spPr>
           <a:xfrm>
-            <a:off x="1143000" y="164592"/>
-            <a:ext cx="3200400" cy="292608"/>
+            <a:off x="731520" y="1005840"/>
+            <a:ext cx="10728655" cy="1280160"/>
           </a:xfrm>
           <a:prstGeom prst="rect">
             <a:avLst/>
@@ -3250,29 +3162,29 @@
           <a:lstStyle/>
           <a:p>
             <a:pPr>
-              <a:defRPr sz="1300" b="1">
-                <a:solidFill>
-                  <a:srgbClr val="FFFFFF"/>
-                </a:solidFill>
-                <a:latin typeface="Helvetica Neue"/>
-              </a:defRPr>
-            </a:pPr>
-            <a:r>
-              <a:t>Technology Consultants</a:t>
-            </a:r>
-          </a:p>
-        </p:txBody>
-      </p:sp>
-      <p:sp>
-        <p:nvSpPr>
-          <p:cNvPr id="6" name="TextBox 5"/>
+              <a:defRPr sz="3600" b="1">
+                <a:solidFill>
+                  <a:srgbClr val="16161A"/>
+                </a:solidFill>
+                <a:latin typeface="Helvetica Neue"/>
+              </a:defRPr>
+            </a:pPr>
+            <a:r>
+              <a:t>We build technology around your people — not instead of them.</a:t>
+            </a:r>
+          </a:p>
+        </p:txBody>
+      </p:sp>
+      <p:sp>
+        <p:nvSpPr>
+          <p:cNvPr id="4" name="TextBox 3"/>
           <p:cNvSpPr txBox="1"/>
           <p:nvPr/>
         </p:nvSpPr>
         <p:spPr>
           <a:xfrm>
-            <a:off x="4572000" y="182880"/>
-            <a:ext cx="5212080" cy="292608"/>
+            <a:off x="731520" y="2377440"/>
+            <a:ext cx="10728655" cy="822960"/>
           </a:xfrm>
           <a:prstGeom prst="rect">
             <a:avLst/>
@@ -3285,340 +3197,30 @@
           </a:bodyPr>
           <a:lstStyle/>
           <a:p>
-            <a:pPr algn="r">
-              <a:defRPr sz="1000">
-                <a:solidFill>
-                  <a:srgbClr val="BEC3CD"/>
-                </a:solidFill>
-                <a:latin typeface="Helvetica Neue"/>
-              </a:defRPr>
-            </a:pPr>
-            <a:r>
-              <a:t>Services   ·   Work   ·   How we work   ·   About   ·   FAQ</a:t>
-            </a:r>
-          </a:p>
-        </p:txBody>
-      </p:sp>
-      <p:sp>
-        <p:nvSpPr>
-          <p:cNvPr id="7" name="Rounded Rectangle 6"/>
+            <a:pPr>
+              <a:defRPr sz="1400">
+                <a:solidFill>
+                  <a:srgbClr val="454337"/>
+                </a:solidFill>
+                <a:latin typeface="Helvetica Neue"/>
+              </a:defRPr>
+            </a:pPr>
+            <a:r>
+              <a:t>We build the software that takes work off your team’s plate — from automated web applications to AI agents that answer phones, read paperwork, and run repetitive jobs with a person in the loop wherever money, trust, or judgment is on the line.</a:t>
+            </a:r>
+          </a:p>
+        </p:txBody>
+      </p:sp>
+      <p:sp>
+        <p:nvSpPr>
+          <p:cNvPr id="5" name="Rounded Rectangle 4"/>
           <p:cNvSpPr/>
           <p:nvPr/>
         </p:nvSpPr>
         <p:spPr>
           <a:xfrm>
-            <a:off x="9966960" y="128016"/>
-            <a:ext cx="1463040" cy="329184"/>
-          </a:xfrm>
-          <a:prstGeom prst="roundRect">
-            <a:avLst/>
-          </a:prstGeom>
-          <a:solidFill>
-            <a:srgbClr val="FFFFFF"/>
-          </a:solidFill>
-          <a:ln>
-            <a:noFill/>
-          </a:ln>
-        </p:spPr>
-        <p:style>
-          <a:lnRef idx="1">
-            <a:schemeClr val="accent1"/>
-          </a:lnRef>
-          <a:fillRef idx="3">
-            <a:schemeClr val="accent1"/>
-          </a:fillRef>
-          <a:effectRef idx="2">
-            <a:schemeClr val="accent1"/>
-          </a:effectRef>
-          <a:fontRef idx="minor">
-            <a:schemeClr val="lt1"/>
-          </a:fontRef>
-        </p:style>
-        <p:txBody>
-          <a:bodyPr rtlCol="0" anchor="ctr"/>
-          <a:lstStyle/>
-          <a:p>
-            <a:pPr algn="ctr"/>
-          </a:p>
-        </p:txBody>
-      </p:sp>
-      <p:sp>
-        <p:nvSpPr>
-          <p:cNvPr id="8" name="TextBox 7"/>
-          <p:cNvSpPr txBox="1"/>
-          <p:nvPr/>
-        </p:nvSpPr>
-        <p:spPr>
-          <a:xfrm>
-            <a:off x="9966960" y="164592"/>
-            <a:ext cx="1463040" cy="274320"/>
-          </a:xfrm>
-          <a:prstGeom prst="rect">
-            <a:avLst/>
-          </a:prstGeom>
-          <a:noFill/>
-        </p:spPr>
-        <p:txBody>
-          <a:bodyPr wrap="square" lIns="0" rIns="0" tIns="0" bIns="0">
-            <a:spAutoFit/>
-          </a:bodyPr>
-          <a:lstStyle/>
-          <a:p>
-            <a:pPr algn="ctr">
-              <a:defRPr sz="1000" b="1">
-                <a:solidFill>
-                  <a:srgbClr val="16161A"/>
-                </a:solidFill>
-                <a:latin typeface="Helvetica Neue"/>
-              </a:defRPr>
-            </a:pPr>
-            <a:r>
-              <a:t>Book a call</a:t>
-            </a:r>
-          </a:p>
-        </p:txBody>
-      </p:sp>
-      <p:sp>
-        <p:nvSpPr>
-          <p:cNvPr id="9" name="TextBox 8"/>
-          <p:cNvSpPr txBox="1"/>
-          <p:nvPr/>
-        </p:nvSpPr>
-        <p:spPr>
-          <a:xfrm>
-            <a:off x="731520" y="868680"/>
-            <a:ext cx="6217920" cy="3931920"/>
-          </a:xfrm>
-          <a:prstGeom prst="rect">
-            <a:avLst/>
-          </a:prstGeom>
-          <a:noFill/>
-        </p:spPr>
-        <p:txBody>
-          <a:bodyPr wrap="square" lIns="0" rIns="0" tIns="0" bIns="0">
-            <a:spAutoFit/>
-          </a:bodyPr>
-          <a:lstStyle/>
-          <a:p>
-            <a:pPr>
-              <a:spcAft>
-                <a:spcPts val="1200"/>
-              </a:spcAft>
-              <a:defRPr sz="950" b="1">
-                <a:solidFill>
-                  <a:srgbClr val="2B59D9"/>
-                </a:solidFill>
-                <a:latin typeface="Helvetica Neue"/>
-              </a:defRPr>
-            </a:pPr>
-            <a:r>
-              <a:t>WEBSITES  ·  AUTOMATION  ·  AI AGENTS    |    ● Booking projects · Q3 2026</a:t>
-            </a:r>
-          </a:p>
-          <a:p>
-            <a:pPr>
-              <a:spcAft>
-                <a:spcPts val="1400"/>
-              </a:spcAft>
-              <a:defRPr sz="3200" b="1">
-                <a:solidFill>
-                  <a:srgbClr val="16161A"/>
-                </a:solidFill>
-                <a:latin typeface="Helvetica Neue"/>
-              </a:defRPr>
-            </a:pPr>
-            <a:r>
-              <a:t>We build technology around your people — not instead of them.</a:t>
-            </a:r>
-          </a:p>
-          <a:p>
-            <a:pPr>
-              <a:spcAft>
-                <a:spcPts val="2000"/>
-              </a:spcAft>
-              <a:defRPr sz="1350">
-                <a:solidFill>
-                  <a:srgbClr val="454337"/>
-                </a:solidFill>
-                <a:latin typeface="Helvetica Neue"/>
-              </a:defRPr>
-            </a:pPr>
-            <a:r>
-              <a:t>We build software that takes work off your team’s plate — from automated web applications to AI agents that answer phones, read paperwork, and run repetitive jobs with a person in the loop wherever money, trust, or judgment is on the line.</a:t>
-            </a:r>
-          </a:p>
-        </p:txBody>
-      </p:sp>
-      <p:sp>
-        <p:nvSpPr>
-          <p:cNvPr id="10" name="Rounded Rectangle 9"/>
-          <p:cNvSpPr/>
-          <p:nvPr/>
-        </p:nvSpPr>
-        <p:spPr>
-          <a:xfrm>
-            <a:off x="731520" y="4160520"/>
-            <a:ext cx="2377440" cy="438912"/>
-          </a:xfrm>
-          <a:prstGeom prst="roundRect">
-            <a:avLst/>
-          </a:prstGeom>
-          <a:solidFill>
-            <a:srgbClr val="16161A"/>
-          </a:solidFill>
-          <a:ln>
-            <a:noFill/>
-          </a:ln>
-        </p:spPr>
-        <p:style>
-          <a:lnRef idx="1">
-            <a:schemeClr val="accent1"/>
-          </a:lnRef>
-          <a:fillRef idx="3">
-            <a:schemeClr val="accent1"/>
-          </a:fillRef>
-          <a:effectRef idx="2">
-            <a:schemeClr val="accent1"/>
-          </a:effectRef>
-          <a:fontRef idx="minor">
-            <a:schemeClr val="lt1"/>
-          </a:fontRef>
-        </p:style>
-        <p:txBody>
-          <a:bodyPr rtlCol="0" anchor="ctr"/>
-          <a:lstStyle/>
-          <a:p>
-            <a:pPr algn="ctr"/>
-          </a:p>
-        </p:txBody>
-      </p:sp>
-      <p:sp>
-        <p:nvSpPr>
-          <p:cNvPr id="11" name="TextBox 10"/>
-          <p:cNvSpPr txBox="1"/>
-          <p:nvPr/>
-        </p:nvSpPr>
-        <p:spPr>
-          <a:xfrm>
-            <a:off x="731520" y="4251960"/>
-            <a:ext cx="2377440" cy="320040"/>
-          </a:xfrm>
-          <a:prstGeom prst="rect">
-            <a:avLst/>
-          </a:prstGeom>
-          <a:noFill/>
-        </p:spPr>
-        <p:txBody>
-          <a:bodyPr wrap="square" lIns="0" rIns="0" tIns="0" bIns="0">
-            <a:spAutoFit/>
-          </a:bodyPr>
-          <a:lstStyle/>
-          <a:p>
-            <a:pPr algn="ctr">
-              <a:defRPr sz="1150" b="1">
-                <a:solidFill>
-                  <a:srgbClr val="FFFFFF"/>
-                </a:solidFill>
-                <a:latin typeface="Helvetica Neue"/>
-              </a:defRPr>
-            </a:pPr>
-            <a:r>
-              <a:t>Book a 30-min call →</a:t>
-            </a:r>
-          </a:p>
-        </p:txBody>
-      </p:sp>
-      <p:sp>
-        <p:nvSpPr>
-          <p:cNvPr id="12" name="Rounded Rectangle 11"/>
-          <p:cNvSpPr/>
-          <p:nvPr/>
-        </p:nvSpPr>
-        <p:spPr>
-          <a:xfrm>
-            <a:off x="3246120" y="4160520"/>
-            <a:ext cx="2286000" cy="438912"/>
-          </a:xfrm>
-          <a:prstGeom prst="roundRect">
-            <a:avLst/>
-          </a:prstGeom>
-          <a:solidFill>
-            <a:srgbClr val="FBFAF5"/>
-          </a:solidFill>
-          <a:ln w="12700">
-            <a:solidFill>
-              <a:srgbClr val="E2DDD0"/>
-            </a:solidFill>
-          </a:ln>
-        </p:spPr>
-        <p:style>
-          <a:lnRef idx="1">
-            <a:schemeClr val="accent1"/>
-          </a:lnRef>
-          <a:fillRef idx="3">
-            <a:schemeClr val="accent1"/>
-          </a:fillRef>
-          <a:effectRef idx="2">
-            <a:schemeClr val="accent1"/>
-          </a:effectRef>
-          <a:fontRef idx="minor">
-            <a:schemeClr val="lt1"/>
-          </a:fontRef>
-        </p:style>
-        <p:txBody>
-          <a:bodyPr rtlCol="0" anchor="ctr"/>
-          <a:lstStyle/>
-          <a:p>
-            <a:pPr algn="ctr"/>
-          </a:p>
-        </p:txBody>
-      </p:sp>
-      <p:sp>
-        <p:nvSpPr>
-          <p:cNvPr id="13" name="TextBox 12"/>
-          <p:cNvSpPr txBox="1"/>
-          <p:nvPr/>
-        </p:nvSpPr>
-        <p:spPr>
-          <a:xfrm>
-            <a:off x="3246120" y="4251960"/>
-            <a:ext cx="2286000" cy="320040"/>
-          </a:xfrm>
-          <a:prstGeom prst="rect">
-            <a:avLst/>
-          </a:prstGeom>
-          <a:noFill/>
-        </p:spPr>
-        <p:txBody>
-          <a:bodyPr wrap="square" lIns="0" rIns="0" tIns="0" bIns="0">
-            <a:spAutoFit/>
-          </a:bodyPr>
-          <a:lstStyle/>
-          <a:p>
-            <a:pPr algn="ctr">
-              <a:defRPr sz="1150" b="1">
-                <a:solidFill>
-                  <a:srgbClr val="16161A"/>
-                </a:solidFill>
-                <a:latin typeface="Helvetica Neue"/>
-              </a:defRPr>
-            </a:pPr>
-            <a:r>
-              <a:t>Referral Guide</a:t>
-            </a:r>
-          </a:p>
-        </p:txBody>
-      </p:sp>
-      <p:sp>
-        <p:nvSpPr>
-          <p:cNvPr id="14" name="Rounded Rectangle 13"/>
-          <p:cNvSpPr/>
-          <p:nvPr/>
-        </p:nvSpPr>
-        <p:spPr>
-          <a:xfrm>
-            <a:off x="7315200" y="868680"/>
-            <a:ext cx="4144975" cy="1920240"/>
+            <a:off x="731520" y="3337560"/>
+            <a:ext cx="5157216" cy="1691640"/>
           </a:xfrm>
           <a:prstGeom prst="roundRect">
             <a:avLst/>
@@ -3656,14 +3258,14 @@
       </p:sp>
       <p:sp>
         <p:nvSpPr>
-          <p:cNvPr id="15" name="TextBox 14"/>
+          <p:cNvPr id="6" name="TextBox 5"/>
           <p:cNvSpPr txBox="1"/>
           <p:nvPr/>
         </p:nvSpPr>
         <p:spPr>
           <a:xfrm>
-            <a:off x="7589520" y="1051560"/>
-            <a:ext cx="3596335" cy="1554480"/>
+            <a:off x="1005840" y="3538728"/>
+            <a:ext cx="4608576" cy="1289304"/>
           </a:xfrm>
           <a:prstGeom prst="rect">
             <a:avLst/>
@@ -3678,9 +3280,9 @@
           <a:p>
             <a:pPr>
               <a:spcAft>
-                <a:spcPts val="800"/>
+                <a:spcPts val="600"/>
               </a:spcAft>
-              <a:defRPr sz="1000" b="1">
+              <a:defRPr sz="1050" b="1">
                 <a:solidFill>
                   <a:srgbClr val="2B59D9"/>
                 </a:solidFill>
@@ -3688,15 +3290,12 @@
               </a:defRPr>
             </a:pPr>
             <a:r>
-              <a:t>● INVOICE REVIEW</a:t>
-            </a:r>
-          </a:p>
-          <a:p>
-            <a:pPr>
-              <a:spcAft>
-                <a:spcPts val="1000"/>
-              </a:spcAft>
-              <a:defRPr sz="1500" b="1">
+              <a:t>CORE CAPABILITIES</a:t>
+            </a:r>
+          </a:p>
+          <a:p>
+            <a:pPr>
+              <a:defRPr sz="1250">
                 <a:solidFill>
                   <a:srgbClr val="16161A"/>
                 </a:solidFill>
@@ -3704,70 +3303,21 @@
               </a:defRPr>
             </a:pPr>
             <a:r>
-              <a:t>245 cleared automatically</a:t>
-            </a:r>
-          </a:p>
-          <a:p>
-            <a:pPr>
-              <a:defRPr sz="1100" b="1">
-                <a:solidFill>
-                  <a:srgbClr val="D99B26"/>
-                </a:solidFill>
-                <a:latin typeface="Helvetica Neue"/>
-              </a:defRPr>
-            </a:pPr>
-            <a:r>
-              <a:t>2 NEED YOU</a:t>
-            </a:r>
-          </a:p>
-        </p:txBody>
-      </p:sp>
-      <p:sp>
-        <p:nvSpPr>
-          <p:cNvPr id="16" name="TextBox 15"/>
-          <p:cNvSpPr txBox="1"/>
-          <p:nvPr/>
-        </p:nvSpPr>
-        <p:spPr>
-          <a:xfrm>
-            <a:off x="7315200" y="2834640"/>
-            <a:ext cx="4144975" cy="548640"/>
-          </a:xfrm>
-          <a:prstGeom prst="rect">
-            <a:avLst/>
-          </a:prstGeom>
-          <a:noFill/>
-        </p:spPr>
-        <p:txBody>
-          <a:bodyPr wrap="square" lIns="0" rIns="0" tIns="0" bIns="0">
-            <a:spAutoFit/>
-          </a:bodyPr>
-          <a:lstStyle/>
-          <a:p>
-            <a:pPr>
-              <a:defRPr sz="1050">
-                <a:solidFill>
-                  <a:srgbClr val="736E62"/>
-                </a:solidFill>
-                <a:latin typeface="Helvetica Neue"/>
-              </a:defRPr>
-            </a:pPr>
-            <a:r>
-              <a:t>The agent clears the routine work. Calls and tasks that need judgment stay with a person.</a:t>
-            </a:r>
-          </a:p>
-        </p:txBody>
-      </p:sp>
-      <p:sp>
-        <p:nvSpPr>
-          <p:cNvPr id="17" name="Rounded Rectangle 16"/>
+              <a:t>Custom React &amp; TypeScript Web Apps  ·  Workday Finance &amp; Adaptive Planning Integrations  ·  Human-in-the-Loop (HITL) AI Agents</a:t>
+            </a:r>
+          </a:p>
+        </p:txBody>
+      </p:sp>
+      <p:sp>
+        <p:nvSpPr>
+          <p:cNvPr id="7" name="Rounded Rectangle 6"/>
           <p:cNvSpPr/>
           <p:nvPr/>
         </p:nvSpPr>
         <p:spPr>
           <a:xfrm>
-            <a:off x="7315200" y="3520440"/>
-            <a:ext cx="4144975" cy="1078992"/>
+            <a:off x="6300216" y="3337560"/>
+            <a:ext cx="5157216" cy="1691640"/>
           </a:xfrm>
           <a:prstGeom prst="roundRect">
             <a:avLst/>
@@ -3805,14 +3355,14 @@
       </p:sp>
       <p:sp>
         <p:nvSpPr>
-          <p:cNvPr id="18" name="TextBox 17"/>
+          <p:cNvPr id="8" name="TextBox 7"/>
           <p:cNvSpPr txBox="1"/>
           <p:nvPr/>
         </p:nvSpPr>
         <p:spPr>
           <a:xfrm>
-            <a:off x="7543800" y="3657600"/>
-            <a:ext cx="3687775" cy="822960"/>
+            <a:off x="6574536" y="3538728"/>
+            <a:ext cx="4608576" cy="1289304"/>
           </a:xfrm>
           <a:prstGeom prst="rect">
             <a:avLst/>
@@ -3826,7 +3376,26 @@
           <a:lstStyle/>
           <a:p>
             <a:pPr>
-              <a:defRPr sz="1400" b="1">
+              <a:spcAft>
+                <a:spcPts val="600"/>
+              </a:spcAft>
+              <a:defRPr sz="1050" b="1">
+                <a:solidFill>
+                  <a:srgbClr val="D99B26"/>
+                </a:solidFill>
+                <a:latin typeface="Helvetica Neue"/>
+              </a:defRPr>
+            </a:pPr>
+            <a:r>
+              <a:t>PRACTICE LEADERSHIP</a:t>
+            </a:r>
+          </a:p>
+          <a:p>
+            <a:pPr>
+              <a:spcAft>
+                <a:spcPts val="400"/>
+              </a:spcAft>
+              <a:defRPr sz="1300" b="1">
                 <a:solidFill>
                   <a:srgbClr val="16161A"/>
                 </a:solidFill>
@@ -3834,50 +3403,38 @@
               </a:defRPr>
             </a:pPr>
             <a:r>
-              <a:t>Roberto Guido</a:t>
-            </a:r>
-          </a:p>
-          <a:p>
-            <a:pPr>
-              <a:defRPr sz="1100">
-                <a:solidFill>
-                  <a:srgbClr val="2B59D9"/>
-                </a:solidFill>
-                <a:latin typeface="Helvetica Neue"/>
-              </a:defRPr>
-            </a:pPr>
-            <a:r>
-              <a:t>Founder &amp; Principal Engineer</a:t>
-            </a:r>
-          </a:p>
-          <a:p>
-            <a:pPr>
-              <a:spcBef>
-                <a:spcPts val="200"/>
-              </a:spcBef>
-              <a:defRPr sz="1000">
-                <a:solidFill>
-                  <a:srgbClr val="736E62"/>
-                </a:solidFill>
-                <a:latin typeface="Helvetica Neue"/>
-              </a:defRPr>
-            </a:pPr>
-            <a:r>
-              <a:t>BS Electrical Engineering (UC San Diego) · MBA (NYU Stern)</a:t>
-            </a:r>
-          </a:p>
-        </p:txBody>
-      </p:sp>
-      <p:sp>
-        <p:nvSpPr>
-          <p:cNvPr id="19" name="Rounded Rectangle 18"/>
+              <a:t>Roberto Guido  —  Founder &amp; Principal Engineer</a:t>
+            </a:r>
+          </a:p>
+          <a:p>
+            <a:pPr>
+              <a:defRPr sz="1150">
+                <a:solidFill>
+                  <a:srgbClr val="454337"/>
+                </a:solidFill>
+                <a:latin typeface="Helvetica Neue"/>
+              </a:defRPr>
+            </a:pPr>
+            <a:r>
+              <a:t>BS Electrical Engineering (UC San Diego)  ·  MBA (NYU Stern)</a:t>
+            </a:r>
+            <a:br/>
+            <a:r>
+              <a:t>Operating in San Diego, CA &amp; Tijuana, MX</a:t>
+            </a:r>
+          </a:p>
+        </p:txBody>
+      </p:sp>
+      <p:sp>
+        <p:nvSpPr>
+          <p:cNvPr id="9" name="Rounded Rectangle 8"/>
           <p:cNvSpPr/>
           <p:nvPr/>
         </p:nvSpPr>
         <p:spPr>
           <a:xfrm>
-            <a:off x="731520" y="4892040"/>
-            <a:ext cx="2514600" cy="1188720"/>
+            <a:off x="731520" y="5166360"/>
+            <a:ext cx="2514600" cy="960120"/>
           </a:xfrm>
           <a:prstGeom prst="roundRect">
             <a:avLst/>
@@ -3915,14 +3472,14 @@
       </p:sp>
       <p:sp>
         <p:nvSpPr>
-          <p:cNvPr id="20" name="TextBox 19"/>
+          <p:cNvPr id="10" name="TextBox 9"/>
           <p:cNvSpPr txBox="1"/>
           <p:nvPr/>
         </p:nvSpPr>
         <p:spPr>
           <a:xfrm>
-            <a:off x="914400" y="5010912"/>
-            <a:ext cx="2148840" cy="960120"/>
+            <a:off x="896112" y="5257800"/>
+            <a:ext cx="2185416" cy="777240"/>
           </a:xfrm>
           <a:prstGeom prst="rect">
             <a:avLst/>
@@ -3936,10 +3493,7 @@
           <a:lstStyle/>
           <a:p>
             <a:pPr>
-              <a:spcAft>
-                <a:spcPts val="400"/>
-              </a:spcAft>
-              <a:defRPr sz="1300" b="1">
+              <a:defRPr sz="1200" b="1">
                 <a:solidFill>
                   <a:srgbClr val="16161A"/>
                 </a:solidFill>
@@ -3952,7 +3506,10 @@
           </a:p>
           <a:p>
             <a:pPr>
-              <a:defRPr sz="1050">
+              <a:spcBef>
+                <a:spcPts val="200"/>
+              </a:spcBef>
+              <a:defRPr sz="1000">
                 <a:solidFill>
                   <a:srgbClr val="454337"/>
                 </a:solidFill>
@@ -3960,21 +3517,21 @@
               </a:defRPr>
             </a:pPr>
             <a:r>
-              <a:t>Real users today on our self-developed products.</a:t>
-            </a:r>
-          </a:p>
-        </p:txBody>
-      </p:sp>
-      <p:sp>
-        <p:nvSpPr>
-          <p:cNvPr id="21" name="Rounded Rectangle 20"/>
+              <a:t>Real users today on self-developed products.</a:t>
+            </a:r>
+          </a:p>
+        </p:txBody>
+      </p:sp>
+      <p:sp>
+        <p:nvSpPr>
+          <p:cNvPr id="11" name="Rounded Rectangle 10"/>
           <p:cNvSpPr/>
           <p:nvPr/>
         </p:nvSpPr>
         <p:spPr>
           <a:xfrm>
-            <a:off x="3429000" y="4892040"/>
-            <a:ext cx="2514600" cy="1188720"/>
+            <a:off x="3429000" y="5166360"/>
+            <a:ext cx="2514600" cy="960120"/>
           </a:xfrm>
           <a:prstGeom prst="roundRect">
             <a:avLst/>
@@ -4012,14 +3569,14 @@
       </p:sp>
       <p:sp>
         <p:nvSpPr>
-          <p:cNvPr id="22" name="TextBox 21"/>
+          <p:cNvPr id="12" name="TextBox 11"/>
           <p:cNvSpPr txBox="1"/>
           <p:nvPr/>
         </p:nvSpPr>
         <p:spPr>
           <a:xfrm>
-            <a:off x="3611880" y="5010912"/>
-            <a:ext cx="2148840" cy="960120"/>
+            <a:off x="3593592" y="5257800"/>
+            <a:ext cx="2185416" cy="777240"/>
           </a:xfrm>
           <a:prstGeom prst="rect">
             <a:avLst/>
@@ -4033,10 +3590,7 @@
           <a:lstStyle/>
           <a:p>
             <a:pPr>
-              <a:spcAft>
-                <a:spcPts val="400"/>
-              </a:spcAft>
-              <a:defRPr sz="1300" b="1">
+              <a:defRPr sz="1200" b="1">
                 <a:solidFill>
                   <a:srgbClr val="16161A"/>
                 </a:solidFill>
@@ -4049,7 +3603,10 @@
           </a:p>
           <a:p>
             <a:pPr>
-              <a:defRPr sz="1050">
+              <a:spcBef>
+                <a:spcPts val="200"/>
+              </a:spcBef>
+              <a:defRPr sz="1000">
                 <a:solidFill>
                   <a:srgbClr val="454337"/>
                 </a:solidFill>
@@ -4064,14 +3621,14 @@
       </p:sp>
       <p:sp>
         <p:nvSpPr>
-          <p:cNvPr id="23" name="Rounded Rectangle 22"/>
+          <p:cNvPr id="13" name="Rounded Rectangle 12"/>
           <p:cNvSpPr/>
           <p:nvPr/>
         </p:nvSpPr>
         <p:spPr>
           <a:xfrm>
-            <a:off x="6126480" y="4892040"/>
-            <a:ext cx="2514600" cy="1188720"/>
+            <a:off x="6126480" y="5166360"/>
+            <a:ext cx="2514600" cy="960120"/>
           </a:xfrm>
           <a:prstGeom prst="roundRect">
             <a:avLst/>
@@ -4109,14 +3666,14 @@
       </p:sp>
       <p:sp>
         <p:nvSpPr>
-          <p:cNvPr id="24" name="TextBox 23"/>
+          <p:cNvPr id="14" name="TextBox 13"/>
           <p:cNvSpPr txBox="1"/>
           <p:nvPr/>
         </p:nvSpPr>
         <p:spPr>
           <a:xfrm>
-            <a:off x="6309360" y="5010912"/>
-            <a:ext cx="2148840" cy="960120"/>
+            <a:off x="6291072" y="5257800"/>
+            <a:ext cx="2185416" cy="777240"/>
           </a:xfrm>
           <a:prstGeom prst="rect">
             <a:avLst/>
@@ -4130,10 +3687,7 @@
           <a:lstStyle/>
           <a:p>
             <a:pPr>
-              <a:spcAft>
-                <a:spcPts val="400"/>
-              </a:spcAft>
-              <a:defRPr sz="1300" b="1">
+              <a:defRPr sz="1200" b="1">
                 <a:solidFill>
                   <a:srgbClr val="16161A"/>
                 </a:solidFill>
@@ -4146,7 +3700,10 @@
           </a:p>
           <a:p>
             <a:pPr>
-              <a:defRPr sz="1050">
+              <a:spcBef>
+                <a:spcPts val="200"/>
+              </a:spcBef>
+              <a:defRPr sz="1000">
                 <a:solidFill>
                   <a:srgbClr val="454337"/>
                 </a:solidFill>
@@ -4161,14 +3718,14 @@
       </p:sp>
       <p:sp>
         <p:nvSpPr>
-          <p:cNvPr id="25" name="Rounded Rectangle 24"/>
+          <p:cNvPr id="15" name="Rounded Rectangle 14"/>
           <p:cNvSpPr/>
           <p:nvPr/>
         </p:nvSpPr>
         <p:spPr>
           <a:xfrm>
-            <a:off x="8823960" y="4892040"/>
-            <a:ext cx="2514600" cy="1188720"/>
+            <a:off x="8823960" y="5166360"/>
+            <a:ext cx="2514600" cy="960120"/>
           </a:xfrm>
           <a:prstGeom prst="roundRect">
             <a:avLst/>
@@ -4206,14 +3763,14 @@
       </p:sp>
       <p:sp>
         <p:nvSpPr>
-          <p:cNvPr id="26" name="TextBox 25"/>
+          <p:cNvPr id="16" name="TextBox 15"/>
           <p:cNvSpPr txBox="1"/>
           <p:nvPr/>
         </p:nvSpPr>
         <p:spPr>
           <a:xfrm>
-            <a:off x="9006840" y="5010912"/>
-            <a:ext cx="2148840" cy="960120"/>
+            <a:off x="8988552" y="5257800"/>
+            <a:ext cx="2185416" cy="777240"/>
           </a:xfrm>
           <a:prstGeom prst="rect">
             <a:avLst/>
@@ -4227,10 +3784,7 @@
           <a:lstStyle/>
           <a:p>
             <a:pPr>
-              <a:spcAft>
-                <a:spcPts val="400"/>
-              </a:spcAft>
-              <a:defRPr sz="1300" b="1">
+              <a:defRPr sz="1200" b="1">
                 <a:solidFill>
                   <a:srgbClr val="16161A"/>
                 </a:solidFill>
@@ -4243,7 +3797,10 @@
           </a:p>
           <a:p>
             <a:pPr>
-              <a:defRPr sz="1050">
+              <a:spcBef>
+                <a:spcPts val="200"/>
+              </a:spcBef>
+              <a:defRPr sz="1000">
                 <a:solidFill>
                   <a:srgbClr val="454337"/>
                 </a:solidFill>
@@ -4251,20 +3808,20 @@
               </a:defRPr>
             </a:pPr>
             <a:r>
-              <a:t>Interfaces &amp; automations: same engineers.</a:t>
-            </a:r>
-          </a:p>
-        </p:txBody>
-      </p:sp>
-      <p:sp>
-        <p:nvSpPr>
-          <p:cNvPr id="27" name="Rectangle 26"/>
+              <a:t>Interfaces &amp; automations: same stack.</a:t>
+            </a:r>
+          </a:p>
+        </p:txBody>
+      </p:sp>
+      <p:sp>
+        <p:nvSpPr>
+          <p:cNvPr id="17" name="Rectangle 16"/>
           <p:cNvSpPr/>
           <p:nvPr/>
         </p:nvSpPr>
         <p:spPr>
           <a:xfrm>
-            <a:off x="731520" y="6327648"/>
+            <a:off x="731520" y="6263640"/>
             <a:ext cx="10728655" cy="12700"/>
           </a:xfrm>
           <a:prstGeom prst="rect">
@@ -4301,13 +3858,13 @@
       </p:sp>
       <p:sp>
         <p:nvSpPr>
-          <p:cNvPr id="28" name="TextBox 27"/>
+          <p:cNvPr id="18" name="TextBox 17"/>
           <p:cNvSpPr txBox="1"/>
           <p:nvPr/>
         </p:nvSpPr>
         <p:spPr>
           <a:xfrm>
-            <a:off x="731520" y="6400800"/>
+            <a:off x="731520" y="6355080"/>
             <a:ext cx="7315200" cy="320040"/>
           </a:xfrm>
           <a:prstGeom prst="rect">
@@ -4330,20 +3887,20 @@
               </a:defRPr>
             </a:pPr>
             <a:r>
-              <a:t>technologyconsultants.ventures  ·  San Diego · Tijuana</a:t>
-            </a:r>
-          </a:p>
-        </p:txBody>
-      </p:sp>
-      <p:sp>
-        <p:nvSpPr>
-          <p:cNvPr id="29" name="TextBox 28"/>
+              <a:t>Technology Consultants  ·  technologyconsultants.ventures  ·  San Diego &amp; Tijuana</a:t>
+            </a:r>
+          </a:p>
+        </p:txBody>
+      </p:sp>
+      <p:sp>
+        <p:nvSpPr>
+          <p:cNvPr id="19" name="TextBox 18"/>
           <p:cNvSpPr txBox="1"/>
           <p:nvPr/>
         </p:nvSpPr>
         <p:spPr>
           <a:xfrm>
-            <a:off x="9631375" y="6400800"/>
+            <a:off x="9631375" y="6355080"/>
             <a:ext cx="1828800" cy="320040"/>
           </a:xfrm>
           <a:prstGeom prst="rect">
@@ -4399,102 +3956,14 @@
       <p:grpSpPr/>
       <p:sp>
         <p:nvSpPr>
-          <p:cNvPr id="2" name="Rectangle 1"/>
-          <p:cNvSpPr/>
-          <p:nvPr/>
-        </p:nvSpPr>
-        <p:spPr>
-          <a:xfrm>
-            <a:off x="0" y="0"/>
-            <a:ext cx="12191695" cy="594360"/>
-          </a:xfrm>
-          <a:prstGeom prst="rect">
-            <a:avLst/>
-          </a:prstGeom>
-          <a:solidFill>
-            <a:srgbClr val="121216"/>
-          </a:solidFill>
-          <a:ln w="12700">
-            <a:solidFill>
-              <a:srgbClr val="26262C"/>
-            </a:solidFill>
-          </a:ln>
-        </p:spPr>
-        <p:style>
-          <a:lnRef idx="1">
-            <a:schemeClr val="accent1"/>
-          </a:lnRef>
-          <a:fillRef idx="3">
-            <a:schemeClr val="accent1"/>
-          </a:fillRef>
-          <a:effectRef idx="2">
-            <a:schemeClr val="accent1"/>
-          </a:effectRef>
-          <a:fontRef idx="minor">
-            <a:schemeClr val="lt1"/>
-          </a:fontRef>
-        </p:style>
-        <p:txBody>
-          <a:bodyPr rtlCol="0" anchor="ctr"/>
-          <a:lstStyle/>
-          <a:p>
-            <a:pPr algn="ctr"/>
-          </a:p>
-        </p:txBody>
-      </p:sp>
-      <p:sp>
-        <p:nvSpPr>
-          <p:cNvPr id="3" name="Rounded Rectangle 2"/>
-          <p:cNvSpPr/>
-          <p:nvPr/>
-        </p:nvSpPr>
-        <p:spPr>
-          <a:xfrm>
-            <a:off x="731520" y="146304"/>
-            <a:ext cx="301752" cy="301752"/>
-          </a:xfrm>
-          <a:prstGeom prst="roundRect">
-            <a:avLst/>
-          </a:prstGeom>
-          <a:solidFill>
-            <a:srgbClr val="2B59D9"/>
-          </a:solidFill>
-          <a:ln>
-            <a:noFill/>
-          </a:ln>
-        </p:spPr>
-        <p:style>
-          <a:lnRef idx="1">
-            <a:schemeClr val="accent1"/>
-          </a:lnRef>
-          <a:fillRef idx="3">
-            <a:schemeClr val="accent1"/>
-          </a:fillRef>
-          <a:effectRef idx="2">
-            <a:schemeClr val="accent1"/>
-          </a:effectRef>
-          <a:fontRef idx="minor">
-            <a:schemeClr val="lt1"/>
-          </a:fontRef>
-        </p:style>
-        <p:txBody>
-          <a:bodyPr rtlCol="0" anchor="ctr"/>
-          <a:lstStyle/>
-          <a:p>
-            <a:pPr algn="ctr"/>
-          </a:p>
-        </p:txBody>
-      </p:sp>
-      <p:sp>
-        <p:nvSpPr>
-          <p:cNvPr id="4" name="TextBox 3"/>
+          <p:cNvPr id="2" name="TextBox 1"/>
           <p:cNvSpPr txBox="1"/>
           <p:nvPr/>
         </p:nvSpPr>
         <p:spPr>
           <a:xfrm>
-            <a:off x="731520" y="128016"/>
-            <a:ext cx="301752" cy="301752"/>
+            <a:off x="731520" y="502920"/>
+            <a:ext cx="10728655" cy="228600"/>
           </a:xfrm>
           <a:prstGeom prst="rect">
             <a:avLst/>
@@ -4507,30 +3976,30 @@
           </a:bodyPr>
           <a:lstStyle/>
           <a:p>
-            <a:pPr algn="ctr">
-              <a:defRPr sz="1600" b="1">
-                <a:solidFill>
-                  <a:srgbClr val="FFFFFF"/>
-                </a:solidFill>
-                <a:latin typeface="Helvetica Neue"/>
-              </a:defRPr>
-            </a:pPr>
-            <a:r>
-              <a:t>›</a:t>
-            </a:r>
-          </a:p>
-        </p:txBody>
-      </p:sp>
-      <p:sp>
-        <p:nvSpPr>
-          <p:cNvPr id="5" name="TextBox 4"/>
+            <a:pPr>
+              <a:defRPr sz="1050" b="1">
+                <a:solidFill>
+                  <a:srgbClr val="2B59D9"/>
+                </a:solidFill>
+                <a:latin typeface="Helvetica Neue"/>
+              </a:defRPr>
+            </a:pPr>
+            <a:r>
+              <a:t>SERVICES &amp; CAPABILITIES</a:t>
+            </a:r>
+          </a:p>
+        </p:txBody>
+      </p:sp>
+      <p:sp>
+        <p:nvSpPr>
+          <p:cNvPr id="3" name="TextBox 2"/>
           <p:cNvSpPr txBox="1"/>
           <p:nvPr/>
         </p:nvSpPr>
         <p:spPr>
           <a:xfrm>
-            <a:off x="1143000" y="164592"/>
-            <a:ext cx="3200400" cy="292608"/>
+            <a:off x="731520" y="777240"/>
+            <a:ext cx="10728655" cy="685800"/>
           </a:xfrm>
           <a:prstGeom prst="rect">
             <a:avLst/>
@@ -4544,216 +4013,29 @@
           <a:lstStyle/>
           <a:p>
             <a:pPr>
-              <a:defRPr sz="1300" b="1">
-                <a:solidFill>
-                  <a:srgbClr val="FFFFFF"/>
-                </a:solidFill>
-                <a:latin typeface="Helvetica Neue"/>
-              </a:defRPr>
-            </a:pPr>
-            <a:r>
-              <a:t>Technology Consultants</a:t>
-            </a:r>
-          </a:p>
-        </p:txBody>
-      </p:sp>
-      <p:sp>
-        <p:nvSpPr>
-          <p:cNvPr id="6" name="TextBox 5"/>
-          <p:cNvSpPr txBox="1"/>
-          <p:nvPr/>
-        </p:nvSpPr>
-        <p:spPr>
-          <a:xfrm>
-            <a:off x="4572000" y="182880"/>
-            <a:ext cx="5212080" cy="292608"/>
-          </a:xfrm>
-          <a:prstGeom prst="rect">
-            <a:avLst/>
-          </a:prstGeom>
-          <a:noFill/>
-        </p:spPr>
-        <p:txBody>
-          <a:bodyPr wrap="square" lIns="0" rIns="0" tIns="0" bIns="0">
-            <a:spAutoFit/>
-          </a:bodyPr>
-          <a:lstStyle/>
-          <a:p>
-            <a:pPr algn="r">
-              <a:defRPr sz="1000">
-                <a:solidFill>
-                  <a:srgbClr val="BEC3CD"/>
-                </a:solidFill>
-                <a:latin typeface="Helvetica Neue"/>
-              </a:defRPr>
-            </a:pPr>
-            <a:r>
-              <a:t>Services   ·   Work   ·   How we work   ·   About   ·   FAQ</a:t>
-            </a:r>
-          </a:p>
-        </p:txBody>
-      </p:sp>
-      <p:sp>
-        <p:nvSpPr>
-          <p:cNvPr id="7" name="Rounded Rectangle 6"/>
+              <a:defRPr sz="2600" b="1">
+                <a:solidFill>
+                  <a:srgbClr val="16161A"/>
+                </a:solidFill>
+                <a:latin typeface="Helvetica Neue"/>
+              </a:defRPr>
+            </a:pPr>
+            <a:r>
+              <a:t>Bridging Engineering Discipline with Business Outcomes</a:t>
+            </a:r>
+          </a:p>
+        </p:txBody>
+      </p:sp>
+      <p:sp>
+        <p:nvSpPr>
+          <p:cNvPr id="4" name="Rounded Rectangle 3"/>
           <p:cNvSpPr/>
           <p:nvPr/>
         </p:nvSpPr>
         <p:spPr>
           <a:xfrm>
-            <a:off x="9966960" y="128016"/>
-            <a:ext cx="1463040" cy="329184"/>
-          </a:xfrm>
-          <a:prstGeom prst="roundRect">
-            <a:avLst/>
-          </a:prstGeom>
-          <a:solidFill>
-            <a:srgbClr val="FFFFFF"/>
-          </a:solidFill>
-          <a:ln>
-            <a:noFill/>
-          </a:ln>
-        </p:spPr>
-        <p:style>
-          <a:lnRef idx="1">
-            <a:schemeClr val="accent1"/>
-          </a:lnRef>
-          <a:fillRef idx="3">
-            <a:schemeClr val="accent1"/>
-          </a:fillRef>
-          <a:effectRef idx="2">
-            <a:schemeClr val="accent1"/>
-          </a:effectRef>
-          <a:fontRef idx="minor">
-            <a:schemeClr val="lt1"/>
-          </a:fontRef>
-        </p:style>
-        <p:txBody>
-          <a:bodyPr rtlCol="0" anchor="ctr"/>
-          <a:lstStyle/>
-          <a:p>
-            <a:pPr algn="ctr"/>
-          </a:p>
-        </p:txBody>
-      </p:sp>
-      <p:sp>
-        <p:nvSpPr>
-          <p:cNvPr id="8" name="TextBox 7"/>
-          <p:cNvSpPr txBox="1"/>
-          <p:nvPr/>
-        </p:nvSpPr>
-        <p:spPr>
-          <a:xfrm>
-            <a:off x="9966960" y="164592"/>
-            <a:ext cx="1463040" cy="274320"/>
-          </a:xfrm>
-          <a:prstGeom prst="rect">
-            <a:avLst/>
-          </a:prstGeom>
-          <a:noFill/>
-        </p:spPr>
-        <p:txBody>
-          <a:bodyPr wrap="square" lIns="0" rIns="0" tIns="0" bIns="0">
-            <a:spAutoFit/>
-          </a:bodyPr>
-          <a:lstStyle/>
-          <a:p>
-            <a:pPr algn="ctr">
-              <a:defRPr sz="1000" b="1">
-                <a:solidFill>
-                  <a:srgbClr val="16161A"/>
-                </a:solidFill>
-                <a:latin typeface="Helvetica Neue"/>
-              </a:defRPr>
-            </a:pPr>
-            <a:r>
-              <a:t>Book a call</a:t>
-            </a:r>
-          </a:p>
-        </p:txBody>
-      </p:sp>
-      <p:sp>
-        <p:nvSpPr>
-          <p:cNvPr id="9" name="TextBox 8"/>
-          <p:cNvSpPr txBox="1"/>
-          <p:nvPr/>
-        </p:nvSpPr>
-        <p:spPr>
-          <a:xfrm>
-            <a:off x="731520" y="777240"/>
-            <a:ext cx="10728655" cy="228600"/>
-          </a:xfrm>
-          <a:prstGeom prst="rect">
-            <a:avLst/>
-          </a:prstGeom>
-          <a:noFill/>
-        </p:spPr>
-        <p:txBody>
-          <a:bodyPr wrap="square" lIns="0" rIns="0" tIns="0" bIns="0">
-            <a:spAutoFit/>
-          </a:bodyPr>
-          <a:lstStyle/>
-          <a:p>
-            <a:pPr>
-              <a:defRPr sz="1000" b="1">
-                <a:solidFill>
-                  <a:srgbClr val="2B59D9"/>
-                </a:solidFill>
-                <a:latin typeface="Helvetica Neue"/>
-              </a:defRPr>
-            </a:pPr>
-            <a:r>
-              <a:t>SERVICES &amp; CAPABILITIES</a:t>
-            </a:r>
-          </a:p>
-        </p:txBody>
-      </p:sp>
-      <p:sp>
-        <p:nvSpPr>
-          <p:cNvPr id="10" name="TextBox 9"/>
-          <p:cNvSpPr txBox="1"/>
-          <p:nvPr/>
-        </p:nvSpPr>
-        <p:spPr>
-          <a:xfrm>
-            <a:off x="731520" y="1024128"/>
-            <a:ext cx="10728655" cy="640080"/>
-          </a:xfrm>
-          <a:prstGeom prst="rect">
-            <a:avLst/>
-          </a:prstGeom>
-          <a:noFill/>
-        </p:spPr>
-        <p:txBody>
-          <a:bodyPr wrap="square" lIns="0" rIns="0" tIns="0" bIns="0">
-            <a:spAutoFit/>
-          </a:bodyPr>
-          <a:lstStyle/>
-          <a:p>
-            <a:pPr>
-              <a:defRPr sz="2500" b="1">
-                <a:solidFill>
-                  <a:srgbClr val="16161A"/>
-                </a:solidFill>
-                <a:latin typeface="Helvetica Neue"/>
-              </a:defRPr>
-            </a:pPr>
-            <a:r>
-              <a:t>Bridging Engineering Discipline with Business Outcomes</a:t>
-            </a:r>
-          </a:p>
-        </p:txBody>
-      </p:sp>
-      <p:sp>
-        <p:nvSpPr>
-          <p:cNvPr id="11" name="Rounded Rectangle 10"/>
-          <p:cNvSpPr/>
-          <p:nvPr/>
-        </p:nvSpPr>
-        <p:spPr>
-          <a:xfrm>
-            <a:off x="731520" y="1874519"/>
-            <a:ext cx="3328416" cy="4114800"/>
+            <a:off x="731520" y="1691640"/>
+            <a:ext cx="3328416" cy="4297680"/>
           </a:xfrm>
           <a:prstGeom prst="roundRect">
             <a:avLst/>
@@ -4791,14 +4073,14 @@
       </p:sp>
       <p:sp>
         <p:nvSpPr>
-          <p:cNvPr id="12" name="TextBox 11"/>
+          <p:cNvPr id="5" name="TextBox 4"/>
           <p:cNvSpPr txBox="1"/>
           <p:nvPr/>
         </p:nvSpPr>
         <p:spPr>
           <a:xfrm>
-            <a:off x="1051560" y="2194559"/>
-            <a:ext cx="2688336" cy="3566160"/>
+            <a:off x="1051560" y="2011680"/>
+            <a:ext cx="2688336" cy="3657600"/>
           </a:xfrm>
           <a:prstGeom prst="rect">
             <a:avLst/>
@@ -4815,7 +4097,7 @@
               <a:spcAft>
                 <a:spcPts val="1000"/>
               </a:spcAft>
-              <a:defRPr sz="2200" b="1">
+              <a:defRPr sz="2000" b="1">
                 <a:solidFill>
                   <a:srgbClr val="2B59D9"/>
                 </a:solidFill>
@@ -4845,7 +4127,7 @@
           <a:p>
             <a:pPr>
               <a:spcAft>
-                <a:spcPts val="1400"/>
+                <a:spcPts val="1600"/>
               </a:spcAft>
               <a:defRPr sz="1200">
                 <a:solidFill>
@@ -4861,9 +4143,9 @@
           <a:p>
             <a:pPr>
               <a:spcAft>
-                <a:spcPts val="600"/>
+                <a:spcPts val="800"/>
               </a:spcAft>
-              <a:defRPr sz="1100">
+              <a:defRPr sz="1150">
                 <a:solidFill>
                   <a:srgbClr val="16161A"/>
                 </a:solidFill>
@@ -4877,9 +4159,9 @@
           <a:p>
             <a:pPr>
               <a:spcAft>
-                <a:spcPts val="600"/>
+                <a:spcPts val="800"/>
               </a:spcAft>
-              <a:defRPr sz="1100">
+              <a:defRPr sz="1150">
                 <a:solidFill>
                   <a:srgbClr val="16161A"/>
                 </a:solidFill>
@@ -4893,9 +4175,9 @@
           <a:p>
             <a:pPr>
               <a:spcAft>
-                <a:spcPts val="600"/>
+                <a:spcPts val="800"/>
               </a:spcAft>
-              <a:defRPr sz="1100">
+              <a:defRPr sz="1150">
                 <a:solidFill>
                   <a:srgbClr val="16161A"/>
                 </a:solidFill>
@@ -4910,14 +4192,14 @@
       </p:sp>
       <p:sp>
         <p:nvSpPr>
-          <p:cNvPr id="13" name="Rounded Rectangle 12"/>
+          <p:cNvPr id="6" name="Rounded Rectangle 5"/>
           <p:cNvSpPr/>
           <p:nvPr/>
         </p:nvSpPr>
         <p:spPr>
           <a:xfrm>
-            <a:off x="4334256" y="1874519"/>
-            <a:ext cx="3328416" cy="4114800"/>
+            <a:off x="4334256" y="1691640"/>
+            <a:ext cx="3328416" cy="4297680"/>
           </a:xfrm>
           <a:prstGeom prst="roundRect">
             <a:avLst/>
@@ -4955,14 +4237,14 @@
       </p:sp>
       <p:sp>
         <p:nvSpPr>
-          <p:cNvPr id="14" name="TextBox 13"/>
+          <p:cNvPr id="7" name="TextBox 6"/>
           <p:cNvSpPr txBox="1"/>
           <p:nvPr/>
         </p:nvSpPr>
         <p:spPr>
           <a:xfrm>
-            <a:off x="4654296" y="2194559"/>
-            <a:ext cx="2688336" cy="3566160"/>
+            <a:off x="4654296" y="2011680"/>
+            <a:ext cx="2688336" cy="3657600"/>
           </a:xfrm>
           <a:prstGeom prst="rect">
             <a:avLst/>
@@ -4979,7 +4261,7 @@
               <a:spcAft>
                 <a:spcPts val="1000"/>
               </a:spcAft>
-              <a:defRPr sz="2200" b="1">
+              <a:defRPr sz="2000" b="1">
                 <a:solidFill>
                   <a:srgbClr val="2B59D9"/>
                 </a:solidFill>
@@ -5009,7 +4291,7 @@
           <a:p>
             <a:pPr>
               <a:spcAft>
-                <a:spcPts val="1400"/>
+                <a:spcPts val="1600"/>
               </a:spcAft>
               <a:defRPr sz="1200">
                 <a:solidFill>
@@ -5025,9 +4307,9 @@
           <a:p>
             <a:pPr>
               <a:spcAft>
-                <a:spcPts val="600"/>
+                <a:spcPts val="800"/>
               </a:spcAft>
-              <a:defRPr sz="1100">
+              <a:defRPr sz="1150">
                 <a:solidFill>
                   <a:srgbClr val="16161A"/>
                 </a:solidFill>
@@ -5041,9 +4323,9 @@
           <a:p>
             <a:pPr>
               <a:spcAft>
-                <a:spcPts val="600"/>
+                <a:spcPts val="800"/>
               </a:spcAft>
-              <a:defRPr sz="1100">
+              <a:defRPr sz="1150">
                 <a:solidFill>
                   <a:srgbClr val="16161A"/>
                 </a:solidFill>
@@ -5057,9 +4339,9 @@
           <a:p>
             <a:pPr>
               <a:spcAft>
-                <a:spcPts val="600"/>
+                <a:spcPts val="800"/>
               </a:spcAft>
-              <a:defRPr sz="1100">
+              <a:defRPr sz="1150">
                 <a:solidFill>
                   <a:srgbClr val="16161A"/>
                 </a:solidFill>
@@ -5074,14 +4356,14 @@
       </p:sp>
       <p:sp>
         <p:nvSpPr>
-          <p:cNvPr id="15" name="Rounded Rectangle 14"/>
+          <p:cNvPr id="8" name="Rounded Rectangle 7"/>
           <p:cNvSpPr/>
           <p:nvPr/>
         </p:nvSpPr>
         <p:spPr>
           <a:xfrm>
-            <a:off x="7936992" y="1874519"/>
-            <a:ext cx="3328416" cy="4114800"/>
+            <a:off x="7936992" y="1691640"/>
+            <a:ext cx="3328416" cy="4297680"/>
           </a:xfrm>
           <a:prstGeom prst="roundRect">
             <a:avLst/>
@@ -5119,14 +4401,14 @@
       </p:sp>
       <p:sp>
         <p:nvSpPr>
-          <p:cNvPr id="16" name="TextBox 15"/>
+          <p:cNvPr id="9" name="TextBox 8"/>
           <p:cNvSpPr txBox="1"/>
           <p:nvPr/>
         </p:nvSpPr>
         <p:spPr>
           <a:xfrm>
-            <a:off x="8257032" y="2194559"/>
-            <a:ext cx="2688336" cy="3566160"/>
+            <a:off x="8257032" y="2011680"/>
+            <a:ext cx="2688336" cy="3657600"/>
           </a:xfrm>
           <a:prstGeom prst="rect">
             <a:avLst/>
@@ -5143,7 +4425,7 @@
               <a:spcAft>
                 <a:spcPts val="1000"/>
               </a:spcAft>
-              <a:defRPr sz="2200" b="1">
+              <a:defRPr sz="2000" b="1">
                 <a:solidFill>
                   <a:srgbClr val="2B59D9"/>
                 </a:solidFill>
@@ -5173,7 +4455,7 @@
           <a:p>
             <a:pPr>
               <a:spcAft>
-                <a:spcPts val="1400"/>
+                <a:spcPts val="1600"/>
               </a:spcAft>
               <a:defRPr sz="1200">
                 <a:solidFill>
@@ -5189,9 +4471,9 @@
           <a:p>
             <a:pPr>
               <a:spcAft>
-                <a:spcPts val="600"/>
+                <a:spcPts val="800"/>
               </a:spcAft>
-              <a:defRPr sz="1100">
+              <a:defRPr sz="1150">
                 <a:solidFill>
                   <a:srgbClr val="16161A"/>
                 </a:solidFill>
@@ -5205,9 +4487,9 @@
           <a:p>
             <a:pPr>
               <a:spcAft>
-                <a:spcPts val="600"/>
+                <a:spcPts val="800"/>
               </a:spcAft>
-              <a:defRPr sz="1100">
+              <a:defRPr sz="1150">
                 <a:solidFill>
                   <a:srgbClr val="16161A"/>
                 </a:solidFill>
@@ -5221,9 +4503,9 @@
           <a:p>
             <a:pPr>
               <a:spcAft>
-                <a:spcPts val="600"/>
+                <a:spcPts val="800"/>
               </a:spcAft>
-              <a:defRPr sz="1100">
+              <a:defRPr sz="1150">
                 <a:solidFill>
                   <a:srgbClr val="16161A"/>
                 </a:solidFill>
@@ -5238,13 +4520,13 @@
       </p:sp>
       <p:sp>
         <p:nvSpPr>
-          <p:cNvPr id="17" name="Rectangle 16"/>
+          <p:cNvPr id="10" name="Rectangle 9"/>
           <p:cNvSpPr/>
           <p:nvPr/>
         </p:nvSpPr>
         <p:spPr>
           <a:xfrm>
-            <a:off x="731520" y="6327648"/>
+            <a:off x="731520" y="6263640"/>
             <a:ext cx="10728655" cy="12700"/>
           </a:xfrm>
           <a:prstGeom prst="rect">
@@ -5281,13 +4563,13 @@
       </p:sp>
       <p:sp>
         <p:nvSpPr>
-          <p:cNvPr id="18" name="TextBox 17"/>
+          <p:cNvPr id="11" name="TextBox 10"/>
           <p:cNvSpPr txBox="1"/>
           <p:nvPr/>
         </p:nvSpPr>
         <p:spPr>
           <a:xfrm>
-            <a:off x="731520" y="6400800"/>
+            <a:off x="731520" y="6355080"/>
             <a:ext cx="7315200" cy="320040"/>
           </a:xfrm>
           <a:prstGeom prst="rect">
@@ -5310,20 +4592,20 @@
               </a:defRPr>
             </a:pPr>
             <a:r>
-              <a:t>technologyconsultants.ventures  ·  San Diego · Tijuana</a:t>
-            </a:r>
-          </a:p>
-        </p:txBody>
-      </p:sp>
-      <p:sp>
-        <p:nvSpPr>
-          <p:cNvPr id="19" name="TextBox 18"/>
+              <a:t>Technology Consultants  ·  technologyconsultants.ventures  ·  San Diego &amp; Tijuana</a:t>
+            </a:r>
+          </a:p>
+        </p:txBody>
+      </p:sp>
+      <p:sp>
+        <p:nvSpPr>
+          <p:cNvPr id="12" name="TextBox 11"/>
           <p:cNvSpPr txBox="1"/>
           <p:nvPr/>
         </p:nvSpPr>
         <p:spPr>
           <a:xfrm>
-            <a:off x="9631375" y="6400800"/>
+            <a:off x="9631375" y="6355080"/>
             <a:ext cx="1828800" cy="320040"/>
           </a:xfrm>
           <a:prstGeom prst="rect">
@@ -5379,102 +4661,14 @@
       <p:grpSpPr/>
       <p:sp>
         <p:nvSpPr>
-          <p:cNvPr id="2" name="Rectangle 1"/>
-          <p:cNvSpPr/>
-          <p:nvPr/>
-        </p:nvSpPr>
-        <p:spPr>
-          <a:xfrm>
-            <a:off x="0" y="0"/>
-            <a:ext cx="12191695" cy="594360"/>
-          </a:xfrm>
-          <a:prstGeom prst="rect">
-            <a:avLst/>
-          </a:prstGeom>
-          <a:solidFill>
-            <a:srgbClr val="121216"/>
-          </a:solidFill>
-          <a:ln w="12700">
-            <a:solidFill>
-              <a:srgbClr val="26262C"/>
-            </a:solidFill>
-          </a:ln>
-        </p:spPr>
-        <p:style>
-          <a:lnRef idx="1">
-            <a:schemeClr val="accent1"/>
-          </a:lnRef>
-          <a:fillRef idx="3">
-            <a:schemeClr val="accent1"/>
-          </a:fillRef>
-          <a:effectRef idx="2">
-            <a:schemeClr val="accent1"/>
-          </a:effectRef>
-          <a:fontRef idx="minor">
-            <a:schemeClr val="lt1"/>
-          </a:fontRef>
-        </p:style>
-        <p:txBody>
-          <a:bodyPr rtlCol="0" anchor="ctr"/>
-          <a:lstStyle/>
-          <a:p>
-            <a:pPr algn="ctr"/>
-          </a:p>
-        </p:txBody>
-      </p:sp>
-      <p:sp>
-        <p:nvSpPr>
-          <p:cNvPr id="3" name="Rounded Rectangle 2"/>
-          <p:cNvSpPr/>
-          <p:nvPr/>
-        </p:nvSpPr>
-        <p:spPr>
-          <a:xfrm>
-            <a:off x="731520" y="146304"/>
-            <a:ext cx="301752" cy="301752"/>
-          </a:xfrm>
-          <a:prstGeom prst="roundRect">
-            <a:avLst/>
-          </a:prstGeom>
-          <a:solidFill>
-            <a:srgbClr val="2B59D9"/>
-          </a:solidFill>
-          <a:ln>
-            <a:noFill/>
-          </a:ln>
-        </p:spPr>
-        <p:style>
-          <a:lnRef idx="1">
-            <a:schemeClr val="accent1"/>
-          </a:lnRef>
-          <a:fillRef idx="3">
-            <a:schemeClr val="accent1"/>
-          </a:fillRef>
-          <a:effectRef idx="2">
-            <a:schemeClr val="accent1"/>
-          </a:effectRef>
-          <a:fontRef idx="minor">
-            <a:schemeClr val="lt1"/>
-          </a:fontRef>
-        </p:style>
-        <p:txBody>
-          <a:bodyPr rtlCol="0" anchor="ctr"/>
-          <a:lstStyle/>
-          <a:p>
-            <a:pPr algn="ctr"/>
-          </a:p>
-        </p:txBody>
-      </p:sp>
-      <p:sp>
-        <p:nvSpPr>
-          <p:cNvPr id="4" name="TextBox 3"/>
+          <p:cNvPr id="2" name="TextBox 1"/>
           <p:cNvSpPr txBox="1"/>
           <p:nvPr/>
         </p:nvSpPr>
         <p:spPr>
           <a:xfrm>
-            <a:off x="731520" y="128016"/>
-            <a:ext cx="301752" cy="301752"/>
+            <a:off x="731520" y="502920"/>
+            <a:ext cx="10728655" cy="228600"/>
           </a:xfrm>
           <a:prstGeom prst="rect">
             <a:avLst/>
@@ -5487,30 +4681,30 @@
           </a:bodyPr>
           <a:lstStyle/>
           <a:p>
-            <a:pPr algn="ctr">
-              <a:defRPr sz="1600" b="1">
-                <a:solidFill>
-                  <a:srgbClr val="FFFFFF"/>
-                </a:solidFill>
-                <a:latin typeface="Helvetica Neue"/>
-              </a:defRPr>
-            </a:pPr>
-            <a:r>
-              <a:t>›</a:t>
-            </a:r>
-          </a:p>
-        </p:txBody>
-      </p:sp>
-      <p:sp>
-        <p:nvSpPr>
-          <p:cNvPr id="5" name="TextBox 4"/>
+            <a:pPr>
+              <a:defRPr sz="1050" b="1">
+                <a:solidFill>
+                  <a:srgbClr val="2B59D9"/>
+                </a:solidFill>
+                <a:latin typeface="Helvetica Neue"/>
+              </a:defRPr>
+            </a:pPr>
+            <a:r>
+              <a:t>TARGET AUDIENCE &amp; ICP</a:t>
+            </a:r>
+          </a:p>
+        </p:txBody>
+      </p:sp>
+      <p:sp>
+        <p:nvSpPr>
+          <p:cNvPr id="3" name="TextBox 2"/>
           <p:cNvSpPr txBox="1"/>
           <p:nvPr/>
         </p:nvSpPr>
         <p:spPr>
           <a:xfrm>
-            <a:off x="1143000" y="164592"/>
-            <a:ext cx="3200400" cy="292608"/>
+            <a:off x="731520" y="777240"/>
+            <a:ext cx="10728655" cy="685800"/>
           </a:xfrm>
           <a:prstGeom prst="rect">
             <a:avLst/>
@@ -5524,216 +4718,29 @@
           <a:lstStyle/>
           <a:p>
             <a:pPr>
-              <a:defRPr sz="1300" b="1">
-                <a:solidFill>
-                  <a:srgbClr val="FFFFFF"/>
-                </a:solidFill>
-                <a:latin typeface="Helvetica Neue"/>
-              </a:defRPr>
-            </a:pPr>
-            <a:r>
-              <a:t>Technology Consultants</a:t>
-            </a:r>
-          </a:p>
-        </p:txBody>
-      </p:sp>
-      <p:sp>
-        <p:nvSpPr>
-          <p:cNvPr id="6" name="TextBox 5"/>
-          <p:cNvSpPr txBox="1"/>
-          <p:nvPr/>
-        </p:nvSpPr>
-        <p:spPr>
-          <a:xfrm>
-            <a:off x="4572000" y="182880"/>
-            <a:ext cx="5212080" cy="292608"/>
-          </a:xfrm>
-          <a:prstGeom prst="rect">
-            <a:avLst/>
-          </a:prstGeom>
-          <a:noFill/>
-        </p:spPr>
-        <p:txBody>
-          <a:bodyPr wrap="square" lIns="0" rIns="0" tIns="0" bIns="0">
-            <a:spAutoFit/>
-          </a:bodyPr>
-          <a:lstStyle/>
-          <a:p>
-            <a:pPr algn="r">
-              <a:defRPr sz="1000">
-                <a:solidFill>
-                  <a:srgbClr val="BEC3CD"/>
-                </a:solidFill>
-                <a:latin typeface="Helvetica Neue"/>
-              </a:defRPr>
-            </a:pPr>
-            <a:r>
-              <a:t>Services   ·   Work   ·   How we work   ·   About   ·   FAQ</a:t>
-            </a:r>
-          </a:p>
-        </p:txBody>
-      </p:sp>
-      <p:sp>
-        <p:nvSpPr>
-          <p:cNvPr id="7" name="Rounded Rectangle 6"/>
+              <a:defRPr sz="2600" b="1">
+                <a:solidFill>
+                  <a:srgbClr val="16161A"/>
+                </a:solidFill>
+                <a:latin typeface="Helvetica Neue"/>
+              </a:defRPr>
+            </a:pPr>
+            <a:r>
+              <a:t>Who Benefits Most From Our Practice?</a:t>
+            </a:r>
+          </a:p>
+        </p:txBody>
+      </p:sp>
+      <p:sp>
+        <p:nvSpPr>
+          <p:cNvPr id="4" name="Rounded Rectangle 3"/>
           <p:cNvSpPr/>
           <p:nvPr/>
         </p:nvSpPr>
         <p:spPr>
           <a:xfrm>
-            <a:off x="9966960" y="128016"/>
-            <a:ext cx="1463040" cy="329184"/>
-          </a:xfrm>
-          <a:prstGeom prst="roundRect">
-            <a:avLst/>
-          </a:prstGeom>
-          <a:solidFill>
-            <a:srgbClr val="FFFFFF"/>
-          </a:solidFill>
-          <a:ln>
-            <a:noFill/>
-          </a:ln>
-        </p:spPr>
-        <p:style>
-          <a:lnRef idx="1">
-            <a:schemeClr val="accent1"/>
-          </a:lnRef>
-          <a:fillRef idx="3">
-            <a:schemeClr val="accent1"/>
-          </a:fillRef>
-          <a:effectRef idx="2">
-            <a:schemeClr val="accent1"/>
-          </a:effectRef>
-          <a:fontRef idx="minor">
-            <a:schemeClr val="lt1"/>
-          </a:fontRef>
-        </p:style>
-        <p:txBody>
-          <a:bodyPr rtlCol="0" anchor="ctr"/>
-          <a:lstStyle/>
-          <a:p>
-            <a:pPr algn="ctr"/>
-          </a:p>
-        </p:txBody>
-      </p:sp>
-      <p:sp>
-        <p:nvSpPr>
-          <p:cNvPr id="8" name="TextBox 7"/>
-          <p:cNvSpPr txBox="1"/>
-          <p:nvPr/>
-        </p:nvSpPr>
-        <p:spPr>
-          <a:xfrm>
-            <a:off x="9966960" y="164592"/>
-            <a:ext cx="1463040" cy="274320"/>
-          </a:xfrm>
-          <a:prstGeom prst="rect">
-            <a:avLst/>
-          </a:prstGeom>
-          <a:noFill/>
-        </p:spPr>
-        <p:txBody>
-          <a:bodyPr wrap="square" lIns="0" rIns="0" tIns="0" bIns="0">
-            <a:spAutoFit/>
-          </a:bodyPr>
-          <a:lstStyle/>
-          <a:p>
-            <a:pPr algn="ctr">
-              <a:defRPr sz="1000" b="1">
-                <a:solidFill>
-                  <a:srgbClr val="16161A"/>
-                </a:solidFill>
-                <a:latin typeface="Helvetica Neue"/>
-              </a:defRPr>
-            </a:pPr>
-            <a:r>
-              <a:t>Book a call</a:t>
-            </a:r>
-          </a:p>
-        </p:txBody>
-      </p:sp>
-      <p:sp>
-        <p:nvSpPr>
-          <p:cNvPr id="9" name="TextBox 8"/>
-          <p:cNvSpPr txBox="1"/>
-          <p:nvPr/>
-        </p:nvSpPr>
-        <p:spPr>
-          <a:xfrm>
-            <a:off x="731520" y="777240"/>
-            <a:ext cx="10728655" cy="228600"/>
-          </a:xfrm>
-          <a:prstGeom prst="rect">
-            <a:avLst/>
-          </a:prstGeom>
-          <a:noFill/>
-        </p:spPr>
-        <p:txBody>
-          <a:bodyPr wrap="square" lIns="0" rIns="0" tIns="0" bIns="0">
-            <a:spAutoFit/>
-          </a:bodyPr>
-          <a:lstStyle/>
-          <a:p>
-            <a:pPr>
-              <a:defRPr sz="1000" b="1">
-                <a:solidFill>
-                  <a:srgbClr val="2B59D9"/>
-                </a:solidFill>
-                <a:latin typeface="Helvetica Neue"/>
-              </a:defRPr>
-            </a:pPr>
-            <a:r>
-              <a:t>TARGET AUDIENCE &amp; ICP</a:t>
-            </a:r>
-          </a:p>
-        </p:txBody>
-      </p:sp>
-      <p:sp>
-        <p:nvSpPr>
-          <p:cNvPr id="10" name="TextBox 9"/>
-          <p:cNvSpPr txBox="1"/>
-          <p:nvPr/>
-        </p:nvSpPr>
-        <p:spPr>
-          <a:xfrm>
-            <a:off x="731520" y="1024128"/>
-            <a:ext cx="10728655" cy="640080"/>
-          </a:xfrm>
-          <a:prstGeom prst="rect">
-            <a:avLst/>
-          </a:prstGeom>
-          <a:noFill/>
-        </p:spPr>
-        <p:txBody>
-          <a:bodyPr wrap="square" lIns="0" rIns="0" tIns="0" bIns="0">
-            <a:spAutoFit/>
-          </a:bodyPr>
-          <a:lstStyle/>
-          <a:p>
-            <a:pPr>
-              <a:defRPr sz="2500" b="1">
-                <a:solidFill>
-                  <a:srgbClr val="16161A"/>
-                </a:solidFill>
-                <a:latin typeface="Helvetica Neue"/>
-              </a:defRPr>
-            </a:pPr>
-            <a:r>
-              <a:t>Who Benefits Most From Our Practice?</a:t>
-            </a:r>
-          </a:p>
-        </p:txBody>
-      </p:sp>
-      <p:sp>
-        <p:nvSpPr>
-          <p:cNvPr id="11" name="Rounded Rectangle 10"/>
-          <p:cNvSpPr/>
-          <p:nvPr/>
-        </p:nvSpPr>
-        <p:spPr>
-          <a:xfrm>
-            <a:off x="731520" y="1874519"/>
-            <a:ext cx="5157216" cy="4114800"/>
+            <a:off x="731520" y="1691640"/>
+            <a:ext cx="5157216" cy="4297680"/>
           </a:xfrm>
           <a:prstGeom prst="roundRect">
             <a:avLst/>
@@ -5771,14 +4778,14 @@
       </p:sp>
       <p:sp>
         <p:nvSpPr>
-          <p:cNvPr id="12" name="TextBox 11"/>
+          <p:cNvPr id="5" name="TextBox 4"/>
           <p:cNvSpPr txBox="1"/>
           <p:nvPr/>
         </p:nvSpPr>
         <p:spPr>
           <a:xfrm>
-            <a:off x="1051560" y="2194559"/>
-            <a:ext cx="4517136" cy="3566160"/>
+            <a:off x="1051560" y="2011680"/>
+            <a:ext cx="4517136" cy="3657600"/>
           </a:xfrm>
           <a:prstGeom prst="rect">
             <a:avLst/>
@@ -5793,7 +4800,7 @@
           <a:p>
             <a:pPr>
               <a:spcAft>
-                <a:spcPts val="1400"/>
+                <a:spcPts val="1600"/>
               </a:spcAft>
               <a:defRPr sz="1100" b="1">
                 <a:solidFill>
@@ -5809,7 +4816,7 @@
           <a:p>
             <a:pPr>
               <a:spcAft>
-                <a:spcPts val="1000"/>
+                <a:spcPts val="1200"/>
               </a:spcAft>
               <a:defRPr b="1" sz="1250">
                 <a:solidFill>
@@ -5833,7 +4840,7 @@
           <a:p>
             <a:pPr>
               <a:spcAft>
-                <a:spcPts val="1000"/>
+                <a:spcPts val="1200"/>
               </a:spcAft>
               <a:defRPr b="1" sz="1250">
                 <a:solidFill>
@@ -5857,7 +4864,7 @@
           <a:p>
             <a:pPr>
               <a:spcAft>
-                <a:spcPts val="1000"/>
+                <a:spcPts val="1200"/>
               </a:spcAft>
               <a:defRPr b="1" sz="1250">
                 <a:solidFill>
@@ -5881,7 +4888,7 @@
           <a:p>
             <a:pPr>
               <a:spcAft>
-                <a:spcPts val="1000"/>
+                <a:spcPts val="1200"/>
               </a:spcAft>
               <a:defRPr b="1" sz="1250">
                 <a:solidFill>
@@ -5906,14 +4913,14 @@
       </p:sp>
       <p:sp>
         <p:nvSpPr>
-          <p:cNvPr id="13" name="Rounded Rectangle 12"/>
+          <p:cNvPr id="6" name="Rounded Rectangle 5"/>
           <p:cNvSpPr/>
           <p:nvPr/>
         </p:nvSpPr>
         <p:spPr>
           <a:xfrm>
-            <a:off x="6300216" y="1874519"/>
-            <a:ext cx="5157216" cy="4114800"/>
+            <a:off x="6300216" y="1691640"/>
+            <a:ext cx="5157216" cy="4297680"/>
           </a:xfrm>
           <a:prstGeom prst="roundRect">
             <a:avLst/>
@@ -5951,14 +4958,14 @@
       </p:sp>
       <p:sp>
         <p:nvSpPr>
-          <p:cNvPr id="14" name="TextBox 13"/>
+          <p:cNvPr id="7" name="TextBox 6"/>
           <p:cNvSpPr txBox="1"/>
           <p:nvPr/>
         </p:nvSpPr>
         <p:spPr>
           <a:xfrm>
-            <a:off x="6620256" y="2194559"/>
-            <a:ext cx="4517136" cy="3566160"/>
+            <a:off x="6620256" y="2011680"/>
+            <a:ext cx="4517136" cy="3657600"/>
           </a:xfrm>
           <a:prstGeom prst="rect">
             <a:avLst/>
@@ -5973,7 +4980,7 @@
           <a:p>
             <a:pPr>
               <a:spcAft>
-                <a:spcPts val="1400"/>
+                <a:spcPts val="1600"/>
               </a:spcAft>
               <a:defRPr sz="1100" b="1">
                 <a:solidFill>
@@ -5989,7 +4996,7 @@
           <a:p>
             <a:pPr>
               <a:spcAft>
-                <a:spcPts val="1000"/>
+                <a:spcPts val="1200"/>
               </a:spcAft>
               <a:defRPr b="1" sz="1250">
                 <a:solidFill>
@@ -6013,7 +5020,7 @@
           <a:p>
             <a:pPr>
               <a:spcAft>
-                <a:spcPts val="1000"/>
+                <a:spcPts val="1200"/>
               </a:spcAft>
               <a:defRPr b="1" sz="1250">
                 <a:solidFill>
@@ -6037,7 +5044,7 @@
           <a:p>
             <a:pPr>
               <a:spcAft>
-                <a:spcPts val="1000"/>
+                <a:spcPts val="1200"/>
               </a:spcAft>
               <a:defRPr b="1" sz="1250">
                 <a:solidFill>
@@ -6061,7 +5068,7 @@
           <a:p>
             <a:pPr>
               <a:spcAft>
-                <a:spcPts val="1000"/>
+                <a:spcPts val="1200"/>
               </a:spcAft>
               <a:defRPr b="1" sz="1250">
                 <a:solidFill>
@@ -6086,13 +5093,13 @@
       </p:sp>
       <p:sp>
         <p:nvSpPr>
-          <p:cNvPr id="15" name="Rectangle 14"/>
+          <p:cNvPr id="8" name="Rectangle 7"/>
           <p:cNvSpPr/>
           <p:nvPr/>
         </p:nvSpPr>
         <p:spPr>
           <a:xfrm>
-            <a:off x="731520" y="6327648"/>
+            <a:off x="731520" y="6263640"/>
             <a:ext cx="10728655" cy="12700"/>
           </a:xfrm>
           <a:prstGeom prst="rect">
@@ -6129,13 +5136,13 @@
       </p:sp>
       <p:sp>
         <p:nvSpPr>
-          <p:cNvPr id="16" name="TextBox 15"/>
+          <p:cNvPr id="9" name="TextBox 8"/>
           <p:cNvSpPr txBox="1"/>
           <p:nvPr/>
         </p:nvSpPr>
         <p:spPr>
           <a:xfrm>
-            <a:off x="731520" y="6400800"/>
+            <a:off x="731520" y="6355080"/>
             <a:ext cx="7315200" cy="320040"/>
           </a:xfrm>
           <a:prstGeom prst="rect">
@@ -6158,20 +5165,20 @@
               </a:defRPr>
             </a:pPr>
             <a:r>
-              <a:t>technologyconsultants.ventures  ·  San Diego · Tijuana</a:t>
-            </a:r>
-          </a:p>
-        </p:txBody>
-      </p:sp>
-      <p:sp>
-        <p:nvSpPr>
-          <p:cNvPr id="17" name="TextBox 16"/>
+              <a:t>Technology Consultants  ·  technologyconsultants.ventures  ·  San Diego &amp; Tijuana</a:t>
+            </a:r>
+          </a:p>
+        </p:txBody>
+      </p:sp>
+      <p:sp>
+        <p:nvSpPr>
+          <p:cNvPr id="10" name="TextBox 9"/>
           <p:cNvSpPr txBox="1"/>
           <p:nvPr/>
         </p:nvSpPr>
         <p:spPr>
           <a:xfrm>
-            <a:off x="9631375" y="6400800"/>
+            <a:off x="9631375" y="6355080"/>
             <a:ext cx="1828800" cy="320040"/>
           </a:xfrm>
           <a:prstGeom prst="rect">
@@ -6227,102 +5234,14 @@
       <p:grpSpPr/>
       <p:sp>
         <p:nvSpPr>
-          <p:cNvPr id="2" name="Rectangle 1"/>
-          <p:cNvSpPr/>
-          <p:nvPr/>
-        </p:nvSpPr>
-        <p:spPr>
-          <a:xfrm>
-            <a:off x="0" y="0"/>
-            <a:ext cx="12191695" cy="594360"/>
-          </a:xfrm>
-          <a:prstGeom prst="rect">
-            <a:avLst/>
-          </a:prstGeom>
-          <a:solidFill>
-            <a:srgbClr val="121216"/>
-          </a:solidFill>
-          <a:ln w="12700">
-            <a:solidFill>
-              <a:srgbClr val="26262C"/>
-            </a:solidFill>
-          </a:ln>
-        </p:spPr>
-        <p:style>
-          <a:lnRef idx="1">
-            <a:schemeClr val="accent1"/>
-          </a:lnRef>
-          <a:fillRef idx="3">
-            <a:schemeClr val="accent1"/>
-          </a:fillRef>
-          <a:effectRef idx="2">
-            <a:schemeClr val="accent1"/>
-          </a:effectRef>
-          <a:fontRef idx="minor">
-            <a:schemeClr val="lt1"/>
-          </a:fontRef>
-        </p:style>
-        <p:txBody>
-          <a:bodyPr rtlCol="0" anchor="ctr"/>
-          <a:lstStyle/>
-          <a:p>
-            <a:pPr algn="ctr"/>
-          </a:p>
-        </p:txBody>
-      </p:sp>
-      <p:sp>
-        <p:nvSpPr>
-          <p:cNvPr id="3" name="Rounded Rectangle 2"/>
-          <p:cNvSpPr/>
-          <p:nvPr/>
-        </p:nvSpPr>
-        <p:spPr>
-          <a:xfrm>
-            <a:off x="731520" y="146304"/>
-            <a:ext cx="301752" cy="301752"/>
-          </a:xfrm>
-          <a:prstGeom prst="roundRect">
-            <a:avLst/>
-          </a:prstGeom>
-          <a:solidFill>
-            <a:srgbClr val="2B59D9"/>
-          </a:solidFill>
-          <a:ln>
-            <a:noFill/>
-          </a:ln>
-        </p:spPr>
-        <p:style>
-          <a:lnRef idx="1">
-            <a:schemeClr val="accent1"/>
-          </a:lnRef>
-          <a:fillRef idx="3">
-            <a:schemeClr val="accent1"/>
-          </a:fillRef>
-          <a:effectRef idx="2">
-            <a:schemeClr val="accent1"/>
-          </a:effectRef>
-          <a:fontRef idx="minor">
-            <a:schemeClr val="lt1"/>
-          </a:fontRef>
-        </p:style>
-        <p:txBody>
-          <a:bodyPr rtlCol="0" anchor="ctr"/>
-          <a:lstStyle/>
-          <a:p>
-            <a:pPr algn="ctr"/>
-          </a:p>
-        </p:txBody>
-      </p:sp>
-      <p:sp>
-        <p:nvSpPr>
-          <p:cNvPr id="4" name="TextBox 3"/>
+          <p:cNvPr id="2" name="TextBox 1"/>
           <p:cNvSpPr txBox="1"/>
           <p:nvPr/>
         </p:nvSpPr>
         <p:spPr>
           <a:xfrm>
-            <a:off x="731520" y="128016"/>
-            <a:ext cx="301752" cy="301752"/>
+            <a:off x="731520" y="502920"/>
+            <a:ext cx="10728655" cy="228600"/>
           </a:xfrm>
           <a:prstGeom prst="rect">
             <a:avLst/>
@@ -6335,30 +5254,30 @@
           </a:bodyPr>
           <a:lstStyle/>
           <a:p>
-            <a:pPr algn="ctr">
-              <a:defRPr sz="1600" b="1">
-                <a:solidFill>
-                  <a:srgbClr val="FFFFFF"/>
-                </a:solidFill>
-                <a:latin typeface="Helvetica Neue"/>
-              </a:defRPr>
-            </a:pPr>
-            <a:r>
-              <a:t>›</a:t>
-            </a:r>
-          </a:p>
-        </p:txBody>
-      </p:sp>
-      <p:sp>
-        <p:nvSpPr>
-          <p:cNvPr id="5" name="TextBox 4"/>
+            <a:pPr>
+              <a:defRPr sz="1050" b="1">
+                <a:solidFill>
+                  <a:srgbClr val="2B59D9"/>
+                </a:solidFill>
+                <a:latin typeface="Helvetica Neue"/>
+              </a:defRPr>
+            </a:pPr>
+            <a:r>
+              <a:t>REFERRAL SIGNALS</a:t>
+            </a:r>
+          </a:p>
+        </p:txBody>
+      </p:sp>
+      <p:sp>
+        <p:nvSpPr>
+          <p:cNvPr id="3" name="TextBox 2"/>
           <p:cNvSpPr txBox="1"/>
           <p:nvPr/>
         </p:nvSpPr>
         <p:spPr>
           <a:xfrm>
-            <a:off x="1143000" y="164592"/>
-            <a:ext cx="3200400" cy="292608"/>
+            <a:off x="731520" y="777240"/>
+            <a:ext cx="10728655" cy="685800"/>
           </a:xfrm>
           <a:prstGeom prst="rect">
             <a:avLst/>
@@ -6372,215 +5291,28 @@
           <a:lstStyle/>
           <a:p>
             <a:pPr>
-              <a:defRPr sz="1300" b="1">
-                <a:solidFill>
-                  <a:srgbClr val="FFFFFF"/>
-                </a:solidFill>
-                <a:latin typeface="Helvetica Neue"/>
-              </a:defRPr>
-            </a:pPr>
-            <a:r>
-              <a:t>Technology Consultants</a:t>
-            </a:r>
-          </a:p>
-        </p:txBody>
-      </p:sp>
-      <p:sp>
-        <p:nvSpPr>
-          <p:cNvPr id="6" name="TextBox 5"/>
-          <p:cNvSpPr txBox="1"/>
-          <p:nvPr/>
-        </p:nvSpPr>
-        <p:spPr>
-          <a:xfrm>
-            <a:off x="4572000" y="182880"/>
-            <a:ext cx="5212080" cy="292608"/>
-          </a:xfrm>
-          <a:prstGeom prst="rect">
-            <a:avLst/>
-          </a:prstGeom>
-          <a:noFill/>
-        </p:spPr>
-        <p:txBody>
-          <a:bodyPr wrap="square" lIns="0" rIns="0" tIns="0" bIns="0">
-            <a:spAutoFit/>
-          </a:bodyPr>
-          <a:lstStyle/>
-          <a:p>
-            <a:pPr algn="r">
-              <a:defRPr sz="1000">
-                <a:solidFill>
-                  <a:srgbClr val="BEC3CD"/>
-                </a:solidFill>
-                <a:latin typeface="Helvetica Neue"/>
-              </a:defRPr>
-            </a:pPr>
-            <a:r>
-              <a:t>Services   ·   Work   ·   How we work   ·   About   ·   FAQ</a:t>
-            </a:r>
-          </a:p>
-        </p:txBody>
-      </p:sp>
-      <p:sp>
-        <p:nvSpPr>
-          <p:cNvPr id="7" name="Rounded Rectangle 6"/>
+              <a:defRPr sz="2600" b="1">
+                <a:solidFill>
+                  <a:srgbClr val="16161A"/>
+                </a:solidFill>
+                <a:latin typeface="Helvetica Neue"/>
+              </a:defRPr>
+            </a:pPr>
+            <a:r>
+              <a:t>What Prospects Say Right Before They Need Us</a:t>
+            </a:r>
+          </a:p>
+        </p:txBody>
+      </p:sp>
+      <p:sp>
+        <p:nvSpPr>
+          <p:cNvPr id="4" name="Rounded Rectangle 3"/>
           <p:cNvSpPr/>
           <p:nvPr/>
         </p:nvSpPr>
         <p:spPr>
           <a:xfrm>
-            <a:off x="9966960" y="128016"/>
-            <a:ext cx="1463040" cy="329184"/>
-          </a:xfrm>
-          <a:prstGeom prst="roundRect">
-            <a:avLst/>
-          </a:prstGeom>
-          <a:solidFill>
-            <a:srgbClr val="FFFFFF"/>
-          </a:solidFill>
-          <a:ln>
-            <a:noFill/>
-          </a:ln>
-        </p:spPr>
-        <p:style>
-          <a:lnRef idx="1">
-            <a:schemeClr val="accent1"/>
-          </a:lnRef>
-          <a:fillRef idx="3">
-            <a:schemeClr val="accent1"/>
-          </a:fillRef>
-          <a:effectRef idx="2">
-            <a:schemeClr val="accent1"/>
-          </a:effectRef>
-          <a:fontRef idx="minor">
-            <a:schemeClr val="lt1"/>
-          </a:fontRef>
-        </p:style>
-        <p:txBody>
-          <a:bodyPr rtlCol="0" anchor="ctr"/>
-          <a:lstStyle/>
-          <a:p>
-            <a:pPr algn="ctr"/>
-          </a:p>
-        </p:txBody>
-      </p:sp>
-      <p:sp>
-        <p:nvSpPr>
-          <p:cNvPr id="8" name="TextBox 7"/>
-          <p:cNvSpPr txBox="1"/>
-          <p:nvPr/>
-        </p:nvSpPr>
-        <p:spPr>
-          <a:xfrm>
-            <a:off x="9966960" y="164592"/>
-            <a:ext cx="1463040" cy="274320"/>
-          </a:xfrm>
-          <a:prstGeom prst="rect">
-            <a:avLst/>
-          </a:prstGeom>
-          <a:noFill/>
-        </p:spPr>
-        <p:txBody>
-          <a:bodyPr wrap="square" lIns="0" rIns="0" tIns="0" bIns="0">
-            <a:spAutoFit/>
-          </a:bodyPr>
-          <a:lstStyle/>
-          <a:p>
-            <a:pPr algn="ctr">
-              <a:defRPr sz="1000" b="1">
-                <a:solidFill>
-                  <a:srgbClr val="16161A"/>
-                </a:solidFill>
-                <a:latin typeface="Helvetica Neue"/>
-              </a:defRPr>
-            </a:pPr>
-            <a:r>
-              <a:t>Book a call</a:t>
-            </a:r>
-          </a:p>
-        </p:txBody>
-      </p:sp>
-      <p:sp>
-        <p:nvSpPr>
-          <p:cNvPr id="9" name="TextBox 8"/>
-          <p:cNvSpPr txBox="1"/>
-          <p:nvPr/>
-        </p:nvSpPr>
-        <p:spPr>
-          <a:xfrm>
-            <a:off x="731520" y="777240"/>
-            <a:ext cx="10728655" cy="228600"/>
-          </a:xfrm>
-          <a:prstGeom prst="rect">
-            <a:avLst/>
-          </a:prstGeom>
-          <a:noFill/>
-        </p:spPr>
-        <p:txBody>
-          <a:bodyPr wrap="square" lIns="0" rIns="0" tIns="0" bIns="0">
-            <a:spAutoFit/>
-          </a:bodyPr>
-          <a:lstStyle/>
-          <a:p>
-            <a:pPr>
-              <a:defRPr sz="1000" b="1">
-                <a:solidFill>
-                  <a:srgbClr val="2B59D9"/>
-                </a:solidFill>
-                <a:latin typeface="Helvetica Neue"/>
-              </a:defRPr>
-            </a:pPr>
-            <a:r>
-              <a:t>REFERRAL SIGNALS</a:t>
-            </a:r>
-          </a:p>
-        </p:txBody>
-      </p:sp>
-      <p:sp>
-        <p:nvSpPr>
-          <p:cNvPr id="10" name="TextBox 9"/>
-          <p:cNvSpPr txBox="1"/>
-          <p:nvPr/>
-        </p:nvSpPr>
-        <p:spPr>
-          <a:xfrm>
-            <a:off x="731520" y="1024128"/>
-            <a:ext cx="10728655" cy="640080"/>
-          </a:xfrm>
-          <a:prstGeom prst="rect">
-            <a:avLst/>
-          </a:prstGeom>
-          <a:noFill/>
-        </p:spPr>
-        <p:txBody>
-          <a:bodyPr wrap="square" lIns="0" rIns="0" tIns="0" bIns="0">
-            <a:spAutoFit/>
-          </a:bodyPr>
-          <a:lstStyle/>
-          <a:p>
-            <a:pPr>
-              <a:defRPr sz="2500" b="1">
-                <a:solidFill>
-                  <a:srgbClr val="16161A"/>
-                </a:solidFill>
-                <a:latin typeface="Helvetica Neue"/>
-              </a:defRPr>
-            </a:pPr>
-            <a:r>
-              <a:t>What Prospects Say Right Before They Need Us</a:t>
-            </a:r>
-          </a:p>
-        </p:txBody>
-      </p:sp>
-      <p:sp>
-        <p:nvSpPr>
-          <p:cNvPr id="11" name="Rounded Rectangle 10"/>
-          <p:cNvSpPr/>
-          <p:nvPr/>
-        </p:nvSpPr>
-        <p:spPr>
-          <a:xfrm>
-            <a:off x="731520" y="1874519"/>
+            <a:off x="731520" y="1691640"/>
             <a:ext cx="10728655" cy="1261872"/>
           </a:xfrm>
           <a:prstGeom prst="roundRect">
@@ -6619,13 +5351,13 @@
       </p:sp>
       <p:sp>
         <p:nvSpPr>
-          <p:cNvPr id="12" name="TextBox 11"/>
+          <p:cNvPr id="5" name="TextBox 4"/>
           <p:cNvSpPr txBox="1"/>
           <p:nvPr/>
         </p:nvSpPr>
         <p:spPr>
           <a:xfrm>
-            <a:off x="1051560" y="2039111"/>
+            <a:off x="1051560" y="1874520"/>
             <a:ext cx="10058400" cy="914400"/>
           </a:xfrm>
           <a:prstGeom prst="rect">
@@ -6641,9 +5373,9 @@
           <a:p>
             <a:pPr>
               <a:spcAft>
-                <a:spcPts val="400"/>
+                <a:spcPts val="600"/>
               </a:spcAft>
-              <a:defRPr sz="1000" b="1">
+              <a:defRPr sz="1050" b="1">
                 <a:solidFill>
                   <a:srgbClr val="2B59D9"/>
                 </a:solidFill>
@@ -6671,13 +5403,13 @@
       </p:sp>
       <p:sp>
         <p:nvSpPr>
-          <p:cNvPr id="13" name="Rounded Rectangle 12"/>
+          <p:cNvPr id="6" name="Rounded Rectangle 5"/>
           <p:cNvSpPr/>
           <p:nvPr/>
         </p:nvSpPr>
         <p:spPr>
           <a:xfrm>
-            <a:off x="731520" y="3291839"/>
+            <a:off x="731520" y="3108960"/>
             <a:ext cx="10728655" cy="1261872"/>
           </a:xfrm>
           <a:prstGeom prst="roundRect">
@@ -6716,13 +5448,13 @@
       </p:sp>
       <p:sp>
         <p:nvSpPr>
-          <p:cNvPr id="14" name="TextBox 13"/>
+          <p:cNvPr id="7" name="TextBox 6"/>
           <p:cNvSpPr txBox="1"/>
           <p:nvPr/>
         </p:nvSpPr>
         <p:spPr>
           <a:xfrm>
-            <a:off x="1051560" y="3456431"/>
+            <a:off x="1051560" y="3291840"/>
             <a:ext cx="10058400" cy="914400"/>
           </a:xfrm>
           <a:prstGeom prst="rect">
@@ -6738,9 +5470,9 @@
           <a:p>
             <a:pPr>
               <a:spcAft>
-                <a:spcPts val="400"/>
+                <a:spcPts val="600"/>
               </a:spcAft>
-              <a:defRPr sz="1000" b="1">
+              <a:defRPr sz="1050" b="1">
                 <a:solidFill>
                   <a:srgbClr val="2B59D9"/>
                 </a:solidFill>
@@ -6768,13 +5500,13 @@
       </p:sp>
       <p:sp>
         <p:nvSpPr>
-          <p:cNvPr id="15" name="Rounded Rectangle 14"/>
+          <p:cNvPr id="8" name="Rounded Rectangle 7"/>
           <p:cNvSpPr/>
           <p:nvPr/>
         </p:nvSpPr>
         <p:spPr>
           <a:xfrm>
-            <a:off x="731520" y="4709160"/>
+            <a:off x="731520" y="4526280"/>
             <a:ext cx="10728655" cy="1261872"/>
           </a:xfrm>
           <a:prstGeom prst="roundRect">
@@ -6813,13 +5545,13 @@
       </p:sp>
       <p:sp>
         <p:nvSpPr>
-          <p:cNvPr id="16" name="TextBox 15"/>
+          <p:cNvPr id="9" name="TextBox 8"/>
           <p:cNvSpPr txBox="1"/>
           <p:nvPr/>
         </p:nvSpPr>
         <p:spPr>
           <a:xfrm>
-            <a:off x="1051560" y="4873752"/>
+            <a:off x="1051560" y="4709160"/>
             <a:ext cx="10058400" cy="914400"/>
           </a:xfrm>
           <a:prstGeom prst="rect">
@@ -6835,9 +5567,9 @@
           <a:p>
             <a:pPr>
               <a:spcAft>
-                <a:spcPts val="400"/>
+                <a:spcPts val="600"/>
               </a:spcAft>
-              <a:defRPr sz="1000" b="1">
+              <a:defRPr sz="1050" b="1">
                 <a:solidFill>
                   <a:srgbClr val="2B59D9"/>
                 </a:solidFill>
@@ -6865,13 +5597,13 @@
       </p:sp>
       <p:sp>
         <p:nvSpPr>
-          <p:cNvPr id="17" name="Rectangle 16"/>
+          <p:cNvPr id="10" name="Rectangle 9"/>
           <p:cNvSpPr/>
           <p:nvPr/>
         </p:nvSpPr>
         <p:spPr>
           <a:xfrm>
-            <a:off x="731520" y="6327648"/>
+            <a:off x="731520" y="6263640"/>
             <a:ext cx="10728655" cy="12700"/>
           </a:xfrm>
           <a:prstGeom prst="rect">
@@ -6908,13 +5640,13 @@
       </p:sp>
       <p:sp>
         <p:nvSpPr>
-          <p:cNvPr id="18" name="TextBox 17"/>
+          <p:cNvPr id="11" name="TextBox 10"/>
           <p:cNvSpPr txBox="1"/>
           <p:nvPr/>
         </p:nvSpPr>
         <p:spPr>
           <a:xfrm>
-            <a:off x="731520" y="6400800"/>
+            <a:off x="731520" y="6355080"/>
             <a:ext cx="7315200" cy="320040"/>
           </a:xfrm>
           <a:prstGeom prst="rect">
@@ -6937,20 +5669,20 @@
               </a:defRPr>
             </a:pPr>
             <a:r>
-              <a:t>technologyconsultants.ventures  ·  San Diego · Tijuana</a:t>
-            </a:r>
-          </a:p>
-        </p:txBody>
-      </p:sp>
-      <p:sp>
-        <p:nvSpPr>
-          <p:cNvPr id="19" name="TextBox 18"/>
+              <a:t>Technology Consultants  ·  technologyconsultants.ventures  ·  San Diego &amp; Tijuana</a:t>
+            </a:r>
+          </a:p>
+        </p:txBody>
+      </p:sp>
+      <p:sp>
+        <p:nvSpPr>
+          <p:cNvPr id="12" name="TextBox 11"/>
           <p:cNvSpPr txBox="1"/>
           <p:nvPr/>
         </p:nvSpPr>
         <p:spPr>
           <a:xfrm>
-            <a:off x="9631375" y="6400800"/>
+            <a:off x="9631375" y="6355080"/>
             <a:ext cx="1828800" cy="320040"/>
           </a:xfrm>
           <a:prstGeom prst="rect">
@@ -7006,102 +5738,14 @@
       <p:grpSpPr/>
       <p:sp>
         <p:nvSpPr>
-          <p:cNvPr id="2" name="Rectangle 1"/>
-          <p:cNvSpPr/>
-          <p:nvPr/>
-        </p:nvSpPr>
-        <p:spPr>
-          <a:xfrm>
-            <a:off x="0" y="0"/>
-            <a:ext cx="12191695" cy="594360"/>
-          </a:xfrm>
-          <a:prstGeom prst="rect">
-            <a:avLst/>
-          </a:prstGeom>
-          <a:solidFill>
-            <a:srgbClr val="121216"/>
-          </a:solidFill>
-          <a:ln w="12700">
-            <a:solidFill>
-              <a:srgbClr val="26262C"/>
-            </a:solidFill>
-          </a:ln>
-        </p:spPr>
-        <p:style>
-          <a:lnRef idx="1">
-            <a:schemeClr val="accent1"/>
-          </a:lnRef>
-          <a:fillRef idx="3">
-            <a:schemeClr val="accent1"/>
-          </a:fillRef>
-          <a:effectRef idx="2">
-            <a:schemeClr val="accent1"/>
-          </a:effectRef>
-          <a:fontRef idx="minor">
-            <a:schemeClr val="lt1"/>
-          </a:fontRef>
-        </p:style>
-        <p:txBody>
-          <a:bodyPr rtlCol="0" anchor="ctr"/>
-          <a:lstStyle/>
-          <a:p>
-            <a:pPr algn="ctr"/>
-          </a:p>
-        </p:txBody>
-      </p:sp>
-      <p:sp>
-        <p:nvSpPr>
-          <p:cNvPr id="3" name="Rounded Rectangle 2"/>
-          <p:cNvSpPr/>
-          <p:nvPr/>
-        </p:nvSpPr>
-        <p:spPr>
-          <a:xfrm>
-            <a:off x="731520" y="146304"/>
-            <a:ext cx="301752" cy="301752"/>
-          </a:xfrm>
-          <a:prstGeom prst="roundRect">
-            <a:avLst/>
-          </a:prstGeom>
-          <a:solidFill>
-            <a:srgbClr val="2B59D9"/>
-          </a:solidFill>
-          <a:ln>
-            <a:noFill/>
-          </a:ln>
-        </p:spPr>
-        <p:style>
-          <a:lnRef idx="1">
-            <a:schemeClr val="accent1"/>
-          </a:lnRef>
-          <a:fillRef idx="3">
-            <a:schemeClr val="accent1"/>
-          </a:fillRef>
-          <a:effectRef idx="2">
-            <a:schemeClr val="accent1"/>
-          </a:effectRef>
-          <a:fontRef idx="minor">
-            <a:schemeClr val="lt1"/>
-          </a:fontRef>
-        </p:style>
-        <p:txBody>
-          <a:bodyPr rtlCol="0" anchor="ctr"/>
-          <a:lstStyle/>
-          <a:p>
-            <a:pPr algn="ctr"/>
-          </a:p>
-        </p:txBody>
-      </p:sp>
-      <p:sp>
-        <p:nvSpPr>
-          <p:cNvPr id="4" name="TextBox 3"/>
+          <p:cNvPr id="2" name="TextBox 1"/>
           <p:cNvSpPr txBox="1"/>
           <p:nvPr/>
         </p:nvSpPr>
         <p:spPr>
           <a:xfrm>
-            <a:off x="731520" y="128016"/>
-            <a:ext cx="301752" cy="301752"/>
+            <a:off x="731520" y="502920"/>
+            <a:ext cx="10728655" cy="228600"/>
           </a:xfrm>
           <a:prstGeom prst="rect">
             <a:avLst/>
@@ -7114,30 +5758,30 @@
           </a:bodyPr>
           <a:lstStyle/>
           <a:p>
-            <a:pPr algn="ctr">
-              <a:defRPr sz="1600" b="1">
-                <a:solidFill>
-                  <a:srgbClr val="FFFFFF"/>
-                </a:solidFill>
-                <a:latin typeface="Helvetica Neue"/>
-              </a:defRPr>
-            </a:pPr>
-            <a:r>
-              <a:t>›</a:t>
-            </a:r>
-          </a:p>
-        </p:txBody>
-      </p:sp>
-      <p:sp>
-        <p:nvSpPr>
-          <p:cNvPr id="5" name="TextBox 4"/>
+            <a:pPr>
+              <a:defRPr sz="1050" b="1">
+                <a:solidFill>
+                  <a:srgbClr val="2B59D9"/>
+                </a:solidFill>
+                <a:latin typeface="Helvetica Neue"/>
+              </a:defRPr>
+            </a:pPr>
+            <a:r>
+              <a:t>PROVEN ARCHITECTURE</a:t>
+            </a:r>
+          </a:p>
+        </p:txBody>
+      </p:sp>
+      <p:sp>
+        <p:nvSpPr>
+          <p:cNvPr id="3" name="TextBox 2"/>
           <p:cNvSpPr txBox="1"/>
           <p:nvPr/>
         </p:nvSpPr>
         <p:spPr>
           <a:xfrm>
-            <a:off x="1143000" y="164592"/>
-            <a:ext cx="3200400" cy="292608"/>
+            <a:off x="731520" y="777240"/>
+            <a:ext cx="10728655" cy="685800"/>
           </a:xfrm>
           <a:prstGeom prst="rect">
             <a:avLst/>
@@ -7151,216 +5795,29 @@
           <a:lstStyle/>
           <a:p>
             <a:pPr>
-              <a:defRPr sz="1300" b="1">
-                <a:solidFill>
-                  <a:srgbClr val="FFFFFF"/>
-                </a:solidFill>
-                <a:latin typeface="Helvetica Neue"/>
-              </a:defRPr>
-            </a:pPr>
-            <a:r>
-              <a:t>Technology Consultants</a:t>
-            </a:r>
-          </a:p>
-        </p:txBody>
-      </p:sp>
-      <p:sp>
-        <p:nvSpPr>
-          <p:cNvPr id="6" name="TextBox 5"/>
-          <p:cNvSpPr txBox="1"/>
-          <p:nvPr/>
-        </p:nvSpPr>
-        <p:spPr>
-          <a:xfrm>
-            <a:off x="4572000" y="182880"/>
-            <a:ext cx="5212080" cy="292608"/>
-          </a:xfrm>
-          <a:prstGeom prst="rect">
-            <a:avLst/>
-          </a:prstGeom>
-          <a:noFill/>
-        </p:spPr>
-        <p:txBody>
-          <a:bodyPr wrap="square" lIns="0" rIns="0" tIns="0" bIns="0">
-            <a:spAutoFit/>
-          </a:bodyPr>
-          <a:lstStyle/>
-          <a:p>
-            <a:pPr algn="r">
-              <a:defRPr sz="1000">
-                <a:solidFill>
-                  <a:srgbClr val="BEC3CD"/>
-                </a:solidFill>
-                <a:latin typeface="Helvetica Neue"/>
-              </a:defRPr>
-            </a:pPr>
-            <a:r>
-              <a:t>Services   ·   Work   ·   How we work   ·   About   ·   FAQ</a:t>
-            </a:r>
-          </a:p>
-        </p:txBody>
-      </p:sp>
-      <p:sp>
-        <p:nvSpPr>
-          <p:cNvPr id="7" name="Rounded Rectangle 6"/>
+              <a:defRPr sz="2600" b="1">
+                <a:solidFill>
+                  <a:srgbClr val="16161A"/>
+                </a:solidFill>
+                <a:latin typeface="Helvetica Neue"/>
+              </a:defRPr>
+            </a:pPr>
+            <a:r>
+              <a:t>Tested Against Real Operational Systems</a:t>
+            </a:r>
+          </a:p>
+        </p:txBody>
+      </p:sp>
+      <p:sp>
+        <p:nvSpPr>
+          <p:cNvPr id="4" name="Rounded Rectangle 3"/>
           <p:cNvSpPr/>
           <p:nvPr/>
         </p:nvSpPr>
         <p:spPr>
           <a:xfrm>
-            <a:off x="9966960" y="128016"/>
-            <a:ext cx="1463040" cy="329184"/>
-          </a:xfrm>
-          <a:prstGeom prst="roundRect">
-            <a:avLst/>
-          </a:prstGeom>
-          <a:solidFill>
-            <a:srgbClr val="FFFFFF"/>
-          </a:solidFill>
-          <a:ln>
-            <a:noFill/>
-          </a:ln>
-        </p:spPr>
-        <p:style>
-          <a:lnRef idx="1">
-            <a:schemeClr val="accent1"/>
-          </a:lnRef>
-          <a:fillRef idx="3">
-            <a:schemeClr val="accent1"/>
-          </a:fillRef>
-          <a:effectRef idx="2">
-            <a:schemeClr val="accent1"/>
-          </a:effectRef>
-          <a:fontRef idx="minor">
-            <a:schemeClr val="lt1"/>
-          </a:fontRef>
-        </p:style>
-        <p:txBody>
-          <a:bodyPr rtlCol="0" anchor="ctr"/>
-          <a:lstStyle/>
-          <a:p>
-            <a:pPr algn="ctr"/>
-          </a:p>
-        </p:txBody>
-      </p:sp>
-      <p:sp>
-        <p:nvSpPr>
-          <p:cNvPr id="8" name="TextBox 7"/>
-          <p:cNvSpPr txBox="1"/>
-          <p:nvPr/>
-        </p:nvSpPr>
-        <p:spPr>
-          <a:xfrm>
-            <a:off x="9966960" y="164592"/>
-            <a:ext cx="1463040" cy="274320"/>
-          </a:xfrm>
-          <a:prstGeom prst="rect">
-            <a:avLst/>
-          </a:prstGeom>
-          <a:noFill/>
-        </p:spPr>
-        <p:txBody>
-          <a:bodyPr wrap="square" lIns="0" rIns="0" tIns="0" bIns="0">
-            <a:spAutoFit/>
-          </a:bodyPr>
-          <a:lstStyle/>
-          <a:p>
-            <a:pPr algn="ctr">
-              <a:defRPr sz="1000" b="1">
-                <a:solidFill>
-                  <a:srgbClr val="16161A"/>
-                </a:solidFill>
-                <a:latin typeface="Helvetica Neue"/>
-              </a:defRPr>
-            </a:pPr>
-            <a:r>
-              <a:t>Book a call</a:t>
-            </a:r>
-          </a:p>
-        </p:txBody>
-      </p:sp>
-      <p:sp>
-        <p:nvSpPr>
-          <p:cNvPr id="9" name="TextBox 8"/>
-          <p:cNvSpPr txBox="1"/>
-          <p:nvPr/>
-        </p:nvSpPr>
-        <p:spPr>
-          <a:xfrm>
-            <a:off x="731520" y="777240"/>
-            <a:ext cx="10728655" cy="228600"/>
-          </a:xfrm>
-          <a:prstGeom prst="rect">
-            <a:avLst/>
-          </a:prstGeom>
-          <a:noFill/>
-        </p:spPr>
-        <p:txBody>
-          <a:bodyPr wrap="square" lIns="0" rIns="0" tIns="0" bIns="0">
-            <a:spAutoFit/>
-          </a:bodyPr>
-          <a:lstStyle/>
-          <a:p>
-            <a:pPr>
-              <a:defRPr sz="1000" b="1">
-                <a:solidFill>
-                  <a:srgbClr val="2B59D9"/>
-                </a:solidFill>
-                <a:latin typeface="Helvetica Neue"/>
-              </a:defRPr>
-            </a:pPr>
-            <a:r>
-              <a:t>PROVEN ARCHITECTURE</a:t>
-            </a:r>
-          </a:p>
-        </p:txBody>
-      </p:sp>
-      <p:sp>
-        <p:nvSpPr>
-          <p:cNvPr id="10" name="TextBox 9"/>
-          <p:cNvSpPr txBox="1"/>
-          <p:nvPr/>
-        </p:nvSpPr>
-        <p:spPr>
-          <a:xfrm>
-            <a:off x="731520" y="1024128"/>
-            <a:ext cx="10728655" cy="640080"/>
-          </a:xfrm>
-          <a:prstGeom prst="rect">
-            <a:avLst/>
-          </a:prstGeom>
-          <a:noFill/>
-        </p:spPr>
-        <p:txBody>
-          <a:bodyPr wrap="square" lIns="0" rIns="0" tIns="0" bIns="0">
-            <a:spAutoFit/>
-          </a:bodyPr>
-          <a:lstStyle/>
-          <a:p>
-            <a:pPr>
-              <a:defRPr sz="2500" b="1">
-                <a:solidFill>
-                  <a:srgbClr val="16161A"/>
-                </a:solidFill>
-                <a:latin typeface="Helvetica Neue"/>
-              </a:defRPr>
-            </a:pPr>
-            <a:r>
-              <a:t>Tested Against Real Operational Systems</a:t>
-            </a:r>
-          </a:p>
-        </p:txBody>
-      </p:sp>
-      <p:sp>
-        <p:nvSpPr>
-          <p:cNvPr id="11" name="Rounded Rectangle 10"/>
-          <p:cNvSpPr/>
-          <p:nvPr/>
-        </p:nvSpPr>
-        <p:spPr>
-          <a:xfrm>
-            <a:off x="731520" y="1874519"/>
-            <a:ext cx="3328416" cy="3154680"/>
+            <a:off x="731520" y="1691640"/>
+            <a:ext cx="3328416" cy="3246120"/>
           </a:xfrm>
           <a:prstGeom prst="roundRect">
             <a:avLst/>
@@ -7398,14 +5855,14 @@
       </p:sp>
       <p:sp>
         <p:nvSpPr>
-          <p:cNvPr id="12" name="TextBox 11"/>
+          <p:cNvPr id="5" name="TextBox 4"/>
           <p:cNvSpPr txBox="1"/>
           <p:nvPr/>
         </p:nvSpPr>
         <p:spPr>
           <a:xfrm>
-            <a:off x="1051560" y="2103120"/>
-            <a:ext cx="2688336" cy="2743200"/>
+            <a:off x="1051560" y="1920240"/>
+            <a:ext cx="2688336" cy="2834640"/>
           </a:xfrm>
           <a:prstGeom prst="rect">
             <a:avLst/>
@@ -7466,14 +5923,14 @@
       </p:sp>
       <p:sp>
         <p:nvSpPr>
-          <p:cNvPr id="13" name="Rounded Rectangle 12"/>
+          <p:cNvPr id="6" name="Rounded Rectangle 5"/>
           <p:cNvSpPr/>
           <p:nvPr/>
         </p:nvSpPr>
         <p:spPr>
           <a:xfrm>
-            <a:off x="4334256" y="1874519"/>
-            <a:ext cx="3328416" cy="3154680"/>
+            <a:off x="4334256" y="1691640"/>
+            <a:ext cx="3328416" cy="3246120"/>
           </a:xfrm>
           <a:prstGeom prst="roundRect">
             <a:avLst/>
@@ -7511,14 +5968,14 @@
       </p:sp>
       <p:sp>
         <p:nvSpPr>
-          <p:cNvPr id="14" name="TextBox 13"/>
+          <p:cNvPr id="7" name="TextBox 6"/>
           <p:cNvSpPr txBox="1"/>
           <p:nvPr/>
         </p:nvSpPr>
         <p:spPr>
           <a:xfrm>
-            <a:off x="4654296" y="2103120"/>
-            <a:ext cx="2688336" cy="2743200"/>
+            <a:off x="4654296" y="1920240"/>
+            <a:ext cx="2688336" cy="2834640"/>
           </a:xfrm>
           <a:prstGeom prst="rect">
             <a:avLst/>
@@ -7579,14 +6036,14 @@
       </p:sp>
       <p:sp>
         <p:nvSpPr>
-          <p:cNvPr id="15" name="Rounded Rectangle 14"/>
+          <p:cNvPr id="8" name="Rounded Rectangle 7"/>
           <p:cNvSpPr/>
           <p:nvPr/>
         </p:nvSpPr>
         <p:spPr>
           <a:xfrm>
-            <a:off x="7936992" y="1874519"/>
-            <a:ext cx="3328416" cy="3154680"/>
+            <a:off x="7936992" y="1691640"/>
+            <a:ext cx="3328416" cy="3246120"/>
           </a:xfrm>
           <a:prstGeom prst="roundRect">
             <a:avLst/>
@@ -7624,14 +6081,14 @@
       </p:sp>
       <p:sp>
         <p:nvSpPr>
-          <p:cNvPr id="16" name="TextBox 15"/>
+          <p:cNvPr id="9" name="TextBox 8"/>
           <p:cNvSpPr txBox="1"/>
           <p:nvPr/>
         </p:nvSpPr>
         <p:spPr>
           <a:xfrm>
-            <a:off x="8257032" y="2103120"/>
-            <a:ext cx="2688336" cy="2743200"/>
+            <a:off x="8257032" y="1920240"/>
+            <a:ext cx="2688336" cy="2834640"/>
           </a:xfrm>
           <a:prstGeom prst="rect">
             <a:avLst/>
@@ -7692,13 +6149,13 @@
       </p:sp>
       <p:sp>
         <p:nvSpPr>
-          <p:cNvPr id="17" name="Rounded Rectangle 16"/>
+          <p:cNvPr id="10" name="Rounded Rectangle 9"/>
           <p:cNvSpPr/>
           <p:nvPr/>
         </p:nvSpPr>
         <p:spPr>
           <a:xfrm>
-            <a:off x="731520" y="5166360"/>
+            <a:off x="731520" y="5120640"/>
             <a:ext cx="2514600" cy="1005840"/>
           </a:xfrm>
           <a:prstGeom prst="roundRect">
@@ -7737,14 +6194,14 @@
       </p:sp>
       <p:sp>
         <p:nvSpPr>
-          <p:cNvPr id="18" name="TextBox 17"/>
+          <p:cNvPr id="11" name="TextBox 10"/>
           <p:cNvSpPr txBox="1"/>
           <p:nvPr/>
         </p:nvSpPr>
         <p:spPr>
           <a:xfrm>
-            <a:off x="914400" y="5257800"/>
-            <a:ext cx="2148840" cy="868680"/>
+            <a:off x="896112" y="5212080"/>
+            <a:ext cx="2185416" cy="868680"/>
           </a:xfrm>
           <a:prstGeom prst="rect">
             <a:avLst/>
@@ -7758,7 +6215,7 @@
           <a:lstStyle/>
           <a:p>
             <a:pPr>
-              <a:defRPr sz="1300" b="1">
+              <a:defRPr sz="1250" b="1">
                 <a:solidFill>
                   <a:srgbClr val="16161A"/>
                 </a:solidFill>
@@ -7789,13 +6246,13 @@
       </p:sp>
       <p:sp>
         <p:nvSpPr>
-          <p:cNvPr id="19" name="Rounded Rectangle 18"/>
+          <p:cNvPr id="12" name="Rounded Rectangle 11"/>
           <p:cNvSpPr/>
           <p:nvPr/>
         </p:nvSpPr>
         <p:spPr>
           <a:xfrm>
-            <a:off x="3429000" y="5166360"/>
+            <a:off x="3429000" y="5120640"/>
             <a:ext cx="2514600" cy="1005840"/>
           </a:xfrm>
           <a:prstGeom prst="roundRect">
@@ -7834,14 +6291,14 @@
       </p:sp>
       <p:sp>
         <p:nvSpPr>
-          <p:cNvPr id="20" name="TextBox 19"/>
+          <p:cNvPr id="13" name="TextBox 12"/>
           <p:cNvSpPr txBox="1"/>
           <p:nvPr/>
         </p:nvSpPr>
         <p:spPr>
           <a:xfrm>
-            <a:off x="3611880" y="5257800"/>
-            <a:ext cx="2148840" cy="868680"/>
+            <a:off x="3593592" y="5212080"/>
+            <a:ext cx="2185416" cy="868680"/>
           </a:xfrm>
           <a:prstGeom prst="rect">
             <a:avLst/>
@@ -7855,7 +6312,7 @@
           <a:lstStyle/>
           <a:p>
             <a:pPr>
-              <a:defRPr sz="1300" b="1">
+              <a:defRPr sz="1250" b="1">
                 <a:solidFill>
                   <a:srgbClr val="16161A"/>
                 </a:solidFill>
@@ -7886,13 +6343,13 @@
       </p:sp>
       <p:sp>
         <p:nvSpPr>
-          <p:cNvPr id="21" name="Rounded Rectangle 20"/>
+          <p:cNvPr id="14" name="Rounded Rectangle 13"/>
           <p:cNvSpPr/>
           <p:nvPr/>
         </p:nvSpPr>
         <p:spPr>
           <a:xfrm>
-            <a:off x="6126480" y="5166360"/>
+            <a:off x="6126480" y="5120640"/>
             <a:ext cx="2514600" cy="1005840"/>
           </a:xfrm>
           <a:prstGeom prst="roundRect">
@@ -7931,14 +6388,14 @@
       </p:sp>
       <p:sp>
         <p:nvSpPr>
-          <p:cNvPr id="22" name="TextBox 21"/>
+          <p:cNvPr id="15" name="TextBox 14"/>
           <p:cNvSpPr txBox="1"/>
           <p:nvPr/>
         </p:nvSpPr>
         <p:spPr>
           <a:xfrm>
-            <a:off x="6309360" y="5257800"/>
-            <a:ext cx="2148840" cy="868680"/>
+            <a:off x="6291072" y="5212080"/>
+            <a:ext cx="2185416" cy="868680"/>
           </a:xfrm>
           <a:prstGeom prst="rect">
             <a:avLst/>
@@ -7952,7 +6409,7 @@
           <a:lstStyle/>
           <a:p>
             <a:pPr>
-              <a:defRPr sz="1300" b="1">
+              <a:defRPr sz="1250" b="1">
                 <a:solidFill>
                   <a:srgbClr val="16161A"/>
                 </a:solidFill>
@@ -7983,13 +6440,13 @@
       </p:sp>
       <p:sp>
         <p:nvSpPr>
-          <p:cNvPr id="23" name="Rounded Rectangle 22"/>
+          <p:cNvPr id="16" name="Rounded Rectangle 15"/>
           <p:cNvSpPr/>
           <p:nvPr/>
         </p:nvSpPr>
         <p:spPr>
           <a:xfrm>
-            <a:off x="8823960" y="5166360"/>
+            <a:off x="8823960" y="5120640"/>
             <a:ext cx="2514600" cy="1005840"/>
           </a:xfrm>
           <a:prstGeom prst="roundRect">
@@ -8028,14 +6485,14 @@
       </p:sp>
       <p:sp>
         <p:nvSpPr>
-          <p:cNvPr id="24" name="TextBox 23"/>
+          <p:cNvPr id="17" name="TextBox 16"/>
           <p:cNvSpPr txBox="1"/>
           <p:nvPr/>
         </p:nvSpPr>
         <p:spPr>
           <a:xfrm>
-            <a:off x="9006840" y="5257800"/>
-            <a:ext cx="2148840" cy="868680"/>
+            <a:off x="8988552" y="5212080"/>
+            <a:ext cx="2185416" cy="868680"/>
           </a:xfrm>
           <a:prstGeom prst="rect">
             <a:avLst/>
@@ -8049,7 +6506,7 @@
           <a:lstStyle/>
           <a:p>
             <a:pPr>
-              <a:defRPr sz="1300" b="1">
+              <a:defRPr sz="1250" b="1">
                 <a:solidFill>
                   <a:srgbClr val="16161A"/>
                 </a:solidFill>
@@ -8080,13 +6537,13 @@
       </p:sp>
       <p:sp>
         <p:nvSpPr>
-          <p:cNvPr id="25" name="Rectangle 24"/>
+          <p:cNvPr id="18" name="Rectangle 17"/>
           <p:cNvSpPr/>
           <p:nvPr/>
         </p:nvSpPr>
         <p:spPr>
           <a:xfrm>
-            <a:off x="731520" y="6327648"/>
+            <a:off x="731520" y="6263640"/>
             <a:ext cx="10728655" cy="12700"/>
           </a:xfrm>
           <a:prstGeom prst="rect">
@@ -8123,13 +6580,13 @@
       </p:sp>
       <p:sp>
         <p:nvSpPr>
-          <p:cNvPr id="26" name="TextBox 25"/>
+          <p:cNvPr id="19" name="TextBox 18"/>
           <p:cNvSpPr txBox="1"/>
           <p:nvPr/>
         </p:nvSpPr>
         <p:spPr>
           <a:xfrm>
-            <a:off x="731520" y="6400800"/>
+            <a:off x="731520" y="6355080"/>
             <a:ext cx="7315200" cy="320040"/>
           </a:xfrm>
           <a:prstGeom prst="rect">
@@ -8152,20 +6609,20 @@
               </a:defRPr>
             </a:pPr>
             <a:r>
-              <a:t>technologyconsultants.ventures  ·  San Diego · Tijuana</a:t>
-            </a:r>
-          </a:p>
-        </p:txBody>
-      </p:sp>
-      <p:sp>
-        <p:nvSpPr>
-          <p:cNvPr id="27" name="TextBox 26"/>
+              <a:t>Technology Consultants  ·  technologyconsultants.ventures  ·  San Diego &amp; Tijuana</a:t>
+            </a:r>
+          </a:p>
+        </p:txBody>
+      </p:sp>
+      <p:sp>
+        <p:nvSpPr>
+          <p:cNvPr id="20" name="TextBox 19"/>
           <p:cNvSpPr txBox="1"/>
           <p:nvPr/>
         </p:nvSpPr>
         <p:spPr>
           <a:xfrm>
-            <a:off x="9631375" y="6400800"/>
+            <a:off x="9631375" y="6355080"/>
             <a:ext cx="1828800" cy="320040"/>
           </a:xfrm>
           <a:prstGeom prst="rect">
@@ -8221,102 +6678,14 @@
       <p:grpSpPr/>
       <p:sp>
         <p:nvSpPr>
-          <p:cNvPr id="2" name="Rectangle 1"/>
-          <p:cNvSpPr/>
-          <p:nvPr/>
-        </p:nvSpPr>
-        <p:spPr>
-          <a:xfrm>
-            <a:off x="0" y="0"/>
-            <a:ext cx="12191695" cy="594360"/>
-          </a:xfrm>
-          <a:prstGeom prst="rect">
-            <a:avLst/>
-          </a:prstGeom>
-          <a:solidFill>
-            <a:srgbClr val="121216"/>
-          </a:solidFill>
-          <a:ln w="12700">
-            <a:solidFill>
-              <a:srgbClr val="26262C"/>
-            </a:solidFill>
-          </a:ln>
-        </p:spPr>
-        <p:style>
-          <a:lnRef idx="1">
-            <a:schemeClr val="accent1"/>
-          </a:lnRef>
-          <a:fillRef idx="3">
-            <a:schemeClr val="accent1"/>
-          </a:fillRef>
-          <a:effectRef idx="2">
-            <a:schemeClr val="accent1"/>
-          </a:effectRef>
-          <a:fontRef idx="minor">
-            <a:schemeClr val="lt1"/>
-          </a:fontRef>
-        </p:style>
-        <p:txBody>
-          <a:bodyPr rtlCol="0" anchor="ctr"/>
-          <a:lstStyle/>
-          <a:p>
-            <a:pPr algn="ctr"/>
-          </a:p>
-        </p:txBody>
-      </p:sp>
-      <p:sp>
-        <p:nvSpPr>
-          <p:cNvPr id="3" name="Rounded Rectangle 2"/>
-          <p:cNvSpPr/>
-          <p:nvPr/>
-        </p:nvSpPr>
-        <p:spPr>
-          <a:xfrm>
-            <a:off x="731520" y="146304"/>
-            <a:ext cx="301752" cy="301752"/>
-          </a:xfrm>
-          <a:prstGeom prst="roundRect">
-            <a:avLst/>
-          </a:prstGeom>
-          <a:solidFill>
-            <a:srgbClr val="2B59D9"/>
-          </a:solidFill>
-          <a:ln>
-            <a:noFill/>
-          </a:ln>
-        </p:spPr>
-        <p:style>
-          <a:lnRef idx="1">
-            <a:schemeClr val="accent1"/>
-          </a:lnRef>
-          <a:fillRef idx="3">
-            <a:schemeClr val="accent1"/>
-          </a:fillRef>
-          <a:effectRef idx="2">
-            <a:schemeClr val="accent1"/>
-          </a:effectRef>
-          <a:fontRef idx="minor">
-            <a:schemeClr val="lt1"/>
-          </a:fontRef>
-        </p:style>
-        <p:txBody>
-          <a:bodyPr rtlCol="0" anchor="ctr"/>
-          <a:lstStyle/>
-          <a:p>
-            <a:pPr algn="ctr"/>
-          </a:p>
-        </p:txBody>
-      </p:sp>
-      <p:sp>
-        <p:nvSpPr>
-          <p:cNvPr id="4" name="TextBox 3"/>
+          <p:cNvPr id="2" name="TextBox 1"/>
           <p:cNvSpPr txBox="1"/>
           <p:nvPr/>
         </p:nvSpPr>
         <p:spPr>
           <a:xfrm>
-            <a:off x="731520" y="128016"/>
-            <a:ext cx="301752" cy="301752"/>
+            <a:off x="731520" y="502920"/>
+            <a:ext cx="10728655" cy="228600"/>
           </a:xfrm>
           <a:prstGeom prst="rect">
             <a:avLst/>
@@ -8329,30 +6698,30 @@
           </a:bodyPr>
           <a:lstStyle/>
           <a:p>
-            <a:pPr algn="ctr">
-              <a:defRPr sz="1600" b="1">
-                <a:solidFill>
-                  <a:srgbClr val="FFFFFF"/>
-                </a:solidFill>
-                <a:latin typeface="Helvetica Neue"/>
-              </a:defRPr>
-            </a:pPr>
-            <a:r>
-              <a:t>›</a:t>
-            </a:r>
-          </a:p>
-        </p:txBody>
-      </p:sp>
-      <p:sp>
-        <p:nvSpPr>
-          <p:cNvPr id="5" name="TextBox 4"/>
+            <a:pPr>
+              <a:defRPr sz="1050" b="1">
+                <a:solidFill>
+                  <a:srgbClr val="2B59D9"/>
+                </a:solidFill>
+                <a:latin typeface="Helvetica Neue"/>
+              </a:defRPr>
+            </a:pPr>
+            <a:r>
+              <a:t>FILTERING BAD FITS</a:t>
+            </a:r>
+          </a:p>
+        </p:txBody>
+      </p:sp>
+      <p:sp>
+        <p:nvSpPr>
+          <p:cNvPr id="3" name="TextBox 2"/>
           <p:cNvSpPr txBox="1"/>
           <p:nvPr/>
         </p:nvSpPr>
         <p:spPr>
           <a:xfrm>
-            <a:off x="1143000" y="164592"/>
-            <a:ext cx="3200400" cy="292608"/>
+            <a:off x="731520" y="777240"/>
+            <a:ext cx="10728655" cy="685800"/>
           </a:xfrm>
           <a:prstGeom prst="rect">
             <a:avLst/>
@@ -8366,216 +6735,29 @@
           <a:lstStyle/>
           <a:p>
             <a:pPr>
-              <a:defRPr sz="1300" b="1">
-                <a:solidFill>
-                  <a:srgbClr val="FFFFFF"/>
-                </a:solidFill>
-                <a:latin typeface="Helvetica Neue"/>
-              </a:defRPr>
-            </a:pPr>
-            <a:r>
-              <a:t>Technology Consultants</a:t>
-            </a:r>
-          </a:p>
-        </p:txBody>
-      </p:sp>
-      <p:sp>
-        <p:nvSpPr>
-          <p:cNvPr id="6" name="TextBox 5"/>
-          <p:cNvSpPr txBox="1"/>
-          <p:nvPr/>
-        </p:nvSpPr>
-        <p:spPr>
-          <a:xfrm>
-            <a:off x="4572000" y="182880"/>
-            <a:ext cx="5212080" cy="292608"/>
-          </a:xfrm>
-          <a:prstGeom prst="rect">
-            <a:avLst/>
-          </a:prstGeom>
-          <a:noFill/>
-        </p:spPr>
-        <p:txBody>
-          <a:bodyPr wrap="square" lIns="0" rIns="0" tIns="0" bIns="0">
-            <a:spAutoFit/>
-          </a:bodyPr>
-          <a:lstStyle/>
-          <a:p>
-            <a:pPr algn="r">
-              <a:defRPr sz="1000">
-                <a:solidFill>
-                  <a:srgbClr val="BEC3CD"/>
-                </a:solidFill>
-                <a:latin typeface="Helvetica Neue"/>
-              </a:defRPr>
-            </a:pPr>
-            <a:r>
-              <a:t>Services   ·   Work   ·   How we work   ·   About   ·   FAQ</a:t>
-            </a:r>
-          </a:p>
-        </p:txBody>
-      </p:sp>
-      <p:sp>
-        <p:nvSpPr>
-          <p:cNvPr id="7" name="Rounded Rectangle 6"/>
+              <a:defRPr sz="2600" b="1">
+                <a:solidFill>
+                  <a:srgbClr val="16161A"/>
+                </a:solidFill>
+                <a:latin typeface="Helvetica Neue"/>
+              </a:defRPr>
+            </a:pPr>
+            <a:r>
+              <a:t>Who is NOT a Fit? (Protects Referral Quality)</a:t>
+            </a:r>
+          </a:p>
+        </p:txBody>
+      </p:sp>
+      <p:sp>
+        <p:nvSpPr>
+          <p:cNvPr id="4" name="Rounded Rectangle 3"/>
           <p:cNvSpPr/>
           <p:nvPr/>
         </p:nvSpPr>
         <p:spPr>
           <a:xfrm>
-            <a:off x="9966960" y="128016"/>
-            <a:ext cx="1463040" cy="329184"/>
-          </a:xfrm>
-          <a:prstGeom prst="roundRect">
-            <a:avLst/>
-          </a:prstGeom>
-          <a:solidFill>
-            <a:srgbClr val="FFFFFF"/>
-          </a:solidFill>
-          <a:ln>
-            <a:noFill/>
-          </a:ln>
-        </p:spPr>
-        <p:style>
-          <a:lnRef idx="1">
-            <a:schemeClr val="accent1"/>
-          </a:lnRef>
-          <a:fillRef idx="3">
-            <a:schemeClr val="accent1"/>
-          </a:fillRef>
-          <a:effectRef idx="2">
-            <a:schemeClr val="accent1"/>
-          </a:effectRef>
-          <a:fontRef idx="minor">
-            <a:schemeClr val="lt1"/>
-          </a:fontRef>
-        </p:style>
-        <p:txBody>
-          <a:bodyPr rtlCol="0" anchor="ctr"/>
-          <a:lstStyle/>
-          <a:p>
-            <a:pPr algn="ctr"/>
-          </a:p>
-        </p:txBody>
-      </p:sp>
-      <p:sp>
-        <p:nvSpPr>
-          <p:cNvPr id="8" name="TextBox 7"/>
-          <p:cNvSpPr txBox="1"/>
-          <p:nvPr/>
-        </p:nvSpPr>
-        <p:spPr>
-          <a:xfrm>
-            <a:off x="9966960" y="164592"/>
-            <a:ext cx="1463040" cy="274320"/>
-          </a:xfrm>
-          <a:prstGeom prst="rect">
-            <a:avLst/>
-          </a:prstGeom>
-          <a:noFill/>
-        </p:spPr>
-        <p:txBody>
-          <a:bodyPr wrap="square" lIns="0" rIns="0" tIns="0" bIns="0">
-            <a:spAutoFit/>
-          </a:bodyPr>
-          <a:lstStyle/>
-          <a:p>
-            <a:pPr algn="ctr">
-              <a:defRPr sz="1000" b="1">
-                <a:solidFill>
-                  <a:srgbClr val="16161A"/>
-                </a:solidFill>
-                <a:latin typeface="Helvetica Neue"/>
-              </a:defRPr>
-            </a:pPr>
-            <a:r>
-              <a:t>Book a call</a:t>
-            </a:r>
-          </a:p>
-        </p:txBody>
-      </p:sp>
-      <p:sp>
-        <p:nvSpPr>
-          <p:cNvPr id="9" name="TextBox 8"/>
-          <p:cNvSpPr txBox="1"/>
-          <p:nvPr/>
-        </p:nvSpPr>
-        <p:spPr>
-          <a:xfrm>
-            <a:off x="731520" y="777240"/>
-            <a:ext cx="10728655" cy="228600"/>
-          </a:xfrm>
-          <a:prstGeom prst="rect">
-            <a:avLst/>
-          </a:prstGeom>
-          <a:noFill/>
-        </p:spPr>
-        <p:txBody>
-          <a:bodyPr wrap="square" lIns="0" rIns="0" tIns="0" bIns="0">
-            <a:spAutoFit/>
-          </a:bodyPr>
-          <a:lstStyle/>
-          <a:p>
-            <a:pPr>
-              <a:defRPr sz="1000" b="1">
-                <a:solidFill>
-                  <a:srgbClr val="2B59D9"/>
-                </a:solidFill>
-                <a:latin typeface="Helvetica Neue"/>
-              </a:defRPr>
-            </a:pPr>
-            <a:r>
-              <a:t>FILTERING BAD FITS</a:t>
-            </a:r>
-          </a:p>
-        </p:txBody>
-      </p:sp>
-      <p:sp>
-        <p:nvSpPr>
-          <p:cNvPr id="10" name="TextBox 9"/>
-          <p:cNvSpPr txBox="1"/>
-          <p:nvPr/>
-        </p:nvSpPr>
-        <p:spPr>
-          <a:xfrm>
-            <a:off x="731520" y="1024128"/>
-            <a:ext cx="10728655" cy="640080"/>
-          </a:xfrm>
-          <a:prstGeom prst="rect">
-            <a:avLst/>
-          </a:prstGeom>
-          <a:noFill/>
-        </p:spPr>
-        <p:txBody>
-          <a:bodyPr wrap="square" lIns="0" rIns="0" tIns="0" bIns="0">
-            <a:spAutoFit/>
-          </a:bodyPr>
-          <a:lstStyle/>
-          <a:p>
-            <a:pPr>
-              <a:defRPr sz="2500" b="1">
-                <a:solidFill>
-                  <a:srgbClr val="16161A"/>
-                </a:solidFill>
-                <a:latin typeface="Helvetica Neue"/>
-              </a:defRPr>
-            </a:pPr>
-            <a:r>
-              <a:t>Who is NOT a Fit? (Protects Referral Quality)</a:t>
-            </a:r>
-          </a:p>
-        </p:txBody>
-      </p:sp>
-      <p:sp>
-        <p:nvSpPr>
-          <p:cNvPr id="11" name="Rounded Rectangle 10"/>
-          <p:cNvSpPr/>
-          <p:nvPr/>
-        </p:nvSpPr>
-        <p:spPr>
-          <a:xfrm>
-            <a:off x="731520" y="1874519"/>
-            <a:ext cx="5157216" cy="4114800"/>
+            <a:off x="731520" y="1691640"/>
+            <a:ext cx="5157216" cy="4297680"/>
           </a:xfrm>
           <a:prstGeom prst="roundRect">
             <a:avLst/>
@@ -8613,14 +6795,14 @@
       </p:sp>
       <p:sp>
         <p:nvSpPr>
-          <p:cNvPr id="12" name="TextBox 11"/>
+          <p:cNvPr id="5" name="TextBox 4"/>
           <p:cNvSpPr txBox="1"/>
           <p:nvPr/>
         </p:nvSpPr>
         <p:spPr>
           <a:xfrm>
-            <a:off x="1051560" y="2194559"/>
-            <a:ext cx="4517136" cy="3566160"/>
+            <a:off x="1051560" y="2011680"/>
+            <a:ext cx="4517136" cy="3657600"/>
           </a:xfrm>
           <a:prstGeom prst="rect">
             <a:avLst/>
@@ -8635,7 +6817,7 @@
           <a:p>
             <a:pPr>
               <a:spcAft>
-                <a:spcPts val="1400"/>
+                <a:spcPts val="1600"/>
               </a:spcAft>
               <a:defRPr sz="1100" b="1">
                 <a:solidFill>
@@ -8651,7 +6833,7 @@
           <a:p>
             <a:pPr>
               <a:spcAft>
-                <a:spcPts val="800"/>
+                <a:spcPts val="1000"/>
               </a:spcAft>
               <a:defRPr sz="1250">
                 <a:solidFill>
@@ -8667,7 +6849,7 @@
           <a:p>
             <a:pPr>
               <a:spcAft>
-                <a:spcPts val="800"/>
+                <a:spcPts val="1000"/>
               </a:spcAft>
               <a:defRPr sz="1250">
                 <a:solidFill>
@@ -8683,7 +6865,7 @@
           <a:p>
             <a:pPr>
               <a:spcAft>
-                <a:spcPts val="800"/>
+                <a:spcPts val="1000"/>
               </a:spcAft>
               <a:defRPr sz="1250">
                 <a:solidFill>
@@ -8699,7 +6881,7 @@
           <a:p>
             <a:pPr>
               <a:spcAft>
-                <a:spcPts val="800"/>
+                <a:spcPts val="1000"/>
               </a:spcAft>
               <a:defRPr sz="1250">
                 <a:solidFill>
@@ -8716,14 +6898,14 @@
       </p:sp>
       <p:sp>
         <p:nvSpPr>
-          <p:cNvPr id="13" name="Rounded Rectangle 12"/>
+          <p:cNvPr id="6" name="Rounded Rectangle 5"/>
           <p:cNvSpPr/>
           <p:nvPr/>
         </p:nvSpPr>
         <p:spPr>
           <a:xfrm>
-            <a:off x="6300216" y="1874519"/>
-            <a:ext cx="5157216" cy="4114800"/>
+            <a:off x="6300216" y="1691640"/>
+            <a:ext cx="5157216" cy="4297680"/>
           </a:xfrm>
           <a:prstGeom prst="roundRect">
             <a:avLst/>
@@ -8761,14 +6943,14 @@
       </p:sp>
       <p:sp>
         <p:nvSpPr>
-          <p:cNvPr id="14" name="TextBox 13"/>
+          <p:cNvPr id="7" name="TextBox 6"/>
           <p:cNvSpPr txBox="1"/>
           <p:nvPr/>
         </p:nvSpPr>
         <p:spPr>
           <a:xfrm>
-            <a:off x="6620256" y="2194559"/>
-            <a:ext cx="4517136" cy="3566160"/>
+            <a:off x="6620256" y="2011680"/>
+            <a:ext cx="4517136" cy="3657600"/>
           </a:xfrm>
           <a:prstGeom prst="rect">
             <a:avLst/>
@@ -8783,7 +6965,7 @@
           <a:p>
             <a:pPr>
               <a:spcAft>
-                <a:spcPts val="1400"/>
+                <a:spcPts val="1600"/>
               </a:spcAft>
               <a:defRPr sz="1100" b="1">
                 <a:solidFill>
@@ -8799,7 +6981,7 @@
           <a:p>
             <a:pPr>
               <a:spcAft>
-                <a:spcPts val="800"/>
+                <a:spcPts val="1000"/>
               </a:spcAft>
               <a:defRPr sz="1250">
                 <a:solidFill>
@@ -8815,7 +6997,7 @@
           <a:p>
             <a:pPr>
               <a:spcAft>
-                <a:spcPts val="800"/>
+                <a:spcPts val="1000"/>
               </a:spcAft>
               <a:defRPr sz="1250">
                 <a:solidFill>
@@ -8831,7 +7013,7 @@
           <a:p>
             <a:pPr>
               <a:spcAft>
-                <a:spcPts val="800"/>
+                <a:spcPts val="1000"/>
               </a:spcAft>
               <a:defRPr sz="1250">
                 <a:solidFill>
@@ -8847,7 +7029,7 @@
           <a:p>
             <a:pPr>
               <a:spcAft>
-                <a:spcPts val="800"/>
+                <a:spcPts val="1000"/>
               </a:spcAft>
               <a:defRPr sz="1250">
                 <a:solidFill>
@@ -8864,13 +7046,13 @@
       </p:sp>
       <p:sp>
         <p:nvSpPr>
-          <p:cNvPr id="15" name="Rectangle 14"/>
+          <p:cNvPr id="8" name="Rectangle 7"/>
           <p:cNvSpPr/>
           <p:nvPr/>
         </p:nvSpPr>
         <p:spPr>
           <a:xfrm>
-            <a:off x="731520" y="6327648"/>
+            <a:off x="731520" y="6263640"/>
             <a:ext cx="10728655" cy="12700"/>
           </a:xfrm>
           <a:prstGeom prst="rect">
@@ -8907,13 +7089,13 @@
       </p:sp>
       <p:sp>
         <p:nvSpPr>
-          <p:cNvPr id="16" name="TextBox 15"/>
+          <p:cNvPr id="9" name="TextBox 8"/>
           <p:cNvSpPr txBox="1"/>
           <p:nvPr/>
         </p:nvSpPr>
         <p:spPr>
           <a:xfrm>
-            <a:off x="731520" y="6400800"/>
+            <a:off x="731520" y="6355080"/>
             <a:ext cx="7315200" cy="320040"/>
           </a:xfrm>
           <a:prstGeom prst="rect">
@@ -8936,20 +7118,20 @@
               </a:defRPr>
             </a:pPr>
             <a:r>
-              <a:t>technologyconsultants.ventures  ·  San Diego · Tijuana</a:t>
-            </a:r>
-          </a:p>
-        </p:txBody>
-      </p:sp>
-      <p:sp>
-        <p:nvSpPr>
-          <p:cNvPr id="17" name="TextBox 16"/>
+              <a:t>Technology Consultants  ·  technologyconsultants.ventures  ·  San Diego &amp; Tijuana</a:t>
+            </a:r>
+          </a:p>
+        </p:txBody>
+      </p:sp>
+      <p:sp>
+        <p:nvSpPr>
+          <p:cNvPr id="10" name="TextBox 9"/>
           <p:cNvSpPr txBox="1"/>
           <p:nvPr/>
         </p:nvSpPr>
         <p:spPr>
           <a:xfrm>
-            <a:off x="9631375" y="6400800"/>
+            <a:off x="9631375" y="6355080"/>
             <a:ext cx="1828800" cy="320040"/>
           </a:xfrm>
           <a:prstGeom prst="rect">
@@ -9005,102 +7187,14 @@
       <p:grpSpPr/>
       <p:sp>
         <p:nvSpPr>
-          <p:cNvPr id="2" name="Rectangle 1"/>
-          <p:cNvSpPr/>
-          <p:nvPr/>
-        </p:nvSpPr>
-        <p:spPr>
-          <a:xfrm>
-            <a:off x="0" y="0"/>
-            <a:ext cx="12191695" cy="594360"/>
-          </a:xfrm>
-          <a:prstGeom prst="rect">
-            <a:avLst/>
-          </a:prstGeom>
-          <a:solidFill>
-            <a:srgbClr val="121216"/>
-          </a:solidFill>
-          <a:ln w="12700">
-            <a:solidFill>
-              <a:srgbClr val="26262C"/>
-            </a:solidFill>
-          </a:ln>
-        </p:spPr>
-        <p:style>
-          <a:lnRef idx="1">
-            <a:schemeClr val="accent1"/>
-          </a:lnRef>
-          <a:fillRef idx="3">
-            <a:schemeClr val="accent1"/>
-          </a:fillRef>
-          <a:effectRef idx="2">
-            <a:schemeClr val="accent1"/>
-          </a:effectRef>
-          <a:fontRef idx="minor">
-            <a:schemeClr val="lt1"/>
-          </a:fontRef>
-        </p:style>
-        <p:txBody>
-          <a:bodyPr rtlCol="0" anchor="ctr"/>
-          <a:lstStyle/>
-          <a:p>
-            <a:pPr algn="ctr"/>
-          </a:p>
-        </p:txBody>
-      </p:sp>
-      <p:sp>
-        <p:nvSpPr>
-          <p:cNvPr id="3" name="Rounded Rectangle 2"/>
-          <p:cNvSpPr/>
-          <p:nvPr/>
-        </p:nvSpPr>
-        <p:spPr>
-          <a:xfrm>
-            <a:off x="731520" y="146304"/>
-            <a:ext cx="301752" cy="301752"/>
-          </a:xfrm>
-          <a:prstGeom prst="roundRect">
-            <a:avLst/>
-          </a:prstGeom>
-          <a:solidFill>
-            <a:srgbClr val="2B59D9"/>
-          </a:solidFill>
-          <a:ln>
-            <a:noFill/>
-          </a:ln>
-        </p:spPr>
-        <p:style>
-          <a:lnRef idx="1">
-            <a:schemeClr val="accent1"/>
-          </a:lnRef>
-          <a:fillRef idx="3">
-            <a:schemeClr val="accent1"/>
-          </a:fillRef>
-          <a:effectRef idx="2">
-            <a:schemeClr val="accent1"/>
-          </a:effectRef>
-          <a:fontRef idx="minor">
-            <a:schemeClr val="lt1"/>
-          </a:fontRef>
-        </p:style>
-        <p:txBody>
-          <a:bodyPr rtlCol="0" anchor="ctr"/>
-          <a:lstStyle/>
-          <a:p>
-            <a:pPr algn="ctr"/>
-          </a:p>
-        </p:txBody>
-      </p:sp>
-      <p:sp>
-        <p:nvSpPr>
-          <p:cNvPr id="4" name="TextBox 3"/>
+          <p:cNvPr id="2" name="TextBox 1"/>
           <p:cNvSpPr txBox="1"/>
           <p:nvPr/>
         </p:nvSpPr>
         <p:spPr>
           <a:xfrm>
-            <a:off x="731520" y="128016"/>
-            <a:ext cx="301752" cy="301752"/>
+            <a:off x="731520" y="502920"/>
+            <a:ext cx="10728655" cy="228600"/>
           </a:xfrm>
           <a:prstGeom prst="rect">
             <a:avLst/>
@@ -9113,30 +7207,30 @@
           </a:bodyPr>
           <a:lstStyle/>
           <a:p>
-            <a:pPr algn="ctr">
-              <a:defRPr sz="1600" b="1">
-                <a:solidFill>
-                  <a:srgbClr val="FFFFFF"/>
-                </a:solidFill>
-                <a:latin typeface="Helvetica Neue"/>
-              </a:defRPr>
-            </a:pPr>
-            <a:r>
-              <a:t>›</a:t>
-            </a:r>
-          </a:p>
-        </p:txBody>
-      </p:sp>
-      <p:sp>
-        <p:nvSpPr>
-          <p:cNvPr id="5" name="TextBox 4"/>
+            <a:pPr>
+              <a:defRPr sz="1050" b="1">
+                <a:solidFill>
+                  <a:srgbClr val="2B59D9"/>
+                </a:solidFill>
+                <a:latin typeface="Helvetica Neue"/>
+              </a:defRPr>
+            </a:pPr>
+            <a:r>
+              <a:t>ENGAGEMENT MODELS</a:t>
+            </a:r>
+          </a:p>
+        </p:txBody>
+      </p:sp>
+      <p:sp>
+        <p:nvSpPr>
+          <p:cNvPr id="3" name="TextBox 2"/>
           <p:cNvSpPr txBox="1"/>
           <p:nvPr/>
         </p:nvSpPr>
         <p:spPr>
           <a:xfrm>
-            <a:off x="1143000" y="164592"/>
-            <a:ext cx="3200400" cy="292608"/>
+            <a:off x="731520" y="777240"/>
+            <a:ext cx="10728655" cy="685800"/>
           </a:xfrm>
           <a:prstGeom prst="rect">
             <a:avLst/>
@@ -9150,216 +7244,29 @@
           <a:lstStyle/>
           <a:p>
             <a:pPr>
-              <a:defRPr sz="1300" b="1">
-                <a:solidFill>
-                  <a:srgbClr val="FFFFFF"/>
-                </a:solidFill>
-                <a:latin typeface="Helvetica Neue"/>
-              </a:defRPr>
-            </a:pPr>
-            <a:r>
-              <a:t>Technology Consultants</a:t>
-            </a:r>
-          </a:p>
-        </p:txBody>
-      </p:sp>
-      <p:sp>
-        <p:nvSpPr>
-          <p:cNvPr id="6" name="TextBox 5"/>
-          <p:cNvSpPr txBox="1"/>
-          <p:nvPr/>
-        </p:nvSpPr>
-        <p:spPr>
-          <a:xfrm>
-            <a:off x="4572000" y="182880"/>
-            <a:ext cx="5212080" cy="292608"/>
-          </a:xfrm>
-          <a:prstGeom prst="rect">
-            <a:avLst/>
-          </a:prstGeom>
-          <a:noFill/>
-        </p:spPr>
-        <p:txBody>
-          <a:bodyPr wrap="square" lIns="0" rIns="0" tIns="0" bIns="0">
-            <a:spAutoFit/>
-          </a:bodyPr>
-          <a:lstStyle/>
-          <a:p>
-            <a:pPr algn="r">
-              <a:defRPr sz="1000">
-                <a:solidFill>
-                  <a:srgbClr val="BEC3CD"/>
-                </a:solidFill>
-                <a:latin typeface="Helvetica Neue"/>
-              </a:defRPr>
-            </a:pPr>
-            <a:r>
-              <a:t>Services   ·   Work   ·   How we work   ·   About   ·   FAQ</a:t>
-            </a:r>
-          </a:p>
-        </p:txBody>
-      </p:sp>
-      <p:sp>
-        <p:nvSpPr>
-          <p:cNvPr id="7" name="Rounded Rectangle 6"/>
+              <a:defRPr sz="2600" b="1">
+                <a:solidFill>
+                  <a:srgbClr val="16161A"/>
+                </a:solidFill>
+                <a:latin typeface="Helvetica Neue"/>
+              </a:defRPr>
+            </a:pPr>
+            <a:r>
+              <a:t>Flexible Engagement Models for Clients</a:t>
+            </a:r>
+          </a:p>
+        </p:txBody>
+      </p:sp>
+      <p:sp>
+        <p:nvSpPr>
+          <p:cNvPr id="4" name="Rounded Rectangle 3"/>
           <p:cNvSpPr/>
           <p:nvPr/>
         </p:nvSpPr>
         <p:spPr>
           <a:xfrm>
-            <a:off x="9966960" y="128016"/>
-            <a:ext cx="1463040" cy="329184"/>
-          </a:xfrm>
-          <a:prstGeom prst="roundRect">
-            <a:avLst/>
-          </a:prstGeom>
-          <a:solidFill>
-            <a:srgbClr val="FFFFFF"/>
-          </a:solidFill>
-          <a:ln>
-            <a:noFill/>
-          </a:ln>
-        </p:spPr>
-        <p:style>
-          <a:lnRef idx="1">
-            <a:schemeClr val="accent1"/>
-          </a:lnRef>
-          <a:fillRef idx="3">
-            <a:schemeClr val="accent1"/>
-          </a:fillRef>
-          <a:effectRef idx="2">
-            <a:schemeClr val="accent1"/>
-          </a:effectRef>
-          <a:fontRef idx="minor">
-            <a:schemeClr val="lt1"/>
-          </a:fontRef>
-        </p:style>
-        <p:txBody>
-          <a:bodyPr rtlCol="0" anchor="ctr"/>
-          <a:lstStyle/>
-          <a:p>
-            <a:pPr algn="ctr"/>
-          </a:p>
-        </p:txBody>
-      </p:sp>
-      <p:sp>
-        <p:nvSpPr>
-          <p:cNvPr id="8" name="TextBox 7"/>
-          <p:cNvSpPr txBox="1"/>
-          <p:nvPr/>
-        </p:nvSpPr>
-        <p:spPr>
-          <a:xfrm>
-            <a:off x="9966960" y="164592"/>
-            <a:ext cx="1463040" cy="274320"/>
-          </a:xfrm>
-          <a:prstGeom prst="rect">
-            <a:avLst/>
-          </a:prstGeom>
-          <a:noFill/>
-        </p:spPr>
-        <p:txBody>
-          <a:bodyPr wrap="square" lIns="0" rIns="0" tIns="0" bIns="0">
-            <a:spAutoFit/>
-          </a:bodyPr>
-          <a:lstStyle/>
-          <a:p>
-            <a:pPr algn="ctr">
-              <a:defRPr sz="1000" b="1">
-                <a:solidFill>
-                  <a:srgbClr val="16161A"/>
-                </a:solidFill>
-                <a:latin typeface="Helvetica Neue"/>
-              </a:defRPr>
-            </a:pPr>
-            <a:r>
-              <a:t>Book a call</a:t>
-            </a:r>
-          </a:p>
-        </p:txBody>
-      </p:sp>
-      <p:sp>
-        <p:nvSpPr>
-          <p:cNvPr id="9" name="TextBox 8"/>
-          <p:cNvSpPr txBox="1"/>
-          <p:nvPr/>
-        </p:nvSpPr>
-        <p:spPr>
-          <a:xfrm>
-            <a:off x="731520" y="777240"/>
-            <a:ext cx="10728655" cy="228600"/>
-          </a:xfrm>
-          <a:prstGeom prst="rect">
-            <a:avLst/>
-          </a:prstGeom>
-          <a:noFill/>
-        </p:spPr>
-        <p:txBody>
-          <a:bodyPr wrap="square" lIns="0" rIns="0" tIns="0" bIns="0">
-            <a:spAutoFit/>
-          </a:bodyPr>
-          <a:lstStyle/>
-          <a:p>
-            <a:pPr>
-              <a:defRPr sz="1000" b="1">
-                <a:solidFill>
-                  <a:srgbClr val="2B59D9"/>
-                </a:solidFill>
-                <a:latin typeface="Helvetica Neue"/>
-              </a:defRPr>
-            </a:pPr>
-            <a:r>
-              <a:t>ENGAGEMENT MODELS</a:t>
-            </a:r>
-          </a:p>
-        </p:txBody>
-      </p:sp>
-      <p:sp>
-        <p:nvSpPr>
-          <p:cNvPr id="10" name="TextBox 9"/>
-          <p:cNvSpPr txBox="1"/>
-          <p:nvPr/>
-        </p:nvSpPr>
-        <p:spPr>
-          <a:xfrm>
-            <a:off x="731520" y="1024128"/>
-            <a:ext cx="10728655" cy="640080"/>
-          </a:xfrm>
-          <a:prstGeom prst="rect">
-            <a:avLst/>
-          </a:prstGeom>
-          <a:noFill/>
-        </p:spPr>
-        <p:txBody>
-          <a:bodyPr wrap="square" lIns="0" rIns="0" tIns="0" bIns="0">
-            <a:spAutoFit/>
-          </a:bodyPr>
-          <a:lstStyle/>
-          <a:p>
-            <a:pPr>
-              <a:defRPr sz="2500" b="1">
-                <a:solidFill>
-                  <a:srgbClr val="16161A"/>
-                </a:solidFill>
-                <a:latin typeface="Helvetica Neue"/>
-              </a:defRPr>
-            </a:pPr>
-            <a:r>
-              <a:t>Flexible Engagement Models for Clients</a:t>
-            </a:r>
-          </a:p>
-        </p:txBody>
-      </p:sp>
-      <p:sp>
-        <p:nvSpPr>
-          <p:cNvPr id="11" name="Rounded Rectangle 10"/>
-          <p:cNvSpPr/>
-          <p:nvPr/>
-        </p:nvSpPr>
-        <p:spPr>
-          <a:xfrm>
-            <a:off x="731520" y="1874519"/>
-            <a:ext cx="3328416" cy="4114800"/>
+            <a:off x="731520" y="1691640"/>
+            <a:ext cx="3328416" cy="4297680"/>
           </a:xfrm>
           <a:prstGeom prst="roundRect">
             <a:avLst/>
@@ -9397,14 +7304,14 @@
       </p:sp>
       <p:sp>
         <p:nvSpPr>
-          <p:cNvPr id="12" name="TextBox 11"/>
+          <p:cNvPr id="5" name="TextBox 4"/>
           <p:cNvSpPr txBox="1"/>
           <p:nvPr/>
         </p:nvSpPr>
         <p:spPr>
           <a:xfrm>
-            <a:off x="1051560" y="2194560"/>
-            <a:ext cx="2688336" cy="3474720"/>
+            <a:off x="1051560" y="2011680"/>
+            <a:ext cx="2688336" cy="3657600"/>
           </a:xfrm>
           <a:prstGeom prst="rect">
             <a:avLst/>
@@ -9421,7 +7328,7 @@
               <a:spcAft>
                 <a:spcPts val="1000"/>
               </a:spcAft>
-              <a:defRPr sz="1000" b="1">
+              <a:defRPr sz="1050" b="1">
                 <a:solidFill>
                   <a:srgbClr val="2B59D9"/>
                 </a:solidFill>
@@ -9435,7 +7342,7 @@
           <a:p>
             <a:pPr>
               <a:spcAft>
-                <a:spcPts val="1200"/>
+                <a:spcPts val="1400"/>
               </a:spcAft>
               <a:defRPr sz="1800" b="1">
                 <a:solidFill>
@@ -9465,14 +7372,14 @@
       </p:sp>
       <p:sp>
         <p:nvSpPr>
-          <p:cNvPr id="13" name="Rounded Rectangle 12"/>
+          <p:cNvPr id="6" name="Rounded Rectangle 5"/>
           <p:cNvSpPr/>
           <p:nvPr/>
         </p:nvSpPr>
         <p:spPr>
           <a:xfrm>
-            <a:off x="4334256" y="1874519"/>
-            <a:ext cx="3328416" cy="4114800"/>
+            <a:off x="4334256" y="1691640"/>
+            <a:ext cx="3328416" cy="4297680"/>
           </a:xfrm>
           <a:prstGeom prst="roundRect">
             <a:avLst/>
@@ -9510,14 +7417,14 @@
       </p:sp>
       <p:sp>
         <p:nvSpPr>
-          <p:cNvPr id="14" name="TextBox 13"/>
+          <p:cNvPr id="7" name="TextBox 6"/>
           <p:cNvSpPr txBox="1"/>
           <p:nvPr/>
         </p:nvSpPr>
         <p:spPr>
           <a:xfrm>
-            <a:off x="4654296" y="2194560"/>
-            <a:ext cx="2688336" cy="3474720"/>
+            <a:off x="4654296" y="2011680"/>
+            <a:ext cx="2688336" cy="3657600"/>
           </a:xfrm>
           <a:prstGeom prst="rect">
             <a:avLst/>
@@ -9534,7 +7441,7 @@
               <a:spcAft>
                 <a:spcPts val="1000"/>
               </a:spcAft>
-              <a:defRPr sz="1000" b="1">
+              <a:defRPr sz="1050" b="1">
                 <a:solidFill>
                   <a:srgbClr val="2B59D9"/>
                 </a:solidFill>
@@ -9548,7 +7455,7 @@
           <a:p>
             <a:pPr>
               <a:spcAft>
-                <a:spcPts val="1200"/>
+                <a:spcPts val="1400"/>
               </a:spcAft>
               <a:defRPr sz="1800" b="1">
                 <a:solidFill>
@@ -9578,14 +7485,14 @@
       </p:sp>
       <p:sp>
         <p:nvSpPr>
-          <p:cNvPr id="15" name="Rounded Rectangle 14"/>
+          <p:cNvPr id="8" name="Rounded Rectangle 7"/>
           <p:cNvSpPr/>
           <p:nvPr/>
         </p:nvSpPr>
         <p:spPr>
           <a:xfrm>
-            <a:off x="7936992" y="1874519"/>
-            <a:ext cx="3328416" cy="4114800"/>
+            <a:off x="7936992" y="1691640"/>
+            <a:ext cx="3328416" cy="4297680"/>
           </a:xfrm>
           <a:prstGeom prst="roundRect">
             <a:avLst/>
@@ -9623,14 +7530,14 @@
       </p:sp>
       <p:sp>
         <p:nvSpPr>
-          <p:cNvPr id="16" name="TextBox 15"/>
+          <p:cNvPr id="9" name="TextBox 8"/>
           <p:cNvSpPr txBox="1"/>
           <p:nvPr/>
         </p:nvSpPr>
         <p:spPr>
           <a:xfrm>
-            <a:off x="8257032" y="2194560"/>
-            <a:ext cx="2688336" cy="3474720"/>
+            <a:off x="8257032" y="2011680"/>
+            <a:ext cx="2688336" cy="3657600"/>
           </a:xfrm>
           <a:prstGeom prst="rect">
             <a:avLst/>
@@ -9647,7 +7554,7 @@
               <a:spcAft>
                 <a:spcPts val="1000"/>
               </a:spcAft>
-              <a:defRPr sz="1000" b="1">
+              <a:defRPr sz="1050" b="1">
                 <a:solidFill>
                   <a:srgbClr val="2B59D9"/>
                 </a:solidFill>
@@ -9661,7 +7568,7 @@
           <a:p>
             <a:pPr>
               <a:spcAft>
-                <a:spcPts val="1200"/>
+                <a:spcPts val="1400"/>
               </a:spcAft>
               <a:defRPr sz="1800" b="1">
                 <a:solidFill>
@@ -9691,13 +7598,13 @@
       </p:sp>
       <p:sp>
         <p:nvSpPr>
-          <p:cNvPr id="17" name="Rectangle 16"/>
+          <p:cNvPr id="10" name="Rectangle 9"/>
           <p:cNvSpPr/>
           <p:nvPr/>
         </p:nvSpPr>
         <p:spPr>
           <a:xfrm>
-            <a:off x="731520" y="6327648"/>
+            <a:off x="731520" y="6263640"/>
             <a:ext cx="10728655" cy="12700"/>
           </a:xfrm>
           <a:prstGeom prst="rect">
@@ -9734,13 +7641,13 @@
       </p:sp>
       <p:sp>
         <p:nvSpPr>
-          <p:cNvPr id="18" name="TextBox 17"/>
+          <p:cNvPr id="11" name="TextBox 10"/>
           <p:cNvSpPr txBox="1"/>
           <p:nvPr/>
         </p:nvSpPr>
         <p:spPr>
           <a:xfrm>
-            <a:off x="731520" y="6400800"/>
+            <a:off x="731520" y="6355080"/>
             <a:ext cx="7315200" cy="320040"/>
           </a:xfrm>
           <a:prstGeom prst="rect">
@@ -9763,20 +7670,20 @@
               </a:defRPr>
             </a:pPr>
             <a:r>
-              <a:t>technologyconsultants.ventures  ·  San Diego · Tijuana</a:t>
-            </a:r>
-          </a:p>
-        </p:txBody>
-      </p:sp>
-      <p:sp>
-        <p:nvSpPr>
-          <p:cNvPr id="19" name="TextBox 18"/>
+              <a:t>Technology Consultants  ·  technologyconsultants.ventures  ·  San Diego &amp; Tijuana</a:t>
+            </a:r>
+          </a:p>
+        </p:txBody>
+      </p:sp>
+      <p:sp>
+        <p:nvSpPr>
+          <p:cNvPr id="12" name="TextBox 11"/>
           <p:cNvSpPr txBox="1"/>
           <p:nvPr/>
         </p:nvSpPr>
         <p:spPr>
           <a:xfrm>
-            <a:off x="9631375" y="6400800"/>
+            <a:off x="9631375" y="6355080"/>
             <a:ext cx="1828800" cy="320040"/>
           </a:xfrm>
           <a:prstGeom prst="rect">
@@ -9832,102 +7739,14 @@
       <p:grpSpPr/>
       <p:sp>
         <p:nvSpPr>
-          <p:cNvPr id="2" name="Rectangle 1"/>
-          <p:cNvSpPr/>
-          <p:nvPr/>
-        </p:nvSpPr>
-        <p:spPr>
-          <a:xfrm>
-            <a:off x="0" y="0"/>
-            <a:ext cx="12191695" cy="594360"/>
-          </a:xfrm>
-          <a:prstGeom prst="rect">
-            <a:avLst/>
-          </a:prstGeom>
-          <a:solidFill>
-            <a:srgbClr val="121216"/>
-          </a:solidFill>
-          <a:ln w="12700">
-            <a:solidFill>
-              <a:srgbClr val="26262C"/>
-            </a:solidFill>
-          </a:ln>
-        </p:spPr>
-        <p:style>
-          <a:lnRef idx="1">
-            <a:schemeClr val="accent1"/>
-          </a:lnRef>
-          <a:fillRef idx="3">
-            <a:schemeClr val="accent1"/>
-          </a:fillRef>
-          <a:effectRef idx="2">
-            <a:schemeClr val="accent1"/>
-          </a:effectRef>
-          <a:fontRef idx="minor">
-            <a:schemeClr val="lt1"/>
-          </a:fontRef>
-        </p:style>
-        <p:txBody>
-          <a:bodyPr rtlCol="0" anchor="ctr"/>
-          <a:lstStyle/>
-          <a:p>
-            <a:pPr algn="ctr"/>
-          </a:p>
-        </p:txBody>
-      </p:sp>
-      <p:sp>
-        <p:nvSpPr>
-          <p:cNvPr id="3" name="Rounded Rectangle 2"/>
-          <p:cNvSpPr/>
-          <p:nvPr/>
-        </p:nvSpPr>
-        <p:spPr>
-          <a:xfrm>
-            <a:off x="731520" y="146304"/>
-            <a:ext cx="301752" cy="301752"/>
-          </a:xfrm>
-          <a:prstGeom prst="roundRect">
-            <a:avLst/>
-          </a:prstGeom>
-          <a:solidFill>
-            <a:srgbClr val="2B59D9"/>
-          </a:solidFill>
-          <a:ln>
-            <a:noFill/>
-          </a:ln>
-        </p:spPr>
-        <p:style>
-          <a:lnRef idx="1">
-            <a:schemeClr val="accent1"/>
-          </a:lnRef>
-          <a:fillRef idx="3">
-            <a:schemeClr val="accent1"/>
-          </a:fillRef>
-          <a:effectRef idx="2">
-            <a:schemeClr val="accent1"/>
-          </a:effectRef>
-          <a:fontRef idx="minor">
-            <a:schemeClr val="lt1"/>
-          </a:fontRef>
-        </p:style>
-        <p:txBody>
-          <a:bodyPr rtlCol="0" anchor="ctr"/>
-          <a:lstStyle/>
-          <a:p>
-            <a:pPr algn="ctr"/>
-          </a:p>
-        </p:txBody>
-      </p:sp>
-      <p:sp>
-        <p:nvSpPr>
-          <p:cNvPr id="4" name="TextBox 3"/>
+          <p:cNvPr id="2" name="TextBox 1"/>
           <p:cNvSpPr txBox="1"/>
           <p:nvPr/>
         </p:nvSpPr>
         <p:spPr>
           <a:xfrm>
-            <a:off x="731520" y="128016"/>
-            <a:ext cx="301752" cy="301752"/>
+            <a:off x="731520" y="502920"/>
+            <a:ext cx="10728655" cy="228600"/>
           </a:xfrm>
           <a:prstGeom prst="rect">
             <a:avLst/>
@@ -9940,30 +7759,30 @@
           </a:bodyPr>
           <a:lstStyle/>
           <a:p>
-            <a:pPr algn="ctr">
-              <a:defRPr sz="1600" b="1">
-                <a:solidFill>
-                  <a:srgbClr val="FFFFFF"/>
-                </a:solidFill>
-                <a:latin typeface="Helvetica Neue"/>
-              </a:defRPr>
-            </a:pPr>
-            <a:r>
-              <a:t>›</a:t>
-            </a:r>
-          </a:p>
-        </p:txBody>
-      </p:sp>
-      <p:sp>
-        <p:nvSpPr>
-          <p:cNvPr id="5" name="TextBox 4"/>
+            <a:pPr>
+              <a:defRPr sz="1050" b="1">
+                <a:solidFill>
+                  <a:srgbClr val="2B59D9"/>
+                </a:solidFill>
+                <a:latin typeface="Helvetica Neue"/>
+              </a:defRPr>
+            </a:pPr>
+            <a:r>
+              <a:t>NEXT STEPS</a:t>
+            </a:r>
+          </a:p>
+        </p:txBody>
+      </p:sp>
+      <p:sp>
+        <p:nvSpPr>
+          <p:cNvPr id="3" name="TextBox 2"/>
           <p:cNvSpPr txBox="1"/>
           <p:nvPr/>
         </p:nvSpPr>
         <p:spPr>
           <a:xfrm>
-            <a:off x="1143000" y="164592"/>
-            <a:ext cx="3200400" cy="292608"/>
+            <a:off x="731520" y="777240"/>
+            <a:ext cx="10728655" cy="685800"/>
           </a:xfrm>
           <a:prstGeom prst="rect">
             <a:avLst/>
@@ -9977,216 +7796,29 @@
           <a:lstStyle/>
           <a:p>
             <a:pPr>
-              <a:defRPr sz="1300" b="1">
-                <a:solidFill>
-                  <a:srgbClr val="FFFFFF"/>
-                </a:solidFill>
-                <a:latin typeface="Helvetica Neue"/>
-              </a:defRPr>
-            </a:pPr>
-            <a:r>
-              <a:t>Technology Consultants</a:t>
-            </a:r>
-          </a:p>
-        </p:txBody>
-      </p:sp>
-      <p:sp>
-        <p:nvSpPr>
-          <p:cNvPr id="6" name="TextBox 5"/>
-          <p:cNvSpPr txBox="1"/>
-          <p:nvPr/>
-        </p:nvSpPr>
-        <p:spPr>
-          <a:xfrm>
-            <a:off x="4572000" y="182880"/>
-            <a:ext cx="5212080" cy="292608"/>
-          </a:xfrm>
-          <a:prstGeom prst="rect">
-            <a:avLst/>
-          </a:prstGeom>
-          <a:noFill/>
-        </p:spPr>
-        <p:txBody>
-          <a:bodyPr wrap="square" lIns="0" rIns="0" tIns="0" bIns="0">
-            <a:spAutoFit/>
-          </a:bodyPr>
-          <a:lstStyle/>
-          <a:p>
-            <a:pPr algn="r">
-              <a:defRPr sz="1000">
-                <a:solidFill>
-                  <a:srgbClr val="BEC3CD"/>
-                </a:solidFill>
-                <a:latin typeface="Helvetica Neue"/>
-              </a:defRPr>
-            </a:pPr>
-            <a:r>
-              <a:t>Services   ·   Work   ·   How we work   ·   About   ·   FAQ</a:t>
-            </a:r>
-          </a:p>
-        </p:txBody>
-      </p:sp>
-      <p:sp>
-        <p:nvSpPr>
-          <p:cNvPr id="7" name="Rounded Rectangle 6"/>
+              <a:defRPr sz="2600" b="1">
+                <a:solidFill>
+                  <a:srgbClr val="16161A"/>
+                </a:solidFill>
+                <a:latin typeface="Helvetica Neue"/>
+              </a:defRPr>
+            </a:pPr>
+            <a:r>
+              <a:t>How to Make the Introduction</a:t>
+            </a:r>
+          </a:p>
+        </p:txBody>
+      </p:sp>
+      <p:sp>
+        <p:nvSpPr>
+          <p:cNvPr id="4" name="Rounded Rectangle 3"/>
           <p:cNvSpPr/>
           <p:nvPr/>
         </p:nvSpPr>
         <p:spPr>
           <a:xfrm>
-            <a:off x="9966960" y="128016"/>
-            <a:ext cx="1463040" cy="329184"/>
-          </a:xfrm>
-          <a:prstGeom prst="roundRect">
-            <a:avLst/>
-          </a:prstGeom>
-          <a:solidFill>
-            <a:srgbClr val="FFFFFF"/>
-          </a:solidFill>
-          <a:ln>
-            <a:noFill/>
-          </a:ln>
-        </p:spPr>
-        <p:style>
-          <a:lnRef idx="1">
-            <a:schemeClr val="accent1"/>
-          </a:lnRef>
-          <a:fillRef idx="3">
-            <a:schemeClr val="accent1"/>
-          </a:fillRef>
-          <a:effectRef idx="2">
-            <a:schemeClr val="accent1"/>
-          </a:effectRef>
-          <a:fontRef idx="minor">
-            <a:schemeClr val="lt1"/>
-          </a:fontRef>
-        </p:style>
-        <p:txBody>
-          <a:bodyPr rtlCol="0" anchor="ctr"/>
-          <a:lstStyle/>
-          <a:p>
-            <a:pPr algn="ctr"/>
-          </a:p>
-        </p:txBody>
-      </p:sp>
-      <p:sp>
-        <p:nvSpPr>
-          <p:cNvPr id="8" name="TextBox 7"/>
-          <p:cNvSpPr txBox="1"/>
-          <p:nvPr/>
-        </p:nvSpPr>
-        <p:spPr>
-          <a:xfrm>
-            <a:off x="9966960" y="164592"/>
-            <a:ext cx="1463040" cy="274320"/>
-          </a:xfrm>
-          <a:prstGeom prst="rect">
-            <a:avLst/>
-          </a:prstGeom>
-          <a:noFill/>
-        </p:spPr>
-        <p:txBody>
-          <a:bodyPr wrap="square" lIns="0" rIns="0" tIns="0" bIns="0">
-            <a:spAutoFit/>
-          </a:bodyPr>
-          <a:lstStyle/>
-          <a:p>
-            <a:pPr algn="ctr">
-              <a:defRPr sz="1000" b="1">
-                <a:solidFill>
-                  <a:srgbClr val="16161A"/>
-                </a:solidFill>
-                <a:latin typeface="Helvetica Neue"/>
-              </a:defRPr>
-            </a:pPr>
-            <a:r>
-              <a:t>Book a call</a:t>
-            </a:r>
-          </a:p>
-        </p:txBody>
-      </p:sp>
-      <p:sp>
-        <p:nvSpPr>
-          <p:cNvPr id="9" name="TextBox 8"/>
-          <p:cNvSpPr txBox="1"/>
-          <p:nvPr/>
-        </p:nvSpPr>
-        <p:spPr>
-          <a:xfrm>
-            <a:off x="731520" y="777240"/>
-            <a:ext cx="10728655" cy="228600"/>
-          </a:xfrm>
-          <a:prstGeom prst="rect">
-            <a:avLst/>
-          </a:prstGeom>
-          <a:noFill/>
-        </p:spPr>
-        <p:txBody>
-          <a:bodyPr wrap="square" lIns="0" rIns="0" tIns="0" bIns="0">
-            <a:spAutoFit/>
-          </a:bodyPr>
-          <a:lstStyle/>
-          <a:p>
-            <a:pPr>
-              <a:defRPr sz="1000" b="1">
-                <a:solidFill>
-                  <a:srgbClr val="2B59D9"/>
-                </a:solidFill>
-                <a:latin typeface="Helvetica Neue"/>
-              </a:defRPr>
-            </a:pPr>
-            <a:r>
-              <a:t>NEXT STEPS</a:t>
-            </a:r>
-          </a:p>
-        </p:txBody>
-      </p:sp>
-      <p:sp>
-        <p:nvSpPr>
-          <p:cNvPr id="10" name="TextBox 9"/>
-          <p:cNvSpPr txBox="1"/>
-          <p:nvPr/>
-        </p:nvSpPr>
-        <p:spPr>
-          <a:xfrm>
-            <a:off x="731520" y="1024128"/>
-            <a:ext cx="10728655" cy="640080"/>
-          </a:xfrm>
-          <a:prstGeom prst="rect">
-            <a:avLst/>
-          </a:prstGeom>
-          <a:noFill/>
-        </p:spPr>
-        <p:txBody>
-          <a:bodyPr wrap="square" lIns="0" rIns="0" tIns="0" bIns="0">
-            <a:spAutoFit/>
-          </a:bodyPr>
-          <a:lstStyle/>
-          <a:p>
-            <a:pPr>
-              <a:defRPr sz="2500" b="1">
-                <a:solidFill>
-                  <a:srgbClr val="16161A"/>
-                </a:solidFill>
-                <a:latin typeface="Helvetica Neue"/>
-              </a:defRPr>
-            </a:pPr>
-            <a:r>
-              <a:t>How to Make the Introduction</a:t>
-            </a:r>
-          </a:p>
-        </p:txBody>
-      </p:sp>
-      <p:sp>
-        <p:nvSpPr>
-          <p:cNvPr id="11" name="Rounded Rectangle 10"/>
-          <p:cNvSpPr/>
-          <p:nvPr/>
-        </p:nvSpPr>
-        <p:spPr>
-          <a:xfrm>
-            <a:off x="731520" y="1874519"/>
-            <a:ext cx="10728655" cy="3017520"/>
+            <a:off x="731520" y="1691640"/>
+            <a:ext cx="10728655" cy="3200400"/>
           </a:xfrm>
           <a:prstGeom prst="roundRect">
             <a:avLst/>
@@ -10224,14 +7856,14 @@
       </p:sp>
       <p:sp>
         <p:nvSpPr>
-          <p:cNvPr id="12" name="TextBox 11"/>
+          <p:cNvPr id="5" name="TextBox 4"/>
           <p:cNvSpPr txBox="1"/>
           <p:nvPr/>
         </p:nvSpPr>
         <p:spPr>
           <a:xfrm>
-            <a:off x="1051560" y="2103120"/>
-            <a:ext cx="10058400" cy="2560320"/>
+            <a:off x="1097280" y="1965960"/>
+            <a:ext cx="9997135" cy="2651760"/>
           </a:xfrm>
           <a:prstGeom prst="rect">
             <a:avLst/>
@@ -10246,7 +7878,7 @@
           <a:p>
             <a:pPr>
               <a:spcAft>
-                <a:spcPts val="1200"/>
+                <a:spcPts val="1400"/>
               </a:spcAft>
               <a:defRPr sz="1100" b="1">
                 <a:solidFill>
@@ -10256,15 +7888,15 @@
               </a:defRPr>
             </a:pPr>
             <a:r>
-              <a:t>RECOMMENDED EMAIL INTRO TEMPLATE:</a:t>
+              <a:t>RECOMMENDED EMAIL INTRO TEMPLATE</a:t>
             </a:r>
           </a:p>
           <a:p>
             <a:pPr>
               <a:spcAft>
-                <a:spcPts val="800"/>
+                <a:spcPts val="1000"/>
               </a:spcAft>
-              <a:defRPr sz="1450">
+              <a:defRPr sz="1500">
                 <a:solidFill>
                   <a:srgbClr val="16161A"/>
                 </a:solidFill>
@@ -10277,7 +7909,7 @@
           </a:p>
           <a:p>
             <a:pPr>
-              <a:defRPr sz="1450">
+              <a:defRPr sz="1500">
                 <a:solidFill>
                   <a:srgbClr val="16161A"/>
                 </a:solidFill>
@@ -10292,14 +7924,14 @@
       </p:sp>
       <p:sp>
         <p:nvSpPr>
-          <p:cNvPr id="13" name="TextBox 12"/>
+          <p:cNvPr id="6" name="TextBox 5"/>
           <p:cNvSpPr txBox="1"/>
           <p:nvPr/>
         </p:nvSpPr>
         <p:spPr>
           <a:xfrm>
-            <a:off x="731520" y="5029200"/>
-            <a:ext cx="10728655" cy="1097280"/>
+            <a:off x="731520" y="5166360"/>
+            <a:ext cx="10728655" cy="914400"/>
           </a:xfrm>
           <a:prstGeom prst="rect">
             <a:avLst/>
@@ -10344,13 +7976,13 @@
       </p:sp>
       <p:sp>
         <p:nvSpPr>
-          <p:cNvPr id="14" name="Rectangle 13"/>
+          <p:cNvPr id="7" name="Rectangle 6"/>
           <p:cNvSpPr/>
           <p:nvPr/>
         </p:nvSpPr>
         <p:spPr>
           <a:xfrm>
-            <a:off x="731520" y="6327648"/>
+            <a:off x="731520" y="6263640"/>
             <a:ext cx="10728655" cy="12700"/>
           </a:xfrm>
           <a:prstGeom prst="rect">
@@ -10387,13 +8019,13 @@
       </p:sp>
       <p:sp>
         <p:nvSpPr>
-          <p:cNvPr id="15" name="TextBox 14"/>
+          <p:cNvPr id="8" name="TextBox 7"/>
           <p:cNvSpPr txBox="1"/>
           <p:nvPr/>
         </p:nvSpPr>
         <p:spPr>
           <a:xfrm>
-            <a:off x="731520" y="6400800"/>
+            <a:off x="731520" y="6355080"/>
             <a:ext cx="7315200" cy="320040"/>
           </a:xfrm>
           <a:prstGeom prst="rect">
@@ -10416,20 +8048,20 @@
               </a:defRPr>
             </a:pPr>
             <a:r>
-              <a:t>technologyconsultants.ventures  ·  San Diego · Tijuana</a:t>
-            </a:r>
-          </a:p>
-        </p:txBody>
-      </p:sp>
-      <p:sp>
-        <p:nvSpPr>
-          <p:cNvPr id="16" name="TextBox 15"/>
+              <a:t>Technology Consultants  ·  technologyconsultants.ventures  ·  San Diego &amp; Tijuana</a:t>
+            </a:r>
+          </a:p>
+        </p:txBody>
+      </p:sp>
+      <p:sp>
+        <p:nvSpPr>
+          <p:cNvPr id="9" name="TextBox 8"/>
           <p:cNvSpPr txBox="1"/>
           <p:nvPr/>
         </p:nvSpPr>
         <p:spPr>
           <a:xfrm>
-            <a:off x="9631375" y="6400800"/>
+            <a:off x="9631375" y="6355080"/>
             <a:ext cx="1828800" cy="320040"/>
           </a:xfrm>
           <a:prstGeom prst="rect">

--- a/Technology_Consultants_Who_to_Send_My_Way.pptx
+++ b/Technology_Consultants_Who_to_Send_My_Way.pptx
@@ -3147,7 +3147,7 @@
         </p:nvSpPr>
         <p:spPr>
           <a:xfrm>
-            <a:off x="731520" y="1005840"/>
+            <a:off x="731520" y="1051560"/>
             <a:ext cx="10728655" cy="1280160"/>
           </a:xfrm>
           <a:prstGeom prst="rect">
@@ -3183,7 +3183,7 @@
         </p:nvSpPr>
         <p:spPr>
           <a:xfrm>
-            <a:off x="731520" y="2377440"/>
+            <a:off x="731520" y="2423160"/>
             <a:ext cx="10728655" cy="822960"/>
           </a:xfrm>
           <a:prstGeom prst="rect">
@@ -3198,7 +3198,7 @@
           <a:lstStyle/>
           <a:p>
             <a:pPr>
-              <a:defRPr sz="1400">
+              <a:defRPr sz="1450">
                 <a:solidFill>
                   <a:srgbClr val="454337"/>
                 </a:solidFill>
@@ -3213,615 +3213,13 @@
       </p:sp>
       <p:sp>
         <p:nvSpPr>
-          <p:cNvPr id="5" name="Rounded Rectangle 4"/>
+          <p:cNvPr id="5" name="Rectangle 4"/>
           <p:cNvSpPr/>
           <p:nvPr/>
         </p:nvSpPr>
         <p:spPr>
           <a:xfrm>
-            <a:off x="731520" y="3337560"/>
-            <a:ext cx="5157216" cy="1691640"/>
-          </a:xfrm>
-          <a:prstGeom prst="roundRect">
-            <a:avLst/>
-          </a:prstGeom>
-          <a:solidFill>
-            <a:srgbClr val="FFFFFF"/>
-          </a:solidFill>
-          <a:ln w="12700">
-            <a:solidFill>
-              <a:srgbClr val="E2DDD0"/>
-            </a:solidFill>
-          </a:ln>
-        </p:spPr>
-        <p:style>
-          <a:lnRef idx="1">
-            <a:schemeClr val="accent1"/>
-          </a:lnRef>
-          <a:fillRef idx="3">
-            <a:schemeClr val="accent1"/>
-          </a:fillRef>
-          <a:effectRef idx="2">
-            <a:schemeClr val="accent1"/>
-          </a:effectRef>
-          <a:fontRef idx="minor">
-            <a:schemeClr val="lt1"/>
-          </a:fontRef>
-        </p:style>
-        <p:txBody>
-          <a:bodyPr rtlCol="0" anchor="ctr"/>
-          <a:lstStyle/>
-          <a:p>
-            <a:pPr algn="ctr"/>
-          </a:p>
-        </p:txBody>
-      </p:sp>
-      <p:sp>
-        <p:nvSpPr>
-          <p:cNvPr id="6" name="TextBox 5"/>
-          <p:cNvSpPr txBox="1"/>
-          <p:nvPr/>
-        </p:nvSpPr>
-        <p:spPr>
-          <a:xfrm>
-            <a:off x="1005840" y="3538728"/>
-            <a:ext cx="4608576" cy="1289304"/>
-          </a:xfrm>
-          <a:prstGeom prst="rect">
-            <a:avLst/>
-          </a:prstGeom>
-          <a:noFill/>
-        </p:spPr>
-        <p:txBody>
-          <a:bodyPr wrap="square" lIns="0" rIns="0" tIns="0" bIns="0">
-            <a:spAutoFit/>
-          </a:bodyPr>
-          <a:lstStyle/>
-          <a:p>
-            <a:pPr>
-              <a:spcAft>
-                <a:spcPts val="600"/>
-              </a:spcAft>
-              <a:defRPr sz="1050" b="1">
-                <a:solidFill>
-                  <a:srgbClr val="2B59D9"/>
-                </a:solidFill>
-                <a:latin typeface="Helvetica Neue"/>
-              </a:defRPr>
-            </a:pPr>
-            <a:r>
-              <a:t>CORE CAPABILITIES</a:t>
-            </a:r>
-          </a:p>
-          <a:p>
-            <a:pPr>
-              <a:defRPr sz="1250">
-                <a:solidFill>
-                  <a:srgbClr val="16161A"/>
-                </a:solidFill>
-                <a:latin typeface="Helvetica Neue"/>
-              </a:defRPr>
-            </a:pPr>
-            <a:r>
-              <a:t>Custom React &amp; TypeScript Web Apps  ·  Workday Finance &amp; Adaptive Planning Integrations  ·  Human-in-the-Loop (HITL) AI Agents</a:t>
-            </a:r>
-          </a:p>
-        </p:txBody>
-      </p:sp>
-      <p:sp>
-        <p:nvSpPr>
-          <p:cNvPr id="7" name="Rounded Rectangle 6"/>
-          <p:cNvSpPr/>
-          <p:nvPr/>
-        </p:nvSpPr>
-        <p:spPr>
-          <a:xfrm>
-            <a:off x="6300216" y="3337560"/>
-            <a:ext cx="5157216" cy="1691640"/>
-          </a:xfrm>
-          <a:prstGeom prst="roundRect">
-            <a:avLst/>
-          </a:prstGeom>
-          <a:solidFill>
-            <a:srgbClr val="FFFFFF"/>
-          </a:solidFill>
-          <a:ln w="12700">
-            <a:solidFill>
-              <a:srgbClr val="E2DDD0"/>
-            </a:solidFill>
-          </a:ln>
-        </p:spPr>
-        <p:style>
-          <a:lnRef idx="1">
-            <a:schemeClr val="accent1"/>
-          </a:lnRef>
-          <a:fillRef idx="3">
-            <a:schemeClr val="accent1"/>
-          </a:fillRef>
-          <a:effectRef idx="2">
-            <a:schemeClr val="accent1"/>
-          </a:effectRef>
-          <a:fontRef idx="minor">
-            <a:schemeClr val="lt1"/>
-          </a:fontRef>
-        </p:style>
-        <p:txBody>
-          <a:bodyPr rtlCol="0" anchor="ctr"/>
-          <a:lstStyle/>
-          <a:p>
-            <a:pPr algn="ctr"/>
-          </a:p>
-        </p:txBody>
-      </p:sp>
-      <p:sp>
-        <p:nvSpPr>
-          <p:cNvPr id="8" name="TextBox 7"/>
-          <p:cNvSpPr txBox="1"/>
-          <p:nvPr/>
-        </p:nvSpPr>
-        <p:spPr>
-          <a:xfrm>
-            <a:off x="6574536" y="3538728"/>
-            <a:ext cx="4608576" cy="1289304"/>
-          </a:xfrm>
-          <a:prstGeom prst="rect">
-            <a:avLst/>
-          </a:prstGeom>
-          <a:noFill/>
-        </p:spPr>
-        <p:txBody>
-          <a:bodyPr wrap="square" lIns="0" rIns="0" tIns="0" bIns="0">
-            <a:spAutoFit/>
-          </a:bodyPr>
-          <a:lstStyle/>
-          <a:p>
-            <a:pPr>
-              <a:spcAft>
-                <a:spcPts val="600"/>
-              </a:spcAft>
-              <a:defRPr sz="1050" b="1">
-                <a:solidFill>
-                  <a:srgbClr val="D99B26"/>
-                </a:solidFill>
-                <a:latin typeface="Helvetica Neue"/>
-              </a:defRPr>
-            </a:pPr>
-            <a:r>
-              <a:t>PRACTICE LEADERSHIP</a:t>
-            </a:r>
-          </a:p>
-          <a:p>
-            <a:pPr>
-              <a:spcAft>
-                <a:spcPts val="400"/>
-              </a:spcAft>
-              <a:defRPr sz="1300" b="1">
-                <a:solidFill>
-                  <a:srgbClr val="16161A"/>
-                </a:solidFill>
-                <a:latin typeface="Helvetica Neue"/>
-              </a:defRPr>
-            </a:pPr>
-            <a:r>
-              <a:t>Roberto Guido  —  Founder &amp; Principal Engineer</a:t>
-            </a:r>
-          </a:p>
-          <a:p>
-            <a:pPr>
-              <a:defRPr sz="1150">
-                <a:solidFill>
-                  <a:srgbClr val="454337"/>
-                </a:solidFill>
-                <a:latin typeface="Helvetica Neue"/>
-              </a:defRPr>
-            </a:pPr>
-            <a:r>
-              <a:t>BS Electrical Engineering (UC San Diego)  ·  MBA (NYU Stern)</a:t>
-            </a:r>
-            <a:br/>
-            <a:r>
-              <a:t>Operating in San Diego, CA &amp; Tijuana, MX</a:t>
-            </a:r>
-          </a:p>
-        </p:txBody>
-      </p:sp>
-      <p:sp>
-        <p:nvSpPr>
-          <p:cNvPr id="9" name="Rounded Rectangle 8"/>
-          <p:cNvSpPr/>
-          <p:nvPr/>
-        </p:nvSpPr>
-        <p:spPr>
-          <a:xfrm>
-            <a:off x="731520" y="5166360"/>
-            <a:ext cx="2514600" cy="960120"/>
-          </a:xfrm>
-          <a:prstGeom prst="roundRect">
-            <a:avLst/>
-          </a:prstGeom>
-          <a:solidFill>
-            <a:srgbClr val="FFFFFF"/>
-          </a:solidFill>
-          <a:ln w="12700">
-            <a:solidFill>
-              <a:srgbClr val="E2DDD0"/>
-            </a:solidFill>
-          </a:ln>
-        </p:spPr>
-        <p:style>
-          <a:lnRef idx="1">
-            <a:schemeClr val="accent1"/>
-          </a:lnRef>
-          <a:fillRef idx="3">
-            <a:schemeClr val="accent1"/>
-          </a:fillRef>
-          <a:effectRef idx="2">
-            <a:schemeClr val="accent1"/>
-          </a:effectRef>
-          <a:fontRef idx="minor">
-            <a:schemeClr val="lt1"/>
-          </a:fontRef>
-        </p:style>
-        <p:txBody>
-          <a:bodyPr rtlCol="0" anchor="ctr"/>
-          <a:lstStyle/>
-          <a:p>
-            <a:pPr algn="ctr"/>
-          </a:p>
-        </p:txBody>
-      </p:sp>
-      <p:sp>
-        <p:nvSpPr>
-          <p:cNvPr id="10" name="TextBox 9"/>
-          <p:cNvSpPr txBox="1"/>
-          <p:nvPr/>
-        </p:nvSpPr>
-        <p:spPr>
-          <a:xfrm>
-            <a:off x="896112" y="5257800"/>
-            <a:ext cx="2185416" cy="777240"/>
-          </a:xfrm>
-          <a:prstGeom prst="rect">
-            <a:avLst/>
-          </a:prstGeom>
-          <a:noFill/>
-        </p:spPr>
-        <p:txBody>
-          <a:bodyPr wrap="square" lIns="0" rIns="0" tIns="0" bIns="0">
-            <a:spAutoFit/>
-          </a:bodyPr>
-          <a:lstStyle/>
-          <a:p>
-            <a:pPr>
-              <a:defRPr sz="1200" b="1">
-                <a:solidFill>
-                  <a:srgbClr val="16161A"/>
-                </a:solidFill>
-                <a:latin typeface="Helvetica Neue"/>
-              </a:defRPr>
-            </a:pPr>
-            <a:r>
-              <a:t>In production.</a:t>
-            </a:r>
-          </a:p>
-          <a:p>
-            <a:pPr>
-              <a:spcBef>
-                <a:spcPts val="200"/>
-              </a:spcBef>
-              <a:defRPr sz="1000">
-                <a:solidFill>
-                  <a:srgbClr val="454337"/>
-                </a:solidFill>
-                <a:latin typeface="Helvetica Neue"/>
-              </a:defRPr>
-            </a:pPr>
-            <a:r>
-              <a:t>Real users today on self-developed products.</a:t>
-            </a:r>
-          </a:p>
-        </p:txBody>
-      </p:sp>
-      <p:sp>
-        <p:nvSpPr>
-          <p:cNvPr id="11" name="Rounded Rectangle 10"/>
-          <p:cNvSpPr/>
-          <p:nvPr/>
-        </p:nvSpPr>
-        <p:spPr>
-          <a:xfrm>
-            <a:off x="3429000" y="5166360"/>
-            <a:ext cx="2514600" cy="960120"/>
-          </a:xfrm>
-          <a:prstGeom prst="roundRect">
-            <a:avLst/>
-          </a:prstGeom>
-          <a:solidFill>
-            <a:srgbClr val="FFFFFF"/>
-          </a:solidFill>
-          <a:ln w="12700">
-            <a:solidFill>
-              <a:srgbClr val="E2DDD0"/>
-            </a:solidFill>
-          </a:ln>
-        </p:spPr>
-        <p:style>
-          <a:lnRef idx="1">
-            <a:schemeClr val="accent1"/>
-          </a:lnRef>
-          <a:fillRef idx="3">
-            <a:schemeClr val="accent1"/>
-          </a:fillRef>
-          <a:effectRef idx="2">
-            <a:schemeClr val="accent1"/>
-          </a:effectRef>
-          <a:fontRef idx="minor">
-            <a:schemeClr val="lt1"/>
-          </a:fontRef>
-        </p:style>
-        <p:txBody>
-          <a:bodyPr rtlCol="0" anchor="ctr"/>
-          <a:lstStyle/>
-          <a:p>
-            <a:pPr algn="ctr"/>
-          </a:p>
-        </p:txBody>
-      </p:sp>
-      <p:sp>
-        <p:nvSpPr>
-          <p:cNvPr id="12" name="TextBox 11"/>
-          <p:cNvSpPr txBox="1"/>
-          <p:nvPr/>
-        </p:nvSpPr>
-        <p:spPr>
-          <a:xfrm>
-            <a:off x="3593592" y="5257800"/>
-            <a:ext cx="2185416" cy="777240"/>
-          </a:xfrm>
-          <a:prstGeom prst="rect">
-            <a:avLst/>
-          </a:prstGeom>
-          <a:noFill/>
-        </p:spPr>
-        <p:txBody>
-          <a:bodyPr wrap="square" lIns="0" rIns="0" tIns="0" bIns="0">
-            <a:spAutoFit/>
-          </a:bodyPr>
-          <a:lstStyle/>
-          <a:p>
-            <a:pPr>
-              <a:defRPr sz="1200" b="1">
-                <a:solidFill>
-                  <a:srgbClr val="16161A"/>
-                </a:solidFill>
-                <a:latin typeface="Helvetica Neue"/>
-              </a:defRPr>
-            </a:pPr>
-            <a:r>
-              <a:t>Senior team.</a:t>
-            </a:r>
-          </a:p>
-          <a:p>
-            <a:pPr>
-              <a:spcBef>
-                <a:spcPts val="200"/>
-              </a:spcBef>
-              <a:defRPr sz="1000">
-                <a:solidFill>
-                  <a:srgbClr val="454337"/>
-                </a:solidFill>
-                <a:latin typeface="Helvetica Neue"/>
-              </a:defRPr>
-            </a:pPr>
-            <a:r>
-              <a:t>The people who pitch your project ship it.</a:t>
-            </a:r>
-          </a:p>
-        </p:txBody>
-      </p:sp>
-      <p:sp>
-        <p:nvSpPr>
-          <p:cNvPr id="13" name="Rounded Rectangle 12"/>
-          <p:cNvSpPr/>
-          <p:nvPr/>
-        </p:nvSpPr>
-        <p:spPr>
-          <a:xfrm>
-            <a:off x="6126480" y="5166360"/>
-            <a:ext cx="2514600" cy="960120"/>
-          </a:xfrm>
-          <a:prstGeom prst="roundRect">
-            <a:avLst/>
-          </a:prstGeom>
-          <a:solidFill>
-            <a:srgbClr val="FFFFFF"/>
-          </a:solidFill>
-          <a:ln w="12700">
-            <a:solidFill>
-              <a:srgbClr val="E2DDD0"/>
-            </a:solidFill>
-          </a:ln>
-        </p:spPr>
-        <p:style>
-          <a:lnRef idx="1">
-            <a:schemeClr val="accent1"/>
-          </a:lnRef>
-          <a:fillRef idx="3">
-            <a:schemeClr val="accent1"/>
-          </a:fillRef>
-          <a:effectRef idx="2">
-            <a:schemeClr val="accent1"/>
-          </a:effectRef>
-          <a:fontRef idx="minor">
-            <a:schemeClr val="lt1"/>
-          </a:fontRef>
-        </p:style>
-        <p:txBody>
-          <a:bodyPr rtlCol="0" anchor="ctr"/>
-          <a:lstStyle/>
-          <a:p>
-            <a:pPr algn="ctr"/>
-          </a:p>
-        </p:txBody>
-      </p:sp>
-      <p:sp>
-        <p:nvSpPr>
-          <p:cNvPr id="14" name="TextBox 13"/>
-          <p:cNvSpPr txBox="1"/>
-          <p:nvPr/>
-        </p:nvSpPr>
-        <p:spPr>
-          <a:xfrm>
-            <a:off x="6291072" y="5257800"/>
-            <a:ext cx="2185416" cy="777240"/>
-          </a:xfrm>
-          <a:prstGeom prst="rect">
-            <a:avLst/>
-          </a:prstGeom>
-          <a:noFill/>
-        </p:spPr>
-        <p:txBody>
-          <a:bodyPr wrap="square" lIns="0" rIns="0" tIns="0" bIns="0">
-            <a:spAutoFit/>
-          </a:bodyPr>
-          <a:lstStyle/>
-          <a:p>
-            <a:pPr>
-              <a:defRPr sz="1200" b="1">
-                <a:solidFill>
-                  <a:srgbClr val="16161A"/>
-                </a:solidFill>
-                <a:latin typeface="Helvetica Neue"/>
-              </a:defRPr>
-            </a:pPr>
-            <a:r>
-              <a:t>Code first.</a:t>
-            </a:r>
-          </a:p>
-          <a:p>
-            <a:pPr>
-              <a:spcBef>
-                <a:spcPts val="200"/>
-              </a:spcBef>
-              <a:defRPr sz="1000">
-                <a:solidFill>
-                  <a:srgbClr val="454337"/>
-                </a:solidFill>
-                <a:latin typeface="Helvetica Neue"/>
-              </a:defRPr>
-            </a:pPr>
-            <a:r>
-              <a:t>No decks before working software.</a:t>
-            </a:r>
-          </a:p>
-        </p:txBody>
-      </p:sp>
-      <p:sp>
-        <p:nvSpPr>
-          <p:cNvPr id="15" name="Rounded Rectangle 14"/>
-          <p:cNvSpPr/>
-          <p:nvPr/>
-        </p:nvSpPr>
-        <p:spPr>
-          <a:xfrm>
-            <a:off x="8823960" y="5166360"/>
-            <a:ext cx="2514600" cy="960120"/>
-          </a:xfrm>
-          <a:prstGeom prst="roundRect">
-            <a:avLst/>
-          </a:prstGeom>
-          <a:solidFill>
-            <a:srgbClr val="FFFFFF"/>
-          </a:solidFill>
-          <a:ln w="12700">
-            <a:solidFill>
-              <a:srgbClr val="E2DDD0"/>
-            </a:solidFill>
-          </a:ln>
-        </p:spPr>
-        <p:style>
-          <a:lnRef idx="1">
-            <a:schemeClr val="accent1"/>
-          </a:lnRef>
-          <a:fillRef idx="3">
-            <a:schemeClr val="accent1"/>
-          </a:fillRef>
-          <a:effectRef idx="2">
-            <a:schemeClr val="accent1"/>
-          </a:effectRef>
-          <a:fontRef idx="minor">
-            <a:schemeClr val="lt1"/>
-          </a:fontRef>
-        </p:style>
-        <p:txBody>
-          <a:bodyPr rtlCol="0" anchor="ctr"/>
-          <a:lstStyle/>
-          <a:p>
-            <a:pPr algn="ctr"/>
-          </a:p>
-        </p:txBody>
-      </p:sp>
-      <p:sp>
-        <p:nvSpPr>
-          <p:cNvPr id="16" name="TextBox 15"/>
-          <p:cNvSpPr txBox="1"/>
-          <p:nvPr/>
-        </p:nvSpPr>
-        <p:spPr>
-          <a:xfrm>
-            <a:off x="8988552" y="5257800"/>
-            <a:ext cx="2185416" cy="777240"/>
-          </a:xfrm>
-          <a:prstGeom prst="rect">
-            <a:avLst/>
-          </a:prstGeom>
-          <a:noFill/>
-        </p:spPr>
-        <p:txBody>
-          <a:bodyPr wrap="square" lIns="0" rIns="0" tIns="0" bIns="0">
-            <a:spAutoFit/>
-          </a:bodyPr>
-          <a:lstStyle/>
-          <a:p>
-            <a:pPr>
-              <a:defRPr sz="1200" b="1">
-                <a:solidFill>
-                  <a:srgbClr val="16161A"/>
-                </a:solidFill>
-                <a:latin typeface="Helvetica Neue"/>
-              </a:defRPr>
-            </a:pPr>
-            <a:r>
-              <a:t>One team.</a:t>
-            </a:r>
-          </a:p>
-          <a:p>
-            <a:pPr>
-              <a:spcBef>
-                <a:spcPts val="200"/>
-              </a:spcBef>
-              <a:defRPr sz="1000">
-                <a:solidFill>
-                  <a:srgbClr val="454337"/>
-                </a:solidFill>
-                <a:latin typeface="Helvetica Neue"/>
-              </a:defRPr>
-            </a:pPr>
-            <a:r>
-              <a:t>Interfaces &amp; automations: same stack.</a:t>
-            </a:r>
-          </a:p>
-        </p:txBody>
-      </p:sp>
-      <p:sp>
-        <p:nvSpPr>
-          <p:cNvPr id="17" name="Rectangle 16"/>
-          <p:cNvSpPr/>
-          <p:nvPr/>
-        </p:nvSpPr>
-        <p:spPr>
-          <a:xfrm>
-            <a:off x="731520" y="6263640"/>
+            <a:off x="731520" y="3429000"/>
             <a:ext cx="10728655" cy="12700"/>
           </a:xfrm>
           <a:prstGeom prst="rect">
@@ -3858,14 +3256,14 @@
       </p:sp>
       <p:sp>
         <p:nvSpPr>
-          <p:cNvPr id="18" name="TextBox 17"/>
+          <p:cNvPr id="6" name="TextBox 5"/>
           <p:cNvSpPr txBox="1"/>
           <p:nvPr/>
         </p:nvSpPr>
         <p:spPr>
           <a:xfrm>
-            <a:off x="731520" y="6355080"/>
-            <a:ext cx="7315200" cy="320040"/>
+            <a:off x="731520" y="3611880"/>
+            <a:ext cx="5157216" cy="1371600"/>
           </a:xfrm>
           <a:prstGeom prst="rect">
             <a:avLst/>
@@ -3879,6 +3277,424 @@
           <a:lstStyle/>
           <a:p>
             <a:pPr>
+              <a:spcAft>
+                <a:spcPts val="600"/>
+              </a:spcAft>
+              <a:defRPr sz="1050" b="1">
+                <a:solidFill>
+                  <a:srgbClr val="2B59D9"/>
+                </a:solidFill>
+                <a:latin typeface="Helvetica Neue"/>
+              </a:defRPr>
+            </a:pPr>
+            <a:r>
+              <a:t>CORE CAPABILITIES</a:t>
+            </a:r>
+          </a:p>
+          <a:p>
+            <a:pPr>
+              <a:defRPr sz="1250">
+                <a:solidFill>
+                  <a:srgbClr val="16161A"/>
+                </a:solidFill>
+                <a:latin typeface="Helvetica Neue"/>
+              </a:defRPr>
+            </a:pPr>
+            <a:r>
+              <a:t>Custom React &amp; TypeScript Web Apps  ·  Workday Finance &amp; Adaptive Planning Integrations  ·  Human-in-the-Loop (HITL) AI Agents</a:t>
+            </a:r>
+          </a:p>
+        </p:txBody>
+      </p:sp>
+      <p:sp>
+        <p:nvSpPr>
+          <p:cNvPr id="7" name="TextBox 6"/>
+          <p:cNvSpPr txBox="1"/>
+          <p:nvPr/>
+        </p:nvSpPr>
+        <p:spPr>
+          <a:xfrm>
+            <a:off x="6300216" y="3611880"/>
+            <a:ext cx="5157216" cy="1371600"/>
+          </a:xfrm>
+          <a:prstGeom prst="rect">
+            <a:avLst/>
+          </a:prstGeom>
+          <a:noFill/>
+        </p:spPr>
+        <p:txBody>
+          <a:bodyPr wrap="square" lIns="0" rIns="0" tIns="0" bIns="0">
+            <a:spAutoFit/>
+          </a:bodyPr>
+          <a:lstStyle/>
+          <a:p>
+            <a:pPr>
+              <a:spcAft>
+                <a:spcPts val="600"/>
+              </a:spcAft>
+              <a:defRPr sz="1050" b="1">
+                <a:solidFill>
+                  <a:srgbClr val="D99B26"/>
+                </a:solidFill>
+                <a:latin typeface="Helvetica Neue"/>
+              </a:defRPr>
+            </a:pPr>
+            <a:r>
+              <a:t>PRACTICE LEADERSHIP</a:t>
+            </a:r>
+          </a:p>
+          <a:p>
+            <a:pPr>
+              <a:spcAft>
+                <a:spcPts val="400"/>
+              </a:spcAft>
+              <a:defRPr sz="1300" b="1">
+                <a:solidFill>
+                  <a:srgbClr val="16161A"/>
+                </a:solidFill>
+                <a:latin typeface="Helvetica Neue"/>
+              </a:defRPr>
+            </a:pPr>
+            <a:r>
+              <a:t>Roberto Guido  —  Founder &amp; Principal Engineer</a:t>
+            </a:r>
+          </a:p>
+          <a:p>
+            <a:pPr>
+              <a:defRPr sz="1150">
+                <a:solidFill>
+                  <a:srgbClr val="454337"/>
+                </a:solidFill>
+                <a:latin typeface="Helvetica Neue"/>
+              </a:defRPr>
+            </a:pPr>
+            <a:r>
+              <a:t>BS Electrical Engineering (UC San Diego)  ·  MBA (NYU Stern)</a:t>
+            </a:r>
+            <a:br/>
+            <a:r>
+              <a:t>Operating in San Diego, CA &amp; Tijuana, MX</a:t>
+            </a:r>
+          </a:p>
+        </p:txBody>
+      </p:sp>
+      <p:sp>
+        <p:nvSpPr>
+          <p:cNvPr id="8" name="Rectangle 7"/>
+          <p:cNvSpPr/>
+          <p:nvPr/>
+        </p:nvSpPr>
+        <p:spPr>
+          <a:xfrm>
+            <a:off x="731520" y="4983480"/>
+            <a:ext cx="10728655" cy="12700"/>
+          </a:xfrm>
+          <a:prstGeom prst="rect">
+            <a:avLst/>
+          </a:prstGeom>
+          <a:solidFill>
+            <a:srgbClr val="E2DDD0"/>
+          </a:solidFill>
+          <a:ln>
+            <a:noFill/>
+          </a:ln>
+        </p:spPr>
+        <p:style>
+          <a:lnRef idx="1">
+            <a:schemeClr val="accent1"/>
+          </a:lnRef>
+          <a:fillRef idx="3">
+            <a:schemeClr val="accent1"/>
+          </a:fillRef>
+          <a:effectRef idx="2">
+            <a:schemeClr val="accent1"/>
+          </a:effectRef>
+          <a:fontRef idx="minor">
+            <a:schemeClr val="lt1"/>
+          </a:fontRef>
+        </p:style>
+        <p:txBody>
+          <a:bodyPr rtlCol="0" anchor="ctr"/>
+          <a:lstStyle/>
+          <a:p>
+            <a:pPr algn="ctr"/>
+          </a:p>
+        </p:txBody>
+      </p:sp>
+      <p:sp>
+        <p:nvSpPr>
+          <p:cNvPr id="9" name="TextBox 8"/>
+          <p:cNvSpPr txBox="1"/>
+          <p:nvPr/>
+        </p:nvSpPr>
+        <p:spPr>
+          <a:xfrm>
+            <a:off x="731520" y="5120640"/>
+            <a:ext cx="2514600" cy="1005840"/>
+          </a:xfrm>
+          <a:prstGeom prst="rect">
+            <a:avLst/>
+          </a:prstGeom>
+          <a:noFill/>
+        </p:spPr>
+        <p:txBody>
+          <a:bodyPr wrap="square" lIns="0" rIns="0" tIns="0" bIns="0">
+            <a:spAutoFit/>
+          </a:bodyPr>
+          <a:lstStyle/>
+          <a:p>
+            <a:pPr>
+              <a:spcAft>
+                <a:spcPts val="200"/>
+              </a:spcAft>
+              <a:defRPr sz="1300" b="1">
+                <a:solidFill>
+                  <a:srgbClr val="16161A"/>
+                </a:solidFill>
+                <a:latin typeface="Helvetica Neue"/>
+              </a:defRPr>
+            </a:pPr>
+            <a:r>
+              <a:t>In production.</a:t>
+            </a:r>
+          </a:p>
+          <a:p>
+            <a:pPr>
+              <a:defRPr sz="1050">
+                <a:solidFill>
+                  <a:srgbClr val="454337"/>
+                </a:solidFill>
+                <a:latin typeface="Helvetica Neue"/>
+              </a:defRPr>
+            </a:pPr>
+            <a:r>
+              <a:t>Real users today on self-developed products.</a:t>
+            </a:r>
+          </a:p>
+        </p:txBody>
+      </p:sp>
+      <p:sp>
+        <p:nvSpPr>
+          <p:cNvPr id="10" name="TextBox 9"/>
+          <p:cNvSpPr txBox="1"/>
+          <p:nvPr/>
+        </p:nvSpPr>
+        <p:spPr>
+          <a:xfrm>
+            <a:off x="3429000" y="5120640"/>
+            <a:ext cx="2514600" cy="1005840"/>
+          </a:xfrm>
+          <a:prstGeom prst="rect">
+            <a:avLst/>
+          </a:prstGeom>
+          <a:noFill/>
+        </p:spPr>
+        <p:txBody>
+          <a:bodyPr wrap="square" lIns="0" rIns="0" tIns="0" bIns="0">
+            <a:spAutoFit/>
+          </a:bodyPr>
+          <a:lstStyle/>
+          <a:p>
+            <a:pPr>
+              <a:spcAft>
+                <a:spcPts val="200"/>
+              </a:spcAft>
+              <a:defRPr sz="1300" b="1">
+                <a:solidFill>
+                  <a:srgbClr val="16161A"/>
+                </a:solidFill>
+                <a:latin typeface="Helvetica Neue"/>
+              </a:defRPr>
+            </a:pPr>
+            <a:r>
+              <a:t>Senior team.</a:t>
+            </a:r>
+          </a:p>
+          <a:p>
+            <a:pPr>
+              <a:defRPr sz="1050">
+                <a:solidFill>
+                  <a:srgbClr val="454337"/>
+                </a:solidFill>
+                <a:latin typeface="Helvetica Neue"/>
+              </a:defRPr>
+            </a:pPr>
+            <a:r>
+              <a:t>The people who pitch your project ship it.</a:t>
+            </a:r>
+          </a:p>
+        </p:txBody>
+      </p:sp>
+      <p:sp>
+        <p:nvSpPr>
+          <p:cNvPr id="11" name="TextBox 10"/>
+          <p:cNvSpPr txBox="1"/>
+          <p:nvPr/>
+        </p:nvSpPr>
+        <p:spPr>
+          <a:xfrm>
+            <a:off x="6126480" y="5120640"/>
+            <a:ext cx="2514600" cy="1005840"/>
+          </a:xfrm>
+          <a:prstGeom prst="rect">
+            <a:avLst/>
+          </a:prstGeom>
+          <a:noFill/>
+        </p:spPr>
+        <p:txBody>
+          <a:bodyPr wrap="square" lIns="0" rIns="0" tIns="0" bIns="0">
+            <a:spAutoFit/>
+          </a:bodyPr>
+          <a:lstStyle/>
+          <a:p>
+            <a:pPr>
+              <a:spcAft>
+                <a:spcPts val="200"/>
+              </a:spcAft>
+              <a:defRPr sz="1300" b="1">
+                <a:solidFill>
+                  <a:srgbClr val="16161A"/>
+                </a:solidFill>
+                <a:latin typeface="Helvetica Neue"/>
+              </a:defRPr>
+            </a:pPr>
+            <a:r>
+              <a:t>Code first.</a:t>
+            </a:r>
+          </a:p>
+          <a:p>
+            <a:pPr>
+              <a:defRPr sz="1050">
+                <a:solidFill>
+                  <a:srgbClr val="454337"/>
+                </a:solidFill>
+                <a:latin typeface="Helvetica Neue"/>
+              </a:defRPr>
+            </a:pPr>
+            <a:r>
+              <a:t>No decks before working software.</a:t>
+            </a:r>
+          </a:p>
+        </p:txBody>
+      </p:sp>
+      <p:sp>
+        <p:nvSpPr>
+          <p:cNvPr id="12" name="TextBox 11"/>
+          <p:cNvSpPr txBox="1"/>
+          <p:nvPr/>
+        </p:nvSpPr>
+        <p:spPr>
+          <a:xfrm>
+            <a:off x="8823960" y="5120640"/>
+            <a:ext cx="2514600" cy="1005840"/>
+          </a:xfrm>
+          <a:prstGeom prst="rect">
+            <a:avLst/>
+          </a:prstGeom>
+          <a:noFill/>
+        </p:spPr>
+        <p:txBody>
+          <a:bodyPr wrap="square" lIns="0" rIns="0" tIns="0" bIns="0">
+            <a:spAutoFit/>
+          </a:bodyPr>
+          <a:lstStyle/>
+          <a:p>
+            <a:pPr>
+              <a:spcAft>
+                <a:spcPts val="200"/>
+              </a:spcAft>
+              <a:defRPr sz="1300" b="1">
+                <a:solidFill>
+                  <a:srgbClr val="16161A"/>
+                </a:solidFill>
+                <a:latin typeface="Helvetica Neue"/>
+              </a:defRPr>
+            </a:pPr>
+            <a:r>
+              <a:t>One team.</a:t>
+            </a:r>
+          </a:p>
+          <a:p>
+            <a:pPr>
+              <a:defRPr sz="1050">
+                <a:solidFill>
+                  <a:srgbClr val="454337"/>
+                </a:solidFill>
+                <a:latin typeface="Helvetica Neue"/>
+              </a:defRPr>
+            </a:pPr>
+            <a:r>
+              <a:t>Interfaces &amp; automations: same stack.</a:t>
+            </a:r>
+          </a:p>
+        </p:txBody>
+      </p:sp>
+      <p:sp>
+        <p:nvSpPr>
+          <p:cNvPr id="13" name="Rectangle 12"/>
+          <p:cNvSpPr/>
+          <p:nvPr/>
+        </p:nvSpPr>
+        <p:spPr>
+          <a:xfrm>
+            <a:off x="731520" y="6263640"/>
+            <a:ext cx="10728655" cy="12700"/>
+          </a:xfrm>
+          <a:prstGeom prst="rect">
+            <a:avLst/>
+          </a:prstGeom>
+          <a:solidFill>
+            <a:srgbClr val="E2DDD0"/>
+          </a:solidFill>
+          <a:ln>
+            <a:noFill/>
+          </a:ln>
+        </p:spPr>
+        <p:style>
+          <a:lnRef idx="1">
+            <a:schemeClr val="accent1"/>
+          </a:lnRef>
+          <a:fillRef idx="3">
+            <a:schemeClr val="accent1"/>
+          </a:fillRef>
+          <a:effectRef idx="2">
+            <a:schemeClr val="accent1"/>
+          </a:effectRef>
+          <a:fontRef idx="minor">
+            <a:schemeClr val="lt1"/>
+          </a:fontRef>
+        </p:style>
+        <p:txBody>
+          <a:bodyPr rtlCol="0" anchor="ctr"/>
+          <a:lstStyle/>
+          <a:p>
+            <a:pPr algn="ctr"/>
+          </a:p>
+        </p:txBody>
+      </p:sp>
+      <p:sp>
+        <p:nvSpPr>
+          <p:cNvPr id="14" name="TextBox 13"/>
+          <p:cNvSpPr txBox="1"/>
+          <p:nvPr/>
+        </p:nvSpPr>
+        <p:spPr>
+          <a:xfrm>
+            <a:off x="731520" y="6355080"/>
+            <a:ext cx="7315200" cy="320040"/>
+          </a:xfrm>
+          <a:prstGeom prst="rect">
+            <a:avLst/>
+          </a:prstGeom>
+          <a:noFill/>
+        </p:spPr>
+        <p:txBody>
+          <a:bodyPr wrap="square" lIns="0" rIns="0" tIns="0" bIns="0">
+            <a:spAutoFit/>
+          </a:bodyPr>
+          <a:lstStyle/>
+          <a:p>
+            <a:pPr>
               <a:defRPr sz="1000">
                 <a:solidFill>
                   <a:srgbClr val="736E62"/>
@@ -3894,7 +3710,7 @@
       </p:sp>
       <p:sp>
         <p:nvSpPr>
-          <p:cNvPr id="19" name="TextBox 18"/>
+          <p:cNvPr id="15" name="TextBox 14"/>
           <p:cNvSpPr txBox="1"/>
           <p:nvPr/>
         </p:nvSpPr>
@@ -3962,7 +3778,7 @@
         </p:nvSpPr>
         <p:spPr>
           <a:xfrm>
-            <a:off x="731520" y="502920"/>
+            <a:off x="731520" y="548640"/>
             <a:ext cx="10728655" cy="228600"/>
           </a:xfrm>
           <a:prstGeom prst="rect">
@@ -3998,7 +3814,7 @@
         </p:nvSpPr>
         <p:spPr>
           <a:xfrm>
-            <a:off x="731520" y="777240"/>
+            <a:off x="731520" y="822960"/>
             <a:ext cx="10728655" cy="685800"/>
           </a:xfrm>
           <a:prstGeom prst="rect">
@@ -4028,25 +3844,23 @@
       </p:sp>
       <p:sp>
         <p:nvSpPr>
-          <p:cNvPr id="4" name="Rounded Rectangle 3"/>
+          <p:cNvPr id="4" name="Rectangle 3"/>
           <p:cNvSpPr/>
           <p:nvPr/>
         </p:nvSpPr>
         <p:spPr>
           <a:xfrm>
             <a:off x="731520" y="1691640"/>
-            <a:ext cx="3328416" cy="4297680"/>
-          </a:xfrm>
-          <a:prstGeom prst="roundRect">
+            <a:ext cx="3328416" cy="25400"/>
+          </a:xfrm>
+          <a:prstGeom prst="rect">
             <a:avLst/>
           </a:prstGeom>
           <a:solidFill>
-            <a:srgbClr val="FFFFFF"/>
+            <a:srgbClr val="2B59D9"/>
           </a:solidFill>
-          <a:ln w="12700">
-            <a:solidFill>
-              <a:srgbClr val="E2DDD0"/>
-            </a:solidFill>
+          <a:ln>
+            <a:noFill/>
           </a:ln>
         </p:spPr>
         <p:style>
@@ -4079,8 +3893,8 @@
         </p:nvSpPr>
         <p:spPr>
           <a:xfrm>
-            <a:off x="1051560" y="2011680"/>
-            <a:ext cx="2688336" cy="3657600"/>
+            <a:off x="731520" y="1874520"/>
+            <a:ext cx="3328416" cy="4114800"/>
           </a:xfrm>
           <a:prstGeom prst="rect">
             <a:avLst/>
@@ -4095,7 +3909,7 @@
           <a:p>
             <a:pPr>
               <a:spcAft>
-                <a:spcPts val="1000"/>
+                <a:spcPts val="800"/>
               </a:spcAft>
               <a:defRPr sz="2000" b="1">
                 <a:solidFill>
@@ -4113,7 +3927,7 @@
               <a:spcAft>
                 <a:spcPts val="1000"/>
               </a:spcAft>
-              <a:defRPr sz="1800" b="1">
+              <a:defRPr sz="1900" b="1">
                 <a:solidFill>
                   <a:srgbClr val="16161A"/>
                 </a:solidFill>
@@ -4129,7 +3943,7 @@
               <a:spcAft>
                 <a:spcPts val="1600"/>
               </a:spcAft>
-              <a:defRPr sz="1200">
+              <a:defRPr sz="1250">
                 <a:solidFill>
                   <a:srgbClr val="454337"/>
                 </a:solidFill>
@@ -4145,7 +3959,7 @@
               <a:spcAft>
                 <a:spcPts val="800"/>
               </a:spcAft>
-              <a:defRPr sz="1150">
+              <a:defRPr sz="1200">
                 <a:solidFill>
                   <a:srgbClr val="16161A"/>
                 </a:solidFill>
@@ -4161,7 +3975,7 @@
               <a:spcAft>
                 <a:spcPts val="800"/>
               </a:spcAft>
-              <a:defRPr sz="1150">
+              <a:defRPr sz="1200">
                 <a:solidFill>
                   <a:srgbClr val="16161A"/>
                 </a:solidFill>
@@ -4177,7 +3991,7 @@
               <a:spcAft>
                 <a:spcPts val="800"/>
               </a:spcAft>
-              <a:defRPr sz="1150">
+              <a:defRPr sz="1200">
                 <a:solidFill>
                   <a:srgbClr val="16161A"/>
                 </a:solidFill>
@@ -4192,25 +4006,23 @@
       </p:sp>
       <p:sp>
         <p:nvSpPr>
-          <p:cNvPr id="6" name="Rounded Rectangle 5"/>
+          <p:cNvPr id="6" name="Rectangle 5"/>
           <p:cNvSpPr/>
           <p:nvPr/>
         </p:nvSpPr>
         <p:spPr>
           <a:xfrm>
             <a:off x="4334256" y="1691640"/>
-            <a:ext cx="3328416" cy="4297680"/>
-          </a:xfrm>
-          <a:prstGeom prst="roundRect">
+            <a:ext cx="3328416" cy="25400"/>
+          </a:xfrm>
+          <a:prstGeom prst="rect">
             <a:avLst/>
           </a:prstGeom>
           <a:solidFill>
-            <a:srgbClr val="FFFFFF"/>
+            <a:srgbClr val="D99B26"/>
           </a:solidFill>
-          <a:ln w="12700">
-            <a:solidFill>
-              <a:srgbClr val="E2DDD0"/>
-            </a:solidFill>
+          <a:ln>
+            <a:noFill/>
           </a:ln>
         </p:spPr>
         <p:style>
@@ -4243,8 +4055,8 @@
         </p:nvSpPr>
         <p:spPr>
           <a:xfrm>
-            <a:off x="4654296" y="2011680"/>
-            <a:ext cx="2688336" cy="3657600"/>
+            <a:off x="4334256" y="1874520"/>
+            <a:ext cx="3328416" cy="4114800"/>
           </a:xfrm>
           <a:prstGeom prst="rect">
             <a:avLst/>
@@ -4259,11 +4071,11 @@
           <a:p>
             <a:pPr>
               <a:spcAft>
-                <a:spcPts val="1000"/>
+                <a:spcPts val="800"/>
               </a:spcAft>
               <a:defRPr sz="2000" b="1">
                 <a:solidFill>
-                  <a:srgbClr val="2B59D9"/>
+                  <a:srgbClr val="D99B26"/>
                 </a:solidFill>
                 <a:latin typeface="Helvetica Neue"/>
               </a:defRPr>
@@ -4277,7 +4089,7 @@
               <a:spcAft>
                 <a:spcPts val="1000"/>
               </a:spcAft>
-              <a:defRPr sz="1800" b="1">
+              <a:defRPr sz="1900" b="1">
                 <a:solidFill>
                   <a:srgbClr val="16161A"/>
                 </a:solidFill>
@@ -4293,7 +4105,7 @@
               <a:spcAft>
                 <a:spcPts val="1600"/>
               </a:spcAft>
-              <a:defRPr sz="1200">
+              <a:defRPr sz="1250">
                 <a:solidFill>
                   <a:srgbClr val="454337"/>
                 </a:solidFill>
@@ -4309,7 +4121,7 @@
               <a:spcAft>
                 <a:spcPts val="800"/>
               </a:spcAft>
-              <a:defRPr sz="1150">
+              <a:defRPr sz="1200">
                 <a:solidFill>
                   <a:srgbClr val="16161A"/>
                 </a:solidFill>
@@ -4325,7 +4137,7 @@
               <a:spcAft>
                 <a:spcPts val="800"/>
               </a:spcAft>
-              <a:defRPr sz="1150">
+              <a:defRPr sz="1200">
                 <a:solidFill>
                   <a:srgbClr val="16161A"/>
                 </a:solidFill>
@@ -4341,7 +4153,7 @@
               <a:spcAft>
                 <a:spcPts val="800"/>
               </a:spcAft>
-              <a:defRPr sz="1150">
+              <a:defRPr sz="1200">
                 <a:solidFill>
                   <a:srgbClr val="16161A"/>
                 </a:solidFill>
@@ -4356,25 +4168,23 @@
       </p:sp>
       <p:sp>
         <p:nvSpPr>
-          <p:cNvPr id="8" name="Rounded Rectangle 7"/>
+          <p:cNvPr id="8" name="Rectangle 7"/>
           <p:cNvSpPr/>
           <p:nvPr/>
         </p:nvSpPr>
         <p:spPr>
           <a:xfrm>
             <a:off x="7936992" y="1691640"/>
-            <a:ext cx="3328416" cy="4297680"/>
-          </a:xfrm>
-          <a:prstGeom prst="roundRect">
+            <a:ext cx="3328416" cy="25400"/>
+          </a:xfrm>
+          <a:prstGeom prst="rect">
             <a:avLst/>
           </a:prstGeom>
           <a:solidFill>
-            <a:srgbClr val="FFFFFF"/>
+            <a:srgbClr val="2B59D9"/>
           </a:solidFill>
-          <a:ln w="12700">
-            <a:solidFill>
-              <a:srgbClr val="E2DDD0"/>
-            </a:solidFill>
+          <a:ln>
+            <a:noFill/>
           </a:ln>
         </p:spPr>
         <p:style>
@@ -4407,8 +4217,8 @@
         </p:nvSpPr>
         <p:spPr>
           <a:xfrm>
-            <a:off x="8257032" y="2011680"/>
-            <a:ext cx="2688336" cy="3657600"/>
+            <a:off x="7936992" y="1874520"/>
+            <a:ext cx="3328416" cy="4114800"/>
           </a:xfrm>
           <a:prstGeom prst="rect">
             <a:avLst/>
@@ -4423,7 +4233,7 @@
           <a:p>
             <a:pPr>
               <a:spcAft>
-                <a:spcPts val="1000"/>
+                <a:spcPts val="800"/>
               </a:spcAft>
               <a:defRPr sz="2000" b="1">
                 <a:solidFill>
@@ -4441,7 +4251,7 @@
               <a:spcAft>
                 <a:spcPts val="1000"/>
               </a:spcAft>
-              <a:defRPr sz="1800" b="1">
+              <a:defRPr sz="1900" b="1">
                 <a:solidFill>
                   <a:srgbClr val="16161A"/>
                 </a:solidFill>
@@ -4457,7 +4267,7 @@
               <a:spcAft>
                 <a:spcPts val="1600"/>
               </a:spcAft>
-              <a:defRPr sz="1200">
+              <a:defRPr sz="1250">
                 <a:solidFill>
                   <a:srgbClr val="454337"/>
                 </a:solidFill>
@@ -4473,7 +4283,7 @@
               <a:spcAft>
                 <a:spcPts val="800"/>
               </a:spcAft>
-              <a:defRPr sz="1150">
+              <a:defRPr sz="1200">
                 <a:solidFill>
                   <a:srgbClr val="16161A"/>
                 </a:solidFill>
@@ -4489,7 +4299,7 @@
               <a:spcAft>
                 <a:spcPts val="800"/>
               </a:spcAft>
-              <a:defRPr sz="1150">
+              <a:defRPr sz="1200">
                 <a:solidFill>
                   <a:srgbClr val="16161A"/>
                 </a:solidFill>
@@ -4505,7 +4315,7 @@
               <a:spcAft>
                 <a:spcPts val="800"/>
               </a:spcAft>
-              <a:defRPr sz="1150">
+              <a:defRPr sz="1200">
                 <a:solidFill>
                   <a:srgbClr val="16161A"/>
                 </a:solidFill>
@@ -4667,7 +4477,7 @@
         </p:nvSpPr>
         <p:spPr>
           <a:xfrm>
-            <a:off x="731520" y="502920"/>
+            <a:off x="731520" y="548640"/>
             <a:ext cx="10728655" cy="228600"/>
           </a:xfrm>
           <a:prstGeom prst="rect">
@@ -4703,7 +4513,7 @@
         </p:nvSpPr>
         <p:spPr>
           <a:xfrm>
-            <a:off x="731520" y="777240"/>
+            <a:off x="731520" y="822960"/>
             <a:ext cx="10728655" cy="685800"/>
           </a:xfrm>
           <a:prstGeom prst="rect">
@@ -4733,25 +4543,23 @@
       </p:sp>
       <p:sp>
         <p:nvSpPr>
-          <p:cNvPr id="4" name="Rounded Rectangle 3"/>
+          <p:cNvPr id="4" name="Rectangle 3"/>
           <p:cNvSpPr/>
           <p:nvPr/>
         </p:nvSpPr>
         <p:spPr>
           <a:xfrm>
             <a:off x="731520" y="1691640"/>
-            <a:ext cx="5157216" cy="4297680"/>
-          </a:xfrm>
-          <a:prstGeom prst="roundRect">
+            <a:ext cx="5157216" cy="25400"/>
+          </a:xfrm>
+          <a:prstGeom prst="rect">
             <a:avLst/>
           </a:prstGeom>
           <a:solidFill>
-            <a:srgbClr val="FFFFFF"/>
+            <a:srgbClr val="2B59D9"/>
           </a:solidFill>
-          <a:ln w="12700">
-            <a:solidFill>
-              <a:srgbClr val="E2DDD0"/>
-            </a:solidFill>
+          <a:ln>
+            <a:noFill/>
           </a:ln>
         </p:spPr>
         <p:style>
@@ -4784,8 +4592,8 @@
         </p:nvSpPr>
         <p:spPr>
           <a:xfrm>
-            <a:off x="1051560" y="2011680"/>
-            <a:ext cx="4517136" cy="3657600"/>
+            <a:off x="731520" y="1874520"/>
+            <a:ext cx="5157216" cy="4114800"/>
           </a:xfrm>
           <a:prstGeom prst="rect">
             <a:avLst/>
@@ -4800,7 +4608,7 @@
           <a:p>
             <a:pPr>
               <a:spcAft>
-                <a:spcPts val="1600"/>
+                <a:spcPts val="1400"/>
               </a:spcAft>
               <a:defRPr sz="1100" b="1">
                 <a:solidFill>
@@ -4818,7 +4626,7 @@
               <a:spcAft>
                 <a:spcPts val="1200"/>
               </a:spcAft>
-              <a:defRPr b="1" sz="1250">
+              <a:defRPr b="1" sz="1300">
                 <a:solidFill>
                   <a:srgbClr val="16161A"/>
                 </a:solidFill>
@@ -4842,7 +4650,7 @@
               <a:spcAft>
                 <a:spcPts val="1200"/>
               </a:spcAft>
-              <a:defRPr b="1" sz="1250">
+              <a:defRPr b="1" sz="1300">
                 <a:solidFill>
                   <a:srgbClr val="16161A"/>
                 </a:solidFill>
@@ -4866,7 +4674,7 @@
               <a:spcAft>
                 <a:spcPts val="1200"/>
               </a:spcAft>
-              <a:defRPr b="1" sz="1250">
+              <a:defRPr b="1" sz="1300">
                 <a:solidFill>
                   <a:srgbClr val="16161A"/>
                 </a:solidFill>
@@ -4890,7 +4698,7 @@
               <a:spcAft>
                 <a:spcPts val="1200"/>
               </a:spcAft>
-              <a:defRPr b="1" sz="1250">
+              <a:defRPr b="1" sz="1300">
                 <a:solidFill>
                   <a:srgbClr val="16161A"/>
                 </a:solidFill>
@@ -4913,25 +4721,23 @@
       </p:sp>
       <p:sp>
         <p:nvSpPr>
-          <p:cNvPr id="6" name="Rounded Rectangle 5"/>
+          <p:cNvPr id="6" name="Rectangle 5"/>
           <p:cNvSpPr/>
           <p:nvPr/>
         </p:nvSpPr>
         <p:spPr>
           <a:xfrm>
             <a:off x="6300216" y="1691640"/>
-            <a:ext cx="5157216" cy="4297680"/>
-          </a:xfrm>
-          <a:prstGeom prst="roundRect">
+            <a:ext cx="5157216" cy="25400"/>
+          </a:xfrm>
+          <a:prstGeom prst="rect">
             <a:avLst/>
           </a:prstGeom>
           <a:solidFill>
-            <a:srgbClr val="FFFFFF"/>
+            <a:srgbClr val="D99B26"/>
           </a:solidFill>
-          <a:ln w="12700">
-            <a:solidFill>
-              <a:srgbClr val="E2DDD0"/>
-            </a:solidFill>
+          <a:ln>
+            <a:noFill/>
           </a:ln>
         </p:spPr>
         <p:style>
@@ -4964,8 +4770,8 @@
         </p:nvSpPr>
         <p:spPr>
           <a:xfrm>
-            <a:off x="6620256" y="2011680"/>
-            <a:ext cx="4517136" cy="3657600"/>
+            <a:off x="6300216" y="1874520"/>
+            <a:ext cx="5157216" cy="4114800"/>
           </a:xfrm>
           <a:prstGeom prst="rect">
             <a:avLst/>
@@ -4980,7 +4786,7 @@
           <a:p>
             <a:pPr>
               <a:spcAft>
-                <a:spcPts val="1600"/>
+                <a:spcPts val="1400"/>
               </a:spcAft>
               <a:defRPr sz="1100" b="1">
                 <a:solidFill>
@@ -4998,7 +4804,7 @@
               <a:spcAft>
                 <a:spcPts val="1200"/>
               </a:spcAft>
-              <a:defRPr b="1" sz="1250">
+              <a:defRPr b="1" sz="1300">
                 <a:solidFill>
                   <a:srgbClr val="16161A"/>
                 </a:solidFill>
@@ -5022,7 +4828,7 @@
               <a:spcAft>
                 <a:spcPts val="1200"/>
               </a:spcAft>
-              <a:defRPr b="1" sz="1250">
+              <a:defRPr b="1" sz="1300">
                 <a:solidFill>
                   <a:srgbClr val="16161A"/>
                 </a:solidFill>
@@ -5046,7 +4852,7 @@
               <a:spcAft>
                 <a:spcPts val="1200"/>
               </a:spcAft>
-              <a:defRPr b="1" sz="1250">
+              <a:defRPr b="1" sz="1300">
                 <a:solidFill>
                   <a:srgbClr val="16161A"/>
                 </a:solidFill>
@@ -5070,7 +4876,7 @@
               <a:spcAft>
                 <a:spcPts val="1200"/>
               </a:spcAft>
-              <a:defRPr b="1" sz="1250">
+              <a:defRPr b="1" sz="1300">
                 <a:solidFill>
                   <a:srgbClr val="16161A"/>
                 </a:solidFill>
@@ -5240,7 +5046,7 @@
         </p:nvSpPr>
         <p:spPr>
           <a:xfrm>
-            <a:off x="731520" y="502920"/>
+            <a:off x="731520" y="548640"/>
             <a:ext cx="10728655" cy="228600"/>
           </a:xfrm>
           <a:prstGeom prst="rect">
@@ -5276,7 +5082,7 @@
         </p:nvSpPr>
         <p:spPr>
           <a:xfrm>
-            <a:off x="731520" y="777240"/>
+            <a:off x="731520" y="822960"/>
             <a:ext cx="10728655" cy="685800"/>
           </a:xfrm>
           <a:prstGeom prst="rect">
@@ -5306,25 +5112,23 @@
       </p:sp>
       <p:sp>
         <p:nvSpPr>
-          <p:cNvPr id="4" name="Rounded Rectangle 3"/>
+          <p:cNvPr id="4" name="Rectangle 3"/>
           <p:cNvSpPr/>
           <p:nvPr/>
         </p:nvSpPr>
         <p:spPr>
           <a:xfrm>
             <a:off x="731520" y="1691640"/>
-            <a:ext cx="10728655" cy="1261872"/>
-          </a:xfrm>
-          <a:prstGeom prst="roundRect">
+            <a:ext cx="38100" cy="1097280"/>
+          </a:xfrm>
+          <a:prstGeom prst="rect">
             <a:avLst/>
           </a:prstGeom>
           <a:solidFill>
-            <a:srgbClr val="FFFFFF"/>
+            <a:srgbClr val="2B59D9"/>
           </a:solidFill>
-          <a:ln w="12700">
-            <a:solidFill>
-              <a:srgbClr val="E2DDD0"/>
-            </a:solidFill>
+          <a:ln>
+            <a:noFill/>
           </a:ln>
         </p:spPr>
         <p:style>
@@ -5357,8 +5161,8 @@
         </p:nvSpPr>
         <p:spPr>
           <a:xfrm>
-            <a:off x="1051560" y="1874520"/>
-            <a:ext cx="10058400" cy="914400"/>
+            <a:off x="960120" y="1691640"/>
+            <a:ext cx="10500055" cy="1097280"/>
           </a:xfrm>
           <a:prstGeom prst="rect">
             <a:avLst/>
@@ -5373,7 +5177,7 @@
           <a:p>
             <a:pPr>
               <a:spcAft>
-                <a:spcPts val="600"/>
+                <a:spcPts val="400"/>
               </a:spcAft>
               <a:defRPr sz="1050" b="1">
                 <a:solidFill>
@@ -5388,7 +5192,7 @@
           </a:p>
           <a:p>
             <a:pPr>
-              <a:defRPr sz="1350">
+              <a:defRPr sz="1400">
                 <a:solidFill>
                   <a:srgbClr val="16161A"/>
                 </a:solidFill>
@@ -5403,25 +5207,23 @@
       </p:sp>
       <p:sp>
         <p:nvSpPr>
-          <p:cNvPr id="6" name="Rounded Rectangle 5"/>
+          <p:cNvPr id="6" name="Rectangle 5"/>
           <p:cNvSpPr/>
           <p:nvPr/>
         </p:nvSpPr>
         <p:spPr>
           <a:xfrm>
             <a:off x="731520" y="3108960"/>
-            <a:ext cx="10728655" cy="1261872"/>
-          </a:xfrm>
-          <a:prstGeom prst="roundRect">
+            <a:ext cx="38100" cy="1097280"/>
+          </a:xfrm>
+          <a:prstGeom prst="rect">
             <a:avLst/>
           </a:prstGeom>
           <a:solidFill>
-            <a:srgbClr val="FFFFFF"/>
+            <a:srgbClr val="D99B26"/>
           </a:solidFill>
-          <a:ln w="12700">
-            <a:solidFill>
-              <a:srgbClr val="E2DDD0"/>
-            </a:solidFill>
+          <a:ln>
+            <a:noFill/>
           </a:ln>
         </p:spPr>
         <p:style>
@@ -5454,8 +5256,8 @@
         </p:nvSpPr>
         <p:spPr>
           <a:xfrm>
-            <a:off x="1051560" y="3291840"/>
-            <a:ext cx="10058400" cy="914400"/>
+            <a:off x="960120" y="3108960"/>
+            <a:ext cx="10500055" cy="1097280"/>
           </a:xfrm>
           <a:prstGeom prst="rect">
             <a:avLst/>
@@ -5470,11 +5272,11 @@
           <a:p>
             <a:pPr>
               <a:spcAft>
-                <a:spcPts val="600"/>
+                <a:spcPts val="400"/>
               </a:spcAft>
               <a:defRPr sz="1050" b="1">
                 <a:solidFill>
-                  <a:srgbClr val="2B59D9"/>
+                  <a:srgbClr val="D99B26"/>
                 </a:solidFill>
                 <a:latin typeface="Helvetica Neue"/>
               </a:defRPr>
@@ -5485,7 +5287,7 @@
           </a:p>
           <a:p>
             <a:pPr>
-              <a:defRPr sz="1350">
+              <a:defRPr sz="1400">
                 <a:solidFill>
                   <a:srgbClr val="16161A"/>
                 </a:solidFill>
@@ -5500,25 +5302,23 @@
       </p:sp>
       <p:sp>
         <p:nvSpPr>
-          <p:cNvPr id="8" name="Rounded Rectangle 7"/>
+          <p:cNvPr id="8" name="Rectangle 7"/>
           <p:cNvSpPr/>
           <p:nvPr/>
         </p:nvSpPr>
         <p:spPr>
           <a:xfrm>
             <a:off x="731520" y="4526280"/>
-            <a:ext cx="10728655" cy="1261872"/>
-          </a:xfrm>
-          <a:prstGeom prst="roundRect">
+            <a:ext cx="38100" cy="1097280"/>
+          </a:xfrm>
+          <a:prstGeom prst="rect">
             <a:avLst/>
           </a:prstGeom>
           <a:solidFill>
-            <a:srgbClr val="FFFFFF"/>
+            <a:srgbClr val="2B59D9"/>
           </a:solidFill>
-          <a:ln w="12700">
-            <a:solidFill>
-              <a:srgbClr val="E2DDD0"/>
-            </a:solidFill>
+          <a:ln>
+            <a:noFill/>
           </a:ln>
         </p:spPr>
         <p:style>
@@ -5551,8 +5351,8 @@
         </p:nvSpPr>
         <p:spPr>
           <a:xfrm>
-            <a:off x="1051560" y="4709160"/>
-            <a:ext cx="10058400" cy="914400"/>
+            <a:off x="960120" y="4526280"/>
+            <a:ext cx="10500055" cy="1097280"/>
           </a:xfrm>
           <a:prstGeom prst="rect">
             <a:avLst/>
@@ -5567,7 +5367,7 @@
           <a:p>
             <a:pPr>
               <a:spcAft>
-                <a:spcPts val="600"/>
+                <a:spcPts val="400"/>
               </a:spcAft>
               <a:defRPr sz="1050" b="1">
                 <a:solidFill>
@@ -5582,7 +5382,7 @@
           </a:p>
           <a:p>
             <a:pPr>
-              <a:defRPr sz="1350">
+              <a:defRPr sz="1400">
                 <a:solidFill>
                   <a:srgbClr val="16161A"/>
                 </a:solidFill>
@@ -5744,7 +5544,7 @@
         </p:nvSpPr>
         <p:spPr>
           <a:xfrm>
-            <a:off x="731520" y="502920"/>
+            <a:off x="731520" y="548640"/>
             <a:ext cx="10728655" cy="228600"/>
           </a:xfrm>
           <a:prstGeom prst="rect">
@@ -5780,7 +5580,7 @@
         </p:nvSpPr>
         <p:spPr>
           <a:xfrm>
-            <a:off x="731520" y="777240"/>
+            <a:off x="731520" y="822960"/>
             <a:ext cx="10728655" cy="685800"/>
           </a:xfrm>
           <a:prstGeom prst="rect">
@@ -5810,25 +5610,23 @@
       </p:sp>
       <p:sp>
         <p:nvSpPr>
-          <p:cNvPr id="4" name="Rounded Rectangle 3"/>
+          <p:cNvPr id="4" name="Rectangle 3"/>
           <p:cNvSpPr/>
           <p:nvPr/>
         </p:nvSpPr>
         <p:spPr>
           <a:xfrm>
             <a:off x="731520" y="1691640"/>
-            <a:ext cx="3328416" cy="3246120"/>
-          </a:xfrm>
-          <a:prstGeom prst="roundRect">
+            <a:ext cx="3328416" cy="25400"/>
+          </a:xfrm>
+          <a:prstGeom prst="rect">
             <a:avLst/>
           </a:prstGeom>
           <a:solidFill>
-            <a:srgbClr val="FFFFFF"/>
+            <a:srgbClr val="D99B26"/>
           </a:solidFill>
-          <a:ln w="12700">
-            <a:solidFill>
-              <a:srgbClr val="E2DDD0"/>
-            </a:solidFill>
+          <a:ln>
+            <a:noFill/>
           </a:ln>
         </p:spPr>
         <p:style>
@@ -5861,8 +5659,8 @@
         </p:nvSpPr>
         <p:spPr>
           <a:xfrm>
-            <a:off x="1051560" y="1920240"/>
-            <a:ext cx="2688336" cy="2834640"/>
+            <a:off x="731520" y="1856232"/>
+            <a:ext cx="3328416" cy="3017520"/>
           </a:xfrm>
           <a:prstGeom prst="rect">
             <a:avLst/>
@@ -5877,24 +5675,24 @@
           <a:p>
             <a:pPr>
               <a:spcAft>
+                <a:spcPts val="800"/>
+              </a:spcAft>
+              <a:defRPr sz="1000" b="1">
+                <a:solidFill>
+                  <a:srgbClr val="D99B26"/>
+                </a:solidFill>
+                <a:latin typeface="Helvetica Neue"/>
+              </a:defRPr>
+            </a:pPr>
+            <a:r>
+              <a:t>ENTERPRISE INTEGRATION</a:t>
+            </a:r>
+          </a:p>
+          <a:p>
+            <a:pPr>
+              <a:spcAft>
                 <a:spcPts val="1000"/>
               </a:spcAft>
-              <a:defRPr sz="1000" b="1">
-                <a:solidFill>
-                  <a:srgbClr val="D99B26"/>
-                </a:solidFill>
-                <a:latin typeface="Helvetica Neue"/>
-              </a:defRPr>
-            </a:pPr>
-            <a:r>
-              <a:t>ENTERPRISE INTEGRATION</a:t>
-            </a:r>
-          </a:p>
-          <a:p>
-            <a:pPr>
-              <a:spcAft>
-                <a:spcPts val="1200"/>
-              </a:spcAft>
               <a:defRPr sz="1800" b="1">
                 <a:solidFill>
                   <a:srgbClr val="16161A"/>
@@ -5923,25 +5721,23 @@
       </p:sp>
       <p:sp>
         <p:nvSpPr>
-          <p:cNvPr id="6" name="Rounded Rectangle 5"/>
+          <p:cNvPr id="6" name="Rectangle 5"/>
           <p:cNvSpPr/>
           <p:nvPr/>
         </p:nvSpPr>
         <p:spPr>
           <a:xfrm>
             <a:off x="4334256" y="1691640"/>
-            <a:ext cx="3328416" cy="3246120"/>
-          </a:xfrm>
-          <a:prstGeom prst="roundRect">
+            <a:ext cx="3328416" cy="25400"/>
+          </a:xfrm>
+          <a:prstGeom prst="rect">
             <a:avLst/>
           </a:prstGeom>
           <a:solidFill>
-            <a:srgbClr val="FFFFFF"/>
+            <a:srgbClr val="2B59D9"/>
           </a:solidFill>
-          <a:ln w="12700">
-            <a:solidFill>
-              <a:srgbClr val="E2DDD0"/>
-            </a:solidFill>
+          <a:ln>
+            <a:noFill/>
           </a:ln>
         </p:spPr>
         <p:style>
@@ -5974,8 +5770,8 @@
         </p:nvSpPr>
         <p:spPr>
           <a:xfrm>
-            <a:off x="4654296" y="1920240"/>
-            <a:ext cx="2688336" cy="2834640"/>
+            <a:off x="4334256" y="1856232"/>
+            <a:ext cx="3328416" cy="3017520"/>
           </a:xfrm>
           <a:prstGeom prst="rect">
             <a:avLst/>
@@ -5990,24 +5786,24 @@
           <a:p>
             <a:pPr>
               <a:spcAft>
+                <a:spcPts val="800"/>
+              </a:spcAft>
+              <a:defRPr sz="1000" b="1">
+                <a:solidFill>
+                  <a:srgbClr val="2B59D9"/>
+                </a:solidFill>
+                <a:latin typeface="Helvetica Neue"/>
+              </a:defRPr>
+            </a:pPr>
+            <a:r>
+              <a:t>VOICE AI HARDWARE &amp; SOFTWARE</a:t>
+            </a:r>
+          </a:p>
+          <a:p>
+            <a:pPr>
+              <a:spcAft>
                 <a:spcPts val="1000"/>
               </a:spcAft>
-              <a:defRPr sz="1000" b="1">
-                <a:solidFill>
-                  <a:srgbClr val="D99B26"/>
-                </a:solidFill>
-                <a:latin typeface="Helvetica Neue"/>
-              </a:defRPr>
-            </a:pPr>
-            <a:r>
-              <a:t>VOICE AI HARDWARE &amp; SOFTWARE</a:t>
-            </a:r>
-          </a:p>
-          <a:p>
-            <a:pPr>
-              <a:spcAft>
-                <a:spcPts val="1200"/>
-              </a:spcAft>
               <a:defRPr sz="1800" b="1">
                 <a:solidFill>
                   <a:srgbClr val="16161A"/>
@@ -6036,25 +5832,23 @@
       </p:sp>
       <p:sp>
         <p:nvSpPr>
-          <p:cNvPr id="8" name="Rounded Rectangle 7"/>
+          <p:cNvPr id="8" name="Rectangle 7"/>
           <p:cNvSpPr/>
           <p:nvPr/>
         </p:nvSpPr>
         <p:spPr>
           <a:xfrm>
             <a:off x="7936992" y="1691640"/>
-            <a:ext cx="3328416" cy="3246120"/>
-          </a:xfrm>
-          <a:prstGeom prst="roundRect">
+            <a:ext cx="3328416" cy="25400"/>
+          </a:xfrm>
+          <a:prstGeom prst="rect">
             <a:avLst/>
           </a:prstGeom>
           <a:solidFill>
-            <a:srgbClr val="FFFFFF"/>
+            <a:srgbClr val="2B59D9"/>
           </a:solidFill>
-          <a:ln w="12700">
-            <a:solidFill>
-              <a:srgbClr val="E2DDD0"/>
-            </a:solidFill>
+          <a:ln>
+            <a:noFill/>
           </a:ln>
         </p:spPr>
         <p:style>
@@ -6087,8 +5881,8 @@
         </p:nvSpPr>
         <p:spPr>
           <a:xfrm>
-            <a:off x="8257032" y="1920240"/>
-            <a:ext cx="2688336" cy="2834640"/>
+            <a:off x="7936992" y="1856232"/>
+            <a:ext cx="3328416" cy="3017520"/>
           </a:xfrm>
           <a:prstGeom prst="rect">
             <a:avLst/>
@@ -6103,24 +5897,24 @@
           <a:p>
             <a:pPr>
               <a:spcAft>
+                <a:spcPts val="800"/>
+              </a:spcAft>
+              <a:defRPr sz="1000" b="1">
+                <a:solidFill>
+                  <a:srgbClr val="2B59D9"/>
+                </a:solidFill>
+                <a:latin typeface="Helvetica Neue"/>
+              </a:defRPr>
+            </a:pPr>
+            <a:r>
+              <a:t>Appt Helper · Open Cita · Border Bills</a:t>
+            </a:r>
+          </a:p>
+          <a:p>
+            <a:pPr>
+              <a:spcAft>
                 <a:spcPts val="1000"/>
               </a:spcAft>
-              <a:defRPr sz="1000" b="1">
-                <a:solidFill>
-                  <a:srgbClr val="D99B26"/>
-                </a:solidFill>
-                <a:latin typeface="Helvetica Neue"/>
-              </a:defRPr>
-            </a:pPr>
-            <a:r>
-              <a:t>Appt Helper · Open Cita · Border Bills</a:t>
-            </a:r>
-          </a:p>
-          <a:p>
-            <a:pPr>
-              <a:spcAft>
-                <a:spcPts val="1200"/>
-              </a:spcAft>
               <a:defRPr sz="1800" b="1">
                 <a:solidFill>
                   <a:srgbClr val="16161A"/>
@@ -6149,401 +5943,13 @@
       </p:sp>
       <p:sp>
         <p:nvSpPr>
-          <p:cNvPr id="10" name="Rounded Rectangle 9"/>
+          <p:cNvPr id="10" name="Rectangle 9"/>
           <p:cNvSpPr/>
           <p:nvPr/>
         </p:nvSpPr>
         <p:spPr>
           <a:xfrm>
-            <a:off x="731520" y="5120640"/>
-            <a:ext cx="2514600" cy="1005840"/>
-          </a:xfrm>
-          <a:prstGeom prst="roundRect">
-            <a:avLst/>
-          </a:prstGeom>
-          <a:solidFill>
-            <a:srgbClr val="FFFFFF"/>
-          </a:solidFill>
-          <a:ln w="12700">
-            <a:solidFill>
-              <a:srgbClr val="E2DDD0"/>
-            </a:solidFill>
-          </a:ln>
-        </p:spPr>
-        <p:style>
-          <a:lnRef idx="1">
-            <a:schemeClr val="accent1"/>
-          </a:lnRef>
-          <a:fillRef idx="3">
-            <a:schemeClr val="accent1"/>
-          </a:fillRef>
-          <a:effectRef idx="2">
-            <a:schemeClr val="accent1"/>
-          </a:effectRef>
-          <a:fontRef idx="minor">
-            <a:schemeClr val="lt1"/>
-          </a:fontRef>
-        </p:style>
-        <p:txBody>
-          <a:bodyPr rtlCol="0" anchor="ctr"/>
-          <a:lstStyle/>
-          <a:p>
-            <a:pPr algn="ctr"/>
-          </a:p>
-        </p:txBody>
-      </p:sp>
-      <p:sp>
-        <p:nvSpPr>
-          <p:cNvPr id="11" name="TextBox 10"/>
-          <p:cNvSpPr txBox="1"/>
-          <p:nvPr/>
-        </p:nvSpPr>
-        <p:spPr>
-          <a:xfrm>
-            <a:off x="896112" y="5212080"/>
-            <a:ext cx="2185416" cy="868680"/>
-          </a:xfrm>
-          <a:prstGeom prst="rect">
-            <a:avLst/>
-          </a:prstGeom>
-          <a:noFill/>
-        </p:spPr>
-        <p:txBody>
-          <a:bodyPr wrap="square" lIns="0" rIns="0" tIns="0" bIns="0">
-            <a:spAutoFit/>
-          </a:bodyPr>
-          <a:lstStyle/>
-          <a:p>
-            <a:pPr>
-              <a:defRPr sz="1250" b="1">
-                <a:solidFill>
-                  <a:srgbClr val="16161A"/>
-                </a:solidFill>
-                <a:latin typeface="Helvetica Neue"/>
-              </a:defRPr>
-            </a:pPr>
-            <a:r>
-              <a:t>In production.</a:t>
-            </a:r>
-          </a:p>
-          <a:p>
-            <a:pPr>
-              <a:spcBef>
-                <a:spcPts val="200"/>
-              </a:spcBef>
-              <a:defRPr sz="1000">
-                <a:solidFill>
-                  <a:srgbClr val="454337"/>
-                </a:solidFill>
-                <a:latin typeface="Helvetica Neue"/>
-              </a:defRPr>
-            </a:pPr>
-            <a:r>
-              <a:t>Real users today on self-developed products.</a:t>
-            </a:r>
-          </a:p>
-        </p:txBody>
-      </p:sp>
-      <p:sp>
-        <p:nvSpPr>
-          <p:cNvPr id="12" name="Rounded Rectangle 11"/>
-          <p:cNvSpPr/>
-          <p:nvPr/>
-        </p:nvSpPr>
-        <p:spPr>
-          <a:xfrm>
-            <a:off x="3429000" y="5120640"/>
-            <a:ext cx="2514600" cy="1005840"/>
-          </a:xfrm>
-          <a:prstGeom prst="roundRect">
-            <a:avLst/>
-          </a:prstGeom>
-          <a:solidFill>
-            <a:srgbClr val="FFFFFF"/>
-          </a:solidFill>
-          <a:ln w="12700">
-            <a:solidFill>
-              <a:srgbClr val="E2DDD0"/>
-            </a:solidFill>
-          </a:ln>
-        </p:spPr>
-        <p:style>
-          <a:lnRef idx="1">
-            <a:schemeClr val="accent1"/>
-          </a:lnRef>
-          <a:fillRef idx="3">
-            <a:schemeClr val="accent1"/>
-          </a:fillRef>
-          <a:effectRef idx="2">
-            <a:schemeClr val="accent1"/>
-          </a:effectRef>
-          <a:fontRef idx="minor">
-            <a:schemeClr val="lt1"/>
-          </a:fontRef>
-        </p:style>
-        <p:txBody>
-          <a:bodyPr rtlCol="0" anchor="ctr"/>
-          <a:lstStyle/>
-          <a:p>
-            <a:pPr algn="ctr"/>
-          </a:p>
-        </p:txBody>
-      </p:sp>
-      <p:sp>
-        <p:nvSpPr>
-          <p:cNvPr id="13" name="TextBox 12"/>
-          <p:cNvSpPr txBox="1"/>
-          <p:nvPr/>
-        </p:nvSpPr>
-        <p:spPr>
-          <a:xfrm>
-            <a:off x="3593592" y="5212080"/>
-            <a:ext cx="2185416" cy="868680"/>
-          </a:xfrm>
-          <a:prstGeom prst="rect">
-            <a:avLst/>
-          </a:prstGeom>
-          <a:noFill/>
-        </p:spPr>
-        <p:txBody>
-          <a:bodyPr wrap="square" lIns="0" rIns="0" tIns="0" bIns="0">
-            <a:spAutoFit/>
-          </a:bodyPr>
-          <a:lstStyle/>
-          <a:p>
-            <a:pPr>
-              <a:defRPr sz="1250" b="1">
-                <a:solidFill>
-                  <a:srgbClr val="16161A"/>
-                </a:solidFill>
-                <a:latin typeface="Helvetica Neue"/>
-              </a:defRPr>
-            </a:pPr>
-            <a:r>
-              <a:t>Senior team.</a:t>
-            </a:r>
-          </a:p>
-          <a:p>
-            <a:pPr>
-              <a:spcBef>
-                <a:spcPts val="200"/>
-              </a:spcBef>
-              <a:defRPr sz="1000">
-                <a:solidFill>
-                  <a:srgbClr val="454337"/>
-                </a:solidFill>
-                <a:latin typeface="Helvetica Neue"/>
-              </a:defRPr>
-            </a:pPr>
-            <a:r>
-              <a:t>The people who pitch your project ship it.</a:t>
-            </a:r>
-          </a:p>
-        </p:txBody>
-      </p:sp>
-      <p:sp>
-        <p:nvSpPr>
-          <p:cNvPr id="14" name="Rounded Rectangle 13"/>
-          <p:cNvSpPr/>
-          <p:nvPr/>
-        </p:nvSpPr>
-        <p:spPr>
-          <a:xfrm>
-            <a:off x="6126480" y="5120640"/>
-            <a:ext cx="2514600" cy="1005840"/>
-          </a:xfrm>
-          <a:prstGeom prst="roundRect">
-            <a:avLst/>
-          </a:prstGeom>
-          <a:solidFill>
-            <a:srgbClr val="FFFFFF"/>
-          </a:solidFill>
-          <a:ln w="12700">
-            <a:solidFill>
-              <a:srgbClr val="E2DDD0"/>
-            </a:solidFill>
-          </a:ln>
-        </p:spPr>
-        <p:style>
-          <a:lnRef idx="1">
-            <a:schemeClr val="accent1"/>
-          </a:lnRef>
-          <a:fillRef idx="3">
-            <a:schemeClr val="accent1"/>
-          </a:fillRef>
-          <a:effectRef idx="2">
-            <a:schemeClr val="accent1"/>
-          </a:effectRef>
-          <a:fontRef idx="minor">
-            <a:schemeClr val="lt1"/>
-          </a:fontRef>
-        </p:style>
-        <p:txBody>
-          <a:bodyPr rtlCol="0" anchor="ctr"/>
-          <a:lstStyle/>
-          <a:p>
-            <a:pPr algn="ctr"/>
-          </a:p>
-        </p:txBody>
-      </p:sp>
-      <p:sp>
-        <p:nvSpPr>
-          <p:cNvPr id="15" name="TextBox 14"/>
-          <p:cNvSpPr txBox="1"/>
-          <p:nvPr/>
-        </p:nvSpPr>
-        <p:spPr>
-          <a:xfrm>
-            <a:off x="6291072" y="5212080"/>
-            <a:ext cx="2185416" cy="868680"/>
-          </a:xfrm>
-          <a:prstGeom prst="rect">
-            <a:avLst/>
-          </a:prstGeom>
-          <a:noFill/>
-        </p:spPr>
-        <p:txBody>
-          <a:bodyPr wrap="square" lIns="0" rIns="0" tIns="0" bIns="0">
-            <a:spAutoFit/>
-          </a:bodyPr>
-          <a:lstStyle/>
-          <a:p>
-            <a:pPr>
-              <a:defRPr sz="1250" b="1">
-                <a:solidFill>
-                  <a:srgbClr val="16161A"/>
-                </a:solidFill>
-                <a:latin typeface="Helvetica Neue"/>
-              </a:defRPr>
-            </a:pPr>
-            <a:r>
-              <a:t>Code first.</a:t>
-            </a:r>
-          </a:p>
-          <a:p>
-            <a:pPr>
-              <a:spcBef>
-                <a:spcPts val="200"/>
-              </a:spcBef>
-              <a:defRPr sz="1000">
-                <a:solidFill>
-                  <a:srgbClr val="454337"/>
-                </a:solidFill>
-                <a:latin typeface="Helvetica Neue"/>
-              </a:defRPr>
-            </a:pPr>
-            <a:r>
-              <a:t>No decks before working software.</a:t>
-            </a:r>
-          </a:p>
-        </p:txBody>
-      </p:sp>
-      <p:sp>
-        <p:nvSpPr>
-          <p:cNvPr id="16" name="Rounded Rectangle 15"/>
-          <p:cNvSpPr/>
-          <p:nvPr/>
-        </p:nvSpPr>
-        <p:spPr>
-          <a:xfrm>
-            <a:off x="8823960" y="5120640"/>
-            <a:ext cx="2514600" cy="1005840"/>
-          </a:xfrm>
-          <a:prstGeom prst="roundRect">
-            <a:avLst/>
-          </a:prstGeom>
-          <a:solidFill>
-            <a:srgbClr val="FFFFFF"/>
-          </a:solidFill>
-          <a:ln w="12700">
-            <a:solidFill>
-              <a:srgbClr val="E2DDD0"/>
-            </a:solidFill>
-          </a:ln>
-        </p:spPr>
-        <p:style>
-          <a:lnRef idx="1">
-            <a:schemeClr val="accent1"/>
-          </a:lnRef>
-          <a:fillRef idx="3">
-            <a:schemeClr val="accent1"/>
-          </a:fillRef>
-          <a:effectRef idx="2">
-            <a:schemeClr val="accent1"/>
-          </a:effectRef>
-          <a:fontRef idx="minor">
-            <a:schemeClr val="lt1"/>
-          </a:fontRef>
-        </p:style>
-        <p:txBody>
-          <a:bodyPr rtlCol="0" anchor="ctr"/>
-          <a:lstStyle/>
-          <a:p>
-            <a:pPr algn="ctr"/>
-          </a:p>
-        </p:txBody>
-      </p:sp>
-      <p:sp>
-        <p:nvSpPr>
-          <p:cNvPr id="17" name="TextBox 16"/>
-          <p:cNvSpPr txBox="1"/>
-          <p:nvPr/>
-        </p:nvSpPr>
-        <p:spPr>
-          <a:xfrm>
-            <a:off x="8988552" y="5212080"/>
-            <a:ext cx="2185416" cy="868680"/>
-          </a:xfrm>
-          <a:prstGeom prst="rect">
-            <a:avLst/>
-          </a:prstGeom>
-          <a:noFill/>
-        </p:spPr>
-        <p:txBody>
-          <a:bodyPr wrap="square" lIns="0" rIns="0" tIns="0" bIns="0">
-            <a:spAutoFit/>
-          </a:bodyPr>
-          <a:lstStyle/>
-          <a:p>
-            <a:pPr>
-              <a:defRPr sz="1250" b="1">
-                <a:solidFill>
-                  <a:srgbClr val="16161A"/>
-                </a:solidFill>
-                <a:latin typeface="Helvetica Neue"/>
-              </a:defRPr>
-            </a:pPr>
-            <a:r>
-              <a:t>One team.</a:t>
-            </a:r>
-          </a:p>
-          <a:p>
-            <a:pPr>
-              <a:spcBef>
-                <a:spcPts val="200"/>
-              </a:spcBef>
-              <a:defRPr sz="1000">
-                <a:solidFill>
-                  <a:srgbClr val="454337"/>
-                </a:solidFill>
-                <a:latin typeface="Helvetica Neue"/>
-              </a:defRPr>
-            </a:pPr>
-            <a:r>
-              <a:t>Interfaces &amp; automations: same stack.</a:t>
-            </a:r>
-          </a:p>
-        </p:txBody>
-      </p:sp>
-      <p:sp>
-        <p:nvSpPr>
-          <p:cNvPr id="18" name="Rectangle 17"/>
-          <p:cNvSpPr/>
-          <p:nvPr/>
-        </p:nvSpPr>
-        <p:spPr>
-          <a:xfrm>
-            <a:off x="731520" y="6263640"/>
+            <a:off x="731520" y="4983480"/>
             <a:ext cx="10728655" cy="12700"/>
           </a:xfrm>
           <a:prstGeom prst="rect">
@@ -6580,14 +5986,14 @@
       </p:sp>
       <p:sp>
         <p:nvSpPr>
-          <p:cNvPr id="19" name="TextBox 18"/>
+          <p:cNvPr id="11" name="TextBox 10"/>
           <p:cNvSpPr txBox="1"/>
           <p:nvPr/>
         </p:nvSpPr>
         <p:spPr>
           <a:xfrm>
-            <a:off x="731520" y="6355080"/>
-            <a:ext cx="7315200" cy="320040"/>
+            <a:off x="731520" y="5120640"/>
+            <a:ext cx="2514600" cy="1005840"/>
           </a:xfrm>
           <a:prstGeom prst="rect">
             <a:avLst/>
@@ -6601,8 +6007,259 @@
           <a:lstStyle/>
           <a:p>
             <a:pPr>
+              <a:defRPr sz="1250" b="1">
+                <a:solidFill>
+                  <a:srgbClr val="16161A"/>
+                </a:solidFill>
+                <a:latin typeface="Helvetica Neue"/>
+              </a:defRPr>
+            </a:pPr>
+            <a:r>
+              <a:t>In production.</a:t>
+            </a:r>
+          </a:p>
+          <a:p>
+            <a:pPr>
+              <a:spcBef>
+                <a:spcPts val="200"/>
+              </a:spcBef>
               <a:defRPr sz="1000">
                 <a:solidFill>
+                  <a:srgbClr val="454337"/>
+                </a:solidFill>
+                <a:latin typeface="Helvetica Neue"/>
+              </a:defRPr>
+            </a:pPr>
+            <a:r>
+              <a:t>Real users today on self-developed products.</a:t>
+            </a:r>
+          </a:p>
+        </p:txBody>
+      </p:sp>
+      <p:sp>
+        <p:nvSpPr>
+          <p:cNvPr id="12" name="TextBox 11"/>
+          <p:cNvSpPr txBox="1"/>
+          <p:nvPr/>
+        </p:nvSpPr>
+        <p:spPr>
+          <a:xfrm>
+            <a:off x="3429000" y="5120640"/>
+            <a:ext cx="2514600" cy="1005840"/>
+          </a:xfrm>
+          <a:prstGeom prst="rect">
+            <a:avLst/>
+          </a:prstGeom>
+          <a:noFill/>
+        </p:spPr>
+        <p:txBody>
+          <a:bodyPr wrap="square" lIns="0" rIns="0" tIns="0" bIns="0">
+            <a:spAutoFit/>
+          </a:bodyPr>
+          <a:lstStyle/>
+          <a:p>
+            <a:pPr>
+              <a:defRPr sz="1250" b="1">
+                <a:solidFill>
+                  <a:srgbClr val="16161A"/>
+                </a:solidFill>
+                <a:latin typeface="Helvetica Neue"/>
+              </a:defRPr>
+            </a:pPr>
+            <a:r>
+              <a:t>Senior team.</a:t>
+            </a:r>
+          </a:p>
+          <a:p>
+            <a:pPr>
+              <a:spcBef>
+                <a:spcPts val="200"/>
+              </a:spcBef>
+              <a:defRPr sz="1000">
+                <a:solidFill>
+                  <a:srgbClr val="454337"/>
+                </a:solidFill>
+                <a:latin typeface="Helvetica Neue"/>
+              </a:defRPr>
+            </a:pPr>
+            <a:r>
+              <a:t>The people who pitch your project ship it.</a:t>
+            </a:r>
+          </a:p>
+        </p:txBody>
+      </p:sp>
+      <p:sp>
+        <p:nvSpPr>
+          <p:cNvPr id="13" name="TextBox 12"/>
+          <p:cNvSpPr txBox="1"/>
+          <p:nvPr/>
+        </p:nvSpPr>
+        <p:spPr>
+          <a:xfrm>
+            <a:off x="6126480" y="5120640"/>
+            <a:ext cx="2514600" cy="1005840"/>
+          </a:xfrm>
+          <a:prstGeom prst="rect">
+            <a:avLst/>
+          </a:prstGeom>
+          <a:noFill/>
+        </p:spPr>
+        <p:txBody>
+          <a:bodyPr wrap="square" lIns="0" rIns="0" tIns="0" bIns="0">
+            <a:spAutoFit/>
+          </a:bodyPr>
+          <a:lstStyle/>
+          <a:p>
+            <a:pPr>
+              <a:defRPr sz="1250" b="1">
+                <a:solidFill>
+                  <a:srgbClr val="16161A"/>
+                </a:solidFill>
+                <a:latin typeface="Helvetica Neue"/>
+              </a:defRPr>
+            </a:pPr>
+            <a:r>
+              <a:t>Code first.</a:t>
+            </a:r>
+          </a:p>
+          <a:p>
+            <a:pPr>
+              <a:spcBef>
+                <a:spcPts val="200"/>
+              </a:spcBef>
+              <a:defRPr sz="1000">
+                <a:solidFill>
+                  <a:srgbClr val="454337"/>
+                </a:solidFill>
+                <a:latin typeface="Helvetica Neue"/>
+              </a:defRPr>
+            </a:pPr>
+            <a:r>
+              <a:t>No decks before working software.</a:t>
+            </a:r>
+          </a:p>
+        </p:txBody>
+      </p:sp>
+      <p:sp>
+        <p:nvSpPr>
+          <p:cNvPr id="14" name="TextBox 13"/>
+          <p:cNvSpPr txBox="1"/>
+          <p:nvPr/>
+        </p:nvSpPr>
+        <p:spPr>
+          <a:xfrm>
+            <a:off x="8823960" y="5120640"/>
+            <a:ext cx="2514600" cy="1005840"/>
+          </a:xfrm>
+          <a:prstGeom prst="rect">
+            <a:avLst/>
+          </a:prstGeom>
+          <a:noFill/>
+        </p:spPr>
+        <p:txBody>
+          <a:bodyPr wrap="square" lIns="0" rIns="0" tIns="0" bIns="0">
+            <a:spAutoFit/>
+          </a:bodyPr>
+          <a:lstStyle/>
+          <a:p>
+            <a:pPr>
+              <a:defRPr sz="1250" b="1">
+                <a:solidFill>
+                  <a:srgbClr val="16161A"/>
+                </a:solidFill>
+                <a:latin typeface="Helvetica Neue"/>
+              </a:defRPr>
+            </a:pPr>
+            <a:r>
+              <a:t>One team.</a:t>
+            </a:r>
+          </a:p>
+          <a:p>
+            <a:pPr>
+              <a:spcBef>
+                <a:spcPts val="200"/>
+              </a:spcBef>
+              <a:defRPr sz="1000">
+                <a:solidFill>
+                  <a:srgbClr val="454337"/>
+                </a:solidFill>
+                <a:latin typeface="Helvetica Neue"/>
+              </a:defRPr>
+            </a:pPr>
+            <a:r>
+              <a:t>Interfaces &amp; automations: same stack.</a:t>
+            </a:r>
+          </a:p>
+        </p:txBody>
+      </p:sp>
+      <p:sp>
+        <p:nvSpPr>
+          <p:cNvPr id="15" name="Rectangle 14"/>
+          <p:cNvSpPr/>
+          <p:nvPr/>
+        </p:nvSpPr>
+        <p:spPr>
+          <a:xfrm>
+            <a:off x="731520" y="6263640"/>
+            <a:ext cx="10728655" cy="12700"/>
+          </a:xfrm>
+          <a:prstGeom prst="rect">
+            <a:avLst/>
+          </a:prstGeom>
+          <a:solidFill>
+            <a:srgbClr val="E2DDD0"/>
+          </a:solidFill>
+          <a:ln>
+            <a:noFill/>
+          </a:ln>
+        </p:spPr>
+        <p:style>
+          <a:lnRef idx="1">
+            <a:schemeClr val="accent1"/>
+          </a:lnRef>
+          <a:fillRef idx="3">
+            <a:schemeClr val="accent1"/>
+          </a:fillRef>
+          <a:effectRef idx="2">
+            <a:schemeClr val="accent1"/>
+          </a:effectRef>
+          <a:fontRef idx="minor">
+            <a:schemeClr val="lt1"/>
+          </a:fontRef>
+        </p:style>
+        <p:txBody>
+          <a:bodyPr rtlCol="0" anchor="ctr"/>
+          <a:lstStyle/>
+          <a:p>
+            <a:pPr algn="ctr"/>
+          </a:p>
+        </p:txBody>
+      </p:sp>
+      <p:sp>
+        <p:nvSpPr>
+          <p:cNvPr id="16" name="TextBox 15"/>
+          <p:cNvSpPr txBox="1"/>
+          <p:nvPr/>
+        </p:nvSpPr>
+        <p:spPr>
+          <a:xfrm>
+            <a:off x="731520" y="6355080"/>
+            <a:ext cx="7315200" cy="320040"/>
+          </a:xfrm>
+          <a:prstGeom prst="rect">
+            <a:avLst/>
+          </a:prstGeom>
+          <a:noFill/>
+        </p:spPr>
+        <p:txBody>
+          <a:bodyPr wrap="square" lIns="0" rIns="0" tIns="0" bIns="0">
+            <a:spAutoFit/>
+          </a:bodyPr>
+          <a:lstStyle/>
+          <a:p>
+            <a:pPr>
+              <a:defRPr sz="1000">
+                <a:solidFill>
                   <a:srgbClr val="736E62"/>
                 </a:solidFill>
                 <a:latin typeface="Helvetica Neue"/>
@@ -6616,7 +6273,7 @@
       </p:sp>
       <p:sp>
         <p:nvSpPr>
-          <p:cNvPr id="20" name="TextBox 19"/>
+          <p:cNvPr id="17" name="TextBox 16"/>
           <p:cNvSpPr txBox="1"/>
           <p:nvPr/>
         </p:nvSpPr>
@@ -6684,7 +6341,7 @@
         </p:nvSpPr>
         <p:spPr>
           <a:xfrm>
-            <a:off x="731520" y="502920"/>
+            <a:off x="731520" y="548640"/>
             <a:ext cx="10728655" cy="228600"/>
           </a:xfrm>
           <a:prstGeom prst="rect">
@@ -6720,7 +6377,7 @@
         </p:nvSpPr>
         <p:spPr>
           <a:xfrm>
-            <a:off x="731520" y="777240"/>
+            <a:off x="731520" y="822960"/>
             <a:ext cx="10728655" cy="685800"/>
           </a:xfrm>
           <a:prstGeom prst="rect">
@@ -6750,25 +6407,23 @@
       </p:sp>
       <p:sp>
         <p:nvSpPr>
-          <p:cNvPr id="4" name="Rounded Rectangle 3"/>
+          <p:cNvPr id="4" name="Rectangle 3"/>
           <p:cNvSpPr/>
           <p:nvPr/>
         </p:nvSpPr>
         <p:spPr>
           <a:xfrm>
             <a:off x="731520" y="1691640"/>
-            <a:ext cx="5157216" cy="4297680"/>
-          </a:xfrm>
-          <a:prstGeom prst="roundRect">
+            <a:ext cx="38100" cy="4114800"/>
+          </a:xfrm>
+          <a:prstGeom prst="rect">
             <a:avLst/>
           </a:prstGeom>
           <a:solidFill>
-            <a:srgbClr val="FFFFFF"/>
+            <a:srgbClr val="DC2626"/>
           </a:solidFill>
           <a:ln>
-            <a:solidFill>
-              <a:srgbClr val="FECACA"/>
-            </a:solidFill>
+            <a:noFill/>
           </a:ln>
         </p:spPr>
         <p:style>
@@ -6801,8 +6456,8 @@
         </p:nvSpPr>
         <p:spPr>
           <a:xfrm>
-            <a:off x="1051560" y="2011680"/>
-            <a:ext cx="4517136" cy="3657600"/>
+            <a:off x="960120" y="1691640"/>
+            <a:ext cx="4928616" cy="4114800"/>
           </a:xfrm>
           <a:prstGeom prst="rect">
             <a:avLst/>
@@ -6898,25 +6553,23 @@
       </p:sp>
       <p:sp>
         <p:nvSpPr>
-          <p:cNvPr id="6" name="Rounded Rectangle 5"/>
+          <p:cNvPr id="6" name="Rectangle 5"/>
           <p:cNvSpPr/>
           <p:nvPr/>
         </p:nvSpPr>
         <p:spPr>
           <a:xfrm>
             <a:off x="6300216" y="1691640"/>
-            <a:ext cx="5157216" cy="4297680"/>
-          </a:xfrm>
-          <a:prstGeom prst="roundRect">
+            <a:ext cx="38100" cy="4114800"/>
+          </a:xfrm>
+          <a:prstGeom prst="rect">
             <a:avLst/>
           </a:prstGeom>
           <a:solidFill>
-            <a:srgbClr val="FFFFFF"/>
+            <a:srgbClr val="DC2626"/>
           </a:solidFill>
           <a:ln>
-            <a:solidFill>
-              <a:srgbClr val="FECACA"/>
-            </a:solidFill>
+            <a:noFill/>
           </a:ln>
         </p:spPr>
         <p:style>
@@ -6949,8 +6602,8 @@
         </p:nvSpPr>
         <p:spPr>
           <a:xfrm>
-            <a:off x="6620256" y="2011680"/>
-            <a:ext cx="4517136" cy="3657600"/>
+            <a:off x="6528816" y="1691640"/>
+            <a:ext cx="4928616" cy="4114800"/>
           </a:xfrm>
           <a:prstGeom prst="rect">
             <a:avLst/>
@@ -7193,7 +6846,7 @@
         </p:nvSpPr>
         <p:spPr>
           <a:xfrm>
-            <a:off x="731520" y="502920"/>
+            <a:off x="731520" y="548640"/>
             <a:ext cx="10728655" cy="228600"/>
           </a:xfrm>
           <a:prstGeom prst="rect">
@@ -7229,7 +6882,7 @@
         </p:nvSpPr>
         <p:spPr>
           <a:xfrm>
-            <a:off x="731520" y="777240"/>
+            <a:off x="731520" y="822960"/>
             <a:ext cx="10728655" cy="685800"/>
           </a:xfrm>
           <a:prstGeom prst="rect">
@@ -7259,25 +6912,23 @@
       </p:sp>
       <p:sp>
         <p:nvSpPr>
-          <p:cNvPr id="4" name="Rounded Rectangle 3"/>
+          <p:cNvPr id="4" name="Rectangle 3"/>
           <p:cNvSpPr/>
           <p:nvPr/>
         </p:nvSpPr>
         <p:spPr>
           <a:xfrm>
             <a:off x="731520" y="1691640"/>
-            <a:ext cx="3328416" cy="4297680"/>
-          </a:xfrm>
-          <a:prstGeom prst="roundRect">
+            <a:ext cx="3328416" cy="25400"/>
+          </a:xfrm>
+          <a:prstGeom prst="rect">
             <a:avLst/>
           </a:prstGeom>
           <a:solidFill>
-            <a:srgbClr val="FFFFFF"/>
+            <a:srgbClr val="2B59D9"/>
           </a:solidFill>
-          <a:ln w="12700">
-            <a:solidFill>
-              <a:srgbClr val="E2DDD0"/>
-            </a:solidFill>
+          <a:ln>
+            <a:noFill/>
           </a:ln>
         </p:spPr>
         <p:style>
@@ -7310,8 +6961,8 @@
         </p:nvSpPr>
         <p:spPr>
           <a:xfrm>
-            <a:off x="1051560" y="2011680"/>
-            <a:ext cx="2688336" cy="3657600"/>
+            <a:off x="731520" y="1856232"/>
+            <a:ext cx="3328416" cy="4114800"/>
           </a:xfrm>
           <a:prstGeom prst="rect">
             <a:avLst/>
@@ -7342,7 +6993,7 @@
           <a:p>
             <a:pPr>
               <a:spcAft>
-                <a:spcPts val="1400"/>
+                <a:spcPts val="1200"/>
               </a:spcAft>
               <a:defRPr sz="1800" b="1">
                 <a:solidFill>
@@ -7372,25 +7023,23 @@
       </p:sp>
       <p:sp>
         <p:nvSpPr>
-          <p:cNvPr id="6" name="Rounded Rectangle 5"/>
+          <p:cNvPr id="6" name="Rectangle 5"/>
           <p:cNvSpPr/>
           <p:nvPr/>
         </p:nvSpPr>
         <p:spPr>
           <a:xfrm>
             <a:off x="4334256" y="1691640"/>
-            <a:ext cx="3328416" cy="4297680"/>
-          </a:xfrm>
-          <a:prstGeom prst="roundRect">
+            <a:ext cx="3328416" cy="25400"/>
+          </a:xfrm>
+          <a:prstGeom prst="rect">
             <a:avLst/>
           </a:prstGeom>
           <a:solidFill>
-            <a:srgbClr val="FFFFFF"/>
+            <a:srgbClr val="2B59D9"/>
           </a:solidFill>
-          <a:ln w="12700">
-            <a:solidFill>
-              <a:srgbClr val="E2DDD0"/>
-            </a:solidFill>
+          <a:ln>
+            <a:noFill/>
           </a:ln>
         </p:spPr>
         <p:style>
@@ -7423,8 +7072,8 @@
         </p:nvSpPr>
         <p:spPr>
           <a:xfrm>
-            <a:off x="4654296" y="2011680"/>
-            <a:ext cx="2688336" cy="3657600"/>
+            <a:off x="4334256" y="1856232"/>
+            <a:ext cx="3328416" cy="4114800"/>
           </a:xfrm>
           <a:prstGeom prst="rect">
             <a:avLst/>
@@ -7455,7 +7104,7 @@
           <a:p>
             <a:pPr>
               <a:spcAft>
-                <a:spcPts val="1400"/>
+                <a:spcPts val="1200"/>
               </a:spcAft>
               <a:defRPr sz="1800" b="1">
                 <a:solidFill>
@@ -7485,25 +7134,23 @@
       </p:sp>
       <p:sp>
         <p:nvSpPr>
-          <p:cNvPr id="8" name="Rounded Rectangle 7"/>
+          <p:cNvPr id="8" name="Rectangle 7"/>
           <p:cNvSpPr/>
           <p:nvPr/>
         </p:nvSpPr>
         <p:spPr>
           <a:xfrm>
             <a:off x="7936992" y="1691640"/>
-            <a:ext cx="3328416" cy="4297680"/>
-          </a:xfrm>
-          <a:prstGeom prst="roundRect">
+            <a:ext cx="3328416" cy="25400"/>
+          </a:xfrm>
+          <a:prstGeom prst="rect">
             <a:avLst/>
           </a:prstGeom>
           <a:solidFill>
-            <a:srgbClr val="FFFFFF"/>
+            <a:srgbClr val="2B59D9"/>
           </a:solidFill>
-          <a:ln w="12700">
-            <a:solidFill>
-              <a:srgbClr val="E2DDD0"/>
-            </a:solidFill>
+          <a:ln>
+            <a:noFill/>
           </a:ln>
         </p:spPr>
         <p:style>
@@ -7536,8 +7183,8 @@
         </p:nvSpPr>
         <p:spPr>
           <a:xfrm>
-            <a:off x="8257032" y="2011680"/>
-            <a:ext cx="2688336" cy="3657600"/>
+            <a:off x="7936992" y="1856232"/>
+            <a:ext cx="3328416" cy="4114800"/>
           </a:xfrm>
           <a:prstGeom prst="rect">
             <a:avLst/>
@@ -7568,7 +7215,7 @@
           <a:p>
             <a:pPr>
               <a:spcAft>
-                <a:spcPts val="1400"/>
+                <a:spcPts val="1200"/>
               </a:spcAft>
               <a:defRPr sz="1800" b="1">
                 <a:solidFill>
@@ -7745,7 +7392,7 @@
         </p:nvSpPr>
         <p:spPr>
           <a:xfrm>
-            <a:off x="731520" y="502920"/>
+            <a:off x="731520" y="548640"/>
             <a:ext cx="10728655" cy="228600"/>
           </a:xfrm>
           <a:prstGeom prst="rect">
@@ -7781,7 +7428,7 @@
         </p:nvSpPr>
         <p:spPr>
           <a:xfrm>
-            <a:off x="731520" y="777240"/>
+            <a:off x="731520" y="822960"/>
             <a:ext cx="10728655" cy="685800"/>
           </a:xfrm>
           <a:prstGeom prst="rect">
@@ -7811,25 +7458,23 @@
       </p:sp>
       <p:sp>
         <p:nvSpPr>
-          <p:cNvPr id="4" name="Rounded Rectangle 3"/>
+          <p:cNvPr id="4" name="Rectangle 3"/>
           <p:cNvSpPr/>
           <p:nvPr/>
         </p:nvSpPr>
         <p:spPr>
           <a:xfrm>
             <a:off x="731520" y="1691640"/>
-            <a:ext cx="10728655" cy="3200400"/>
-          </a:xfrm>
-          <a:prstGeom prst="roundRect">
+            <a:ext cx="38100" cy="2926080"/>
+          </a:xfrm>
+          <a:prstGeom prst="rect">
             <a:avLst/>
           </a:prstGeom>
           <a:solidFill>
-            <a:srgbClr val="FFFFFF"/>
+            <a:srgbClr val="D99B26"/>
           </a:solidFill>
-          <a:ln w="12700">
-            <a:solidFill>
-              <a:srgbClr val="E2DDD0"/>
-            </a:solidFill>
+          <a:ln>
+            <a:noFill/>
           </a:ln>
         </p:spPr>
         <p:style>
@@ -7862,8 +7507,8 @@
         </p:nvSpPr>
         <p:spPr>
           <a:xfrm>
-            <a:off x="1097280" y="1965960"/>
-            <a:ext cx="9997135" cy="2651760"/>
+            <a:off x="960120" y="1691640"/>
+            <a:ext cx="10500055" cy="2926080"/>
           </a:xfrm>
           <a:prstGeom prst="rect">
             <a:avLst/>
@@ -7896,7 +7541,7 @@
               <a:spcAft>
                 <a:spcPts val="1000"/>
               </a:spcAft>
-              <a:defRPr sz="1500">
+              <a:defRPr sz="1550">
                 <a:solidFill>
                   <a:srgbClr val="16161A"/>
                 </a:solidFill>
@@ -7909,7 +7554,7 @@
           </a:p>
           <a:p>
             <a:pPr>
-              <a:defRPr sz="1500">
+              <a:defRPr sz="1550">
                 <a:solidFill>
                   <a:srgbClr val="16161A"/>
                 </a:solidFill>
@@ -7924,65 +7569,13 @@
       </p:sp>
       <p:sp>
         <p:nvSpPr>
-          <p:cNvPr id="6" name="TextBox 5"/>
-          <p:cNvSpPr txBox="1"/>
-          <p:nvPr/>
-        </p:nvSpPr>
-        <p:spPr>
-          <a:xfrm>
-            <a:off x="731520" y="5166360"/>
-            <a:ext cx="10728655" cy="914400"/>
-          </a:xfrm>
-          <a:prstGeom prst="rect">
-            <a:avLst/>
-          </a:prstGeom>
-          <a:noFill/>
-        </p:spPr>
-        <p:txBody>
-          <a:bodyPr wrap="square" lIns="0" rIns="0" tIns="0" bIns="0">
-            <a:spAutoFit/>
-          </a:bodyPr>
-          <a:lstStyle/>
-          <a:p>
-            <a:pPr>
-              <a:defRPr sz="1800" b="1">
-                <a:solidFill>
-                  <a:srgbClr val="16161A"/>
-                </a:solidFill>
-                <a:latin typeface="Helvetica Neue"/>
-              </a:defRPr>
-            </a:pPr>
-            <a:r>
-              <a:t>Roberto Guido  |  Technology Consultants</a:t>
-            </a:r>
-          </a:p>
-          <a:p>
-            <a:pPr>
-              <a:spcBef>
-                <a:spcPts val="400"/>
-              </a:spcBef>
-              <a:defRPr sz="1300">
-                <a:solidFill>
-                  <a:srgbClr val="2B59D9"/>
-                </a:solidFill>
-                <a:latin typeface="Helvetica Neue"/>
-              </a:defRPr>
-            </a:pPr>
-            <a:r>
-              <a:t>Website: technologyconsultants.ventures   ·   San Diego &amp; Tijuana</a:t>
-            </a:r>
-          </a:p>
-        </p:txBody>
-      </p:sp>
-      <p:sp>
-        <p:nvSpPr>
-          <p:cNvPr id="7" name="Rectangle 6"/>
+          <p:cNvPr id="6" name="Rectangle 5"/>
           <p:cNvSpPr/>
           <p:nvPr/>
         </p:nvSpPr>
         <p:spPr>
           <a:xfrm>
-            <a:off x="731520" y="6263640"/>
+            <a:off x="731520" y="4892040"/>
             <a:ext cx="10728655" cy="12700"/>
           </a:xfrm>
           <a:prstGeom prst="rect">
@@ -8019,14 +7612,14 @@
       </p:sp>
       <p:sp>
         <p:nvSpPr>
-          <p:cNvPr id="8" name="TextBox 7"/>
+          <p:cNvPr id="7" name="TextBox 6"/>
           <p:cNvSpPr txBox="1"/>
           <p:nvPr/>
         </p:nvSpPr>
         <p:spPr>
           <a:xfrm>
-            <a:off x="731520" y="6355080"/>
-            <a:ext cx="7315200" cy="320040"/>
+            <a:off x="731520" y="5074920"/>
+            <a:ext cx="10728655" cy="914400"/>
           </a:xfrm>
           <a:prstGeom prst="rect">
             <a:avLst/>
@@ -8040,6 +7633,100 @@
           <a:lstStyle/>
           <a:p>
             <a:pPr>
+              <a:defRPr sz="1800" b="1">
+                <a:solidFill>
+                  <a:srgbClr val="16161A"/>
+                </a:solidFill>
+                <a:latin typeface="Helvetica Neue"/>
+              </a:defRPr>
+            </a:pPr>
+            <a:r>
+              <a:t>Roberto Guido  |  Technology Consultants</a:t>
+            </a:r>
+          </a:p>
+          <a:p>
+            <a:pPr>
+              <a:spcBef>
+                <a:spcPts val="400"/>
+              </a:spcBef>
+              <a:defRPr sz="1300">
+                <a:solidFill>
+                  <a:srgbClr val="2B59D9"/>
+                </a:solidFill>
+              </a:defRPr>
+            </a:pPr>
+            <a:r>
+              <a:t>Website: technologyconsultants.ventures   ·   San Diego &amp; Tijuana</a:t>
+            </a:r>
+          </a:p>
+        </p:txBody>
+      </p:sp>
+      <p:sp>
+        <p:nvSpPr>
+          <p:cNvPr id="8" name="Rectangle 7"/>
+          <p:cNvSpPr/>
+          <p:nvPr/>
+        </p:nvSpPr>
+        <p:spPr>
+          <a:xfrm>
+            <a:off x="731520" y="6263640"/>
+            <a:ext cx="10728655" cy="12700"/>
+          </a:xfrm>
+          <a:prstGeom prst="rect">
+            <a:avLst/>
+          </a:prstGeom>
+          <a:solidFill>
+            <a:srgbClr val="E2DDD0"/>
+          </a:solidFill>
+          <a:ln>
+            <a:noFill/>
+          </a:ln>
+        </p:spPr>
+        <p:style>
+          <a:lnRef idx="1">
+            <a:schemeClr val="accent1"/>
+          </a:lnRef>
+          <a:fillRef idx="3">
+            <a:schemeClr val="accent1"/>
+          </a:fillRef>
+          <a:effectRef idx="2">
+            <a:schemeClr val="accent1"/>
+          </a:effectRef>
+          <a:fontRef idx="minor">
+            <a:schemeClr val="lt1"/>
+          </a:fontRef>
+        </p:style>
+        <p:txBody>
+          <a:bodyPr rtlCol="0" anchor="ctr"/>
+          <a:lstStyle/>
+          <a:p>
+            <a:pPr algn="ctr"/>
+          </a:p>
+        </p:txBody>
+      </p:sp>
+      <p:sp>
+        <p:nvSpPr>
+          <p:cNvPr id="9" name="TextBox 8"/>
+          <p:cNvSpPr txBox="1"/>
+          <p:nvPr/>
+        </p:nvSpPr>
+        <p:spPr>
+          <a:xfrm>
+            <a:off x="731520" y="6355080"/>
+            <a:ext cx="7315200" cy="320040"/>
+          </a:xfrm>
+          <a:prstGeom prst="rect">
+            <a:avLst/>
+          </a:prstGeom>
+          <a:noFill/>
+        </p:spPr>
+        <p:txBody>
+          <a:bodyPr wrap="square" lIns="0" rIns="0" tIns="0" bIns="0">
+            <a:spAutoFit/>
+          </a:bodyPr>
+          <a:lstStyle/>
+          <a:p>
+            <a:pPr>
               <a:defRPr sz="1000">
                 <a:solidFill>
                   <a:srgbClr val="736E62"/>
@@ -8055,7 +7742,7 @@
       </p:sp>
       <p:sp>
         <p:nvSpPr>
-          <p:cNvPr id="9" name="TextBox 8"/>
+          <p:cNvPr id="10" name="TextBox 9"/>
           <p:cNvSpPr txBox="1"/>
           <p:nvPr/>
         </p:nvSpPr>

--- a/Technology_Consultants_Who_to_Send_My_Way.pptx
+++ b/Technology_Consultants_Who_to_Send_My_Way.pptx
@@ -3111,7 +3111,7 @@
         </p:nvSpPr>
         <p:spPr>
           <a:xfrm>
-            <a:off x="731520" y="640080"/>
+            <a:off x="731520" y="594360"/>
             <a:ext cx="10728655" cy="274320"/>
           </a:xfrm>
           <a:prstGeom prst="rect">
@@ -3147,8 +3147,8 @@
         </p:nvSpPr>
         <p:spPr>
           <a:xfrm>
-            <a:off x="731520" y="1051560"/>
-            <a:ext cx="10728655" cy="1280160"/>
+            <a:off x="731520" y="960120"/>
+            <a:ext cx="10728655" cy="1371600"/>
           </a:xfrm>
           <a:prstGeom prst="rect">
             <a:avLst/>
@@ -3162,7 +3162,7 @@
           <a:lstStyle/>
           <a:p>
             <a:pPr>
-              <a:defRPr sz="3600" b="1">
+              <a:defRPr sz="4000" b="1">
                 <a:solidFill>
                   <a:srgbClr val="16161A"/>
                 </a:solidFill>
@@ -3183,7 +3183,7 @@
         </p:nvSpPr>
         <p:spPr>
           <a:xfrm>
-            <a:off x="731520" y="2423160"/>
+            <a:off x="731520" y="2468880"/>
             <a:ext cx="10728655" cy="822960"/>
           </a:xfrm>
           <a:prstGeom prst="rect">
@@ -3198,7 +3198,7 @@
           <a:lstStyle/>
           <a:p>
             <a:pPr>
-              <a:defRPr sz="1450">
+              <a:defRPr sz="1600">
                 <a:solidFill>
                   <a:srgbClr val="454337"/>
                 </a:solidFill>
@@ -3219,7 +3219,7 @@
         </p:nvSpPr>
         <p:spPr>
           <a:xfrm>
-            <a:off x="731520" y="3429000"/>
+            <a:off x="731520" y="3520440"/>
             <a:ext cx="10728655" cy="12700"/>
           </a:xfrm>
           <a:prstGeom prst="rect">
@@ -3262,8 +3262,8 @@
         </p:nvSpPr>
         <p:spPr>
           <a:xfrm>
-            <a:off x="731520" y="3611880"/>
-            <a:ext cx="5157216" cy="1371600"/>
+            <a:off x="731520" y="3703320"/>
+            <a:ext cx="5157216" cy="1280160"/>
           </a:xfrm>
           <a:prstGeom prst="rect">
             <a:avLst/>
@@ -3280,7 +3280,7 @@
               <a:spcAft>
                 <a:spcPts val="600"/>
               </a:spcAft>
-              <a:defRPr sz="1050" b="1">
+              <a:defRPr sz="1100" b="1">
                 <a:solidFill>
                   <a:srgbClr val="2B59D9"/>
                 </a:solidFill>
@@ -3293,7 +3293,7 @@
           </a:p>
           <a:p>
             <a:pPr>
-              <a:defRPr sz="1250">
+              <a:defRPr sz="1400">
                 <a:solidFill>
                   <a:srgbClr val="16161A"/>
                 </a:solidFill>
@@ -3314,8 +3314,8 @@
         </p:nvSpPr>
         <p:spPr>
           <a:xfrm>
-            <a:off x="6300216" y="3611880"/>
-            <a:ext cx="5157216" cy="1371600"/>
+            <a:off x="6300216" y="3703320"/>
+            <a:ext cx="5157216" cy="1280160"/>
           </a:xfrm>
           <a:prstGeom prst="rect">
             <a:avLst/>
@@ -3332,7 +3332,7 @@
               <a:spcAft>
                 <a:spcPts val="600"/>
               </a:spcAft>
-              <a:defRPr sz="1050" b="1">
+              <a:defRPr sz="1100" b="1">
                 <a:solidFill>
                   <a:srgbClr val="D99B26"/>
                 </a:solidFill>
@@ -3348,7 +3348,7 @@
               <a:spcAft>
                 <a:spcPts val="400"/>
               </a:spcAft>
-              <a:defRPr sz="1300" b="1">
+              <a:defRPr sz="1400" b="1">
                 <a:solidFill>
                   <a:srgbClr val="16161A"/>
                 </a:solidFill>
@@ -3361,7 +3361,7 @@
           </a:p>
           <a:p>
             <a:pPr>
-              <a:defRPr sz="1150">
+              <a:defRPr sz="1250">
                 <a:solidFill>
                   <a:srgbClr val="454337"/>
                 </a:solidFill>
@@ -3447,7 +3447,7 @@
               <a:spcAft>
                 <a:spcPts val="200"/>
               </a:spcAft>
-              <a:defRPr sz="1300" b="1">
+              <a:defRPr sz="1500" b="1">
                 <a:solidFill>
                   <a:srgbClr val="16161A"/>
                 </a:solidFill>
@@ -3460,7 +3460,7 @@
           </a:p>
           <a:p>
             <a:pPr>
-              <a:defRPr sz="1050">
+              <a:defRPr sz="1200">
                 <a:solidFill>
                   <a:srgbClr val="454337"/>
                 </a:solidFill>
@@ -3499,7 +3499,7 @@
               <a:spcAft>
                 <a:spcPts val="200"/>
               </a:spcAft>
-              <a:defRPr sz="1300" b="1">
+              <a:defRPr sz="1500" b="1">
                 <a:solidFill>
                   <a:srgbClr val="16161A"/>
                 </a:solidFill>
@@ -3512,7 +3512,7 @@
           </a:p>
           <a:p>
             <a:pPr>
-              <a:defRPr sz="1050">
+              <a:defRPr sz="1200">
                 <a:solidFill>
                   <a:srgbClr val="454337"/>
                 </a:solidFill>
@@ -3551,7 +3551,7 @@
               <a:spcAft>
                 <a:spcPts val="200"/>
               </a:spcAft>
-              <a:defRPr sz="1300" b="1">
+              <a:defRPr sz="1500" b="1">
                 <a:solidFill>
                   <a:srgbClr val="16161A"/>
                 </a:solidFill>
@@ -3564,7 +3564,7 @@
           </a:p>
           <a:p>
             <a:pPr>
-              <a:defRPr sz="1050">
+              <a:defRPr sz="1200">
                 <a:solidFill>
                   <a:srgbClr val="454337"/>
                 </a:solidFill>
@@ -3603,7 +3603,7 @@
               <a:spcAft>
                 <a:spcPts val="200"/>
               </a:spcAft>
-              <a:defRPr sz="1300" b="1">
+              <a:defRPr sz="1500" b="1">
                 <a:solidFill>
                   <a:srgbClr val="16161A"/>
                 </a:solidFill>
@@ -3616,7 +3616,7 @@
           </a:p>
           <a:p>
             <a:pPr>
-              <a:defRPr sz="1050">
+              <a:defRPr sz="1200">
                 <a:solidFill>
                   <a:srgbClr val="454337"/>
                 </a:solidFill>
@@ -3695,7 +3695,7 @@
           <a:lstStyle/>
           <a:p>
             <a:pPr>
-              <a:defRPr sz="1000">
+              <a:defRPr sz="1050">
                 <a:solidFill>
                   <a:srgbClr val="736E62"/>
                 </a:solidFill>
@@ -3731,7 +3731,7 @@
           <a:lstStyle/>
           <a:p>
             <a:pPr algn="r">
-              <a:defRPr sz="1000">
+              <a:defRPr sz="1050">
                 <a:solidFill>
                   <a:srgbClr val="736E62"/>
                 </a:solidFill>
@@ -3778,7 +3778,7 @@
         </p:nvSpPr>
         <p:spPr>
           <a:xfrm>
-            <a:off x="731520" y="548640"/>
+            <a:off x="731520" y="502920"/>
             <a:ext cx="10728655" cy="228600"/>
           </a:xfrm>
           <a:prstGeom prst="rect">
@@ -3793,7 +3793,7 @@
           <a:lstStyle/>
           <a:p>
             <a:pPr>
-              <a:defRPr sz="1050" b="1">
+              <a:defRPr sz="1100" b="1">
                 <a:solidFill>
                   <a:srgbClr val="2B59D9"/>
                 </a:solidFill>
@@ -3814,8 +3814,8 @@
         </p:nvSpPr>
         <p:spPr>
           <a:xfrm>
-            <a:off x="731520" y="822960"/>
-            <a:ext cx="10728655" cy="685800"/>
+            <a:off x="731520" y="777240"/>
+            <a:ext cx="10728655" cy="731520"/>
           </a:xfrm>
           <a:prstGeom prst="rect">
             <a:avLst/>
@@ -3829,7 +3829,7 @@
           <a:lstStyle/>
           <a:p>
             <a:pPr>
-              <a:defRPr sz="2600" b="1">
+              <a:defRPr sz="3000" b="1">
                 <a:solidFill>
                   <a:srgbClr val="16161A"/>
                 </a:solidFill>
@@ -3911,7 +3911,7 @@
               <a:spcAft>
                 <a:spcPts val="800"/>
               </a:spcAft>
-              <a:defRPr sz="2000" b="1">
+              <a:defRPr sz="2800" b="1">
                 <a:solidFill>
                   <a:srgbClr val="2B59D9"/>
                 </a:solidFill>
@@ -3927,7 +3927,7 @@
               <a:spcAft>
                 <a:spcPts val="1000"/>
               </a:spcAft>
-              <a:defRPr sz="1900" b="1">
+              <a:defRPr sz="2000" b="1">
                 <a:solidFill>
                   <a:srgbClr val="16161A"/>
                 </a:solidFill>
@@ -3943,7 +3943,7 @@
               <a:spcAft>
                 <a:spcPts val="1600"/>
               </a:spcAft>
-              <a:defRPr sz="1250">
+              <a:defRPr sz="1350">
                 <a:solidFill>
                   <a:srgbClr val="454337"/>
                 </a:solidFill>
@@ -3959,7 +3959,7 @@
               <a:spcAft>
                 <a:spcPts val="800"/>
               </a:spcAft>
-              <a:defRPr sz="1200">
+              <a:defRPr sz="1350">
                 <a:solidFill>
                   <a:srgbClr val="16161A"/>
                 </a:solidFill>
@@ -3975,7 +3975,7 @@
               <a:spcAft>
                 <a:spcPts val="800"/>
               </a:spcAft>
-              <a:defRPr sz="1200">
+              <a:defRPr sz="1350">
                 <a:solidFill>
                   <a:srgbClr val="16161A"/>
                 </a:solidFill>
@@ -3991,7 +3991,7 @@
               <a:spcAft>
                 <a:spcPts val="800"/>
               </a:spcAft>
-              <a:defRPr sz="1200">
+              <a:defRPr sz="1350">
                 <a:solidFill>
                   <a:srgbClr val="16161A"/>
                 </a:solidFill>
@@ -4073,7 +4073,7 @@
               <a:spcAft>
                 <a:spcPts val="800"/>
               </a:spcAft>
-              <a:defRPr sz="2000" b="1">
+              <a:defRPr sz="2800" b="1">
                 <a:solidFill>
                   <a:srgbClr val="D99B26"/>
                 </a:solidFill>
@@ -4089,7 +4089,7 @@
               <a:spcAft>
                 <a:spcPts val="1000"/>
               </a:spcAft>
-              <a:defRPr sz="1900" b="1">
+              <a:defRPr sz="2000" b="1">
                 <a:solidFill>
                   <a:srgbClr val="16161A"/>
                 </a:solidFill>
@@ -4105,7 +4105,7 @@
               <a:spcAft>
                 <a:spcPts val="1600"/>
               </a:spcAft>
-              <a:defRPr sz="1250">
+              <a:defRPr sz="1350">
                 <a:solidFill>
                   <a:srgbClr val="454337"/>
                 </a:solidFill>
@@ -4121,7 +4121,7 @@
               <a:spcAft>
                 <a:spcPts val="800"/>
               </a:spcAft>
-              <a:defRPr sz="1200">
+              <a:defRPr sz="1350">
                 <a:solidFill>
                   <a:srgbClr val="16161A"/>
                 </a:solidFill>
@@ -4137,7 +4137,7 @@
               <a:spcAft>
                 <a:spcPts val="800"/>
               </a:spcAft>
-              <a:defRPr sz="1200">
+              <a:defRPr sz="1350">
                 <a:solidFill>
                   <a:srgbClr val="16161A"/>
                 </a:solidFill>
@@ -4153,7 +4153,7 @@
               <a:spcAft>
                 <a:spcPts val="800"/>
               </a:spcAft>
-              <a:defRPr sz="1200">
+              <a:defRPr sz="1350">
                 <a:solidFill>
                   <a:srgbClr val="16161A"/>
                 </a:solidFill>
@@ -4235,7 +4235,7 @@
               <a:spcAft>
                 <a:spcPts val="800"/>
               </a:spcAft>
-              <a:defRPr sz="2000" b="1">
+              <a:defRPr sz="2800" b="1">
                 <a:solidFill>
                   <a:srgbClr val="2B59D9"/>
                 </a:solidFill>
@@ -4251,7 +4251,7 @@
               <a:spcAft>
                 <a:spcPts val="1000"/>
               </a:spcAft>
-              <a:defRPr sz="1900" b="1">
+              <a:defRPr sz="2000" b="1">
                 <a:solidFill>
                   <a:srgbClr val="16161A"/>
                 </a:solidFill>
@@ -4267,7 +4267,7 @@
               <a:spcAft>
                 <a:spcPts val="1600"/>
               </a:spcAft>
-              <a:defRPr sz="1250">
+              <a:defRPr sz="1350">
                 <a:solidFill>
                   <a:srgbClr val="454337"/>
                 </a:solidFill>
@@ -4283,7 +4283,7 @@
               <a:spcAft>
                 <a:spcPts val="800"/>
               </a:spcAft>
-              <a:defRPr sz="1200">
+              <a:defRPr sz="1350">
                 <a:solidFill>
                   <a:srgbClr val="16161A"/>
                 </a:solidFill>
@@ -4299,7 +4299,7 @@
               <a:spcAft>
                 <a:spcPts val="800"/>
               </a:spcAft>
-              <a:defRPr sz="1200">
+              <a:defRPr sz="1350">
                 <a:solidFill>
                   <a:srgbClr val="16161A"/>
                 </a:solidFill>
@@ -4315,7 +4315,7 @@
               <a:spcAft>
                 <a:spcPts val="800"/>
               </a:spcAft>
-              <a:defRPr sz="1200">
+              <a:defRPr sz="1350">
                 <a:solidFill>
                   <a:srgbClr val="16161A"/>
                 </a:solidFill>
@@ -4394,7 +4394,7 @@
           <a:lstStyle/>
           <a:p>
             <a:pPr>
-              <a:defRPr sz="1000">
+              <a:defRPr sz="1050">
                 <a:solidFill>
                   <a:srgbClr val="736E62"/>
                 </a:solidFill>
@@ -4430,7 +4430,7 @@
           <a:lstStyle/>
           <a:p>
             <a:pPr algn="r">
-              <a:defRPr sz="1000">
+              <a:defRPr sz="1050">
                 <a:solidFill>
                   <a:srgbClr val="736E62"/>
                 </a:solidFill>
@@ -4477,7 +4477,7 @@
         </p:nvSpPr>
         <p:spPr>
           <a:xfrm>
-            <a:off x="731520" y="548640"/>
+            <a:off x="731520" y="502920"/>
             <a:ext cx="10728655" cy="228600"/>
           </a:xfrm>
           <a:prstGeom prst="rect">
@@ -4492,7 +4492,7 @@
           <a:lstStyle/>
           <a:p>
             <a:pPr>
-              <a:defRPr sz="1050" b="1">
+              <a:defRPr sz="1100" b="1">
                 <a:solidFill>
                   <a:srgbClr val="2B59D9"/>
                 </a:solidFill>
@@ -4513,8 +4513,8 @@
         </p:nvSpPr>
         <p:spPr>
           <a:xfrm>
-            <a:off x="731520" y="822960"/>
-            <a:ext cx="10728655" cy="685800"/>
+            <a:off x="731520" y="777240"/>
+            <a:ext cx="10728655" cy="731520"/>
           </a:xfrm>
           <a:prstGeom prst="rect">
             <a:avLst/>
@@ -4528,7 +4528,7 @@
           <a:lstStyle/>
           <a:p>
             <a:pPr>
-              <a:defRPr sz="2600" b="1">
+              <a:defRPr sz="3000" b="1">
                 <a:solidFill>
                   <a:srgbClr val="16161A"/>
                 </a:solidFill>
@@ -4626,7 +4626,7 @@
               <a:spcAft>
                 <a:spcPts val="1200"/>
               </a:spcAft>
-              <a:defRPr b="1" sz="1300">
+              <a:defRPr b="1" sz="1400">
                 <a:solidFill>
                   <a:srgbClr val="16161A"/>
                 </a:solidFill>
@@ -4637,7 +4637,7 @@
               <a:t>•  Mid-Market Enterprises: </a:t>
             </a:r>
             <a:r>
-              <a:rPr b="0">
+              <a:rPr b="0" sz="1350">
                 <a:solidFill>
                   <a:srgbClr val="454337"/>
                 </a:solidFill>
@@ -4650,7 +4650,7 @@
               <a:spcAft>
                 <a:spcPts val="1200"/>
               </a:spcAft>
-              <a:defRPr b="1" sz="1300">
+              <a:defRPr b="1" sz="1400">
                 <a:solidFill>
                   <a:srgbClr val="16161A"/>
                 </a:solidFill>
@@ -4661,7 +4661,7 @@
               <a:t>•  Fast-Growing SMBs: </a:t>
             </a:r>
             <a:r>
-              <a:rPr b="0">
+              <a:rPr b="0" sz="1350">
                 <a:solidFill>
                   <a:srgbClr val="454337"/>
                 </a:solidFill>
@@ -4674,7 +4674,7 @@
               <a:spcAft>
                 <a:spcPts val="1200"/>
               </a:spcAft>
-              <a:defRPr b="1" sz="1300">
+              <a:defRPr b="1" sz="1400">
                 <a:solidFill>
                   <a:srgbClr val="16161A"/>
                 </a:solidFill>
@@ -4685,7 +4685,7 @@
               <a:t>•  Venture-Backed Startups: </a:t>
             </a:r>
             <a:r>
-              <a:rPr b="0">
+              <a:rPr b="0" sz="1350">
                 <a:solidFill>
                   <a:srgbClr val="454337"/>
                 </a:solidFill>
@@ -4698,7 +4698,7 @@
               <a:spcAft>
                 <a:spcPts val="1200"/>
               </a:spcAft>
-              <a:defRPr b="1" sz="1300">
+              <a:defRPr b="1" sz="1400">
                 <a:solidFill>
                   <a:srgbClr val="16161A"/>
                 </a:solidFill>
@@ -4709,7 +4709,7 @@
               <a:t>•  PE / VC Portcos: </a:t>
             </a:r>
             <a:r>
-              <a:rPr b="0">
+              <a:rPr b="0" sz="1350">
                 <a:solidFill>
                   <a:srgbClr val="454337"/>
                 </a:solidFill>
@@ -4804,7 +4804,7 @@
               <a:spcAft>
                 <a:spcPts val="1200"/>
               </a:spcAft>
-              <a:defRPr b="1" sz="1300">
+              <a:defRPr b="1" sz="1400">
                 <a:solidFill>
                   <a:srgbClr val="16161A"/>
                 </a:solidFill>
@@ -4815,7 +4815,7 @@
               <a:t>•  CTOs &amp; VPs of Engineering: </a:t>
             </a:r>
             <a:r>
-              <a:rPr b="0">
+              <a:rPr b="0" sz="1350">
                 <a:solidFill>
                   <a:srgbClr val="454337"/>
                 </a:solidFill>
@@ -4828,7 +4828,7 @@
               <a:spcAft>
                 <a:spcPts val="1200"/>
               </a:spcAft>
-              <a:defRPr b="1" sz="1300">
+              <a:defRPr b="1" sz="1400">
                 <a:solidFill>
                   <a:srgbClr val="16161A"/>
                 </a:solidFill>
@@ -4839,7 +4839,7 @@
               <a:t>•  CFOs &amp; Finance Directors: </a:t>
             </a:r>
             <a:r>
-              <a:rPr b="0">
+              <a:rPr b="0" sz="1350">
                 <a:solidFill>
                   <a:srgbClr val="454337"/>
                 </a:solidFill>
@@ -4852,7 +4852,7 @@
               <a:spcAft>
                 <a:spcPts val="1200"/>
               </a:spcAft>
-              <a:defRPr b="1" sz="1300">
+              <a:defRPr b="1" sz="1400">
                 <a:solidFill>
                   <a:srgbClr val="16161A"/>
                 </a:solidFill>
@@ -4863,7 +4863,7 @@
               <a:t>•  VPs of Operations: </a:t>
             </a:r>
             <a:r>
-              <a:rPr b="0">
+              <a:rPr b="0" sz="1350">
                 <a:solidFill>
                   <a:srgbClr val="454337"/>
                 </a:solidFill>
@@ -4876,7 +4876,7 @@
               <a:spcAft>
                 <a:spcPts val="1200"/>
               </a:spcAft>
-              <a:defRPr b="1" sz="1300">
+              <a:defRPr b="1" sz="1400">
                 <a:solidFill>
                   <a:srgbClr val="16161A"/>
                 </a:solidFill>
@@ -4887,7 +4887,7 @@
               <a:t>•  Founders &amp; Product Leaders: </a:t>
             </a:r>
             <a:r>
-              <a:rPr b="0">
+              <a:rPr b="0" sz="1350">
                 <a:solidFill>
                   <a:srgbClr val="454337"/>
                 </a:solidFill>
@@ -4963,7 +4963,7 @@
           <a:lstStyle/>
           <a:p>
             <a:pPr>
-              <a:defRPr sz="1000">
+              <a:defRPr sz="1050">
                 <a:solidFill>
                   <a:srgbClr val="736E62"/>
                 </a:solidFill>
@@ -4999,7 +4999,7 @@
           <a:lstStyle/>
           <a:p>
             <a:pPr algn="r">
-              <a:defRPr sz="1000">
+              <a:defRPr sz="1050">
                 <a:solidFill>
                   <a:srgbClr val="736E62"/>
                 </a:solidFill>
@@ -5046,7 +5046,7 @@
         </p:nvSpPr>
         <p:spPr>
           <a:xfrm>
-            <a:off x="731520" y="548640"/>
+            <a:off x="731520" y="502920"/>
             <a:ext cx="10728655" cy="228600"/>
           </a:xfrm>
           <a:prstGeom prst="rect">
@@ -5061,7 +5061,7 @@
           <a:lstStyle/>
           <a:p>
             <a:pPr>
-              <a:defRPr sz="1050" b="1">
+              <a:defRPr sz="1100" b="1">
                 <a:solidFill>
                   <a:srgbClr val="2B59D9"/>
                 </a:solidFill>
@@ -5082,8 +5082,8 @@
         </p:nvSpPr>
         <p:spPr>
           <a:xfrm>
-            <a:off x="731520" y="822960"/>
-            <a:ext cx="10728655" cy="685800"/>
+            <a:off x="731520" y="777240"/>
+            <a:ext cx="10728655" cy="731520"/>
           </a:xfrm>
           <a:prstGeom prst="rect">
             <a:avLst/>
@@ -5097,7 +5097,7 @@
           <a:lstStyle/>
           <a:p>
             <a:pPr>
-              <a:defRPr sz="2600" b="1">
+              <a:defRPr sz="3000" b="1">
                 <a:solidFill>
                   <a:srgbClr val="16161A"/>
                 </a:solidFill>
@@ -5179,7 +5179,7 @@
               <a:spcAft>
                 <a:spcPts val="400"/>
               </a:spcAft>
-              <a:defRPr sz="1050" b="1">
+              <a:defRPr sz="1100" b="1">
                 <a:solidFill>
                   <a:srgbClr val="2B59D9"/>
                 </a:solidFill>
@@ -5192,7 +5192,7 @@
           </a:p>
           <a:p>
             <a:pPr>
-              <a:defRPr sz="1400">
+              <a:defRPr sz="1550">
                 <a:solidFill>
                   <a:srgbClr val="16161A"/>
                 </a:solidFill>
@@ -5274,7 +5274,7 @@
               <a:spcAft>
                 <a:spcPts val="400"/>
               </a:spcAft>
-              <a:defRPr sz="1050" b="1">
+              <a:defRPr sz="1100" b="1">
                 <a:solidFill>
                   <a:srgbClr val="D99B26"/>
                 </a:solidFill>
@@ -5287,7 +5287,7 @@
           </a:p>
           <a:p>
             <a:pPr>
-              <a:defRPr sz="1400">
+              <a:defRPr sz="1550">
                 <a:solidFill>
                   <a:srgbClr val="16161A"/>
                 </a:solidFill>
@@ -5369,7 +5369,7 @@
               <a:spcAft>
                 <a:spcPts val="400"/>
               </a:spcAft>
-              <a:defRPr sz="1050" b="1">
+              <a:defRPr sz="1100" b="1">
                 <a:solidFill>
                   <a:srgbClr val="2B59D9"/>
                 </a:solidFill>
@@ -5382,7 +5382,7 @@
           </a:p>
           <a:p>
             <a:pPr>
-              <a:defRPr sz="1400">
+              <a:defRPr sz="1550">
                 <a:solidFill>
                   <a:srgbClr val="16161A"/>
                 </a:solidFill>
@@ -5461,7 +5461,7 @@
           <a:lstStyle/>
           <a:p>
             <a:pPr>
-              <a:defRPr sz="1000">
+              <a:defRPr sz="1050">
                 <a:solidFill>
                   <a:srgbClr val="736E62"/>
                 </a:solidFill>
@@ -5497,7 +5497,7 @@
           <a:lstStyle/>
           <a:p>
             <a:pPr algn="r">
-              <a:defRPr sz="1000">
+              <a:defRPr sz="1050">
                 <a:solidFill>
                   <a:srgbClr val="736E62"/>
                 </a:solidFill>
@@ -5544,7 +5544,7 @@
         </p:nvSpPr>
         <p:spPr>
           <a:xfrm>
-            <a:off x="731520" y="548640"/>
+            <a:off x="731520" y="502920"/>
             <a:ext cx="10728655" cy="228600"/>
           </a:xfrm>
           <a:prstGeom prst="rect">
@@ -5559,7 +5559,7 @@
           <a:lstStyle/>
           <a:p>
             <a:pPr>
-              <a:defRPr sz="1050" b="1">
+              <a:defRPr sz="1100" b="1">
                 <a:solidFill>
                   <a:srgbClr val="2B59D9"/>
                 </a:solidFill>
@@ -5580,8 +5580,8 @@
         </p:nvSpPr>
         <p:spPr>
           <a:xfrm>
-            <a:off x="731520" y="822960"/>
-            <a:ext cx="10728655" cy="685800"/>
+            <a:off x="731520" y="777240"/>
+            <a:ext cx="10728655" cy="731520"/>
           </a:xfrm>
           <a:prstGeom prst="rect">
             <a:avLst/>
@@ -5595,7 +5595,7 @@
           <a:lstStyle/>
           <a:p>
             <a:pPr>
-              <a:defRPr sz="2600" b="1">
+              <a:defRPr sz="3000" b="1">
                 <a:solidFill>
                   <a:srgbClr val="16161A"/>
                 </a:solidFill>
@@ -5677,7 +5677,7 @@
               <a:spcAft>
                 <a:spcPts val="800"/>
               </a:spcAft>
-              <a:defRPr sz="1000" b="1">
+              <a:defRPr sz="1100" b="1">
                 <a:solidFill>
                   <a:srgbClr val="D99B26"/>
                 </a:solidFill>
@@ -5693,7 +5693,7 @@
               <a:spcAft>
                 <a:spcPts val="1000"/>
               </a:spcAft>
-              <a:defRPr sz="1800" b="1">
+              <a:defRPr sz="2000" b="1">
                 <a:solidFill>
                   <a:srgbClr val="16161A"/>
                 </a:solidFill>
@@ -5706,7 +5706,7 @@
           </a:p>
           <a:p>
             <a:pPr>
-              <a:defRPr sz="1250">
+              <a:defRPr sz="1350">
                 <a:solidFill>
                   <a:srgbClr val="454337"/>
                 </a:solidFill>
@@ -5788,7 +5788,7 @@
               <a:spcAft>
                 <a:spcPts val="800"/>
               </a:spcAft>
-              <a:defRPr sz="1000" b="1">
+              <a:defRPr sz="1100" b="1">
                 <a:solidFill>
                   <a:srgbClr val="2B59D9"/>
                 </a:solidFill>
@@ -5804,7 +5804,7 @@
               <a:spcAft>
                 <a:spcPts val="1000"/>
               </a:spcAft>
-              <a:defRPr sz="1800" b="1">
+              <a:defRPr sz="2000" b="1">
                 <a:solidFill>
                   <a:srgbClr val="16161A"/>
                 </a:solidFill>
@@ -5817,7 +5817,7 @@
           </a:p>
           <a:p>
             <a:pPr>
-              <a:defRPr sz="1250">
+              <a:defRPr sz="1350">
                 <a:solidFill>
                   <a:srgbClr val="454337"/>
                 </a:solidFill>
@@ -5899,7 +5899,7 @@
               <a:spcAft>
                 <a:spcPts val="800"/>
               </a:spcAft>
-              <a:defRPr sz="1000" b="1">
+              <a:defRPr sz="1100" b="1">
                 <a:solidFill>
                   <a:srgbClr val="2B59D9"/>
                 </a:solidFill>
@@ -5915,7 +5915,7 @@
               <a:spcAft>
                 <a:spcPts val="1000"/>
               </a:spcAft>
-              <a:defRPr sz="1800" b="1">
+              <a:defRPr sz="2000" b="1">
                 <a:solidFill>
                   <a:srgbClr val="16161A"/>
                 </a:solidFill>
@@ -5928,7 +5928,7 @@
           </a:p>
           <a:p>
             <a:pPr>
-              <a:defRPr sz="1250">
+              <a:defRPr sz="1350">
                 <a:solidFill>
                   <a:srgbClr val="454337"/>
                 </a:solidFill>
@@ -6007,7 +6007,7 @@
           <a:lstStyle/>
           <a:p>
             <a:pPr>
-              <a:defRPr sz="1250" b="1">
+              <a:defRPr sz="1500" b="1">
                 <a:solidFill>
                   <a:srgbClr val="16161A"/>
                 </a:solidFill>
@@ -6023,7 +6023,7 @@
               <a:spcBef>
                 <a:spcPts val="200"/>
               </a:spcBef>
-              <a:defRPr sz="1000">
+              <a:defRPr sz="1200">
                 <a:solidFill>
                   <a:srgbClr val="454337"/>
                 </a:solidFill>
@@ -6059,7 +6059,7 @@
           <a:lstStyle/>
           <a:p>
             <a:pPr>
-              <a:defRPr sz="1250" b="1">
+              <a:defRPr sz="1500" b="1">
                 <a:solidFill>
                   <a:srgbClr val="16161A"/>
                 </a:solidFill>
@@ -6075,7 +6075,7 @@
               <a:spcBef>
                 <a:spcPts val="200"/>
               </a:spcBef>
-              <a:defRPr sz="1000">
+              <a:defRPr sz="1200">
                 <a:solidFill>
                   <a:srgbClr val="454337"/>
                 </a:solidFill>
@@ -6111,7 +6111,7 @@
           <a:lstStyle/>
           <a:p>
             <a:pPr>
-              <a:defRPr sz="1250" b="1">
+              <a:defRPr sz="1500" b="1">
                 <a:solidFill>
                   <a:srgbClr val="16161A"/>
                 </a:solidFill>
@@ -6127,7 +6127,7 @@
               <a:spcBef>
                 <a:spcPts val="200"/>
               </a:spcBef>
-              <a:defRPr sz="1000">
+              <a:defRPr sz="1200">
                 <a:solidFill>
                   <a:srgbClr val="454337"/>
                 </a:solidFill>
@@ -6163,7 +6163,7 @@
           <a:lstStyle/>
           <a:p>
             <a:pPr>
-              <a:defRPr sz="1250" b="1">
+              <a:defRPr sz="1500" b="1">
                 <a:solidFill>
                   <a:srgbClr val="16161A"/>
                 </a:solidFill>
@@ -6179,7 +6179,7 @@
               <a:spcBef>
                 <a:spcPts val="200"/>
               </a:spcBef>
-              <a:defRPr sz="1000">
+              <a:defRPr sz="1200">
                 <a:solidFill>
                   <a:srgbClr val="454337"/>
                 </a:solidFill>
@@ -6258,7 +6258,7 @@
           <a:lstStyle/>
           <a:p>
             <a:pPr>
-              <a:defRPr sz="1000">
+              <a:defRPr sz="1050">
                 <a:solidFill>
                   <a:srgbClr val="736E62"/>
                 </a:solidFill>
@@ -6294,7 +6294,7 @@
           <a:lstStyle/>
           <a:p>
             <a:pPr algn="r">
-              <a:defRPr sz="1000">
+              <a:defRPr sz="1050">
                 <a:solidFill>
                   <a:srgbClr val="736E62"/>
                 </a:solidFill>
@@ -6341,7 +6341,7 @@
         </p:nvSpPr>
         <p:spPr>
           <a:xfrm>
-            <a:off x="731520" y="548640"/>
+            <a:off x="731520" y="502920"/>
             <a:ext cx="10728655" cy="228600"/>
           </a:xfrm>
           <a:prstGeom prst="rect">
@@ -6356,7 +6356,7 @@
           <a:lstStyle/>
           <a:p>
             <a:pPr>
-              <a:defRPr sz="1050" b="1">
+              <a:defRPr sz="1100" b="1">
                 <a:solidFill>
                   <a:srgbClr val="2B59D9"/>
                 </a:solidFill>
@@ -6377,8 +6377,8 @@
         </p:nvSpPr>
         <p:spPr>
           <a:xfrm>
-            <a:off x="731520" y="822960"/>
-            <a:ext cx="10728655" cy="685800"/>
+            <a:off x="731520" y="777240"/>
+            <a:ext cx="10728655" cy="731520"/>
           </a:xfrm>
           <a:prstGeom prst="rect">
             <a:avLst/>
@@ -6392,7 +6392,7 @@
           <a:lstStyle/>
           <a:p>
             <a:pPr>
-              <a:defRPr sz="2600" b="1">
+              <a:defRPr sz="3000" b="1">
                 <a:solidFill>
                   <a:srgbClr val="16161A"/>
                 </a:solidFill>
@@ -6490,7 +6490,7 @@
               <a:spcAft>
                 <a:spcPts val="1000"/>
               </a:spcAft>
-              <a:defRPr sz="1250">
+              <a:defRPr sz="1350">
                 <a:solidFill>
                   <a:srgbClr val="454337"/>
                 </a:solidFill>
@@ -6506,7 +6506,7 @@
               <a:spcAft>
                 <a:spcPts val="1000"/>
               </a:spcAft>
-              <a:defRPr sz="1250">
+              <a:defRPr sz="1350">
                 <a:solidFill>
                   <a:srgbClr val="454337"/>
                 </a:solidFill>
@@ -6522,7 +6522,7 @@
               <a:spcAft>
                 <a:spcPts val="1000"/>
               </a:spcAft>
-              <a:defRPr sz="1250">
+              <a:defRPr sz="1350">
                 <a:solidFill>
                   <a:srgbClr val="454337"/>
                 </a:solidFill>
@@ -6538,7 +6538,7 @@
               <a:spcAft>
                 <a:spcPts val="1000"/>
               </a:spcAft>
-              <a:defRPr sz="1250">
+              <a:defRPr sz="1350">
                 <a:solidFill>
                   <a:srgbClr val="454337"/>
                 </a:solidFill>
@@ -6636,7 +6636,7 @@
               <a:spcAft>
                 <a:spcPts val="1000"/>
               </a:spcAft>
-              <a:defRPr sz="1250">
+              <a:defRPr sz="1350">
                 <a:solidFill>
                   <a:srgbClr val="454337"/>
                 </a:solidFill>
@@ -6652,7 +6652,7 @@
               <a:spcAft>
                 <a:spcPts val="1000"/>
               </a:spcAft>
-              <a:defRPr sz="1250">
+              <a:defRPr sz="1350">
                 <a:solidFill>
                   <a:srgbClr val="454337"/>
                 </a:solidFill>
@@ -6668,7 +6668,7 @@
               <a:spcAft>
                 <a:spcPts val="1000"/>
               </a:spcAft>
-              <a:defRPr sz="1250">
+              <a:defRPr sz="1350">
                 <a:solidFill>
                   <a:srgbClr val="454337"/>
                 </a:solidFill>
@@ -6684,7 +6684,7 @@
               <a:spcAft>
                 <a:spcPts val="1000"/>
               </a:spcAft>
-              <a:defRPr sz="1250">
+              <a:defRPr sz="1350">
                 <a:solidFill>
                   <a:srgbClr val="454337"/>
                 </a:solidFill>
@@ -6763,7 +6763,7 @@
           <a:lstStyle/>
           <a:p>
             <a:pPr>
-              <a:defRPr sz="1000">
+              <a:defRPr sz="1050">
                 <a:solidFill>
                   <a:srgbClr val="736E62"/>
                 </a:solidFill>
@@ -6799,7 +6799,7 @@
           <a:lstStyle/>
           <a:p>
             <a:pPr algn="r">
-              <a:defRPr sz="1000">
+              <a:defRPr sz="1050">
                 <a:solidFill>
                   <a:srgbClr val="736E62"/>
                 </a:solidFill>
@@ -6846,7 +6846,7 @@
         </p:nvSpPr>
         <p:spPr>
           <a:xfrm>
-            <a:off x="731520" y="548640"/>
+            <a:off x="731520" y="502920"/>
             <a:ext cx="10728655" cy="228600"/>
           </a:xfrm>
           <a:prstGeom prst="rect">
@@ -6861,7 +6861,7 @@
           <a:lstStyle/>
           <a:p>
             <a:pPr>
-              <a:defRPr sz="1050" b="1">
+              <a:defRPr sz="1100" b="1">
                 <a:solidFill>
                   <a:srgbClr val="2B59D9"/>
                 </a:solidFill>
@@ -6882,8 +6882,8 @@
         </p:nvSpPr>
         <p:spPr>
           <a:xfrm>
-            <a:off x="731520" y="822960"/>
-            <a:ext cx="10728655" cy="685800"/>
+            <a:off x="731520" y="777240"/>
+            <a:ext cx="10728655" cy="731520"/>
           </a:xfrm>
           <a:prstGeom prst="rect">
             <a:avLst/>
@@ -6897,7 +6897,7 @@
           <a:lstStyle/>
           <a:p>
             <a:pPr>
-              <a:defRPr sz="2600" b="1">
+              <a:defRPr sz="3000" b="1">
                 <a:solidFill>
                   <a:srgbClr val="16161A"/>
                 </a:solidFill>
@@ -6979,7 +6979,7 @@
               <a:spcAft>
                 <a:spcPts val="1000"/>
               </a:spcAft>
-              <a:defRPr sz="1050" b="1">
+              <a:defRPr sz="1100" b="1">
                 <a:solidFill>
                   <a:srgbClr val="2B59D9"/>
                 </a:solidFill>
@@ -6995,7 +6995,7 @@
               <a:spcAft>
                 <a:spcPts val="1200"/>
               </a:spcAft>
-              <a:defRPr sz="1800" b="1">
+              <a:defRPr sz="2000" b="1">
                 <a:solidFill>
                   <a:srgbClr val="16161A"/>
                 </a:solidFill>
@@ -7008,7 +7008,7 @@
           </a:p>
           <a:p>
             <a:pPr>
-              <a:defRPr sz="1300">
+              <a:defRPr sz="1400">
                 <a:solidFill>
                   <a:srgbClr val="454337"/>
                 </a:solidFill>
@@ -7090,7 +7090,7 @@
               <a:spcAft>
                 <a:spcPts val="1000"/>
               </a:spcAft>
-              <a:defRPr sz="1050" b="1">
+              <a:defRPr sz="1100" b="1">
                 <a:solidFill>
                   <a:srgbClr val="2B59D9"/>
                 </a:solidFill>
@@ -7106,7 +7106,7 @@
               <a:spcAft>
                 <a:spcPts val="1200"/>
               </a:spcAft>
-              <a:defRPr sz="1800" b="1">
+              <a:defRPr sz="2000" b="1">
                 <a:solidFill>
                   <a:srgbClr val="16161A"/>
                 </a:solidFill>
@@ -7119,7 +7119,7 @@
           </a:p>
           <a:p>
             <a:pPr>
-              <a:defRPr sz="1300">
+              <a:defRPr sz="1400">
                 <a:solidFill>
                   <a:srgbClr val="454337"/>
                 </a:solidFill>
@@ -7201,7 +7201,7 @@
               <a:spcAft>
                 <a:spcPts val="1000"/>
               </a:spcAft>
-              <a:defRPr sz="1050" b="1">
+              <a:defRPr sz="1100" b="1">
                 <a:solidFill>
                   <a:srgbClr val="2B59D9"/>
                 </a:solidFill>
@@ -7217,7 +7217,7 @@
               <a:spcAft>
                 <a:spcPts val="1200"/>
               </a:spcAft>
-              <a:defRPr sz="1800" b="1">
+              <a:defRPr sz="2000" b="1">
                 <a:solidFill>
                   <a:srgbClr val="16161A"/>
                 </a:solidFill>
@@ -7230,7 +7230,7 @@
           </a:p>
           <a:p>
             <a:pPr>
-              <a:defRPr sz="1300">
+              <a:defRPr sz="1400">
                 <a:solidFill>
                   <a:srgbClr val="454337"/>
                 </a:solidFill>
@@ -7309,7 +7309,7 @@
           <a:lstStyle/>
           <a:p>
             <a:pPr>
-              <a:defRPr sz="1000">
+              <a:defRPr sz="1050">
                 <a:solidFill>
                   <a:srgbClr val="736E62"/>
                 </a:solidFill>
@@ -7345,7 +7345,7 @@
           <a:lstStyle/>
           <a:p>
             <a:pPr algn="r">
-              <a:defRPr sz="1000">
+              <a:defRPr sz="1050">
                 <a:solidFill>
                   <a:srgbClr val="736E62"/>
                 </a:solidFill>
@@ -7392,7 +7392,7 @@
         </p:nvSpPr>
         <p:spPr>
           <a:xfrm>
-            <a:off x="731520" y="548640"/>
+            <a:off x="731520" y="502920"/>
             <a:ext cx="10728655" cy="228600"/>
           </a:xfrm>
           <a:prstGeom prst="rect">
@@ -7407,7 +7407,7 @@
           <a:lstStyle/>
           <a:p>
             <a:pPr>
-              <a:defRPr sz="1050" b="1">
+              <a:defRPr sz="1100" b="1">
                 <a:solidFill>
                   <a:srgbClr val="2B59D9"/>
                 </a:solidFill>
@@ -7428,8 +7428,8 @@
         </p:nvSpPr>
         <p:spPr>
           <a:xfrm>
-            <a:off x="731520" y="822960"/>
-            <a:ext cx="10728655" cy="685800"/>
+            <a:off x="731520" y="777240"/>
+            <a:ext cx="10728655" cy="731520"/>
           </a:xfrm>
           <a:prstGeom prst="rect">
             <a:avLst/>
@@ -7443,7 +7443,7 @@
           <a:lstStyle/>
           <a:p>
             <a:pPr>
-              <a:defRPr sz="2600" b="1">
+              <a:defRPr sz="3000" b="1">
                 <a:solidFill>
                   <a:srgbClr val="16161A"/>
                 </a:solidFill>
@@ -7541,7 +7541,7 @@
               <a:spcAft>
                 <a:spcPts val="1000"/>
               </a:spcAft>
-              <a:defRPr sz="1550">
+              <a:defRPr sz="1600">
                 <a:solidFill>
                   <a:srgbClr val="16161A"/>
                 </a:solidFill>
@@ -7554,7 +7554,7 @@
           </a:p>
           <a:p>
             <a:pPr>
-              <a:defRPr sz="1550">
+              <a:defRPr sz="1600">
                 <a:solidFill>
                   <a:srgbClr val="16161A"/>
                 </a:solidFill>
@@ -7633,7 +7633,7 @@
           <a:lstStyle/>
           <a:p>
             <a:pPr>
-              <a:defRPr sz="1800" b="1">
+              <a:defRPr sz="2000" b="1">
                 <a:solidFill>
                   <a:srgbClr val="16161A"/>
                 </a:solidFill>
@@ -7649,10 +7649,11 @@
               <a:spcBef>
                 <a:spcPts val="400"/>
               </a:spcBef>
-              <a:defRPr sz="1300">
+              <a:defRPr sz="1400">
                 <a:solidFill>
                   <a:srgbClr val="2B59D9"/>
                 </a:solidFill>
+                <a:latin typeface="Helvetica Neue"/>
               </a:defRPr>
             </a:pPr>
             <a:r>
@@ -7727,7 +7728,7 @@
           <a:lstStyle/>
           <a:p>
             <a:pPr>
-              <a:defRPr sz="1000">
+              <a:defRPr sz="1050">
                 <a:solidFill>
                   <a:srgbClr val="736E62"/>
                 </a:solidFill>
@@ -7763,7 +7764,7 @@
           <a:lstStyle/>
           <a:p>
             <a:pPr algn="r">
-              <a:defRPr sz="1000">
+              <a:defRPr sz="1050">
                 <a:solidFill>
                   <a:srgbClr val="736E62"/>
                 </a:solidFill>

--- a/Technology_Consultants_Who_to_Send_My_Way.pptx
+++ b/Technology_Consultants_Who_to_Send_My_Way.pptx
@@ -3134,7 +3134,7 @@
               </a:defRPr>
             </a:pPr>
             <a:r>
-              <a:t>TECHNOLOGY CONSULTANTS  ·  PARTNER REFERRAL GUIDE</a:t>
+              <a:t>TECHNOLOGY CONSULTANTS  ·  PRACTICE OVERVIEW &amp; REFERRAL GUIDE</a:t>
             </a:r>
           </a:p>
         </p:txBody>
@@ -3148,7 +3148,7 @@
         <p:spPr>
           <a:xfrm>
             <a:off x="731520" y="960120"/>
-            <a:ext cx="10728655" cy="1371600"/>
+            <a:ext cx="10728655" cy="685800"/>
           </a:xfrm>
           <a:prstGeom prst="rect">
             <a:avLst/>
@@ -3162,7 +3162,7 @@
           <a:lstStyle/>
           <a:p>
             <a:pPr>
-              <a:defRPr sz="4000" b="1">
+              <a:defRPr sz="3800" b="1">
                 <a:solidFill>
                   <a:srgbClr val="16161A"/>
                 </a:solidFill>
@@ -3170,7 +3170,7 @@
               </a:defRPr>
             </a:pPr>
             <a:r>
-              <a:t>We build technology around your people — not instead of them.</a:t>
+              <a:t>Who to Send My Way</a:t>
             </a:r>
           </a:p>
         </p:txBody>
@@ -3183,8 +3183,8 @@
         </p:nvSpPr>
         <p:spPr>
           <a:xfrm>
-            <a:off x="731520" y="2468880"/>
-            <a:ext cx="10728655" cy="822960"/>
+            <a:off x="731520" y="1691640"/>
+            <a:ext cx="10728655" cy="411480"/>
           </a:xfrm>
           <a:prstGeom prst="rect">
             <a:avLst/>
@@ -3198,7 +3198,7 @@
           <a:lstStyle/>
           <a:p>
             <a:pPr>
-              <a:defRPr sz="1600">
+              <a:defRPr sz="1800">
                 <a:solidFill>
                   <a:srgbClr val="454337"/>
                 </a:solidFill>
@@ -3206,7 +3206,7 @@
               </a:defRPr>
             </a:pPr>
             <a:r>
-              <a:t>We build the software that takes work off your team’s plate — from automated web applications to AI agents that answer phones, read paperwork, and run repetitive jobs with a person in the loop wherever money, trust, or judgment is on the line.</a:t>
+              <a:t>Partner Referral Guide &amp; Ideal Client Profile</a:t>
             </a:r>
           </a:p>
         </p:txBody>
@@ -3219,7 +3219,102 @@
         </p:nvSpPr>
         <p:spPr>
           <a:xfrm>
-            <a:off x="731520" y="3520440"/>
+            <a:off x="731520" y="2331720"/>
+            <a:ext cx="38100" cy="868680"/>
+          </a:xfrm>
+          <a:prstGeom prst="rect">
+            <a:avLst/>
+          </a:prstGeom>
+          <a:solidFill>
+            <a:srgbClr val="2B59D9"/>
+          </a:solidFill>
+          <a:ln>
+            <a:noFill/>
+          </a:ln>
+        </p:spPr>
+        <p:style>
+          <a:lnRef idx="1">
+            <a:schemeClr val="accent1"/>
+          </a:lnRef>
+          <a:fillRef idx="3">
+            <a:schemeClr val="accent1"/>
+          </a:fillRef>
+          <a:effectRef idx="2">
+            <a:schemeClr val="accent1"/>
+          </a:effectRef>
+          <a:fontRef idx="minor">
+            <a:schemeClr val="lt1"/>
+          </a:fontRef>
+        </p:style>
+        <p:txBody>
+          <a:bodyPr rtlCol="0" anchor="ctr"/>
+          <a:lstStyle/>
+          <a:p>
+            <a:pPr algn="ctr"/>
+          </a:p>
+        </p:txBody>
+      </p:sp>
+      <p:sp>
+        <p:nvSpPr>
+          <p:cNvPr id="6" name="TextBox 5"/>
+          <p:cNvSpPr txBox="1"/>
+          <p:nvPr/>
+        </p:nvSpPr>
+        <p:spPr>
+          <a:xfrm>
+            <a:off x="960120" y="2331720"/>
+            <a:ext cx="10500055" cy="868680"/>
+          </a:xfrm>
+          <a:prstGeom prst="rect">
+            <a:avLst/>
+          </a:prstGeom>
+          <a:noFill/>
+        </p:spPr>
+        <p:txBody>
+          <a:bodyPr wrap="square" lIns="0" rIns="0" tIns="0" bIns="0">
+            <a:spAutoFit/>
+          </a:bodyPr>
+          <a:lstStyle/>
+          <a:p>
+            <a:pPr>
+              <a:spcAft>
+                <a:spcPts val="400"/>
+              </a:spcAft>
+              <a:defRPr sz="1600" b="1" i="1">
+                <a:solidFill>
+                  <a:srgbClr val="16161A"/>
+                </a:solidFill>
+                <a:latin typeface="Helvetica Neue"/>
+              </a:defRPr>
+            </a:pPr>
+            <a:r>
+              <a:t>“We build technology around your people — not instead of them.”</a:t>
+            </a:r>
+          </a:p>
+          <a:p>
+            <a:pPr>
+              <a:defRPr sz="1300">
+                <a:solidFill>
+                  <a:srgbClr val="454337"/>
+                </a:solidFill>
+                <a:latin typeface="Helvetica Neue"/>
+              </a:defRPr>
+            </a:pPr>
+            <a:r>
+              <a:t>Custom React Web Apps  ·  Workday Finance &amp; ERP Integrations  ·  Human-in-the-Loop AI Agents</a:t>
+            </a:r>
+          </a:p>
+        </p:txBody>
+      </p:sp>
+      <p:sp>
+        <p:nvSpPr>
+          <p:cNvPr id="7" name="Rectangle 6"/>
+          <p:cNvSpPr/>
+          <p:nvPr/>
+        </p:nvSpPr>
+        <p:spPr>
+          <a:xfrm>
+            <a:off x="731520" y="3429000"/>
             <a:ext cx="10728655" cy="12700"/>
           </a:xfrm>
           <a:prstGeom prst="rect">
@@ -3256,13 +3351,13 @@
       </p:sp>
       <p:sp>
         <p:nvSpPr>
-          <p:cNvPr id="6" name="TextBox 5"/>
+          <p:cNvPr id="8" name="TextBox 7"/>
           <p:cNvSpPr txBox="1"/>
           <p:nvPr/>
         </p:nvSpPr>
         <p:spPr>
           <a:xfrm>
-            <a:off x="731520" y="3703320"/>
+            <a:off x="731520" y="3611880"/>
             <a:ext cx="5157216" cy="1280160"/>
           </a:xfrm>
           <a:prstGeom prst="rect">
@@ -3280,7 +3375,7 @@
               <a:spcAft>
                 <a:spcPts val="600"/>
               </a:spcAft>
-              <a:defRPr sz="1100" b="1">
+              <a:defRPr sz="1050" b="1">
                 <a:solidFill>
                   <a:srgbClr val="2B59D9"/>
                 </a:solidFill>
@@ -3288,59 +3383,7 @@
               </a:defRPr>
             </a:pPr>
             <a:r>
-              <a:t>CORE CAPABILITIES</a:t>
-            </a:r>
-          </a:p>
-          <a:p>
-            <a:pPr>
-              <a:defRPr sz="1400">
-                <a:solidFill>
-                  <a:srgbClr val="16161A"/>
-                </a:solidFill>
-                <a:latin typeface="Helvetica Neue"/>
-              </a:defRPr>
-            </a:pPr>
-            <a:r>
-              <a:t>Custom React &amp; TypeScript Web Apps  ·  Workday Finance &amp; Adaptive Planning Integrations  ·  Human-in-the-Loop (HITL) AI Agents</a:t>
-            </a:r>
-          </a:p>
-        </p:txBody>
-      </p:sp>
-      <p:sp>
-        <p:nvSpPr>
-          <p:cNvPr id="7" name="TextBox 6"/>
-          <p:cNvSpPr txBox="1"/>
-          <p:nvPr/>
-        </p:nvSpPr>
-        <p:spPr>
-          <a:xfrm>
-            <a:off x="6300216" y="3703320"/>
-            <a:ext cx="5157216" cy="1280160"/>
-          </a:xfrm>
-          <a:prstGeom prst="rect">
-            <a:avLst/>
-          </a:prstGeom>
-          <a:noFill/>
-        </p:spPr>
-        <p:txBody>
-          <a:bodyPr wrap="square" lIns="0" rIns="0" tIns="0" bIns="0">
-            <a:spAutoFit/>
-          </a:bodyPr>
-          <a:lstStyle/>
-          <a:p>
-            <a:pPr>
-              <a:spcAft>
-                <a:spcPts val="600"/>
-              </a:spcAft>
-              <a:defRPr sz="1100" b="1">
-                <a:solidFill>
-                  <a:srgbClr val="D99B26"/>
-                </a:solidFill>
-                <a:latin typeface="Helvetica Neue"/>
-              </a:defRPr>
-            </a:pPr>
-            <a:r>
-              <a:t>PRACTICE LEADERSHIP</a:t>
+              <a:t>PRESENTED BY</a:t>
             </a:r>
           </a:p>
           <a:p>
@@ -3371,16 +3414,80 @@
             <a:r>
               <a:t>BS Electrical Engineering (UC San Diego)  ·  MBA (NYU Stern)</a:t>
             </a:r>
-            <a:br/>
-            <a:r>
-              <a:t>Operating in San Diego, CA &amp; Tijuana, MX</a:t>
-            </a:r>
-          </a:p>
-        </p:txBody>
-      </p:sp>
-      <p:sp>
-        <p:nvSpPr>
-          <p:cNvPr id="8" name="Rectangle 7"/>
+          </a:p>
+        </p:txBody>
+      </p:sp>
+      <p:sp>
+        <p:nvSpPr>
+          <p:cNvPr id="9" name="TextBox 8"/>
+          <p:cNvSpPr txBox="1"/>
+          <p:nvPr/>
+        </p:nvSpPr>
+        <p:spPr>
+          <a:xfrm>
+            <a:off x="6300216" y="3611880"/>
+            <a:ext cx="5157216" cy="1280160"/>
+          </a:xfrm>
+          <a:prstGeom prst="rect">
+            <a:avLst/>
+          </a:prstGeom>
+          <a:noFill/>
+        </p:spPr>
+        <p:txBody>
+          <a:bodyPr wrap="square" lIns="0" rIns="0" tIns="0" bIns="0">
+            <a:spAutoFit/>
+          </a:bodyPr>
+          <a:lstStyle/>
+          <a:p>
+            <a:pPr>
+              <a:spcAft>
+                <a:spcPts val="600"/>
+              </a:spcAft>
+              <a:defRPr sz="1050" b="1">
+                <a:solidFill>
+                  <a:srgbClr val="D99B26"/>
+                </a:solidFill>
+                <a:latin typeface="Helvetica Neue"/>
+              </a:defRPr>
+            </a:pPr>
+            <a:r>
+              <a:t>PRACTICE LOCATION &amp; CONTACT</a:t>
+            </a:r>
+          </a:p>
+          <a:p>
+            <a:pPr>
+              <a:spcAft>
+                <a:spcPts val="400"/>
+              </a:spcAft>
+              <a:defRPr sz="1400" b="1">
+                <a:solidFill>
+                  <a:srgbClr val="16161A"/>
+                </a:solidFill>
+                <a:latin typeface="Helvetica Neue"/>
+              </a:defRPr>
+            </a:pPr>
+            <a:r>
+              <a:t>San Diego, CA &amp; Tijuana, MX</a:t>
+            </a:r>
+          </a:p>
+          <a:p>
+            <a:pPr>
+              <a:defRPr sz="1250">
+                <a:solidFill>
+                  <a:srgbClr val="2B59D9"/>
+                </a:solidFill>
+                <a:latin typeface="Helvetica Neue"/>
+              </a:defRPr>
+            </a:pPr>
+            <a:r>
+              <a:t>technologyconsultants.ventures</a:t>
+            </a:r>
+          </a:p>
+        </p:txBody>
+      </p:sp>
+      <p:sp>
+        <p:nvSpPr>
+          <p:cNvPr id="10" name="Rectangle 9"/>
           <p:cNvSpPr/>
           <p:nvPr/>
         </p:nvSpPr>
@@ -3423,7 +3530,7 @@
       </p:sp>
       <p:sp>
         <p:nvSpPr>
-          <p:cNvPr id="9" name="TextBox 8"/>
+          <p:cNvPr id="11" name="TextBox 10"/>
           <p:cNvSpPr txBox="1"/>
           <p:nvPr/>
         </p:nvSpPr>
@@ -3475,7 +3582,7 @@
       </p:sp>
       <p:sp>
         <p:nvSpPr>
-          <p:cNvPr id="10" name="TextBox 9"/>
+          <p:cNvPr id="12" name="TextBox 11"/>
           <p:cNvSpPr txBox="1"/>
           <p:nvPr/>
         </p:nvSpPr>
@@ -3527,7 +3634,7 @@
       </p:sp>
       <p:sp>
         <p:nvSpPr>
-          <p:cNvPr id="11" name="TextBox 10"/>
+          <p:cNvPr id="13" name="TextBox 12"/>
           <p:cNvSpPr txBox="1"/>
           <p:nvPr/>
         </p:nvSpPr>
@@ -3579,7 +3686,7 @@
       </p:sp>
       <p:sp>
         <p:nvSpPr>
-          <p:cNvPr id="12" name="TextBox 11"/>
+          <p:cNvPr id="14" name="TextBox 13"/>
           <p:cNvSpPr txBox="1"/>
           <p:nvPr/>
         </p:nvSpPr>
@@ -3631,7 +3738,7 @@
       </p:sp>
       <p:sp>
         <p:nvSpPr>
-          <p:cNvPr id="13" name="Rectangle 12"/>
+          <p:cNvPr id="15" name="Rectangle 14"/>
           <p:cNvSpPr/>
           <p:nvPr/>
         </p:nvSpPr>
@@ -3674,7 +3781,7 @@
       </p:sp>
       <p:sp>
         <p:nvSpPr>
-          <p:cNvPr id="14" name="TextBox 13"/>
+          <p:cNvPr id="16" name="TextBox 15"/>
           <p:cNvSpPr txBox="1"/>
           <p:nvPr/>
         </p:nvSpPr>
@@ -3710,7 +3817,7 @@
       </p:sp>
       <p:sp>
         <p:nvSpPr>
-          <p:cNvPr id="15" name="TextBox 14"/>
+          <p:cNvPr id="17" name="TextBox 16"/>
           <p:cNvSpPr txBox="1"/>
           <p:nvPr/>
         </p:nvSpPr>
@@ -3829,7 +3936,7 @@
           <a:lstStyle/>
           <a:p>
             <a:pPr>
-              <a:defRPr sz="3000" b="1">
+              <a:defRPr sz="2800" b="1">
                 <a:solidFill>
                   <a:srgbClr val="16161A"/>
                 </a:solidFill>
@@ -4528,7 +4635,7 @@
           <a:lstStyle/>
           <a:p>
             <a:pPr>
-              <a:defRPr sz="3000" b="1">
+              <a:defRPr sz="2800" b="1">
                 <a:solidFill>
                   <a:srgbClr val="16161A"/>
                 </a:solidFill>
@@ -5097,7 +5204,7 @@
           <a:lstStyle/>
           <a:p>
             <a:pPr>
-              <a:defRPr sz="3000" b="1">
+              <a:defRPr sz="2800" b="1">
                 <a:solidFill>
                   <a:srgbClr val="16161A"/>
                 </a:solidFill>
@@ -5595,7 +5702,7 @@
           <a:lstStyle/>
           <a:p>
             <a:pPr>
-              <a:defRPr sz="3000" b="1">
+              <a:defRPr sz="2800" b="1">
                 <a:solidFill>
                   <a:srgbClr val="16161A"/>
                 </a:solidFill>
@@ -6392,7 +6499,7 @@
           <a:lstStyle/>
           <a:p>
             <a:pPr>
-              <a:defRPr sz="3000" b="1">
+              <a:defRPr sz="2800" b="1">
                 <a:solidFill>
                   <a:srgbClr val="16161A"/>
                 </a:solidFill>
@@ -6897,7 +7004,7 @@
           <a:lstStyle/>
           <a:p>
             <a:pPr>
-              <a:defRPr sz="3000" b="1">
+              <a:defRPr sz="2800" b="1">
                 <a:solidFill>
                   <a:srgbClr val="16161A"/>
                 </a:solidFill>
@@ -7443,7 +7550,7 @@
           <a:lstStyle/>
           <a:p>
             <a:pPr>
-              <a:defRPr sz="3000" b="1">
+              <a:defRPr sz="2800" b="1">
                 <a:solidFill>
                   <a:srgbClr val="16161A"/>
                 </a:solidFill>

--- a/Technology_Consultants_Who_to_Send_My_Way.pptx
+++ b/Technology_Consultants_Who_to_Send_My_Way.pptx
@@ -3375,7 +3375,7 @@
               <a:spcAft>
                 <a:spcPts val="600"/>
               </a:spcAft>
-              <a:defRPr sz="1050" b="1">
+              <a:defRPr sz="1100" b="1">
                 <a:solidFill>
                   <a:srgbClr val="2B59D9"/>
                 </a:solidFill>
@@ -3443,7 +3443,7 @@
               <a:spcAft>
                 <a:spcPts val="600"/>
               </a:spcAft>
-              <a:defRPr sz="1050" b="1">
+              <a:defRPr sz="1100" b="1">
                 <a:solidFill>
                   <a:srgbClr val="D99B26"/>
                 </a:solidFill>
@@ -3944,7 +3944,7 @@
               </a:defRPr>
             </a:pPr>
             <a:r>
-              <a:t>Bridging Engineering Discipline with Business Outcomes</a:t>
+              <a:t>Custom Web Apps, Enterprise Integrations &amp; AI Agents</a:t>
             </a:r>
           </a:p>
         </p:txBody>
@@ -4643,7 +4643,7 @@
               </a:defRPr>
             </a:pPr>
             <a:r>
-              <a:t>Who Benefits Most From Our Practice?</a:t>
+              <a:t>Target Organizations &amp; Key Decision Makers</a:t>
             </a:r>
           </a:p>
         </p:txBody>
@@ -5212,7 +5212,7 @@
               </a:defRPr>
             </a:pPr>
             <a:r>
-              <a:t>What Prospects Say Right Before They Need Us</a:t>
+              <a:t>Operational Trigger Signals That Indicate a Fit</a:t>
             </a:r>
           </a:p>
         </p:txBody>
@@ -5710,7 +5710,7 @@
               </a:defRPr>
             </a:pPr>
             <a:r>
-              <a:t>Tested Against Real Operational Systems</a:t>
+              <a:t>Live Enterprise Integrations &amp; Proprietary Products</a:t>
             </a:r>
           </a:p>
         </p:txBody>
@@ -6507,7 +6507,7 @@
               </a:defRPr>
             </a:pPr>
             <a:r>
-              <a:t>Who is NOT a Fit? (Protects Referral Quality)</a:t>
+              <a:t>Unsuitable Projects That We Politely Pass On</a:t>
             </a:r>
           </a:p>
         </p:txBody>
@@ -7012,7 +7012,7 @@
               </a:defRPr>
             </a:pPr>
             <a:r>
-              <a:t>Flexible Engagement Models for Clients</a:t>
+              <a:t>Sprint, Project, and Retainer Engagement Options</a:t>
             </a:r>
           </a:p>
         </p:txBody>
@@ -7558,7 +7558,7 @@
               </a:defRPr>
             </a:pPr>
             <a:r>
-              <a:t>How to Make the Introduction</a:t>
+              <a:t>Recommended Partner Email Introduction Template</a:t>
             </a:r>
           </a:p>
         </p:txBody>
